--- a/downloads/presentations/modules/pmg-310.pptx
+++ b/downloads/presentations/modules/pmg-310.pptx
@@ -3626,13 +3626,11 @@
             </a:avLst>
           </a:prstGeom>
           <a:solidFill>
-            <a:srgbClr val="FFFFFF">
-              <a:alpha val="88000"/>
-            </a:srgbClr>
+            <a:srgbClr val="FFFFFF"/>
           </a:solidFill>
           <a:ln w="12700">
             <a:solidFill>
-              <a:srgbClr val="D6E8F2"/>
+              <a:srgbClr val="B9D7E6"/>
             </a:solidFill>
             <a:prstDash val="solid"/>
           </a:ln>
@@ -3640,30 +3638,42 @@
       </p:sp>
       <p:sp>
         <p:nvSpPr>
-          <p:cNvPr id="14" name="Shape 12"/>
-          <p:cNvSpPr/>
-          <p:nvPr/>
-        </p:nvSpPr>
-        <p:spPr>
-          <a:xfrm>
-            <a:off x="7927848" y="3319272"/>
-            <a:ext cx="792480" cy="749808"/>
-          </a:xfrm>
-          <a:prstGeom prst="roundRect">
-            <a:avLst>
-              <a:gd name="adj" fmla="val 14634"/>
-            </a:avLst>
-          </a:prstGeom>
-          <a:solidFill>
-            <a:srgbClr val="0068B7"/>
-          </a:solidFill>
-          <a:ln w="12700">
-            <a:solidFill>
-              <a:srgbClr val="0068B7"/>
-            </a:solidFill>
-            <a:prstDash val="solid"/>
-          </a:ln>
-        </p:spPr>
+          <p:cNvPr id="14" name="Text 12"/>
+          <p:cNvSpPr/>
+          <p:nvPr/>
+        </p:nvSpPr>
+        <p:spPr>
+          <a:xfrm>
+            <a:off x="7799832" y="2935224"/>
+            <a:ext cx="3145536" cy="256032"/>
+          </a:xfrm>
+          <a:prstGeom prst="rect">
+            <a:avLst/>
+          </a:prstGeom>
+          <a:noFill/>
+          <a:ln/>
+        </p:spPr>
+        <p:txBody>
+          <a:bodyPr wrap="square" lIns="0" tIns="0" rIns="0" bIns="0" rtlCol="0" anchor="ctr"/>
+          <a:lstStyle/>
+          <a:p>
+            <a:pPr indent="0" marL="0">
+              <a:buNone/>
+            </a:pPr>
+            <a:r>
+              <a:rPr lang="en-US" sz="1300" b="1" dirty="0">
+                <a:solidFill>
+                  <a:srgbClr val="0068B7"/>
+                </a:solidFill>
+                <a:latin typeface="Aptos" pitchFamily="34" charset="0"/>
+                <a:ea typeface="Aptos" pitchFamily="34" charset="-122"/>
+                <a:cs typeface="Aptos" pitchFamily="34" charset="-120"/>
+              </a:rPr>
+              <a:t>Concept checkpoints</a:t>
+            </a:r>
+            <a:endParaRPr lang="en-US" sz="1300" dirty="0"/>
+          </a:p>
+        </p:txBody>
       </p:sp>
       <p:sp>
         <p:nvSpPr>
@@ -3673,240 +3683,67 @@
         </p:nvSpPr>
         <p:spPr>
           <a:xfrm>
-            <a:off x="8001000" y="3511296"/>
-            <a:ext cx="646176" cy="310896"/>
-          </a:xfrm>
-          <a:prstGeom prst="rect">
-            <a:avLst/>
-          </a:prstGeom>
-          <a:noFill/>
-          <a:ln/>
-        </p:spPr>
-        <p:txBody>
-          <a:bodyPr wrap="square" lIns="0" tIns="0" rIns="0" bIns="0" rtlCol="0" anchor="ctr">
+            <a:off x="7818120" y="3300984"/>
+            <a:ext cx="3090672" cy="877824"/>
+          </a:xfrm>
+          <a:prstGeom prst="rect">
+            <a:avLst/>
+          </a:prstGeom>
+          <a:noFill/>
+          <a:ln/>
+        </p:spPr>
+        <p:txBody>
+          <a:bodyPr wrap="square" lIns="254" tIns="254" rIns="254" bIns="254" rtlCol="0" anchor="t">
             <a:normAutofit/>
           </a:bodyPr>
           <a:lstStyle/>
           <a:p>
-            <a:pPr algn="ctr" indent="0" marL="0">
-              <a:buNone/>
-            </a:pPr>
-            <a:r>
-              <a:rPr lang="en-US" sz="1500" b="1" dirty="0">
-                <a:solidFill>
-                  <a:srgbClr val="FFFFFF"/>
-                </a:solidFill>
-                <a:latin typeface="Aptos" pitchFamily="34" charset="0"/>
-                <a:ea typeface="Aptos" pitchFamily="34" charset="-122"/>
-                <a:cs typeface="Aptos" pitchFamily="34" charset="-120"/>
-              </a:rPr>
-              <a:t>Plan</a:t>
-            </a:r>
-            <a:endParaRPr lang="en-US" sz="1500" dirty="0"/>
+            <a:r>
+              <a:rPr lang="en-US" sz="1380" dirty="0">
+                <a:solidFill>
+                  <a:srgbClr val="17364A"/>
+                </a:solidFill>
+                <a:latin typeface="Aptos" pitchFamily="34" charset="0"/>
+                <a:ea typeface="Aptos" pitchFamily="34" charset="-122"/>
+                <a:cs typeface="Aptos" pitchFamily="34" charset="-120"/>
+              </a:rPr>
+              <a:t>A public health agency is preparing to use AI in a workflow related to connecting AI.</a:t>
+            </a:r>
+            <a:endParaRPr lang="en-US" sz="1380" dirty="0"/>
+          </a:p>
+          <a:p>
+            <a:r>
+              <a:rPr lang="en-US" sz="1380" dirty="0">
+                <a:solidFill>
+                  <a:srgbClr val="17364A"/>
+                </a:solidFill>
+                <a:latin typeface="Aptos" pitchFamily="34" charset="0"/>
+                <a:ea typeface="Aptos" pitchFamily="34" charset="-122"/>
+                <a:cs typeface="Aptos" pitchFamily="34" charset="-120"/>
+              </a:rPr>
+              <a:t>The project team initially treats the tool as a helpful efficiency aid, but governance.</a:t>
+            </a:r>
+            <a:endParaRPr lang="en-US" sz="1380" dirty="0"/>
+          </a:p>
+          <a:p>
+            <a:r>
+              <a:rPr lang="en-US" sz="1380" dirty="0">
+                <a:solidFill>
+                  <a:srgbClr val="17364A"/>
+                </a:solidFill>
+                <a:latin typeface="Aptos" pitchFamily="34" charset="0"/>
+                <a:ea typeface="Aptos" pitchFamily="34" charset="-122"/>
+                <a:cs typeface="Aptos" pitchFamily="34" charset="-120"/>
+              </a:rPr>
+              <a:t>The agency responds by creating a clear artifact that defines intended use, prohibited.</a:t>
+            </a:r>
+            <a:endParaRPr lang="en-US" sz="1380" dirty="0"/>
           </a:p>
         </p:txBody>
       </p:sp>
       <p:sp>
         <p:nvSpPr>
           <p:cNvPr id="16" name="Shape 14"/>
-          <p:cNvSpPr/>
-          <p:nvPr/>
-        </p:nvSpPr>
-        <p:spPr>
-          <a:xfrm>
-            <a:off x="8976360" y="3319272"/>
-            <a:ext cx="792480" cy="749808"/>
-          </a:xfrm>
-          <a:prstGeom prst="roundRect">
-            <a:avLst>
-              <a:gd name="adj" fmla="val 14634"/>
-            </a:avLst>
-          </a:prstGeom>
-          <a:solidFill>
-            <a:srgbClr val="2F8A28"/>
-          </a:solidFill>
-          <a:ln w="12700">
-            <a:solidFill>
-              <a:srgbClr val="2F8A28"/>
-            </a:solidFill>
-            <a:prstDash val="solid"/>
-          </a:ln>
-        </p:spPr>
-      </p:sp>
-      <p:sp>
-        <p:nvSpPr>
-          <p:cNvPr id="17" name="Text 15"/>
-          <p:cNvSpPr/>
-          <p:nvPr/>
-        </p:nvSpPr>
-        <p:spPr>
-          <a:xfrm>
-            <a:off x="9049512" y="3511296"/>
-            <a:ext cx="646176" cy="310896"/>
-          </a:xfrm>
-          <a:prstGeom prst="rect">
-            <a:avLst/>
-          </a:prstGeom>
-          <a:noFill/>
-          <a:ln/>
-        </p:spPr>
-        <p:txBody>
-          <a:bodyPr wrap="square" lIns="0" tIns="0" rIns="0" bIns="0" rtlCol="0" anchor="ctr">
-            <a:normAutofit/>
-          </a:bodyPr>
-          <a:lstStyle/>
-          <a:p>
-            <a:pPr algn="ctr" indent="0" marL="0">
-              <a:buNone/>
-            </a:pPr>
-            <a:r>
-              <a:rPr lang="en-US" sz="1500" b="1" dirty="0">
-                <a:solidFill>
-                  <a:srgbClr val="FFFFFF"/>
-                </a:solidFill>
-                <a:latin typeface="Aptos" pitchFamily="34" charset="0"/>
-                <a:ea typeface="Aptos" pitchFamily="34" charset="-122"/>
-                <a:cs typeface="Aptos" pitchFamily="34" charset="-120"/>
-              </a:rPr>
-              <a:t>Do</a:t>
-            </a:r>
-            <a:endParaRPr lang="en-US" sz="1500" dirty="0"/>
-          </a:p>
-        </p:txBody>
-      </p:sp>
-      <p:sp>
-        <p:nvSpPr>
-          <p:cNvPr id="18" name="Shape 16"/>
-          <p:cNvSpPr/>
-          <p:nvPr/>
-        </p:nvSpPr>
-        <p:spPr>
-          <a:xfrm>
-            <a:off x="10024872" y="3319272"/>
-            <a:ext cx="792480" cy="749808"/>
-          </a:xfrm>
-          <a:prstGeom prst="roundRect">
-            <a:avLst>
-              <a:gd name="adj" fmla="val 14634"/>
-            </a:avLst>
-          </a:prstGeom>
-          <a:solidFill>
-            <a:srgbClr val="D69A2D"/>
-          </a:solidFill>
-          <a:ln w="12700">
-            <a:solidFill>
-              <a:srgbClr val="D69A2D"/>
-            </a:solidFill>
-            <a:prstDash val="solid"/>
-          </a:ln>
-        </p:spPr>
-      </p:sp>
-      <p:sp>
-        <p:nvSpPr>
-          <p:cNvPr id="19" name="Text 17"/>
-          <p:cNvSpPr/>
-          <p:nvPr/>
-        </p:nvSpPr>
-        <p:spPr>
-          <a:xfrm>
-            <a:off x="10098024" y="3511296"/>
-            <a:ext cx="646176" cy="310896"/>
-          </a:xfrm>
-          <a:prstGeom prst="rect">
-            <a:avLst/>
-          </a:prstGeom>
-          <a:noFill/>
-          <a:ln/>
-        </p:spPr>
-        <p:txBody>
-          <a:bodyPr wrap="square" lIns="0" tIns="0" rIns="0" bIns="0" rtlCol="0" anchor="ctr">
-            <a:normAutofit/>
-          </a:bodyPr>
-          <a:lstStyle/>
-          <a:p>
-            <a:pPr algn="ctr" indent="0" marL="0">
-              <a:buNone/>
-            </a:pPr>
-            <a:r>
-              <a:rPr lang="en-US" sz="1500" b="1" dirty="0">
-                <a:solidFill>
-                  <a:srgbClr val="FFFFFF"/>
-                </a:solidFill>
-                <a:latin typeface="Aptos" pitchFamily="34" charset="0"/>
-                <a:ea typeface="Aptos" pitchFamily="34" charset="-122"/>
-                <a:cs typeface="Aptos" pitchFamily="34" charset="-120"/>
-              </a:rPr>
-              <a:t>Review</a:t>
-            </a:r>
-            <a:endParaRPr lang="en-US" sz="1500" dirty="0"/>
-          </a:p>
-        </p:txBody>
-      </p:sp>
-      <p:sp>
-        <p:nvSpPr>
-          <p:cNvPr id="20" name="Shape 18"/>
-          <p:cNvSpPr/>
-          <p:nvPr/>
-        </p:nvSpPr>
-        <p:spPr>
-          <a:xfrm>
-            <a:off x="8293608" y="4389120"/>
-            <a:ext cx="2157984" cy="0"/>
-          </a:xfrm>
-          <a:prstGeom prst="line">
-            <a:avLst/>
-          </a:prstGeom>
-          <a:noFill/>
-          <a:ln w="25400">
-            <a:solidFill>
-              <a:srgbClr val="8ABBD8"/>
-            </a:solidFill>
-            <a:prstDash val="solid"/>
-          </a:ln>
-        </p:spPr>
-      </p:sp>
-      <p:sp>
-        <p:nvSpPr>
-          <p:cNvPr id="21" name="Text 19"/>
-          <p:cNvSpPr/>
-          <p:nvPr/>
-        </p:nvSpPr>
-        <p:spPr>
-          <a:xfrm>
-            <a:off x="7909560" y="3977640"/>
-            <a:ext cx="2926080" cy="182880"/>
-          </a:xfrm>
-          <a:prstGeom prst="rect">
-            <a:avLst/>
-          </a:prstGeom>
-          <a:noFill/>
-          <a:ln/>
-        </p:spPr>
-        <p:txBody>
-          <a:bodyPr wrap="square" lIns="0" tIns="0" rIns="0" bIns="0" rtlCol="0" anchor="ctr"/>
-          <a:lstStyle/>
-          <a:p>
-            <a:pPr algn="ctr" indent="0" marL="0">
-              <a:buNone/>
-            </a:pPr>
-            <a:r>
-              <a:rPr lang="en-US" sz="1000" dirty="0">
-                <a:solidFill>
-                  <a:srgbClr val="003A63"/>
-                </a:solidFill>
-                <a:latin typeface="Aptos" pitchFamily="34" charset="0"/>
-                <a:ea typeface="Aptos" pitchFamily="34" charset="-122"/>
-                <a:cs typeface="Aptos" pitchFamily="34" charset="-120"/>
-              </a:rPr>
-              <a:t>Dependencies visible</a:t>
-            </a:r>
-            <a:endParaRPr lang="en-US" sz="1000" dirty="0"/>
-          </a:p>
-        </p:txBody>
-      </p:sp>
-      <p:sp>
-        <p:nvSpPr>
-          <p:cNvPr id="22" name="Shape 20"/>
           <p:cNvSpPr/>
           <p:nvPr/>
         </p:nvSpPr>
@@ -3933,7 +3770,7 @@
       </p:sp>
       <p:sp>
         <p:nvSpPr>
-          <p:cNvPr id="23" name="Text 21"/>
+          <p:cNvPr id="17" name="Text 15"/>
           <p:cNvSpPr/>
           <p:nvPr/>
         </p:nvSpPr>
@@ -3972,7 +3809,7 @@
       </p:sp>
       <p:sp>
         <p:nvSpPr>
-          <p:cNvPr id="24" name="Text 22"/>
+          <p:cNvPr id="18" name="Text 16"/>
           <p:cNvSpPr/>
           <p:nvPr/>
         </p:nvSpPr>
@@ -4480,13 +4317,11 @@
             </a:avLst>
           </a:prstGeom>
           <a:solidFill>
-            <a:srgbClr val="FFFFFF">
-              <a:alpha val="88000"/>
-            </a:srgbClr>
+            <a:srgbClr val="FFFFFF"/>
           </a:solidFill>
           <a:ln w="12700">
             <a:solidFill>
-              <a:srgbClr val="D6E8F2"/>
+              <a:srgbClr val="B9D7E6"/>
             </a:solidFill>
             <a:prstDash val="solid"/>
           </a:ln>
@@ -4494,30 +4329,42 @@
       </p:sp>
       <p:sp>
         <p:nvSpPr>
-          <p:cNvPr id="14" name="Shape 12"/>
-          <p:cNvSpPr/>
-          <p:nvPr/>
-        </p:nvSpPr>
-        <p:spPr>
-          <a:xfrm>
-            <a:off x="7927848" y="3319272"/>
-            <a:ext cx="792480" cy="749808"/>
-          </a:xfrm>
-          <a:prstGeom prst="roundRect">
-            <a:avLst>
-              <a:gd name="adj" fmla="val 14634"/>
-            </a:avLst>
-          </a:prstGeom>
-          <a:solidFill>
-            <a:srgbClr val="0068B7"/>
-          </a:solidFill>
-          <a:ln w="12700">
-            <a:solidFill>
-              <a:srgbClr val="0068B7"/>
-            </a:solidFill>
-            <a:prstDash val="solid"/>
-          </a:ln>
-        </p:spPr>
+          <p:cNvPr id="14" name="Text 12"/>
+          <p:cNvSpPr/>
+          <p:nvPr/>
+        </p:nvSpPr>
+        <p:spPr>
+          <a:xfrm>
+            <a:off x="7799832" y="2935224"/>
+            <a:ext cx="3145536" cy="256032"/>
+          </a:xfrm>
+          <a:prstGeom prst="rect">
+            <a:avLst/>
+          </a:prstGeom>
+          <a:noFill/>
+          <a:ln/>
+        </p:spPr>
+        <p:txBody>
+          <a:bodyPr wrap="square" lIns="0" tIns="0" rIns="0" bIns="0" rtlCol="0" anchor="ctr"/>
+          <a:lstStyle/>
+          <a:p>
+            <a:pPr indent="0" marL="0">
+              <a:buNone/>
+            </a:pPr>
+            <a:r>
+              <a:rPr lang="en-US" sz="1300" b="1" dirty="0">
+                <a:solidFill>
+                  <a:srgbClr val="0068B7"/>
+                </a:solidFill>
+                <a:latin typeface="Aptos" pitchFamily="34" charset="0"/>
+                <a:ea typeface="Aptos" pitchFamily="34" charset="-122"/>
+                <a:cs typeface="Aptos" pitchFamily="34" charset="-120"/>
+              </a:rPr>
+              <a:t>Concept checkpoints</a:t>
+            </a:r>
+            <a:endParaRPr lang="en-US" sz="1300" dirty="0"/>
+          </a:p>
+        </p:txBody>
       </p:sp>
       <p:sp>
         <p:nvSpPr>
@@ -4527,240 +4374,67 @@
         </p:nvSpPr>
         <p:spPr>
           <a:xfrm>
-            <a:off x="8001000" y="3511296"/>
-            <a:ext cx="646176" cy="310896"/>
-          </a:xfrm>
-          <a:prstGeom prst="rect">
-            <a:avLst/>
-          </a:prstGeom>
-          <a:noFill/>
-          <a:ln/>
-        </p:spPr>
-        <p:txBody>
-          <a:bodyPr wrap="square" lIns="0" tIns="0" rIns="0" bIns="0" rtlCol="0" anchor="ctr">
+            <a:off x="7818120" y="3300984"/>
+            <a:ext cx="3090672" cy="877824"/>
+          </a:xfrm>
+          <a:prstGeom prst="rect">
+            <a:avLst/>
+          </a:prstGeom>
+          <a:noFill/>
+          <a:ln/>
+        </p:spPr>
+        <p:txBody>
+          <a:bodyPr wrap="square" lIns="254" tIns="254" rIns="254" bIns="254" rtlCol="0" anchor="t">
             <a:normAutofit/>
           </a:bodyPr>
           <a:lstStyle/>
           <a:p>
-            <a:pPr algn="ctr" indent="0" marL="0">
-              <a:buNone/>
-            </a:pPr>
-            <a:r>
-              <a:rPr lang="en-US" sz="1500" b="1" dirty="0">
-                <a:solidFill>
-                  <a:srgbClr val="FFFFFF"/>
-                </a:solidFill>
-                <a:latin typeface="Aptos" pitchFamily="34" charset="0"/>
-                <a:ea typeface="Aptos" pitchFamily="34" charset="-122"/>
-                <a:cs typeface="Aptos" pitchFamily="34" charset="-120"/>
-              </a:rPr>
-              <a:t>Plan</a:t>
-            </a:r>
-            <a:endParaRPr lang="en-US" sz="1500" dirty="0"/>
+            <a:r>
+              <a:rPr lang="en-US" sz="1380" dirty="0">
+                <a:solidFill>
+                  <a:srgbClr val="17364A"/>
+                </a:solidFill>
+                <a:latin typeface="Aptos" pitchFamily="34" charset="0"/>
+                <a:ea typeface="Aptos" pitchFamily="34" charset="-122"/>
+                <a:cs typeface="Aptos" pitchFamily="34" charset="-120"/>
+              </a:rPr>
+              <a:t>Staff should identify who is affected, what data are used, what AI output is produced, who.</a:t>
+            </a:r>
+            <a:endParaRPr lang="en-US" sz="1380" dirty="0"/>
+          </a:p>
+          <a:p>
+            <a:r>
+              <a:rPr lang="en-US" sz="1380" dirty="0">
+                <a:solidFill>
+                  <a:srgbClr val="17364A"/>
+                </a:solidFill>
+                <a:latin typeface="Aptos" pitchFamily="34" charset="0"/>
+                <a:ea typeface="Aptos" pitchFamily="34" charset="-122"/>
+                <a:cs typeface="Aptos" pitchFamily="34" charset="-120"/>
+              </a:rPr>
+              <a:t>The second step is to assign responsibilities.</a:t>
+            </a:r>
+            <a:endParaRPr lang="en-US" sz="1380" dirty="0"/>
+          </a:p>
+          <a:p>
+            <a:r>
+              <a:rPr lang="en-US" sz="1380" dirty="0">
+                <a:solidFill>
+                  <a:srgbClr val="17364A"/>
+                </a:solidFill>
+                <a:latin typeface="Aptos" pitchFamily="34" charset="0"/>
+                <a:ea typeface="Aptos" pitchFamily="34" charset="-122"/>
+                <a:cs typeface="Aptos" pitchFamily="34" charset="-120"/>
+              </a:rPr>
+              <a:t>AI-supported workflows often cross program, IT, legal, privacy, communications,.</a:t>
+            </a:r>
+            <a:endParaRPr lang="en-US" sz="1380" dirty="0"/>
           </a:p>
         </p:txBody>
       </p:sp>
       <p:sp>
         <p:nvSpPr>
           <p:cNvPr id="16" name="Shape 14"/>
-          <p:cNvSpPr/>
-          <p:nvPr/>
-        </p:nvSpPr>
-        <p:spPr>
-          <a:xfrm>
-            <a:off x="8976360" y="3319272"/>
-            <a:ext cx="792480" cy="749808"/>
-          </a:xfrm>
-          <a:prstGeom prst="roundRect">
-            <a:avLst>
-              <a:gd name="adj" fmla="val 14634"/>
-            </a:avLst>
-          </a:prstGeom>
-          <a:solidFill>
-            <a:srgbClr val="2F8A28"/>
-          </a:solidFill>
-          <a:ln w="12700">
-            <a:solidFill>
-              <a:srgbClr val="2F8A28"/>
-            </a:solidFill>
-            <a:prstDash val="solid"/>
-          </a:ln>
-        </p:spPr>
-      </p:sp>
-      <p:sp>
-        <p:nvSpPr>
-          <p:cNvPr id="17" name="Text 15"/>
-          <p:cNvSpPr/>
-          <p:nvPr/>
-        </p:nvSpPr>
-        <p:spPr>
-          <a:xfrm>
-            <a:off x="9049512" y="3511296"/>
-            <a:ext cx="646176" cy="310896"/>
-          </a:xfrm>
-          <a:prstGeom prst="rect">
-            <a:avLst/>
-          </a:prstGeom>
-          <a:noFill/>
-          <a:ln/>
-        </p:spPr>
-        <p:txBody>
-          <a:bodyPr wrap="square" lIns="0" tIns="0" rIns="0" bIns="0" rtlCol="0" anchor="ctr">
-            <a:normAutofit/>
-          </a:bodyPr>
-          <a:lstStyle/>
-          <a:p>
-            <a:pPr algn="ctr" indent="0" marL="0">
-              <a:buNone/>
-            </a:pPr>
-            <a:r>
-              <a:rPr lang="en-US" sz="1500" b="1" dirty="0">
-                <a:solidFill>
-                  <a:srgbClr val="FFFFFF"/>
-                </a:solidFill>
-                <a:latin typeface="Aptos" pitchFamily="34" charset="0"/>
-                <a:ea typeface="Aptos" pitchFamily="34" charset="-122"/>
-                <a:cs typeface="Aptos" pitchFamily="34" charset="-120"/>
-              </a:rPr>
-              <a:t>Do</a:t>
-            </a:r>
-            <a:endParaRPr lang="en-US" sz="1500" dirty="0"/>
-          </a:p>
-        </p:txBody>
-      </p:sp>
-      <p:sp>
-        <p:nvSpPr>
-          <p:cNvPr id="18" name="Shape 16"/>
-          <p:cNvSpPr/>
-          <p:nvPr/>
-        </p:nvSpPr>
-        <p:spPr>
-          <a:xfrm>
-            <a:off x="10024872" y="3319272"/>
-            <a:ext cx="792480" cy="749808"/>
-          </a:xfrm>
-          <a:prstGeom prst="roundRect">
-            <a:avLst>
-              <a:gd name="adj" fmla="val 14634"/>
-            </a:avLst>
-          </a:prstGeom>
-          <a:solidFill>
-            <a:srgbClr val="D69A2D"/>
-          </a:solidFill>
-          <a:ln w="12700">
-            <a:solidFill>
-              <a:srgbClr val="D69A2D"/>
-            </a:solidFill>
-            <a:prstDash val="solid"/>
-          </a:ln>
-        </p:spPr>
-      </p:sp>
-      <p:sp>
-        <p:nvSpPr>
-          <p:cNvPr id="19" name="Text 17"/>
-          <p:cNvSpPr/>
-          <p:nvPr/>
-        </p:nvSpPr>
-        <p:spPr>
-          <a:xfrm>
-            <a:off x="10098024" y="3511296"/>
-            <a:ext cx="646176" cy="310896"/>
-          </a:xfrm>
-          <a:prstGeom prst="rect">
-            <a:avLst/>
-          </a:prstGeom>
-          <a:noFill/>
-          <a:ln/>
-        </p:spPr>
-        <p:txBody>
-          <a:bodyPr wrap="square" lIns="0" tIns="0" rIns="0" bIns="0" rtlCol="0" anchor="ctr">
-            <a:normAutofit/>
-          </a:bodyPr>
-          <a:lstStyle/>
-          <a:p>
-            <a:pPr algn="ctr" indent="0" marL="0">
-              <a:buNone/>
-            </a:pPr>
-            <a:r>
-              <a:rPr lang="en-US" sz="1500" b="1" dirty="0">
-                <a:solidFill>
-                  <a:srgbClr val="FFFFFF"/>
-                </a:solidFill>
-                <a:latin typeface="Aptos" pitchFamily="34" charset="0"/>
-                <a:ea typeface="Aptos" pitchFamily="34" charset="-122"/>
-                <a:cs typeface="Aptos" pitchFamily="34" charset="-120"/>
-              </a:rPr>
-              <a:t>Review</a:t>
-            </a:r>
-            <a:endParaRPr lang="en-US" sz="1500" dirty="0"/>
-          </a:p>
-        </p:txBody>
-      </p:sp>
-      <p:sp>
-        <p:nvSpPr>
-          <p:cNvPr id="20" name="Shape 18"/>
-          <p:cNvSpPr/>
-          <p:nvPr/>
-        </p:nvSpPr>
-        <p:spPr>
-          <a:xfrm>
-            <a:off x="8293608" y="4389120"/>
-            <a:ext cx="2157984" cy="0"/>
-          </a:xfrm>
-          <a:prstGeom prst="line">
-            <a:avLst/>
-          </a:prstGeom>
-          <a:noFill/>
-          <a:ln w="25400">
-            <a:solidFill>
-              <a:srgbClr val="8ABBD8"/>
-            </a:solidFill>
-            <a:prstDash val="solid"/>
-          </a:ln>
-        </p:spPr>
-      </p:sp>
-      <p:sp>
-        <p:nvSpPr>
-          <p:cNvPr id="21" name="Text 19"/>
-          <p:cNvSpPr/>
-          <p:nvPr/>
-        </p:nvSpPr>
-        <p:spPr>
-          <a:xfrm>
-            <a:off x="7909560" y="3977640"/>
-            <a:ext cx="2926080" cy="182880"/>
-          </a:xfrm>
-          <a:prstGeom prst="rect">
-            <a:avLst/>
-          </a:prstGeom>
-          <a:noFill/>
-          <a:ln/>
-        </p:spPr>
-        <p:txBody>
-          <a:bodyPr wrap="square" lIns="0" tIns="0" rIns="0" bIns="0" rtlCol="0" anchor="ctr"/>
-          <a:lstStyle/>
-          <a:p>
-            <a:pPr algn="ctr" indent="0" marL="0">
-              <a:buNone/>
-            </a:pPr>
-            <a:r>
-              <a:rPr lang="en-US" sz="1000" dirty="0">
-                <a:solidFill>
-                  <a:srgbClr val="003A63"/>
-                </a:solidFill>
-                <a:latin typeface="Aptos" pitchFamily="34" charset="0"/>
-                <a:ea typeface="Aptos" pitchFamily="34" charset="-122"/>
-                <a:cs typeface="Aptos" pitchFamily="34" charset="-120"/>
-              </a:rPr>
-              <a:t>Dependencies visible</a:t>
-            </a:r>
-            <a:endParaRPr lang="en-US" sz="1000" dirty="0"/>
-          </a:p>
-        </p:txBody>
-      </p:sp>
-      <p:sp>
-        <p:nvSpPr>
-          <p:cNvPr id="22" name="Shape 20"/>
           <p:cNvSpPr/>
           <p:nvPr/>
         </p:nvSpPr>
@@ -4787,7 +4461,7 @@
       </p:sp>
       <p:sp>
         <p:nvSpPr>
-          <p:cNvPr id="23" name="Text 21"/>
+          <p:cNvPr id="17" name="Text 15"/>
           <p:cNvSpPr/>
           <p:nvPr/>
         </p:nvSpPr>
@@ -4826,7 +4500,7 @@
       </p:sp>
       <p:sp>
         <p:nvSpPr>
-          <p:cNvPr id="24" name="Text 22"/>
+          <p:cNvPr id="18" name="Text 16"/>
           <p:cNvSpPr/>
           <p:nvPr/>
         </p:nvSpPr>
@@ -5334,13 +5008,11 @@
             </a:avLst>
           </a:prstGeom>
           <a:solidFill>
-            <a:srgbClr val="FFFFFF">
-              <a:alpha val="88000"/>
-            </a:srgbClr>
+            <a:srgbClr val="FFFFFF"/>
           </a:solidFill>
           <a:ln w="12700">
             <a:solidFill>
-              <a:srgbClr val="D6E8F2"/>
+              <a:srgbClr val="B9D7E6"/>
             </a:solidFill>
             <a:prstDash val="solid"/>
           </a:ln>
@@ -5348,26 +5020,42 @@
       </p:sp>
       <p:sp>
         <p:nvSpPr>
-          <p:cNvPr id="14" name="Shape 12"/>
-          <p:cNvSpPr/>
-          <p:nvPr/>
-        </p:nvSpPr>
-        <p:spPr>
-          <a:xfrm>
-            <a:off x="8046720" y="3108960"/>
-            <a:ext cx="2651760" cy="896112"/>
-          </a:xfrm>
-          <a:prstGeom prst="arc">
-            <a:avLst/>
-          </a:prstGeom>
-          <a:noFill/>
-          <a:ln w="25400">
-            <a:solidFill>
-              <a:srgbClr val="0068B7"/>
-            </a:solidFill>
-            <a:prstDash val="solid"/>
-          </a:ln>
-        </p:spPr>
+          <p:cNvPr id="14" name="Text 12"/>
+          <p:cNvSpPr/>
+          <p:nvPr/>
+        </p:nvSpPr>
+        <p:spPr>
+          <a:xfrm>
+            <a:off x="7799832" y="2935224"/>
+            <a:ext cx="3145536" cy="256032"/>
+          </a:xfrm>
+          <a:prstGeom prst="rect">
+            <a:avLst/>
+          </a:prstGeom>
+          <a:noFill/>
+          <a:ln/>
+        </p:spPr>
+        <p:txBody>
+          <a:bodyPr wrap="square" lIns="0" tIns="0" rIns="0" bIns="0" rtlCol="0" anchor="ctr"/>
+          <a:lstStyle/>
+          <a:p>
+            <a:pPr indent="0" marL="0">
+              <a:buNone/>
+            </a:pPr>
+            <a:r>
+              <a:rPr lang="en-US" sz="1300" b="1" dirty="0">
+                <a:solidFill>
+                  <a:srgbClr val="0068B7"/>
+                </a:solidFill>
+                <a:latin typeface="Aptos" pitchFamily="34" charset="0"/>
+                <a:ea typeface="Aptos" pitchFamily="34" charset="-122"/>
+                <a:cs typeface="Aptos" pitchFamily="34" charset="-120"/>
+              </a:rPr>
+              <a:t>Concept checkpoints</a:t>
+            </a:r>
+            <a:endParaRPr lang="en-US" sz="1300" dirty="0"/>
+          </a:p>
+        </p:txBody>
       </p:sp>
       <p:sp>
         <p:nvSpPr>
@@ -5377,102 +5065,67 @@
         </p:nvSpPr>
         <p:spPr>
           <a:xfrm>
-            <a:off x="7909560" y="3099816"/>
-            <a:ext cx="2926080" cy="256032"/>
-          </a:xfrm>
-          <a:prstGeom prst="rect">
-            <a:avLst/>
-          </a:prstGeom>
-          <a:noFill/>
-          <a:ln/>
-        </p:spPr>
-        <p:txBody>
-          <a:bodyPr wrap="square" lIns="0" tIns="0" rIns="0" bIns="0" rtlCol="0" anchor="ctr"/>
-          <a:lstStyle/>
-          <a:p>
-            <a:pPr algn="ctr" indent="0" marL="0">
-              <a:buNone/>
-            </a:pPr>
-            <a:r>
-              <a:rPr lang="en-US" sz="1500" b="1" dirty="0">
-                <a:solidFill>
-                  <a:srgbClr val="003A63"/>
-                </a:solidFill>
-                <a:latin typeface="Aptos" pitchFamily="34" charset="0"/>
-                <a:ea typeface="Aptos" pitchFamily="34" charset="-122"/>
-                <a:cs typeface="Aptos" pitchFamily="34" charset="-120"/>
-              </a:rPr>
-              <a:t>Risk</a:t>
-            </a:r>
-            <a:endParaRPr lang="en-US" sz="1500" dirty="0"/>
+            <a:off x="7818120" y="3300984"/>
+            <a:ext cx="3090672" cy="877824"/>
+          </a:xfrm>
+          <a:prstGeom prst="rect">
+            <a:avLst/>
+          </a:prstGeom>
+          <a:noFill/>
+          <a:ln/>
+        </p:spPr>
+        <p:txBody>
+          <a:bodyPr wrap="square" lIns="254" tIns="254" rIns="254" bIns="254" rtlCol="0" anchor="t">
+            <a:normAutofit/>
+          </a:bodyPr>
+          <a:lstStyle/>
+          <a:p>
+            <a:r>
+              <a:rPr lang="en-US" sz="1380" dirty="0">
+                <a:solidFill>
+                  <a:srgbClr val="17364A"/>
+                </a:solidFill>
+                <a:latin typeface="Aptos" pitchFamily="34" charset="0"/>
+                <a:ea typeface="Aptos" pitchFamily="34" charset="-122"/>
+                <a:cs typeface="Aptos" pitchFamily="34" charset="-120"/>
+              </a:rPr>
+              <a:t>Another failure mode is unclear ownership.</a:t>
+            </a:r>
+            <a:endParaRPr lang="en-US" sz="1380" dirty="0"/>
+          </a:p>
+          <a:p>
+            <a:r>
+              <a:rPr lang="en-US" sz="1380" dirty="0">
+                <a:solidFill>
+                  <a:srgbClr val="17364A"/>
+                </a:solidFill>
+                <a:latin typeface="Aptos" pitchFamily="34" charset="0"/>
+                <a:ea typeface="Aptos" pitchFamily="34" charset="-122"/>
+                <a:cs typeface="Aptos" pitchFamily="34" charset="-120"/>
+              </a:rPr>
+              <a:t>When everyone is responsible in general, no one may be responsible in practice.</a:t>
+            </a:r>
+            <a:endParaRPr lang="en-US" sz="1380" dirty="0"/>
+          </a:p>
+          <a:p>
+            <a:r>
+              <a:rPr lang="en-US" sz="1380" dirty="0">
+                <a:solidFill>
+                  <a:srgbClr val="17364A"/>
+                </a:solidFill>
+                <a:latin typeface="Aptos" pitchFamily="34" charset="0"/>
+                <a:ea typeface="Aptos" pitchFamily="34" charset="-122"/>
+                <a:cs typeface="Aptos" pitchFamily="34" charset="-120"/>
+              </a:rPr>
+              <a:t>A guardrail is to assign an accountability owner and name escalation pathways.</a:t>
+            </a:r>
+            <a:endParaRPr lang="en-US" sz="1380" dirty="0"/>
           </a:p>
         </p:txBody>
       </p:sp>
       <p:sp>
         <p:nvSpPr>
           <p:cNvPr id="16" name="Shape 14"/>
-          <p:cNvSpPr/>
-          <p:nvPr/>
-        </p:nvSpPr>
-        <p:spPr>
-          <a:xfrm>
-            <a:off x="8366760" y="3639312"/>
-            <a:ext cx="2011680" cy="0"/>
-          </a:xfrm>
-          <a:prstGeom prst="line">
-            <a:avLst/>
-          </a:prstGeom>
-          <a:noFill/>
-          <a:ln w="63500">
-            <a:solidFill>
-              <a:srgbClr val="2F8A28"/>
-            </a:solidFill>
-            <a:prstDash val="solid"/>
-          </a:ln>
-        </p:spPr>
-      </p:sp>
-      <p:sp>
-        <p:nvSpPr>
-          <p:cNvPr id="17" name="Text 15"/>
-          <p:cNvSpPr/>
-          <p:nvPr/>
-        </p:nvSpPr>
-        <p:spPr>
-          <a:xfrm>
-            <a:off x="7909560" y="3849624"/>
-            <a:ext cx="2926080" cy="164592"/>
-          </a:xfrm>
-          <a:prstGeom prst="rect">
-            <a:avLst/>
-          </a:prstGeom>
-          <a:noFill/>
-          <a:ln/>
-        </p:spPr>
-        <p:txBody>
-          <a:bodyPr wrap="square" lIns="0" tIns="0" rIns="0" bIns="0" rtlCol="0" anchor="ctr"/>
-          <a:lstStyle/>
-          <a:p>
-            <a:pPr algn="ctr" indent="0" marL="0">
-              <a:buNone/>
-            </a:pPr>
-            <a:r>
-              <a:rPr lang="en-US" sz="900" dirty="0">
-                <a:solidFill>
-                  <a:srgbClr val="003A63"/>
-                </a:solidFill>
-                <a:latin typeface="Aptos" pitchFamily="34" charset="0"/>
-                <a:ea typeface="Aptos" pitchFamily="34" charset="-122"/>
-                <a:cs typeface="Aptos" pitchFamily="34" charset="-120"/>
-              </a:rPr>
-              <a:t>Human review</a:t>
-            </a:r>
-            <a:endParaRPr lang="en-US" sz="900" dirty="0"/>
-          </a:p>
-        </p:txBody>
-      </p:sp>
-      <p:sp>
-        <p:nvSpPr>
-          <p:cNvPr id="18" name="Shape 16"/>
           <p:cNvSpPr/>
           <p:nvPr/>
         </p:nvSpPr>
@@ -5499,7 +5152,7 @@
       </p:sp>
       <p:sp>
         <p:nvSpPr>
-          <p:cNvPr id="19" name="Text 17"/>
+          <p:cNvPr id="17" name="Text 15"/>
           <p:cNvSpPr/>
           <p:nvPr/>
         </p:nvSpPr>
@@ -5538,7 +5191,7 @@
       </p:sp>
       <p:sp>
         <p:nvSpPr>
-          <p:cNvPr id="20" name="Text 18"/>
+          <p:cNvPr id="18" name="Text 16"/>
           <p:cNvSpPr/>
           <p:nvPr/>
         </p:nvSpPr>
@@ -6032,13 +5685,11 @@
             </a:avLst>
           </a:prstGeom>
           <a:solidFill>
-            <a:srgbClr val="FFFFFF">
-              <a:alpha val="88000"/>
-            </a:srgbClr>
+            <a:srgbClr val="FFFFFF"/>
           </a:solidFill>
           <a:ln w="12700">
             <a:solidFill>
-              <a:srgbClr val="D6E8F2"/>
+              <a:srgbClr val="B9D7E6"/>
             </a:solidFill>
             <a:prstDash val="solid"/>
           </a:ln>
@@ -6046,30 +5697,42 @@
       </p:sp>
       <p:sp>
         <p:nvSpPr>
-          <p:cNvPr id="14" name="Shape 12"/>
-          <p:cNvSpPr/>
-          <p:nvPr/>
-        </p:nvSpPr>
-        <p:spPr>
-          <a:xfrm>
-            <a:off x="7927848" y="3319272"/>
-            <a:ext cx="792480" cy="749808"/>
-          </a:xfrm>
-          <a:prstGeom prst="roundRect">
-            <a:avLst>
-              <a:gd name="adj" fmla="val 14634"/>
-            </a:avLst>
-          </a:prstGeom>
-          <a:solidFill>
-            <a:srgbClr val="0068B7"/>
-          </a:solidFill>
-          <a:ln w="12700">
-            <a:solidFill>
-              <a:srgbClr val="0068B7"/>
-            </a:solidFill>
-            <a:prstDash val="solid"/>
-          </a:ln>
-        </p:spPr>
+          <p:cNvPr id="14" name="Text 12"/>
+          <p:cNvSpPr/>
+          <p:nvPr/>
+        </p:nvSpPr>
+        <p:spPr>
+          <a:xfrm>
+            <a:off x="7799832" y="2935224"/>
+            <a:ext cx="3145536" cy="256032"/>
+          </a:xfrm>
+          <a:prstGeom prst="rect">
+            <a:avLst/>
+          </a:prstGeom>
+          <a:noFill/>
+          <a:ln/>
+        </p:spPr>
+        <p:txBody>
+          <a:bodyPr wrap="square" lIns="0" tIns="0" rIns="0" bIns="0" rtlCol="0" anchor="ctr"/>
+          <a:lstStyle/>
+          <a:p>
+            <a:pPr indent="0" marL="0">
+              <a:buNone/>
+            </a:pPr>
+            <a:r>
+              <a:rPr lang="en-US" sz="1300" b="1" dirty="0">
+                <a:solidFill>
+                  <a:srgbClr val="0068B7"/>
+                </a:solidFill>
+                <a:latin typeface="Aptos" pitchFamily="34" charset="0"/>
+                <a:ea typeface="Aptos" pitchFamily="34" charset="-122"/>
+                <a:cs typeface="Aptos" pitchFamily="34" charset="-120"/>
+              </a:rPr>
+              <a:t>Concept checkpoints</a:t>
+            </a:r>
+            <a:endParaRPr lang="en-US" sz="1300" dirty="0"/>
+          </a:p>
+        </p:txBody>
       </p:sp>
       <p:sp>
         <p:nvSpPr>
@@ -6079,240 +5742,53 @@
         </p:nvSpPr>
         <p:spPr>
           <a:xfrm>
-            <a:off x="8001000" y="3511296"/>
-            <a:ext cx="646176" cy="310896"/>
-          </a:xfrm>
-          <a:prstGeom prst="rect">
-            <a:avLst/>
-          </a:prstGeom>
-          <a:noFill/>
-          <a:ln/>
-        </p:spPr>
-        <p:txBody>
-          <a:bodyPr wrap="square" lIns="0" tIns="0" rIns="0" bIns="0" rtlCol="0" anchor="ctr">
+            <a:off x="7818120" y="3300984"/>
+            <a:ext cx="3090672" cy="877824"/>
+          </a:xfrm>
+          <a:prstGeom prst="rect">
+            <a:avLst/>
+          </a:prstGeom>
+          <a:noFill/>
+          <a:ln/>
+        </p:spPr>
+        <p:txBody>
+          <a:bodyPr wrap="square" lIns="254" tIns="254" rIns="254" bIns="254" rtlCol="0" anchor="t">
             <a:normAutofit/>
           </a:bodyPr>
           <a:lstStyle/>
           <a:p>
-            <a:pPr algn="ctr" indent="0" marL="0">
-              <a:buNone/>
-            </a:pPr>
-            <a:r>
-              <a:rPr lang="en-US" sz="1500" b="1" dirty="0">
-                <a:solidFill>
-                  <a:srgbClr val="FFFFFF"/>
-                </a:solidFill>
-                <a:latin typeface="Aptos" pitchFamily="34" charset="0"/>
-                <a:ea typeface="Aptos" pitchFamily="34" charset="-122"/>
-                <a:cs typeface="Aptos" pitchFamily="34" charset="-120"/>
-              </a:rPr>
-              <a:t>Plan</a:t>
-            </a:r>
-            <a:endParaRPr lang="en-US" sz="1500" dirty="0"/>
+            <a:r>
+              <a:rPr lang="en-US" sz="1380" dirty="0">
+                <a:solidFill>
+                  <a:srgbClr val="17364A"/>
+                </a:solidFill>
+                <a:latin typeface="Aptos" pitchFamily="34" charset="0"/>
+                <a:ea typeface="Aptos" pitchFamily="34" charset="-122"/>
+                <a:cs typeface="Aptos" pitchFamily="34" charset="-120"/>
+              </a:rPr>
+              <a:t>This topic applies across generative AI, predictive analytics, NLP, RAG, automation, and.</a:t>
+            </a:r>
+            <a:endParaRPr lang="en-US" sz="1380" dirty="0"/>
+          </a:p>
+          <a:p>
+            <a:r>
+              <a:rPr lang="en-US" sz="1380" dirty="0">
+                <a:solidFill>
+                  <a:srgbClr val="17364A"/>
+                </a:solidFill>
+                <a:latin typeface="Aptos" pitchFamily="34" charset="0"/>
+                <a:ea typeface="Aptos" pitchFamily="34" charset="-122"/>
+                <a:cs typeface="Aptos" pitchFamily="34" charset="-120"/>
+              </a:rPr>
+              <a:t>The more sensitive the data, the more consequential the output, or the more automated the.</a:t>
+            </a:r>
+            <a:endParaRPr lang="en-US" sz="1380" dirty="0"/>
           </a:p>
         </p:txBody>
       </p:sp>
       <p:sp>
         <p:nvSpPr>
           <p:cNvPr id="16" name="Shape 14"/>
-          <p:cNvSpPr/>
-          <p:nvPr/>
-        </p:nvSpPr>
-        <p:spPr>
-          <a:xfrm>
-            <a:off x="8976360" y="3319272"/>
-            <a:ext cx="792480" cy="749808"/>
-          </a:xfrm>
-          <a:prstGeom prst="roundRect">
-            <a:avLst>
-              <a:gd name="adj" fmla="val 14634"/>
-            </a:avLst>
-          </a:prstGeom>
-          <a:solidFill>
-            <a:srgbClr val="2F8A28"/>
-          </a:solidFill>
-          <a:ln w="12700">
-            <a:solidFill>
-              <a:srgbClr val="2F8A28"/>
-            </a:solidFill>
-            <a:prstDash val="solid"/>
-          </a:ln>
-        </p:spPr>
-      </p:sp>
-      <p:sp>
-        <p:nvSpPr>
-          <p:cNvPr id="17" name="Text 15"/>
-          <p:cNvSpPr/>
-          <p:nvPr/>
-        </p:nvSpPr>
-        <p:spPr>
-          <a:xfrm>
-            <a:off x="9049512" y="3511296"/>
-            <a:ext cx="646176" cy="310896"/>
-          </a:xfrm>
-          <a:prstGeom prst="rect">
-            <a:avLst/>
-          </a:prstGeom>
-          <a:noFill/>
-          <a:ln/>
-        </p:spPr>
-        <p:txBody>
-          <a:bodyPr wrap="square" lIns="0" tIns="0" rIns="0" bIns="0" rtlCol="0" anchor="ctr">
-            <a:normAutofit/>
-          </a:bodyPr>
-          <a:lstStyle/>
-          <a:p>
-            <a:pPr algn="ctr" indent="0" marL="0">
-              <a:buNone/>
-            </a:pPr>
-            <a:r>
-              <a:rPr lang="en-US" sz="1500" b="1" dirty="0">
-                <a:solidFill>
-                  <a:srgbClr val="FFFFFF"/>
-                </a:solidFill>
-                <a:latin typeface="Aptos" pitchFamily="34" charset="0"/>
-                <a:ea typeface="Aptos" pitchFamily="34" charset="-122"/>
-                <a:cs typeface="Aptos" pitchFamily="34" charset="-120"/>
-              </a:rPr>
-              <a:t>Do</a:t>
-            </a:r>
-            <a:endParaRPr lang="en-US" sz="1500" dirty="0"/>
-          </a:p>
-        </p:txBody>
-      </p:sp>
-      <p:sp>
-        <p:nvSpPr>
-          <p:cNvPr id="18" name="Shape 16"/>
-          <p:cNvSpPr/>
-          <p:nvPr/>
-        </p:nvSpPr>
-        <p:spPr>
-          <a:xfrm>
-            <a:off x="10024872" y="3319272"/>
-            <a:ext cx="792480" cy="749808"/>
-          </a:xfrm>
-          <a:prstGeom prst="roundRect">
-            <a:avLst>
-              <a:gd name="adj" fmla="val 14634"/>
-            </a:avLst>
-          </a:prstGeom>
-          <a:solidFill>
-            <a:srgbClr val="D69A2D"/>
-          </a:solidFill>
-          <a:ln w="12700">
-            <a:solidFill>
-              <a:srgbClr val="D69A2D"/>
-            </a:solidFill>
-            <a:prstDash val="solid"/>
-          </a:ln>
-        </p:spPr>
-      </p:sp>
-      <p:sp>
-        <p:nvSpPr>
-          <p:cNvPr id="19" name="Text 17"/>
-          <p:cNvSpPr/>
-          <p:nvPr/>
-        </p:nvSpPr>
-        <p:spPr>
-          <a:xfrm>
-            <a:off x="10098024" y="3511296"/>
-            <a:ext cx="646176" cy="310896"/>
-          </a:xfrm>
-          <a:prstGeom prst="rect">
-            <a:avLst/>
-          </a:prstGeom>
-          <a:noFill/>
-          <a:ln/>
-        </p:spPr>
-        <p:txBody>
-          <a:bodyPr wrap="square" lIns="0" tIns="0" rIns="0" bIns="0" rtlCol="0" anchor="ctr">
-            <a:normAutofit/>
-          </a:bodyPr>
-          <a:lstStyle/>
-          <a:p>
-            <a:pPr algn="ctr" indent="0" marL="0">
-              <a:buNone/>
-            </a:pPr>
-            <a:r>
-              <a:rPr lang="en-US" sz="1500" b="1" dirty="0">
-                <a:solidFill>
-                  <a:srgbClr val="FFFFFF"/>
-                </a:solidFill>
-                <a:latin typeface="Aptos" pitchFamily="34" charset="0"/>
-                <a:ea typeface="Aptos" pitchFamily="34" charset="-122"/>
-                <a:cs typeface="Aptos" pitchFamily="34" charset="-120"/>
-              </a:rPr>
-              <a:t>Review</a:t>
-            </a:r>
-            <a:endParaRPr lang="en-US" sz="1500" dirty="0"/>
-          </a:p>
-        </p:txBody>
-      </p:sp>
-      <p:sp>
-        <p:nvSpPr>
-          <p:cNvPr id="20" name="Shape 18"/>
-          <p:cNvSpPr/>
-          <p:nvPr/>
-        </p:nvSpPr>
-        <p:spPr>
-          <a:xfrm>
-            <a:off x="8293608" y="4389120"/>
-            <a:ext cx="2157984" cy="0"/>
-          </a:xfrm>
-          <a:prstGeom prst="line">
-            <a:avLst/>
-          </a:prstGeom>
-          <a:noFill/>
-          <a:ln w="25400">
-            <a:solidFill>
-              <a:srgbClr val="8ABBD8"/>
-            </a:solidFill>
-            <a:prstDash val="solid"/>
-          </a:ln>
-        </p:spPr>
-      </p:sp>
-      <p:sp>
-        <p:nvSpPr>
-          <p:cNvPr id="21" name="Text 19"/>
-          <p:cNvSpPr/>
-          <p:nvPr/>
-        </p:nvSpPr>
-        <p:spPr>
-          <a:xfrm>
-            <a:off x="7909560" y="3977640"/>
-            <a:ext cx="2926080" cy="182880"/>
-          </a:xfrm>
-          <a:prstGeom prst="rect">
-            <a:avLst/>
-          </a:prstGeom>
-          <a:noFill/>
-          <a:ln/>
-        </p:spPr>
-        <p:txBody>
-          <a:bodyPr wrap="square" lIns="0" tIns="0" rIns="0" bIns="0" rtlCol="0" anchor="ctr"/>
-          <a:lstStyle/>
-          <a:p>
-            <a:pPr algn="ctr" indent="0" marL="0">
-              <a:buNone/>
-            </a:pPr>
-            <a:r>
-              <a:rPr lang="en-US" sz="1000" dirty="0">
-                <a:solidFill>
-                  <a:srgbClr val="003A63"/>
-                </a:solidFill>
-                <a:latin typeface="Aptos" pitchFamily="34" charset="0"/>
-                <a:ea typeface="Aptos" pitchFamily="34" charset="-122"/>
-                <a:cs typeface="Aptos" pitchFamily="34" charset="-120"/>
-              </a:rPr>
-              <a:t>Dependencies visible</a:t>
-            </a:r>
-            <a:endParaRPr lang="en-US" sz="1000" dirty="0"/>
-          </a:p>
-        </p:txBody>
-      </p:sp>
-      <p:sp>
-        <p:nvSpPr>
-          <p:cNvPr id="22" name="Shape 20"/>
           <p:cNvSpPr/>
           <p:nvPr/>
         </p:nvSpPr>
@@ -6339,7 +5815,7 @@
       </p:sp>
       <p:sp>
         <p:nvSpPr>
-          <p:cNvPr id="23" name="Text 21"/>
+          <p:cNvPr id="17" name="Text 15"/>
           <p:cNvSpPr/>
           <p:nvPr/>
         </p:nvSpPr>
@@ -6378,7 +5854,7 @@
       </p:sp>
       <p:sp>
         <p:nvSpPr>
-          <p:cNvPr id="24" name="Text 22"/>
+          <p:cNvPr id="18" name="Text 16"/>
           <p:cNvSpPr/>
           <p:nvPr/>
         </p:nvSpPr>
@@ -6886,13 +6362,11 @@
             </a:avLst>
           </a:prstGeom>
           <a:solidFill>
-            <a:srgbClr val="FFFFFF">
-              <a:alpha val="88000"/>
-            </a:srgbClr>
+            <a:srgbClr val="FFFFFF"/>
           </a:solidFill>
           <a:ln w="12700">
             <a:solidFill>
-              <a:srgbClr val="D6E8F2"/>
+              <a:srgbClr val="B9D7E6"/>
             </a:solidFill>
             <a:prstDash val="solid"/>
           </a:ln>
@@ -6900,30 +6374,42 @@
       </p:sp>
       <p:sp>
         <p:nvSpPr>
-          <p:cNvPr id="14" name="Shape 12"/>
-          <p:cNvSpPr/>
-          <p:nvPr/>
-        </p:nvSpPr>
-        <p:spPr>
-          <a:xfrm>
-            <a:off x="7927848" y="3319272"/>
-            <a:ext cx="792480" cy="749808"/>
-          </a:xfrm>
-          <a:prstGeom prst="roundRect">
-            <a:avLst>
-              <a:gd name="adj" fmla="val 14634"/>
-            </a:avLst>
-          </a:prstGeom>
-          <a:solidFill>
-            <a:srgbClr val="0068B7"/>
-          </a:solidFill>
-          <a:ln w="12700">
-            <a:solidFill>
-              <a:srgbClr val="0068B7"/>
-            </a:solidFill>
-            <a:prstDash val="solid"/>
-          </a:ln>
-        </p:spPr>
+          <p:cNvPr id="14" name="Text 12"/>
+          <p:cNvSpPr/>
+          <p:nvPr/>
+        </p:nvSpPr>
+        <p:spPr>
+          <a:xfrm>
+            <a:off x="7799832" y="2935224"/>
+            <a:ext cx="3145536" cy="256032"/>
+          </a:xfrm>
+          <a:prstGeom prst="rect">
+            <a:avLst/>
+          </a:prstGeom>
+          <a:noFill/>
+          <a:ln/>
+        </p:spPr>
+        <p:txBody>
+          <a:bodyPr wrap="square" lIns="0" tIns="0" rIns="0" bIns="0" rtlCol="0" anchor="ctr"/>
+          <a:lstStyle/>
+          <a:p>
+            <a:pPr indent="0" marL="0">
+              <a:buNone/>
+            </a:pPr>
+            <a:r>
+              <a:rPr lang="en-US" sz="1300" b="1" dirty="0">
+                <a:solidFill>
+                  <a:srgbClr val="0068B7"/>
+                </a:solidFill>
+                <a:latin typeface="Aptos" pitchFamily="34" charset="0"/>
+                <a:ea typeface="Aptos" pitchFamily="34" charset="-122"/>
+                <a:cs typeface="Aptos" pitchFamily="34" charset="-120"/>
+              </a:rPr>
+              <a:t>Concept checkpoints</a:t>
+            </a:r>
+            <a:endParaRPr lang="en-US" sz="1300" dirty="0"/>
+          </a:p>
+        </p:txBody>
       </p:sp>
       <p:sp>
         <p:nvSpPr>
@@ -6933,240 +6419,67 @@
         </p:nvSpPr>
         <p:spPr>
           <a:xfrm>
-            <a:off x="8001000" y="3511296"/>
-            <a:ext cx="646176" cy="310896"/>
-          </a:xfrm>
-          <a:prstGeom prst="rect">
-            <a:avLst/>
-          </a:prstGeom>
-          <a:noFill/>
-          <a:ln/>
-        </p:spPr>
-        <p:txBody>
-          <a:bodyPr wrap="square" lIns="0" tIns="0" rIns="0" bIns="0" rtlCol="0" anchor="ctr">
+            <a:off x="7818120" y="3300984"/>
+            <a:ext cx="3090672" cy="877824"/>
+          </a:xfrm>
+          <a:prstGeom prst="rect">
+            <a:avLst/>
+          </a:prstGeom>
+          <a:noFill/>
+          <a:ln/>
+        </p:spPr>
+        <p:txBody>
+          <a:bodyPr wrap="square" lIns="254" tIns="254" rIns="254" bIns="254" rtlCol="0" anchor="t">
             <a:normAutofit/>
           </a:bodyPr>
           <a:lstStyle/>
           <a:p>
-            <a:pPr algn="ctr" indent="0" marL="0">
-              <a:buNone/>
-            </a:pPr>
-            <a:r>
-              <a:rPr lang="en-US" sz="1500" b="1" dirty="0">
-                <a:solidFill>
-                  <a:srgbClr val="FFFFFF"/>
-                </a:solidFill>
-                <a:latin typeface="Aptos" pitchFamily="34" charset="0"/>
-                <a:ea typeface="Aptos" pitchFamily="34" charset="-122"/>
-                <a:cs typeface="Aptos" pitchFamily="34" charset="-120"/>
-              </a:rPr>
-              <a:t>Plan</a:t>
-            </a:r>
-            <a:endParaRPr lang="en-US" sz="1500" dirty="0"/>
+            <a:r>
+              <a:rPr lang="en-US" sz="1380" dirty="0">
+                <a:solidFill>
+                  <a:srgbClr val="17364A"/>
+                </a:solidFill>
+                <a:latin typeface="Aptos" pitchFamily="34" charset="0"/>
+                <a:ea typeface="Aptos" pitchFamily="34" charset="-122"/>
+                <a:cs typeface="Aptos" pitchFamily="34" charset="-120"/>
+              </a:rPr>
+              <a:t>What public health decision or workflow does this topic affect?</a:t>
+            </a:r>
+            <a:endParaRPr lang="en-US" sz="1380" dirty="0"/>
+          </a:p>
+          <a:p>
+            <a:r>
+              <a:rPr lang="en-US" sz="1380" dirty="0">
+                <a:solidFill>
+                  <a:srgbClr val="17364A"/>
+                </a:solidFill>
+                <a:latin typeface="Aptos" pitchFamily="34" charset="0"/>
+                <a:ea typeface="Aptos" pitchFamily="34" charset="-122"/>
+                <a:cs typeface="Aptos" pitchFamily="34" charset="-120"/>
+              </a:rPr>
+              <a:t>Who has authority to approve or pause the work?</a:t>
+            </a:r>
+            <a:endParaRPr lang="en-US" sz="1380" dirty="0"/>
+          </a:p>
+          <a:p>
+            <a:r>
+              <a:rPr lang="en-US" sz="1380" dirty="0">
+                <a:solidFill>
+                  <a:srgbClr val="17364A"/>
+                </a:solidFill>
+                <a:latin typeface="Aptos" pitchFamily="34" charset="0"/>
+                <a:ea typeface="Aptos" pitchFamily="34" charset="-122"/>
+                <a:cs typeface="Aptos" pitchFamily="34" charset="-120"/>
+              </a:rPr>
+              <a:t>What evidence would show that the workflow is responsible and effective?</a:t>
+            </a:r>
+            <a:endParaRPr lang="en-US" sz="1380" dirty="0"/>
           </a:p>
         </p:txBody>
       </p:sp>
       <p:sp>
         <p:nvSpPr>
           <p:cNvPr id="16" name="Shape 14"/>
-          <p:cNvSpPr/>
-          <p:nvPr/>
-        </p:nvSpPr>
-        <p:spPr>
-          <a:xfrm>
-            <a:off x="8976360" y="3319272"/>
-            <a:ext cx="792480" cy="749808"/>
-          </a:xfrm>
-          <a:prstGeom prst="roundRect">
-            <a:avLst>
-              <a:gd name="adj" fmla="val 14634"/>
-            </a:avLst>
-          </a:prstGeom>
-          <a:solidFill>
-            <a:srgbClr val="2F8A28"/>
-          </a:solidFill>
-          <a:ln w="12700">
-            <a:solidFill>
-              <a:srgbClr val="2F8A28"/>
-            </a:solidFill>
-            <a:prstDash val="solid"/>
-          </a:ln>
-        </p:spPr>
-      </p:sp>
-      <p:sp>
-        <p:nvSpPr>
-          <p:cNvPr id="17" name="Text 15"/>
-          <p:cNvSpPr/>
-          <p:nvPr/>
-        </p:nvSpPr>
-        <p:spPr>
-          <a:xfrm>
-            <a:off x="9049512" y="3511296"/>
-            <a:ext cx="646176" cy="310896"/>
-          </a:xfrm>
-          <a:prstGeom prst="rect">
-            <a:avLst/>
-          </a:prstGeom>
-          <a:noFill/>
-          <a:ln/>
-        </p:spPr>
-        <p:txBody>
-          <a:bodyPr wrap="square" lIns="0" tIns="0" rIns="0" bIns="0" rtlCol="0" anchor="ctr">
-            <a:normAutofit/>
-          </a:bodyPr>
-          <a:lstStyle/>
-          <a:p>
-            <a:pPr algn="ctr" indent="0" marL="0">
-              <a:buNone/>
-            </a:pPr>
-            <a:r>
-              <a:rPr lang="en-US" sz="1500" b="1" dirty="0">
-                <a:solidFill>
-                  <a:srgbClr val="FFFFFF"/>
-                </a:solidFill>
-                <a:latin typeface="Aptos" pitchFamily="34" charset="0"/>
-                <a:ea typeface="Aptos" pitchFamily="34" charset="-122"/>
-                <a:cs typeface="Aptos" pitchFamily="34" charset="-120"/>
-              </a:rPr>
-              <a:t>Do</a:t>
-            </a:r>
-            <a:endParaRPr lang="en-US" sz="1500" dirty="0"/>
-          </a:p>
-        </p:txBody>
-      </p:sp>
-      <p:sp>
-        <p:nvSpPr>
-          <p:cNvPr id="18" name="Shape 16"/>
-          <p:cNvSpPr/>
-          <p:nvPr/>
-        </p:nvSpPr>
-        <p:spPr>
-          <a:xfrm>
-            <a:off x="10024872" y="3319272"/>
-            <a:ext cx="792480" cy="749808"/>
-          </a:xfrm>
-          <a:prstGeom prst="roundRect">
-            <a:avLst>
-              <a:gd name="adj" fmla="val 14634"/>
-            </a:avLst>
-          </a:prstGeom>
-          <a:solidFill>
-            <a:srgbClr val="D69A2D"/>
-          </a:solidFill>
-          <a:ln w="12700">
-            <a:solidFill>
-              <a:srgbClr val="D69A2D"/>
-            </a:solidFill>
-            <a:prstDash val="solid"/>
-          </a:ln>
-        </p:spPr>
-      </p:sp>
-      <p:sp>
-        <p:nvSpPr>
-          <p:cNvPr id="19" name="Text 17"/>
-          <p:cNvSpPr/>
-          <p:nvPr/>
-        </p:nvSpPr>
-        <p:spPr>
-          <a:xfrm>
-            <a:off x="10098024" y="3511296"/>
-            <a:ext cx="646176" cy="310896"/>
-          </a:xfrm>
-          <a:prstGeom prst="rect">
-            <a:avLst/>
-          </a:prstGeom>
-          <a:noFill/>
-          <a:ln/>
-        </p:spPr>
-        <p:txBody>
-          <a:bodyPr wrap="square" lIns="0" tIns="0" rIns="0" bIns="0" rtlCol="0" anchor="ctr">
-            <a:normAutofit/>
-          </a:bodyPr>
-          <a:lstStyle/>
-          <a:p>
-            <a:pPr algn="ctr" indent="0" marL="0">
-              <a:buNone/>
-            </a:pPr>
-            <a:r>
-              <a:rPr lang="en-US" sz="1500" b="1" dirty="0">
-                <a:solidFill>
-                  <a:srgbClr val="FFFFFF"/>
-                </a:solidFill>
-                <a:latin typeface="Aptos" pitchFamily="34" charset="0"/>
-                <a:ea typeface="Aptos" pitchFamily="34" charset="-122"/>
-                <a:cs typeface="Aptos" pitchFamily="34" charset="-120"/>
-              </a:rPr>
-              <a:t>Review</a:t>
-            </a:r>
-            <a:endParaRPr lang="en-US" sz="1500" dirty="0"/>
-          </a:p>
-        </p:txBody>
-      </p:sp>
-      <p:sp>
-        <p:nvSpPr>
-          <p:cNvPr id="20" name="Shape 18"/>
-          <p:cNvSpPr/>
-          <p:nvPr/>
-        </p:nvSpPr>
-        <p:spPr>
-          <a:xfrm>
-            <a:off x="8293608" y="4389120"/>
-            <a:ext cx="2157984" cy="0"/>
-          </a:xfrm>
-          <a:prstGeom prst="line">
-            <a:avLst/>
-          </a:prstGeom>
-          <a:noFill/>
-          <a:ln w="25400">
-            <a:solidFill>
-              <a:srgbClr val="8ABBD8"/>
-            </a:solidFill>
-            <a:prstDash val="solid"/>
-          </a:ln>
-        </p:spPr>
-      </p:sp>
-      <p:sp>
-        <p:nvSpPr>
-          <p:cNvPr id="21" name="Text 19"/>
-          <p:cNvSpPr/>
-          <p:nvPr/>
-        </p:nvSpPr>
-        <p:spPr>
-          <a:xfrm>
-            <a:off x="7909560" y="3977640"/>
-            <a:ext cx="2926080" cy="182880"/>
-          </a:xfrm>
-          <a:prstGeom prst="rect">
-            <a:avLst/>
-          </a:prstGeom>
-          <a:noFill/>
-          <a:ln/>
-        </p:spPr>
-        <p:txBody>
-          <a:bodyPr wrap="square" lIns="0" tIns="0" rIns="0" bIns="0" rtlCol="0" anchor="ctr"/>
-          <a:lstStyle/>
-          <a:p>
-            <a:pPr algn="ctr" indent="0" marL="0">
-              <a:buNone/>
-            </a:pPr>
-            <a:r>
-              <a:rPr lang="en-US" sz="1000" dirty="0">
-                <a:solidFill>
-                  <a:srgbClr val="003A63"/>
-                </a:solidFill>
-                <a:latin typeface="Aptos" pitchFamily="34" charset="0"/>
-                <a:ea typeface="Aptos" pitchFamily="34" charset="-122"/>
-                <a:cs typeface="Aptos" pitchFamily="34" charset="-120"/>
-              </a:rPr>
-              <a:t>Dependencies visible</a:t>
-            </a:r>
-            <a:endParaRPr lang="en-US" sz="1000" dirty="0"/>
-          </a:p>
-        </p:txBody>
-      </p:sp>
-      <p:sp>
-        <p:nvSpPr>
-          <p:cNvPr id="22" name="Shape 20"/>
           <p:cNvSpPr/>
           <p:nvPr/>
         </p:nvSpPr>
@@ -7193,7 +6506,7 @@
       </p:sp>
       <p:sp>
         <p:nvSpPr>
-          <p:cNvPr id="23" name="Text 21"/>
+          <p:cNvPr id="17" name="Text 15"/>
           <p:cNvSpPr/>
           <p:nvPr/>
         </p:nvSpPr>
@@ -7232,7 +6545,7 @@
       </p:sp>
       <p:sp>
         <p:nvSpPr>
-          <p:cNvPr id="24" name="Text 22"/>
+          <p:cNvPr id="18" name="Text 16"/>
           <p:cNvSpPr/>
           <p:nvPr/>
         </p:nvSpPr>
@@ -7726,13 +7039,11 @@
             </a:avLst>
           </a:prstGeom>
           <a:solidFill>
-            <a:srgbClr val="FFFFFF">
-              <a:alpha val="88000"/>
-            </a:srgbClr>
+            <a:srgbClr val="FFFFFF"/>
           </a:solidFill>
           <a:ln w="12700">
             <a:solidFill>
-              <a:srgbClr val="D6E8F2"/>
+              <a:srgbClr val="B9D7E6"/>
             </a:solidFill>
             <a:prstDash val="solid"/>
           </a:ln>
@@ -7740,30 +7051,42 @@
       </p:sp>
       <p:sp>
         <p:nvSpPr>
-          <p:cNvPr id="14" name="Shape 12"/>
-          <p:cNvSpPr/>
-          <p:nvPr/>
-        </p:nvSpPr>
-        <p:spPr>
-          <a:xfrm>
-            <a:off x="7927848" y="3319272"/>
-            <a:ext cx="792480" cy="749808"/>
-          </a:xfrm>
-          <a:prstGeom prst="roundRect">
-            <a:avLst>
-              <a:gd name="adj" fmla="val 14634"/>
-            </a:avLst>
-          </a:prstGeom>
-          <a:solidFill>
-            <a:srgbClr val="0068B7"/>
-          </a:solidFill>
-          <a:ln w="12700">
-            <a:solidFill>
-              <a:srgbClr val="0068B7"/>
-            </a:solidFill>
-            <a:prstDash val="solid"/>
-          </a:ln>
-        </p:spPr>
+          <p:cNvPr id="14" name="Text 12"/>
+          <p:cNvSpPr/>
+          <p:nvPr/>
+        </p:nvSpPr>
+        <p:spPr>
+          <a:xfrm>
+            <a:off x="7799832" y="2935224"/>
+            <a:ext cx="3145536" cy="256032"/>
+          </a:xfrm>
+          <a:prstGeom prst="rect">
+            <a:avLst/>
+          </a:prstGeom>
+          <a:noFill/>
+          <a:ln/>
+        </p:spPr>
+        <p:txBody>
+          <a:bodyPr wrap="square" lIns="0" tIns="0" rIns="0" bIns="0" rtlCol="0" anchor="ctr"/>
+          <a:lstStyle/>
+          <a:p>
+            <a:pPr indent="0" marL="0">
+              <a:buNone/>
+            </a:pPr>
+            <a:r>
+              <a:rPr lang="en-US" sz="1300" b="1" dirty="0">
+                <a:solidFill>
+                  <a:srgbClr val="0068B7"/>
+                </a:solidFill>
+                <a:latin typeface="Aptos" pitchFamily="34" charset="0"/>
+                <a:ea typeface="Aptos" pitchFamily="34" charset="-122"/>
+                <a:cs typeface="Aptos" pitchFamily="34" charset="-120"/>
+              </a:rPr>
+              <a:t>Concept checkpoints</a:t>
+            </a:r>
+            <a:endParaRPr lang="en-US" sz="1300" dirty="0"/>
+          </a:p>
+        </p:txBody>
       </p:sp>
       <p:sp>
         <p:nvSpPr>
@@ -7773,240 +7096,53 @@
         </p:nvSpPr>
         <p:spPr>
           <a:xfrm>
-            <a:off x="8001000" y="3511296"/>
-            <a:ext cx="646176" cy="310896"/>
-          </a:xfrm>
-          <a:prstGeom prst="rect">
-            <a:avLst/>
-          </a:prstGeom>
-          <a:noFill/>
-          <a:ln/>
-        </p:spPr>
-        <p:txBody>
-          <a:bodyPr wrap="square" lIns="0" tIns="0" rIns="0" bIns="0" rtlCol="0" anchor="ctr">
+            <a:off x="7818120" y="3300984"/>
+            <a:ext cx="3090672" cy="877824"/>
+          </a:xfrm>
+          <a:prstGeom prst="rect">
+            <a:avLst/>
+          </a:prstGeom>
+          <a:noFill/>
+          <a:ln/>
+        </p:spPr>
+        <p:txBody>
+          <a:bodyPr wrap="square" lIns="254" tIns="254" rIns="254" bIns="254" rtlCol="0" anchor="t">
             <a:normAutofit/>
           </a:bodyPr>
           <a:lstStyle/>
           <a:p>
-            <a:pPr algn="ctr" indent="0" marL="0">
-              <a:buNone/>
-            </a:pPr>
-            <a:r>
-              <a:rPr lang="en-US" sz="1500" b="1" dirty="0">
-                <a:solidFill>
-                  <a:srgbClr val="FFFFFF"/>
-                </a:solidFill>
-                <a:latin typeface="Aptos" pitchFamily="34" charset="0"/>
-                <a:ea typeface="Aptos" pitchFamily="34" charset="-122"/>
-                <a:cs typeface="Aptos" pitchFamily="34" charset="-120"/>
-              </a:rPr>
-              <a:t>Plan</a:t>
-            </a:r>
-            <a:endParaRPr lang="en-US" sz="1500" dirty="0"/>
+            <a:r>
+              <a:rPr lang="en-US" sz="1380" dirty="0">
+                <a:solidFill>
+                  <a:srgbClr val="17364A"/>
+                </a:solidFill>
+                <a:latin typeface="Aptos" pitchFamily="34" charset="0"/>
+                <a:ea typeface="Aptos" pitchFamily="34" charset="-122"/>
+                <a:cs typeface="Aptos" pitchFamily="34" charset="-120"/>
+              </a:rPr>
+              <a:t>What equity, privacy, legal, security, or public trust risks require review?</a:t>
+            </a:r>
+            <a:endParaRPr lang="en-US" sz="1380" dirty="0"/>
+          </a:p>
+          <a:p>
+            <a:r>
+              <a:rPr lang="en-US" sz="1380" dirty="0">
+                <a:solidFill>
+                  <a:srgbClr val="17364A"/>
+                </a:solidFill>
+                <a:latin typeface="Aptos" pitchFamily="34" charset="0"/>
+                <a:ea typeface="Aptos" pitchFamily="34" charset="-122"/>
+                <a:cs typeface="Aptos" pitchFamily="34" charset="-120"/>
+              </a:rPr>
+              <a:t>How will the agency know when the workflow needs to be revised?</a:t>
+            </a:r>
+            <a:endParaRPr lang="en-US" sz="1380" dirty="0"/>
           </a:p>
         </p:txBody>
       </p:sp>
       <p:sp>
         <p:nvSpPr>
           <p:cNvPr id="16" name="Shape 14"/>
-          <p:cNvSpPr/>
-          <p:nvPr/>
-        </p:nvSpPr>
-        <p:spPr>
-          <a:xfrm>
-            <a:off x="8976360" y="3319272"/>
-            <a:ext cx="792480" cy="749808"/>
-          </a:xfrm>
-          <a:prstGeom prst="roundRect">
-            <a:avLst>
-              <a:gd name="adj" fmla="val 14634"/>
-            </a:avLst>
-          </a:prstGeom>
-          <a:solidFill>
-            <a:srgbClr val="2F8A28"/>
-          </a:solidFill>
-          <a:ln w="12700">
-            <a:solidFill>
-              <a:srgbClr val="2F8A28"/>
-            </a:solidFill>
-            <a:prstDash val="solid"/>
-          </a:ln>
-        </p:spPr>
-      </p:sp>
-      <p:sp>
-        <p:nvSpPr>
-          <p:cNvPr id="17" name="Text 15"/>
-          <p:cNvSpPr/>
-          <p:nvPr/>
-        </p:nvSpPr>
-        <p:spPr>
-          <a:xfrm>
-            <a:off x="9049512" y="3511296"/>
-            <a:ext cx="646176" cy="310896"/>
-          </a:xfrm>
-          <a:prstGeom prst="rect">
-            <a:avLst/>
-          </a:prstGeom>
-          <a:noFill/>
-          <a:ln/>
-        </p:spPr>
-        <p:txBody>
-          <a:bodyPr wrap="square" lIns="0" tIns="0" rIns="0" bIns="0" rtlCol="0" anchor="ctr">
-            <a:normAutofit/>
-          </a:bodyPr>
-          <a:lstStyle/>
-          <a:p>
-            <a:pPr algn="ctr" indent="0" marL="0">
-              <a:buNone/>
-            </a:pPr>
-            <a:r>
-              <a:rPr lang="en-US" sz="1500" b="1" dirty="0">
-                <a:solidFill>
-                  <a:srgbClr val="FFFFFF"/>
-                </a:solidFill>
-                <a:latin typeface="Aptos" pitchFamily="34" charset="0"/>
-                <a:ea typeface="Aptos" pitchFamily="34" charset="-122"/>
-                <a:cs typeface="Aptos" pitchFamily="34" charset="-120"/>
-              </a:rPr>
-              <a:t>Do</a:t>
-            </a:r>
-            <a:endParaRPr lang="en-US" sz="1500" dirty="0"/>
-          </a:p>
-        </p:txBody>
-      </p:sp>
-      <p:sp>
-        <p:nvSpPr>
-          <p:cNvPr id="18" name="Shape 16"/>
-          <p:cNvSpPr/>
-          <p:nvPr/>
-        </p:nvSpPr>
-        <p:spPr>
-          <a:xfrm>
-            <a:off x="10024872" y="3319272"/>
-            <a:ext cx="792480" cy="749808"/>
-          </a:xfrm>
-          <a:prstGeom prst="roundRect">
-            <a:avLst>
-              <a:gd name="adj" fmla="val 14634"/>
-            </a:avLst>
-          </a:prstGeom>
-          <a:solidFill>
-            <a:srgbClr val="D69A2D"/>
-          </a:solidFill>
-          <a:ln w="12700">
-            <a:solidFill>
-              <a:srgbClr val="D69A2D"/>
-            </a:solidFill>
-            <a:prstDash val="solid"/>
-          </a:ln>
-        </p:spPr>
-      </p:sp>
-      <p:sp>
-        <p:nvSpPr>
-          <p:cNvPr id="19" name="Text 17"/>
-          <p:cNvSpPr/>
-          <p:nvPr/>
-        </p:nvSpPr>
-        <p:spPr>
-          <a:xfrm>
-            <a:off x="10098024" y="3511296"/>
-            <a:ext cx="646176" cy="310896"/>
-          </a:xfrm>
-          <a:prstGeom prst="rect">
-            <a:avLst/>
-          </a:prstGeom>
-          <a:noFill/>
-          <a:ln/>
-        </p:spPr>
-        <p:txBody>
-          <a:bodyPr wrap="square" lIns="0" tIns="0" rIns="0" bIns="0" rtlCol="0" anchor="ctr">
-            <a:normAutofit/>
-          </a:bodyPr>
-          <a:lstStyle/>
-          <a:p>
-            <a:pPr algn="ctr" indent="0" marL="0">
-              <a:buNone/>
-            </a:pPr>
-            <a:r>
-              <a:rPr lang="en-US" sz="1500" b="1" dirty="0">
-                <a:solidFill>
-                  <a:srgbClr val="FFFFFF"/>
-                </a:solidFill>
-                <a:latin typeface="Aptos" pitchFamily="34" charset="0"/>
-                <a:ea typeface="Aptos" pitchFamily="34" charset="-122"/>
-                <a:cs typeface="Aptos" pitchFamily="34" charset="-120"/>
-              </a:rPr>
-              <a:t>Review</a:t>
-            </a:r>
-            <a:endParaRPr lang="en-US" sz="1500" dirty="0"/>
-          </a:p>
-        </p:txBody>
-      </p:sp>
-      <p:sp>
-        <p:nvSpPr>
-          <p:cNvPr id="20" name="Shape 18"/>
-          <p:cNvSpPr/>
-          <p:nvPr/>
-        </p:nvSpPr>
-        <p:spPr>
-          <a:xfrm>
-            <a:off x="8293608" y="4389120"/>
-            <a:ext cx="2157984" cy="0"/>
-          </a:xfrm>
-          <a:prstGeom prst="line">
-            <a:avLst/>
-          </a:prstGeom>
-          <a:noFill/>
-          <a:ln w="25400">
-            <a:solidFill>
-              <a:srgbClr val="8ABBD8"/>
-            </a:solidFill>
-            <a:prstDash val="solid"/>
-          </a:ln>
-        </p:spPr>
-      </p:sp>
-      <p:sp>
-        <p:nvSpPr>
-          <p:cNvPr id="21" name="Text 19"/>
-          <p:cNvSpPr/>
-          <p:nvPr/>
-        </p:nvSpPr>
-        <p:spPr>
-          <a:xfrm>
-            <a:off x="7909560" y="3977640"/>
-            <a:ext cx="2926080" cy="182880"/>
-          </a:xfrm>
-          <a:prstGeom prst="rect">
-            <a:avLst/>
-          </a:prstGeom>
-          <a:noFill/>
-          <a:ln/>
-        </p:spPr>
-        <p:txBody>
-          <a:bodyPr wrap="square" lIns="0" tIns="0" rIns="0" bIns="0" rtlCol="0" anchor="ctr"/>
-          <a:lstStyle/>
-          <a:p>
-            <a:pPr algn="ctr" indent="0" marL="0">
-              <a:buNone/>
-            </a:pPr>
-            <a:r>
-              <a:rPr lang="en-US" sz="1000" dirty="0">
-                <a:solidFill>
-                  <a:srgbClr val="003A63"/>
-                </a:solidFill>
-                <a:latin typeface="Aptos" pitchFamily="34" charset="0"/>
-                <a:ea typeface="Aptos" pitchFamily="34" charset="-122"/>
-                <a:cs typeface="Aptos" pitchFamily="34" charset="-120"/>
-              </a:rPr>
-              <a:t>Dependencies visible</a:t>
-            </a:r>
-            <a:endParaRPr lang="en-US" sz="1000" dirty="0"/>
-          </a:p>
-        </p:txBody>
-      </p:sp>
-      <p:sp>
-        <p:nvSpPr>
-          <p:cNvPr id="22" name="Shape 20"/>
           <p:cNvSpPr/>
           <p:nvPr/>
         </p:nvSpPr>
@@ -8033,7 +7169,7 @@
       </p:sp>
       <p:sp>
         <p:nvSpPr>
-          <p:cNvPr id="23" name="Text 21"/>
+          <p:cNvPr id="17" name="Text 15"/>
           <p:cNvSpPr/>
           <p:nvPr/>
         </p:nvSpPr>
@@ -8072,7 +7208,7 @@
       </p:sp>
       <p:sp>
         <p:nvSpPr>
-          <p:cNvPr id="24" name="Text 22"/>
+          <p:cNvPr id="18" name="Text 16"/>
           <p:cNvSpPr/>
           <p:nvPr/>
         </p:nvSpPr>
@@ -8566,13 +7702,11 @@
             </a:avLst>
           </a:prstGeom>
           <a:solidFill>
-            <a:srgbClr val="FFFFFF">
-              <a:alpha val="88000"/>
-            </a:srgbClr>
+            <a:srgbClr val="FFFFFF"/>
           </a:solidFill>
           <a:ln w="12700">
             <a:solidFill>
-              <a:srgbClr val="D6E8F2"/>
+              <a:srgbClr val="B9D7E6"/>
             </a:solidFill>
             <a:prstDash val="solid"/>
           </a:ln>
@@ -8580,30 +7714,42 @@
       </p:sp>
       <p:sp>
         <p:nvSpPr>
-          <p:cNvPr id="14" name="Shape 12"/>
-          <p:cNvSpPr/>
-          <p:nvPr/>
-        </p:nvSpPr>
-        <p:spPr>
-          <a:xfrm>
-            <a:off x="7927848" y="3319272"/>
-            <a:ext cx="792480" cy="749808"/>
-          </a:xfrm>
-          <a:prstGeom prst="roundRect">
-            <a:avLst>
-              <a:gd name="adj" fmla="val 14634"/>
-            </a:avLst>
-          </a:prstGeom>
-          <a:solidFill>
-            <a:srgbClr val="0068B7"/>
-          </a:solidFill>
-          <a:ln w="12700">
-            <a:solidFill>
-              <a:srgbClr val="0068B7"/>
-            </a:solidFill>
-            <a:prstDash val="solid"/>
-          </a:ln>
-        </p:spPr>
+          <p:cNvPr id="14" name="Text 12"/>
+          <p:cNvSpPr/>
+          <p:nvPr/>
+        </p:nvSpPr>
+        <p:spPr>
+          <a:xfrm>
+            <a:off x="7799832" y="2935224"/>
+            <a:ext cx="3145536" cy="256032"/>
+          </a:xfrm>
+          <a:prstGeom prst="rect">
+            <a:avLst/>
+          </a:prstGeom>
+          <a:noFill/>
+          <a:ln/>
+        </p:spPr>
+        <p:txBody>
+          <a:bodyPr wrap="square" lIns="0" tIns="0" rIns="0" bIns="0" rtlCol="0" anchor="ctr"/>
+          <a:lstStyle/>
+          <a:p>
+            <a:pPr indent="0" marL="0">
+              <a:buNone/>
+            </a:pPr>
+            <a:r>
+              <a:rPr lang="en-US" sz="1300" b="1" dirty="0">
+                <a:solidFill>
+                  <a:srgbClr val="0068B7"/>
+                </a:solidFill>
+                <a:latin typeface="Aptos" pitchFamily="34" charset="0"/>
+                <a:ea typeface="Aptos" pitchFamily="34" charset="-122"/>
+                <a:cs typeface="Aptos" pitchFamily="34" charset="-120"/>
+              </a:rPr>
+              <a:t>Concept checkpoints</a:t>
+            </a:r>
+            <a:endParaRPr lang="en-US" sz="1300" dirty="0"/>
+          </a:p>
+        </p:txBody>
       </p:sp>
       <p:sp>
         <p:nvSpPr>
@@ -8613,240 +7759,53 @@
         </p:nvSpPr>
         <p:spPr>
           <a:xfrm>
-            <a:off x="8001000" y="3511296"/>
-            <a:ext cx="646176" cy="310896"/>
-          </a:xfrm>
-          <a:prstGeom prst="rect">
-            <a:avLst/>
-          </a:prstGeom>
-          <a:noFill/>
-          <a:ln/>
-        </p:spPr>
-        <p:txBody>
-          <a:bodyPr wrap="square" lIns="0" tIns="0" rIns="0" bIns="0" rtlCol="0" anchor="ctr">
+            <a:off x="7818120" y="3300984"/>
+            <a:ext cx="3090672" cy="877824"/>
+          </a:xfrm>
+          <a:prstGeom prst="rect">
+            <a:avLst/>
+          </a:prstGeom>
+          <a:noFill/>
+          <a:ln/>
+        </p:spPr>
+        <p:txBody>
+          <a:bodyPr wrap="square" lIns="254" tIns="254" rIns="254" bIns="254" rtlCol="0" anchor="t">
             <a:normAutofit/>
           </a:bodyPr>
           <a:lstStyle/>
           <a:p>
-            <a:pPr algn="ctr" indent="0" marL="0">
-              <a:buNone/>
-            </a:pPr>
-            <a:r>
-              <a:rPr lang="en-US" sz="1500" b="1" dirty="0">
-                <a:solidFill>
-                  <a:srgbClr val="FFFFFF"/>
-                </a:solidFill>
-                <a:latin typeface="Aptos" pitchFamily="34" charset="0"/>
-                <a:ea typeface="Aptos" pitchFamily="34" charset="-122"/>
-                <a:cs typeface="Aptos" pitchFamily="34" charset="-120"/>
-              </a:rPr>
-              <a:t>Plan</a:t>
-            </a:r>
-            <a:endParaRPr lang="en-US" sz="1500" dirty="0"/>
+            <a:r>
+              <a:rPr lang="en-US" sz="1380" dirty="0">
+                <a:solidFill>
+                  <a:srgbClr val="17364A"/>
+                </a:solidFill>
+                <a:latin typeface="Aptos" pitchFamily="34" charset="0"/>
+                <a:ea typeface="Aptos" pitchFamily="34" charset="-122"/>
+                <a:cs typeface="Aptos" pitchFamily="34" charset="-120"/>
+              </a:rPr>
+              <a:t>Create a practical grant and funding management for ai projects artifact for one.</a:t>
+            </a:r>
+            <a:endParaRPr lang="en-US" sz="1380" dirty="0"/>
+          </a:p>
+          <a:p>
+            <a:r>
+              <a:rPr lang="en-US" sz="1380" dirty="0">
+                <a:solidFill>
+                  <a:srgbClr val="17364A"/>
+                </a:solidFill>
+                <a:latin typeface="Aptos" pitchFamily="34" charset="0"/>
+                <a:ea typeface="Aptos" pitchFamily="34" charset="-122"/>
+                <a:cs typeface="Aptos" pitchFamily="34" charset="-120"/>
+              </a:rPr>
+              <a:t>The artifact should define the use case, affected roles, review criteria, safeguards,.</a:t>
+            </a:r>
+            <a:endParaRPr lang="en-US" sz="1380" dirty="0"/>
           </a:p>
         </p:txBody>
       </p:sp>
       <p:sp>
         <p:nvSpPr>
           <p:cNvPr id="16" name="Shape 14"/>
-          <p:cNvSpPr/>
-          <p:nvPr/>
-        </p:nvSpPr>
-        <p:spPr>
-          <a:xfrm>
-            <a:off x="8976360" y="3319272"/>
-            <a:ext cx="792480" cy="749808"/>
-          </a:xfrm>
-          <a:prstGeom prst="roundRect">
-            <a:avLst>
-              <a:gd name="adj" fmla="val 14634"/>
-            </a:avLst>
-          </a:prstGeom>
-          <a:solidFill>
-            <a:srgbClr val="2F8A28"/>
-          </a:solidFill>
-          <a:ln w="12700">
-            <a:solidFill>
-              <a:srgbClr val="2F8A28"/>
-            </a:solidFill>
-            <a:prstDash val="solid"/>
-          </a:ln>
-        </p:spPr>
-      </p:sp>
-      <p:sp>
-        <p:nvSpPr>
-          <p:cNvPr id="17" name="Text 15"/>
-          <p:cNvSpPr/>
-          <p:nvPr/>
-        </p:nvSpPr>
-        <p:spPr>
-          <a:xfrm>
-            <a:off x="9049512" y="3511296"/>
-            <a:ext cx="646176" cy="310896"/>
-          </a:xfrm>
-          <a:prstGeom prst="rect">
-            <a:avLst/>
-          </a:prstGeom>
-          <a:noFill/>
-          <a:ln/>
-        </p:spPr>
-        <p:txBody>
-          <a:bodyPr wrap="square" lIns="0" tIns="0" rIns="0" bIns="0" rtlCol="0" anchor="ctr">
-            <a:normAutofit/>
-          </a:bodyPr>
-          <a:lstStyle/>
-          <a:p>
-            <a:pPr algn="ctr" indent="0" marL="0">
-              <a:buNone/>
-            </a:pPr>
-            <a:r>
-              <a:rPr lang="en-US" sz="1500" b="1" dirty="0">
-                <a:solidFill>
-                  <a:srgbClr val="FFFFFF"/>
-                </a:solidFill>
-                <a:latin typeface="Aptos" pitchFamily="34" charset="0"/>
-                <a:ea typeface="Aptos" pitchFamily="34" charset="-122"/>
-                <a:cs typeface="Aptos" pitchFamily="34" charset="-120"/>
-              </a:rPr>
-              <a:t>Do</a:t>
-            </a:r>
-            <a:endParaRPr lang="en-US" sz="1500" dirty="0"/>
-          </a:p>
-        </p:txBody>
-      </p:sp>
-      <p:sp>
-        <p:nvSpPr>
-          <p:cNvPr id="18" name="Shape 16"/>
-          <p:cNvSpPr/>
-          <p:nvPr/>
-        </p:nvSpPr>
-        <p:spPr>
-          <a:xfrm>
-            <a:off x="10024872" y="3319272"/>
-            <a:ext cx="792480" cy="749808"/>
-          </a:xfrm>
-          <a:prstGeom prst="roundRect">
-            <a:avLst>
-              <a:gd name="adj" fmla="val 14634"/>
-            </a:avLst>
-          </a:prstGeom>
-          <a:solidFill>
-            <a:srgbClr val="D69A2D"/>
-          </a:solidFill>
-          <a:ln w="12700">
-            <a:solidFill>
-              <a:srgbClr val="D69A2D"/>
-            </a:solidFill>
-            <a:prstDash val="solid"/>
-          </a:ln>
-        </p:spPr>
-      </p:sp>
-      <p:sp>
-        <p:nvSpPr>
-          <p:cNvPr id="19" name="Text 17"/>
-          <p:cNvSpPr/>
-          <p:nvPr/>
-        </p:nvSpPr>
-        <p:spPr>
-          <a:xfrm>
-            <a:off x="10098024" y="3511296"/>
-            <a:ext cx="646176" cy="310896"/>
-          </a:xfrm>
-          <a:prstGeom prst="rect">
-            <a:avLst/>
-          </a:prstGeom>
-          <a:noFill/>
-          <a:ln/>
-        </p:spPr>
-        <p:txBody>
-          <a:bodyPr wrap="square" lIns="0" tIns="0" rIns="0" bIns="0" rtlCol="0" anchor="ctr">
-            <a:normAutofit/>
-          </a:bodyPr>
-          <a:lstStyle/>
-          <a:p>
-            <a:pPr algn="ctr" indent="0" marL="0">
-              <a:buNone/>
-            </a:pPr>
-            <a:r>
-              <a:rPr lang="en-US" sz="1500" b="1" dirty="0">
-                <a:solidFill>
-                  <a:srgbClr val="FFFFFF"/>
-                </a:solidFill>
-                <a:latin typeface="Aptos" pitchFamily="34" charset="0"/>
-                <a:ea typeface="Aptos" pitchFamily="34" charset="-122"/>
-                <a:cs typeface="Aptos" pitchFamily="34" charset="-120"/>
-              </a:rPr>
-              <a:t>Review</a:t>
-            </a:r>
-            <a:endParaRPr lang="en-US" sz="1500" dirty="0"/>
-          </a:p>
-        </p:txBody>
-      </p:sp>
-      <p:sp>
-        <p:nvSpPr>
-          <p:cNvPr id="20" name="Shape 18"/>
-          <p:cNvSpPr/>
-          <p:nvPr/>
-        </p:nvSpPr>
-        <p:spPr>
-          <a:xfrm>
-            <a:off x="8293608" y="4389120"/>
-            <a:ext cx="2157984" cy="0"/>
-          </a:xfrm>
-          <a:prstGeom prst="line">
-            <a:avLst/>
-          </a:prstGeom>
-          <a:noFill/>
-          <a:ln w="25400">
-            <a:solidFill>
-              <a:srgbClr val="8ABBD8"/>
-            </a:solidFill>
-            <a:prstDash val="solid"/>
-          </a:ln>
-        </p:spPr>
-      </p:sp>
-      <p:sp>
-        <p:nvSpPr>
-          <p:cNvPr id="21" name="Text 19"/>
-          <p:cNvSpPr/>
-          <p:nvPr/>
-        </p:nvSpPr>
-        <p:spPr>
-          <a:xfrm>
-            <a:off x="7909560" y="3977640"/>
-            <a:ext cx="2926080" cy="182880"/>
-          </a:xfrm>
-          <a:prstGeom prst="rect">
-            <a:avLst/>
-          </a:prstGeom>
-          <a:noFill/>
-          <a:ln/>
-        </p:spPr>
-        <p:txBody>
-          <a:bodyPr wrap="square" lIns="0" tIns="0" rIns="0" bIns="0" rtlCol="0" anchor="ctr"/>
-          <a:lstStyle/>
-          <a:p>
-            <a:pPr algn="ctr" indent="0" marL="0">
-              <a:buNone/>
-            </a:pPr>
-            <a:r>
-              <a:rPr lang="en-US" sz="1000" dirty="0">
-                <a:solidFill>
-                  <a:srgbClr val="003A63"/>
-                </a:solidFill>
-                <a:latin typeface="Aptos" pitchFamily="34" charset="0"/>
-                <a:ea typeface="Aptos" pitchFamily="34" charset="-122"/>
-                <a:cs typeface="Aptos" pitchFamily="34" charset="-120"/>
-              </a:rPr>
-              <a:t>Dependencies visible</a:t>
-            </a:r>
-            <a:endParaRPr lang="en-US" sz="1000" dirty="0"/>
-          </a:p>
-        </p:txBody>
-      </p:sp>
-      <p:sp>
-        <p:nvSpPr>
-          <p:cNvPr id="22" name="Shape 20"/>
           <p:cNvSpPr/>
           <p:nvPr/>
         </p:nvSpPr>
@@ -8873,7 +7832,7 @@
       </p:sp>
       <p:sp>
         <p:nvSpPr>
-          <p:cNvPr id="23" name="Text 21"/>
+          <p:cNvPr id="17" name="Text 15"/>
           <p:cNvSpPr/>
           <p:nvPr/>
         </p:nvSpPr>
@@ -8912,7 +7871,7 @@
       </p:sp>
       <p:sp>
         <p:nvSpPr>
-          <p:cNvPr id="24" name="Text 22"/>
+          <p:cNvPr id="18" name="Text 16"/>
           <p:cNvSpPr/>
           <p:nvPr/>
         </p:nvSpPr>
@@ -9420,13 +8379,11 @@
             </a:avLst>
           </a:prstGeom>
           <a:solidFill>
-            <a:srgbClr val="FFFFFF">
-              <a:alpha val="88000"/>
-            </a:srgbClr>
+            <a:srgbClr val="FFFFFF"/>
           </a:solidFill>
           <a:ln w="12700">
             <a:solidFill>
-              <a:srgbClr val="D6E8F2"/>
+              <a:srgbClr val="B9D7E6"/>
             </a:solidFill>
             <a:prstDash val="solid"/>
           </a:ln>
@@ -9434,30 +8391,42 @@
       </p:sp>
       <p:sp>
         <p:nvSpPr>
-          <p:cNvPr id="14" name="Shape 12"/>
-          <p:cNvSpPr/>
-          <p:nvPr/>
-        </p:nvSpPr>
-        <p:spPr>
-          <a:xfrm>
-            <a:off x="7927848" y="3319272"/>
-            <a:ext cx="792480" cy="749808"/>
-          </a:xfrm>
-          <a:prstGeom prst="roundRect">
-            <a:avLst>
-              <a:gd name="adj" fmla="val 14634"/>
-            </a:avLst>
-          </a:prstGeom>
-          <a:solidFill>
-            <a:srgbClr val="0068B7"/>
-          </a:solidFill>
-          <a:ln w="12700">
-            <a:solidFill>
-              <a:srgbClr val="0068B7"/>
-            </a:solidFill>
-            <a:prstDash val="solid"/>
-          </a:ln>
-        </p:spPr>
+          <p:cNvPr id="14" name="Text 12"/>
+          <p:cNvSpPr/>
+          <p:nvPr/>
+        </p:nvSpPr>
+        <p:spPr>
+          <a:xfrm>
+            <a:off x="7799832" y="2935224"/>
+            <a:ext cx="3145536" cy="256032"/>
+          </a:xfrm>
+          <a:prstGeom prst="rect">
+            <a:avLst/>
+          </a:prstGeom>
+          <a:noFill/>
+          <a:ln/>
+        </p:spPr>
+        <p:txBody>
+          <a:bodyPr wrap="square" lIns="0" tIns="0" rIns="0" bIns="0" rtlCol="0" anchor="ctr"/>
+          <a:lstStyle/>
+          <a:p>
+            <a:pPr indent="0" marL="0">
+              <a:buNone/>
+            </a:pPr>
+            <a:r>
+              <a:rPr lang="en-US" sz="1300" b="1" dirty="0">
+                <a:solidFill>
+                  <a:srgbClr val="0068B7"/>
+                </a:solidFill>
+                <a:latin typeface="Aptos" pitchFamily="34" charset="0"/>
+                <a:ea typeface="Aptos" pitchFamily="34" charset="-122"/>
+                <a:cs typeface="Aptos" pitchFamily="34" charset="-120"/>
+              </a:rPr>
+              <a:t>Concept checkpoints</a:t>
+            </a:r>
+            <a:endParaRPr lang="en-US" sz="1300" dirty="0"/>
+          </a:p>
+        </p:txBody>
       </p:sp>
       <p:sp>
         <p:nvSpPr>
@@ -9467,240 +8436,67 @@
         </p:nvSpPr>
         <p:spPr>
           <a:xfrm>
-            <a:off x="8001000" y="3511296"/>
-            <a:ext cx="646176" cy="310896"/>
-          </a:xfrm>
-          <a:prstGeom prst="rect">
-            <a:avLst/>
-          </a:prstGeom>
-          <a:noFill/>
-          <a:ln/>
-        </p:spPr>
-        <p:txBody>
-          <a:bodyPr wrap="square" lIns="0" tIns="0" rIns="0" bIns="0" rtlCol="0" anchor="ctr">
+            <a:off x="7818120" y="3300984"/>
+            <a:ext cx="3090672" cy="877824"/>
+          </a:xfrm>
+          <a:prstGeom prst="rect">
+            <a:avLst/>
+          </a:prstGeom>
+          <a:noFill/>
+          <a:ln/>
+        </p:spPr>
+        <p:txBody>
+          <a:bodyPr wrap="square" lIns="254" tIns="254" rIns="254" bIns="254" rtlCol="0" anchor="t">
             <a:normAutofit/>
           </a:bodyPr>
           <a:lstStyle/>
           <a:p>
-            <a:pPr algn="ctr" indent="0" marL="0">
-              <a:buNone/>
-            </a:pPr>
-            <a:r>
-              <a:rPr lang="en-US" sz="1500" b="1" dirty="0">
-                <a:solidFill>
-                  <a:srgbClr val="FFFFFF"/>
-                </a:solidFill>
-                <a:latin typeface="Aptos" pitchFamily="34" charset="0"/>
-                <a:ea typeface="Aptos" pitchFamily="34" charset="-122"/>
-                <a:cs typeface="Aptos" pitchFamily="34" charset="-120"/>
-              </a:rPr>
-              <a:t>Plan</a:t>
-            </a:r>
-            <a:endParaRPr lang="en-US" sz="1500" dirty="0"/>
+            <a:r>
+              <a:rPr lang="en-US" sz="1380" dirty="0">
+                <a:solidFill>
+                  <a:srgbClr val="17364A"/>
+                </a:solidFill>
+                <a:latin typeface="Aptos" pitchFamily="34" charset="0"/>
+                <a:ea typeface="Aptos" pitchFamily="34" charset="-122"/>
+                <a:cs typeface="Aptos" pitchFamily="34" charset="-120"/>
+              </a:rPr>
+              <a:t>Grant and Funding Management for AI Projects artifact</a:t>
+            </a:r>
+            <a:endParaRPr lang="en-US" sz="1380" dirty="0"/>
+          </a:p>
+          <a:p>
+            <a:r>
+              <a:rPr lang="en-US" sz="1380" dirty="0">
+                <a:solidFill>
+                  <a:srgbClr val="17364A"/>
+                </a:solidFill>
+                <a:latin typeface="Aptos" pitchFamily="34" charset="0"/>
+                <a:ea typeface="Aptos" pitchFamily="34" charset="-122"/>
+                <a:cs typeface="Aptos" pitchFamily="34" charset="-120"/>
+              </a:rPr>
+              <a:t>Role and responsibility table</a:t>
+            </a:r>
+            <a:endParaRPr lang="en-US" sz="1380" dirty="0"/>
+          </a:p>
+          <a:p>
+            <a:r>
+              <a:rPr lang="en-US" sz="1380" dirty="0">
+                <a:solidFill>
+                  <a:srgbClr val="17364A"/>
+                </a:solidFill>
+                <a:latin typeface="Aptos" pitchFamily="34" charset="0"/>
+                <a:ea typeface="Aptos" pitchFamily="34" charset="-122"/>
+                <a:cs typeface="Aptos" pitchFamily="34" charset="-120"/>
+              </a:rPr>
+              <a:t>Risk and safeguard summary</a:t>
+            </a:r>
+            <a:endParaRPr lang="en-US" sz="1380" dirty="0"/>
           </a:p>
         </p:txBody>
       </p:sp>
       <p:sp>
         <p:nvSpPr>
           <p:cNvPr id="16" name="Shape 14"/>
-          <p:cNvSpPr/>
-          <p:nvPr/>
-        </p:nvSpPr>
-        <p:spPr>
-          <a:xfrm>
-            <a:off x="8976360" y="3319272"/>
-            <a:ext cx="792480" cy="749808"/>
-          </a:xfrm>
-          <a:prstGeom prst="roundRect">
-            <a:avLst>
-              <a:gd name="adj" fmla="val 14634"/>
-            </a:avLst>
-          </a:prstGeom>
-          <a:solidFill>
-            <a:srgbClr val="2F8A28"/>
-          </a:solidFill>
-          <a:ln w="12700">
-            <a:solidFill>
-              <a:srgbClr val="2F8A28"/>
-            </a:solidFill>
-            <a:prstDash val="solid"/>
-          </a:ln>
-        </p:spPr>
-      </p:sp>
-      <p:sp>
-        <p:nvSpPr>
-          <p:cNvPr id="17" name="Text 15"/>
-          <p:cNvSpPr/>
-          <p:nvPr/>
-        </p:nvSpPr>
-        <p:spPr>
-          <a:xfrm>
-            <a:off x="9049512" y="3511296"/>
-            <a:ext cx="646176" cy="310896"/>
-          </a:xfrm>
-          <a:prstGeom prst="rect">
-            <a:avLst/>
-          </a:prstGeom>
-          <a:noFill/>
-          <a:ln/>
-        </p:spPr>
-        <p:txBody>
-          <a:bodyPr wrap="square" lIns="0" tIns="0" rIns="0" bIns="0" rtlCol="0" anchor="ctr">
-            <a:normAutofit/>
-          </a:bodyPr>
-          <a:lstStyle/>
-          <a:p>
-            <a:pPr algn="ctr" indent="0" marL="0">
-              <a:buNone/>
-            </a:pPr>
-            <a:r>
-              <a:rPr lang="en-US" sz="1500" b="1" dirty="0">
-                <a:solidFill>
-                  <a:srgbClr val="FFFFFF"/>
-                </a:solidFill>
-                <a:latin typeface="Aptos" pitchFamily="34" charset="0"/>
-                <a:ea typeface="Aptos" pitchFamily="34" charset="-122"/>
-                <a:cs typeface="Aptos" pitchFamily="34" charset="-120"/>
-              </a:rPr>
-              <a:t>Do</a:t>
-            </a:r>
-            <a:endParaRPr lang="en-US" sz="1500" dirty="0"/>
-          </a:p>
-        </p:txBody>
-      </p:sp>
-      <p:sp>
-        <p:nvSpPr>
-          <p:cNvPr id="18" name="Shape 16"/>
-          <p:cNvSpPr/>
-          <p:nvPr/>
-        </p:nvSpPr>
-        <p:spPr>
-          <a:xfrm>
-            <a:off x="10024872" y="3319272"/>
-            <a:ext cx="792480" cy="749808"/>
-          </a:xfrm>
-          <a:prstGeom prst="roundRect">
-            <a:avLst>
-              <a:gd name="adj" fmla="val 14634"/>
-            </a:avLst>
-          </a:prstGeom>
-          <a:solidFill>
-            <a:srgbClr val="D69A2D"/>
-          </a:solidFill>
-          <a:ln w="12700">
-            <a:solidFill>
-              <a:srgbClr val="D69A2D"/>
-            </a:solidFill>
-            <a:prstDash val="solid"/>
-          </a:ln>
-        </p:spPr>
-      </p:sp>
-      <p:sp>
-        <p:nvSpPr>
-          <p:cNvPr id="19" name="Text 17"/>
-          <p:cNvSpPr/>
-          <p:nvPr/>
-        </p:nvSpPr>
-        <p:spPr>
-          <a:xfrm>
-            <a:off x="10098024" y="3511296"/>
-            <a:ext cx="646176" cy="310896"/>
-          </a:xfrm>
-          <a:prstGeom prst="rect">
-            <a:avLst/>
-          </a:prstGeom>
-          <a:noFill/>
-          <a:ln/>
-        </p:spPr>
-        <p:txBody>
-          <a:bodyPr wrap="square" lIns="0" tIns="0" rIns="0" bIns="0" rtlCol="0" anchor="ctr">
-            <a:normAutofit/>
-          </a:bodyPr>
-          <a:lstStyle/>
-          <a:p>
-            <a:pPr algn="ctr" indent="0" marL="0">
-              <a:buNone/>
-            </a:pPr>
-            <a:r>
-              <a:rPr lang="en-US" sz="1500" b="1" dirty="0">
-                <a:solidFill>
-                  <a:srgbClr val="FFFFFF"/>
-                </a:solidFill>
-                <a:latin typeface="Aptos" pitchFamily="34" charset="0"/>
-                <a:ea typeface="Aptos" pitchFamily="34" charset="-122"/>
-                <a:cs typeface="Aptos" pitchFamily="34" charset="-120"/>
-              </a:rPr>
-              <a:t>Review</a:t>
-            </a:r>
-            <a:endParaRPr lang="en-US" sz="1500" dirty="0"/>
-          </a:p>
-        </p:txBody>
-      </p:sp>
-      <p:sp>
-        <p:nvSpPr>
-          <p:cNvPr id="20" name="Shape 18"/>
-          <p:cNvSpPr/>
-          <p:nvPr/>
-        </p:nvSpPr>
-        <p:spPr>
-          <a:xfrm>
-            <a:off x="8293608" y="4389120"/>
-            <a:ext cx="2157984" cy="0"/>
-          </a:xfrm>
-          <a:prstGeom prst="line">
-            <a:avLst/>
-          </a:prstGeom>
-          <a:noFill/>
-          <a:ln w="25400">
-            <a:solidFill>
-              <a:srgbClr val="8ABBD8"/>
-            </a:solidFill>
-            <a:prstDash val="solid"/>
-          </a:ln>
-        </p:spPr>
-      </p:sp>
-      <p:sp>
-        <p:nvSpPr>
-          <p:cNvPr id="21" name="Text 19"/>
-          <p:cNvSpPr/>
-          <p:nvPr/>
-        </p:nvSpPr>
-        <p:spPr>
-          <a:xfrm>
-            <a:off x="7909560" y="3977640"/>
-            <a:ext cx="2926080" cy="182880"/>
-          </a:xfrm>
-          <a:prstGeom prst="rect">
-            <a:avLst/>
-          </a:prstGeom>
-          <a:noFill/>
-          <a:ln/>
-        </p:spPr>
-        <p:txBody>
-          <a:bodyPr wrap="square" lIns="0" tIns="0" rIns="0" bIns="0" rtlCol="0" anchor="ctr"/>
-          <a:lstStyle/>
-          <a:p>
-            <a:pPr algn="ctr" indent="0" marL="0">
-              <a:buNone/>
-            </a:pPr>
-            <a:r>
-              <a:rPr lang="en-US" sz="1000" dirty="0">
-                <a:solidFill>
-                  <a:srgbClr val="003A63"/>
-                </a:solidFill>
-                <a:latin typeface="Aptos" pitchFamily="34" charset="0"/>
-                <a:ea typeface="Aptos" pitchFamily="34" charset="-122"/>
-                <a:cs typeface="Aptos" pitchFamily="34" charset="-120"/>
-              </a:rPr>
-              <a:t>Dependencies visible</a:t>
-            </a:r>
-            <a:endParaRPr lang="en-US" sz="1000" dirty="0"/>
-          </a:p>
-        </p:txBody>
-      </p:sp>
-      <p:sp>
-        <p:nvSpPr>
-          <p:cNvPr id="22" name="Shape 20"/>
           <p:cNvSpPr/>
           <p:nvPr/>
         </p:nvSpPr>
@@ -9727,7 +8523,7 @@
       </p:sp>
       <p:sp>
         <p:nvSpPr>
-          <p:cNvPr id="23" name="Text 21"/>
+          <p:cNvPr id="17" name="Text 15"/>
           <p:cNvSpPr/>
           <p:nvPr/>
         </p:nvSpPr>
@@ -9766,7 +8562,7 @@
       </p:sp>
       <p:sp>
         <p:nvSpPr>
-          <p:cNvPr id="24" name="Text 22"/>
+          <p:cNvPr id="18" name="Text 16"/>
           <p:cNvSpPr/>
           <p:nvPr/>
         </p:nvSpPr>
@@ -10260,13 +9056,11 @@
             </a:avLst>
           </a:prstGeom>
           <a:solidFill>
-            <a:srgbClr val="FFFFFF">
-              <a:alpha val="88000"/>
-            </a:srgbClr>
+            <a:srgbClr val="FFFFFF"/>
           </a:solidFill>
           <a:ln w="12700">
             <a:solidFill>
-              <a:srgbClr val="D6E8F2"/>
+              <a:srgbClr val="B9D7E6"/>
             </a:solidFill>
             <a:prstDash val="solid"/>
           </a:ln>
@@ -10274,30 +9068,42 @@
       </p:sp>
       <p:sp>
         <p:nvSpPr>
-          <p:cNvPr id="14" name="Shape 12"/>
-          <p:cNvSpPr/>
-          <p:nvPr/>
-        </p:nvSpPr>
-        <p:spPr>
-          <a:xfrm>
-            <a:off x="7927848" y="3319272"/>
-            <a:ext cx="792480" cy="749808"/>
-          </a:xfrm>
-          <a:prstGeom prst="roundRect">
-            <a:avLst>
-              <a:gd name="adj" fmla="val 14634"/>
-            </a:avLst>
-          </a:prstGeom>
-          <a:solidFill>
-            <a:srgbClr val="0068B7"/>
-          </a:solidFill>
-          <a:ln w="12700">
-            <a:solidFill>
-              <a:srgbClr val="0068B7"/>
-            </a:solidFill>
-            <a:prstDash val="solid"/>
-          </a:ln>
-        </p:spPr>
+          <p:cNvPr id="14" name="Text 12"/>
+          <p:cNvSpPr/>
+          <p:nvPr/>
+        </p:nvSpPr>
+        <p:spPr>
+          <a:xfrm>
+            <a:off x="7799832" y="2935224"/>
+            <a:ext cx="3145536" cy="256032"/>
+          </a:xfrm>
+          <a:prstGeom prst="rect">
+            <a:avLst/>
+          </a:prstGeom>
+          <a:noFill/>
+          <a:ln/>
+        </p:spPr>
+        <p:txBody>
+          <a:bodyPr wrap="square" lIns="0" tIns="0" rIns="0" bIns="0" rtlCol="0" anchor="ctr"/>
+          <a:lstStyle/>
+          <a:p>
+            <a:pPr indent="0" marL="0">
+              <a:buNone/>
+            </a:pPr>
+            <a:r>
+              <a:rPr lang="en-US" sz="1300" b="1" dirty="0">
+                <a:solidFill>
+                  <a:srgbClr val="0068B7"/>
+                </a:solidFill>
+                <a:latin typeface="Aptos" pitchFamily="34" charset="0"/>
+                <a:ea typeface="Aptos" pitchFamily="34" charset="-122"/>
+                <a:cs typeface="Aptos" pitchFamily="34" charset="-120"/>
+              </a:rPr>
+              <a:t>Concept checkpoints</a:t>
+            </a:r>
+            <a:endParaRPr lang="en-US" sz="1300" dirty="0"/>
+          </a:p>
+        </p:txBody>
       </p:sp>
       <p:sp>
         <p:nvSpPr>
@@ -10307,240 +9113,53 @@
         </p:nvSpPr>
         <p:spPr>
           <a:xfrm>
-            <a:off x="8001000" y="3511296"/>
-            <a:ext cx="646176" cy="310896"/>
-          </a:xfrm>
-          <a:prstGeom prst="rect">
-            <a:avLst/>
-          </a:prstGeom>
-          <a:noFill/>
-          <a:ln/>
-        </p:spPr>
-        <p:txBody>
-          <a:bodyPr wrap="square" lIns="0" tIns="0" rIns="0" bIns="0" rtlCol="0" anchor="ctr">
+            <a:off x="7818120" y="3300984"/>
+            <a:ext cx="3090672" cy="877824"/>
+          </a:xfrm>
+          <a:prstGeom prst="rect">
+            <a:avLst/>
+          </a:prstGeom>
+          <a:noFill/>
+          <a:ln/>
+        </p:spPr>
+        <p:txBody>
+          <a:bodyPr wrap="square" lIns="254" tIns="254" rIns="254" bIns="254" rtlCol="0" anchor="t">
             <a:normAutofit/>
           </a:bodyPr>
           <a:lstStyle/>
           <a:p>
-            <a:pPr algn="ctr" indent="0" marL="0">
-              <a:buNone/>
-            </a:pPr>
-            <a:r>
-              <a:rPr lang="en-US" sz="1500" b="1" dirty="0">
-                <a:solidFill>
-                  <a:srgbClr val="FFFFFF"/>
-                </a:solidFill>
-                <a:latin typeface="Aptos" pitchFamily="34" charset="0"/>
-                <a:ea typeface="Aptos" pitchFamily="34" charset="-122"/>
-                <a:cs typeface="Aptos" pitchFamily="34" charset="-120"/>
-              </a:rPr>
-              <a:t>Plan</a:t>
-            </a:r>
-            <a:endParaRPr lang="en-US" sz="1500" dirty="0"/>
+            <a:r>
+              <a:rPr lang="en-US" sz="1380" dirty="0">
+                <a:solidFill>
+                  <a:srgbClr val="17364A"/>
+                </a:solidFill>
+                <a:latin typeface="Aptos" pitchFamily="34" charset="0"/>
+                <a:ea typeface="Aptos" pitchFamily="34" charset="-122"/>
+                <a:cs typeface="Aptos" pitchFamily="34" charset="-120"/>
+              </a:rPr>
+              <a:t>Escalation and monitoring plan</a:t>
+            </a:r>
+            <a:endParaRPr lang="en-US" sz="1380" dirty="0"/>
+          </a:p>
+          <a:p>
+            <a:r>
+              <a:rPr lang="en-US" sz="1380" dirty="0">
+                <a:solidFill>
+                  <a:srgbClr val="17364A"/>
+                </a:solidFill>
+                <a:latin typeface="Aptos" pitchFamily="34" charset="0"/>
+                <a:ea typeface="Aptos" pitchFamily="34" charset="-122"/>
+                <a:cs typeface="Aptos" pitchFamily="34" charset="-120"/>
+              </a:rPr>
+              <a:t>Approval or review note</a:t>
+            </a:r>
+            <a:endParaRPr lang="en-US" sz="1380" dirty="0"/>
           </a:p>
         </p:txBody>
       </p:sp>
       <p:sp>
         <p:nvSpPr>
           <p:cNvPr id="16" name="Shape 14"/>
-          <p:cNvSpPr/>
-          <p:nvPr/>
-        </p:nvSpPr>
-        <p:spPr>
-          <a:xfrm>
-            <a:off x="8976360" y="3319272"/>
-            <a:ext cx="792480" cy="749808"/>
-          </a:xfrm>
-          <a:prstGeom prst="roundRect">
-            <a:avLst>
-              <a:gd name="adj" fmla="val 14634"/>
-            </a:avLst>
-          </a:prstGeom>
-          <a:solidFill>
-            <a:srgbClr val="2F8A28"/>
-          </a:solidFill>
-          <a:ln w="12700">
-            <a:solidFill>
-              <a:srgbClr val="2F8A28"/>
-            </a:solidFill>
-            <a:prstDash val="solid"/>
-          </a:ln>
-        </p:spPr>
-      </p:sp>
-      <p:sp>
-        <p:nvSpPr>
-          <p:cNvPr id="17" name="Text 15"/>
-          <p:cNvSpPr/>
-          <p:nvPr/>
-        </p:nvSpPr>
-        <p:spPr>
-          <a:xfrm>
-            <a:off x="9049512" y="3511296"/>
-            <a:ext cx="646176" cy="310896"/>
-          </a:xfrm>
-          <a:prstGeom prst="rect">
-            <a:avLst/>
-          </a:prstGeom>
-          <a:noFill/>
-          <a:ln/>
-        </p:spPr>
-        <p:txBody>
-          <a:bodyPr wrap="square" lIns="0" tIns="0" rIns="0" bIns="0" rtlCol="0" anchor="ctr">
-            <a:normAutofit/>
-          </a:bodyPr>
-          <a:lstStyle/>
-          <a:p>
-            <a:pPr algn="ctr" indent="0" marL="0">
-              <a:buNone/>
-            </a:pPr>
-            <a:r>
-              <a:rPr lang="en-US" sz="1500" b="1" dirty="0">
-                <a:solidFill>
-                  <a:srgbClr val="FFFFFF"/>
-                </a:solidFill>
-                <a:latin typeface="Aptos" pitchFamily="34" charset="0"/>
-                <a:ea typeface="Aptos" pitchFamily="34" charset="-122"/>
-                <a:cs typeface="Aptos" pitchFamily="34" charset="-120"/>
-              </a:rPr>
-              <a:t>Do</a:t>
-            </a:r>
-            <a:endParaRPr lang="en-US" sz="1500" dirty="0"/>
-          </a:p>
-        </p:txBody>
-      </p:sp>
-      <p:sp>
-        <p:nvSpPr>
-          <p:cNvPr id="18" name="Shape 16"/>
-          <p:cNvSpPr/>
-          <p:nvPr/>
-        </p:nvSpPr>
-        <p:spPr>
-          <a:xfrm>
-            <a:off x="10024872" y="3319272"/>
-            <a:ext cx="792480" cy="749808"/>
-          </a:xfrm>
-          <a:prstGeom prst="roundRect">
-            <a:avLst>
-              <a:gd name="adj" fmla="val 14634"/>
-            </a:avLst>
-          </a:prstGeom>
-          <a:solidFill>
-            <a:srgbClr val="D69A2D"/>
-          </a:solidFill>
-          <a:ln w="12700">
-            <a:solidFill>
-              <a:srgbClr val="D69A2D"/>
-            </a:solidFill>
-            <a:prstDash val="solid"/>
-          </a:ln>
-        </p:spPr>
-      </p:sp>
-      <p:sp>
-        <p:nvSpPr>
-          <p:cNvPr id="19" name="Text 17"/>
-          <p:cNvSpPr/>
-          <p:nvPr/>
-        </p:nvSpPr>
-        <p:spPr>
-          <a:xfrm>
-            <a:off x="10098024" y="3511296"/>
-            <a:ext cx="646176" cy="310896"/>
-          </a:xfrm>
-          <a:prstGeom prst="rect">
-            <a:avLst/>
-          </a:prstGeom>
-          <a:noFill/>
-          <a:ln/>
-        </p:spPr>
-        <p:txBody>
-          <a:bodyPr wrap="square" lIns="0" tIns="0" rIns="0" bIns="0" rtlCol="0" anchor="ctr">
-            <a:normAutofit/>
-          </a:bodyPr>
-          <a:lstStyle/>
-          <a:p>
-            <a:pPr algn="ctr" indent="0" marL="0">
-              <a:buNone/>
-            </a:pPr>
-            <a:r>
-              <a:rPr lang="en-US" sz="1500" b="1" dirty="0">
-                <a:solidFill>
-                  <a:srgbClr val="FFFFFF"/>
-                </a:solidFill>
-                <a:latin typeface="Aptos" pitchFamily="34" charset="0"/>
-                <a:ea typeface="Aptos" pitchFamily="34" charset="-122"/>
-                <a:cs typeface="Aptos" pitchFamily="34" charset="-120"/>
-              </a:rPr>
-              <a:t>Review</a:t>
-            </a:r>
-            <a:endParaRPr lang="en-US" sz="1500" dirty="0"/>
-          </a:p>
-        </p:txBody>
-      </p:sp>
-      <p:sp>
-        <p:nvSpPr>
-          <p:cNvPr id="20" name="Shape 18"/>
-          <p:cNvSpPr/>
-          <p:nvPr/>
-        </p:nvSpPr>
-        <p:spPr>
-          <a:xfrm>
-            <a:off x="8293608" y="4389120"/>
-            <a:ext cx="2157984" cy="0"/>
-          </a:xfrm>
-          <a:prstGeom prst="line">
-            <a:avLst/>
-          </a:prstGeom>
-          <a:noFill/>
-          <a:ln w="25400">
-            <a:solidFill>
-              <a:srgbClr val="8ABBD8"/>
-            </a:solidFill>
-            <a:prstDash val="solid"/>
-          </a:ln>
-        </p:spPr>
-      </p:sp>
-      <p:sp>
-        <p:nvSpPr>
-          <p:cNvPr id="21" name="Text 19"/>
-          <p:cNvSpPr/>
-          <p:nvPr/>
-        </p:nvSpPr>
-        <p:spPr>
-          <a:xfrm>
-            <a:off x="7909560" y="3977640"/>
-            <a:ext cx="2926080" cy="182880"/>
-          </a:xfrm>
-          <a:prstGeom prst="rect">
-            <a:avLst/>
-          </a:prstGeom>
-          <a:noFill/>
-          <a:ln/>
-        </p:spPr>
-        <p:txBody>
-          <a:bodyPr wrap="square" lIns="0" tIns="0" rIns="0" bIns="0" rtlCol="0" anchor="ctr"/>
-          <a:lstStyle/>
-          <a:p>
-            <a:pPr algn="ctr" indent="0" marL="0">
-              <a:buNone/>
-            </a:pPr>
-            <a:r>
-              <a:rPr lang="en-US" sz="1000" dirty="0">
-                <a:solidFill>
-                  <a:srgbClr val="003A63"/>
-                </a:solidFill>
-                <a:latin typeface="Aptos" pitchFamily="34" charset="0"/>
-                <a:ea typeface="Aptos" pitchFamily="34" charset="-122"/>
-                <a:cs typeface="Aptos" pitchFamily="34" charset="-120"/>
-              </a:rPr>
-              <a:t>Dependencies visible</a:t>
-            </a:r>
-            <a:endParaRPr lang="en-US" sz="1000" dirty="0"/>
-          </a:p>
-        </p:txBody>
-      </p:sp>
-      <p:sp>
-        <p:nvSpPr>
-          <p:cNvPr id="22" name="Shape 20"/>
           <p:cNvSpPr/>
           <p:nvPr/>
         </p:nvSpPr>
@@ -10567,7 +9186,7 @@
       </p:sp>
       <p:sp>
         <p:nvSpPr>
-          <p:cNvPr id="23" name="Text 21"/>
+          <p:cNvPr id="17" name="Text 15"/>
           <p:cNvSpPr/>
           <p:nvPr/>
         </p:nvSpPr>
@@ -10606,7 +9225,7 @@
       </p:sp>
       <p:sp>
         <p:nvSpPr>
-          <p:cNvPr id="24" name="Text 22"/>
+          <p:cNvPr id="18" name="Text 16"/>
           <p:cNvSpPr/>
           <p:nvPr/>
         </p:nvSpPr>
@@ -11114,13 +9733,11 @@
             </a:avLst>
           </a:prstGeom>
           <a:solidFill>
-            <a:srgbClr val="FFFFFF">
-              <a:alpha val="88000"/>
-            </a:srgbClr>
+            <a:srgbClr val="FFFFFF"/>
           </a:solidFill>
           <a:ln w="12700">
             <a:solidFill>
-              <a:srgbClr val="D6E8F2"/>
+              <a:srgbClr val="B9D7E6"/>
             </a:solidFill>
             <a:prstDash val="solid"/>
           </a:ln>
@@ -11128,30 +9745,42 @@
       </p:sp>
       <p:sp>
         <p:nvSpPr>
-          <p:cNvPr id="14" name="Shape 12"/>
-          <p:cNvSpPr/>
-          <p:nvPr/>
-        </p:nvSpPr>
-        <p:spPr>
-          <a:xfrm>
-            <a:off x="7927848" y="3319272"/>
-            <a:ext cx="792480" cy="749808"/>
-          </a:xfrm>
-          <a:prstGeom prst="roundRect">
-            <a:avLst>
-              <a:gd name="adj" fmla="val 14634"/>
-            </a:avLst>
-          </a:prstGeom>
-          <a:solidFill>
-            <a:srgbClr val="0068B7"/>
-          </a:solidFill>
-          <a:ln w="12700">
-            <a:solidFill>
-              <a:srgbClr val="0068B7"/>
-            </a:solidFill>
-            <a:prstDash val="solid"/>
-          </a:ln>
-        </p:spPr>
+          <p:cNvPr id="14" name="Text 12"/>
+          <p:cNvSpPr/>
+          <p:nvPr/>
+        </p:nvSpPr>
+        <p:spPr>
+          <a:xfrm>
+            <a:off x="7799832" y="2935224"/>
+            <a:ext cx="3145536" cy="256032"/>
+          </a:xfrm>
+          <a:prstGeom prst="rect">
+            <a:avLst/>
+          </a:prstGeom>
+          <a:noFill/>
+          <a:ln/>
+        </p:spPr>
+        <p:txBody>
+          <a:bodyPr wrap="square" lIns="0" tIns="0" rIns="0" bIns="0" rtlCol="0" anchor="ctr"/>
+          <a:lstStyle/>
+          <a:p>
+            <a:pPr indent="0" marL="0">
+              <a:buNone/>
+            </a:pPr>
+            <a:r>
+              <a:rPr lang="en-US" sz="1300" b="1" dirty="0">
+                <a:solidFill>
+                  <a:srgbClr val="0068B7"/>
+                </a:solidFill>
+                <a:latin typeface="Aptos" pitchFamily="34" charset="0"/>
+                <a:ea typeface="Aptos" pitchFamily="34" charset="-122"/>
+                <a:cs typeface="Aptos" pitchFamily="34" charset="-120"/>
+              </a:rPr>
+              <a:t>Concept checkpoints</a:t>
+            </a:r>
+            <a:endParaRPr lang="en-US" sz="1300" dirty="0"/>
+          </a:p>
+        </p:txBody>
       </p:sp>
       <p:sp>
         <p:nvSpPr>
@@ -11161,240 +9790,53 @@
         </p:nvSpPr>
         <p:spPr>
           <a:xfrm>
-            <a:off x="8001000" y="3511296"/>
-            <a:ext cx="646176" cy="310896"/>
-          </a:xfrm>
-          <a:prstGeom prst="rect">
-            <a:avLst/>
-          </a:prstGeom>
-          <a:noFill/>
-          <a:ln/>
-        </p:spPr>
-        <p:txBody>
-          <a:bodyPr wrap="square" lIns="0" tIns="0" rIns="0" bIns="0" rtlCol="0" anchor="ctr">
+            <a:off x="7818120" y="3300984"/>
+            <a:ext cx="3090672" cy="877824"/>
+          </a:xfrm>
+          <a:prstGeom prst="rect">
+            <a:avLst/>
+          </a:prstGeom>
+          <a:noFill/>
+          <a:ln/>
+        </p:spPr>
+        <p:txBody>
+          <a:bodyPr wrap="square" lIns="254" tIns="254" rIns="254" bIns="254" rtlCol="0" anchor="t">
             <a:normAutofit/>
           </a:bodyPr>
           <a:lstStyle/>
           <a:p>
-            <a:pPr algn="ctr" indent="0" marL="0">
-              <a:buNone/>
-            </a:pPr>
-            <a:r>
-              <a:rPr lang="en-US" sz="1500" b="1" dirty="0">
-                <a:solidFill>
-                  <a:srgbClr val="FFFFFF"/>
-                </a:solidFill>
-                <a:latin typeface="Aptos" pitchFamily="34" charset="0"/>
-                <a:ea typeface="Aptos" pitchFamily="34" charset="-122"/>
-                <a:cs typeface="Aptos" pitchFamily="34" charset="-120"/>
-              </a:rPr>
-              <a:t>Plan</a:t>
-            </a:r>
-            <a:endParaRPr lang="en-US" sz="1500" dirty="0"/>
+            <a:r>
+              <a:rPr lang="en-US" sz="1380" dirty="0">
+                <a:solidFill>
+                  <a:srgbClr val="17364A"/>
+                </a:solidFill>
+                <a:latin typeface="Aptos" pitchFamily="34" charset="0"/>
+                <a:ea typeface="Aptos" pitchFamily="34" charset="-122"/>
+                <a:cs typeface="Aptos" pitchFamily="34" charset="-120"/>
+              </a:rPr>
+              <a:t>Escalation and monitoring plan</a:t>
+            </a:r>
+            <a:endParaRPr lang="en-US" sz="1380" dirty="0"/>
+          </a:p>
+          <a:p>
+            <a:r>
+              <a:rPr lang="en-US" sz="1380" dirty="0">
+                <a:solidFill>
+                  <a:srgbClr val="17364A"/>
+                </a:solidFill>
+                <a:latin typeface="Aptos" pitchFamily="34" charset="0"/>
+                <a:ea typeface="Aptos" pitchFamily="34" charset="-122"/>
+                <a:cs typeface="Aptos" pitchFamily="34" charset="-120"/>
+              </a:rPr>
+              <a:t>Approval or review note</a:t>
+            </a:r>
+            <a:endParaRPr lang="en-US" sz="1380" dirty="0"/>
           </a:p>
         </p:txBody>
       </p:sp>
       <p:sp>
         <p:nvSpPr>
           <p:cNvPr id="16" name="Shape 14"/>
-          <p:cNvSpPr/>
-          <p:nvPr/>
-        </p:nvSpPr>
-        <p:spPr>
-          <a:xfrm>
-            <a:off x="8976360" y="3319272"/>
-            <a:ext cx="792480" cy="749808"/>
-          </a:xfrm>
-          <a:prstGeom prst="roundRect">
-            <a:avLst>
-              <a:gd name="adj" fmla="val 14634"/>
-            </a:avLst>
-          </a:prstGeom>
-          <a:solidFill>
-            <a:srgbClr val="2F8A28"/>
-          </a:solidFill>
-          <a:ln w="12700">
-            <a:solidFill>
-              <a:srgbClr val="2F8A28"/>
-            </a:solidFill>
-            <a:prstDash val="solid"/>
-          </a:ln>
-        </p:spPr>
-      </p:sp>
-      <p:sp>
-        <p:nvSpPr>
-          <p:cNvPr id="17" name="Text 15"/>
-          <p:cNvSpPr/>
-          <p:nvPr/>
-        </p:nvSpPr>
-        <p:spPr>
-          <a:xfrm>
-            <a:off x="9049512" y="3511296"/>
-            <a:ext cx="646176" cy="310896"/>
-          </a:xfrm>
-          <a:prstGeom prst="rect">
-            <a:avLst/>
-          </a:prstGeom>
-          <a:noFill/>
-          <a:ln/>
-        </p:spPr>
-        <p:txBody>
-          <a:bodyPr wrap="square" lIns="0" tIns="0" rIns="0" bIns="0" rtlCol="0" anchor="ctr">
-            <a:normAutofit/>
-          </a:bodyPr>
-          <a:lstStyle/>
-          <a:p>
-            <a:pPr algn="ctr" indent="0" marL="0">
-              <a:buNone/>
-            </a:pPr>
-            <a:r>
-              <a:rPr lang="en-US" sz="1500" b="1" dirty="0">
-                <a:solidFill>
-                  <a:srgbClr val="FFFFFF"/>
-                </a:solidFill>
-                <a:latin typeface="Aptos" pitchFamily="34" charset="0"/>
-                <a:ea typeface="Aptos" pitchFamily="34" charset="-122"/>
-                <a:cs typeface="Aptos" pitchFamily="34" charset="-120"/>
-              </a:rPr>
-              <a:t>Do</a:t>
-            </a:r>
-            <a:endParaRPr lang="en-US" sz="1500" dirty="0"/>
-          </a:p>
-        </p:txBody>
-      </p:sp>
-      <p:sp>
-        <p:nvSpPr>
-          <p:cNvPr id="18" name="Shape 16"/>
-          <p:cNvSpPr/>
-          <p:nvPr/>
-        </p:nvSpPr>
-        <p:spPr>
-          <a:xfrm>
-            <a:off x="10024872" y="3319272"/>
-            <a:ext cx="792480" cy="749808"/>
-          </a:xfrm>
-          <a:prstGeom prst="roundRect">
-            <a:avLst>
-              <a:gd name="adj" fmla="val 14634"/>
-            </a:avLst>
-          </a:prstGeom>
-          <a:solidFill>
-            <a:srgbClr val="D69A2D"/>
-          </a:solidFill>
-          <a:ln w="12700">
-            <a:solidFill>
-              <a:srgbClr val="D69A2D"/>
-            </a:solidFill>
-            <a:prstDash val="solid"/>
-          </a:ln>
-        </p:spPr>
-      </p:sp>
-      <p:sp>
-        <p:nvSpPr>
-          <p:cNvPr id="19" name="Text 17"/>
-          <p:cNvSpPr/>
-          <p:nvPr/>
-        </p:nvSpPr>
-        <p:spPr>
-          <a:xfrm>
-            <a:off x="10098024" y="3511296"/>
-            <a:ext cx="646176" cy="310896"/>
-          </a:xfrm>
-          <a:prstGeom prst="rect">
-            <a:avLst/>
-          </a:prstGeom>
-          <a:noFill/>
-          <a:ln/>
-        </p:spPr>
-        <p:txBody>
-          <a:bodyPr wrap="square" lIns="0" tIns="0" rIns="0" bIns="0" rtlCol="0" anchor="ctr">
-            <a:normAutofit/>
-          </a:bodyPr>
-          <a:lstStyle/>
-          <a:p>
-            <a:pPr algn="ctr" indent="0" marL="0">
-              <a:buNone/>
-            </a:pPr>
-            <a:r>
-              <a:rPr lang="en-US" sz="1500" b="1" dirty="0">
-                <a:solidFill>
-                  <a:srgbClr val="FFFFFF"/>
-                </a:solidFill>
-                <a:latin typeface="Aptos" pitchFamily="34" charset="0"/>
-                <a:ea typeface="Aptos" pitchFamily="34" charset="-122"/>
-                <a:cs typeface="Aptos" pitchFamily="34" charset="-120"/>
-              </a:rPr>
-              <a:t>Review</a:t>
-            </a:r>
-            <a:endParaRPr lang="en-US" sz="1500" dirty="0"/>
-          </a:p>
-        </p:txBody>
-      </p:sp>
-      <p:sp>
-        <p:nvSpPr>
-          <p:cNvPr id="20" name="Shape 18"/>
-          <p:cNvSpPr/>
-          <p:nvPr/>
-        </p:nvSpPr>
-        <p:spPr>
-          <a:xfrm>
-            <a:off x="8293608" y="4389120"/>
-            <a:ext cx="2157984" cy="0"/>
-          </a:xfrm>
-          <a:prstGeom prst="line">
-            <a:avLst/>
-          </a:prstGeom>
-          <a:noFill/>
-          <a:ln w="25400">
-            <a:solidFill>
-              <a:srgbClr val="8ABBD8"/>
-            </a:solidFill>
-            <a:prstDash val="solid"/>
-          </a:ln>
-        </p:spPr>
-      </p:sp>
-      <p:sp>
-        <p:nvSpPr>
-          <p:cNvPr id="21" name="Text 19"/>
-          <p:cNvSpPr/>
-          <p:nvPr/>
-        </p:nvSpPr>
-        <p:spPr>
-          <a:xfrm>
-            <a:off x="7909560" y="3977640"/>
-            <a:ext cx="2926080" cy="182880"/>
-          </a:xfrm>
-          <a:prstGeom prst="rect">
-            <a:avLst/>
-          </a:prstGeom>
-          <a:noFill/>
-          <a:ln/>
-        </p:spPr>
-        <p:txBody>
-          <a:bodyPr wrap="square" lIns="0" tIns="0" rIns="0" bIns="0" rtlCol="0" anchor="ctr"/>
-          <a:lstStyle/>
-          <a:p>
-            <a:pPr algn="ctr" indent="0" marL="0">
-              <a:buNone/>
-            </a:pPr>
-            <a:r>
-              <a:rPr lang="en-US" sz="1000" dirty="0">
-                <a:solidFill>
-                  <a:srgbClr val="003A63"/>
-                </a:solidFill>
-                <a:latin typeface="Aptos" pitchFamily="34" charset="0"/>
-                <a:ea typeface="Aptos" pitchFamily="34" charset="-122"/>
-                <a:cs typeface="Aptos" pitchFamily="34" charset="-120"/>
-              </a:rPr>
-              <a:t>Dependencies visible</a:t>
-            </a:r>
-            <a:endParaRPr lang="en-US" sz="1000" dirty="0"/>
-          </a:p>
-        </p:txBody>
-      </p:sp>
-      <p:sp>
-        <p:nvSpPr>
-          <p:cNvPr id="22" name="Shape 20"/>
           <p:cNvSpPr/>
           <p:nvPr/>
         </p:nvSpPr>
@@ -11421,7 +9863,7 @@
       </p:sp>
       <p:sp>
         <p:nvSpPr>
-          <p:cNvPr id="23" name="Text 21"/>
+          <p:cNvPr id="17" name="Text 15"/>
           <p:cNvSpPr/>
           <p:nvPr/>
         </p:nvSpPr>
@@ -11460,7 +9902,7 @@
       </p:sp>
       <p:sp>
         <p:nvSpPr>
-          <p:cNvPr id="24" name="Text 22"/>
+          <p:cNvPr id="18" name="Text 16"/>
           <p:cNvSpPr/>
           <p:nvPr/>
         </p:nvSpPr>
@@ -11993,20 +10435,20 @@
         </p:nvSpPr>
         <p:spPr>
           <a:xfrm>
-            <a:off x="7635240" y="3730752"/>
-            <a:ext cx="1033272" cy="749808"/>
+            <a:off x="7909560" y="3675888"/>
+            <a:ext cx="3154680" cy="1691640"/>
           </a:xfrm>
           <a:prstGeom prst="roundRect">
             <a:avLst>
-              <a:gd name="adj" fmla="val 14634"/>
+              <a:gd name="adj" fmla="val 6486"/>
             </a:avLst>
           </a:prstGeom>
           <a:solidFill>
-            <a:srgbClr val="0068B7"/>
+            <a:srgbClr val="FFFFFF"/>
           </a:solidFill>
           <a:ln w="12700">
             <a:solidFill>
-              <a:srgbClr val="0068B7"/>
+              <a:srgbClr val="B9D7E6"/>
             </a:solidFill>
             <a:prstDash val="solid"/>
           </a:ln>
@@ -12020,172 +10462,100 @@
         </p:nvSpPr>
         <p:spPr>
           <a:xfrm>
-            <a:off x="7708392" y="3922776"/>
-            <a:ext cx="886968" cy="310896"/>
-          </a:xfrm>
-          <a:prstGeom prst="rect">
-            <a:avLst/>
-          </a:prstGeom>
-          <a:noFill/>
-          <a:ln/>
-        </p:spPr>
-        <p:txBody>
-          <a:bodyPr wrap="square" lIns="0" tIns="0" rIns="0" bIns="0" rtlCol="0" anchor="ctr">
+            <a:off x="8074152" y="3822192"/>
+            <a:ext cx="2825496" cy="256032"/>
+          </a:xfrm>
+          <a:prstGeom prst="rect">
+            <a:avLst/>
+          </a:prstGeom>
+          <a:noFill/>
+          <a:ln/>
+        </p:spPr>
+        <p:txBody>
+          <a:bodyPr wrap="square" lIns="0" tIns="0" rIns="0" bIns="0" rtlCol="0" anchor="ctr"/>
+          <a:lstStyle/>
+          <a:p>
+            <a:pPr indent="0" marL="0">
+              <a:buNone/>
+            </a:pPr>
+            <a:r>
+              <a:rPr lang="en-US" sz="1300" b="1" dirty="0">
+                <a:solidFill>
+                  <a:srgbClr val="0068B7"/>
+                </a:solidFill>
+                <a:latin typeface="Aptos" pitchFamily="34" charset="0"/>
+                <a:ea typeface="Aptos" pitchFamily="34" charset="-122"/>
+                <a:cs typeface="Aptos" pitchFamily="34" charset="-120"/>
+              </a:rPr>
+              <a:t>Learning sequence</a:t>
+            </a:r>
+            <a:endParaRPr lang="en-US" sz="1300" dirty="0"/>
+          </a:p>
+        </p:txBody>
+      </p:sp>
+      <p:sp>
+        <p:nvSpPr>
+          <p:cNvPr id="15" name="Text 13"/>
+          <p:cNvSpPr/>
+          <p:nvPr/>
+        </p:nvSpPr>
+        <p:spPr>
+          <a:xfrm>
+            <a:off x="8092440" y="4187952"/>
+            <a:ext cx="2770632" cy="1033272"/>
+          </a:xfrm>
+          <a:prstGeom prst="rect">
+            <a:avLst/>
+          </a:prstGeom>
+          <a:noFill/>
+          <a:ln/>
+        </p:spPr>
+        <p:txBody>
+          <a:bodyPr wrap="square" lIns="254" tIns="254" rIns="254" bIns="254" rtlCol="0" anchor="t">
             <a:normAutofit/>
           </a:bodyPr>
           <a:lstStyle/>
           <a:p>
-            <a:pPr algn="ctr" indent="0" marL="0">
-              <a:buNone/>
-            </a:pPr>
-            <a:r>
-              <a:rPr lang="en-US" sz="1500" b="1" dirty="0">
-                <a:solidFill>
-                  <a:srgbClr val="FFFFFF"/>
-                </a:solidFill>
-                <a:latin typeface="Aptos" pitchFamily="34" charset="0"/>
-                <a:ea typeface="Aptos" pitchFamily="34" charset="-122"/>
-                <a:cs typeface="Aptos" pitchFamily="34" charset="-120"/>
-              </a:rPr>
-              <a:t>Learn</a:t>
-            </a:r>
-            <a:endParaRPr lang="en-US" sz="1500" dirty="0"/>
-          </a:p>
-        </p:txBody>
-      </p:sp>
-      <p:sp>
-        <p:nvSpPr>
-          <p:cNvPr id="15" name="Shape 13"/>
-          <p:cNvSpPr/>
-          <p:nvPr/>
-        </p:nvSpPr>
-        <p:spPr>
-          <a:xfrm>
-            <a:off x="8924544" y="3730752"/>
-            <a:ext cx="1033272" cy="749808"/>
-          </a:xfrm>
-          <a:prstGeom prst="roundRect">
-            <a:avLst>
-              <a:gd name="adj" fmla="val 14634"/>
-            </a:avLst>
-          </a:prstGeom>
-          <a:solidFill>
-            <a:srgbClr val="2F8A28"/>
-          </a:solidFill>
-          <a:ln w="12700">
-            <a:solidFill>
-              <a:srgbClr val="2F8A28"/>
-            </a:solidFill>
-            <a:prstDash val="solid"/>
-          </a:ln>
-        </p:spPr>
-      </p:sp>
-      <p:sp>
-        <p:nvSpPr>
-          <p:cNvPr id="16" name="Text 14"/>
-          <p:cNvSpPr/>
-          <p:nvPr/>
-        </p:nvSpPr>
-        <p:spPr>
-          <a:xfrm>
-            <a:off x="8997696" y="3922776"/>
-            <a:ext cx="886968" cy="310896"/>
-          </a:xfrm>
-          <a:prstGeom prst="rect">
-            <a:avLst/>
-          </a:prstGeom>
-          <a:noFill/>
-          <a:ln/>
-        </p:spPr>
-        <p:txBody>
-          <a:bodyPr wrap="square" lIns="0" tIns="0" rIns="0" bIns="0" rtlCol="0" anchor="ctr">
-            <a:normAutofit/>
-          </a:bodyPr>
-          <a:lstStyle/>
-          <a:p>
-            <a:pPr algn="ctr" indent="0" marL="0">
-              <a:buNone/>
-            </a:pPr>
-            <a:r>
-              <a:rPr lang="en-US" sz="1500" b="1" dirty="0">
-                <a:solidFill>
-                  <a:srgbClr val="FFFFFF"/>
-                </a:solidFill>
-                <a:latin typeface="Aptos" pitchFamily="34" charset="0"/>
-                <a:ea typeface="Aptos" pitchFamily="34" charset="-122"/>
-                <a:cs typeface="Aptos" pitchFamily="34" charset="-120"/>
-              </a:rPr>
-              <a:t>Apply</a:t>
-            </a:r>
-            <a:endParaRPr lang="en-US" sz="1500" dirty="0"/>
-          </a:p>
-        </p:txBody>
-      </p:sp>
-      <p:sp>
-        <p:nvSpPr>
-          <p:cNvPr id="17" name="Shape 15"/>
-          <p:cNvSpPr/>
-          <p:nvPr/>
-        </p:nvSpPr>
-        <p:spPr>
-          <a:xfrm>
-            <a:off x="10213848" y="3730752"/>
-            <a:ext cx="1033272" cy="749808"/>
-          </a:xfrm>
-          <a:prstGeom prst="roundRect">
-            <a:avLst>
-              <a:gd name="adj" fmla="val 14634"/>
-            </a:avLst>
-          </a:prstGeom>
-          <a:solidFill>
-            <a:srgbClr val="6A4CA3"/>
-          </a:solidFill>
-          <a:ln w="12700">
-            <a:solidFill>
-              <a:srgbClr val="6A4CA3"/>
-            </a:solidFill>
-            <a:prstDash val="solid"/>
-          </a:ln>
-        </p:spPr>
-      </p:sp>
-      <p:sp>
-        <p:nvSpPr>
-          <p:cNvPr id="18" name="Text 16"/>
-          <p:cNvSpPr/>
-          <p:nvPr/>
-        </p:nvSpPr>
-        <p:spPr>
-          <a:xfrm>
-            <a:off x="10287000" y="3922776"/>
-            <a:ext cx="886968" cy="310896"/>
-          </a:xfrm>
-          <a:prstGeom prst="rect">
-            <a:avLst/>
-          </a:prstGeom>
-          <a:noFill/>
-          <a:ln/>
-        </p:spPr>
-        <p:txBody>
-          <a:bodyPr wrap="square" lIns="0" tIns="0" rIns="0" bIns="0" rtlCol="0" anchor="ctr">
-            <a:normAutofit/>
-          </a:bodyPr>
-          <a:lstStyle/>
-          <a:p>
-            <a:pPr algn="ctr" indent="0" marL="0">
-              <a:buNone/>
-            </a:pPr>
-            <a:r>
-              <a:rPr lang="en-US" sz="1500" b="1" dirty="0">
-                <a:solidFill>
-                  <a:srgbClr val="FFFFFF"/>
-                </a:solidFill>
-                <a:latin typeface="Aptos" pitchFamily="34" charset="0"/>
-                <a:ea typeface="Aptos" pitchFamily="34" charset="-122"/>
-                <a:cs typeface="Aptos" pitchFamily="34" charset="-120"/>
-              </a:rPr>
-              <a:t>Document</a:t>
-            </a:r>
-            <a:endParaRPr lang="en-US" sz="1500" dirty="0"/>
+            <a:r>
+              <a:rPr lang="en-US" sz="1380" dirty="0">
+                <a:solidFill>
+                  <a:srgbClr val="17364A"/>
+                </a:solidFill>
+                <a:latin typeface="Aptos" pitchFamily="34" charset="0"/>
+                <a:ea typeface="Aptos" pitchFamily="34" charset="-122"/>
+                <a:cs typeface="Aptos" pitchFamily="34" charset="-120"/>
+              </a:rPr>
+              <a:t>Read the module for shared vocabulary and context.</a:t>
+            </a:r>
+            <a:endParaRPr lang="en-US" sz="1380" dirty="0"/>
+          </a:p>
+          <a:p>
+            <a:r>
+              <a:rPr lang="en-US" sz="1380" dirty="0">
+                <a:solidFill>
+                  <a:srgbClr val="17364A"/>
+                </a:solidFill>
+                <a:latin typeface="Aptos" pitchFamily="34" charset="0"/>
+                <a:ea typeface="Aptos" pitchFamily="34" charset="-122"/>
+                <a:cs typeface="Aptos" pitchFamily="34" charset="-120"/>
+              </a:rPr>
+              <a:t>Complete the practical exercise to apply the concept.</a:t>
+            </a:r>
+            <a:endParaRPr lang="en-US" sz="1380" dirty="0"/>
+          </a:p>
+          <a:p>
+            <a:r>
+              <a:rPr lang="en-US" sz="1380" dirty="0">
+                <a:solidFill>
+                  <a:srgbClr val="17364A"/>
+                </a:solidFill>
+                <a:latin typeface="Aptos" pitchFamily="34" charset="0"/>
+                <a:ea typeface="Aptos" pitchFamily="34" charset="-122"/>
+                <a:cs typeface="Aptos" pitchFamily="34" charset="-120"/>
+              </a:rPr>
+              <a:t>Use the notes and references for deeper review.</a:t>
+            </a:r>
+            <a:endParaRPr lang="en-US" sz="1380" dirty="0"/>
           </a:p>
         </p:txBody>
       </p:sp>
@@ -12658,13 +11028,11 @@
             </a:avLst>
           </a:prstGeom>
           <a:solidFill>
-            <a:srgbClr val="FFFFFF">
-              <a:alpha val="88000"/>
-            </a:srgbClr>
+            <a:srgbClr val="FFFFFF"/>
           </a:solidFill>
           <a:ln w="12700">
             <a:solidFill>
-              <a:srgbClr val="D6E8F2"/>
+              <a:srgbClr val="B9D7E6"/>
             </a:solidFill>
             <a:prstDash val="solid"/>
           </a:ln>
@@ -12672,30 +11040,42 @@
       </p:sp>
       <p:sp>
         <p:nvSpPr>
-          <p:cNvPr id="14" name="Shape 12"/>
-          <p:cNvSpPr/>
-          <p:nvPr/>
-        </p:nvSpPr>
-        <p:spPr>
-          <a:xfrm>
-            <a:off x="7927848" y="3319272"/>
-            <a:ext cx="792480" cy="749808"/>
-          </a:xfrm>
-          <a:prstGeom prst="roundRect">
-            <a:avLst>
-              <a:gd name="adj" fmla="val 14634"/>
-            </a:avLst>
-          </a:prstGeom>
-          <a:solidFill>
-            <a:srgbClr val="0068B7"/>
-          </a:solidFill>
-          <a:ln w="12700">
-            <a:solidFill>
-              <a:srgbClr val="0068B7"/>
-            </a:solidFill>
-            <a:prstDash val="solid"/>
-          </a:ln>
-        </p:spPr>
+          <p:cNvPr id="14" name="Text 12"/>
+          <p:cNvSpPr/>
+          <p:nvPr/>
+        </p:nvSpPr>
+        <p:spPr>
+          <a:xfrm>
+            <a:off x="7799832" y="2935224"/>
+            <a:ext cx="3145536" cy="256032"/>
+          </a:xfrm>
+          <a:prstGeom prst="rect">
+            <a:avLst/>
+          </a:prstGeom>
+          <a:noFill/>
+          <a:ln/>
+        </p:spPr>
+        <p:txBody>
+          <a:bodyPr wrap="square" lIns="0" tIns="0" rIns="0" bIns="0" rtlCol="0" anchor="ctr"/>
+          <a:lstStyle/>
+          <a:p>
+            <a:pPr indent="0" marL="0">
+              <a:buNone/>
+            </a:pPr>
+            <a:r>
+              <a:rPr lang="en-US" sz="1300" b="1" dirty="0">
+                <a:solidFill>
+                  <a:srgbClr val="0068B7"/>
+                </a:solidFill>
+                <a:latin typeface="Aptos" pitchFamily="34" charset="0"/>
+                <a:ea typeface="Aptos" pitchFamily="34" charset="-122"/>
+                <a:cs typeface="Aptos" pitchFamily="34" charset="-120"/>
+              </a:rPr>
+              <a:t>Concept checkpoints</a:t>
+            </a:r>
+            <a:endParaRPr lang="en-US" sz="1300" dirty="0"/>
+          </a:p>
+        </p:txBody>
       </p:sp>
       <p:sp>
         <p:nvSpPr>
@@ -12705,240 +11085,67 @@
         </p:nvSpPr>
         <p:spPr>
           <a:xfrm>
-            <a:off x="8001000" y="3511296"/>
-            <a:ext cx="646176" cy="310896"/>
-          </a:xfrm>
-          <a:prstGeom prst="rect">
-            <a:avLst/>
-          </a:prstGeom>
-          <a:noFill/>
-          <a:ln/>
-        </p:spPr>
-        <p:txBody>
-          <a:bodyPr wrap="square" lIns="0" tIns="0" rIns="0" bIns="0" rtlCol="0" anchor="ctr">
+            <a:off x="7818120" y="3300984"/>
+            <a:ext cx="3090672" cy="877824"/>
+          </a:xfrm>
+          <a:prstGeom prst="rect">
+            <a:avLst/>
+          </a:prstGeom>
+          <a:noFill/>
+          <a:ln/>
+        </p:spPr>
+        <p:txBody>
+          <a:bodyPr wrap="square" lIns="254" tIns="254" rIns="254" bIns="254" rtlCol="0" anchor="t">
             <a:normAutofit/>
           </a:bodyPr>
           <a:lstStyle/>
           <a:p>
-            <a:pPr algn="ctr" indent="0" marL="0">
-              <a:buNone/>
-            </a:pPr>
-            <a:r>
-              <a:rPr lang="en-US" sz="1500" b="1" dirty="0">
-                <a:solidFill>
-                  <a:srgbClr val="FFFFFF"/>
-                </a:solidFill>
-                <a:latin typeface="Aptos" pitchFamily="34" charset="0"/>
-                <a:ea typeface="Aptos" pitchFamily="34" charset="-122"/>
-                <a:cs typeface="Aptos" pitchFamily="34" charset="-120"/>
-              </a:rPr>
-              <a:t>Plan</a:t>
-            </a:r>
-            <a:endParaRPr lang="en-US" sz="1500" dirty="0"/>
+            <a:r>
+              <a:rPr lang="en-US" sz="1380" dirty="0">
+                <a:solidFill>
+                  <a:srgbClr val="17364A"/>
+                </a:solidFill>
+                <a:latin typeface="Aptos" pitchFamily="34" charset="0"/>
+                <a:ea typeface="Aptos" pitchFamily="34" charset="-122"/>
+                <a:cs typeface="Aptos" pitchFamily="34" charset="-120"/>
+              </a:rPr>
+              <a:t>1.</a:t>
+            </a:r>
+            <a:endParaRPr lang="en-US" sz="1380" dirty="0"/>
+          </a:p>
+          <a:p>
+            <a:r>
+              <a:rPr lang="en-US" sz="1380" dirty="0">
+                <a:solidFill>
+                  <a:srgbClr val="17364A"/>
+                </a:solidFill>
+                <a:latin typeface="Aptos" pitchFamily="34" charset="0"/>
+                <a:ea typeface="Aptos" pitchFamily="34" charset="-122"/>
+                <a:cs typeface="Aptos" pitchFamily="34" charset="-120"/>
+              </a:rPr>
+              <a:t>What is the strongest evidence that grant and funding management for ai projects has been.</a:t>
+            </a:r>
+            <a:endParaRPr lang="en-US" sz="1380" dirty="0"/>
+          </a:p>
+          <a:p>
+            <a:r>
+              <a:rPr lang="en-US" sz="1380" dirty="0">
+                <a:solidFill>
+                  <a:srgbClr val="17364A"/>
+                </a:solidFill>
+                <a:latin typeface="Aptos" pitchFamily="34" charset="0"/>
+                <a:ea typeface="Aptos" pitchFamily="34" charset="-122"/>
+                <a:cs typeface="Aptos" pitchFamily="34" charset="-120"/>
+              </a:rPr>
+              <a:t>2.</a:t>
+            </a:r>
+            <a:endParaRPr lang="en-US" sz="1380" dirty="0"/>
           </a:p>
         </p:txBody>
       </p:sp>
       <p:sp>
         <p:nvSpPr>
           <p:cNvPr id="16" name="Shape 14"/>
-          <p:cNvSpPr/>
-          <p:nvPr/>
-        </p:nvSpPr>
-        <p:spPr>
-          <a:xfrm>
-            <a:off x="8976360" y="3319272"/>
-            <a:ext cx="792480" cy="749808"/>
-          </a:xfrm>
-          <a:prstGeom prst="roundRect">
-            <a:avLst>
-              <a:gd name="adj" fmla="val 14634"/>
-            </a:avLst>
-          </a:prstGeom>
-          <a:solidFill>
-            <a:srgbClr val="2F8A28"/>
-          </a:solidFill>
-          <a:ln w="12700">
-            <a:solidFill>
-              <a:srgbClr val="2F8A28"/>
-            </a:solidFill>
-            <a:prstDash val="solid"/>
-          </a:ln>
-        </p:spPr>
-      </p:sp>
-      <p:sp>
-        <p:nvSpPr>
-          <p:cNvPr id="17" name="Text 15"/>
-          <p:cNvSpPr/>
-          <p:nvPr/>
-        </p:nvSpPr>
-        <p:spPr>
-          <a:xfrm>
-            <a:off x="9049512" y="3511296"/>
-            <a:ext cx="646176" cy="310896"/>
-          </a:xfrm>
-          <a:prstGeom prst="rect">
-            <a:avLst/>
-          </a:prstGeom>
-          <a:noFill/>
-          <a:ln/>
-        </p:spPr>
-        <p:txBody>
-          <a:bodyPr wrap="square" lIns="0" tIns="0" rIns="0" bIns="0" rtlCol="0" anchor="ctr">
-            <a:normAutofit/>
-          </a:bodyPr>
-          <a:lstStyle/>
-          <a:p>
-            <a:pPr algn="ctr" indent="0" marL="0">
-              <a:buNone/>
-            </a:pPr>
-            <a:r>
-              <a:rPr lang="en-US" sz="1500" b="1" dirty="0">
-                <a:solidFill>
-                  <a:srgbClr val="FFFFFF"/>
-                </a:solidFill>
-                <a:latin typeface="Aptos" pitchFamily="34" charset="0"/>
-                <a:ea typeface="Aptos" pitchFamily="34" charset="-122"/>
-                <a:cs typeface="Aptos" pitchFamily="34" charset="-120"/>
-              </a:rPr>
-              <a:t>Do</a:t>
-            </a:r>
-            <a:endParaRPr lang="en-US" sz="1500" dirty="0"/>
-          </a:p>
-        </p:txBody>
-      </p:sp>
-      <p:sp>
-        <p:nvSpPr>
-          <p:cNvPr id="18" name="Shape 16"/>
-          <p:cNvSpPr/>
-          <p:nvPr/>
-        </p:nvSpPr>
-        <p:spPr>
-          <a:xfrm>
-            <a:off x="10024872" y="3319272"/>
-            <a:ext cx="792480" cy="749808"/>
-          </a:xfrm>
-          <a:prstGeom prst="roundRect">
-            <a:avLst>
-              <a:gd name="adj" fmla="val 14634"/>
-            </a:avLst>
-          </a:prstGeom>
-          <a:solidFill>
-            <a:srgbClr val="D69A2D"/>
-          </a:solidFill>
-          <a:ln w="12700">
-            <a:solidFill>
-              <a:srgbClr val="D69A2D"/>
-            </a:solidFill>
-            <a:prstDash val="solid"/>
-          </a:ln>
-        </p:spPr>
-      </p:sp>
-      <p:sp>
-        <p:nvSpPr>
-          <p:cNvPr id="19" name="Text 17"/>
-          <p:cNvSpPr/>
-          <p:nvPr/>
-        </p:nvSpPr>
-        <p:spPr>
-          <a:xfrm>
-            <a:off x="10098024" y="3511296"/>
-            <a:ext cx="646176" cy="310896"/>
-          </a:xfrm>
-          <a:prstGeom prst="rect">
-            <a:avLst/>
-          </a:prstGeom>
-          <a:noFill/>
-          <a:ln/>
-        </p:spPr>
-        <p:txBody>
-          <a:bodyPr wrap="square" lIns="0" tIns="0" rIns="0" bIns="0" rtlCol="0" anchor="ctr">
-            <a:normAutofit/>
-          </a:bodyPr>
-          <a:lstStyle/>
-          <a:p>
-            <a:pPr algn="ctr" indent="0" marL="0">
-              <a:buNone/>
-            </a:pPr>
-            <a:r>
-              <a:rPr lang="en-US" sz="1500" b="1" dirty="0">
-                <a:solidFill>
-                  <a:srgbClr val="FFFFFF"/>
-                </a:solidFill>
-                <a:latin typeface="Aptos" pitchFamily="34" charset="0"/>
-                <a:ea typeface="Aptos" pitchFamily="34" charset="-122"/>
-                <a:cs typeface="Aptos" pitchFamily="34" charset="-120"/>
-              </a:rPr>
-              <a:t>Review</a:t>
-            </a:r>
-            <a:endParaRPr lang="en-US" sz="1500" dirty="0"/>
-          </a:p>
-        </p:txBody>
-      </p:sp>
-      <p:sp>
-        <p:nvSpPr>
-          <p:cNvPr id="20" name="Shape 18"/>
-          <p:cNvSpPr/>
-          <p:nvPr/>
-        </p:nvSpPr>
-        <p:spPr>
-          <a:xfrm>
-            <a:off x="8293608" y="4389120"/>
-            <a:ext cx="2157984" cy="0"/>
-          </a:xfrm>
-          <a:prstGeom prst="line">
-            <a:avLst/>
-          </a:prstGeom>
-          <a:noFill/>
-          <a:ln w="25400">
-            <a:solidFill>
-              <a:srgbClr val="8ABBD8"/>
-            </a:solidFill>
-            <a:prstDash val="solid"/>
-          </a:ln>
-        </p:spPr>
-      </p:sp>
-      <p:sp>
-        <p:nvSpPr>
-          <p:cNvPr id="21" name="Text 19"/>
-          <p:cNvSpPr/>
-          <p:nvPr/>
-        </p:nvSpPr>
-        <p:spPr>
-          <a:xfrm>
-            <a:off x="7909560" y="3977640"/>
-            <a:ext cx="2926080" cy="182880"/>
-          </a:xfrm>
-          <a:prstGeom prst="rect">
-            <a:avLst/>
-          </a:prstGeom>
-          <a:noFill/>
-          <a:ln/>
-        </p:spPr>
-        <p:txBody>
-          <a:bodyPr wrap="square" lIns="0" tIns="0" rIns="0" bIns="0" rtlCol="0" anchor="ctr"/>
-          <a:lstStyle/>
-          <a:p>
-            <a:pPr algn="ctr" indent="0" marL="0">
-              <a:buNone/>
-            </a:pPr>
-            <a:r>
-              <a:rPr lang="en-US" sz="1000" dirty="0">
-                <a:solidFill>
-                  <a:srgbClr val="003A63"/>
-                </a:solidFill>
-                <a:latin typeface="Aptos" pitchFamily="34" charset="0"/>
-                <a:ea typeface="Aptos" pitchFamily="34" charset="-122"/>
-                <a:cs typeface="Aptos" pitchFamily="34" charset="-120"/>
-              </a:rPr>
-              <a:t>Dependencies visible</a:t>
-            </a:r>
-            <a:endParaRPr lang="en-US" sz="1000" dirty="0"/>
-          </a:p>
-        </p:txBody>
-      </p:sp>
-      <p:sp>
-        <p:nvSpPr>
-          <p:cNvPr id="22" name="Shape 20"/>
           <p:cNvSpPr/>
           <p:nvPr/>
         </p:nvSpPr>
@@ -12965,7 +11172,7 @@
       </p:sp>
       <p:sp>
         <p:nvSpPr>
-          <p:cNvPr id="23" name="Text 21"/>
+          <p:cNvPr id="17" name="Text 15"/>
           <p:cNvSpPr/>
           <p:nvPr/>
         </p:nvSpPr>
@@ -13004,7 +11211,7 @@
       </p:sp>
       <p:sp>
         <p:nvSpPr>
-          <p:cNvPr id="24" name="Text 22"/>
+          <p:cNvPr id="18" name="Text 16"/>
           <p:cNvSpPr/>
           <p:nvPr/>
         </p:nvSpPr>
@@ -13512,13 +11719,11 @@
             </a:avLst>
           </a:prstGeom>
           <a:solidFill>
-            <a:srgbClr val="FFFFFF">
-              <a:alpha val="88000"/>
-            </a:srgbClr>
+            <a:srgbClr val="FFFFFF"/>
           </a:solidFill>
           <a:ln w="12700">
             <a:solidFill>
-              <a:srgbClr val="D6E8F2"/>
+              <a:srgbClr val="B9D7E6"/>
             </a:solidFill>
             <a:prstDash val="solid"/>
           </a:ln>
@@ -13526,30 +11731,42 @@
       </p:sp>
       <p:sp>
         <p:nvSpPr>
-          <p:cNvPr id="14" name="Shape 12"/>
-          <p:cNvSpPr/>
-          <p:nvPr/>
-        </p:nvSpPr>
-        <p:spPr>
-          <a:xfrm>
-            <a:off x="7927848" y="3319272"/>
-            <a:ext cx="792480" cy="749808"/>
-          </a:xfrm>
-          <a:prstGeom prst="roundRect">
-            <a:avLst>
-              <a:gd name="adj" fmla="val 14634"/>
-            </a:avLst>
-          </a:prstGeom>
-          <a:solidFill>
-            <a:srgbClr val="0068B7"/>
-          </a:solidFill>
-          <a:ln w="12700">
-            <a:solidFill>
-              <a:srgbClr val="0068B7"/>
-            </a:solidFill>
-            <a:prstDash val="solid"/>
-          </a:ln>
-        </p:spPr>
+          <p:cNvPr id="14" name="Text 12"/>
+          <p:cNvSpPr/>
+          <p:nvPr/>
+        </p:nvSpPr>
+        <p:spPr>
+          <a:xfrm>
+            <a:off x="7799832" y="2935224"/>
+            <a:ext cx="3145536" cy="256032"/>
+          </a:xfrm>
+          <a:prstGeom prst="rect">
+            <a:avLst/>
+          </a:prstGeom>
+          <a:noFill/>
+          <a:ln/>
+        </p:spPr>
+        <p:txBody>
+          <a:bodyPr wrap="square" lIns="0" tIns="0" rIns="0" bIns="0" rtlCol="0" anchor="ctr"/>
+          <a:lstStyle/>
+          <a:p>
+            <a:pPr indent="0" marL="0">
+              <a:buNone/>
+            </a:pPr>
+            <a:r>
+              <a:rPr lang="en-US" sz="1300" b="1" dirty="0">
+                <a:solidFill>
+                  <a:srgbClr val="0068B7"/>
+                </a:solidFill>
+                <a:latin typeface="Aptos" pitchFamily="34" charset="0"/>
+                <a:ea typeface="Aptos" pitchFamily="34" charset="-122"/>
+                <a:cs typeface="Aptos" pitchFamily="34" charset="-120"/>
+              </a:rPr>
+              <a:t>Concept checkpoints</a:t>
+            </a:r>
+            <a:endParaRPr lang="en-US" sz="1300" dirty="0"/>
+          </a:p>
+        </p:txBody>
       </p:sp>
       <p:sp>
         <p:nvSpPr>
@@ -13559,240 +11776,53 @@
         </p:nvSpPr>
         <p:spPr>
           <a:xfrm>
-            <a:off x="8001000" y="3511296"/>
-            <a:ext cx="646176" cy="310896"/>
-          </a:xfrm>
-          <a:prstGeom prst="rect">
-            <a:avLst/>
-          </a:prstGeom>
-          <a:noFill/>
-          <a:ln/>
-        </p:spPr>
-        <p:txBody>
-          <a:bodyPr wrap="square" lIns="0" tIns="0" rIns="0" bIns="0" rtlCol="0" anchor="ctr">
+            <a:off x="7818120" y="3300984"/>
+            <a:ext cx="3090672" cy="877824"/>
+          </a:xfrm>
+          <a:prstGeom prst="rect">
+            <a:avLst/>
+          </a:prstGeom>
+          <a:noFill/>
+          <a:ln/>
+        </p:spPr>
+        <p:txBody>
+          <a:bodyPr wrap="square" lIns="254" tIns="254" rIns="254" bIns="254" rtlCol="0" anchor="t">
             <a:normAutofit/>
           </a:bodyPr>
           <a:lstStyle/>
           <a:p>
-            <a:pPr algn="ctr" indent="0" marL="0">
-              <a:buNone/>
-            </a:pPr>
-            <a:r>
-              <a:rPr lang="en-US" sz="1500" b="1" dirty="0">
-                <a:solidFill>
-                  <a:srgbClr val="FFFFFF"/>
-                </a:solidFill>
-                <a:latin typeface="Aptos" pitchFamily="34" charset="0"/>
-                <a:ea typeface="Aptos" pitchFamily="34" charset="-122"/>
-                <a:cs typeface="Aptos" pitchFamily="34" charset="-120"/>
-              </a:rPr>
-              <a:t>Plan</a:t>
-            </a:r>
-            <a:endParaRPr lang="en-US" sz="1500" dirty="0"/>
+            <a:r>
+              <a:rPr lang="en-US" sz="1380" dirty="0">
+                <a:solidFill>
+                  <a:srgbClr val="17364A"/>
+                </a:solidFill>
+                <a:latin typeface="Aptos" pitchFamily="34" charset="0"/>
+                <a:ea typeface="Aptos" pitchFamily="34" charset="-122"/>
+                <a:cs typeface="Aptos" pitchFamily="34" charset="-120"/>
+              </a:rPr>
+              <a:t>OWASP Top 10 for Large Language Model Applications:.</a:t>
+            </a:r>
+            <a:endParaRPr lang="en-US" sz="1380" dirty="0"/>
+          </a:p>
+          <a:p>
+            <a:r>
+              <a:rPr lang="en-US" sz="1380" dirty="0">
+                <a:solidFill>
+                  <a:srgbClr val="17364A"/>
+                </a:solidFill>
+                <a:latin typeface="Aptos" pitchFamily="34" charset="0"/>
+                <a:ea typeface="Aptos" pitchFamily="34" charset="-122"/>
+                <a:cs typeface="Aptos" pitchFamily="34" charset="-120"/>
+              </a:rPr>
+              <a:t>ONC health IT, interoperability, and information blocking resources:.</a:t>
+            </a:r>
+            <a:endParaRPr lang="en-US" sz="1380" dirty="0"/>
           </a:p>
         </p:txBody>
       </p:sp>
       <p:sp>
         <p:nvSpPr>
           <p:cNvPr id="16" name="Shape 14"/>
-          <p:cNvSpPr/>
-          <p:nvPr/>
-        </p:nvSpPr>
-        <p:spPr>
-          <a:xfrm>
-            <a:off x="8976360" y="3319272"/>
-            <a:ext cx="792480" cy="749808"/>
-          </a:xfrm>
-          <a:prstGeom prst="roundRect">
-            <a:avLst>
-              <a:gd name="adj" fmla="val 14634"/>
-            </a:avLst>
-          </a:prstGeom>
-          <a:solidFill>
-            <a:srgbClr val="2F8A28"/>
-          </a:solidFill>
-          <a:ln w="12700">
-            <a:solidFill>
-              <a:srgbClr val="2F8A28"/>
-            </a:solidFill>
-            <a:prstDash val="solid"/>
-          </a:ln>
-        </p:spPr>
-      </p:sp>
-      <p:sp>
-        <p:nvSpPr>
-          <p:cNvPr id="17" name="Text 15"/>
-          <p:cNvSpPr/>
-          <p:nvPr/>
-        </p:nvSpPr>
-        <p:spPr>
-          <a:xfrm>
-            <a:off x="9049512" y="3511296"/>
-            <a:ext cx="646176" cy="310896"/>
-          </a:xfrm>
-          <a:prstGeom prst="rect">
-            <a:avLst/>
-          </a:prstGeom>
-          <a:noFill/>
-          <a:ln/>
-        </p:spPr>
-        <p:txBody>
-          <a:bodyPr wrap="square" lIns="0" tIns="0" rIns="0" bIns="0" rtlCol="0" anchor="ctr">
-            <a:normAutofit/>
-          </a:bodyPr>
-          <a:lstStyle/>
-          <a:p>
-            <a:pPr algn="ctr" indent="0" marL="0">
-              <a:buNone/>
-            </a:pPr>
-            <a:r>
-              <a:rPr lang="en-US" sz="1500" b="1" dirty="0">
-                <a:solidFill>
-                  <a:srgbClr val="FFFFFF"/>
-                </a:solidFill>
-                <a:latin typeface="Aptos" pitchFamily="34" charset="0"/>
-                <a:ea typeface="Aptos" pitchFamily="34" charset="-122"/>
-                <a:cs typeface="Aptos" pitchFamily="34" charset="-120"/>
-              </a:rPr>
-              <a:t>Do</a:t>
-            </a:r>
-            <a:endParaRPr lang="en-US" sz="1500" dirty="0"/>
-          </a:p>
-        </p:txBody>
-      </p:sp>
-      <p:sp>
-        <p:nvSpPr>
-          <p:cNvPr id="18" name="Shape 16"/>
-          <p:cNvSpPr/>
-          <p:nvPr/>
-        </p:nvSpPr>
-        <p:spPr>
-          <a:xfrm>
-            <a:off x="10024872" y="3319272"/>
-            <a:ext cx="792480" cy="749808"/>
-          </a:xfrm>
-          <a:prstGeom prst="roundRect">
-            <a:avLst>
-              <a:gd name="adj" fmla="val 14634"/>
-            </a:avLst>
-          </a:prstGeom>
-          <a:solidFill>
-            <a:srgbClr val="D69A2D"/>
-          </a:solidFill>
-          <a:ln w="12700">
-            <a:solidFill>
-              <a:srgbClr val="D69A2D"/>
-            </a:solidFill>
-            <a:prstDash val="solid"/>
-          </a:ln>
-        </p:spPr>
-      </p:sp>
-      <p:sp>
-        <p:nvSpPr>
-          <p:cNvPr id="19" name="Text 17"/>
-          <p:cNvSpPr/>
-          <p:nvPr/>
-        </p:nvSpPr>
-        <p:spPr>
-          <a:xfrm>
-            <a:off x="10098024" y="3511296"/>
-            <a:ext cx="646176" cy="310896"/>
-          </a:xfrm>
-          <a:prstGeom prst="rect">
-            <a:avLst/>
-          </a:prstGeom>
-          <a:noFill/>
-          <a:ln/>
-        </p:spPr>
-        <p:txBody>
-          <a:bodyPr wrap="square" lIns="0" tIns="0" rIns="0" bIns="0" rtlCol="0" anchor="ctr">
-            <a:normAutofit/>
-          </a:bodyPr>
-          <a:lstStyle/>
-          <a:p>
-            <a:pPr algn="ctr" indent="0" marL="0">
-              <a:buNone/>
-            </a:pPr>
-            <a:r>
-              <a:rPr lang="en-US" sz="1500" b="1" dirty="0">
-                <a:solidFill>
-                  <a:srgbClr val="FFFFFF"/>
-                </a:solidFill>
-                <a:latin typeface="Aptos" pitchFamily="34" charset="0"/>
-                <a:ea typeface="Aptos" pitchFamily="34" charset="-122"/>
-                <a:cs typeface="Aptos" pitchFamily="34" charset="-120"/>
-              </a:rPr>
-              <a:t>Review</a:t>
-            </a:r>
-            <a:endParaRPr lang="en-US" sz="1500" dirty="0"/>
-          </a:p>
-        </p:txBody>
-      </p:sp>
-      <p:sp>
-        <p:nvSpPr>
-          <p:cNvPr id="20" name="Shape 18"/>
-          <p:cNvSpPr/>
-          <p:nvPr/>
-        </p:nvSpPr>
-        <p:spPr>
-          <a:xfrm>
-            <a:off x="8293608" y="4389120"/>
-            <a:ext cx="2157984" cy="0"/>
-          </a:xfrm>
-          <a:prstGeom prst="line">
-            <a:avLst/>
-          </a:prstGeom>
-          <a:noFill/>
-          <a:ln w="25400">
-            <a:solidFill>
-              <a:srgbClr val="8ABBD8"/>
-            </a:solidFill>
-            <a:prstDash val="solid"/>
-          </a:ln>
-        </p:spPr>
-      </p:sp>
-      <p:sp>
-        <p:nvSpPr>
-          <p:cNvPr id="21" name="Text 19"/>
-          <p:cNvSpPr/>
-          <p:nvPr/>
-        </p:nvSpPr>
-        <p:spPr>
-          <a:xfrm>
-            <a:off x="7909560" y="3977640"/>
-            <a:ext cx="2926080" cy="182880"/>
-          </a:xfrm>
-          <a:prstGeom prst="rect">
-            <a:avLst/>
-          </a:prstGeom>
-          <a:noFill/>
-          <a:ln/>
-        </p:spPr>
-        <p:txBody>
-          <a:bodyPr wrap="square" lIns="0" tIns="0" rIns="0" bIns="0" rtlCol="0" anchor="ctr"/>
-          <a:lstStyle/>
-          <a:p>
-            <a:pPr algn="ctr" indent="0" marL="0">
-              <a:buNone/>
-            </a:pPr>
-            <a:r>
-              <a:rPr lang="en-US" sz="1000" dirty="0">
-                <a:solidFill>
-                  <a:srgbClr val="003A63"/>
-                </a:solidFill>
-                <a:latin typeface="Aptos" pitchFamily="34" charset="0"/>
-                <a:ea typeface="Aptos" pitchFamily="34" charset="-122"/>
-                <a:cs typeface="Aptos" pitchFamily="34" charset="-120"/>
-              </a:rPr>
-              <a:t>Dependencies visible</a:t>
-            </a:r>
-            <a:endParaRPr lang="en-US" sz="1000" dirty="0"/>
-          </a:p>
-        </p:txBody>
-      </p:sp>
-      <p:sp>
-        <p:nvSpPr>
-          <p:cNvPr id="22" name="Shape 20"/>
           <p:cNvSpPr/>
           <p:nvPr/>
         </p:nvSpPr>
@@ -13819,7 +11849,7 @@
       </p:sp>
       <p:sp>
         <p:nvSpPr>
-          <p:cNvPr id="23" name="Text 21"/>
+          <p:cNvPr id="17" name="Text 15"/>
           <p:cNvSpPr/>
           <p:nvPr/>
         </p:nvSpPr>
@@ -13858,7 +11888,7 @@
       </p:sp>
       <p:sp>
         <p:nvSpPr>
-          <p:cNvPr id="24" name="Text 22"/>
+          <p:cNvPr id="18" name="Text 16"/>
           <p:cNvSpPr/>
           <p:nvPr/>
         </p:nvSpPr>
@@ -14366,13 +12396,11 @@
             </a:avLst>
           </a:prstGeom>
           <a:solidFill>
-            <a:srgbClr val="FFFFFF">
-              <a:alpha val="88000"/>
-            </a:srgbClr>
+            <a:srgbClr val="FFFFFF"/>
           </a:solidFill>
           <a:ln w="12700">
             <a:solidFill>
-              <a:srgbClr val="D6E8F2"/>
+              <a:srgbClr val="B9D7E6"/>
             </a:solidFill>
             <a:prstDash val="solid"/>
           </a:ln>
@@ -14380,30 +12408,42 @@
       </p:sp>
       <p:sp>
         <p:nvSpPr>
-          <p:cNvPr id="14" name="Shape 12"/>
-          <p:cNvSpPr/>
-          <p:nvPr/>
-        </p:nvSpPr>
-        <p:spPr>
-          <a:xfrm>
-            <a:off x="7927848" y="3319272"/>
-            <a:ext cx="792480" cy="749808"/>
-          </a:xfrm>
-          <a:prstGeom prst="roundRect">
-            <a:avLst>
-              <a:gd name="adj" fmla="val 14634"/>
-            </a:avLst>
-          </a:prstGeom>
-          <a:solidFill>
-            <a:srgbClr val="0068B7"/>
-          </a:solidFill>
-          <a:ln w="12700">
-            <a:solidFill>
-              <a:srgbClr val="0068B7"/>
-            </a:solidFill>
-            <a:prstDash val="solid"/>
-          </a:ln>
-        </p:spPr>
+          <p:cNvPr id="14" name="Text 12"/>
+          <p:cNvSpPr/>
+          <p:nvPr/>
+        </p:nvSpPr>
+        <p:spPr>
+          <a:xfrm>
+            <a:off x="7799832" y="2935224"/>
+            <a:ext cx="3145536" cy="256032"/>
+          </a:xfrm>
+          <a:prstGeom prst="rect">
+            <a:avLst/>
+          </a:prstGeom>
+          <a:noFill/>
+          <a:ln/>
+        </p:spPr>
+        <p:txBody>
+          <a:bodyPr wrap="square" lIns="0" tIns="0" rIns="0" bIns="0" rtlCol="0" anchor="ctr"/>
+          <a:lstStyle/>
+          <a:p>
+            <a:pPr indent="0" marL="0">
+              <a:buNone/>
+            </a:pPr>
+            <a:r>
+              <a:rPr lang="en-US" sz="1300" b="1" dirty="0">
+                <a:solidFill>
+                  <a:srgbClr val="0068B7"/>
+                </a:solidFill>
+                <a:latin typeface="Aptos" pitchFamily="34" charset="0"/>
+                <a:ea typeface="Aptos" pitchFamily="34" charset="-122"/>
+                <a:cs typeface="Aptos" pitchFamily="34" charset="-120"/>
+              </a:rPr>
+              <a:t>Concept checkpoints</a:t>
+            </a:r>
+            <a:endParaRPr lang="en-US" sz="1300" dirty="0"/>
+          </a:p>
+        </p:txBody>
       </p:sp>
       <p:sp>
         <p:nvSpPr>
@@ -14413,240 +12453,67 @@
         </p:nvSpPr>
         <p:spPr>
           <a:xfrm>
-            <a:off x="8001000" y="3511296"/>
-            <a:ext cx="646176" cy="310896"/>
-          </a:xfrm>
-          <a:prstGeom prst="rect">
-            <a:avLst/>
-          </a:prstGeom>
-          <a:noFill/>
-          <a:ln/>
-        </p:spPr>
-        <p:txBody>
-          <a:bodyPr wrap="square" lIns="0" tIns="0" rIns="0" bIns="0" rtlCol="0" anchor="ctr">
+            <a:off x="7818120" y="3300984"/>
+            <a:ext cx="3090672" cy="877824"/>
+          </a:xfrm>
+          <a:prstGeom prst="rect">
+            <a:avLst/>
+          </a:prstGeom>
+          <a:noFill/>
+          <a:ln/>
+        </p:spPr>
+        <p:txBody>
+          <a:bodyPr wrap="square" lIns="254" tIns="254" rIns="254" bIns="254" rtlCol="0" anchor="t">
             <a:normAutofit/>
           </a:bodyPr>
           <a:lstStyle/>
           <a:p>
-            <a:pPr algn="ctr" indent="0" marL="0">
-              <a:buNone/>
-            </a:pPr>
-            <a:r>
-              <a:rPr lang="en-US" sz="1500" b="1" dirty="0">
-                <a:solidFill>
-                  <a:srgbClr val="FFFFFF"/>
-                </a:solidFill>
-                <a:latin typeface="Aptos" pitchFamily="34" charset="0"/>
-                <a:ea typeface="Aptos" pitchFamily="34" charset="-122"/>
-                <a:cs typeface="Aptos" pitchFamily="34" charset="-120"/>
-              </a:rPr>
-              <a:t>Plan</a:t>
-            </a:r>
-            <a:endParaRPr lang="en-US" sz="1500" dirty="0"/>
+            <a:r>
+              <a:rPr lang="en-US" sz="1380" dirty="0">
+                <a:solidFill>
+                  <a:srgbClr val="17364A"/>
+                </a:solidFill>
+                <a:latin typeface="Aptos" pitchFamily="34" charset="0"/>
+                <a:ea typeface="Aptos" pitchFamily="34" charset="-122"/>
+                <a:cs typeface="Aptos" pitchFamily="34" charset="-120"/>
+              </a:rPr>
+              <a:t>Agency policies for privacy, public records, cybersecurity, procurement, civil rights,.</a:t>
+            </a:r>
+            <a:endParaRPr lang="en-US" sz="1380" dirty="0"/>
+          </a:p>
+          <a:p>
+            <a:r>
+              <a:rPr lang="en-US" sz="1380" dirty="0">
+                <a:solidFill>
+                  <a:srgbClr val="17364A"/>
+                </a:solidFill>
+                <a:latin typeface="Aptos" pitchFamily="34" charset="0"/>
+                <a:ea typeface="Aptos" pitchFamily="34" charset="-122"/>
+                <a:cs typeface="Aptos" pitchFamily="34" charset="-120"/>
+              </a:rPr>
+              <a:t>Appendix.</a:t>
+            </a:r>
+            <a:endParaRPr lang="en-US" sz="1380" dirty="0"/>
+          </a:p>
+          <a:p>
+            <a:r>
+              <a:rPr lang="en-US" sz="1380" dirty="0">
+                <a:solidFill>
+                  <a:srgbClr val="17364A"/>
+                </a:solidFill>
+                <a:latin typeface="Aptos" pitchFamily="34" charset="0"/>
+                <a:ea typeface="Aptos" pitchFamily="34" charset="-122"/>
+                <a:cs typeface="Aptos" pitchFamily="34" charset="-120"/>
+              </a:rPr>
+              <a:t>Common Source Base Used Across Modules</a:t>
+            </a:r>
+            <a:endParaRPr lang="en-US" sz="1380" dirty="0"/>
           </a:p>
         </p:txBody>
       </p:sp>
       <p:sp>
         <p:nvSpPr>
           <p:cNvPr id="16" name="Shape 14"/>
-          <p:cNvSpPr/>
-          <p:nvPr/>
-        </p:nvSpPr>
-        <p:spPr>
-          <a:xfrm>
-            <a:off x="8976360" y="3319272"/>
-            <a:ext cx="792480" cy="749808"/>
-          </a:xfrm>
-          <a:prstGeom prst="roundRect">
-            <a:avLst>
-              <a:gd name="adj" fmla="val 14634"/>
-            </a:avLst>
-          </a:prstGeom>
-          <a:solidFill>
-            <a:srgbClr val="2F8A28"/>
-          </a:solidFill>
-          <a:ln w="12700">
-            <a:solidFill>
-              <a:srgbClr val="2F8A28"/>
-            </a:solidFill>
-            <a:prstDash val="solid"/>
-          </a:ln>
-        </p:spPr>
-      </p:sp>
-      <p:sp>
-        <p:nvSpPr>
-          <p:cNvPr id="17" name="Text 15"/>
-          <p:cNvSpPr/>
-          <p:nvPr/>
-        </p:nvSpPr>
-        <p:spPr>
-          <a:xfrm>
-            <a:off x="9049512" y="3511296"/>
-            <a:ext cx="646176" cy="310896"/>
-          </a:xfrm>
-          <a:prstGeom prst="rect">
-            <a:avLst/>
-          </a:prstGeom>
-          <a:noFill/>
-          <a:ln/>
-        </p:spPr>
-        <p:txBody>
-          <a:bodyPr wrap="square" lIns="0" tIns="0" rIns="0" bIns="0" rtlCol="0" anchor="ctr">
-            <a:normAutofit/>
-          </a:bodyPr>
-          <a:lstStyle/>
-          <a:p>
-            <a:pPr algn="ctr" indent="0" marL="0">
-              <a:buNone/>
-            </a:pPr>
-            <a:r>
-              <a:rPr lang="en-US" sz="1500" b="1" dirty="0">
-                <a:solidFill>
-                  <a:srgbClr val="FFFFFF"/>
-                </a:solidFill>
-                <a:latin typeface="Aptos" pitchFamily="34" charset="0"/>
-                <a:ea typeface="Aptos" pitchFamily="34" charset="-122"/>
-                <a:cs typeface="Aptos" pitchFamily="34" charset="-120"/>
-              </a:rPr>
-              <a:t>Do</a:t>
-            </a:r>
-            <a:endParaRPr lang="en-US" sz="1500" dirty="0"/>
-          </a:p>
-        </p:txBody>
-      </p:sp>
-      <p:sp>
-        <p:nvSpPr>
-          <p:cNvPr id="18" name="Shape 16"/>
-          <p:cNvSpPr/>
-          <p:nvPr/>
-        </p:nvSpPr>
-        <p:spPr>
-          <a:xfrm>
-            <a:off x="10024872" y="3319272"/>
-            <a:ext cx="792480" cy="749808"/>
-          </a:xfrm>
-          <a:prstGeom prst="roundRect">
-            <a:avLst>
-              <a:gd name="adj" fmla="val 14634"/>
-            </a:avLst>
-          </a:prstGeom>
-          <a:solidFill>
-            <a:srgbClr val="D69A2D"/>
-          </a:solidFill>
-          <a:ln w="12700">
-            <a:solidFill>
-              <a:srgbClr val="D69A2D"/>
-            </a:solidFill>
-            <a:prstDash val="solid"/>
-          </a:ln>
-        </p:spPr>
-      </p:sp>
-      <p:sp>
-        <p:nvSpPr>
-          <p:cNvPr id="19" name="Text 17"/>
-          <p:cNvSpPr/>
-          <p:nvPr/>
-        </p:nvSpPr>
-        <p:spPr>
-          <a:xfrm>
-            <a:off x="10098024" y="3511296"/>
-            <a:ext cx="646176" cy="310896"/>
-          </a:xfrm>
-          <a:prstGeom prst="rect">
-            <a:avLst/>
-          </a:prstGeom>
-          <a:noFill/>
-          <a:ln/>
-        </p:spPr>
-        <p:txBody>
-          <a:bodyPr wrap="square" lIns="0" tIns="0" rIns="0" bIns="0" rtlCol="0" anchor="ctr">
-            <a:normAutofit/>
-          </a:bodyPr>
-          <a:lstStyle/>
-          <a:p>
-            <a:pPr algn="ctr" indent="0" marL="0">
-              <a:buNone/>
-            </a:pPr>
-            <a:r>
-              <a:rPr lang="en-US" sz="1500" b="1" dirty="0">
-                <a:solidFill>
-                  <a:srgbClr val="FFFFFF"/>
-                </a:solidFill>
-                <a:latin typeface="Aptos" pitchFamily="34" charset="0"/>
-                <a:ea typeface="Aptos" pitchFamily="34" charset="-122"/>
-                <a:cs typeface="Aptos" pitchFamily="34" charset="-120"/>
-              </a:rPr>
-              <a:t>Review</a:t>
-            </a:r>
-            <a:endParaRPr lang="en-US" sz="1500" dirty="0"/>
-          </a:p>
-        </p:txBody>
-      </p:sp>
-      <p:sp>
-        <p:nvSpPr>
-          <p:cNvPr id="20" name="Shape 18"/>
-          <p:cNvSpPr/>
-          <p:nvPr/>
-        </p:nvSpPr>
-        <p:spPr>
-          <a:xfrm>
-            <a:off x="8293608" y="4389120"/>
-            <a:ext cx="2157984" cy="0"/>
-          </a:xfrm>
-          <a:prstGeom prst="line">
-            <a:avLst/>
-          </a:prstGeom>
-          <a:noFill/>
-          <a:ln w="25400">
-            <a:solidFill>
-              <a:srgbClr val="8ABBD8"/>
-            </a:solidFill>
-            <a:prstDash val="solid"/>
-          </a:ln>
-        </p:spPr>
-      </p:sp>
-      <p:sp>
-        <p:nvSpPr>
-          <p:cNvPr id="21" name="Text 19"/>
-          <p:cNvSpPr/>
-          <p:nvPr/>
-        </p:nvSpPr>
-        <p:spPr>
-          <a:xfrm>
-            <a:off x="7909560" y="3977640"/>
-            <a:ext cx="2926080" cy="182880"/>
-          </a:xfrm>
-          <a:prstGeom prst="rect">
-            <a:avLst/>
-          </a:prstGeom>
-          <a:noFill/>
-          <a:ln/>
-        </p:spPr>
-        <p:txBody>
-          <a:bodyPr wrap="square" lIns="0" tIns="0" rIns="0" bIns="0" rtlCol="0" anchor="ctr"/>
-          <a:lstStyle/>
-          <a:p>
-            <a:pPr algn="ctr" indent="0" marL="0">
-              <a:buNone/>
-            </a:pPr>
-            <a:r>
-              <a:rPr lang="en-US" sz="1000" dirty="0">
-                <a:solidFill>
-                  <a:srgbClr val="003A63"/>
-                </a:solidFill>
-                <a:latin typeface="Aptos" pitchFamily="34" charset="0"/>
-                <a:ea typeface="Aptos" pitchFamily="34" charset="-122"/>
-                <a:cs typeface="Aptos" pitchFamily="34" charset="-120"/>
-              </a:rPr>
-              <a:t>Dependencies visible</a:t>
-            </a:r>
-            <a:endParaRPr lang="en-US" sz="1000" dirty="0"/>
-          </a:p>
-        </p:txBody>
-      </p:sp>
-      <p:sp>
-        <p:nvSpPr>
-          <p:cNvPr id="22" name="Shape 20"/>
           <p:cNvSpPr/>
           <p:nvPr/>
         </p:nvSpPr>
@@ -14673,7 +12540,7 @@
       </p:sp>
       <p:sp>
         <p:nvSpPr>
-          <p:cNvPr id="23" name="Text 21"/>
+          <p:cNvPr id="17" name="Text 15"/>
           <p:cNvSpPr/>
           <p:nvPr/>
         </p:nvSpPr>
@@ -14712,7 +12579,7 @@
       </p:sp>
       <p:sp>
         <p:nvSpPr>
-          <p:cNvPr id="24" name="Text 22"/>
+          <p:cNvPr id="18" name="Text 16"/>
           <p:cNvSpPr/>
           <p:nvPr/>
         </p:nvSpPr>
@@ -15220,13 +13087,11 @@
             </a:avLst>
           </a:prstGeom>
           <a:solidFill>
-            <a:srgbClr val="FFFFFF">
-              <a:alpha val="88000"/>
-            </a:srgbClr>
+            <a:srgbClr val="FFFFFF"/>
           </a:solidFill>
           <a:ln w="12700">
             <a:solidFill>
-              <a:srgbClr val="D6E8F2"/>
+              <a:srgbClr val="B9D7E6"/>
             </a:solidFill>
             <a:prstDash val="solid"/>
           </a:ln>
@@ -15234,30 +13099,42 @@
       </p:sp>
       <p:sp>
         <p:nvSpPr>
-          <p:cNvPr id="14" name="Shape 12"/>
-          <p:cNvSpPr/>
-          <p:nvPr/>
-        </p:nvSpPr>
-        <p:spPr>
-          <a:xfrm>
-            <a:off x="7927848" y="3319272"/>
-            <a:ext cx="792480" cy="749808"/>
-          </a:xfrm>
-          <a:prstGeom prst="roundRect">
-            <a:avLst>
-              <a:gd name="adj" fmla="val 14634"/>
-            </a:avLst>
-          </a:prstGeom>
-          <a:solidFill>
-            <a:srgbClr val="0068B7"/>
-          </a:solidFill>
-          <a:ln w="12700">
-            <a:solidFill>
-              <a:srgbClr val="0068B7"/>
-            </a:solidFill>
-            <a:prstDash val="solid"/>
-          </a:ln>
-        </p:spPr>
+          <p:cNvPr id="14" name="Text 12"/>
+          <p:cNvSpPr/>
+          <p:nvPr/>
+        </p:nvSpPr>
+        <p:spPr>
+          <a:xfrm>
+            <a:off x="7799832" y="2935224"/>
+            <a:ext cx="3145536" cy="256032"/>
+          </a:xfrm>
+          <a:prstGeom prst="rect">
+            <a:avLst/>
+          </a:prstGeom>
+          <a:noFill/>
+          <a:ln/>
+        </p:spPr>
+        <p:txBody>
+          <a:bodyPr wrap="square" lIns="0" tIns="0" rIns="0" bIns="0" rtlCol="0" anchor="ctr"/>
+          <a:lstStyle/>
+          <a:p>
+            <a:pPr indent="0" marL="0">
+              <a:buNone/>
+            </a:pPr>
+            <a:r>
+              <a:rPr lang="en-US" sz="1300" b="1" dirty="0">
+                <a:solidFill>
+                  <a:srgbClr val="0068B7"/>
+                </a:solidFill>
+                <a:latin typeface="Aptos" pitchFamily="34" charset="0"/>
+                <a:ea typeface="Aptos" pitchFamily="34" charset="-122"/>
+                <a:cs typeface="Aptos" pitchFamily="34" charset="-120"/>
+              </a:rPr>
+              <a:t>Concept checkpoints</a:t>
+            </a:r>
+            <a:endParaRPr lang="en-US" sz="1300" dirty="0"/>
+          </a:p>
+        </p:txBody>
       </p:sp>
       <p:sp>
         <p:nvSpPr>
@@ -15267,240 +13144,67 @@
         </p:nvSpPr>
         <p:spPr>
           <a:xfrm>
-            <a:off x="8001000" y="3511296"/>
-            <a:ext cx="646176" cy="310896"/>
-          </a:xfrm>
-          <a:prstGeom prst="rect">
-            <a:avLst/>
-          </a:prstGeom>
-          <a:noFill/>
-          <a:ln/>
-        </p:spPr>
-        <p:txBody>
-          <a:bodyPr wrap="square" lIns="0" tIns="0" rIns="0" bIns="0" rtlCol="0" anchor="ctr">
+            <a:off x="7818120" y="3300984"/>
+            <a:ext cx="3090672" cy="877824"/>
+          </a:xfrm>
+          <a:prstGeom prst="rect">
+            <a:avLst/>
+          </a:prstGeom>
+          <a:noFill/>
+          <a:ln/>
+        </p:spPr>
+        <p:txBody>
+          <a:bodyPr wrap="square" lIns="254" tIns="254" rIns="254" bIns="254" rtlCol="0" anchor="t">
             <a:normAutofit/>
           </a:bodyPr>
           <a:lstStyle/>
           <a:p>
-            <a:pPr algn="ctr" indent="0" marL="0">
-              <a:buNone/>
-            </a:pPr>
-            <a:r>
-              <a:rPr lang="en-US" sz="1500" b="1" dirty="0">
-                <a:solidFill>
-                  <a:srgbClr val="FFFFFF"/>
-                </a:solidFill>
-                <a:latin typeface="Aptos" pitchFamily="34" charset="0"/>
-                <a:ea typeface="Aptos" pitchFamily="34" charset="-122"/>
-                <a:cs typeface="Aptos" pitchFamily="34" charset="-120"/>
-              </a:rPr>
-              <a:t>Plan</a:t>
-            </a:r>
-            <a:endParaRPr lang="en-US" sz="1500" dirty="0"/>
+            <a:r>
+              <a:rPr lang="en-US" sz="1380" dirty="0">
+                <a:solidFill>
+                  <a:srgbClr val="17364A"/>
+                </a:solidFill>
+                <a:latin typeface="Aptos" pitchFamily="34" charset="0"/>
+                <a:ea typeface="Aptos" pitchFamily="34" charset="-122"/>
+                <a:cs typeface="Aptos" pitchFamily="34" charset="-120"/>
+              </a:rPr>
+              <a:t>NIST Artificial Intelligence Risk Management Framework, NIST Generative AI Profile, NIST.</a:t>
+            </a:r>
+            <a:endParaRPr lang="en-US" sz="1380" dirty="0"/>
+          </a:p>
+          <a:p>
+            <a:r>
+              <a:rPr lang="en-US" sz="1380" dirty="0">
+                <a:solidFill>
+                  <a:srgbClr val="17364A"/>
+                </a:solidFill>
+                <a:latin typeface="Aptos" pitchFamily="34" charset="0"/>
+                <a:ea typeface="Aptos" pitchFamily="34" charset="-122"/>
+                <a:cs typeface="Aptos" pitchFamily="34" charset="-120"/>
+              </a:rPr>
+              <a:t>WHO ethics and governance guidance for artificial intelligence in health.</a:t>
+            </a:r>
+            <a:endParaRPr lang="en-US" sz="1380" dirty="0"/>
+          </a:p>
+          <a:p>
+            <a:r>
+              <a:rPr lang="en-US" sz="1380" dirty="0">
+                <a:solidFill>
+                  <a:srgbClr val="17364A"/>
+                </a:solidFill>
+                <a:latin typeface="Aptos" pitchFamily="34" charset="0"/>
+                <a:ea typeface="Aptos" pitchFamily="34" charset="-122"/>
+                <a:cs typeface="Aptos" pitchFamily="34" charset="-120"/>
+              </a:rPr>
+              <a:t>Agency policies and procedures for privacy, public records, cybersecurity, procurement,.</a:t>
+            </a:r>
+            <a:endParaRPr lang="en-US" sz="1380" dirty="0"/>
           </a:p>
         </p:txBody>
       </p:sp>
       <p:sp>
         <p:nvSpPr>
           <p:cNvPr id="16" name="Shape 14"/>
-          <p:cNvSpPr/>
-          <p:nvPr/>
-        </p:nvSpPr>
-        <p:spPr>
-          <a:xfrm>
-            <a:off x="8976360" y="3319272"/>
-            <a:ext cx="792480" cy="749808"/>
-          </a:xfrm>
-          <a:prstGeom prst="roundRect">
-            <a:avLst>
-              <a:gd name="adj" fmla="val 14634"/>
-            </a:avLst>
-          </a:prstGeom>
-          <a:solidFill>
-            <a:srgbClr val="2F8A28"/>
-          </a:solidFill>
-          <a:ln w="12700">
-            <a:solidFill>
-              <a:srgbClr val="2F8A28"/>
-            </a:solidFill>
-            <a:prstDash val="solid"/>
-          </a:ln>
-        </p:spPr>
-      </p:sp>
-      <p:sp>
-        <p:nvSpPr>
-          <p:cNvPr id="17" name="Text 15"/>
-          <p:cNvSpPr/>
-          <p:nvPr/>
-        </p:nvSpPr>
-        <p:spPr>
-          <a:xfrm>
-            <a:off x="9049512" y="3511296"/>
-            <a:ext cx="646176" cy="310896"/>
-          </a:xfrm>
-          <a:prstGeom prst="rect">
-            <a:avLst/>
-          </a:prstGeom>
-          <a:noFill/>
-          <a:ln/>
-        </p:spPr>
-        <p:txBody>
-          <a:bodyPr wrap="square" lIns="0" tIns="0" rIns="0" bIns="0" rtlCol="0" anchor="ctr">
-            <a:normAutofit/>
-          </a:bodyPr>
-          <a:lstStyle/>
-          <a:p>
-            <a:pPr algn="ctr" indent="0" marL="0">
-              <a:buNone/>
-            </a:pPr>
-            <a:r>
-              <a:rPr lang="en-US" sz="1500" b="1" dirty="0">
-                <a:solidFill>
-                  <a:srgbClr val="FFFFFF"/>
-                </a:solidFill>
-                <a:latin typeface="Aptos" pitchFamily="34" charset="0"/>
-                <a:ea typeface="Aptos" pitchFamily="34" charset="-122"/>
-                <a:cs typeface="Aptos" pitchFamily="34" charset="-120"/>
-              </a:rPr>
-              <a:t>Do</a:t>
-            </a:r>
-            <a:endParaRPr lang="en-US" sz="1500" dirty="0"/>
-          </a:p>
-        </p:txBody>
-      </p:sp>
-      <p:sp>
-        <p:nvSpPr>
-          <p:cNvPr id="18" name="Shape 16"/>
-          <p:cNvSpPr/>
-          <p:nvPr/>
-        </p:nvSpPr>
-        <p:spPr>
-          <a:xfrm>
-            <a:off x="10024872" y="3319272"/>
-            <a:ext cx="792480" cy="749808"/>
-          </a:xfrm>
-          <a:prstGeom prst="roundRect">
-            <a:avLst>
-              <a:gd name="adj" fmla="val 14634"/>
-            </a:avLst>
-          </a:prstGeom>
-          <a:solidFill>
-            <a:srgbClr val="D69A2D"/>
-          </a:solidFill>
-          <a:ln w="12700">
-            <a:solidFill>
-              <a:srgbClr val="D69A2D"/>
-            </a:solidFill>
-            <a:prstDash val="solid"/>
-          </a:ln>
-        </p:spPr>
-      </p:sp>
-      <p:sp>
-        <p:nvSpPr>
-          <p:cNvPr id="19" name="Text 17"/>
-          <p:cNvSpPr/>
-          <p:nvPr/>
-        </p:nvSpPr>
-        <p:spPr>
-          <a:xfrm>
-            <a:off x="10098024" y="3511296"/>
-            <a:ext cx="646176" cy="310896"/>
-          </a:xfrm>
-          <a:prstGeom prst="rect">
-            <a:avLst/>
-          </a:prstGeom>
-          <a:noFill/>
-          <a:ln/>
-        </p:spPr>
-        <p:txBody>
-          <a:bodyPr wrap="square" lIns="0" tIns="0" rIns="0" bIns="0" rtlCol="0" anchor="ctr">
-            <a:normAutofit/>
-          </a:bodyPr>
-          <a:lstStyle/>
-          <a:p>
-            <a:pPr algn="ctr" indent="0" marL="0">
-              <a:buNone/>
-            </a:pPr>
-            <a:r>
-              <a:rPr lang="en-US" sz="1500" b="1" dirty="0">
-                <a:solidFill>
-                  <a:srgbClr val="FFFFFF"/>
-                </a:solidFill>
-                <a:latin typeface="Aptos" pitchFamily="34" charset="0"/>
-                <a:ea typeface="Aptos" pitchFamily="34" charset="-122"/>
-                <a:cs typeface="Aptos" pitchFamily="34" charset="-120"/>
-              </a:rPr>
-              <a:t>Review</a:t>
-            </a:r>
-            <a:endParaRPr lang="en-US" sz="1500" dirty="0"/>
-          </a:p>
-        </p:txBody>
-      </p:sp>
-      <p:sp>
-        <p:nvSpPr>
-          <p:cNvPr id="20" name="Shape 18"/>
-          <p:cNvSpPr/>
-          <p:nvPr/>
-        </p:nvSpPr>
-        <p:spPr>
-          <a:xfrm>
-            <a:off x="8293608" y="4389120"/>
-            <a:ext cx="2157984" cy="0"/>
-          </a:xfrm>
-          <a:prstGeom prst="line">
-            <a:avLst/>
-          </a:prstGeom>
-          <a:noFill/>
-          <a:ln w="25400">
-            <a:solidFill>
-              <a:srgbClr val="8ABBD8"/>
-            </a:solidFill>
-            <a:prstDash val="solid"/>
-          </a:ln>
-        </p:spPr>
-      </p:sp>
-      <p:sp>
-        <p:nvSpPr>
-          <p:cNvPr id="21" name="Text 19"/>
-          <p:cNvSpPr/>
-          <p:nvPr/>
-        </p:nvSpPr>
-        <p:spPr>
-          <a:xfrm>
-            <a:off x="7909560" y="3977640"/>
-            <a:ext cx="2926080" cy="182880"/>
-          </a:xfrm>
-          <a:prstGeom prst="rect">
-            <a:avLst/>
-          </a:prstGeom>
-          <a:noFill/>
-          <a:ln/>
-        </p:spPr>
-        <p:txBody>
-          <a:bodyPr wrap="square" lIns="0" tIns="0" rIns="0" bIns="0" rtlCol="0" anchor="ctr"/>
-          <a:lstStyle/>
-          <a:p>
-            <a:pPr algn="ctr" indent="0" marL="0">
-              <a:buNone/>
-            </a:pPr>
-            <a:r>
-              <a:rPr lang="en-US" sz="1000" dirty="0">
-                <a:solidFill>
-                  <a:srgbClr val="003A63"/>
-                </a:solidFill>
-                <a:latin typeface="Aptos" pitchFamily="34" charset="0"/>
-                <a:ea typeface="Aptos" pitchFamily="34" charset="-122"/>
-                <a:cs typeface="Aptos" pitchFamily="34" charset="-120"/>
-              </a:rPr>
-              <a:t>Dependencies visible</a:t>
-            </a:r>
-            <a:endParaRPr lang="en-US" sz="1000" dirty="0"/>
-          </a:p>
-        </p:txBody>
-      </p:sp>
-      <p:sp>
-        <p:nvSpPr>
-          <p:cNvPr id="22" name="Shape 20"/>
           <p:cNvSpPr/>
           <p:nvPr/>
         </p:nvSpPr>
@@ -15527,7 +13231,7 @@
       </p:sp>
       <p:sp>
         <p:nvSpPr>
-          <p:cNvPr id="23" name="Text 21"/>
+          <p:cNvPr id="17" name="Text 15"/>
           <p:cNvSpPr/>
           <p:nvPr/>
         </p:nvSpPr>
@@ -15566,7 +13270,7 @@
       </p:sp>
       <p:sp>
         <p:nvSpPr>
-          <p:cNvPr id="24" name="Text 22"/>
+          <p:cNvPr id="18" name="Text 16"/>
           <p:cNvSpPr/>
           <p:nvPr/>
         </p:nvSpPr>
@@ -16079,20 +13783,20 @@
         </p:nvSpPr>
         <p:spPr>
           <a:xfrm>
-            <a:off x="7818120" y="3977640"/>
-            <a:ext cx="972312" cy="749808"/>
+            <a:off x="8046720" y="3794760"/>
+            <a:ext cx="3063240" cy="1600200"/>
           </a:xfrm>
           <a:prstGeom prst="roundRect">
             <a:avLst>
-              <a:gd name="adj" fmla="val 14634"/>
+              <a:gd name="adj" fmla="val 6857"/>
             </a:avLst>
           </a:prstGeom>
           <a:solidFill>
-            <a:srgbClr val="0068B7"/>
+            <a:srgbClr val="FFFFFF"/>
           </a:solidFill>
           <a:ln w="12700">
             <a:solidFill>
-              <a:srgbClr val="0068B7"/>
+              <a:srgbClr val="B9D7E6"/>
             </a:solidFill>
             <a:prstDash val="solid"/>
           </a:ln>
@@ -16106,172 +13810,100 @@
         </p:nvSpPr>
         <p:spPr>
           <a:xfrm>
-            <a:off x="7891272" y="4169664"/>
-            <a:ext cx="826008" cy="310896"/>
-          </a:xfrm>
-          <a:prstGeom prst="rect">
-            <a:avLst/>
-          </a:prstGeom>
-          <a:noFill/>
-          <a:ln/>
-        </p:spPr>
-        <p:txBody>
-          <a:bodyPr wrap="square" lIns="0" tIns="0" rIns="0" bIns="0" rtlCol="0" anchor="ctr">
+            <a:off x="8211312" y="3941064"/>
+            <a:ext cx="2734056" cy="256032"/>
+          </a:xfrm>
+          <a:prstGeom prst="rect">
+            <a:avLst/>
+          </a:prstGeom>
+          <a:noFill/>
+          <a:ln/>
+        </p:spPr>
+        <p:txBody>
+          <a:bodyPr wrap="square" lIns="0" tIns="0" rIns="0" bIns="0" rtlCol="0" anchor="ctr"/>
+          <a:lstStyle/>
+          <a:p>
+            <a:pPr indent="0" marL="0">
+              <a:buNone/>
+            </a:pPr>
+            <a:r>
+              <a:rPr lang="en-US" sz="1300" b="1" dirty="0">
+                <a:solidFill>
+                  <a:srgbClr val="0068B7"/>
+                </a:solidFill>
+                <a:latin typeface="Aptos" pitchFamily="34" charset="0"/>
+                <a:ea typeface="Aptos" pitchFamily="34" charset="-122"/>
+                <a:cs typeface="Aptos" pitchFamily="34" charset="-120"/>
+              </a:rPr>
+              <a:t>Use the play links to</a:t>
+            </a:r>
+            <a:endParaRPr lang="en-US" sz="1300" dirty="0"/>
+          </a:p>
+        </p:txBody>
+      </p:sp>
+      <p:sp>
+        <p:nvSpPr>
+          <p:cNvPr id="15" name="Text 13"/>
+          <p:cNvSpPr/>
+          <p:nvPr/>
+        </p:nvSpPr>
+        <p:spPr>
+          <a:xfrm>
+            <a:off x="8229600" y="4306824"/>
+            <a:ext cx="2679192" cy="941832"/>
+          </a:xfrm>
+          <a:prstGeom prst="rect">
+            <a:avLst/>
+          </a:prstGeom>
+          <a:noFill/>
+          <a:ln/>
+        </p:spPr>
+        <p:txBody>
+          <a:bodyPr wrap="square" lIns="254" tIns="254" rIns="254" bIns="254" rtlCol="0" anchor="t">
             <a:normAutofit/>
           </a:bodyPr>
           <a:lstStyle/>
           <a:p>
-            <a:pPr algn="ctr" indent="0" marL="0">
-              <a:buNone/>
-            </a:pPr>
-            <a:r>
-              <a:rPr lang="en-US" sz="1500" b="1" dirty="0">
-                <a:solidFill>
-                  <a:srgbClr val="FFFFFF"/>
-                </a:solidFill>
-                <a:latin typeface="Aptos" pitchFamily="34" charset="0"/>
-                <a:ea typeface="Aptos" pitchFamily="34" charset="-122"/>
-                <a:cs typeface="Aptos" pitchFamily="34" charset="-120"/>
-              </a:rPr>
-              <a:t>Lesson</a:t>
-            </a:r>
-            <a:endParaRPr lang="en-US" sz="1500" dirty="0"/>
-          </a:p>
-        </p:txBody>
-      </p:sp>
-      <p:sp>
-        <p:nvSpPr>
-          <p:cNvPr id="15" name="Shape 13"/>
-          <p:cNvSpPr/>
-          <p:nvPr/>
-        </p:nvSpPr>
-        <p:spPr>
-          <a:xfrm>
-            <a:off x="9046464" y="3977640"/>
-            <a:ext cx="972312" cy="749808"/>
-          </a:xfrm>
-          <a:prstGeom prst="roundRect">
-            <a:avLst>
-              <a:gd name="adj" fmla="val 14634"/>
-            </a:avLst>
-          </a:prstGeom>
-          <a:solidFill>
-            <a:srgbClr val="2F8A28"/>
-          </a:solidFill>
-          <a:ln w="12700">
-            <a:solidFill>
-              <a:srgbClr val="2F8A28"/>
-            </a:solidFill>
-            <a:prstDash val="solid"/>
-          </a:ln>
-        </p:spPr>
-      </p:sp>
-      <p:sp>
-        <p:nvSpPr>
-          <p:cNvPr id="16" name="Text 14"/>
-          <p:cNvSpPr/>
-          <p:nvPr/>
-        </p:nvSpPr>
-        <p:spPr>
-          <a:xfrm>
-            <a:off x="9119616" y="4169664"/>
-            <a:ext cx="826008" cy="310896"/>
-          </a:xfrm>
-          <a:prstGeom prst="rect">
-            <a:avLst/>
-          </a:prstGeom>
-          <a:noFill/>
-          <a:ln/>
-        </p:spPr>
-        <p:txBody>
-          <a:bodyPr wrap="square" lIns="0" tIns="0" rIns="0" bIns="0" rtlCol="0" anchor="ctr">
-            <a:normAutofit/>
-          </a:bodyPr>
-          <a:lstStyle/>
-          <a:p>
-            <a:pPr algn="ctr" indent="0" marL="0">
-              <a:buNone/>
-            </a:pPr>
-            <a:r>
-              <a:rPr lang="en-US" sz="1500" b="1" dirty="0">
-                <a:solidFill>
-                  <a:srgbClr val="FFFFFF"/>
-                </a:solidFill>
-                <a:latin typeface="Aptos" pitchFamily="34" charset="0"/>
-                <a:ea typeface="Aptos" pitchFamily="34" charset="-122"/>
-                <a:cs typeface="Aptos" pitchFamily="34" charset="-120"/>
-              </a:rPr>
-              <a:t>Plays</a:t>
-            </a:r>
-            <a:endParaRPr lang="en-US" sz="1500" dirty="0"/>
-          </a:p>
-        </p:txBody>
-      </p:sp>
-      <p:sp>
-        <p:nvSpPr>
-          <p:cNvPr id="17" name="Shape 15"/>
-          <p:cNvSpPr/>
-          <p:nvPr/>
-        </p:nvSpPr>
-        <p:spPr>
-          <a:xfrm>
-            <a:off x="10274808" y="3977640"/>
-            <a:ext cx="972312" cy="749808"/>
-          </a:xfrm>
-          <a:prstGeom prst="roundRect">
-            <a:avLst>
-              <a:gd name="adj" fmla="val 14634"/>
-            </a:avLst>
-          </a:prstGeom>
-          <a:solidFill>
-            <a:srgbClr val="6A4CA3"/>
-          </a:solidFill>
-          <a:ln w="12700">
-            <a:solidFill>
-              <a:srgbClr val="6A4CA3"/>
-            </a:solidFill>
-            <a:prstDash val="solid"/>
-          </a:ln>
-        </p:spPr>
-      </p:sp>
-      <p:sp>
-        <p:nvSpPr>
-          <p:cNvPr id="18" name="Text 16"/>
-          <p:cNvSpPr/>
-          <p:nvPr/>
-        </p:nvSpPr>
-        <p:spPr>
-          <a:xfrm>
-            <a:off x="10347960" y="4169664"/>
-            <a:ext cx="826008" cy="310896"/>
-          </a:xfrm>
-          <a:prstGeom prst="rect">
-            <a:avLst/>
-          </a:prstGeom>
-          <a:noFill/>
-          <a:ln/>
-        </p:spPr>
-        <p:txBody>
-          <a:bodyPr wrap="square" lIns="0" tIns="0" rIns="0" bIns="0" rtlCol="0" anchor="ctr">
-            <a:normAutofit/>
-          </a:bodyPr>
-          <a:lstStyle/>
-          <a:p>
-            <a:pPr algn="ctr" indent="0" marL="0">
-              <a:buNone/>
-            </a:pPr>
-            <a:r>
-              <a:rPr lang="en-US" sz="1500" b="1" dirty="0">
-                <a:solidFill>
-                  <a:srgbClr val="FFFFFF"/>
-                </a:solidFill>
-                <a:latin typeface="Aptos" pitchFamily="34" charset="0"/>
-                <a:ea typeface="Aptos" pitchFamily="34" charset="-122"/>
-                <a:cs typeface="Aptos" pitchFamily="34" charset="-120"/>
-              </a:rPr>
-              <a:t>Action</a:t>
-            </a:r>
-            <a:endParaRPr lang="en-US" sz="1500" dirty="0"/>
+            <a:r>
+              <a:rPr lang="en-US" sz="1380" dirty="0">
+                <a:solidFill>
+                  <a:srgbClr val="17364A"/>
+                </a:solidFill>
+                <a:latin typeface="Aptos" pitchFamily="34" charset="0"/>
+                <a:ea typeface="Aptos" pitchFamily="34" charset="-122"/>
+                <a:cs typeface="Aptos" pitchFamily="34" charset="-120"/>
+              </a:rPr>
+              <a:t>Locate the decision point in the playbook sequence.</a:t>
+            </a:r>
+            <a:endParaRPr lang="en-US" sz="1380" dirty="0"/>
+          </a:p>
+          <a:p>
+            <a:r>
+              <a:rPr lang="en-US" sz="1380" dirty="0">
+                <a:solidFill>
+                  <a:srgbClr val="17364A"/>
+                </a:solidFill>
+                <a:latin typeface="Aptos" pitchFamily="34" charset="0"/>
+                <a:ea typeface="Aptos" pitchFamily="34" charset="-122"/>
+                <a:cs typeface="Aptos" pitchFamily="34" charset="-120"/>
+              </a:rPr>
+              <a:t>Identify who should participate in the work.</a:t>
+            </a:r>
+            <a:endParaRPr lang="en-US" sz="1380" dirty="0"/>
+          </a:p>
+          <a:p>
+            <a:r>
+              <a:rPr lang="en-US" sz="1380" dirty="0">
+                <a:solidFill>
+                  <a:srgbClr val="17364A"/>
+                </a:solidFill>
+                <a:latin typeface="Aptos" pitchFamily="34" charset="0"/>
+                <a:ea typeface="Aptos" pitchFamily="34" charset="-122"/>
+                <a:cs typeface="Aptos" pitchFamily="34" charset="-120"/>
+              </a:rPr>
+              <a:t>Document the review, approval, or implementation step.</a:t>
+            </a:r>
+            <a:endParaRPr lang="en-US" sz="1380" dirty="0"/>
           </a:p>
         </p:txBody>
       </p:sp>
@@ -16749,20 +14381,20 @@
         </p:nvSpPr>
         <p:spPr>
           <a:xfrm>
-            <a:off x="7818120" y="3977640"/>
-            <a:ext cx="972312" cy="749808"/>
+            <a:off x="8046720" y="3794760"/>
+            <a:ext cx="3063240" cy="1600200"/>
           </a:xfrm>
           <a:prstGeom prst="roundRect">
             <a:avLst>
-              <a:gd name="adj" fmla="val 14634"/>
+              <a:gd name="adj" fmla="val 6857"/>
             </a:avLst>
           </a:prstGeom>
           <a:solidFill>
-            <a:srgbClr val="0068B7"/>
+            <a:srgbClr val="FFFFFF"/>
           </a:solidFill>
           <a:ln w="12700">
             <a:solidFill>
-              <a:srgbClr val="0068B7"/>
+              <a:srgbClr val="B9D7E6"/>
             </a:solidFill>
             <a:prstDash val="solid"/>
           </a:ln>
@@ -16776,172 +14408,100 @@
         </p:nvSpPr>
         <p:spPr>
           <a:xfrm>
-            <a:off x="7891272" y="4169664"/>
-            <a:ext cx="826008" cy="310896"/>
-          </a:xfrm>
-          <a:prstGeom prst="rect">
-            <a:avLst/>
-          </a:prstGeom>
-          <a:noFill/>
-          <a:ln/>
-        </p:spPr>
-        <p:txBody>
-          <a:bodyPr wrap="square" lIns="0" tIns="0" rIns="0" bIns="0" rtlCol="0" anchor="ctr">
+            <a:off x="8211312" y="3941064"/>
+            <a:ext cx="2734056" cy="256032"/>
+          </a:xfrm>
+          <a:prstGeom prst="rect">
+            <a:avLst/>
+          </a:prstGeom>
+          <a:noFill/>
+          <a:ln/>
+        </p:spPr>
+        <p:txBody>
+          <a:bodyPr wrap="square" lIns="0" tIns="0" rIns="0" bIns="0" rtlCol="0" anchor="ctr"/>
+          <a:lstStyle/>
+          <a:p>
+            <a:pPr indent="0" marL="0">
+              <a:buNone/>
+            </a:pPr>
+            <a:r>
+              <a:rPr lang="en-US" sz="1300" b="1" dirty="0">
+                <a:solidFill>
+                  <a:srgbClr val="0068B7"/>
+                </a:solidFill>
+                <a:latin typeface="Aptos" pitchFamily="34" charset="0"/>
+                <a:ea typeface="Aptos" pitchFamily="34" charset="-122"/>
+                <a:cs typeface="Aptos" pitchFamily="34" charset="-120"/>
+              </a:rPr>
+              <a:t>Tool selection cues</a:t>
+            </a:r>
+            <a:endParaRPr lang="en-US" sz="1300" dirty="0"/>
+          </a:p>
+        </p:txBody>
+      </p:sp>
+      <p:sp>
+        <p:nvSpPr>
+          <p:cNvPr id="15" name="Text 13"/>
+          <p:cNvSpPr/>
+          <p:nvPr/>
+        </p:nvSpPr>
+        <p:spPr>
+          <a:xfrm>
+            <a:off x="8229600" y="4306824"/>
+            <a:ext cx="2679192" cy="941832"/>
+          </a:xfrm>
+          <a:prstGeom prst="rect">
+            <a:avLst/>
+          </a:prstGeom>
+          <a:noFill/>
+          <a:ln/>
+        </p:spPr>
+        <p:txBody>
+          <a:bodyPr wrap="square" lIns="254" tIns="254" rIns="254" bIns="254" rtlCol="0" anchor="t">
             <a:normAutofit/>
           </a:bodyPr>
           <a:lstStyle/>
           <a:p>
-            <a:pPr algn="ctr" indent="0" marL="0">
-              <a:buNone/>
-            </a:pPr>
-            <a:r>
-              <a:rPr lang="en-US" sz="1500" b="1" dirty="0">
-                <a:solidFill>
-                  <a:srgbClr val="FFFFFF"/>
-                </a:solidFill>
-                <a:latin typeface="Aptos" pitchFamily="34" charset="0"/>
-                <a:ea typeface="Aptos" pitchFamily="34" charset="-122"/>
-                <a:cs typeface="Aptos" pitchFamily="34" charset="-120"/>
-              </a:rPr>
-              <a:t>Concept</a:t>
-            </a:r>
-            <a:endParaRPr lang="en-US" sz="1500" dirty="0"/>
-          </a:p>
-        </p:txBody>
-      </p:sp>
-      <p:sp>
-        <p:nvSpPr>
-          <p:cNvPr id="15" name="Shape 13"/>
-          <p:cNvSpPr/>
-          <p:nvPr/>
-        </p:nvSpPr>
-        <p:spPr>
-          <a:xfrm>
-            <a:off x="9046464" y="3977640"/>
-            <a:ext cx="972312" cy="749808"/>
-          </a:xfrm>
-          <a:prstGeom prst="roundRect">
-            <a:avLst>
-              <a:gd name="adj" fmla="val 14634"/>
-            </a:avLst>
-          </a:prstGeom>
-          <a:solidFill>
-            <a:srgbClr val="2F8A28"/>
-          </a:solidFill>
-          <a:ln w="12700">
-            <a:solidFill>
-              <a:srgbClr val="2F8A28"/>
-            </a:solidFill>
-            <a:prstDash val="solid"/>
-          </a:ln>
-        </p:spPr>
-      </p:sp>
-      <p:sp>
-        <p:nvSpPr>
-          <p:cNvPr id="16" name="Text 14"/>
-          <p:cNvSpPr/>
-          <p:nvPr/>
-        </p:nvSpPr>
-        <p:spPr>
-          <a:xfrm>
-            <a:off x="9119616" y="4169664"/>
-            <a:ext cx="826008" cy="310896"/>
-          </a:xfrm>
-          <a:prstGeom prst="rect">
-            <a:avLst/>
-          </a:prstGeom>
-          <a:noFill/>
-          <a:ln/>
-        </p:spPr>
-        <p:txBody>
-          <a:bodyPr wrap="square" lIns="0" tIns="0" rIns="0" bIns="0" rtlCol="0" anchor="ctr">
-            <a:normAutofit/>
-          </a:bodyPr>
-          <a:lstStyle/>
-          <a:p>
-            <a:pPr algn="ctr" indent="0" marL="0">
-              <a:buNone/>
-            </a:pPr>
-            <a:r>
-              <a:rPr lang="en-US" sz="1500" b="1" dirty="0">
-                <a:solidFill>
-                  <a:srgbClr val="FFFFFF"/>
-                </a:solidFill>
-                <a:latin typeface="Aptos" pitchFamily="34" charset="0"/>
-                <a:ea typeface="Aptos" pitchFamily="34" charset="-122"/>
-                <a:cs typeface="Aptos" pitchFamily="34" charset="-120"/>
-              </a:rPr>
-              <a:t>Tool</a:t>
-            </a:r>
-            <a:endParaRPr lang="en-US" sz="1500" dirty="0"/>
-          </a:p>
-        </p:txBody>
-      </p:sp>
-      <p:sp>
-        <p:nvSpPr>
-          <p:cNvPr id="17" name="Shape 15"/>
-          <p:cNvSpPr/>
-          <p:nvPr/>
-        </p:nvSpPr>
-        <p:spPr>
-          <a:xfrm>
-            <a:off x="10274808" y="3977640"/>
-            <a:ext cx="972312" cy="749808"/>
-          </a:xfrm>
-          <a:prstGeom prst="roundRect">
-            <a:avLst>
-              <a:gd name="adj" fmla="val 14634"/>
-            </a:avLst>
-          </a:prstGeom>
-          <a:solidFill>
-            <a:srgbClr val="D69A2D"/>
-          </a:solidFill>
-          <a:ln w="12700">
-            <a:solidFill>
-              <a:srgbClr val="D69A2D"/>
-            </a:solidFill>
-            <a:prstDash val="solid"/>
-          </a:ln>
-        </p:spPr>
-      </p:sp>
-      <p:sp>
-        <p:nvSpPr>
-          <p:cNvPr id="18" name="Text 16"/>
-          <p:cNvSpPr/>
-          <p:nvPr/>
-        </p:nvSpPr>
-        <p:spPr>
-          <a:xfrm>
-            <a:off x="10347960" y="4169664"/>
-            <a:ext cx="826008" cy="310896"/>
-          </a:xfrm>
-          <a:prstGeom prst="rect">
-            <a:avLst/>
-          </a:prstGeom>
-          <a:noFill/>
-          <a:ln/>
-        </p:spPr>
-        <p:txBody>
-          <a:bodyPr wrap="square" lIns="0" tIns="0" rIns="0" bIns="0" rtlCol="0" anchor="ctr">
-            <a:normAutofit/>
-          </a:bodyPr>
-          <a:lstStyle/>
-          <a:p>
-            <a:pPr algn="ctr" indent="0" marL="0">
-              <a:buNone/>
-            </a:pPr>
-            <a:r>
-              <a:rPr lang="en-US" sz="1500" b="1" dirty="0">
-                <a:solidFill>
-                  <a:srgbClr val="FFFFFF"/>
-                </a:solidFill>
-                <a:latin typeface="Aptos" pitchFamily="34" charset="0"/>
-                <a:ea typeface="Aptos" pitchFamily="34" charset="-122"/>
-                <a:cs typeface="Aptos" pitchFamily="34" charset="-120"/>
-              </a:rPr>
-              <a:t>Artifact</a:t>
-            </a:r>
-            <a:endParaRPr lang="en-US" sz="1500" dirty="0"/>
+            <a:r>
+              <a:rPr lang="en-US" sz="1380" dirty="0">
+                <a:solidFill>
+                  <a:srgbClr val="17364A"/>
+                </a:solidFill>
+                <a:latin typeface="Aptos" pitchFamily="34" charset="0"/>
+                <a:ea typeface="Aptos" pitchFamily="34" charset="-122"/>
+                <a:cs typeface="Aptos" pitchFamily="34" charset="-120"/>
+              </a:rPr>
+              <a:t>Use a tool when no comparable local process exists.</a:t>
+            </a:r>
+            <a:endParaRPr lang="en-US" sz="1380" dirty="0"/>
+          </a:p>
+          <a:p>
+            <a:r>
+              <a:rPr lang="en-US" sz="1380" dirty="0">
+                <a:solidFill>
+                  <a:srgbClr val="17364A"/>
+                </a:solidFill>
+                <a:latin typeface="Aptos" pitchFamily="34" charset="0"/>
+                <a:ea typeface="Aptos" pitchFamily="34" charset="-122"/>
+                <a:cs typeface="Aptos" pitchFamily="34" charset="-120"/>
+              </a:rPr>
+              <a:t>Adapt existing department templates when they already fit the purpose.</a:t>
+            </a:r>
+            <a:endParaRPr lang="en-US" sz="1380" dirty="0"/>
+          </a:p>
+          <a:p>
+            <a:r>
+              <a:rPr lang="en-US" sz="1380" dirty="0">
+                <a:solidFill>
+                  <a:srgbClr val="17364A"/>
+                </a:solidFill>
+                <a:latin typeface="Aptos" pitchFamily="34" charset="0"/>
+                <a:ea typeface="Aptos" pitchFamily="34" charset="-122"/>
+                <a:cs typeface="Aptos" pitchFamily="34" charset="-120"/>
+              </a:rPr>
+              <a:t>Save the completed artifact as evidence of the decision.</a:t>
+            </a:r>
+            <a:endParaRPr lang="en-US" sz="1380" dirty="0"/>
           </a:p>
         </p:txBody>
       </p:sp>
@@ -17414,13 +14974,11 @@
             </a:avLst>
           </a:prstGeom>
           <a:solidFill>
-            <a:srgbClr val="FFFFFF">
-              <a:alpha val="88000"/>
-            </a:srgbClr>
+            <a:srgbClr val="FFFFFF"/>
           </a:solidFill>
           <a:ln w="12700">
             <a:solidFill>
-              <a:srgbClr val="D6E8F2"/>
+              <a:srgbClr val="B9D7E6"/>
             </a:solidFill>
             <a:prstDash val="solid"/>
           </a:ln>
@@ -17428,30 +14986,42 @@
       </p:sp>
       <p:sp>
         <p:nvSpPr>
-          <p:cNvPr id="14" name="Shape 12"/>
-          <p:cNvSpPr/>
-          <p:nvPr/>
-        </p:nvSpPr>
-        <p:spPr>
-          <a:xfrm>
-            <a:off x="7927848" y="3319272"/>
-            <a:ext cx="792480" cy="749808"/>
-          </a:xfrm>
-          <a:prstGeom prst="roundRect">
-            <a:avLst>
-              <a:gd name="adj" fmla="val 14634"/>
-            </a:avLst>
-          </a:prstGeom>
-          <a:solidFill>
-            <a:srgbClr val="0068B7"/>
-          </a:solidFill>
-          <a:ln w="12700">
-            <a:solidFill>
-              <a:srgbClr val="0068B7"/>
-            </a:solidFill>
-            <a:prstDash val="solid"/>
-          </a:ln>
-        </p:spPr>
+          <p:cNvPr id="14" name="Text 12"/>
+          <p:cNvSpPr/>
+          <p:nvPr/>
+        </p:nvSpPr>
+        <p:spPr>
+          <a:xfrm>
+            <a:off x="7799832" y="2935224"/>
+            <a:ext cx="3145536" cy="256032"/>
+          </a:xfrm>
+          <a:prstGeom prst="rect">
+            <a:avLst/>
+          </a:prstGeom>
+          <a:noFill/>
+          <a:ln/>
+        </p:spPr>
+        <p:txBody>
+          <a:bodyPr wrap="square" lIns="0" tIns="0" rIns="0" bIns="0" rtlCol="0" anchor="ctr"/>
+          <a:lstStyle/>
+          <a:p>
+            <a:pPr indent="0" marL="0">
+              <a:buNone/>
+            </a:pPr>
+            <a:r>
+              <a:rPr lang="en-US" sz="1300" b="1" dirty="0">
+                <a:solidFill>
+                  <a:srgbClr val="0068B7"/>
+                </a:solidFill>
+                <a:latin typeface="Aptos" pitchFamily="34" charset="0"/>
+                <a:ea typeface="Aptos" pitchFamily="34" charset="-122"/>
+                <a:cs typeface="Aptos" pitchFamily="34" charset="-120"/>
+              </a:rPr>
+              <a:t>Concept checkpoints</a:t>
+            </a:r>
+            <a:endParaRPr lang="en-US" sz="1300" dirty="0"/>
+          </a:p>
+        </p:txBody>
       </p:sp>
       <p:sp>
         <p:nvSpPr>
@@ -17461,240 +15031,53 @@
         </p:nvSpPr>
         <p:spPr>
           <a:xfrm>
-            <a:off x="8001000" y="3511296"/>
-            <a:ext cx="646176" cy="310896"/>
-          </a:xfrm>
-          <a:prstGeom prst="rect">
-            <a:avLst/>
-          </a:prstGeom>
-          <a:noFill/>
-          <a:ln/>
-        </p:spPr>
-        <p:txBody>
-          <a:bodyPr wrap="square" lIns="0" tIns="0" rIns="0" bIns="0" rtlCol="0" anchor="ctr">
+            <a:off x="7818120" y="3300984"/>
+            <a:ext cx="3090672" cy="877824"/>
+          </a:xfrm>
+          <a:prstGeom prst="rect">
+            <a:avLst/>
+          </a:prstGeom>
+          <a:noFill/>
+          <a:ln/>
+        </p:spPr>
+        <p:txBody>
+          <a:bodyPr wrap="square" lIns="254" tIns="254" rIns="254" bIns="254" rtlCol="0" anchor="t">
             <a:normAutofit/>
           </a:bodyPr>
           <a:lstStyle/>
           <a:p>
-            <a:pPr algn="ctr" indent="0" marL="0">
-              <a:buNone/>
-            </a:pPr>
-            <a:r>
-              <a:rPr lang="en-US" sz="1500" b="1" dirty="0">
-                <a:solidFill>
-                  <a:srgbClr val="FFFFFF"/>
-                </a:solidFill>
-                <a:latin typeface="Aptos" pitchFamily="34" charset="0"/>
-                <a:ea typeface="Aptos" pitchFamily="34" charset="-122"/>
-                <a:cs typeface="Aptos" pitchFamily="34" charset="-120"/>
-              </a:rPr>
-              <a:t>Plan</a:t>
-            </a:r>
-            <a:endParaRPr lang="en-US" sz="1500" dirty="0"/>
+            <a:r>
+              <a:rPr lang="en-US" sz="1380" dirty="0">
+                <a:solidFill>
+                  <a:srgbClr val="17364A"/>
+                </a:solidFill>
+                <a:latin typeface="Aptos" pitchFamily="34" charset="0"/>
+                <a:ea typeface="Aptos" pitchFamily="34" charset="-122"/>
+                <a:cs typeface="Aptos" pitchFamily="34" charset="-120"/>
+              </a:rPr>
+              <a:t>Recognize equity, privacy, security, legal, operational, and public trust implications.</a:t>
+            </a:r>
+            <a:endParaRPr lang="en-US" sz="1380" dirty="0"/>
+          </a:p>
+          <a:p>
+            <a:r>
+              <a:rPr lang="en-US" sz="1380" dirty="0">
+                <a:solidFill>
+                  <a:srgbClr val="17364A"/>
+                </a:solidFill>
+                <a:latin typeface="Aptos" pitchFamily="34" charset="0"/>
+                <a:ea typeface="Aptos" pitchFamily="34" charset="-122"/>
+                <a:cs typeface="Aptos" pitchFamily="34" charset="-120"/>
+              </a:rPr>
+              <a:t>Produce a practical artifact that supports readiness, governance, implementation,.</a:t>
+            </a:r>
+            <a:endParaRPr lang="en-US" sz="1380" dirty="0"/>
           </a:p>
         </p:txBody>
       </p:sp>
       <p:sp>
         <p:nvSpPr>
           <p:cNvPr id="16" name="Shape 14"/>
-          <p:cNvSpPr/>
-          <p:nvPr/>
-        </p:nvSpPr>
-        <p:spPr>
-          <a:xfrm>
-            <a:off x="8976360" y="3319272"/>
-            <a:ext cx="792480" cy="749808"/>
-          </a:xfrm>
-          <a:prstGeom prst="roundRect">
-            <a:avLst>
-              <a:gd name="adj" fmla="val 14634"/>
-            </a:avLst>
-          </a:prstGeom>
-          <a:solidFill>
-            <a:srgbClr val="2F8A28"/>
-          </a:solidFill>
-          <a:ln w="12700">
-            <a:solidFill>
-              <a:srgbClr val="2F8A28"/>
-            </a:solidFill>
-            <a:prstDash val="solid"/>
-          </a:ln>
-        </p:spPr>
-      </p:sp>
-      <p:sp>
-        <p:nvSpPr>
-          <p:cNvPr id="17" name="Text 15"/>
-          <p:cNvSpPr/>
-          <p:nvPr/>
-        </p:nvSpPr>
-        <p:spPr>
-          <a:xfrm>
-            <a:off x="9049512" y="3511296"/>
-            <a:ext cx="646176" cy="310896"/>
-          </a:xfrm>
-          <a:prstGeom prst="rect">
-            <a:avLst/>
-          </a:prstGeom>
-          <a:noFill/>
-          <a:ln/>
-        </p:spPr>
-        <p:txBody>
-          <a:bodyPr wrap="square" lIns="0" tIns="0" rIns="0" bIns="0" rtlCol="0" anchor="ctr">
-            <a:normAutofit/>
-          </a:bodyPr>
-          <a:lstStyle/>
-          <a:p>
-            <a:pPr algn="ctr" indent="0" marL="0">
-              <a:buNone/>
-            </a:pPr>
-            <a:r>
-              <a:rPr lang="en-US" sz="1500" b="1" dirty="0">
-                <a:solidFill>
-                  <a:srgbClr val="FFFFFF"/>
-                </a:solidFill>
-                <a:latin typeface="Aptos" pitchFamily="34" charset="0"/>
-                <a:ea typeface="Aptos" pitchFamily="34" charset="-122"/>
-                <a:cs typeface="Aptos" pitchFamily="34" charset="-120"/>
-              </a:rPr>
-              <a:t>Do</a:t>
-            </a:r>
-            <a:endParaRPr lang="en-US" sz="1500" dirty="0"/>
-          </a:p>
-        </p:txBody>
-      </p:sp>
-      <p:sp>
-        <p:nvSpPr>
-          <p:cNvPr id="18" name="Shape 16"/>
-          <p:cNvSpPr/>
-          <p:nvPr/>
-        </p:nvSpPr>
-        <p:spPr>
-          <a:xfrm>
-            <a:off x="10024872" y="3319272"/>
-            <a:ext cx="792480" cy="749808"/>
-          </a:xfrm>
-          <a:prstGeom prst="roundRect">
-            <a:avLst>
-              <a:gd name="adj" fmla="val 14634"/>
-            </a:avLst>
-          </a:prstGeom>
-          <a:solidFill>
-            <a:srgbClr val="D69A2D"/>
-          </a:solidFill>
-          <a:ln w="12700">
-            <a:solidFill>
-              <a:srgbClr val="D69A2D"/>
-            </a:solidFill>
-            <a:prstDash val="solid"/>
-          </a:ln>
-        </p:spPr>
-      </p:sp>
-      <p:sp>
-        <p:nvSpPr>
-          <p:cNvPr id="19" name="Text 17"/>
-          <p:cNvSpPr/>
-          <p:nvPr/>
-        </p:nvSpPr>
-        <p:spPr>
-          <a:xfrm>
-            <a:off x="10098024" y="3511296"/>
-            <a:ext cx="646176" cy="310896"/>
-          </a:xfrm>
-          <a:prstGeom prst="rect">
-            <a:avLst/>
-          </a:prstGeom>
-          <a:noFill/>
-          <a:ln/>
-        </p:spPr>
-        <p:txBody>
-          <a:bodyPr wrap="square" lIns="0" tIns="0" rIns="0" bIns="0" rtlCol="0" anchor="ctr">
-            <a:normAutofit/>
-          </a:bodyPr>
-          <a:lstStyle/>
-          <a:p>
-            <a:pPr algn="ctr" indent="0" marL="0">
-              <a:buNone/>
-            </a:pPr>
-            <a:r>
-              <a:rPr lang="en-US" sz="1500" b="1" dirty="0">
-                <a:solidFill>
-                  <a:srgbClr val="FFFFFF"/>
-                </a:solidFill>
-                <a:latin typeface="Aptos" pitchFamily="34" charset="0"/>
-                <a:ea typeface="Aptos" pitchFamily="34" charset="-122"/>
-                <a:cs typeface="Aptos" pitchFamily="34" charset="-120"/>
-              </a:rPr>
-              <a:t>Review</a:t>
-            </a:r>
-            <a:endParaRPr lang="en-US" sz="1500" dirty="0"/>
-          </a:p>
-        </p:txBody>
-      </p:sp>
-      <p:sp>
-        <p:nvSpPr>
-          <p:cNvPr id="20" name="Shape 18"/>
-          <p:cNvSpPr/>
-          <p:nvPr/>
-        </p:nvSpPr>
-        <p:spPr>
-          <a:xfrm>
-            <a:off x="8293608" y="4389120"/>
-            <a:ext cx="2157984" cy="0"/>
-          </a:xfrm>
-          <a:prstGeom prst="line">
-            <a:avLst/>
-          </a:prstGeom>
-          <a:noFill/>
-          <a:ln w="25400">
-            <a:solidFill>
-              <a:srgbClr val="8ABBD8"/>
-            </a:solidFill>
-            <a:prstDash val="solid"/>
-          </a:ln>
-        </p:spPr>
-      </p:sp>
-      <p:sp>
-        <p:nvSpPr>
-          <p:cNvPr id="21" name="Text 19"/>
-          <p:cNvSpPr/>
-          <p:nvPr/>
-        </p:nvSpPr>
-        <p:spPr>
-          <a:xfrm>
-            <a:off x="7909560" y="3977640"/>
-            <a:ext cx="2926080" cy="182880"/>
-          </a:xfrm>
-          <a:prstGeom prst="rect">
-            <a:avLst/>
-          </a:prstGeom>
-          <a:noFill/>
-          <a:ln/>
-        </p:spPr>
-        <p:txBody>
-          <a:bodyPr wrap="square" lIns="0" tIns="0" rIns="0" bIns="0" rtlCol="0" anchor="ctr"/>
-          <a:lstStyle/>
-          <a:p>
-            <a:pPr algn="ctr" indent="0" marL="0">
-              <a:buNone/>
-            </a:pPr>
-            <a:r>
-              <a:rPr lang="en-US" sz="1000" dirty="0">
-                <a:solidFill>
-                  <a:srgbClr val="003A63"/>
-                </a:solidFill>
-                <a:latin typeface="Aptos" pitchFamily="34" charset="0"/>
-                <a:ea typeface="Aptos" pitchFamily="34" charset="-122"/>
-                <a:cs typeface="Aptos" pitchFamily="34" charset="-120"/>
-              </a:rPr>
-              <a:t>Dependencies visible</a:t>
-            </a:r>
-            <a:endParaRPr lang="en-US" sz="1000" dirty="0"/>
-          </a:p>
-        </p:txBody>
-      </p:sp>
-      <p:sp>
-        <p:nvSpPr>
-          <p:cNvPr id="22" name="Shape 20"/>
           <p:cNvSpPr/>
           <p:nvPr/>
         </p:nvSpPr>
@@ -17721,7 +15104,7 @@
       </p:sp>
       <p:sp>
         <p:nvSpPr>
-          <p:cNvPr id="23" name="Text 21"/>
+          <p:cNvPr id="17" name="Text 15"/>
           <p:cNvSpPr/>
           <p:nvPr/>
         </p:nvSpPr>
@@ -17760,7 +15143,7 @@
       </p:sp>
       <p:sp>
         <p:nvSpPr>
-          <p:cNvPr id="24" name="Text 22"/>
+          <p:cNvPr id="18" name="Text 16"/>
           <p:cNvSpPr/>
           <p:nvPr/>
         </p:nvSpPr>
@@ -18268,13 +15651,11 @@
             </a:avLst>
           </a:prstGeom>
           <a:solidFill>
-            <a:srgbClr val="FFFFFF">
-              <a:alpha val="88000"/>
-            </a:srgbClr>
+            <a:srgbClr val="FFFFFF"/>
           </a:solidFill>
           <a:ln w="12700">
             <a:solidFill>
-              <a:srgbClr val="D6E8F2"/>
+              <a:srgbClr val="B9D7E6"/>
             </a:solidFill>
             <a:prstDash val="solid"/>
           </a:ln>
@@ -18282,30 +15663,42 @@
       </p:sp>
       <p:sp>
         <p:nvSpPr>
-          <p:cNvPr id="14" name="Shape 12"/>
-          <p:cNvSpPr/>
-          <p:nvPr/>
-        </p:nvSpPr>
-        <p:spPr>
-          <a:xfrm>
-            <a:off x="7927848" y="3319272"/>
-            <a:ext cx="792480" cy="749808"/>
-          </a:xfrm>
-          <a:prstGeom prst="roundRect">
-            <a:avLst>
-              <a:gd name="adj" fmla="val 14634"/>
-            </a:avLst>
-          </a:prstGeom>
-          <a:solidFill>
-            <a:srgbClr val="0068B7"/>
-          </a:solidFill>
-          <a:ln w="12700">
-            <a:solidFill>
-              <a:srgbClr val="0068B7"/>
-            </a:solidFill>
-            <a:prstDash val="solid"/>
-          </a:ln>
-        </p:spPr>
+          <p:cNvPr id="14" name="Text 12"/>
+          <p:cNvSpPr/>
+          <p:nvPr/>
+        </p:nvSpPr>
+        <p:spPr>
+          <a:xfrm>
+            <a:off x="7799832" y="2935224"/>
+            <a:ext cx="3145536" cy="256032"/>
+          </a:xfrm>
+          <a:prstGeom prst="rect">
+            <a:avLst/>
+          </a:prstGeom>
+          <a:noFill/>
+          <a:ln/>
+        </p:spPr>
+        <p:txBody>
+          <a:bodyPr wrap="square" lIns="0" tIns="0" rIns="0" bIns="0" rtlCol="0" anchor="ctr"/>
+          <a:lstStyle/>
+          <a:p>
+            <a:pPr indent="0" marL="0">
+              <a:buNone/>
+            </a:pPr>
+            <a:r>
+              <a:rPr lang="en-US" sz="1300" b="1" dirty="0">
+                <a:solidFill>
+                  <a:srgbClr val="0068B7"/>
+                </a:solidFill>
+                <a:latin typeface="Aptos" pitchFamily="34" charset="0"/>
+                <a:ea typeface="Aptos" pitchFamily="34" charset="-122"/>
+                <a:cs typeface="Aptos" pitchFamily="34" charset="-120"/>
+              </a:rPr>
+              <a:t>Concept checkpoints</a:t>
+            </a:r>
+            <a:endParaRPr lang="en-US" sz="1300" dirty="0"/>
+          </a:p>
+        </p:txBody>
       </p:sp>
       <p:sp>
         <p:nvSpPr>
@@ -18315,240 +15708,67 @@
         </p:nvSpPr>
         <p:spPr>
           <a:xfrm>
-            <a:off x="8001000" y="3511296"/>
-            <a:ext cx="646176" cy="310896"/>
-          </a:xfrm>
-          <a:prstGeom prst="rect">
-            <a:avLst/>
-          </a:prstGeom>
-          <a:noFill/>
-          <a:ln/>
-        </p:spPr>
-        <p:txBody>
-          <a:bodyPr wrap="square" lIns="0" tIns="0" rIns="0" bIns="0" rtlCol="0" anchor="ctr">
+            <a:off x="7818120" y="3300984"/>
+            <a:ext cx="3090672" cy="877824"/>
+          </a:xfrm>
+          <a:prstGeom prst="rect">
+            <a:avLst/>
+          </a:prstGeom>
+          <a:noFill/>
+          <a:ln/>
+        </p:spPr>
+        <p:txBody>
+          <a:bodyPr wrap="square" lIns="254" tIns="254" rIns="254" bIns="254" rtlCol="0" anchor="t">
             <a:normAutofit/>
           </a:bodyPr>
           <a:lstStyle/>
           <a:p>
-            <a:pPr algn="ctr" indent="0" marL="0">
-              <a:buNone/>
-            </a:pPr>
-            <a:r>
-              <a:rPr lang="en-US" sz="1500" b="1" dirty="0">
-                <a:solidFill>
-                  <a:srgbClr val="FFFFFF"/>
-                </a:solidFill>
-                <a:latin typeface="Aptos" pitchFamily="34" charset="0"/>
-                <a:ea typeface="Aptos" pitchFamily="34" charset="-122"/>
-                <a:cs typeface="Aptos" pitchFamily="34" charset="-120"/>
-              </a:rPr>
-              <a:t>Plan</a:t>
-            </a:r>
-            <a:endParaRPr lang="en-US" sz="1500" dirty="0"/>
+            <a:r>
+              <a:rPr lang="en-US" sz="1380" dirty="0">
+                <a:solidFill>
+                  <a:srgbClr val="17364A"/>
+                </a:solidFill>
+                <a:latin typeface="Aptos" pitchFamily="34" charset="0"/>
+                <a:ea typeface="Aptos" pitchFamily="34" charset="-122"/>
+                <a:cs typeface="Aptos" pitchFamily="34" charset="-120"/>
+              </a:rPr>
+              <a:t>This module focuses on connecting AI projects to allowable costs, deliverables, reporting,.</a:t>
+            </a:r>
+            <a:endParaRPr lang="en-US" sz="1380" dirty="0"/>
+          </a:p>
+          <a:p>
+            <a:r>
+              <a:rPr lang="en-US" sz="1380" dirty="0">
+                <a:solidFill>
+                  <a:srgbClr val="17364A"/>
+                </a:solidFill>
+                <a:latin typeface="Aptos" pitchFamily="34" charset="0"/>
+                <a:ea typeface="Aptos" pitchFamily="34" charset="-122"/>
+                <a:cs typeface="Aptos" pitchFamily="34" charset="-120"/>
+              </a:rPr>
+              <a:t>It is designed for public health staff who must translate responsible AI principles into.</a:t>
+            </a:r>
+            <a:endParaRPr lang="en-US" sz="1380" dirty="0"/>
+          </a:p>
+          <a:p>
+            <a:r>
+              <a:rPr lang="en-US" sz="1380" dirty="0">
+                <a:solidFill>
+                  <a:srgbClr val="17364A"/>
+                </a:solidFill>
+                <a:latin typeface="Aptos" pitchFamily="34" charset="0"/>
+                <a:ea typeface="Aptos" pitchFamily="34" charset="-122"/>
+                <a:cs typeface="Aptos" pitchFamily="34" charset="-120"/>
+              </a:rPr>
+              <a:t>The module helps learners move beyond general awareness by producing a practical artifact.</a:t>
+            </a:r>
+            <a:endParaRPr lang="en-US" sz="1380" dirty="0"/>
           </a:p>
         </p:txBody>
       </p:sp>
       <p:sp>
         <p:nvSpPr>
           <p:cNvPr id="16" name="Shape 14"/>
-          <p:cNvSpPr/>
-          <p:nvPr/>
-        </p:nvSpPr>
-        <p:spPr>
-          <a:xfrm>
-            <a:off x="8976360" y="3319272"/>
-            <a:ext cx="792480" cy="749808"/>
-          </a:xfrm>
-          <a:prstGeom prst="roundRect">
-            <a:avLst>
-              <a:gd name="adj" fmla="val 14634"/>
-            </a:avLst>
-          </a:prstGeom>
-          <a:solidFill>
-            <a:srgbClr val="2F8A28"/>
-          </a:solidFill>
-          <a:ln w="12700">
-            <a:solidFill>
-              <a:srgbClr val="2F8A28"/>
-            </a:solidFill>
-            <a:prstDash val="solid"/>
-          </a:ln>
-        </p:spPr>
-      </p:sp>
-      <p:sp>
-        <p:nvSpPr>
-          <p:cNvPr id="17" name="Text 15"/>
-          <p:cNvSpPr/>
-          <p:nvPr/>
-        </p:nvSpPr>
-        <p:spPr>
-          <a:xfrm>
-            <a:off x="9049512" y="3511296"/>
-            <a:ext cx="646176" cy="310896"/>
-          </a:xfrm>
-          <a:prstGeom prst="rect">
-            <a:avLst/>
-          </a:prstGeom>
-          <a:noFill/>
-          <a:ln/>
-        </p:spPr>
-        <p:txBody>
-          <a:bodyPr wrap="square" lIns="0" tIns="0" rIns="0" bIns="0" rtlCol="0" anchor="ctr">
-            <a:normAutofit/>
-          </a:bodyPr>
-          <a:lstStyle/>
-          <a:p>
-            <a:pPr algn="ctr" indent="0" marL="0">
-              <a:buNone/>
-            </a:pPr>
-            <a:r>
-              <a:rPr lang="en-US" sz="1500" b="1" dirty="0">
-                <a:solidFill>
-                  <a:srgbClr val="FFFFFF"/>
-                </a:solidFill>
-                <a:latin typeface="Aptos" pitchFamily="34" charset="0"/>
-                <a:ea typeface="Aptos" pitchFamily="34" charset="-122"/>
-                <a:cs typeface="Aptos" pitchFamily="34" charset="-120"/>
-              </a:rPr>
-              <a:t>Do</a:t>
-            </a:r>
-            <a:endParaRPr lang="en-US" sz="1500" dirty="0"/>
-          </a:p>
-        </p:txBody>
-      </p:sp>
-      <p:sp>
-        <p:nvSpPr>
-          <p:cNvPr id="18" name="Shape 16"/>
-          <p:cNvSpPr/>
-          <p:nvPr/>
-        </p:nvSpPr>
-        <p:spPr>
-          <a:xfrm>
-            <a:off x="10024872" y="3319272"/>
-            <a:ext cx="792480" cy="749808"/>
-          </a:xfrm>
-          <a:prstGeom prst="roundRect">
-            <a:avLst>
-              <a:gd name="adj" fmla="val 14634"/>
-            </a:avLst>
-          </a:prstGeom>
-          <a:solidFill>
-            <a:srgbClr val="D69A2D"/>
-          </a:solidFill>
-          <a:ln w="12700">
-            <a:solidFill>
-              <a:srgbClr val="D69A2D"/>
-            </a:solidFill>
-            <a:prstDash val="solid"/>
-          </a:ln>
-        </p:spPr>
-      </p:sp>
-      <p:sp>
-        <p:nvSpPr>
-          <p:cNvPr id="19" name="Text 17"/>
-          <p:cNvSpPr/>
-          <p:nvPr/>
-        </p:nvSpPr>
-        <p:spPr>
-          <a:xfrm>
-            <a:off x="10098024" y="3511296"/>
-            <a:ext cx="646176" cy="310896"/>
-          </a:xfrm>
-          <a:prstGeom prst="rect">
-            <a:avLst/>
-          </a:prstGeom>
-          <a:noFill/>
-          <a:ln/>
-        </p:spPr>
-        <p:txBody>
-          <a:bodyPr wrap="square" lIns="0" tIns="0" rIns="0" bIns="0" rtlCol="0" anchor="ctr">
-            <a:normAutofit/>
-          </a:bodyPr>
-          <a:lstStyle/>
-          <a:p>
-            <a:pPr algn="ctr" indent="0" marL="0">
-              <a:buNone/>
-            </a:pPr>
-            <a:r>
-              <a:rPr lang="en-US" sz="1500" b="1" dirty="0">
-                <a:solidFill>
-                  <a:srgbClr val="FFFFFF"/>
-                </a:solidFill>
-                <a:latin typeface="Aptos" pitchFamily="34" charset="0"/>
-                <a:ea typeface="Aptos" pitchFamily="34" charset="-122"/>
-                <a:cs typeface="Aptos" pitchFamily="34" charset="-120"/>
-              </a:rPr>
-              <a:t>Review</a:t>
-            </a:r>
-            <a:endParaRPr lang="en-US" sz="1500" dirty="0"/>
-          </a:p>
-        </p:txBody>
-      </p:sp>
-      <p:sp>
-        <p:nvSpPr>
-          <p:cNvPr id="20" name="Shape 18"/>
-          <p:cNvSpPr/>
-          <p:nvPr/>
-        </p:nvSpPr>
-        <p:spPr>
-          <a:xfrm>
-            <a:off x="8293608" y="4389120"/>
-            <a:ext cx="2157984" cy="0"/>
-          </a:xfrm>
-          <a:prstGeom prst="line">
-            <a:avLst/>
-          </a:prstGeom>
-          <a:noFill/>
-          <a:ln w="25400">
-            <a:solidFill>
-              <a:srgbClr val="8ABBD8"/>
-            </a:solidFill>
-            <a:prstDash val="solid"/>
-          </a:ln>
-        </p:spPr>
-      </p:sp>
-      <p:sp>
-        <p:nvSpPr>
-          <p:cNvPr id="21" name="Text 19"/>
-          <p:cNvSpPr/>
-          <p:nvPr/>
-        </p:nvSpPr>
-        <p:spPr>
-          <a:xfrm>
-            <a:off x="7909560" y="3977640"/>
-            <a:ext cx="2926080" cy="182880"/>
-          </a:xfrm>
-          <a:prstGeom prst="rect">
-            <a:avLst/>
-          </a:prstGeom>
-          <a:noFill/>
-          <a:ln/>
-        </p:spPr>
-        <p:txBody>
-          <a:bodyPr wrap="square" lIns="0" tIns="0" rIns="0" bIns="0" rtlCol="0" anchor="ctr"/>
-          <a:lstStyle/>
-          <a:p>
-            <a:pPr algn="ctr" indent="0" marL="0">
-              <a:buNone/>
-            </a:pPr>
-            <a:r>
-              <a:rPr lang="en-US" sz="1000" dirty="0">
-                <a:solidFill>
-                  <a:srgbClr val="003A63"/>
-                </a:solidFill>
-                <a:latin typeface="Aptos" pitchFamily="34" charset="0"/>
-                <a:ea typeface="Aptos" pitchFamily="34" charset="-122"/>
-                <a:cs typeface="Aptos" pitchFamily="34" charset="-120"/>
-              </a:rPr>
-              <a:t>Dependencies visible</a:t>
-            </a:r>
-            <a:endParaRPr lang="en-US" sz="1000" dirty="0"/>
-          </a:p>
-        </p:txBody>
-      </p:sp>
-      <p:sp>
-        <p:nvSpPr>
-          <p:cNvPr id="22" name="Shape 20"/>
           <p:cNvSpPr/>
           <p:nvPr/>
         </p:nvSpPr>
@@ -18575,7 +15795,7 @@
       </p:sp>
       <p:sp>
         <p:nvSpPr>
-          <p:cNvPr id="23" name="Text 21"/>
+          <p:cNvPr id="17" name="Text 15"/>
           <p:cNvSpPr/>
           <p:nvPr/>
         </p:nvSpPr>
@@ -18614,7 +15834,7 @@
       </p:sp>
       <p:sp>
         <p:nvSpPr>
-          <p:cNvPr id="24" name="Text 22"/>
+          <p:cNvPr id="18" name="Text 16"/>
           <p:cNvSpPr/>
           <p:nvPr/>
         </p:nvSpPr>
@@ -19122,13 +16342,11 @@
             </a:avLst>
           </a:prstGeom>
           <a:solidFill>
-            <a:srgbClr val="FFFFFF">
-              <a:alpha val="88000"/>
-            </a:srgbClr>
+            <a:srgbClr val="FFFFFF"/>
           </a:solidFill>
           <a:ln w="12700">
             <a:solidFill>
-              <a:srgbClr val="D6E8F2"/>
+              <a:srgbClr val="B9D7E6"/>
             </a:solidFill>
             <a:prstDash val="solid"/>
           </a:ln>
@@ -19136,30 +16354,42 @@
       </p:sp>
       <p:sp>
         <p:nvSpPr>
-          <p:cNvPr id="14" name="Shape 12"/>
-          <p:cNvSpPr/>
-          <p:nvPr/>
-        </p:nvSpPr>
-        <p:spPr>
-          <a:xfrm>
-            <a:off x="7927848" y="3319272"/>
-            <a:ext cx="792480" cy="749808"/>
-          </a:xfrm>
-          <a:prstGeom prst="roundRect">
-            <a:avLst>
-              <a:gd name="adj" fmla="val 14634"/>
-            </a:avLst>
-          </a:prstGeom>
-          <a:solidFill>
-            <a:srgbClr val="0068B7"/>
-          </a:solidFill>
-          <a:ln w="12700">
-            <a:solidFill>
-              <a:srgbClr val="0068B7"/>
-            </a:solidFill>
-            <a:prstDash val="solid"/>
-          </a:ln>
-        </p:spPr>
+          <p:cNvPr id="14" name="Text 12"/>
+          <p:cNvSpPr/>
+          <p:nvPr/>
+        </p:nvSpPr>
+        <p:spPr>
+          <a:xfrm>
+            <a:off x="7799832" y="2935224"/>
+            <a:ext cx="3145536" cy="256032"/>
+          </a:xfrm>
+          <a:prstGeom prst="rect">
+            <a:avLst/>
+          </a:prstGeom>
+          <a:noFill/>
+          <a:ln/>
+        </p:spPr>
+        <p:txBody>
+          <a:bodyPr wrap="square" lIns="0" tIns="0" rIns="0" bIns="0" rtlCol="0" anchor="ctr"/>
+          <a:lstStyle/>
+          <a:p>
+            <a:pPr indent="0" marL="0">
+              <a:buNone/>
+            </a:pPr>
+            <a:r>
+              <a:rPr lang="en-US" sz="1300" b="1" dirty="0">
+                <a:solidFill>
+                  <a:srgbClr val="0068B7"/>
+                </a:solidFill>
+                <a:latin typeface="Aptos" pitchFamily="34" charset="0"/>
+                <a:ea typeface="Aptos" pitchFamily="34" charset="-122"/>
+                <a:cs typeface="Aptos" pitchFamily="34" charset="-120"/>
+              </a:rPr>
+              <a:t>Concept checkpoints</a:t>
+            </a:r>
+            <a:endParaRPr lang="en-US" sz="1300" dirty="0"/>
+          </a:p>
+        </p:txBody>
       </p:sp>
       <p:sp>
         <p:nvSpPr>
@@ -19169,240 +16399,67 @@
         </p:nvSpPr>
         <p:spPr>
           <a:xfrm>
-            <a:off x="8001000" y="3511296"/>
-            <a:ext cx="646176" cy="310896"/>
-          </a:xfrm>
-          <a:prstGeom prst="rect">
-            <a:avLst/>
-          </a:prstGeom>
-          <a:noFill/>
-          <a:ln/>
-        </p:spPr>
-        <p:txBody>
-          <a:bodyPr wrap="square" lIns="0" tIns="0" rIns="0" bIns="0" rtlCol="0" anchor="ctr">
+            <a:off x="7818120" y="3300984"/>
+            <a:ext cx="3090672" cy="877824"/>
+          </a:xfrm>
+          <a:prstGeom prst="rect">
+            <a:avLst/>
+          </a:prstGeom>
+          <a:noFill/>
+          <a:ln/>
+        </p:spPr>
+        <p:txBody>
+          <a:bodyPr wrap="square" lIns="254" tIns="254" rIns="254" bIns="254" rtlCol="0" anchor="t">
             <a:normAutofit/>
           </a:bodyPr>
           <a:lstStyle/>
           <a:p>
-            <a:pPr algn="ctr" indent="0" marL="0">
-              <a:buNone/>
-            </a:pPr>
-            <a:r>
-              <a:rPr lang="en-US" sz="1500" b="1" dirty="0">
-                <a:solidFill>
-                  <a:srgbClr val="FFFFFF"/>
-                </a:solidFill>
-                <a:latin typeface="Aptos" pitchFamily="34" charset="0"/>
-                <a:ea typeface="Aptos" pitchFamily="34" charset="-122"/>
-                <a:cs typeface="Aptos" pitchFamily="34" charset="-120"/>
-              </a:rPr>
-              <a:t>Plan</a:t>
-            </a:r>
-            <a:endParaRPr lang="en-US" sz="1500" dirty="0"/>
+            <a:r>
+              <a:rPr lang="en-US" sz="1380" dirty="0">
+                <a:solidFill>
+                  <a:srgbClr val="17364A"/>
+                </a:solidFill>
+                <a:latin typeface="Aptos" pitchFamily="34" charset="0"/>
+                <a:ea typeface="Aptos" pitchFamily="34" charset="-122"/>
+                <a:cs typeface="Aptos" pitchFamily="34" charset="-120"/>
+              </a:rPr>
+              <a:t>Decision right: The authority to approve, deny, modify, pause, or escalate an AI use case.</a:t>
+            </a:r>
+            <a:endParaRPr lang="en-US" sz="1380" dirty="0"/>
+          </a:p>
+          <a:p>
+            <a:r>
+              <a:rPr lang="en-US" sz="1380" dirty="0">
+                <a:solidFill>
+                  <a:srgbClr val="17364A"/>
+                </a:solidFill>
+                <a:latin typeface="Aptos" pitchFamily="34" charset="0"/>
+                <a:ea typeface="Aptos" pitchFamily="34" charset="-122"/>
+                <a:cs typeface="Aptos" pitchFamily="34" charset="-120"/>
+              </a:rPr>
+              <a:t>Evidence artifact: A document, log, checklist, test result, approval record, or review.</a:t>
+            </a:r>
+            <a:endParaRPr lang="en-US" sz="1380" dirty="0"/>
+          </a:p>
+          <a:p>
+            <a:r>
+              <a:rPr lang="en-US" sz="1380" dirty="0">
+                <a:solidFill>
+                  <a:srgbClr val="17364A"/>
+                </a:solidFill>
+                <a:latin typeface="Aptos" pitchFamily="34" charset="0"/>
+                <a:ea typeface="Aptos" pitchFamily="34" charset="-122"/>
+                <a:cs typeface="Aptos" pitchFamily="34" charset="-120"/>
+              </a:rPr>
+              <a:t>Accountability owner: The person or role responsible for ensuring that an AI use case is.</a:t>
+            </a:r>
+            <a:endParaRPr lang="en-US" sz="1380" dirty="0"/>
           </a:p>
         </p:txBody>
       </p:sp>
       <p:sp>
         <p:nvSpPr>
           <p:cNvPr id="16" name="Shape 14"/>
-          <p:cNvSpPr/>
-          <p:nvPr/>
-        </p:nvSpPr>
-        <p:spPr>
-          <a:xfrm>
-            <a:off x="8976360" y="3319272"/>
-            <a:ext cx="792480" cy="749808"/>
-          </a:xfrm>
-          <a:prstGeom prst="roundRect">
-            <a:avLst>
-              <a:gd name="adj" fmla="val 14634"/>
-            </a:avLst>
-          </a:prstGeom>
-          <a:solidFill>
-            <a:srgbClr val="2F8A28"/>
-          </a:solidFill>
-          <a:ln w="12700">
-            <a:solidFill>
-              <a:srgbClr val="2F8A28"/>
-            </a:solidFill>
-            <a:prstDash val="solid"/>
-          </a:ln>
-        </p:spPr>
-      </p:sp>
-      <p:sp>
-        <p:nvSpPr>
-          <p:cNvPr id="17" name="Text 15"/>
-          <p:cNvSpPr/>
-          <p:nvPr/>
-        </p:nvSpPr>
-        <p:spPr>
-          <a:xfrm>
-            <a:off x="9049512" y="3511296"/>
-            <a:ext cx="646176" cy="310896"/>
-          </a:xfrm>
-          <a:prstGeom prst="rect">
-            <a:avLst/>
-          </a:prstGeom>
-          <a:noFill/>
-          <a:ln/>
-        </p:spPr>
-        <p:txBody>
-          <a:bodyPr wrap="square" lIns="0" tIns="0" rIns="0" bIns="0" rtlCol="0" anchor="ctr">
-            <a:normAutofit/>
-          </a:bodyPr>
-          <a:lstStyle/>
-          <a:p>
-            <a:pPr algn="ctr" indent="0" marL="0">
-              <a:buNone/>
-            </a:pPr>
-            <a:r>
-              <a:rPr lang="en-US" sz="1500" b="1" dirty="0">
-                <a:solidFill>
-                  <a:srgbClr val="FFFFFF"/>
-                </a:solidFill>
-                <a:latin typeface="Aptos" pitchFamily="34" charset="0"/>
-                <a:ea typeface="Aptos" pitchFamily="34" charset="-122"/>
-                <a:cs typeface="Aptos" pitchFamily="34" charset="-120"/>
-              </a:rPr>
-              <a:t>Do</a:t>
-            </a:r>
-            <a:endParaRPr lang="en-US" sz="1500" dirty="0"/>
-          </a:p>
-        </p:txBody>
-      </p:sp>
-      <p:sp>
-        <p:nvSpPr>
-          <p:cNvPr id="18" name="Shape 16"/>
-          <p:cNvSpPr/>
-          <p:nvPr/>
-        </p:nvSpPr>
-        <p:spPr>
-          <a:xfrm>
-            <a:off x="10024872" y="3319272"/>
-            <a:ext cx="792480" cy="749808"/>
-          </a:xfrm>
-          <a:prstGeom prst="roundRect">
-            <a:avLst>
-              <a:gd name="adj" fmla="val 14634"/>
-            </a:avLst>
-          </a:prstGeom>
-          <a:solidFill>
-            <a:srgbClr val="D69A2D"/>
-          </a:solidFill>
-          <a:ln w="12700">
-            <a:solidFill>
-              <a:srgbClr val="D69A2D"/>
-            </a:solidFill>
-            <a:prstDash val="solid"/>
-          </a:ln>
-        </p:spPr>
-      </p:sp>
-      <p:sp>
-        <p:nvSpPr>
-          <p:cNvPr id="19" name="Text 17"/>
-          <p:cNvSpPr/>
-          <p:nvPr/>
-        </p:nvSpPr>
-        <p:spPr>
-          <a:xfrm>
-            <a:off x="10098024" y="3511296"/>
-            <a:ext cx="646176" cy="310896"/>
-          </a:xfrm>
-          <a:prstGeom prst="rect">
-            <a:avLst/>
-          </a:prstGeom>
-          <a:noFill/>
-          <a:ln/>
-        </p:spPr>
-        <p:txBody>
-          <a:bodyPr wrap="square" lIns="0" tIns="0" rIns="0" bIns="0" rtlCol="0" anchor="ctr">
-            <a:normAutofit/>
-          </a:bodyPr>
-          <a:lstStyle/>
-          <a:p>
-            <a:pPr algn="ctr" indent="0" marL="0">
-              <a:buNone/>
-            </a:pPr>
-            <a:r>
-              <a:rPr lang="en-US" sz="1500" b="1" dirty="0">
-                <a:solidFill>
-                  <a:srgbClr val="FFFFFF"/>
-                </a:solidFill>
-                <a:latin typeface="Aptos" pitchFamily="34" charset="0"/>
-                <a:ea typeface="Aptos" pitchFamily="34" charset="-122"/>
-                <a:cs typeface="Aptos" pitchFamily="34" charset="-120"/>
-              </a:rPr>
-              <a:t>Review</a:t>
-            </a:r>
-            <a:endParaRPr lang="en-US" sz="1500" dirty="0"/>
-          </a:p>
-        </p:txBody>
-      </p:sp>
-      <p:sp>
-        <p:nvSpPr>
-          <p:cNvPr id="20" name="Shape 18"/>
-          <p:cNvSpPr/>
-          <p:nvPr/>
-        </p:nvSpPr>
-        <p:spPr>
-          <a:xfrm>
-            <a:off x="8293608" y="4389120"/>
-            <a:ext cx="2157984" cy="0"/>
-          </a:xfrm>
-          <a:prstGeom prst="line">
-            <a:avLst/>
-          </a:prstGeom>
-          <a:noFill/>
-          <a:ln w="25400">
-            <a:solidFill>
-              <a:srgbClr val="8ABBD8"/>
-            </a:solidFill>
-            <a:prstDash val="solid"/>
-          </a:ln>
-        </p:spPr>
-      </p:sp>
-      <p:sp>
-        <p:nvSpPr>
-          <p:cNvPr id="21" name="Text 19"/>
-          <p:cNvSpPr/>
-          <p:nvPr/>
-        </p:nvSpPr>
-        <p:spPr>
-          <a:xfrm>
-            <a:off x="7909560" y="3977640"/>
-            <a:ext cx="2926080" cy="182880"/>
-          </a:xfrm>
-          <a:prstGeom prst="rect">
-            <a:avLst/>
-          </a:prstGeom>
-          <a:noFill/>
-          <a:ln/>
-        </p:spPr>
-        <p:txBody>
-          <a:bodyPr wrap="square" lIns="0" tIns="0" rIns="0" bIns="0" rtlCol="0" anchor="ctr"/>
-          <a:lstStyle/>
-          <a:p>
-            <a:pPr algn="ctr" indent="0" marL="0">
-              <a:buNone/>
-            </a:pPr>
-            <a:r>
-              <a:rPr lang="en-US" sz="1000" dirty="0">
-                <a:solidFill>
-                  <a:srgbClr val="003A63"/>
-                </a:solidFill>
-                <a:latin typeface="Aptos" pitchFamily="34" charset="0"/>
-                <a:ea typeface="Aptos" pitchFamily="34" charset="-122"/>
-                <a:cs typeface="Aptos" pitchFamily="34" charset="-120"/>
-              </a:rPr>
-              <a:t>Dependencies visible</a:t>
-            </a:r>
-            <a:endParaRPr lang="en-US" sz="1000" dirty="0"/>
-          </a:p>
-        </p:txBody>
-      </p:sp>
-      <p:sp>
-        <p:nvSpPr>
-          <p:cNvPr id="22" name="Shape 20"/>
           <p:cNvSpPr/>
           <p:nvPr/>
         </p:nvSpPr>
@@ -19429,7 +16486,7 @@
       </p:sp>
       <p:sp>
         <p:nvSpPr>
-          <p:cNvPr id="23" name="Text 21"/>
+          <p:cNvPr id="17" name="Text 15"/>
           <p:cNvSpPr/>
           <p:nvPr/>
         </p:nvSpPr>
@@ -19468,7 +16525,7 @@
       </p:sp>
       <p:sp>
         <p:nvSpPr>
-          <p:cNvPr id="24" name="Text 22"/>
+          <p:cNvPr id="18" name="Text 16"/>
           <p:cNvSpPr/>
           <p:nvPr/>
         </p:nvSpPr>
@@ -19976,13 +17033,11 @@
             </a:avLst>
           </a:prstGeom>
           <a:solidFill>
-            <a:srgbClr val="FFFFFF">
-              <a:alpha val="88000"/>
-            </a:srgbClr>
+            <a:srgbClr val="FFFFFF"/>
           </a:solidFill>
           <a:ln w="12700">
             <a:solidFill>
-              <a:srgbClr val="D6E8F2"/>
+              <a:srgbClr val="B9D7E6"/>
             </a:solidFill>
             <a:prstDash val="solid"/>
           </a:ln>
@@ -19990,190 +17045,112 @@
       </p:sp>
       <p:sp>
         <p:nvSpPr>
-          <p:cNvPr id="14" name="Shape 12"/>
-          <p:cNvSpPr/>
-          <p:nvPr/>
-        </p:nvSpPr>
-        <p:spPr>
-          <a:xfrm>
-            <a:off x="7891272" y="3108960"/>
-            <a:ext cx="566928" cy="566928"/>
-          </a:xfrm>
-          <a:prstGeom prst="ellipse">
-            <a:avLst/>
-          </a:prstGeom>
-          <a:solidFill>
-            <a:srgbClr val="0068B7"/>
-          </a:solidFill>
-          <a:ln w="12700">
-            <a:solidFill>
-              <a:srgbClr val="0068B7"/>
-            </a:solidFill>
-            <a:prstDash val="solid"/>
-          </a:ln>
-        </p:spPr>
-      </p:sp>
-      <p:sp>
-        <p:nvSpPr>
-          <p:cNvPr id="15" name="Shape 13"/>
-          <p:cNvSpPr/>
-          <p:nvPr/>
-        </p:nvSpPr>
-        <p:spPr>
-          <a:xfrm>
-            <a:off x="10287000" y="3108960"/>
-            <a:ext cx="566928" cy="566928"/>
-          </a:xfrm>
-          <a:prstGeom prst="ellipse">
-            <a:avLst/>
-          </a:prstGeom>
-          <a:solidFill>
-            <a:srgbClr val="2F8A28"/>
-          </a:solidFill>
-          <a:ln w="12700">
-            <a:solidFill>
-              <a:srgbClr val="2F8A28"/>
-            </a:solidFill>
-            <a:prstDash val="solid"/>
-          </a:ln>
-        </p:spPr>
+          <p:cNvPr id="14" name="Text 12"/>
+          <p:cNvSpPr/>
+          <p:nvPr/>
+        </p:nvSpPr>
+        <p:spPr>
+          <a:xfrm>
+            <a:off x="7799832" y="2935224"/>
+            <a:ext cx="3145536" cy="256032"/>
+          </a:xfrm>
+          <a:prstGeom prst="rect">
+            <a:avLst/>
+          </a:prstGeom>
+          <a:noFill/>
+          <a:ln/>
+        </p:spPr>
+        <p:txBody>
+          <a:bodyPr wrap="square" lIns="0" tIns="0" rIns="0" bIns="0" rtlCol="0" anchor="ctr"/>
+          <a:lstStyle/>
+          <a:p>
+            <a:pPr indent="0" marL="0">
+              <a:buNone/>
+            </a:pPr>
+            <a:r>
+              <a:rPr lang="en-US" sz="1300" b="1" dirty="0">
+                <a:solidFill>
+                  <a:srgbClr val="0068B7"/>
+                </a:solidFill>
+                <a:latin typeface="Aptos" pitchFamily="34" charset="0"/>
+                <a:ea typeface="Aptos" pitchFamily="34" charset="-122"/>
+                <a:cs typeface="Aptos" pitchFamily="34" charset="-120"/>
+              </a:rPr>
+              <a:t>Concept checkpoints</a:t>
+            </a:r>
+            <a:endParaRPr lang="en-US" sz="1300" dirty="0"/>
+          </a:p>
+        </p:txBody>
+      </p:sp>
+      <p:sp>
+        <p:nvSpPr>
+          <p:cNvPr id="15" name="Text 13"/>
+          <p:cNvSpPr/>
+          <p:nvPr/>
+        </p:nvSpPr>
+        <p:spPr>
+          <a:xfrm>
+            <a:off x="7818120" y="3300984"/>
+            <a:ext cx="3090672" cy="877824"/>
+          </a:xfrm>
+          <a:prstGeom prst="rect">
+            <a:avLst/>
+          </a:prstGeom>
+          <a:noFill/>
+          <a:ln/>
+        </p:spPr>
+        <p:txBody>
+          <a:bodyPr wrap="square" lIns="254" tIns="254" rIns="254" bIns="254" rtlCol="0" anchor="t">
+            <a:normAutofit/>
+          </a:bodyPr>
+          <a:lstStyle/>
+          <a:p>
+            <a:r>
+              <a:rPr lang="en-US" sz="1380" dirty="0">
+                <a:solidFill>
+                  <a:srgbClr val="17364A"/>
+                </a:solidFill>
+                <a:latin typeface="Aptos" pitchFamily="34" charset="0"/>
+                <a:ea typeface="Aptos" pitchFamily="34" charset="-122"/>
+                <a:cs typeface="Aptos" pitchFamily="34" charset="-120"/>
+              </a:rPr>
+              <a:t>It is not legal advice and does not replace review by agency legal counsel, privacy.</a:t>
+            </a:r>
+            <a:endParaRPr lang="en-US" sz="1380" dirty="0"/>
+          </a:p>
+          <a:p>
+            <a:r>
+              <a:rPr lang="en-US" sz="1380" dirty="0">
+                <a:solidFill>
+                  <a:srgbClr val="17364A"/>
+                </a:solidFill>
+                <a:latin typeface="Aptos" pitchFamily="34" charset="0"/>
+                <a:ea typeface="Aptos" pitchFamily="34" charset="-122"/>
+                <a:cs typeface="Aptos" pitchFamily="34" charset="-120"/>
+              </a:rPr>
+              <a:t>Requirements may vary by state, locality, territory, Tribe, agency, funding source,.</a:t>
+            </a:r>
+            <a:endParaRPr lang="en-US" sz="1380" dirty="0"/>
+          </a:p>
+          <a:p>
+            <a:r>
+              <a:rPr lang="en-US" sz="1380" dirty="0">
+                <a:solidFill>
+                  <a:srgbClr val="17364A"/>
+                </a:solidFill>
+                <a:latin typeface="Aptos" pitchFamily="34" charset="0"/>
+                <a:ea typeface="Aptos" pitchFamily="34" charset="-122"/>
+                <a:cs typeface="Aptos" pitchFamily="34" charset="-120"/>
+              </a:rPr>
+              <a:t>Learners should use this module to identify the issues that require review and should.</a:t>
+            </a:r>
+            <a:endParaRPr lang="en-US" sz="1380" dirty="0"/>
+          </a:p>
+        </p:txBody>
       </p:sp>
       <p:sp>
         <p:nvSpPr>
           <p:cNvPr id="16" name="Shape 14"/>
-          <p:cNvSpPr/>
-          <p:nvPr/>
-        </p:nvSpPr>
-        <p:spPr>
-          <a:xfrm>
-            <a:off x="9089136" y="3456432"/>
-            <a:ext cx="566928" cy="566928"/>
-          </a:xfrm>
-          <a:prstGeom prst="ellipse">
-            <a:avLst/>
-          </a:prstGeom>
-          <a:solidFill>
-            <a:srgbClr val="6A4CA3"/>
-          </a:solidFill>
-          <a:ln w="12700">
-            <a:solidFill>
-              <a:srgbClr val="6A4CA3"/>
-            </a:solidFill>
-            <a:prstDash val="solid"/>
-          </a:ln>
-        </p:spPr>
-      </p:sp>
-      <p:sp>
-        <p:nvSpPr>
-          <p:cNvPr id="17" name="Shape 15"/>
-          <p:cNvSpPr/>
-          <p:nvPr/>
-        </p:nvSpPr>
-        <p:spPr>
-          <a:xfrm>
-            <a:off x="8385048" y="3419856"/>
-            <a:ext cx="1975104" cy="0"/>
-          </a:xfrm>
-          <a:prstGeom prst="line">
-            <a:avLst/>
-          </a:prstGeom>
-          <a:noFill/>
-          <a:ln w="25400">
-            <a:solidFill>
-              <a:srgbClr val="8ABBD8"/>
-            </a:solidFill>
-            <a:prstDash val="solid"/>
-          </a:ln>
-        </p:spPr>
-      </p:sp>
-      <p:sp>
-        <p:nvSpPr>
-          <p:cNvPr id="18" name="Shape 16"/>
-          <p:cNvSpPr/>
-          <p:nvPr/>
-        </p:nvSpPr>
-        <p:spPr>
-          <a:xfrm>
-            <a:off x="8202168" y="3630168"/>
-            <a:ext cx="1170432" cy="118872"/>
-          </a:xfrm>
-          <a:prstGeom prst="line">
-            <a:avLst/>
-          </a:prstGeom>
-          <a:noFill/>
-          <a:ln w="25400">
-            <a:solidFill>
-              <a:srgbClr val="8ABBD8"/>
-            </a:solidFill>
-            <a:prstDash val="solid"/>
-          </a:ln>
-        </p:spPr>
-      </p:sp>
-      <p:sp>
-        <p:nvSpPr>
-          <p:cNvPr id="19" name="Shape 17"/>
-          <p:cNvSpPr/>
-          <p:nvPr/>
-        </p:nvSpPr>
-        <p:spPr>
-          <a:xfrm>
-            <a:off x="10543032" y="3630168"/>
-            <a:ext cx="-1170432" cy="118872"/>
-          </a:xfrm>
-          <a:prstGeom prst="line">
-            <a:avLst/>
-          </a:prstGeom>
-          <a:noFill/>
-          <a:ln w="25400">
-            <a:solidFill>
-              <a:srgbClr val="8ABBD8"/>
-            </a:solidFill>
-            <a:prstDash val="solid"/>
-          </a:ln>
-        </p:spPr>
-      </p:sp>
-      <p:sp>
-        <p:nvSpPr>
-          <p:cNvPr id="20" name="Text 18"/>
-          <p:cNvSpPr/>
-          <p:nvPr/>
-        </p:nvSpPr>
-        <p:spPr>
-          <a:xfrm>
-            <a:off x="7863840" y="4069080"/>
-            <a:ext cx="3017520" cy="164592"/>
-          </a:xfrm>
-          <a:prstGeom prst="rect">
-            <a:avLst/>
-          </a:prstGeom>
-          <a:noFill/>
-          <a:ln/>
-        </p:spPr>
-        <p:txBody>
-          <a:bodyPr wrap="square" lIns="0" tIns="0" rIns="0" bIns="0" rtlCol="0" anchor="ctr"/>
-          <a:lstStyle/>
-          <a:p>
-            <a:pPr algn="ctr" indent="0" marL="0">
-              <a:buNone/>
-            </a:pPr>
-            <a:r>
-              <a:rPr lang="en-US" sz="900" b="1" dirty="0">
-                <a:solidFill>
-                  <a:srgbClr val="003A63"/>
-                </a:solidFill>
-                <a:latin typeface="Aptos" pitchFamily="34" charset="0"/>
-                <a:ea typeface="Aptos" pitchFamily="34" charset="-122"/>
-                <a:cs typeface="Aptos" pitchFamily="34" charset="-120"/>
-              </a:rPr>
-              <a:t>Decision rights</a:t>
-            </a:r>
-            <a:endParaRPr lang="en-US" sz="900" dirty="0"/>
-          </a:p>
-        </p:txBody>
-      </p:sp>
-      <p:sp>
-        <p:nvSpPr>
-          <p:cNvPr id="21" name="Shape 19"/>
           <p:cNvSpPr/>
           <p:nvPr/>
         </p:nvSpPr>
@@ -20200,7 +17177,7 @@
       </p:sp>
       <p:sp>
         <p:nvSpPr>
-          <p:cNvPr id="22" name="Text 20"/>
+          <p:cNvPr id="17" name="Text 15"/>
           <p:cNvSpPr/>
           <p:nvPr/>
         </p:nvSpPr>
@@ -20239,7 +17216,7 @@
       </p:sp>
       <p:sp>
         <p:nvSpPr>
-          <p:cNvPr id="23" name="Text 21"/>
+          <p:cNvPr id="18" name="Text 16"/>
           <p:cNvSpPr/>
           <p:nvPr/>
         </p:nvSpPr>
@@ -20747,13 +17724,11 @@
             </a:avLst>
           </a:prstGeom>
           <a:solidFill>
-            <a:srgbClr val="FFFFFF">
-              <a:alpha val="88000"/>
-            </a:srgbClr>
+            <a:srgbClr val="FFFFFF"/>
           </a:solidFill>
           <a:ln w="12700">
             <a:solidFill>
-              <a:srgbClr val="D6E8F2"/>
+              <a:srgbClr val="B9D7E6"/>
             </a:solidFill>
             <a:prstDash val="solid"/>
           </a:ln>
@@ -20761,30 +17736,42 @@
       </p:sp>
       <p:sp>
         <p:nvSpPr>
-          <p:cNvPr id="14" name="Shape 12"/>
-          <p:cNvSpPr/>
-          <p:nvPr/>
-        </p:nvSpPr>
-        <p:spPr>
-          <a:xfrm>
-            <a:off x="7927848" y="3319272"/>
-            <a:ext cx="792480" cy="749808"/>
-          </a:xfrm>
-          <a:prstGeom prst="roundRect">
-            <a:avLst>
-              <a:gd name="adj" fmla="val 14634"/>
-            </a:avLst>
-          </a:prstGeom>
-          <a:solidFill>
-            <a:srgbClr val="0068B7"/>
-          </a:solidFill>
-          <a:ln w="12700">
-            <a:solidFill>
-              <a:srgbClr val="0068B7"/>
-            </a:solidFill>
-            <a:prstDash val="solid"/>
-          </a:ln>
-        </p:spPr>
+          <p:cNvPr id="14" name="Text 12"/>
+          <p:cNvSpPr/>
+          <p:nvPr/>
+        </p:nvSpPr>
+        <p:spPr>
+          <a:xfrm>
+            <a:off x="7799832" y="2935224"/>
+            <a:ext cx="3145536" cy="256032"/>
+          </a:xfrm>
+          <a:prstGeom prst="rect">
+            <a:avLst/>
+          </a:prstGeom>
+          <a:noFill/>
+          <a:ln/>
+        </p:spPr>
+        <p:txBody>
+          <a:bodyPr wrap="square" lIns="0" tIns="0" rIns="0" bIns="0" rtlCol="0" anchor="ctr"/>
+          <a:lstStyle/>
+          <a:p>
+            <a:pPr indent="0" marL="0">
+              <a:buNone/>
+            </a:pPr>
+            <a:r>
+              <a:rPr lang="en-US" sz="1300" b="1" dirty="0">
+                <a:solidFill>
+                  <a:srgbClr val="0068B7"/>
+                </a:solidFill>
+                <a:latin typeface="Aptos" pitchFamily="34" charset="0"/>
+                <a:ea typeface="Aptos" pitchFamily="34" charset="-122"/>
+                <a:cs typeface="Aptos" pitchFamily="34" charset="-120"/>
+              </a:rPr>
+              <a:t>Concept checkpoints</a:t>
+            </a:r>
+            <a:endParaRPr lang="en-US" sz="1300" dirty="0"/>
+          </a:p>
+        </p:txBody>
       </p:sp>
       <p:sp>
         <p:nvSpPr>
@@ -20794,240 +17781,67 @@
         </p:nvSpPr>
         <p:spPr>
           <a:xfrm>
-            <a:off x="8001000" y="3511296"/>
-            <a:ext cx="646176" cy="310896"/>
-          </a:xfrm>
-          <a:prstGeom prst="rect">
-            <a:avLst/>
-          </a:prstGeom>
-          <a:noFill/>
-          <a:ln/>
-        </p:spPr>
-        <p:txBody>
-          <a:bodyPr wrap="square" lIns="0" tIns="0" rIns="0" bIns="0" rtlCol="0" anchor="ctr">
+            <a:off x="7818120" y="3300984"/>
+            <a:ext cx="3090672" cy="877824"/>
+          </a:xfrm>
+          <a:prstGeom prst="rect">
+            <a:avLst/>
+          </a:prstGeom>
+          <a:noFill/>
+          <a:ln/>
+        </p:spPr>
+        <p:txBody>
+          <a:bodyPr wrap="square" lIns="254" tIns="254" rIns="254" bIns="254" rtlCol="0" anchor="t">
             <a:normAutofit/>
           </a:bodyPr>
           <a:lstStyle/>
           <a:p>
-            <a:pPr algn="ctr" indent="0" marL="0">
-              <a:buNone/>
-            </a:pPr>
-            <a:r>
-              <a:rPr lang="en-US" sz="1500" b="1" dirty="0">
-                <a:solidFill>
-                  <a:srgbClr val="FFFFFF"/>
-                </a:solidFill>
-                <a:latin typeface="Aptos" pitchFamily="34" charset="0"/>
-                <a:ea typeface="Aptos" pitchFamily="34" charset="-122"/>
-                <a:cs typeface="Aptos" pitchFamily="34" charset="-120"/>
-              </a:rPr>
-              <a:t>Plan</a:t>
-            </a:r>
-            <a:endParaRPr lang="en-US" sz="1500" dirty="0"/>
+            <a:r>
+              <a:rPr lang="en-US" sz="1380" dirty="0">
+                <a:solidFill>
+                  <a:srgbClr val="17364A"/>
+                </a:solidFill>
+                <a:latin typeface="Aptos" pitchFamily="34" charset="0"/>
+                <a:ea typeface="Aptos" pitchFamily="34" charset="-122"/>
+                <a:cs typeface="Aptos" pitchFamily="34" charset="-120"/>
+              </a:rPr>
+              <a:t>Grant and Funding Management for AI Projects matters because AI adoption changes how.</a:t>
+            </a:r>
+            <a:endParaRPr lang="en-US" sz="1380" dirty="0"/>
+          </a:p>
+          <a:p>
+            <a:r>
+              <a:rPr lang="en-US" sz="1380" dirty="0">
+                <a:solidFill>
+                  <a:srgbClr val="17364A"/>
+                </a:solidFill>
+                <a:latin typeface="Aptos" pitchFamily="34" charset="0"/>
+                <a:ea typeface="Aptos" pitchFamily="34" charset="-122"/>
+                <a:cs typeface="Aptos" pitchFamily="34" charset="-120"/>
+              </a:rPr>
+              <a:t>Without a structured approach, staff may rely on informal practices, vendor assurances, or.</a:t>
+            </a:r>
+            <a:endParaRPr lang="en-US" sz="1380" dirty="0"/>
+          </a:p>
+          <a:p>
+            <a:r>
+              <a:rPr lang="en-US" sz="1380" dirty="0">
+                <a:solidFill>
+                  <a:srgbClr val="17364A"/>
+                </a:solidFill>
+                <a:latin typeface="Aptos" pitchFamily="34" charset="0"/>
+                <a:ea typeface="Aptos" pitchFamily="34" charset="-122"/>
+                <a:cs typeface="Aptos" pitchFamily="34" charset="-120"/>
+              </a:rPr>
+              <a:t>Public health agencies operate under legal authorities, public accountability, resource.</a:t>
+            </a:r>
+            <a:endParaRPr lang="en-US" sz="1380" dirty="0"/>
           </a:p>
         </p:txBody>
       </p:sp>
       <p:sp>
         <p:nvSpPr>
           <p:cNvPr id="16" name="Shape 14"/>
-          <p:cNvSpPr/>
-          <p:nvPr/>
-        </p:nvSpPr>
-        <p:spPr>
-          <a:xfrm>
-            <a:off x="8976360" y="3319272"/>
-            <a:ext cx="792480" cy="749808"/>
-          </a:xfrm>
-          <a:prstGeom prst="roundRect">
-            <a:avLst>
-              <a:gd name="adj" fmla="val 14634"/>
-            </a:avLst>
-          </a:prstGeom>
-          <a:solidFill>
-            <a:srgbClr val="2F8A28"/>
-          </a:solidFill>
-          <a:ln w="12700">
-            <a:solidFill>
-              <a:srgbClr val="2F8A28"/>
-            </a:solidFill>
-            <a:prstDash val="solid"/>
-          </a:ln>
-        </p:spPr>
-      </p:sp>
-      <p:sp>
-        <p:nvSpPr>
-          <p:cNvPr id="17" name="Text 15"/>
-          <p:cNvSpPr/>
-          <p:nvPr/>
-        </p:nvSpPr>
-        <p:spPr>
-          <a:xfrm>
-            <a:off x="9049512" y="3511296"/>
-            <a:ext cx="646176" cy="310896"/>
-          </a:xfrm>
-          <a:prstGeom prst="rect">
-            <a:avLst/>
-          </a:prstGeom>
-          <a:noFill/>
-          <a:ln/>
-        </p:spPr>
-        <p:txBody>
-          <a:bodyPr wrap="square" lIns="0" tIns="0" rIns="0" bIns="0" rtlCol="0" anchor="ctr">
-            <a:normAutofit/>
-          </a:bodyPr>
-          <a:lstStyle/>
-          <a:p>
-            <a:pPr algn="ctr" indent="0" marL="0">
-              <a:buNone/>
-            </a:pPr>
-            <a:r>
-              <a:rPr lang="en-US" sz="1500" b="1" dirty="0">
-                <a:solidFill>
-                  <a:srgbClr val="FFFFFF"/>
-                </a:solidFill>
-                <a:latin typeface="Aptos" pitchFamily="34" charset="0"/>
-                <a:ea typeface="Aptos" pitchFamily="34" charset="-122"/>
-                <a:cs typeface="Aptos" pitchFamily="34" charset="-120"/>
-              </a:rPr>
-              <a:t>Do</a:t>
-            </a:r>
-            <a:endParaRPr lang="en-US" sz="1500" dirty="0"/>
-          </a:p>
-        </p:txBody>
-      </p:sp>
-      <p:sp>
-        <p:nvSpPr>
-          <p:cNvPr id="18" name="Shape 16"/>
-          <p:cNvSpPr/>
-          <p:nvPr/>
-        </p:nvSpPr>
-        <p:spPr>
-          <a:xfrm>
-            <a:off x="10024872" y="3319272"/>
-            <a:ext cx="792480" cy="749808"/>
-          </a:xfrm>
-          <a:prstGeom prst="roundRect">
-            <a:avLst>
-              <a:gd name="adj" fmla="val 14634"/>
-            </a:avLst>
-          </a:prstGeom>
-          <a:solidFill>
-            <a:srgbClr val="D69A2D"/>
-          </a:solidFill>
-          <a:ln w="12700">
-            <a:solidFill>
-              <a:srgbClr val="D69A2D"/>
-            </a:solidFill>
-            <a:prstDash val="solid"/>
-          </a:ln>
-        </p:spPr>
-      </p:sp>
-      <p:sp>
-        <p:nvSpPr>
-          <p:cNvPr id="19" name="Text 17"/>
-          <p:cNvSpPr/>
-          <p:nvPr/>
-        </p:nvSpPr>
-        <p:spPr>
-          <a:xfrm>
-            <a:off x="10098024" y="3511296"/>
-            <a:ext cx="646176" cy="310896"/>
-          </a:xfrm>
-          <a:prstGeom prst="rect">
-            <a:avLst/>
-          </a:prstGeom>
-          <a:noFill/>
-          <a:ln/>
-        </p:spPr>
-        <p:txBody>
-          <a:bodyPr wrap="square" lIns="0" tIns="0" rIns="0" bIns="0" rtlCol="0" anchor="ctr">
-            <a:normAutofit/>
-          </a:bodyPr>
-          <a:lstStyle/>
-          <a:p>
-            <a:pPr algn="ctr" indent="0" marL="0">
-              <a:buNone/>
-            </a:pPr>
-            <a:r>
-              <a:rPr lang="en-US" sz="1500" b="1" dirty="0">
-                <a:solidFill>
-                  <a:srgbClr val="FFFFFF"/>
-                </a:solidFill>
-                <a:latin typeface="Aptos" pitchFamily="34" charset="0"/>
-                <a:ea typeface="Aptos" pitchFamily="34" charset="-122"/>
-                <a:cs typeface="Aptos" pitchFamily="34" charset="-120"/>
-              </a:rPr>
-              <a:t>Review</a:t>
-            </a:r>
-            <a:endParaRPr lang="en-US" sz="1500" dirty="0"/>
-          </a:p>
-        </p:txBody>
-      </p:sp>
-      <p:sp>
-        <p:nvSpPr>
-          <p:cNvPr id="20" name="Shape 18"/>
-          <p:cNvSpPr/>
-          <p:nvPr/>
-        </p:nvSpPr>
-        <p:spPr>
-          <a:xfrm>
-            <a:off x="8293608" y="4389120"/>
-            <a:ext cx="2157984" cy="0"/>
-          </a:xfrm>
-          <a:prstGeom prst="line">
-            <a:avLst/>
-          </a:prstGeom>
-          <a:noFill/>
-          <a:ln w="25400">
-            <a:solidFill>
-              <a:srgbClr val="8ABBD8"/>
-            </a:solidFill>
-            <a:prstDash val="solid"/>
-          </a:ln>
-        </p:spPr>
-      </p:sp>
-      <p:sp>
-        <p:nvSpPr>
-          <p:cNvPr id="21" name="Text 19"/>
-          <p:cNvSpPr/>
-          <p:nvPr/>
-        </p:nvSpPr>
-        <p:spPr>
-          <a:xfrm>
-            <a:off x="7909560" y="3977640"/>
-            <a:ext cx="2926080" cy="182880"/>
-          </a:xfrm>
-          <a:prstGeom prst="rect">
-            <a:avLst/>
-          </a:prstGeom>
-          <a:noFill/>
-          <a:ln/>
-        </p:spPr>
-        <p:txBody>
-          <a:bodyPr wrap="square" lIns="0" tIns="0" rIns="0" bIns="0" rtlCol="0" anchor="ctr"/>
-          <a:lstStyle/>
-          <a:p>
-            <a:pPr algn="ctr" indent="0" marL="0">
-              <a:buNone/>
-            </a:pPr>
-            <a:r>
-              <a:rPr lang="en-US" sz="1000" dirty="0">
-                <a:solidFill>
-                  <a:srgbClr val="003A63"/>
-                </a:solidFill>
-                <a:latin typeface="Aptos" pitchFamily="34" charset="0"/>
-                <a:ea typeface="Aptos" pitchFamily="34" charset="-122"/>
-                <a:cs typeface="Aptos" pitchFamily="34" charset="-120"/>
-              </a:rPr>
-              <a:t>Dependencies visible</a:t>
-            </a:r>
-            <a:endParaRPr lang="en-US" sz="1000" dirty="0"/>
-          </a:p>
-        </p:txBody>
-      </p:sp>
-      <p:sp>
-        <p:nvSpPr>
-          <p:cNvPr id="22" name="Shape 20"/>
           <p:cNvSpPr/>
           <p:nvPr/>
         </p:nvSpPr>
@@ -21054,7 +17868,7 @@
       </p:sp>
       <p:sp>
         <p:nvSpPr>
-          <p:cNvPr id="23" name="Text 21"/>
+          <p:cNvPr id="17" name="Text 15"/>
           <p:cNvSpPr/>
           <p:nvPr/>
         </p:nvSpPr>
@@ -21093,7 +17907,7 @@
       </p:sp>
       <p:sp>
         <p:nvSpPr>
-          <p:cNvPr id="24" name="Text 22"/>
+          <p:cNvPr id="18" name="Text 16"/>
           <p:cNvSpPr/>
           <p:nvPr/>
         </p:nvSpPr>

--- a/downloads/presentations/modules/pmg-310.pptx
+++ b/downloads/presentations/modules/pmg-310.pptx
@@ -3454,49 +3454,58 @@
           <a:ln/>
         </p:spPr>
         <p:txBody>
-          <a:bodyPr wrap="square" lIns="635" tIns="635" rIns="635" bIns="635" rtlCol="0" anchor="t">
+          <a:bodyPr wrap="square" lIns="1016" tIns="1016" rIns="1016" bIns="1016" rtlCol="0" anchor="t">
             <a:normAutofit/>
           </a:bodyPr>
           <a:lstStyle/>
           <a:p>
+            <a:pPr indent="0" marL="0">
+              <a:buNone/>
+            </a:pPr>
             <a:r>
               <a:rPr lang="en-US" sz="2100" dirty="0">
                 <a:solidFill>
-                  <a:srgbClr val="17364A"/>
-                </a:solidFill>
-                <a:latin typeface="Aptos" pitchFamily="34" charset="0"/>
-                <a:ea typeface="Aptos" pitchFamily="34" charset="-122"/>
-                <a:cs typeface="Aptos" pitchFamily="34" charset="-120"/>
-              </a:rPr>
-              <a:t>A public health agency is preparing to use AI in a workflow related to connecting AI projects to.</a:t>
+                  <a:srgbClr val="003A63"/>
+                </a:solidFill>
+                <a:latin typeface="Aptos" pitchFamily="34" charset="0"/>
+                <a:ea typeface="Aptos" pitchFamily="34" charset="-122"/>
+                <a:cs typeface="Aptos" pitchFamily="34" charset="-120"/>
+              </a:rPr>
+              <a:t>• A public health agency is preparing to use AI in a workflow related to connecting AI projects.</a:t>
             </a:r>
             <a:endParaRPr lang="en-US" sz="2100" dirty="0"/>
           </a:p>
           <a:p>
+            <a:pPr indent="0" marL="0">
+              <a:buNone/>
+            </a:pPr>
             <a:r>
               <a:rPr lang="en-US" sz="2100" dirty="0">
                 <a:solidFill>
-                  <a:srgbClr val="17364A"/>
-                </a:solidFill>
-                <a:latin typeface="Aptos" pitchFamily="34" charset="0"/>
-                <a:ea typeface="Aptos" pitchFamily="34" charset="-122"/>
-                <a:cs typeface="Aptos" pitchFamily="34" charset="-120"/>
-              </a:rPr>
-              <a:t>The project team initially treats the tool as a helpful efficiency aid, but governance reviewers.</a:t>
+                  <a:srgbClr val="003A63"/>
+                </a:solidFill>
+                <a:latin typeface="Aptos" pitchFamily="34" charset="0"/>
+                <a:ea typeface="Aptos" pitchFamily="34" charset="-122"/>
+                <a:cs typeface="Aptos" pitchFamily="34" charset="-120"/>
+              </a:rPr>
+              <a:t>• The project team initially treats the tool as a helpful efficiency aid, but governance.</a:t>
             </a:r>
             <a:endParaRPr lang="en-US" sz="2100" dirty="0"/>
           </a:p>
           <a:p>
+            <a:pPr indent="0" marL="0">
+              <a:buNone/>
+            </a:pPr>
             <a:r>
               <a:rPr lang="en-US" sz="2100" dirty="0">
                 <a:solidFill>
-                  <a:srgbClr val="17364A"/>
-                </a:solidFill>
-                <a:latin typeface="Aptos" pitchFamily="34" charset="0"/>
-                <a:ea typeface="Aptos" pitchFamily="34" charset="-122"/>
-                <a:cs typeface="Aptos" pitchFamily="34" charset="-120"/>
-              </a:rPr>
-              <a:t>The agency responds by creating a clear artifact that defines intended use, prohibited use, responsible.</a:t>
+                  <a:srgbClr val="003A63"/>
+                </a:solidFill>
+                <a:latin typeface="Aptos" pitchFamily="34" charset="0"/>
+                <a:ea typeface="Aptos" pitchFamily="34" charset="-122"/>
+                <a:cs typeface="Aptos" pitchFamily="34" charset="-120"/>
+              </a:rPr>
+              <a:t>• The agency responds by creating a clear artifact that defines intended use, prohibited use,.</a:t>
             </a:r>
             <a:endParaRPr lang="en-US" sz="2100" dirty="0"/>
           </a:p>
@@ -3576,17 +3585,17 @@
         </p:nvSpPr>
         <p:spPr>
           <a:xfrm>
-            <a:off x="7799832" y="1828800"/>
-            <a:ext cx="3145536" cy="685800"/>
-          </a:xfrm>
-          <a:prstGeom prst="rect">
-            <a:avLst/>
-          </a:prstGeom>
-          <a:noFill/>
-          <a:ln/>
-        </p:spPr>
-        <p:txBody>
-          <a:bodyPr wrap="square" lIns="0" tIns="0" rIns="0" bIns="0" rtlCol="0" anchor="t">
+            <a:off x="7799832" y="1801368"/>
+            <a:ext cx="3145536" cy="758952"/>
+          </a:xfrm>
+          <a:prstGeom prst="rect">
+            <a:avLst/>
+          </a:prstGeom>
+          <a:noFill/>
+          <a:ln/>
+        </p:spPr>
+        <p:txBody>
+          <a:bodyPr wrap="square" lIns="254" tIns="254" rIns="254" bIns="254" rtlCol="0" anchor="t">
             <a:normAutofit/>
           </a:bodyPr>
           <a:lstStyle/>
@@ -3595,7 +3604,7 @@
               <a:buNone/>
             </a:pPr>
             <a:r>
-              <a:rPr lang="en-US" sz="1550" dirty="0">
+              <a:rPr lang="en-US" sz="1320" dirty="0">
                 <a:solidFill>
                   <a:srgbClr val="17364A"/>
                 </a:solidFill>
@@ -3605,7 +3614,7 @@
               </a:rPr>
               <a:t>A public health agency is preparing to use AI in a workflow related to connecting AI projects to.</a:t>
             </a:r>
-            <a:endParaRPr lang="en-US" sz="1550" dirty="0"/>
+            <a:endParaRPr lang="en-US" sz="1320" dirty="0"/>
           </a:p>
         </p:txBody>
       </p:sp>
@@ -3693,13 +3702,16 @@
           <a:ln/>
         </p:spPr>
         <p:txBody>
-          <a:bodyPr wrap="square" lIns="254" tIns="254" rIns="254" bIns="254" rtlCol="0" anchor="t">
+          <a:bodyPr wrap="square" lIns="508" tIns="508" rIns="508" bIns="508" rtlCol="0" anchor="t">
             <a:normAutofit/>
           </a:bodyPr>
           <a:lstStyle/>
           <a:p>
-            <a:r>
-              <a:rPr lang="en-US" sz="1380" dirty="0">
+            <a:pPr indent="0" marL="0">
+              <a:buNone/>
+            </a:pPr>
+            <a:r>
+              <a:rPr lang="en-US" sz="1220" dirty="0">
                 <a:solidFill>
                   <a:srgbClr val="17364A"/>
                 </a:solidFill>
@@ -3707,13 +3719,16 @@
                 <a:ea typeface="Aptos" pitchFamily="34" charset="-122"/>
                 <a:cs typeface="Aptos" pitchFamily="34" charset="-120"/>
               </a:rPr>
-              <a:t>A public health agency is preparing to use AI in a workflow related to connecting AI.</a:t>
-            </a:r>
-            <a:endParaRPr lang="en-US" sz="1380" dirty="0"/>
-          </a:p>
-          <a:p>
-            <a:r>
-              <a:rPr lang="en-US" sz="1380" dirty="0">
+              <a:t>A public health agency is preparing to use AI in a workflow.</a:t>
+            </a:r>
+            <a:endParaRPr lang="en-US" sz="1220" dirty="0"/>
+          </a:p>
+          <a:p>
+            <a:pPr indent="0" marL="0">
+              <a:buNone/>
+            </a:pPr>
+            <a:r>
+              <a:rPr lang="en-US" sz="1220" dirty="0">
                 <a:solidFill>
                   <a:srgbClr val="17364A"/>
                 </a:solidFill>
@@ -3721,13 +3736,16 @@
                 <a:ea typeface="Aptos" pitchFamily="34" charset="-122"/>
                 <a:cs typeface="Aptos" pitchFamily="34" charset="-120"/>
               </a:rPr>
-              <a:t>The project team initially treats the tool as a helpful efficiency aid, but governance.</a:t>
-            </a:r>
-            <a:endParaRPr lang="en-US" sz="1380" dirty="0"/>
-          </a:p>
-          <a:p>
-            <a:r>
-              <a:rPr lang="en-US" sz="1380" dirty="0">
+              <a:t>The project team initially treats the tool as a helpful efficiency.</a:t>
+            </a:r>
+            <a:endParaRPr lang="en-US" sz="1220" dirty="0"/>
+          </a:p>
+          <a:p>
+            <a:pPr indent="0" marL="0">
+              <a:buNone/>
+            </a:pPr>
+            <a:r>
+              <a:rPr lang="en-US" sz="1220" dirty="0">
                 <a:solidFill>
                   <a:srgbClr val="17364A"/>
                 </a:solidFill>
@@ -3735,9 +3753,9 @@
                 <a:ea typeface="Aptos" pitchFamily="34" charset="-122"/>
                 <a:cs typeface="Aptos" pitchFamily="34" charset="-120"/>
               </a:rPr>
-              <a:t>The agency responds by creating a clear artifact that defines intended use, prohibited.</a:t>
-            </a:r>
-            <a:endParaRPr lang="en-US" sz="1380" dirty="0"/>
+              <a:t>The agency responds by creating a clear artifact that defines.</a:t>
+            </a:r>
+            <a:endParaRPr lang="en-US" sz="1220" dirty="0"/>
           </a:p>
         </p:txBody>
       </p:sp>
@@ -3815,17 +3833,17 @@
         </p:nvSpPr>
         <p:spPr>
           <a:xfrm>
-            <a:off x="7799832" y="5001768"/>
-            <a:ext cx="3145536" cy="502920"/>
-          </a:xfrm>
-          <a:prstGeom prst="rect">
-            <a:avLst/>
-          </a:prstGeom>
-          <a:noFill/>
-          <a:ln/>
-        </p:spPr>
-        <p:txBody>
-          <a:bodyPr wrap="square" lIns="0" tIns="0" rIns="0" bIns="0" rtlCol="0" anchor="t">
+            <a:off x="7799832" y="4974336"/>
+            <a:ext cx="3145536" cy="576072"/>
+          </a:xfrm>
+          <a:prstGeom prst="rect">
+            <a:avLst/>
+          </a:prstGeom>
+          <a:noFill/>
+          <a:ln/>
+        </p:spPr>
+        <p:txBody>
+          <a:bodyPr wrap="square" lIns="254" tIns="254" rIns="254" bIns="254" rtlCol="0" anchor="t">
             <a:normAutofit/>
           </a:bodyPr>
           <a:lstStyle/>
@@ -3834,7 +3852,7 @@
               <a:buNone/>
             </a:pPr>
             <a:r>
-              <a:rPr lang="en-US" sz="1550" dirty="0">
+              <a:rPr lang="en-US" sz="1320" dirty="0">
                 <a:solidFill>
                   <a:srgbClr val="17364A"/>
                 </a:solidFill>
@@ -3842,9 +3860,9 @@
                 <a:ea typeface="Aptos" pitchFamily="34" charset="-122"/>
                 <a:cs typeface="Aptos" pitchFamily="34" charset="-120"/>
               </a:rPr>
-              <a:t>Use the concept to clarify workflow changes, dependencies, staffing, procurement requirements, training needs, and implementation checkpoints.</a:t>
-            </a:r>
-            <a:endParaRPr lang="en-US" sz="1550" dirty="0"/>
+              <a:t>Use the concept to clarify workflow changes, dependencies, staffing, procurement requirements, training needs, and.</a:t>
+            </a:r>
+            <a:endParaRPr lang="en-US" sz="1320" dirty="0"/>
           </a:p>
         </p:txBody>
       </p:sp>
@@ -4145,49 +4163,58 @@
           <a:ln/>
         </p:spPr>
         <p:txBody>
-          <a:bodyPr wrap="square" lIns="635" tIns="635" rIns="635" bIns="635" rtlCol="0" anchor="t">
+          <a:bodyPr wrap="square" lIns="1016" tIns="1016" rIns="1016" bIns="1016" rtlCol="0" anchor="t">
             <a:normAutofit/>
           </a:bodyPr>
           <a:lstStyle/>
           <a:p>
+            <a:pPr indent="0" marL="0">
+              <a:buNone/>
+            </a:pPr>
             <a:r>
               <a:rPr lang="en-US" sz="2100" dirty="0">
                 <a:solidFill>
-                  <a:srgbClr val="17364A"/>
-                </a:solidFill>
-                <a:latin typeface="Aptos" pitchFamily="34" charset="0"/>
-                <a:ea typeface="Aptos" pitchFamily="34" charset="-122"/>
-                <a:cs typeface="Aptos" pitchFamily="34" charset="-120"/>
-              </a:rPr>
-              <a:t>The first step in this topic is to define the decision or workflow clearly.</a:t>
+                  <a:srgbClr val="003A63"/>
+                </a:solidFill>
+                <a:latin typeface="Aptos" pitchFamily="34" charset="0"/>
+                <a:ea typeface="Aptos" pitchFamily="34" charset="-122"/>
+                <a:cs typeface="Aptos" pitchFamily="34" charset="-120"/>
+              </a:rPr>
+              <a:t>• The first step in this topic is to define the decision or workflow clearly.</a:t>
             </a:r>
             <a:endParaRPr lang="en-US" sz="2100" dirty="0"/>
           </a:p>
           <a:p>
+            <a:pPr indent="0" marL="0">
+              <a:buNone/>
+            </a:pPr>
             <a:r>
               <a:rPr lang="en-US" sz="2100" dirty="0">
                 <a:solidFill>
-                  <a:srgbClr val="17364A"/>
-                </a:solidFill>
-                <a:latin typeface="Aptos" pitchFamily="34" charset="0"/>
-                <a:ea typeface="Aptos" pitchFamily="34" charset="-122"/>
-                <a:cs typeface="Aptos" pitchFamily="34" charset="-120"/>
-              </a:rPr>
-              <a:t>Staff should identify who is affected, what data are used, what AI output is produced, who reviews the.</a:t>
+                  <a:srgbClr val="003A63"/>
+                </a:solidFill>
+                <a:latin typeface="Aptos" pitchFamily="34" charset="0"/>
+                <a:ea typeface="Aptos" pitchFamily="34" charset="-122"/>
+                <a:cs typeface="Aptos" pitchFamily="34" charset="-120"/>
+              </a:rPr>
+              <a:t>• Staff should identify who is affected, what data are used, what AI output is produced, who.</a:t>
             </a:r>
             <a:endParaRPr lang="en-US" sz="2100" dirty="0"/>
           </a:p>
           <a:p>
+            <a:pPr indent="0" marL="0">
+              <a:buNone/>
+            </a:pPr>
             <a:r>
               <a:rPr lang="en-US" sz="2100" dirty="0">
                 <a:solidFill>
-                  <a:srgbClr val="17364A"/>
-                </a:solidFill>
-                <a:latin typeface="Aptos" pitchFamily="34" charset="0"/>
-                <a:ea typeface="Aptos" pitchFamily="34" charset="-122"/>
-                <a:cs typeface="Aptos" pitchFamily="34" charset="-120"/>
-              </a:rPr>
-              <a:t>This prevents the module from becoming abstract and anchors the work in public health practice.</a:t>
+                  <a:srgbClr val="003A63"/>
+                </a:solidFill>
+                <a:latin typeface="Aptos" pitchFamily="34" charset="0"/>
+                <a:ea typeface="Aptos" pitchFamily="34" charset="-122"/>
+                <a:cs typeface="Aptos" pitchFamily="34" charset="-120"/>
+              </a:rPr>
+              <a:t>• This prevents the module from becoming abstract and anchors the work in public health practice.</a:t>
             </a:r>
             <a:endParaRPr lang="en-US" sz="2100" dirty="0"/>
           </a:p>
@@ -4267,17 +4294,17 @@
         </p:nvSpPr>
         <p:spPr>
           <a:xfrm>
-            <a:off x="7799832" y="1828800"/>
-            <a:ext cx="3145536" cy="685800"/>
-          </a:xfrm>
-          <a:prstGeom prst="rect">
-            <a:avLst/>
-          </a:prstGeom>
-          <a:noFill/>
-          <a:ln/>
-        </p:spPr>
-        <p:txBody>
-          <a:bodyPr wrap="square" lIns="0" tIns="0" rIns="0" bIns="0" rtlCol="0" anchor="t">
+            <a:off x="7799832" y="1801368"/>
+            <a:ext cx="3145536" cy="758952"/>
+          </a:xfrm>
+          <a:prstGeom prst="rect">
+            <a:avLst/>
+          </a:prstGeom>
+          <a:noFill/>
+          <a:ln/>
+        </p:spPr>
+        <p:txBody>
+          <a:bodyPr wrap="square" lIns="254" tIns="254" rIns="254" bIns="254" rtlCol="0" anchor="t">
             <a:normAutofit/>
           </a:bodyPr>
           <a:lstStyle/>
@@ -4286,7 +4313,7 @@
               <a:buNone/>
             </a:pPr>
             <a:r>
-              <a:rPr lang="en-US" sz="1550" dirty="0">
+              <a:rPr lang="en-US" sz="1320" dirty="0">
                 <a:solidFill>
                   <a:srgbClr val="17364A"/>
                 </a:solidFill>
@@ -4296,7 +4323,7 @@
               </a:rPr>
               <a:t>The first step in this topic is to define the decision or workflow clearly.</a:t>
             </a:r>
-            <a:endParaRPr lang="en-US" sz="1550" dirty="0"/>
+            <a:endParaRPr lang="en-US" sz="1320" dirty="0"/>
           </a:p>
         </p:txBody>
       </p:sp>
@@ -4384,13 +4411,16 @@
           <a:ln/>
         </p:spPr>
         <p:txBody>
-          <a:bodyPr wrap="square" lIns="254" tIns="254" rIns="254" bIns="254" rtlCol="0" anchor="t">
+          <a:bodyPr wrap="square" lIns="508" tIns="508" rIns="508" bIns="508" rtlCol="0" anchor="t">
             <a:normAutofit/>
           </a:bodyPr>
           <a:lstStyle/>
           <a:p>
-            <a:r>
-              <a:rPr lang="en-US" sz="1380" dirty="0">
+            <a:pPr indent="0" marL="0">
+              <a:buNone/>
+            </a:pPr>
+            <a:r>
+              <a:rPr lang="en-US" sz="1220" dirty="0">
                 <a:solidFill>
                   <a:srgbClr val="17364A"/>
                 </a:solidFill>
@@ -4398,13 +4428,16 @@
                 <a:ea typeface="Aptos" pitchFamily="34" charset="-122"/>
                 <a:cs typeface="Aptos" pitchFamily="34" charset="-120"/>
               </a:rPr>
-              <a:t>Staff should identify who is affected, what data are used, what AI output is produced, who.</a:t>
-            </a:r>
-            <a:endParaRPr lang="en-US" sz="1380" dirty="0"/>
-          </a:p>
-          <a:p>
-            <a:r>
-              <a:rPr lang="en-US" sz="1380" dirty="0">
+              <a:t>Staff should identify who is affected, what data are used, what AI.</a:t>
+            </a:r>
+            <a:endParaRPr lang="en-US" sz="1220" dirty="0"/>
+          </a:p>
+          <a:p>
+            <a:pPr indent="0" marL="0">
+              <a:buNone/>
+            </a:pPr>
+            <a:r>
+              <a:rPr lang="en-US" sz="1220" dirty="0">
                 <a:solidFill>
                   <a:srgbClr val="17364A"/>
                 </a:solidFill>
@@ -4414,11 +4447,14 @@
               </a:rPr>
               <a:t>The second step is to assign responsibilities.</a:t>
             </a:r>
-            <a:endParaRPr lang="en-US" sz="1380" dirty="0"/>
-          </a:p>
-          <a:p>
-            <a:r>
-              <a:rPr lang="en-US" sz="1380" dirty="0">
+            <a:endParaRPr lang="en-US" sz="1220" dirty="0"/>
+          </a:p>
+          <a:p>
+            <a:pPr indent="0" marL="0">
+              <a:buNone/>
+            </a:pPr>
+            <a:r>
+              <a:rPr lang="en-US" sz="1220" dirty="0">
                 <a:solidFill>
                   <a:srgbClr val="17364A"/>
                 </a:solidFill>
@@ -4426,9 +4462,9 @@
                 <a:ea typeface="Aptos" pitchFamily="34" charset="-122"/>
                 <a:cs typeface="Aptos" pitchFamily="34" charset="-120"/>
               </a:rPr>
-              <a:t>AI-supported workflows often cross program, IT, legal, privacy, communications,.</a:t>
-            </a:r>
-            <a:endParaRPr lang="en-US" sz="1380" dirty="0"/>
+              <a:t>AI-supported workflows often cross program, IT, legal, privacy,.</a:t>
+            </a:r>
+            <a:endParaRPr lang="en-US" sz="1220" dirty="0"/>
           </a:p>
         </p:txBody>
       </p:sp>
@@ -4506,17 +4542,17 @@
         </p:nvSpPr>
         <p:spPr>
           <a:xfrm>
-            <a:off x="7799832" y="5001768"/>
-            <a:ext cx="3145536" cy="502920"/>
-          </a:xfrm>
-          <a:prstGeom prst="rect">
-            <a:avLst/>
-          </a:prstGeom>
-          <a:noFill/>
-          <a:ln/>
-        </p:spPr>
-        <p:txBody>
-          <a:bodyPr wrap="square" lIns="0" tIns="0" rIns="0" bIns="0" rtlCol="0" anchor="t">
+            <a:off x="7799832" y="4974336"/>
+            <a:ext cx="3145536" cy="576072"/>
+          </a:xfrm>
+          <a:prstGeom prst="rect">
+            <a:avLst/>
+          </a:prstGeom>
+          <a:noFill/>
+          <a:ln/>
+        </p:spPr>
+        <p:txBody>
+          <a:bodyPr wrap="square" lIns="254" tIns="254" rIns="254" bIns="254" rtlCol="0" anchor="t">
             <a:normAutofit/>
           </a:bodyPr>
           <a:lstStyle/>
@@ -4525,7 +4561,7 @@
               <a:buNone/>
             </a:pPr>
             <a:r>
-              <a:rPr lang="en-US" sz="1550" dirty="0">
+              <a:rPr lang="en-US" sz="1320" dirty="0">
                 <a:solidFill>
                   <a:srgbClr val="17364A"/>
                 </a:solidFill>
@@ -4533,9 +4569,9 @@
                 <a:ea typeface="Aptos" pitchFamily="34" charset="-122"/>
                 <a:cs typeface="Aptos" pitchFamily="34" charset="-120"/>
               </a:rPr>
-              <a:t>Use the concept to clarify workflow changes, dependencies, staffing, procurement requirements, training needs, and implementation checkpoints.</a:t>
-            </a:r>
-            <a:endParaRPr lang="en-US" sz="1550" dirty="0"/>
+              <a:t>Use the concept to clarify workflow changes, dependencies, staffing, procurement requirements, training needs, and.</a:t>
+            </a:r>
+            <a:endParaRPr lang="en-US" sz="1320" dirty="0"/>
           </a:p>
         </p:txBody>
       </p:sp>
@@ -4836,49 +4872,58 @@
           <a:ln/>
         </p:spPr>
         <p:txBody>
-          <a:bodyPr wrap="square" lIns="635" tIns="635" rIns="635" bIns="635" rtlCol="0" anchor="t">
+          <a:bodyPr wrap="square" lIns="1016" tIns="1016" rIns="1016" bIns="1016" rtlCol="0" anchor="t">
             <a:normAutofit/>
           </a:bodyPr>
           <a:lstStyle/>
           <a:p>
+            <a:pPr indent="0" marL="0">
+              <a:buNone/>
+            </a:pPr>
             <a:r>
               <a:rPr lang="en-US" sz="2100" dirty="0">
                 <a:solidFill>
-                  <a:srgbClr val="17364A"/>
-                </a:solidFill>
-                <a:latin typeface="Aptos" pitchFamily="34" charset="0"/>
-                <a:ea typeface="Aptos" pitchFamily="34" charset="-122"/>
-                <a:cs typeface="Aptos" pitchFamily="34" charset="-120"/>
-              </a:rPr>
-              <a:t>A common failure mode is treating the topic as a one-time checklist.</a:t>
+                  <a:srgbClr val="003A63"/>
+                </a:solidFill>
+                <a:latin typeface="Aptos" pitchFamily="34" charset="0"/>
+                <a:ea typeface="Aptos" pitchFamily="34" charset="-122"/>
+                <a:cs typeface="Aptos" pitchFamily="34" charset="-120"/>
+              </a:rPr>
+              <a:t>• A common failure mode is treating the topic as a one-time checklist.</a:t>
             </a:r>
             <a:endParaRPr lang="en-US" sz="2100" dirty="0"/>
           </a:p>
           <a:p>
+            <a:pPr indent="0" marL="0">
+              <a:buNone/>
+            </a:pPr>
             <a:r>
               <a:rPr lang="en-US" sz="2100" dirty="0">
                 <a:solidFill>
-                  <a:srgbClr val="17364A"/>
-                </a:solidFill>
-                <a:latin typeface="Aptos" pitchFamily="34" charset="0"/>
-                <a:ea typeface="Aptos" pitchFamily="34" charset="-122"/>
-                <a:cs typeface="Aptos" pitchFamily="34" charset="-120"/>
-              </a:rPr>
-              <a:t>AI risks can change when data sources, models, vendors, policies, users, or public expectations change.</a:t>
+                  <a:srgbClr val="003A63"/>
+                </a:solidFill>
+                <a:latin typeface="Aptos" pitchFamily="34" charset="0"/>
+                <a:ea typeface="Aptos" pitchFamily="34" charset="-122"/>
+                <a:cs typeface="Aptos" pitchFamily="34" charset="-120"/>
+              </a:rPr>
+              <a:t>• AI risks can change when data sources, models, vendors, policies, users, or public.</a:t>
             </a:r>
             <a:endParaRPr lang="en-US" sz="2100" dirty="0"/>
           </a:p>
           <a:p>
+            <a:pPr indent="0" marL="0">
+              <a:buNone/>
+            </a:pPr>
             <a:r>
               <a:rPr lang="en-US" sz="2100" dirty="0">
                 <a:solidFill>
-                  <a:srgbClr val="17364A"/>
-                </a:solidFill>
-                <a:latin typeface="Aptos" pitchFamily="34" charset="0"/>
-                <a:ea typeface="Aptos" pitchFamily="34" charset="-122"/>
-                <a:cs typeface="Aptos" pitchFamily="34" charset="-120"/>
-              </a:rPr>
-              <a:t>A guardrail is to define review intervals and change triggers.</a:t>
+                  <a:srgbClr val="003A63"/>
+                </a:solidFill>
+                <a:latin typeface="Aptos" pitchFamily="34" charset="0"/>
+                <a:ea typeface="Aptos" pitchFamily="34" charset="-122"/>
+                <a:cs typeface="Aptos" pitchFamily="34" charset="-120"/>
+              </a:rPr>
+              <a:t>• A guardrail is to define review intervals and change triggers.</a:t>
             </a:r>
             <a:endParaRPr lang="en-US" sz="2100" dirty="0"/>
           </a:p>
@@ -4958,17 +5003,17 @@
         </p:nvSpPr>
         <p:spPr>
           <a:xfrm>
-            <a:off x="7799832" y="1828800"/>
-            <a:ext cx="3145536" cy="685800"/>
-          </a:xfrm>
-          <a:prstGeom prst="rect">
-            <a:avLst/>
-          </a:prstGeom>
-          <a:noFill/>
-          <a:ln/>
-        </p:spPr>
-        <p:txBody>
-          <a:bodyPr wrap="square" lIns="0" tIns="0" rIns="0" bIns="0" rtlCol="0" anchor="t">
+            <a:off x="7799832" y="1801368"/>
+            <a:ext cx="3145536" cy="758952"/>
+          </a:xfrm>
+          <a:prstGeom prst="rect">
+            <a:avLst/>
+          </a:prstGeom>
+          <a:noFill/>
+          <a:ln/>
+        </p:spPr>
+        <p:txBody>
+          <a:bodyPr wrap="square" lIns="254" tIns="254" rIns="254" bIns="254" rtlCol="0" anchor="t">
             <a:normAutofit/>
           </a:bodyPr>
           <a:lstStyle/>
@@ -4977,7 +5022,7 @@
               <a:buNone/>
             </a:pPr>
             <a:r>
-              <a:rPr lang="en-US" sz="1550" dirty="0">
+              <a:rPr lang="en-US" sz="1320" dirty="0">
                 <a:solidFill>
                   <a:srgbClr val="17364A"/>
                 </a:solidFill>
@@ -4987,7 +5032,7 @@
               </a:rPr>
               <a:t>A common failure mode is treating the topic as a one-time checklist.</a:t>
             </a:r>
-            <a:endParaRPr lang="en-US" sz="1550" dirty="0"/>
+            <a:endParaRPr lang="en-US" sz="1320" dirty="0"/>
           </a:p>
         </p:txBody>
       </p:sp>
@@ -5075,13 +5120,16 @@
           <a:ln/>
         </p:spPr>
         <p:txBody>
-          <a:bodyPr wrap="square" lIns="254" tIns="254" rIns="254" bIns="254" rtlCol="0" anchor="t">
+          <a:bodyPr wrap="square" lIns="508" tIns="508" rIns="508" bIns="508" rtlCol="0" anchor="t">
             <a:normAutofit/>
           </a:bodyPr>
           <a:lstStyle/>
           <a:p>
-            <a:r>
-              <a:rPr lang="en-US" sz="1380" dirty="0">
+            <a:pPr indent="0" marL="0">
+              <a:buNone/>
+            </a:pPr>
+            <a:r>
+              <a:rPr lang="en-US" sz="1220" dirty="0">
                 <a:solidFill>
                   <a:srgbClr val="17364A"/>
                 </a:solidFill>
@@ -5091,11 +5139,14 @@
               </a:rPr>
               <a:t>Another failure mode is unclear ownership.</a:t>
             </a:r>
-            <a:endParaRPr lang="en-US" sz="1380" dirty="0"/>
-          </a:p>
-          <a:p>
-            <a:r>
-              <a:rPr lang="en-US" sz="1380" dirty="0">
+            <a:endParaRPr lang="en-US" sz="1220" dirty="0"/>
+          </a:p>
+          <a:p>
+            <a:pPr indent="0" marL="0">
+              <a:buNone/>
+            </a:pPr>
+            <a:r>
+              <a:rPr lang="en-US" sz="1220" dirty="0">
                 <a:solidFill>
                   <a:srgbClr val="17364A"/>
                 </a:solidFill>
@@ -5103,13 +5154,16 @@
                 <a:ea typeface="Aptos" pitchFamily="34" charset="-122"/>
                 <a:cs typeface="Aptos" pitchFamily="34" charset="-120"/>
               </a:rPr>
-              <a:t>When everyone is responsible in general, no one may be responsible in practice.</a:t>
-            </a:r>
-            <a:endParaRPr lang="en-US" sz="1380" dirty="0"/>
-          </a:p>
-          <a:p>
-            <a:r>
-              <a:rPr lang="en-US" sz="1380" dirty="0">
+              <a:t>When everyone is responsible in general, no one may be responsible.</a:t>
+            </a:r>
+            <a:endParaRPr lang="en-US" sz="1220" dirty="0"/>
+          </a:p>
+          <a:p>
+            <a:pPr indent="0" marL="0">
+              <a:buNone/>
+            </a:pPr>
+            <a:r>
+              <a:rPr lang="en-US" sz="1220" dirty="0">
                 <a:solidFill>
                   <a:srgbClr val="17364A"/>
                 </a:solidFill>
@@ -5117,9 +5171,9 @@
                 <a:ea typeface="Aptos" pitchFamily="34" charset="-122"/>
                 <a:cs typeface="Aptos" pitchFamily="34" charset="-120"/>
               </a:rPr>
-              <a:t>A guardrail is to assign an accountability owner and name escalation pathways.</a:t>
-            </a:r>
-            <a:endParaRPr lang="en-US" sz="1380" dirty="0"/>
+              <a:t>A guardrail is to assign an accountability owner and name.</a:t>
+            </a:r>
+            <a:endParaRPr lang="en-US" sz="1220" dirty="0"/>
           </a:p>
         </p:txBody>
       </p:sp>
@@ -5197,17 +5251,17 @@
         </p:nvSpPr>
         <p:spPr>
           <a:xfrm>
-            <a:off x="7799832" y="5001768"/>
-            <a:ext cx="3145536" cy="502920"/>
-          </a:xfrm>
-          <a:prstGeom prst="rect">
-            <a:avLst/>
-          </a:prstGeom>
-          <a:noFill/>
-          <a:ln/>
-        </p:spPr>
-        <p:txBody>
-          <a:bodyPr wrap="square" lIns="0" tIns="0" rIns="0" bIns="0" rtlCol="0" anchor="t">
+            <a:off x="7799832" y="4974336"/>
+            <a:ext cx="3145536" cy="576072"/>
+          </a:xfrm>
+          <a:prstGeom prst="rect">
+            <a:avLst/>
+          </a:prstGeom>
+          <a:noFill/>
+          <a:ln/>
+        </p:spPr>
+        <p:txBody>
+          <a:bodyPr wrap="square" lIns="254" tIns="254" rIns="254" bIns="254" rtlCol="0" anchor="t">
             <a:normAutofit/>
           </a:bodyPr>
           <a:lstStyle/>
@@ -5216,7 +5270,7 @@
               <a:buNone/>
             </a:pPr>
             <a:r>
-              <a:rPr lang="en-US" sz="1550" dirty="0">
+              <a:rPr lang="en-US" sz="1320" dirty="0">
                 <a:solidFill>
                   <a:srgbClr val="17364A"/>
                 </a:solidFill>
@@ -5224,9 +5278,9 @@
                 <a:ea typeface="Aptos" pitchFamily="34" charset="-122"/>
                 <a:cs typeface="Aptos" pitchFamily="34" charset="-120"/>
               </a:rPr>
-              <a:t>Identify what could go wrong, who could be affected, what safeguards are needed, and what evidence should be reviewed before use expands.</a:t>
-            </a:r>
-            <a:endParaRPr lang="en-US" sz="1550" dirty="0"/>
+              <a:t>Identify what could go wrong, who could be affected, what safeguards are needed, and what evidence should be reviewed.</a:t>
+            </a:r>
+            <a:endParaRPr lang="en-US" sz="1320" dirty="0"/>
           </a:p>
         </p:txBody>
       </p:sp>
@@ -5527,35 +5581,41 @@
           <a:ln/>
         </p:spPr>
         <p:txBody>
-          <a:bodyPr wrap="square" lIns="635" tIns="635" rIns="635" bIns="635" rtlCol="0" anchor="t">
+          <a:bodyPr wrap="square" lIns="1016" tIns="1016" rIns="1016" bIns="1016" rtlCol="0" anchor="t">
             <a:normAutofit/>
           </a:bodyPr>
           <a:lstStyle/>
           <a:p>
+            <a:pPr indent="0" marL="0">
+              <a:buNone/>
+            </a:pPr>
             <a:r>
               <a:rPr lang="en-US" sz="2100" dirty="0">
                 <a:solidFill>
-                  <a:srgbClr val="17364A"/>
-                </a:solidFill>
-                <a:latin typeface="Aptos" pitchFamily="34" charset="0"/>
-                <a:ea typeface="Aptos" pitchFamily="34" charset="-122"/>
-                <a:cs typeface="Aptos" pitchFamily="34" charset="-120"/>
-              </a:rPr>
-              <a:t>This topic applies across generative AI, predictive analytics, NLP, RAG, automation, and agentic.</a:t>
+                  <a:srgbClr val="003A63"/>
+                </a:solidFill>
+                <a:latin typeface="Aptos" pitchFamily="34" charset="0"/>
+                <a:ea typeface="Aptos" pitchFamily="34" charset="-122"/>
+                <a:cs typeface="Aptos" pitchFamily="34" charset="-120"/>
+              </a:rPr>
+              <a:t>• This topic applies across generative AI, predictive analytics, NLP, RAG, automation, and.</a:t>
             </a:r>
             <a:endParaRPr lang="en-US" sz="2100" dirty="0"/>
           </a:p>
           <a:p>
+            <a:pPr indent="0" marL="0">
+              <a:buNone/>
+            </a:pPr>
             <a:r>
               <a:rPr lang="en-US" sz="2100" dirty="0">
                 <a:solidFill>
-                  <a:srgbClr val="17364A"/>
-                </a:solidFill>
-                <a:latin typeface="Aptos" pitchFamily="34" charset="0"/>
-                <a:ea typeface="Aptos" pitchFamily="34" charset="-122"/>
-                <a:cs typeface="Aptos" pitchFamily="34" charset="-120"/>
-              </a:rPr>
-              <a:t>The more sensitive the data, the more consequential the output, or the more automated the action, the.</a:t>
+                  <a:srgbClr val="003A63"/>
+                </a:solidFill>
+                <a:latin typeface="Aptos" pitchFamily="34" charset="0"/>
+                <a:ea typeface="Aptos" pitchFamily="34" charset="-122"/>
+                <a:cs typeface="Aptos" pitchFamily="34" charset="-120"/>
+              </a:rPr>
+              <a:t>• The more sensitive the data, the more consequential the output, or the more automated the.</a:t>
             </a:r>
             <a:endParaRPr lang="en-US" sz="2100" dirty="0"/>
           </a:p>
@@ -5635,17 +5695,17 @@
         </p:nvSpPr>
         <p:spPr>
           <a:xfrm>
-            <a:off x="7799832" y="1828800"/>
-            <a:ext cx="3145536" cy="685800"/>
-          </a:xfrm>
-          <a:prstGeom prst="rect">
-            <a:avLst/>
-          </a:prstGeom>
-          <a:noFill/>
-          <a:ln/>
-        </p:spPr>
-        <p:txBody>
-          <a:bodyPr wrap="square" lIns="0" tIns="0" rIns="0" bIns="0" rtlCol="0" anchor="t">
+            <a:off x="7799832" y="1801368"/>
+            <a:ext cx="3145536" cy="758952"/>
+          </a:xfrm>
+          <a:prstGeom prst="rect">
+            <a:avLst/>
+          </a:prstGeom>
+          <a:noFill/>
+          <a:ln/>
+        </p:spPr>
+        <p:txBody>
+          <a:bodyPr wrap="square" lIns="254" tIns="254" rIns="254" bIns="254" rtlCol="0" anchor="t">
             <a:normAutofit/>
           </a:bodyPr>
           <a:lstStyle/>
@@ -5654,7 +5714,7 @@
               <a:buNone/>
             </a:pPr>
             <a:r>
-              <a:rPr lang="en-US" sz="1550" dirty="0">
+              <a:rPr lang="en-US" sz="1320" dirty="0">
                 <a:solidFill>
                   <a:srgbClr val="17364A"/>
                 </a:solidFill>
@@ -5664,7 +5724,7 @@
               </a:rPr>
               <a:t>This topic applies across generative AI, predictive analytics, NLP, RAG, automation, and agentic.</a:t>
             </a:r>
-            <a:endParaRPr lang="en-US" sz="1550" dirty="0"/>
+            <a:endParaRPr lang="en-US" sz="1320" dirty="0"/>
           </a:p>
         </p:txBody>
       </p:sp>
@@ -5752,13 +5812,16 @@
           <a:ln/>
         </p:spPr>
         <p:txBody>
-          <a:bodyPr wrap="square" lIns="254" tIns="254" rIns="254" bIns="254" rtlCol="0" anchor="t">
+          <a:bodyPr wrap="square" lIns="508" tIns="508" rIns="508" bIns="508" rtlCol="0" anchor="t">
             <a:normAutofit/>
           </a:bodyPr>
           <a:lstStyle/>
           <a:p>
-            <a:r>
-              <a:rPr lang="en-US" sz="1380" dirty="0">
+            <a:pPr indent="0" marL="0">
+              <a:buNone/>
+            </a:pPr>
+            <a:r>
+              <a:rPr lang="en-US" sz="1220" dirty="0">
                 <a:solidFill>
                   <a:srgbClr val="17364A"/>
                 </a:solidFill>
@@ -5766,13 +5829,16 @@
                 <a:ea typeface="Aptos" pitchFamily="34" charset="-122"/>
                 <a:cs typeface="Aptos" pitchFamily="34" charset="-120"/>
               </a:rPr>
-              <a:t>This topic applies across generative AI, predictive analytics, NLP, RAG, automation, and.</a:t>
-            </a:r>
-            <a:endParaRPr lang="en-US" sz="1380" dirty="0"/>
-          </a:p>
-          <a:p>
-            <a:r>
-              <a:rPr lang="en-US" sz="1380" dirty="0">
+              <a:t>This topic applies across generative AI, predictive analytics,.</a:t>
+            </a:r>
+            <a:endParaRPr lang="en-US" sz="1220" dirty="0"/>
+          </a:p>
+          <a:p>
+            <a:pPr indent="0" marL="0">
+              <a:buNone/>
+            </a:pPr>
+            <a:r>
+              <a:rPr lang="en-US" sz="1220" dirty="0">
                 <a:solidFill>
                   <a:srgbClr val="17364A"/>
                 </a:solidFill>
@@ -5780,9 +5846,9 @@
                 <a:ea typeface="Aptos" pitchFamily="34" charset="-122"/>
                 <a:cs typeface="Aptos" pitchFamily="34" charset="-120"/>
               </a:rPr>
-              <a:t>The more sensitive the data, the more consequential the output, or the more automated the.</a:t>
-            </a:r>
-            <a:endParaRPr lang="en-US" sz="1380" dirty="0"/>
+              <a:t>The more sensitive the data, the more consequential the output, or.</a:t>
+            </a:r>
+            <a:endParaRPr lang="en-US" sz="1220" dirty="0"/>
           </a:p>
         </p:txBody>
       </p:sp>
@@ -5860,17 +5926,17 @@
         </p:nvSpPr>
         <p:spPr>
           <a:xfrm>
-            <a:off x="7799832" y="5001768"/>
-            <a:ext cx="3145536" cy="502920"/>
-          </a:xfrm>
-          <a:prstGeom prst="rect">
-            <a:avLst/>
-          </a:prstGeom>
-          <a:noFill/>
-          <a:ln/>
-        </p:spPr>
-        <p:txBody>
-          <a:bodyPr wrap="square" lIns="0" tIns="0" rIns="0" bIns="0" rtlCol="0" anchor="t">
+            <a:off x="7799832" y="4974336"/>
+            <a:ext cx="3145536" cy="576072"/>
+          </a:xfrm>
+          <a:prstGeom prst="rect">
+            <a:avLst/>
+          </a:prstGeom>
+          <a:noFill/>
+          <a:ln/>
+        </p:spPr>
+        <p:txBody>
+          <a:bodyPr wrap="square" lIns="254" tIns="254" rIns="254" bIns="254" rtlCol="0" anchor="t">
             <a:normAutofit/>
           </a:bodyPr>
           <a:lstStyle/>
@@ -5879,7 +5945,7 @@
               <a:buNone/>
             </a:pPr>
             <a:r>
-              <a:rPr lang="en-US" sz="1550" dirty="0">
+              <a:rPr lang="en-US" sz="1320" dirty="0">
                 <a:solidFill>
                   <a:srgbClr val="17364A"/>
                 </a:solidFill>
@@ -5887,9 +5953,9 @@
                 <a:ea typeface="Aptos" pitchFamily="34" charset="-122"/>
                 <a:cs typeface="Aptos" pitchFamily="34" charset="-120"/>
               </a:rPr>
-              <a:t>Use the concept to clarify workflow changes, dependencies, staffing, procurement requirements, training needs, and implementation checkpoints.</a:t>
-            </a:r>
-            <a:endParaRPr lang="en-US" sz="1550" dirty="0"/>
+              <a:t>Use the concept to clarify workflow changes, dependencies, staffing, procurement requirements, training needs, and.</a:t>
+            </a:r>
+            <a:endParaRPr lang="en-US" sz="1320" dirty="0"/>
           </a:p>
         </p:txBody>
       </p:sp>
@@ -6190,49 +6256,58 @@
           <a:ln/>
         </p:spPr>
         <p:txBody>
-          <a:bodyPr wrap="square" lIns="635" tIns="635" rIns="635" bIns="635" rtlCol="0" anchor="t">
+          <a:bodyPr wrap="square" lIns="1016" tIns="1016" rIns="1016" bIns="1016" rtlCol="0" anchor="t">
             <a:normAutofit/>
           </a:bodyPr>
           <a:lstStyle/>
           <a:p>
+            <a:pPr indent="0" marL="0">
+              <a:buNone/>
+            </a:pPr>
             <a:r>
               <a:rPr lang="en-US" sz="2100" dirty="0">
                 <a:solidFill>
-                  <a:srgbClr val="17364A"/>
-                </a:solidFill>
-                <a:latin typeface="Aptos" pitchFamily="34" charset="0"/>
-                <a:ea typeface="Aptos" pitchFamily="34" charset="-122"/>
-                <a:cs typeface="Aptos" pitchFamily="34" charset="-120"/>
-              </a:rPr>
-              <a:t>What public health decision or workflow does this topic affect?</a:t>
+                  <a:srgbClr val="003A63"/>
+                </a:solidFill>
+                <a:latin typeface="Aptos" pitchFamily="34" charset="0"/>
+                <a:ea typeface="Aptos" pitchFamily="34" charset="-122"/>
+                <a:cs typeface="Aptos" pitchFamily="34" charset="-120"/>
+              </a:rPr>
+              <a:t>• What public health decision or workflow does this topic affect?</a:t>
             </a:r>
             <a:endParaRPr lang="en-US" sz="2100" dirty="0"/>
           </a:p>
           <a:p>
+            <a:pPr indent="0" marL="0">
+              <a:buNone/>
+            </a:pPr>
             <a:r>
               <a:rPr lang="en-US" sz="2100" dirty="0">
                 <a:solidFill>
-                  <a:srgbClr val="17364A"/>
-                </a:solidFill>
-                <a:latin typeface="Aptos" pitchFamily="34" charset="0"/>
-                <a:ea typeface="Aptos" pitchFamily="34" charset="-122"/>
-                <a:cs typeface="Aptos" pitchFamily="34" charset="-120"/>
-              </a:rPr>
-              <a:t>Who has authority to approve or pause the work?</a:t>
+                  <a:srgbClr val="003A63"/>
+                </a:solidFill>
+                <a:latin typeface="Aptos" pitchFamily="34" charset="0"/>
+                <a:ea typeface="Aptos" pitchFamily="34" charset="-122"/>
+                <a:cs typeface="Aptos" pitchFamily="34" charset="-120"/>
+              </a:rPr>
+              <a:t>• Who has authority to approve or pause the work?</a:t>
             </a:r>
             <a:endParaRPr lang="en-US" sz="2100" dirty="0"/>
           </a:p>
           <a:p>
+            <a:pPr indent="0" marL="0">
+              <a:buNone/>
+            </a:pPr>
             <a:r>
               <a:rPr lang="en-US" sz="2100" dirty="0">
                 <a:solidFill>
-                  <a:srgbClr val="17364A"/>
-                </a:solidFill>
-                <a:latin typeface="Aptos" pitchFamily="34" charset="0"/>
-                <a:ea typeface="Aptos" pitchFamily="34" charset="-122"/>
-                <a:cs typeface="Aptos" pitchFamily="34" charset="-120"/>
-              </a:rPr>
-              <a:t>What evidence would show that the workflow is responsible and effective?</a:t>
+                  <a:srgbClr val="003A63"/>
+                </a:solidFill>
+                <a:latin typeface="Aptos" pitchFamily="34" charset="0"/>
+                <a:ea typeface="Aptos" pitchFamily="34" charset="-122"/>
+                <a:cs typeface="Aptos" pitchFamily="34" charset="-120"/>
+              </a:rPr>
+              <a:t>• What evidence would show that the workflow is responsible and effective?</a:t>
             </a:r>
             <a:endParaRPr lang="en-US" sz="2100" dirty="0"/>
           </a:p>
@@ -6312,17 +6387,17 @@
         </p:nvSpPr>
         <p:spPr>
           <a:xfrm>
-            <a:off x="7799832" y="1828800"/>
-            <a:ext cx="3145536" cy="685800"/>
-          </a:xfrm>
-          <a:prstGeom prst="rect">
-            <a:avLst/>
-          </a:prstGeom>
-          <a:noFill/>
-          <a:ln/>
-        </p:spPr>
-        <p:txBody>
-          <a:bodyPr wrap="square" lIns="0" tIns="0" rIns="0" bIns="0" rtlCol="0" anchor="t">
+            <a:off x="7799832" y="1801368"/>
+            <a:ext cx="3145536" cy="758952"/>
+          </a:xfrm>
+          <a:prstGeom prst="rect">
+            <a:avLst/>
+          </a:prstGeom>
+          <a:noFill/>
+          <a:ln/>
+        </p:spPr>
+        <p:txBody>
+          <a:bodyPr wrap="square" lIns="254" tIns="254" rIns="254" bIns="254" rtlCol="0" anchor="t">
             <a:normAutofit/>
           </a:bodyPr>
           <a:lstStyle/>
@@ -6331,7 +6406,7 @@
               <a:buNone/>
             </a:pPr>
             <a:r>
-              <a:rPr lang="en-US" sz="1550" dirty="0">
+              <a:rPr lang="en-US" sz="1320" dirty="0">
                 <a:solidFill>
                   <a:srgbClr val="17364A"/>
                 </a:solidFill>
@@ -6341,7 +6416,7 @@
               </a:rPr>
               <a:t>What public health decision or workflow does this topic affect?</a:t>
             </a:r>
-            <a:endParaRPr lang="en-US" sz="1550" dirty="0"/>
+            <a:endParaRPr lang="en-US" sz="1320" dirty="0"/>
           </a:p>
         </p:txBody>
       </p:sp>
@@ -6429,13 +6504,16 @@
           <a:ln/>
         </p:spPr>
         <p:txBody>
-          <a:bodyPr wrap="square" lIns="254" tIns="254" rIns="254" bIns="254" rtlCol="0" anchor="t">
+          <a:bodyPr wrap="square" lIns="508" tIns="508" rIns="508" bIns="508" rtlCol="0" anchor="t">
             <a:normAutofit/>
           </a:bodyPr>
           <a:lstStyle/>
           <a:p>
-            <a:r>
-              <a:rPr lang="en-US" sz="1380" dirty="0">
+            <a:pPr indent="0" marL="0">
+              <a:buNone/>
+            </a:pPr>
+            <a:r>
+              <a:rPr lang="en-US" sz="1220" dirty="0">
                 <a:solidFill>
                   <a:srgbClr val="17364A"/>
                 </a:solidFill>
@@ -6445,11 +6523,14 @@
               </a:rPr>
               <a:t>What public health decision or workflow does this topic affect?</a:t>
             </a:r>
-            <a:endParaRPr lang="en-US" sz="1380" dirty="0"/>
-          </a:p>
-          <a:p>
-            <a:r>
-              <a:rPr lang="en-US" sz="1380" dirty="0">
+            <a:endParaRPr lang="en-US" sz="1220" dirty="0"/>
+          </a:p>
+          <a:p>
+            <a:pPr indent="0" marL="0">
+              <a:buNone/>
+            </a:pPr>
+            <a:r>
+              <a:rPr lang="en-US" sz="1220" dirty="0">
                 <a:solidFill>
                   <a:srgbClr val="17364A"/>
                 </a:solidFill>
@@ -6459,11 +6540,14 @@
               </a:rPr>
               <a:t>Who has authority to approve or pause the work?</a:t>
             </a:r>
-            <a:endParaRPr lang="en-US" sz="1380" dirty="0"/>
-          </a:p>
-          <a:p>
-            <a:r>
-              <a:rPr lang="en-US" sz="1380" dirty="0">
+            <a:endParaRPr lang="en-US" sz="1220" dirty="0"/>
+          </a:p>
+          <a:p>
+            <a:pPr indent="0" marL="0">
+              <a:buNone/>
+            </a:pPr>
+            <a:r>
+              <a:rPr lang="en-US" sz="1220" dirty="0">
                 <a:solidFill>
                   <a:srgbClr val="17364A"/>
                 </a:solidFill>
@@ -6471,9 +6555,9 @@
                 <a:ea typeface="Aptos" pitchFamily="34" charset="-122"/>
                 <a:cs typeface="Aptos" pitchFamily="34" charset="-120"/>
               </a:rPr>
-              <a:t>What evidence would show that the workflow is responsible and effective?</a:t>
-            </a:r>
-            <a:endParaRPr lang="en-US" sz="1380" dirty="0"/>
+              <a:t>What evidence would show that the workflow is responsible and.</a:t>
+            </a:r>
+            <a:endParaRPr lang="en-US" sz="1220" dirty="0"/>
           </a:p>
         </p:txBody>
       </p:sp>
@@ -6551,17 +6635,17 @@
         </p:nvSpPr>
         <p:spPr>
           <a:xfrm>
-            <a:off x="7799832" y="5001768"/>
-            <a:ext cx="3145536" cy="502920"/>
-          </a:xfrm>
-          <a:prstGeom prst="rect">
-            <a:avLst/>
-          </a:prstGeom>
-          <a:noFill/>
-          <a:ln/>
-        </p:spPr>
-        <p:txBody>
-          <a:bodyPr wrap="square" lIns="0" tIns="0" rIns="0" bIns="0" rtlCol="0" anchor="t">
+            <a:off x="7799832" y="4974336"/>
+            <a:ext cx="3145536" cy="576072"/>
+          </a:xfrm>
+          <a:prstGeom prst="rect">
+            <a:avLst/>
+          </a:prstGeom>
+          <a:noFill/>
+          <a:ln/>
+        </p:spPr>
+        <p:txBody>
+          <a:bodyPr wrap="square" lIns="254" tIns="254" rIns="254" bIns="254" rtlCol="0" anchor="t">
             <a:normAutofit/>
           </a:bodyPr>
           <a:lstStyle/>
@@ -6570,7 +6654,7 @@
               <a:buNone/>
             </a:pPr>
             <a:r>
-              <a:rPr lang="en-US" sz="1550" dirty="0">
+              <a:rPr lang="en-US" sz="1320" dirty="0">
                 <a:solidFill>
                   <a:srgbClr val="17364A"/>
                 </a:solidFill>
@@ -6578,9 +6662,9 @@
                 <a:ea typeface="Aptos" pitchFamily="34" charset="-122"/>
                 <a:cs typeface="Aptos" pitchFamily="34" charset="-120"/>
               </a:rPr>
-              <a:t>Use the concept to clarify workflow changes, dependencies, staffing, procurement requirements, training needs, and implementation checkpoints.</a:t>
-            </a:r>
-            <a:endParaRPr lang="en-US" sz="1550" dirty="0"/>
+              <a:t>Use the concept to clarify workflow changes, dependencies, staffing, procurement requirements, training needs, and.</a:t>
+            </a:r>
+            <a:endParaRPr lang="en-US" sz="1320" dirty="0"/>
           </a:p>
         </p:txBody>
       </p:sp>
@@ -6881,35 +6965,41 @@
           <a:ln/>
         </p:spPr>
         <p:txBody>
-          <a:bodyPr wrap="square" lIns="635" tIns="635" rIns="635" bIns="635" rtlCol="0" anchor="t">
+          <a:bodyPr wrap="square" lIns="1016" tIns="1016" rIns="1016" bIns="1016" rtlCol="0" anchor="t">
             <a:normAutofit/>
           </a:bodyPr>
           <a:lstStyle/>
           <a:p>
+            <a:pPr indent="0" marL="0">
+              <a:buNone/>
+            </a:pPr>
             <a:r>
               <a:rPr lang="en-US" sz="2100" dirty="0">
                 <a:solidFill>
-                  <a:srgbClr val="17364A"/>
-                </a:solidFill>
-                <a:latin typeface="Aptos" pitchFamily="34" charset="0"/>
-                <a:ea typeface="Aptos" pitchFamily="34" charset="-122"/>
-                <a:cs typeface="Aptos" pitchFamily="34" charset="-120"/>
-              </a:rPr>
-              <a:t>What equity, privacy, legal, security, or public trust risks require review?</a:t>
+                  <a:srgbClr val="003A63"/>
+                </a:solidFill>
+                <a:latin typeface="Aptos" pitchFamily="34" charset="0"/>
+                <a:ea typeface="Aptos" pitchFamily="34" charset="-122"/>
+                <a:cs typeface="Aptos" pitchFamily="34" charset="-120"/>
+              </a:rPr>
+              <a:t>• What equity, privacy, legal, security, or public trust risks require review?</a:t>
             </a:r>
             <a:endParaRPr lang="en-US" sz="2100" dirty="0"/>
           </a:p>
           <a:p>
+            <a:pPr indent="0" marL="0">
+              <a:buNone/>
+            </a:pPr>
             <a:r>
               <a:rPr lang="en-US" sz="2100" dirty="0">
                 <a:solidFill>
-                  <a:srgbClr val="17364A"/>
-                </a:solidFill>
-                <a:latin typeface="Aptos" pitchFamily="34" charset="0"/>
-                <a:ea typeface="Aptos" pitchFamily="34" charset="-122"/>
-                <a:cs typeface="Aptos" pitchFamily="34" charset="-120"/>
-              </a:rPr>
-              <a:t>How will the agency know when the workflow needs to be revised?</a:t>
+                  <a:srgbClr val="003A63"/>
+                </a:solidFill>
+                <a:latin typeface="Aptos" pitchFamily="34" charset="0"/>
+                <a:ea typeface="Aptos" pitchFamily="34" charset="-122"/>
+                <a:cs typeface="Aptos" pitchFamily="34" charset="-120"/>
+              </a:rPr>
+              <a:t>• How will the agency know when the workflow needs to be revised?</a:t>
             </a:r>
             <a:endParaRPr lang="en-US" sz="2100" dirty="0"/>
           </a:p>
@@ -6989,17 +7079,17 @@
         </p:nvSpPr>
         <p:spPr>
           <a:xfrm>
-            <a:off x="7799832" y="1828800"/>
-            <a:ext cx="3145536" cy="685800"/>
-          </a:xfrm>
-          <a:prstGeom prst="rect">
-            <a:avLst/>
-          </a:prstGeom>
-          <a:noFill/>
-          <a:ln/>
-        </p:spPr>
-        <p:txBody>
-          <a:bodyPr wrap="square" lIns="0" tIns="0" rIns="0" bIns="0" rtlCol="0" anchor="t">
+            <a:off x="7799832" y="1801368"/>
+            <a:ext cx="3145536" cy="758952"/>
+          </a:xfrm>
+          <a:prstGeom prst="rect">
+            <a:avLst/>
+          </a:prstGeom>
+          <a:noFill/>
+          <a:ln/>
+        </p:spPr>
+        <p:txBody>
+          <a:bodyPr wrap="square" lIns="254" tIns="254" rIns="254" bIns="254" rtlCol="0" anchor="t">
             <a:normAutofit/>
           </a:bodyPr>
           <a:lstStyle/>
@@ -7008,7 +7098,7 @@
               <a:buNone/>
             </a:pPr>
             <a:r>
-              <a:rPr lang="en-US" sz="1550" dirty="0">
+              <a:rPr lang="en-US" sz="1320" dirty="0">
                 <a:solidFill>
                   <a:srgbClr val="17364A"/>
                 </a:solidFill>
@@ -7018,7 +7108,7 @@
               </a:rPr>
               <a:t>What equity, privacy, legal, security, or public trust risks require review?</a:t>
             </a:r>
-            <a:endParaRPr lang="en-US" sz="1550" dirty="0"/>
+            <a:endParaRPr lang="en-US" sz="1320" dirty="0"/>
           </a:p>
         </p:txBody>
       </p:sp>
@@ -7106,13 +7196,16 @@
           <a:ln/>
         </p:spPr>
         <p:txBody>
-          <a:bodyPr wrap="square" lIns="254" tIns="254" rIns="254" bIns="254" rtlCol="0" anchor="t">
+          <a:bodyPr wrap="square" lIns="508" tIns="508" rIns="508" bIns="508" rtlCol="0" anchor="t">
             <a:normAutofit/>
           </a:bodyPr>
           <a:lstStyle/>
           <a:p>
-            <a:r>
-              <a:rPr lang="en-US" sz="1380" dirty="0">
+            <a:pPr indent="0" marL="0">
+              <a:buNone/>
+            </a:pPr>
+            <a:r>
+              <a:rPr lang="en-US" sz="1220" dirty="0">
                 <a:solidFill>
                   <a:srgbClr val="17364A"/>
                 </a:solidFill>
@@ -7120,13 +7213,16 @@
                 <a:ea typeface="Aptos" pitchFamily="34" charset="-122"/>
                 <a:cs typeface="Aptos" pitchFamily="34" charset="-120"/>
               </a:rPr>
-              <a:t>What equity, privacy, legal, security, or public trust risks require review?</a:t>
-            </a:r>
-            <a:endParaRPr lang="en-US" sz="1380" dirty="0"/>
-          </a:p>
-          <a:p>
-            <a:r>
-              <a:rPr lang="en-US" sz="1380" dirty="0">
+              <a:t>What equity, privacy, legal, security, or public trust risks.</a:t>
+            </a:r>
+            <a:endParaRPr lang="en-US" sz="1220" dirty="0"/>
+          </a:p>
+          <a:p>
+            <a:pPr indent="0" marL="0">
+              <a:buNone/>
+            </a:pPr>
+            <a:r>
+              <a:rPr lang="en-US" sz="1220" dirty="0">
                 <a:solidFill>
                   <a:srgbClr val="17364A"/>
                 </a:solidFill>
@@ -7136,7 +7232,7 @@
               </a:rPr>
               <a:t>How will the agency know when the workflow needs to be revised?</a:t>
             </a:r>
-            <a:endParaRPr lang="en-US" sz="1380" dirty="0"/>
+            <a:endParaRPr lang="en-US" sz="1220" dirty="0"/>
           </a:p>
         </p:txBody>
       </p:sp>
@@ -7214,17 +7310,17 @@
         </p:nvSpPr>
         <p:spPr>
           <a:xfrm>
-            <a:off x="7799832" y="5001768"/>
-            <a:ext cx="3145536" cy="502920"/>
-          </a:xfrm>
-          <a:prstGeom prst="rect">
-            <a:avLst/>
-          </a:prstGeom>
-          <a:noFill/>
-          <a:ln/>
-        </p:spPr>
-        <p:txBody>
-          <a:bodyPr wrap="square" lIns="0" tIns="0" rIns="0" bIns="0" rtlCol="0" anchor="t">
+            <a:off x="7799832" y="4974336"/>
+            <a:ext cx="3145536" cy="576072"/>
+          </a:xfrm>
+          <a:prstGeom prst="rect">
+            <a:avLst/>
+          </a:prstGeom>
+          <a:noFill/>
+          <a:ln/>
+        </p:spPr>
+        <p:txBody>
+          <a:bodyPr wrap="square" lIns="254" tIns="254" rIns="254" bIns="254" rtlCol="0" anchor="t">
             <a:normAutofit/>
           </a:bodyPr>
           <a:lstStyle/>
@@ -7233,7 +7329,7 @@
               <a:buNone/>
             </a:pPr>
             <a:r>
-              <a:rPr lang="en-US" sz="1550" dirty="0">
+              <a:rPr lang="en-US" sz="1320" dirty="0">
                 <a:solidFill>
                   <a:srgbClr val="17364A"/>
                 </a:solidFill>
@@ -7241,9 +7337,9 @@
                 <a:ea typeface="Aptos" pitchFamily="34" charset="-122"/>
                 <a:cs typeface="Aptos" pitchFamily="34" charset="-120"/>
               </a:rPr>
-              <a:t>Use the concept to clarify workflow changes, dependencies, staffing, procurement requirements, training needs, and implementation checkpoints.</a:t>
-            </a:r>
-            <a:endParaRPr lang="en-US" sz="1550" dirty="0"/>
+              <a:t>Use the concept to clarify workflow changes, dependencies, staffing, procurement requirements, training needs, and.</a:t>
+            </a:r>
+            <a:endParaRPr lang="en-US" sz="1320" dirty="0"/>
           </a:p>
         </p:txBody>
       </p:sp>
@@ -7544,35 +7640,41 @@
           <a:ln/>
         </p:spPr>
         <p:txBody>
-          <a:bodyPr wrap="square" lIns="635" tIns="635" rIns="635" bIns="635" rtlCol="0" anchor="t">
+          <a:bodyPr wrap="square" lIns="1016" tIns="1016" rIns="1016" bIns="1016" rtlCol="0" anchor="t">
             <a:normAutofit/>
           </a:bodyPr>
           <a:lstStyle/>
           <a:p>
+            <a:pPr indent="0" marL="0">
+              <a:buNone/>
+            </a:pPr>
             <a:r>
               <a:rPr lang="en-US" sz="2100" dirty="0">
                 <a:solidFill>
-                  <a:srgbClr val="17364A"/>
-                </a:solidFill>
-                <a:latin typeface="Aptos" pitchFamily="34" charset="0"/>
-                <a:ea typeface="Aptos" pitchFamily="34" charset="-122"/>
-                <a:cs typeface="Aptos" pitchFamily="34" charset="-120"/>
-              </a:rPr>
-              <a:t>Create a practical grant and funding management for ai projects artifact for one AI-supported public.</a:t>
+                  <a:srgbClr val="003A63"/>
+                </a:solidFill>
+                <a:latin typeface="Aptos" pitchFamily="34" charset="0"/>
+                <a:ea typeface="Aptos" pitchFamily="34" charset="-122"/>
+                <a:cs typeface="Aptos" pitchFamily="34" charset="-120"/>
+              </a:rPr>
+              <a:t>• Create a practical grant and funding management for ai projects artifact for one AI-supported.</a:t>
             </a:r>
             <a:endParaRPr lang="en-US" sz="2100" dirty="0"/>
           </a:p>
           <a:p>
+            <a:pPr indent="0" marL="0">
+              <a:buNone/>
+            </a:pPr>
             <a:r>
               <a:rPr lang="en-US" sz="2100" dirty="0">
                 <a:solidFill>
-                  <a:srgbClr val="17364A"/>
-                </a:solidFill>
-                <a:latin typeface="Aptos" pitchFamily="34" charset="0"/>
-                <a:ea typeface="Aptos" pitchFamily="34" charset="-122"/>
-                <a:cs typeface="Aptos" pitchFamily="34" charset="-120"/>
-              </a:rPr>
-              <a:t>The artifact should define the use case, affected roles, review criteria, safeguards, documentation.</a:t>
+                  <a:srgbClr val="003A63"/>
+                </a:solidFill>
+                <a:latin typeface="Aptos" pitchFamily="34" charset="0"/>
+                <a:ea typeface="Aptos" pitchFamily="34" charset="-122"/>
+                <a:cs typeface="Aptos" pitchFamily="34" charset="-120"/>
+              </a:rPr>
+              <a:t>• The artifact should define the use case, affected roles, review criteria, safeguards,.</a:t>
             </a:r>
             <a:endParaRPr lang="en-US" sz="2100" dirty="0"/>
           </a:p>
@@ -7652,17 +7754,17 @@
         </p:nvSpPr>
         <p:spPr>
           <a:xfrm>
-            <a:off x="7799832" y="1828800"/>
-            <a:ext cx="3145536" cy="685800"/>
-          </a:xfrm>
-          <a:prstGeom prst="rect">
-            <a:avLst/>
-          </a:prstGeom>
-          <a:noFill/>
-          <a:ln/>
-        </p:spPr>
-        <p:txBody>
-          <a:bodyPr wrap="square" lIns="0" tIns="0" rIns="0" bIns="0" rtlCol="0" anchor="t">
+            <a:off x="7799832" y="1801368"/>
+            <a:ext cx="3145536" cy="758952"/>
+          </a:xfrm>
+          <a:prstGeom prst="rect">
+            <a:avLst/>
+          </a:prstGeom>
+          <a:noFill/>
+          <a:ln/>
+        </p:spPr>
+        <p:txBody>
+          <a:bodyPr wrap="square" lIns="254" tIns="254" rIns="254" bIns="254" rtlCol="0" anchor="t">
             <a:normAutofit/>
           </a:bodyPr>
           <a:lstStyle/>
@@ -7671,7 +7773,7 @@
               <a:buNone/>
             </a:pPr>
             <a:r>
-              <a:rPr lang="en-US" sz="1550" dirty="0">
+              <a:rPr lang="en-US" sz="1320" dirty="0">
                 <a:solidFill>
                   <a:srgbClr val="17364A"/>
                 </a:solidFill>
@@ -7681,7 +7783,7 @@
               </a:rPr>
               <a:t>Create a practical grant and funding management for ai projects artifact for one AI-supported public.</a:t>
             </a:r>
-            <a:endParaRPr lang="en-US" sz="1550" dirty="0"/>
+            <a:endParaRPr lang="en-US" sz="1320" dirty="0"/>
           </a:p>
         </p:txBody>
       </p:sp>
@@ -7769,13 +7871,16 @@
           <a:ln/>
         </p:spPr>
         <p:txBody>
-          <a:bodyPr wrap="square" lIns="254" tIns="254" rIns="254" bIns="254" rtlCol="0" anchor="t">
+          <a:bodyPr wrap="square" lIns="508" tIns="508" rIns="508" bIns="508" rtlCol="0" anchor="t">
             <a:normAutofit/>
           </a:bodyPr>
           <a:lstStyle/>
           <a:p>
-            <a:r>
-              <a:rPr lang="en-US" sz="1380" dirty="0">
+            <a:pPr indent="0" marL="0">
+              <a:buNone/>
+            </a:pPr>
+            <a:r>
+              <a:rPr lang="en-US" sz="1220" dirty="0">
                 <a:solidFill>
                   <a:srgbClr val="17364A"/>
                 </a:solidFill>
@@ -7783,13 +7888,16 @@
                 <a:ea typeface="Aptos" pitchFamily="34" charset="-122"/>
                 <a:cs typeface="Aptos" pitchFamily="34" charset="-120"/>
               </a:rPr>
-              <a:t>Create a practical grant and funding management for ai projects artifact for one.</a:t>
-            </a:r>
-            <a:endParaRPr lang="en-US" sz="1380" dirty="0"/>
-          </a:p>
-          <a:p>
-            <a:r>
-              <a:rPr lang="en-US" sz="1380" dirty="0">
+              <a:t>Create a practical grant and funding management for ai projects.</a:t>
+            </a:r>
+            <a:endParaRPr lang="en-US" sz="1220" dirty="0"/>
+          </a:p>
+          <a:p>
+            <a:pPr indent="0" marL="0">
+              <a:buNone/>
+            </a:pPr>
+            <a:r>
+              <a:rPr lang="en-US" sz="1220" dirty="0">
                 <a:solidFill>
                   <a:srgbClr val="17364A"/>
                 </a:solidFill>
@@ -7797,9 +7905,9 @@
                 <a:ea typeface="Aptos" pitchFamily="34" charset="-122"/>
                 <a:cs typeface="Aptos" pitchFamily="34" charset="-120"/>
               </a:rPr>
-              <a:t>The artifact should define the use case, affected roles, review criteria, safeguards,.</a:t>
-            </a:r>
-            <a:endParaRPr lang="en-US" sz="1380" dirty="0"/>
+              <a:t>The artifact should define the use case, affected roles, review.</a:t>
+            </a:r>
+            <a:endParaRPr lang="en-US" sz="1220" dirty="0"/>
           </a:p>
         </p:txBody>
       </p:sp>
@@ -7877,17 +7985,17 @@
         </p:nvSpPr>
         <p:spPr>
           <a:xfrm>
-            <a:off x="7799832" y="5001768"/>
-            <a:ext cx="3145536" cy="502920"/>
-          </a:xfrm>
-          <a:prstGeom prst="rect">
-            <a:avLst/>
-          </a:prstGeom>
-          <a:noFill/>
-          <a:ln/>
-        </p:spPr>
-        <p:txBody>
-          <a:bodyPr wrap="square" lIns="0" tIns="0" rIns="0" bIns="0" rtlCol="0" anchor="t">
+            <a:off x="7799832" y="4974336"/>
+            <a:ext cx="3145536" cy="576072"/>
+          </a:xfrm>
+          <a:prstGeom prst="rect">
+            <a:avLst/>
+          </a:prstGeom>
+          <a:noFill/>
+          <a:ln/>
+        </p:spPr>
+        <p:txBody>
+          <a:bodyPr wrap="square" lIns="254" tIns="254" rIns="254" bIns="254" rtlCol="0" anchor="t">
             <a:normAutofit/>
           </a:bodyPr>
           <a:lstStyle/>
@@ -7896,7 +8004,7 @@
               <a:buNone/>
             </a:pPr>
             <a:r>
-              <a:rPr lang="en-US" sz="1550" dirty="0">
+              <a:rPr lang="en-US" sz="1320" dirty="0">
                 <a:solidFill>
                   <a:srgbClr val="17364A"/>
                 </a:solidFill>
@@ -7904,9 +8012,9 @@
                 <a:ea typeface="Aptos" pitchFamily="34" charset="-122"/>
                 <a:cs typeface="Aptos" pitchFamily="34" charset="-120"/>
               </a:rPr>
-              <a:t>Use the assignment to test whether you can explain the concept, apply it to a realistic public health situation, and identify what would need review before the work moves forward.</a:t>
-            </a:r>
-            <a:endParaRPr lang="en-US" sz="1550" dirty="0"/>
+              <a:t>Use the assignment to test whether you can explain the concept, apply it to a realistic public health situation, and.</a:t>
+            </a:r>
+            <a:endParaRPr lang="en-US" sz="1320" dirty="0"/>
           </a:p>
         </p:txBody>
       </p:sp>
@@ -8207,49 +8315,58 @@
           <a:ln/>
         </p:spPr>
         <p:txBody>
-          <a:bodyPr wrap="square" lIns="635" tIns="635" rIns="635" bIns="635" rtlCol="0" anchor="t">
+          <a:bodyPr wrap="square" lIns="1016" tIns="1016" rIns="1016" bIns="1016" rtlCol="0" anchor="t">
             <a:normAutofit/>
           </a:bodyPr>
           <a:lstStyle/>
           <a:p>
+            <a:pPr indent="0" marL="0">
+              <a:buNone/>
+            </a:pPr>
             <a:r>
               <a:rPr lang="en-US" sz="2100" dirty="0">
                 <a:solidFill>
-                  <a:srgbClr val="17364A"/>
-                </a:solidFill>
-                <a:latin typeface="Aptos" pitchFamily="34" charset="0"/>
-                <a:ea typeface="Aptos" pitchFamily="34" charset="-122"/>
-                <a:cs typeface="Aptos" pitchFamily="34" charset="-120"/>
-              </a:rPr>
-              <a:t>Grant and Funding Management for AI Projects artifact</a:t>
+                  <a:srgbClr val="003A63"/>
+                </a:solidFill>
+                <a:latin typeface="Aptos" pitchFamily="34" charset="0"/>
+                <a:ea typeface="Aptos" pitchFamily="34" charset="-122"/>
+                <a:cs typeface="Aptos" pitchFamily="34" charset="-120"/>
+              </a:rPr>
+              <a:t>• Grant and Funding Management for AI Projects artifact</a:t>
             </a:r>
             <a:endParaRPr lang="en-US" sz="2100" dirty="0"/>
           </a:p>
           <a:p>
+            <a:pPr indent="0" marL="0">
+              <a:buNone/>
+            </a:pPr>
             <a:r>
               <a:rPr lang="en-US" sz="2100" dirty="0">
                 <a:solidFill>
-                  <a:srgbClr val="17364A"/>
-                </a:solidFill>
-                <a:latin typeface="Aptos" pitchFamily="34" charset="0"/>
-                <a:ea typeface="Aptos" pitchFamily="34" charset="-122"/>
-                <a:cs typeface="Aptos" pitchFamily="34" charset="-120"/>
-              </a:rPr>
-              <a:t>Role and responsibility table</a:t>
+                  <a:srgbClr val="003A63"/>
+                </a:solidFill>
+                <a:latin typeface="Aptos" pitchFamily="34" charset="0"/>
+                <a:ea typeface="Aptos" pitchFamily="34" charset="-122"/>
+                <a:cs typeface="Aptos" pitchFamily="34" charset="-120"/>
+              </a:rPr>
+              <a:t>• Role and responsibility table</a:t>
             </a:r>
             <a:endParaRPr lang="en-US" sz="2100" dirty="0"/>
           </a:p>
           <a:p>
+            <a:pPr indent="0" marL="0">
+              <a:buNone/>
+            </a:pPr>
             <a:r>
               <a:rPr lang="en-US" sz="2100" dirty="0">
                 <a:solidFill>
-                  <a:srgbClr val="17364A"/>
-                </a:solidFill>
-                <a:latin typeface="Aptos" pitchFamily="34" charset="0"/>
-                <a:ea typeface="Aptos" pitchFamily="34" charset="-122"/>
-                <a:cs typeface="Aptos" pitchFamily="34" charset="-120"/>
-              </a:rPr>
-              <a:t>Risk and safeguard summary</a:t>
+                  <a:srgbClr val="003A63"/>
+                </a:solidFill>
+                <a:latin typeface="Aptos" pitchFamily="34" charset="0"/>
+                <a:ea typeface="Aptos" pitchFamily="34" charset="-122"/>
+                <a:cs typeface="Aptos" pitchFamily="34" charset="-120"/>
+              </a:rPr>
+              <a:t>• Risk and safeguard summary</a:t>
             </a:r>
             <a:endParaRPr lang="en-US" sz="2100" dirty="0"/>
           </a:p>
@@ -8329,17 +8446,17 @@
         </p:nvSpPr>
         <p:spPr>
           <a:xfrm>
-            <a:off x="7799832" y="1828800"/>
-            <a:ext cx="3145536" cy="685800"/>
-          </a:xfrm>
-          <a:prstGeom prst="rect">
-            <a:avLst/>
-          </a:prstGeom>
-          <a:noFill/>
-          <a:ln/>
-        </p:spPr>
-        <p:txBody>
-          <a:bodyPr wrap="square" lIns="0" tIns="0" rIns="0" bIns="0" rtlCol="0" anchor="t">
+            <a:off x="7799832" y="1801368"/>
+            <a:ext cx="3145536" cy="758952"/>
+          </a:xfrm>
+          <a:prstGeom prst="rect">
+            <a:avLst/>
+          </a:prstGeom>
+          <a:noFill/>
+          <a:ln/>
+        </p:spPr>
+        <p:txBody>
+          <a:bodyPr wrap="square" lIns="254" tIns="254" rIns="254" bIns="254" rtlCol="0" anchor="t">
             <a:normAutofit/>
           </a:bodyPr>
           <a:lstStyle/>
@@ -8348,7 +8465,7 @@
               <a:buNone/>
             </a:pPr>
             <a:r>
-              <a:rPr lang="en-US" sz="1550" dirty="0">
+              <a:rPr lang="en-US" sz="1320" dirty="0">
                 <a:solidFill>
                   <a:srgbClr val="17364A"/>
                 </a:solidFill>
@@ -8358,7 +8475,7 @@
               </a:rPr>
               <a:t>Grant and Funding Management for AI Projects artifact</a:t>
             </a:r>
-            <a:endParaRPr lang="en-US" sz="1550" dirty="0"/>
+            <a:endParaRPr lang="en-US" sz="1320" dirty="0"/>
           </a:p>
         </p:txBody>
       </p:sp>
@@ -8446,13 +8563,16 @@
           <a:ln/>
         </p:spPr>
         <p:txBody>
-          <a:bodyPr wrap="square" lIns="254" tIns="254" rIns="254" bIns="254" rtlCol="0" anchor="t">
+          <a:bodyPr wrap="square" lIns="508" tIns="508" rIns="508" bIns="508" rtlCol="0" anchor="t">
             <a:normAutofit/>
           </a:bodyPr>
           <a:lstStyle/>
           <a:p>
-            <a:r>
-              <a:rPr lang="en-US" sz="1380" dirty="0">
+            <a:pPr indent="0" marL="0">
+              <a:buNone/>
+            </a:pPr>
+            <a:r>
+              <a:rPr lang="en-US" sz="1220" dirty="0">
                 <a:solidFill>
                   <a:srgbClr val="17364A"/>
                 </a:solidFill>
@@ -8462,11 +8582,14 @@
               </a:rPr>
               <a:t>Grant and Funding Management for AI Projects artifact</a:t>
             </a:r>
-            <a:endParaRPr lang="en-US" sz="1380" dirty="0"/>
-          </a:p>
-          <a:p>
-            <a:r>
-              <a:rPr lang="en-US" sz="1380" dirty="0">
+            <a:endParaRPr lang="en-US" sz="1220" dirty="0"/>
+          </a:p>
+          <a:p>
+            <a:pPr indent="0" marL="0">
+              <a:buNone/>
+            </a:pPr>
+            <a:r>
+              <a:rPr lang="en-US" sz="1220" dirty="0">
                 <a:solidFill>
                   <a:srgbClr val="17364A"/>
                 </a:solidFill>
@@ -8476,11 +8599,14 @@
               </a:rPr>
               <a:t>Role and responsibility table</a:t>
             </a:r>
-            <a:endParaRPr lang="en-US" sz="1380" dirty="0"/>
-          </a:p>
-          <a:p>
-            <a:r>
-              <a:rPr lang="en-US" sz="1380" dirty="0">
+            <a:endParaRPr lang="en-US" sz="1220" dirty="0"/>
+          </a:p>
+          <a:p>
+            <a:pPr indent="0" marL="0">
+              <a:buNone/>
+            </a:pPr>
+            <a:r>
+              <a:rPr lang="en-US" sz="1220" dirty="0">
                 <a:solidFill>
                   <a:srgbClr val="17364A"/>
                 </a:solidFill>
@@ -8490,7 +8616,7 @@
               </a:rPr>
               <a:t>Risk and safeguard summary</a:t>
             </a:r>
-            <a:endParaRPr lang="en-US" sz="1380" dirty="0"/>
+            <a:endParaRPr lang="en-US" sz="1220" dirty="0"/>
           </a:p>
         </p:txBody>
       </p:sp>
@@ -8568,17 +8694,17 @@
         </p:nvSpPr>
         <p:spPr>
           <a:xfrm>
-            <a:off x="7799832" y="5001768"/>
-            <a:ext cx="3145536" cy="502920"/>
-          </a:xfrm>
-          <a:prstGeom prst="rect">
-            <a:avLst/>
-          </a:prstGeom>
-          <a:noFill/>
-          <a:ln/>
-        </p:spPr>
-        <p:txBody>
-          <a:bodyPr wrap="square" lIns="0" tIns="0" rIns="0" bIns="0" rtlCol="0" anchor="t">
+            <a:off x="7799832" y="4974336"/>
+            <a:ext cx="3145536" cy="576072"/>
+          </a:xfrm>
+          <a:prstGeom prst="rect">
+            <a:avLst/>
+          </a:prstGeom>
+          <a:noFill/>
+          <a:ln/>
+        </p:spPr>
+        <p:txBody>
+          <a:bodyPr wrap="square" lIns="254" tIns="254" rIns="254" bIns="254" rtlCol="0" anchor="t">
             <a:normAutofit/>
           </a:bodyPr>
           <a:lstStyle/>
@@ -8587,7 +8713,7 @@
               <a:buNone/>
             </a:pPr>
             <a:r>
-              <a:rPr lang="en-US" sz="1550" dirty="0">
+              <a:rPr lang="en-US" sz="1320" dirty="0">
                 <a:solidFill>
                   <a:srgbClr val="17364A"/>
                 </a:solidFill>
@@ -8595,9 +8721,9 @@
                 <a:ea typeface="Aptos" pitchFamily="34" charset="-122"/>
                 <a:cs typeface="Aptos" pitchFamily="34" charset="-120"/>
               </a:rPr>
-              <a:t>Use the concept to clarify workflow changes, dependencies, staffing, procurement requirements, training needs, and implementation checkpoints.</a:t>
-            </a:r>
-            <a:endParaRPr lang="en-US" sz="1550" dirty="0"/>
+              <a:t>Use the concept to clarify workflow changes, dependencies, staffing, procurement requirements, training needs, and.</a:t>
+            </a:r>
+            <a:endParaRPr lang="en-US" sz="1320" dirty="0"/>
           </a:p>
         </p:txBody>
       </p:sp>
@@ -8898,35 +9024,41 @@
           <a:ln/>
         </p:spPr>
         <p:txBody>
-          <a:bodyPr wrap="square" lIns="635" tIns="635" rIns="635" bIns="635" rtlCol="0" anchor="t">
+          <a:bodyPr wrap="square" lIns="1016" tIns="1016" rIns="1016" bIns="1016" rtlCol="0" anchor="t">
             <a:normAutofit/>
           </a:bodyPr>
           <a:lstStyle/>
           <a:p>
+            <a:pPr indent="0" marL="0">
+              <a:buNone/>
+            </a:pPr>
             <a:r>
               <a:rPr lang="en-US" sz="2100" dirty="0">
                 <a:solidFill>
-                  <a:srgbClr val="17364A"/>
-                </a:solidFill>
-                <a:latin typeface="Aptos" pitchFamily="34" charset="0"/>
-                <a:ea typeface="Aptos" pitchFamily="34" charset="-122"/>
-                <a:cs typeface="Aptos" pitchFamily="34" charset="-120"/>
-              </a:rPr>
-              <a:t>Escalation and monitoring plan</a:t>
+                  <a:srgbClr val="003A63"/>
+                </a:solidFill>
+                <a:latin typeface="Aptos" pitchFamily="34" charset="0"/>
+                <a:ea typeface="Aptos" pitchFamily="34" charset="-122"/>
+                <a:cs typeface="Aptos" pitchFamily="34" charset="-120"/>
+              </a:rPr>
+              <a:t>• Escalation and monitoring plan</a:t>
             </a:r>
             <a:endParaRPr lang="en-US" sz="2100" dirty="0"/>
           </a:p>
           <a:p>
+            <a:pPr indent="0" marL="0">
+              <a:buNone/>
+            </a:pPr>
             <a:r>
               <a:rPr lang="en-US" sz="2100" dirty="0">
                 <a:solidFill>
-                  <a:srgbClr val="17364A"/>
-                </a:solidFill>
-                <a:latin typeface="Aptos" pitchFamily="34" charset="0"/>
-                <a:ea typeface="Aptos" pitchFamily="34" charset="-122"/>
-                <a:cs typeface="Aptos" pitchFamily="34" charset="-120"/>
-              </a:rPr>
-              <a:t>Approval or review note</a:t>
+                  <a:srgbClr val="003A63"/>
+                </a:solidFill>
+                <a:latin typeface="Aptos" pitchFamily="34" charset="0"/>
+                <a:ea typeface="Aptos" pitchFamily="34" charset="-122"/>
+                <a:cs typeface="Aptos" pitchFamily="34" charset="-120"/>
+              </a:rPr>
+              <a:t>• Approval or review note</a:t>
             </a:r>
             <a:endParaRPr lang="en-US" sz="2100" dirty="0"/>
           </a:p>
@@ -9006,17 +9138,17 @@
         </p:nvSpPr>
         <p:spPr>
           <a:xfrm>
-            <a:off x="7799832" y="1828800"/>
-            <a:ext cx="3145536" cy="685800"/>
-          </a:xfrm>
-          <a:prstGeom prst="rect">
-            <a:avLst/>
-          </a:prstGeom>
-          <a:noFill/>
-          <a:ln/>
-        </p:spPr>
-        <p:txBody>
-          <a:bodyPr wrap="square" lIns="0" tIns="0" rIns="0" bIns="0" rtlCol="0" anchor="t">
+            <a:off x="7799832" y="1801368"/>
+            <a:ext cx="3145536" cy="758952"/>
+          </a:xfrm>
+          <a:prstGeom prst="rect">
+            <a:avLst/>
+          </a:prstGeom>
+          <a:noFill/>
+          <a:ln/>
+        </p:spPr>
+        <p:txBody>
+          <a:bodyPr wrap="square" lIns="254" tIns="254" rIns="254" bIns="254" rtlCol="0" anchor="t">
             <a:normAutofit/>
           </a:bodyPr>
           <a:lstStyle/>
@@ -9025,7 +9157,7 @@
               <a:buNone/>
             </a:pPr>
             <a:r>
-              <a:rPr lang="en-US" sz="1550" dirty="0">
+              <a:rPr lang="en-US" sz="1320" dirty="0">
                 <a:solidFill>
                   <a:srgbClr val="17364A"/>
                 </a:solidFill>
@@ -9035,7 +9167,7 @@
               </a:rPr>
               <a:t>Escalation and monitoring plan</a:t>
             </a:r>
-            <a:endParaRPr lang="en-US" sz="1550" dirty="0"/>
+            <a:endParaRPr lang="en-US" sz="1320" dirty="0"/>
           </a:p>
         </p:txBody>
       </p:sp>
@@ -9123,13 +9255,16 @@
           <a:ln/>
         </p:spPr>
         <p:txBody>
-          <a:bodyPr wrap="square" lIns="254" tIns="254" rIns="254" bIns="254" rtlCol="0" anchor="t">
+          <a:bodyPr wrap="square" lIns="508" tIns="508" rIns="508" bIns="508" rtlCol="0" anchor="t">
             <a:normAutofit/>
           </a:bodyPr>
           <a:lstStyle/>
           <a:p>
-            <a:r>
-              <a:rPr lang="en-US" sz="1380" dirty="0">
+            <a:pPr indent="0" marL="0">
+              <a:buNone/>
+            </a:pPr>
+            <a:r>
+              <a:rPr lang="en-US" sz="1220" dirty="0">
                 <a:solidFill>
                   <a:srgbClr val="17364A"/>
                 </a:solidFill>
@@ -9139,11 +9274,14 @@
               </a:rPr>
               <a:t>Escalation and monitoring plan</a:t>
             </a:r>
-            <a:endParaRPr lang="en-US" sz="1380" dirty="0"/>
-          </a:p>
-          <a:p>
-            <a:r>
-              <a:rPr lang="en-US" sz="1380" dirty="0">
+            <a:endParaRPr lang="en-US" sz="1220" dirty="0"/>
+          </a:p>
+          <a:p>
+            <a:pPr indent="0" marL="0">
+              <a:buNone/>
+            </a:pPr>
+            <a:r>
+              <a:rPr lang="en-US" sz="1220" dirty="0">
                 <a:solidFill>
                   <a:srgbClr val="17364A"/>
                 </a:solidFill>
@@ -9153,7 +9291,7 @@
               </a:rPr>
               <a:t>Approval or review note</a:t>
             </a:r>
-            <a:endParaRPr lang="en-US" sz="1380" dirty="0"/>
+            <a:endParaRPr lang="en-US" sz="1220" dirty="0"/>
           </a:p>
         </p:txBody>
       </p:sp>
@@ -9231,17 +9369,17 @@
         </p:nvSpPr>
         <p:spPr>
           <a:xfrm>
-            <a:off x="7799832" y="5001768"/>
-            <a:ext cx="3145536" cy="502920"/>
-          </a:xfrm>
-          <a:prstGeom prst="rect">
-            <a:avLst/>
-          </a:prstGeom>
-          <a:noFill/>
-          <a:ln/>
-        </p:spPr>
-        <p:txBody>
-          <a:bodyPr wrap="square" lIns="0" tIns="0" rIns="0" bIns="0" rtlCol="0" anchor="t">
+            <a:off x="7799832" y="4974336"/>
+            <a:ext cx="3145536" cy="576072"/>
+          </a:xfrm>
+          <a:prstGeom prst="rect">
+            <a:avLst/>
+          </a:prstGeom>
+          <a:noFill/>
+          <a:ln/>
+        </p:spPr>
+        <p:txBody>
+          <a:bodyPr wrap="square" lIns="254" tIns="254" rIns="254" bIns="254" rtlCol="0" anchor="t">
             <a:normAutofit/>
           </a:bodyPr>
           <a:lstStyle/>
@@ -9250,7 +9388,7 @@
               <a:buNone/>
             </a:pPr>
             <a:r>
-              <a:rPr lang="en-US" sz="1550" dirty="0">
+              <a:rPr lang="en-US" sz="1320" dirty="0">
                 <a:solidFill>
                   <a:srgbClr val="17364A"/>
                 </a:solidFill>
@@ -9258,9 +9396,9 @@
                 <a:ea typeface="Aptos" pitchFamily="34" charset="-122"/>
                 <a:cs typeface="Aptos" pitchFamily="34" charset="-120"/>
               </a:rPr>
-              <a:t>Use the concept to clarify workflow changes, dependencies, staffing, procurement requirements, training needs, and implementation checkpoints.</a:t>
-            </a:r>
-            <a:endParaRPr lang="en-US" sz="1550" dirty="0"/>
+              <a:t>Use the concept to clarify workflow changes, dependencies, staffing, procurement requirements, training needs, and.</a:t>
+            </a:r>
+            <a:endParaRPr lang="en-US" sz="1320" dirty="0"/>
           </a:p>
         </p:txBody>
       </p:sp>
@@ -9561,49 +9699,58 @@
           <a:ln/>
         </p:spPr>
         <p:txBody>
-          <a:bodyPr wrap="square" lIns="635" tIns="635" rIns="635" bIns="635" rtlCol="0" anchor="t">
+          <a:bodyPr wrap="square" lIns="1016" tIns="1016" rIns="1016" bIns="1016" rtlCol="0" anchor="t">
             <a:normAutofit/>
           </a:bodyPr>
           <a:lstStyle/>
           <a:p>
+            <a:pPr indent="0" marL="0">
+              <a:buNone/>
+            </a:pPr>
             <a:r>
               <a:rPr lang="en-US" sz="2100" dirty="0">
                 <a:solidFill>
-                  <a:srgbClr val="17364A"/>
-                </a:solidFill>
-                <a:latin typeface="Aptos" pitchFamily="34" charset="0"/>
-                <a:ea typeface="Aptos" pitchFamily="34" charset="-122"/>
-                <a:cs typeface="Aptos" pitchFamily="34" charset="-120"/>
-              </a:rPr>
-              <a:t>Grant and Funding Management for AI Projects artifact</a:t>
+                  <a:srgbClr val="003A63"/>
+                </a:solidFill>
+                <a:latin typeface="Aptos" pitchFamily="34" charset="0"/>
+                <a:ea typeface="Aptos" pitchFamily="34" charset="-122"/>
+                <a:cs typeface="Aptos" pitchFamily="34" charset="-120"/>
+              </a:rPr>
+              <a:t>• Grant and Funding Management for AI Projects artifact</a:t>
             </a:r>
             <a:endParaRPr lang="en-US" sz="2100" dirty="0"/>
           </a:p>
           <a:p>
+            <a:pPr indent="0" marL="0">
+              <a:buNone/>
+            </a:pPr>
             <a:r>
               <a:rPr lang="en-US" sz="2100" dirty="0">
                 <a:solidFill>
-                  <a:srgbClr val="17364A"/>
-                </a:solidFill>
-                <a:latin typeface="Aptos" pitchFamily="34" charset="0"/>
-                <a:ea typeface="Aptos" pitchFamily="34" charset="-122"/>
-                <a:cs typeface="Aptos" pitchFamily="34" charset="-120"/>
-              </a:rPr>
-              <a:t>Role and responsibility table</a:t>
+                  <a:srgbClr val="003A63"/>
+                </a:solidFill>
+                <a:latin typeface="Aptos" pitchFamily="34" charset="0"/>
+                <a:ea typeface="Aptos" pitchFamily="34" charset="-122"/>
+                <a:cs typeface="Aptos" pitchFamily="34" charset="-120"/>
+              </a:rPr>
+              <a:t>• Role and responsibility table</a:t>
             </a:r>
             <a:endParaRPr lang="en-US" sz="2100" dirty="0"/>
           </a:p>
           <a:p>
+            <a:pPr indent="0" marL="0">
+              <a:buNone/>
+            </a:pPr>
             <a:r>
               <a:rPr lang="en-US" sz="2100" dirty="0">
                 <a:solidFill>
-                  <a:srgbClr val="17364A"/>
-                </a:solidFill>
-                <a:latin typeface="Aptos" pitchFamily="34" charset="0"/>
-                <a:ea typeface="Aptos" pitchFamily="34" charset="-122"/>
-                <a:cs typeface="Aptos" pitchFamily="34" charset="-120"/>
-              </a:rPr>
-              <a:t>Risk and safeguard summary</a:t>
+                  <a:srgbClr val="003A63"/>
+                </a:solidFill>
+                <a:latin typeface="Aptos" pitchFamily="34" charset="0"/>
+                <a:ea typeface="Aptos" pitchFamily="34" charset="-122"/>
+                <a:cs typeface="Aptos" pitchFamily="34" charset="-120"/>
+              </a:rPr>
+              <a:t>• Risk and safeguard summary</a:t>
             </a:r>
             <a:endParaRPr lang="en-US" sz="2100" dirty="0"/>
           </a:p>
@@ -9683,17 +9830,17 @@
         </p:nvSpPr>
         <p:spPr>
           <a:xfrm>
-            <a:off x="7799832" y="1828800"/>
-            <a:ext cx="3145536" cy="685800"/>
-          </a:xfrm>
-          <a:prstGeom prst="rect">
-            <a:avLst/>
-          </a:prstGeom>
-          <a:noFill/>
-          <a:ln/>
-        </p:spPr>
-        <p:txBody>
-          <a:bodyPr wrap="square" lIns="0" tIns="0" rIns="0" bIns="0" rtlCol="0" anchor="t">
+            <a:off x="7799832" y="1801368"/>
+            <a:ext cx="3145536" cy="758952"/>
+          </a:xfrm>
+          <a:prstGeom prst="rect">
+            <a:avLst/>
+          </a:prstGeom>
+          <a:noFill/>
+          <a:ln/>
+        </p:spPr>
+        <p:txBody>
+          <a:bodyPr wrap="square" lIns="254" tIns="254" rIns="254" bIns="254" rtlCol="0" anchor="t">
             <a:normAutofit/>
           </a:bodyPr>
           <a:lstStyle/>
@@ -9702,7 +9849,7 @@
               <a:buNone/>
             </a:pPr>
             <a:r>
-              <a:rPr lang="en-US" sz="1550" dirty="0">
+              <a:rPr lang="en-US" sz="1320" dirty="0">
                 <a:solidFill>
                   <a:srgbClr val="17364A"/>
                 </a:solidFill>
@@ -9712,7 +9859,7 @@
               </a:rPr>
               <a:t>Grant and Funding Management for AI Projects artifact</a:t>
             </a:r>
-            <a:endParaRPr lang="en-US" sz="1550" dirty="0"/>
+            <a:endParaRPr lang="en-US" sz="1320" dirty="0"/>
           </a:p>
         </p:txBody>
       </p:sp>
@@ -9800,13 +9947,16 @@
           <a:ln/>
         </p:spPr>
         <p:txBody>
-          <a:bodyPr wrap="square" lIns="254" tIns="254" rIns="254" bIns="254" rtlCol="0" anchor="t">
+          <a:bodyPr wrap="square" lIns="508" tIns="508" rIns="508" bIns="508" rtlCol="0" anchor="t">
             <a:normAutofit/>
           </a:bodyPr>
           <a:lstStyle/>
           <a:p>
-            <a:r>
-              <a:rPr lang="en-US" sz="1380" dirty="0">
+            <a:pPr indent="0" marL="0">
+              <a:buNone/>
+            </a:pPr>
+            <a:r>
+              <a:rPr lang="en-US" sz="1220" dirty="0">
                 <a:solidFill>
                   <a:srgbClr val="17364A"/>
                 </a:solidFill>
@@ -9816,11 +9966,14 @@
               </a:rPr>
               <a:t>Escalation and monitoring plan</a:t>
             </a:r>
-            <a:endParaRPr lang="en-US" sz="1380" dirty="0"/>
-          </a:p>
-          <a:p>
-            <a:r>
-              <a:rPr lang="en-US" sz="1380" dirty="0">
+            <a:endParaRPr lang="en-US" sz="1220" dirty="0"/>
+          </a:p>
+          <a:p>
+            <a:pPr indent="0" marL="0">
+              <a:buNone/>
+            </a:pPr>
+            <a:r>
+              <a:rPr lang="en-US" sz="1220" dirty="0">
                 <a:solidFill>
                   <a:srgbClr val="17364A"/>
                 </a:solidFill>
@@ -9830,7 +9983,7 @@
               </a:rPr>
               <a:t>Approval or review note</a:t>
             </a:r>
-            <a:endParaRPr lang="en-US" sz="1380" dirty="0"/>
+            <a:endParaRPr lang="en-US" sz="1220" dirty="0"/>
           </a:p>
         </p:txBody>
       </p:sp>
@@ -9908,17 +10061,17 @@
         </p:nvSpPr>
         <p:spPr>
           <a:xfrm>
-            <a:off x="7799832" y="5001768"/>
-            <a:ext cx="3145536" cy="502920"/>
-          </a:xfrm>
-          <a:prstGeom prst="rect">
-            <a:avLst/>
-          </a:prstGeom>
-          <a:noFill/>
-          <a:ln/>
-        </p:spPr>
-        <p:txBody>
-          <a:bodyPr wrap="square" lIns="0" tIns="0" rIns="0" bIns="0" rtlCol="0" anchor="t">
+            <a:off x="7799832" y="4974336"/>
+            <a:ext cx="3145536" cy="576072"/>
+          </a:xfrm>
+          <a:prstGeom prst="rect">
+            <a:avLst/>
+          </a:prstGeom>
+          <a:noFill/>
+          <a:ln/>
+        </p:spPr>
+        <p:txBody>
+          <a:bodyPr wrap="square" lIns="254" tIns="254" rIns="254" bIns="254" rtlCol="0" anchor="t">
             <a:normAutofit/>
           </a:bodyPr>
           <a:lstStyle/>
@@ -9927,7 +10080,7 @@
               <a:buNone/>
             </a:pPr>
             <a:r>
-              <a:rPr lang="en-US" sz="1550" dirty="0">
+              <a:rPr lang="en-US" sz="1320" dirty="0">
                 <a:solidFill>
                   <a:srgbClr val="17364A"/>
                 </a:solidFill>
@@ -9935,9 +10088,9 @@
                 <a:ea typeface="Aptos" pitchFamily="34" charset="-122"/>
                 <a:cs typeface="Aptos" pitchFamily="34" charset="-120"/>
               </a:rPr>
-              <a:t>Use the assignment to test whether you can explain the concept, apply it to a realistic public health situation, and identify what would need review before the work moves forward.</a:t>
-            </a:r>
-            <a:endParaRPr lang="en-US" sz="1550" dirty="0"/>
+              <a:t>Use the assignment to test whether you can explain the concept, apply it to a realistic public health situation, and.</a:t>
+            </a:r>
+            <a:endParaRPr lang="en-US" sz="1320" dirty="0"/>
           </a:p>
         </p:txBody>
       </p:sp>
@@ -10238,49 +10391,58 @@
           <a:ln/>
         </p:spPr>
         <p:txBody>
-          <a:bodyPr wrap="square" lIns="635" tIns="635" rIns="635" bIns="635" rtlCol="0" anchor="t">
+          <a:bodyPr wrap="square" lIns="1016" tIns="1016" rIns="1016" bIns="1016" rtlCol="0" anchor="t">
             <a:normAutofit/>
           </a:bodyPr>
           <a:lstStyle/>
           <a:p>
+            <a:pPr indent="0" marL="0">
+              <a:buNone/>
+            </a:pPr>
             <a:r>
               <a:rPr lang="en-US" sz="2100" dirty="0">
                 <a:solidFill>
-                  <a:srgbClr val="17364A"/>
-                </a:solidFill>
-                <a:latin typeface="Aptos" pitchFamily="34" charset="0"/>
-                <a:ea typeface="Aptos" pitchFamily="34" charset="-122"/>
-                <a:cs typeface="Aptos" pitchFamily="34" charset="-120"/>
-              </a:rPr>
-              <a:t>This module focuses on connecting AI projects to allowable costs, deliverables, reporting, performance measures,.</a:t>
+                  <a:srgbClr val="003A63"/>
+                </a:solidFill>
+                <a:latin typeface="Aptos" pitchFamily="34" charset="0"/>
+                <a:ea typeface="Aptos" pitchFamily="34" charset="-122"/>
+                <a:cs typeface="Aptos" pitchFamily="34" charset="-120"/>
+              </a:rPr>
+              <a:t>• This module focuses on connecting AI projects to allowable costs, deliverables, reporting,.</a:t>
             </a:r>
             <a:endParaRPr lang="en-US" sz="2100" dirty="0"/>
           </a:p>
           <a:p>
+            <a:pPr indent="0" marL="0">
+              <a:buNone/>
+            </a:pPr>
             <a:r>
               <a:rPr lang="en-US" sz="2100" dirty="0">
                 <a:solidFill>
-                  <a:srgbClr val="17364A"/>
-                </a:solidFill>
-                <a:latin typeface="Aptos" pitchFamily="34" charset="0"/>
-                <a:ea typeface="Aptos" pitchFamily="34" charset="-122"/>
-                <a:cs typeface="Aptos" pitchFamily="34" charset="-120"/>
-              </a:rPr>
-              <a:t>It is designed for public health staff who must translate responsible AI principles into repeatable decisions,.</a:t>
+                  <a:srgbClr val="003A63"/>
+                </a:solidFill>
+                <a:latin typeface="Aptos" pitchFamily="34" charset="0"/>
+                <a:ea typeface="Aptos" pitchFamily="34" charset="-122"/>
+                <a:cs typeface="Aptos" pitchFamily="34" charset="-120"/>
+              </a:rPr>
+              <a:t>• It is designed for public health staff who must translate responsible AI principles into.</a:t>
             </a:r>
             <a:endParaRPr lang="en-US" sz="2100" dirty="0"/>
           </a:p>
           <a:p>
+            <a:pPr indent="0" marL="0">
+              <a:buNone/>
+            </a:pPr>
             <a:r>
               <a:rPr lang="en-US" sz="2100" dirty="0">
                 <a:solidFill>
-                  <a:srgbClr val="17364A"/>
-                </a:solidFill>
-                <a:latin typeface="Aptos" pitchFamily="34" charset="0"/>
-                <a:ea typeface="Aptos" pitchFamily="34" charset="-122"/>
-                <a:cs typeface="Aptos" pitchFamily="34" charset="-120"/>
-              </a:rPr>
-              <a:t>The module helps learners move beyond general awareness by producing a practical artifact that can be used in.</a:t>
+                  <a:srgbClr val="003A63"/>
+                </a:solidFill>
+                <a:latin typeface="Aptos" pitchFamily="34" charset="0"/>
+                <a:ea typeface="Aptos" pitchFamily="34" charset="-122"/>
+                <a:cs typeface="Aptos" pitchFamily="34" charset="-120"/>
+              </a:rPr>
+              <a:t>• The module helps learners move beyond general awareness by producing a practical artifact that.</a:t>
             </a:r>
             <a:endParaRPr lang="en-US" sz="2100" dirty="0"/>
           </a:p>
@@ -10360,17 +10522,17 @@
         </p:nvSpPr>
         <p:spPr>
           <a:xfrm>
-            <a:off x="8074152" y="1920240"/>
-            <a:ext cx="2825496" cy="1280160"/>
-          </a:xfrm>
-          <a:prstGeom prst="rect">
-            <a:avLst/>
-          </a:prstGeom>
-          <a:noFill/>
-          <a:ln/>
-        </p:spPr>
-        <p:txBody>
-          <a:bodyPr wrap="square" lIns="0" tIns="0" rIns="0" bIns="0" rtlCol="0" anchor="t">
+            <a:off x="8074152" y="1892808"/>
+            <a:ext cx="2825496" cy="1353312"/>
+          </a:xfrm>
+          <a:prstGeom prst="rect">
+            <a:avLst/>
+          </a:prstGeom>
+          <a:noFill/>
+          <a:ln/>
+        </p:spPr>
+        <p:txBody>
+          <a:bodyPr wrap="square" lIns="254" tIns="254" rIns="254" bIns="254" rtlCol="0" anchor="t">
             <a:normAutofit/>
           </a:bodyPr>
           <a:lstStyle/>
@@ -10379,7 +10541,7 @@
               <a:buNone/>
             </a:pPr>
             <a:r>
-              <a:rPr lang="en-US" sz="1550" dirty="0">
+              <a:rPr lang="en-US" sz="1320" dirty="0">
                 <a:solidFill>
                   <a:srgbClr val="17364A"/>
                 </a:solidFill>
@@ -10387,43 +10549,9 @@
                 <a:ea typeface="Aptos" pitchFamily="34" charset="-122"/>
                 <a:cs typeface="Aptos" pitchFamily="34" charset="-120"/>
               </a:rPr>
-              <a:t>Level: intermediate/practitioner</a:t>
-            </a:r>
-            <a:endParaRPr lang="en-US" sz="1550" dirty="0"/>
-          </a:p>
-          <a:p>
-            <a:pPr indent="0" marL="0">
-              <a:buNone/>
-            </a:pPr>
-            <a:r>
-              <a:rPr lang="en-US" sz="1550" dirty="0">
-                <a:solidFill>
-                  <a:srgbClr val="17364A"/>
-                </a:solidFill>
-                <a:latin typeface="Aptos" pitchFamily="34" charset="0"/>
-                <a:ea typeface="Aptos" pitchFamily="34" charset="-122"/>
-                <a:cs typeface="Aptos" pitchFamily="34" charset="-120"/>
-              </a:rPr>
-              <a:t>Primary track: Program Management Role-Based Track</a:t>
-            </a:r>
-            <a:endParaRPr lang="en-US" sz="1550" dirty="0"/>
-          </a:p>
-          <a:p>
-            <a:pPr indent="0" marL="0">
-              <a:buNone/>
-            </a:pPr>
-            <a:r>
-              <a:rPr lang="en-US" sz="1550" dirty="0">
-                <a:solidFill>
-                  <a:srgbClr val="17364A"/>
-                </a:solidFill>
-                <a:latin typeface="Aptos" pitchFamily="34" charset="0"/>
-                <a:ea typeface="Aptos" pitchFamily="34" charset="-122"/>
-                <a:cs typeface="Aptos" pitchFamily="34" charset="-120"/>
-              </a:rPr>
-              <a:t>Appears in tracks: program-management, public-health-executive-leadership, policy, governance-security</a:t>
-            </a:r>
-            <a:endParaRPr lang="en-US" sz="1550" dirty="0"/>
+              <a:t>Level: intermediate/practitioner Primary track: Program Management Role-Based Track Appears in tracks:.</a:t>
+            </a:r>
+            <a:endParaRPr lang="en-US" sz="1320" dirty="0"/>
           </a:p>
         </p:txBody>
       </p:sp>
@@ -10511,13 +10639,16 @@
           <a:ln/>
         </p:spPr>
         <p:txBody>
-          <a:bodyPr wrap="square" lIns="254" tIns="254" rIns="254" bIns="254" rtlCol="0" anchor="t">
+          <a:bodyPr wrap="square" lIns="508" tIns="508" rIns="508" bIns="508" rtlCol="0" anchor="t">
             <a:normAutofit/>
           </a:bodyPr>
           <a:lstStyle/>
           <a:p>
-            <a:r>
-              <a:rPr lang="en-US" sz="1380" dirty="0">
+            <a:pPr indent="0" marL="0">
+              <a:buNone/>
+            </a:pPr>
+            <a:r>
+              <a:rPr lang="en-US" sz="1220" dirty="0">
                 <a:solidFill>
                   <a:srgbClr val="17364A"/>
                 </a:solidFill>
@@ -10527,11 +10658,14 @@
               </a:rPr>
               <a:t>Read the module for shared vocabulary and context.</a:t>
             </a:r>
-            <a:endParaRPr lang="en-US" sz="1380" dirty="0"/>
-          </a:p>
-          <a:p>
-            <a:r>
-              <a:rPr lang="en-US" sz="1380" dirty="0">
+            <a:endParaRPr lang="en-US" sz="1220" dirty="0"/>
+          </a:p>
+          <a:p>
+            <a:pPr indent="0" marL="0">
+              <a:buNone/>
+            </a:pPr>
+            <a:r>
+              <a:rPr lang="en-US" sz="1220" dirty="0">
                 <a:solidFill>
                   <a:srgbClr val="17364A"/>
                 </a:solidFill>
@@ -10541,11 +10675,14 @@
               </a:rPr>
               <a:t>Complete the practical exercise to apply the concept.</a:t>
             </a:r>
-            <a:endParaRPr lang="en-US" sz="1380" dirty="0"/>
-          </a:p>
-          <a:p>
-            <a:r>
-              <a:rPr lang="en-US" sz="1380" dirty="0">
+            <a:endParaRPr lang="en-US" sz="1220" dirty="0"/>
+          </a:p>
+          <a:p>
+            <a:pPr indent="0" marL="0">
+              <a:buNone/>
+            </a:pPr>
+            <a:r>
+              <a:rPr lang="en-US" sz="1220" dirty="0">
                 <a:solidFill>
                   <a:srgbClr val="17364A"/>
                 </a:solidFill>
@@ -10555,7 +10692,7 @@
               </a:rPr>
               <a:t>Use the notes and references for deeper review.</a:t>
             </a:r>
-            <a:endParaRPr lang="en-US" sz="1380" dirty="0"/>
+            <a:endParaRPr lang="en-US" sz="1220" dirty="0"/>
           </a:p>
         </p:txBody>
       </p:sp>
@@ -10856,49 +10993,58 @@
           <a:ln/>
         </p:spPr>
         <p:txBody>
-          <a:bodyPr wrap="square" lIns="635" tIns="635" rIns="635" bIns="635" rtlCol="0" anchor="t">
+          <a:bodyPr wrap="square" lIns="1016" tIns="1016" rIns="1016" bIns="1016" rtlCol="0" anchor="t">
             <a:normAutofit/>
           </a:bodyPr>
           <a:lstStyle/>
           <a:p>
+            <a:pPr indent="0" marL="0">
+              <a:buNone/>
+            </a:pPr>
             <a:r>
               <a:rPr lang="en-US" sz="2100" dirty="0">
                 <a:solidFill>
-                  <a:srgbClr val="17364A"/>
-                </a:solidFill>
-                <a:latin typeface="Aptos" pitchFamily="34" charset="0"/>
-                <a:ea typeface="Aptos" pitchFamily="34" charset="-122"/>
-                <a:cs typeface="Aptos" pitchFamily="34" charset="-120"/>
-              </a:rPr>
-              <a:t>1. What is the strongest evidence that grant and funding management for ai projects has been applied.</a:t>
+                  <a:srgbClr val="003A63"/>
+                </a:solidFill>
+                <a:latin typeface="Aptos" pitchFamily="34" charset="0"/>
+                <a:ea typeface="Aptos" pitchFamily="34" charset="-122"/>
+                <a:cs typeface="Aptos" pitchFamily="34" charset="-120"/>
+              </a:rPr>
+              <a:t>• 1. What is the strongest evidence that grant and funding management for ai projects has been.</a:t>
             </a:r>
             <a:endParaRPr lang="en-US" sz="2100" dirty="0"/>
           </a:p>
           <a:p>
+            <a:pPr indent="0" marL="0">
+              <a:buNone/>
+            </a:pPr>
             <a:r>
               <a:rPr lang="en-US" sz="2100" dirty="0">
                 <a:solidFill>
-                  <a:srgbClr val="17364A"/>
-                </a:solidFill>
-                <a:latin typeface="Aptos" pitchFamily="34" charset="0"/>
-                <a:ea typeface="Aptos" pitchFamily="34" charset="-122"/>
-                <a:cs typeface="Aptos" pitchFamily="34" charset="-120"/>
-              </a:rPr>
-              <a:t>2. What is the best reason to assign an accountability owner?</a:t>
+                  <a:srgbClr val="003A63"/>
+                </a:solidFill>
+                <a:latin typeface="Aptos" pitchFamily="34" charset="0"/>
+                <a:ea typeface="Aptos" pitchFamily="34" charset="-122"/>
+                <a:cs typeface="Aptos" pitchFamily="34" charset="-120"/>
+              </a:rPr>
+              <a:t>• 2. What is the best reason to assign an accountability owner?</a:t>
             </a:r>
             <a:endParaRPr lang="en-US" sz="2100" dirty="0"/>
           </a:p>
           <a:p>
+            <a:pPr indent="0" marL="0">
+              <a:buNone/>
+            </a:pPr>
             <a:r>
               <a:rPr lang="en-US" sz="2100" dirty="0">
                 <a:solidFill>
-                  <a:srgbClr val="17364A"/>
-                </a:solidFill>
-                <a:latin typeface="Aptos" pitchFamily="34" charset="0"/>
-                <a:ea typeface="Aptos" pitchFamily="34" charset="-122"/>
-                <a:cs typeface="Aptos" pitchFamily="34" charset="-120"/>
-              </a:rPr>
-              <a:t>3. When should an AI-supported workflow be escalated for review?</a:t>
+                  <a:srgbClr val="003A63"/>
+                </a:solidFill>
+                <a:latin typeface="Aptos" pitchFamily="34" charset="0"/>
+                <a:ea typeface="Aptos" pitchFamily="34" charset="-122"/>
+                <a:cs typeface="Aptos" pitchFamily="34" charset="-120"/>
+              </a:rPr>
+              <a:t>• 3. When should an AI-supported workflow be escalated for review?</a:t>
             </a:r>
             <a:endParaRPr lang="en-US" sz="2100" dirty="0"/>
           </a:p>
@@ -10978,17 +11124,17 @@
         </p:nvSpPr>
         <p:spPr>
           <a:xfrm>
-            <a:off x="7799832" y="1828800"/>
-            <a:ext cx="3145536" cy="685800"/>
-          </a:xfrm>
-          <a:prstGeom prst="rect">
-            <a:avLst/>
-          </a:prstGeom>
-          <a:noFill/>
-          <a:ln/>
-        </p:spPr>
-        <p:txBody>
-          <a:bodyPr wrap="square" lIns="0" tIns="0" rIns="0" bIns="0" rtlCol="0" anchor="t">
+            <a:off x="7799832" y="1801368"/>
+            <a:ext cx="3145536" cy="758952"/>
+          </a:xfrm>
+          <a:prstGeom prst="rect">
+            <a:avLst/>
+          </a:prstGeom>
+          <a:noFill/>
+          <a:ln/>
+        </p:spPr>
+        <p:txBody>
+          <a:bodyPr wrap="square" lIns="254" tIns="254" rIns="254" bIns="254" rtlCol="0" anchor="t">
             <a:normAutofit/>
           </a:bodyPr>
           <a:lstStyle/>
@@ -10997,7 +11143,7 @@
               <a:buNone/>
             </a:pPr>
             <a:r>
-              <a:rPr lang="en-US" sz="1550" dirty="0">
+              <a:rPr lang="en-US" sz="1320" dirty="0">
                 <a:solidFill>
                   <a:srgbClr val="17364A"/>
                 </a:solidFill>
@@ -11007,7 +11153,7 @@
               </a:rPr>
               <a:t>1. What is the strongest evidence that grant and funding management for ai projects has been applied.</a:t>
             </a:r>
-            <a:endParaRPr lang="en-US" sz="1550" dirty="0"/>
+            <a:endParaRPr lang="en-US" sz="1320" dirty="0"/>
           </a:p>
         </p:txBody>
       </p:sp>
@@ -11095,13 +11241,16 @@
           <a:ln/>
         </p:spPr>
         <p:txBody>
-          <a:bodyPr wrap="square" lIns="254" tIns="254" rIns="254" bIns="254" rtlCol="0" anchor="t">
+          <a:bodyPr wrap="square" lIns="508" tIns="508" rIns="508" bIns="508" rtlCol="0" anchor="t">
             <a:normAutofit/>
           </a:bodyPr>
           <a:lstStyle/>
           <a:p>
-            <a:r>
-              <a:rPr lang="en-US" sz="1380" dirty="0">
+            <a:pPr indent="0" marL="0">
+              <a:buNone/>
+            </a:pPr>
+            <a:r>
+              <a:rPr lang="en-US" sz="1220" dirty="0">
                 <a:solidFill>
                   <a:srgbClr val="17364A"/>
                 </a:solidFill>
@@ -11111,11 +11260,14 @@
               </a:rPr>
               <a:t>1.</a:t>
             </a:r>
-            <a:endParaRPr lang="en-US" sz="1380" dirty="0"/>
-          </a:p>
-          <a:p>
-            <a:r>
-              <a:rPr lang="en-US" sz="1380" dirty="0">
+            <a:endParaRPr lang="en-US" sz="1220" dirty="0"/>
+          </a:p>
+          <a:p>
+            <a:pPr indent="0" marL="0">
+              <a:buNone/>
+            </a:pPr>
+            <a:r>
+              <a:rPr lang="en-US" sz="1220" dirty="0">
                 <a:solidFill>
                   <a:srgbClr val="17364A"/>
                 </a:solidFill>
@@ -11123,13 +11275,16 @@
                 <a:ea typeface="Aptos" pitchFamily="34" charset="-122"/>
                 <a:cs typeface="Aptos" pitchFamily="34" charset="-120"/>
               </a:rPr>
-              <a:t>What is the strongest evidence that grant and funding management for ai projects has been.</a:t>
-            </a:r>
-            <a:endParaRPr lang="en-US" sz="1380" dirty="0"/>
-          </a:p>
-          <a:p>
-            <a:r>
-              <a:rPr lang="en-US" sz="1380" dirty="0">
+              <a:t>What is the strongest evidence that grant and funding management.</a:t>
+            </a:r>
+            <a:endParaRPr lang="en-US" sz="1220" dirty="0"/>
+          </a:p>
+          <a:p>
+            <a:pPr indent="0" marL="0">
+              <a:buNone/>
+            </a:pPr>
+            <a:r>
+              <a:rPr lang="en-US" sz="1220" dirty="0">
                 <a:solidFill>
                   <a:srgbClr val="17364A"/>
                 </a:solidFill>
@@ -11139,7 +11294,7 @@
               </a:rPr>
               <a:t>2.</a:t>
             </a:r>
-            <a:endParaRPr lang="en-US" sz="1380" dirty="0"/>
+            <a:endParaRPr lang="en-US" sz="1220" dirty="0"/>
           </a:p>
         </p:txBody>
       </p:sp>
@@ -11217,17 +11372,17 @@
         </p:nvSpPr>
         <p:spPr>
           <a:xfrm>
-            <a:off x="7799832" y="5001768"/>
-            <a:ext cx="3145536" cy="502920"/>
-          </a:xfrm>
-          <a:prstGeom prst="rect">
-            <a:avLst/>
-          </a:prstGeom>
-          <a:noFill/>
-          <a:ln/>
-        </p:spPr>
-        <p:txBody>
-          <a:bodyPr wrap="square" lIns="0" tIns="0" rIns="0" bIns="0" rtlCol="0" anchor="t">
+            <a:off x="7799832" y="4974336"/>
+            <a:ext cx="3145536" cy="576072"/>
+          </a:xfrm>
+          <a:prstGeom prst="rect">
+            <a:avLst/>
+          </a:prstGeom>
+          <a:noFill/>
+          <a:ln/>
+        </p:spPr>
+        <p:txBody>
+          <a:bodyPr wrap="square" lIns="254" tIns="254" rIns="254" bIns="254" rtlCol="0" anchor="t">
             <a:normAutofit/>
           </a:bodyPr>
           <a:lstStyle/>
@@ -11236,7 +11391,7 @@
               <a:buNone/>
             </a:pPr>
             <a:r>
-              <a:rPr lang="en-US" sz="1550" dirty="0">
+              <a:rPr lang="en-US" sz="1320" dirty="0">
                 <a:solidFill>
                   <a:srgbClr val="17364A"/>
                 </a:solidFill>
@@ -11244,9 +11399,9 @@
                 <a:ea typeface="Aptos" pitchFamily="34" charset="-122"/>
                 <a:cs typeface="Aptos" pitchFamily="34" charset="-120"/>
               </a:rPr>
-              <a:t>Use the assignment to test whether you can explain the concept, apply it to a realistic public health situation, and identify what would need review before the work moves forward.</a:t>
-            </a:r>
-            <a:endParaRPr lang="en-US" sz="1550" dirty="0"/>
+              <a:t>Use the assignment to test whether you can explain the concept, apply it to a realistic public health situation, and.</a:t>
+            </a:r>
+            <a:endParaRPr lang="en-US" sz="1320" dirty="0"/>
           </a:p>
         </p:txBody>
       </p:sp>
@@ -11547,49 +11702,58 @@
           <a:ln/>
         </p:spPr>
         <p:txBody>
-          <a:bodyPr wrap="square" lIns="635" tIns="635" rIns="635" bIns="635" rtlCol="0" anchor="t">
+          <a:bodyPr wrap="square" lIns="1016" tIns="1016" rIns="1016" bIns="1016" rtlCol="0" anchor="t">
             <a:normAutofit/>
           </a:bodyPr>
           <a:lstStyle/>
           <a:p>
+            <a:pPr indent="0" marL="0">
+              <a:buNone/>
+            </a:pPr>
             <a:r>
               <a:rPr lang="en-US" sz="2100" dirty="0">
                 <a:solidFill>
-                  <a:srgbClr val="17364A"/>
-                </a:solidFill>
-                <a:latin typeface="Aptos" pitchFamily="34" charset="0"/>
-                <a:ea typeface="Aptos" pitchFamily="34" charset="-122"/>
-                <a:cs typeface="Aptos" pitchFamily="34" charset="-120"/>
-              </a:rPr>
-              <a:t>CDC Public Health Data Strategy and Data Modernization resources:.</a:t>
+                  <a:srgbClr val="003A63"/>
+                </a:solidFill>
+                <a:latin typeface="Aptos" pitchFamily="34" charset="0"/>
+                <a:ea typeface="Aptos" pitchFamily="34" charset="-122"/>
+                <a:cs typeface="Aptos" pitchFamily="34" charset="-120"/>
+              </a:rPr>
+              <a:t>• CDC Public Health Data Strategy and Data Modernization resources:.</a:t>
             </a:r>
             <a:endParaRPr lang="en-US" sz="2100" dirty="0"/>
           </a:p>
           <a:p>
+            <a:pPr indent="0" marL="0">
+              <a:buNone/>
+            </a:pPr>
             <a:r>
               <a:rPr lang="en-US" sz="2100" dirty="0">
                 <a:solidFill>
-                  <a:srgbClr val="17364A"/>
-                </a:solidFill>
-                <a:latin typeface="Aptos" pitchFamily="34" charset="0"/>
-                <a:ea typeface="Aptos" pitchFamily="34" charset="-122"/>
-                <a:cs typeface="Aptos" pitchFamily="34" charset="-120"/>
-              </a:rPr>
-              <a:t>NIST Artificial Intelligence Risk Management Framework and NIST Generative AI Profile:.</a:t>
+                  <a:srgbClr val="003A63"/>
+                </a:solidFill>
+                <a:latin typeface="Aptos" pitchFamily="34" charset="0"/>
+                <a:ea typeface="Aptos" pitchFamily="34" charset="-122"/>
+                <a:cs typeface="Aptos" pitchFamily="34" charset="-120"/>
+              </a:rPr>
+              <a:t>• NIST Artificial Intelligence Risk Management Framework and NIST Generative AI Profile:.</a:t>
             </a:r>
             <a:endParaRPr lang="en-US" sz="2100" dirty="0"/>
           </a:p>
           <a:p>
+            <a:pPr indent="0" marL="0">
+              <a:buNone/>
+            </a:pPr>
             <a:r>
               <a:rPr lang="en-US" sz="2100" dirty="0">
                 <a:solidFill>
-                  <a:srgbClr val="17364A"/>
-                </a:solidFill>
-                <a:latin typeface="Aptos" pitchFamily="34" charset="0"/>
-                <a:ea typeface="Aptos" pitchFamily="34" charset="-122"/>
-                <a:cs typeface="Aptos" pitchFamily="34" charset="-120"/>
-              </a:rPr>
-              <a:t>WHO Ethics and Governance of Artificial Intelligence for Health guidance:.</a:t>
+                  <a:srgbClr val="003A63"/>
+                </a:solidFill>
+                <a:latin typeface="Aptos" pitchFamily="34" charset="0"/>
+                <a:ea typeface="Aptos" pitchFamily="34" charset="-122"/>
+                <a:cs typeface="Aptos" pitchFamily="34" charset="-120"/>
+              </a:rPr>
+              <a:t>• WHO Ethics and Governance of Artificial Intelligence for Health guidance:.</a:t>
             </a:r>
             <a:endParaRPr lang="en-US" sz="2100" dirty="0"/>
           </a:p>
@@ -11669,17 +11833,17 @@
         </p:nvSpPr>
         <p:spPr>
           <a:xfrm>
-            <a:off x="7799832" y="1828800"/>
-            <a:ext cx="3145536" cy="685800"/>
-          </a:xfrm>
-          <a:prstGeom prst="rect">
-            <a:avLst/>
-          </a:prstGeom>
-          <a:noFill/>
-          <a:ln/>
-        </p:spPr>
-        <p:txBody>
-          <a:bodyPr wrap="square" lIns="0" tIns="0" rIns="0" bIns="0" rtlCol="0" anchor="t">
+            <a:off x="7799832" y="1801368"/>
+            <a:ext cx="3145536" cy="758952"/>
+          </a:xfrm>
+          <a:prstGeom prst="rect">
+            <a:avLst/>
+          </a:prstGeom>
+          <a:noFill/>
+          <a:ln/>
+        </p:spPr>
+        <p:txBody>
+          <a:bodyPr wrap="square" lIns="254" tIns="254" rIns="254" bIns="254" rtlCol="0" anchor="t">
             <a:normAutofit/>
           </a:bodyPr>
           <a:lstStyle/>
@@ -11688,7 +11852,7 @@
               <a:buNone/>
             </a:pPr>
             <a:r>
-              <a:rPr lang="en-US" sz="1550" dirty="0">
+              <a:rPr lang="en-US" sz="1320" dirty="0">
                 <a:solidFill>
                   <a:srgbClr val="17364A"/>
                 </a:solidFill>
@@ -11698,7 +11862,7 @@
               </a:rPr>
               <a:t>CDC Public Health Data Strategy and Data Modernization resources:.</a:t>
             </a:r>
-            <a:endParaRPr lang="en-US" sz="1550" dirty="0"/>
+            <a:endParaRPr lang="en-US" sz="1320" dirty="0"/>
           </a:p>
         </p:txBody>
       </p:sp>
@@ -11786,13 +11950,16 @@
           <a:ln/>
         </p:spPr>
         <p:txBody>
-          <a:bodyPr wrap="square" lIns="254" tIns="254" rIns="254" bIns="254" rtlCol="0" anchor="t">
+          <a:bodyPr wrap="square" lIns="508" tIns="508" rIns="508" bIns="508" rtlCol="0" anchor="t">
             <a:normAutofit/>
           </a:bodyPr>
           <a:lstStyle/>
           <a:p>
-            <a:r>
-              <a:rPr lang="en-US" sz="1380" dirty="0">
+            <a:pPr indent="0" marL="0">
+              <a:buNone/>
+            </a:pPr>
+            <a:r>
+              <a:rPr lang="en-US" sz="1220" dirty="0">
                 <a:solidFill>
                   <a:srgbClr val="17364A"/>
                 </a:solidFill>
@@ -11802,11 +11969,14 @@
               </a:rPr>
               <a:t>OWASP Top 10 for Large Language Model Applications:.</a:t>
             </a:r>
-            <a:endParaRPr lang="en-US" sz="1380" dirty="0"/>
-          </a:p>
-          <a:p>
-            <a:r>
-              <a:rPr lang="en-US" sz="1380" dirty="0">
+            <a:endParaRPr lang="en-US" sz="1220" dirty="0"/>
+          </a:p>
+          <a:p>
+            <a:pPr indent="0" marL="0">
+              <a:buNone/>
+            </a:pPr>
+            <a:r>
+              <a:rPr lang="en-US" sz="1220" dirty="0">
                 <a:solidFill>
                   <a:srgbClr val="17364A"/>
                 </a:solidFill>
@@ -11814,9 +11984,9 @@
                 <a:ea typeface="Aptos" pitchFamily="34" charset="-122"/>
                 <a:cs typeface="Aptos" pitchFamily="34" charset="-120"/>
               </a:rPr>
-              <a:t>ONC health IT, interoperability, and information blocking resources:.</a:t>
-            </a:r>
-            <a:endParaRPr lang="en-US" sz="1380" dirty="0"/>
+              <a:t>ONC health IT, interoperability, and information blocking.</a:t>
+            </a:r>
+            <a:endParaRPr lang="en-US" sz="1220" dirty="0"/>
           </a:p>
         </p:txBody>
       </p:sp>
@@ -11894,17 +12064,17 @@
         </p:nvSpPr>
         <p:spPr>
           <a:xfrm>
-            <a:off x="7799832" y="5001768"/>
-            <a:ext cx="3145536" cy="502920"/>
-          </a:xfrm>
-          <a:prstGeom prst="rect">
-            <a:avLst/>
-          </a:prstGeom>
-          <a:noFill/>
-          <a:ln/>
-        </p:spPr>
-        <p:txBody>
-          <a:bodyPr wrap="square" lIns="0" tIns="0" rIns="0" bIns="0" rtlCol="0" anchor="t">
+            <a:off x="7799832" y="4974336"/>
+            <a:ext cx="3145536" cy="576072"/>
+          </a:xfrm>
+          <a:prstGeom prst="rect">
+            <a:avLst/>
+          </a:prstGeom>
+          <a:noFill/>
+          <a:ln/>
+        </p:spPr>
+        <p:txBody>
+          <a:bodyPr wrap="square" lIns="254" tIns="254" rIns="254" bIns="254" rtlCol="0" anchor="t">
             <a:normAutofit/>
           </a:bodyPr>
           <a:lstStyle/>
@@ -11913,7 +12083,7 @@
               <a:buNone/>
             </a:pPr>
             <a:r>
-              <a:rPr lang="en-US" sz="1550" dirty="0">
+              <a:rPr lang="en-US" sz="1320" dirty="0">
                 <a:solidFill>
                   <a:srgbClr val="17364A"/>
                 </a:solidFill>
@@ -11921,9 +12091,9 @@
                 <a:ea typeface="Aptos" pitchFamily="34" charset="-122"/>
                 <a:cs typeface="Aptos" pitchFamily="34" charset="-120"/>
               </a:rPr>
-              <a:t>Use the concept to clarify workflow changes, dependencies, staffing, procurement requirements, training needs, and implementation checkpoints.</a:t>
-            </a:r>
-            <a:endParaRPr lang="en-US" sz="1550" dirty="0"/>
+              <a:t>Use the concept to clarify workflow changes, dependencies, staffing, procurement requirements, training needs, and.</a:t>
+            </a:r>
+            <a:endParaRPr lang="en-US" sz="1320" dirty="0"/>
           </a:p>
         </p:txBody>
       </p:sp>
@@ -12224,49 +12394,58 @@
           <a:ln/>
         </p:spPr>
         <p:txBody>
-          <a:bodyPr wrap="square" lIns="635" tIns="635" rIns="635" bIns="635" rtlCol="0" anchor="t">
+          <a:bodyPr wrap="square" lIns="1016" tIns="1016" rIns="1016" bIns="1016" rtlCol="0" anchor="t">
             <a:normAutofit/>
           </a:bodyPr>
           <a:lstStyle/>
           <a:p>
+            <a:pPr indent="0" marL="0">
+              <a:buNone/>
+            </a:pPr>
             <a:r>
               <a:rPr lang="en-US" sz="2100" dirty="0">
                 <a:solidFill>
-                  <a:srgbClr val="17364A"/>
-                </a:solidFill>
-                <a:latin typeface="Aptos" pitchFamily="34" charset="0"/>
-                <a:ea typeface="Aptos" pitchFamily="34" charset="-122"/>
-                <a:cs typeface="Aptos" pitchFamily="34" charset="-120"/>
-              </a:rPr>
-              <a:t>Agency policies for privacy, public records, cybersecurity, procurement, civil rights, accessibility,.</a:t>
+                  <a:srgbClr val="003A63"/>
+                </a:solidFill>
+                <a:latin typeface="Aptos" pitchFamily="34" charset="0"/>
+                <a:ea typeface="Aptos" pitchFamily="34" charset="-122"/>
+                <a:cs typeface="Aptos" pitchFamily="34" charset="-120"/>
+              </a:rPr>
+              <a:t>• Agency policies for privacy, public records, cybersecurity, procurement, civil rights,.</a:t>
             </a:r>
             <a:endParaRPr lang="en-US" sz="2100" dirty="0"/>
           </a:p>
           <a:p>
+            <a:pPr indent="0" marL="0">
+              <a:buNone/>
+            </a:pPr>
             <a:r>
               <a:rPr lang="en-US" sz="2100" dirty="0">
                 <a:solidFill>
-                  <a:srgbClr val="17364A"/>
-                </a:solidFill>
-                <a:latin typeface="Aptos" pitchFamily="34" charset="0"/>
-                <a:ea typeface="Aptos" pitchFamily="34" charset="-122"/>
-                <a:cs typeface="Aptos" pitchFamily="34" charset="-120"/>
-              </a:rPr>
-              <a:t>Appendix. Common Source Base Used Across Modules</a:t>
+                  <a:srgbClr val="003A63"/>
+                </a:solidFill>
+                <a:latin typeface="Aptos" pitchFamily="34" charset="0"/>
+                <a:ea typeface="Aptos" pitchFamily="34" charset="-122"/>
+                <a:cs typeface="Aptos" pitchFamily="34" charset="-120"/>
+              </a:rPr>
+              <a:t>• Appendix. Common Source Base Used Across Modules</a:t>
             </a:r>
             <a:endParaRPr lang="en-US" sz="2100" dirty="0"/>
           </a:p>
           <a:p>
+            <a:pPr indent="0" marL="0">
+              <a:buNone/>
+            </a:pPr>
             <a:r>
               <a:rPr lang="en-US" sz="2100" dirty="0">
                 <a:solidFill>
-                  <a:srgbClr val="17364A"/>
-                </a:solidFill>
-                <a:latin typeface="Aptos" pitchFamily="34" charset="0"/>
-                <a:ea typeface="Aptos" pitchFamily="34" charset="-122"/>
-                <a:cs typeface="Aptos" pitchFamily="34" charset="-120"/>
-              </a:rPr>
-              <a:t>CDC Public Health Data Strategy and CDC Data Modernization resources.:.</a:t>
+                  <a:srgbClr val="003A63"/>
+                </a:solidFill>
+                <a:latin typeface="Aptos" pitchFamily="34" charset="0"/>
+                <a:ea typeface="Aptos" pitchFamily="34" charset="-122"/>
+                <a:cs typeface="Aptos" pitchFamily="34" charset="-120"/>
+              </a:rPr>
+              <a:t>• CDC Public Health Data Strategy and CDC Data Modernization resources.:.</a:t>
             </a:r>
             <a:endParaRPr lang="en-US" sz="2100" dirty="0"/>
           </a:p>
@@ -12346,17 +12525,17 @@
         </p:nvSpPr>
         <p:spPr>
           <a:xfrm>
-            <a:off x="7799832" y="1828800"/>
-            <a:ext cx="3145536" cy="685800"/>
-          </a:xfrm>
-          <a:prstGeom prst="rect">
-            <a:avLst/>
-          </a:prstGeom>
-          <a:noFill/>
-          <a:ln/>
-        </p:spPr>
-        <p:txBody>
-          <a:bodyPr wrap="square" lIns="0" tIns="0" rIns="0" bIns="0" rtlCol="0" anchor="t">
+            <a:off x="7799832" y="1801368"/>
+            <a:ext cx="3145536" cy="758952"/>
+          </a:xfrm>
+          <a:prstGeom prst="rect">
+            <a:avLst/>
+          </a:prstGeom>
+          <a:noFill/>
+          <a:ln/>
+        </p:spPr>
+        <p:txBody>
+          <a:bodyPr wrap="square" lIns="254" tIns="254" rIns="254" bIns="254" rtlCol="0" anchor="t">
             <a:normAutofit/>
           </a:bodyPr>
           <a:lstStyle/>
@@ -12365,7 +12544,7 @@
               <a:buNone/>
             </a:pPr>
             <a:r>
-              <a:rPr lang="en-US" sz="1550" dirty="0">
+              <a:rPr lang="en-US" sz="1320" dirty="0">
                 <a:solidFill>
                   <a:srgbClr val="17364A"/>
                 </a:solidFill>
@@ -12375,7 +12554,7 @@
               </a:rPr>
               <a:t>Agency policies for privacy, public records, cybersecurity, procurement, civil rights, accessibility,.</a:t>
             </a:r>
-            <a:endParaRPr lang="en-US" sz="1550" dirty="0"/>
+            <a:endParaRPr lang="en-US" sz="1320" dirty="0"/>
           </a:p>
         </p:txBody>
       </p:sp>
@@ -12463,13 +12642,16 @@
           <a:ln/>
         </p:spPr>
         <p:txBody>
-          <a:bodyPr wrap="square" lIns="254" tIns="254" rIns="254" bIns="254" rtlCol="0" anchor="t">
+          <a:bodyPr wrap="square" lIns="508" tIns="508" rIns="508" bIns="508" rtlCol="0" anchor="t">
             <a:normAutofit/>
           </a:bodyPr>
           <a:lstStyle/>
           <a:p>
-            <a:r>
-              <a:rPr lang="en-US" sz="1380" dirty="0">
+            <a:pPr indent="0" marL="0">
+              <a:buNone/>
+            </a:pPr>
+            <a:r>
+              <a:rPr lang="en-US" sz="1220" dirty="0">
                 <a:solidFill>
                   <a:srgbClr val="17364A"/>
                 </a:solidFill>
@@ -12477,13 +12659,16 @@
                 <a:ea typeface="Aptos" pitchFamily="34" charset="-122"/>
                 <a:cs typeface="Aptos" pitchFamily="34" charset="-120"/>
               </a:rPr>
-              <a:t>Agency policies for privacy, public records, cybersecurity, procurement, civil rights,.</a:t>
-            </a:r>
-            <a:endParaRPr lang="en-US" sz="1380" dirty="0"/>
-          </a:p>
-          <a:p>
-            <a:r>
-              <a:rPr lang="en-US" sz="1380" dirty="0">
+              <a:t>Agency policies for privacy, public records, cybersecurity,.</a:t>
+            </a:r>
+            <a:endParaRPr lang="en-US" sz="1220" dirty="0"/>
+          </a:p>
+          <a:p>
+            <a:pPr indent="0" marL="0">
+              <a:buNone/>
+            </a:pPr>
+            <a:r>
+              <a:rPr lang="en-US" sz="1220" dirty="0">
                 <a:solidFill>
                   <a:srgbClr val="17364A"/>
                 </a:solidFill>
@@ -12493,11 +12678,14 @@
               </a:rPr>
               <a:t>Appendix.</a:t>
             </a:r>
-            <a:endParaRPr lang="en-US" sz="1380" dirty="0"/>
-          </a:p>
-          <a:p>
-            <a:r>
-              <a:rPr lang="en-US" sz="1380" dirty="0">
+            <a:endParaRPr lang="en-US" sz="1220" dirty="0"/>
+          </a:p>
+          <a:p>
+            <a:pPr indent="0" marL="0">
+              <a:buNone/>
+            </a:pPr>
+            <a:r>
+              <a:rPr lang="en-US" sz="1220" dirty="0">
                 <a:solidFill>
                   <a:srgbClr val="17364A"/>
                 </a:solidFill>
@@ -12507,7 +12695,7 @@
               </a:rPr>
               <a:t>Common Source Base Used Across Modules</a:t>
             </a:r>
-            <a:endParaRPr lang="en-US" sz="1380" dirty="0"/>
+            <a:endParaRPr lang="en-US" sz="1220" dirty="0"/>
           </a:p>
         </p:txBody>
       </p:sp>
@@ -12585,17 +12773,17 @@
         </p:nvSpPr>
         <p:spPr>
           <a:xfrm>
-            <a:off x="7799832" y="5001768"/>
-            <a:ext cx="3145536" cy="502920"/>
-          </a:xfrm>
-          <a:prstGeom prst="rect">
-            <a:avLst/>
-          </a:prstGeom>
-          <a:noFill/>
-          <a:ln/>
-        </p:spPr>
-        <p:txBody>
-          <a:bodyPr wrap="square" lIns="0" tIns="0" rIns="0" bIns="0" rtlCol="0" anchor="t">
+            <a:off x="7799832" y="4974336"/>
+            <a:ext cx="3145536" cy="576072"/>
+          </a:xfrm>
+          <a:prstGeom prst="rect">
+            <a:avLst/>
+          </a:prstGeom>
+          <a:noFill/>
+          <a:ln/>
+        </p:spPr>
+        <p:txBody>
+          <a:bodyPr wrap="square" lIns="254" tIns="254" rIns="254" bIns="254" rtlCol="0" anchor="t">
             <a:normAutofit/>
           </a:bodyPr>
           <a:lstStyle/>
@@ -12604,7 +12792,7 @@
               <a:buNone/>
             </a:pPr>
             <a:r>
-              <a:rPr lang="en-US" sz="1550" dirty="0">
+              <a:rPr lang="en-US" sz="1320" dirty="0">
                 <a:solidFill>
                   <a:srgbClr val="17364A"/>
                 </a:solidFill>
@@ -12612,9 +12800,9 @@
                 <a:ea typeface="Aptos" pitchFamily="34" charset="-122"/>
                 <a:cs typeface="Aptos" pitchFamily="34" charset="-120"/>
               </a:rPr>
-              <a:t>Use the concept to clarify workflow changes, dependencies, staffing, procurement requirements, training needs, and implementation checkpoints.</a:t>
-            </a:r>
-            <a:endParaRPr lang="en-US" sz="1550" dirty="0"/>
+              <a:t>Use the concept to clarify workflow changes, dependencies, staffing, procurement requirements, training needs, and.</a:t>
+            </a:r>
+            <a:endParaRPr lang="en-US" sz="1320" dirty="0"/>
           </a:p>
         </p:txBody>
       </p:sp>
@@ -12915,49 +13103,58 @@
           <a:ln/>
         </p:spPr>
         <p:txBody>
-          <a:bodyPr wrap="square" lIns="635" tIns="635" rIns="635" bIns="635" rtlCol="0" anchor="t">
+          <a:bodyPr wrap="square" lIns="1016" tIns="1016" rIns="1016" bIns="1016" rtlCol="0" anchor="t">
             <a:normAutofit/>
           </a:bodyPr>
           <a:lstStyle/>
           <a:p>
+            <a:pPr indent="0" marL="0">
+              <a:buNone/>
+            </a:pPr>
             <a:r>
               <a:rPr lang="en-US" sz="2100" dirty="0">
                 <a:solidFill>
-                  <a:srgbClr val="17364A"/>
-                </a:solidFill>
-                <a:latin typeface="Aptos" pitchFamily="34" charset="0"/>
-                <a:ea typeface="Aptos" pitchFamily="34" charset="-122"/>
-                <a:cs typeface="Aptos" pitchFamily="34" charset="-120"/>
-              </a:rPr>
-              <a:t>ONC USCDI, health IT, interoperability, and information blocking resources.:.</a:t>
+                  <a:srgbClr val="003A63"/>
+                </a:solidFill>
+                <a:latin typeface="Aptos" pitchFamily="34" charset="0"/>
+                <a:ea typeface="Aptos" pitchFamily="34" charset="-122"/>
+                <a:cs typeface="Aptos" pitchFamily="34" charset="-120"/>
+              </a:rPr>
+              <a:t>• ONC USCDI, health IT, interoperability, and information blocking resources.:.</a:t>
             </a:r>
             <a:endParaRPr lang="en-US" sz="2100" dirty="0"/>
           </a:p>
           <a:p>
+            <a:pPr indent="0" marL="0">
+              <a:buNone/>
+            </a:pPr>
             <a:r>
               <a:rPr lang="en-US" sz="2100" dirty="0">
                 <a:solidFill>
-                  <a:srgbClr val="17364A"/>
-                </a:solidFill>
-                <a:latin typeface="Aptos" pitchFamily="34" charset="0"/>
-                <a:ea typeface="Aptos" pitchFamily="34" charset="-122"/>
-                <a:cs typeface="Aptos" pitchFamily="34" charset="-120"/>
-              </a:rPr>
-              <a:t>NIST Artificial Intelligence Risk Management Framework, NIST Generative AI Profile, NIST Privacy.</a:t>
+                  <a:srgbClr val="003A63"/>
+                </a:solidFill>
+                <a:latin typeface="Aptos" pitchFamily="34" charset="0"/>
+                <a:ea typeface="Aptos" pitchFamily="34" charset="-122"/>
+                <a:cs typeface="Aptos" pitchFamily="34" charset="-120"/>
+              </a:rPr>
+              <a:t>• NIST Artificial Intelligence Risk Management Framework, NIST Generative AI Profile, NIST.</a:t>
             </a:r>
             <a:endParaRPr lang="en-US" sz="2100" dirty="0"/>
           </a:p>
           <a:p>
+            <a:pPr indent="0" marL="0">
+              <a:buNone/>
+            </a:pPr>
             <a:r>
               <a:rPr lang="en-US" sz="2100" dirty="0">
                 <a:solidFill>
-                  <a:srgbClr val="17364A"/>
-                </a:solidFill>
-                <a:latin typeface="Aptos" pitchFamily="34" charset="0"/>
-                <a:ea typeface="Aptos" pitchFamily="34" charset="-122"/>
-                <a:cs typeface="Aptos" pitchFamily="34" charset="-120"/>
-              </a:rPr>
-              <a:t>OWASP Top 10 for Large Language Model Applications and related secure AI application guidance.:.</a:t>
+                  <a:srgbClr val="003A63"/>
+                </a:solidFill>
+                <a:latin typeface="Aptos" pitchFamily="34" charset="0"/>
+                <a:ea typeface="Aptos" pitchFamily="34" charset="-122"/>
+                <a:cs typeface="Aptos" pitchFamily="34" charset="-120"/>
+              </a:rPr>
+              <a:t>• OWASP Top 10 for Large Language Model Applications and related secure AI application guidance.:.</a:t>
             </a:r>
             <a:endParaRPr lang="en-US" sz="2100" dirty="0"/>
           </a:p>
@@ -13037,17 +13234,17 @@
         </p:nvSpPr>
         <p:spPr>
           <a:xfrm>
-            <a:off x="7799832" y="1828800"/>
-            <a:ext cx="3145536" cy="685800"/>
-          </a:xfrm>
-          <a:prstGeom prst="rect">
-            <a:avLst/>
-          </a:prstGeom>
-          <a:noFill/>
-          <a:ln/>
-        </p:spPr>
-        <p:txBody>
-          <a:bodyPr wrap="square" lIns="0" tIns="0" rIns="0" bIns="0" rtlCol="0" anchor="t">
+            <a:off x="7799832" y="1801368"/>
+            <a:ext cx="3145536" cy="758952"/>
+          </a:xfrm>
+          <a:prstGeom prst="rect">
+            <a:avLst/>
+          </a:prstGeom>
+          <a:noFill/>
+          <a:ln/>
+        </p:spPr>
+        <p:txBody>
+          <a:bodyPr wrap="square" lIns="254" tIns="254" rIns="254" bIns="254" rtlCol="0" anchor="t">
             <a:normAutofit/>
           </a:bodyPr>
           <a:lstStyle/>
@@ -13056,7 +13253,7 @@
               <a:buNone/>
             </a:pPr>
             <a:r>
-              <a:rPr lang="en-US" sz="1550" dirty="0">
+              <a:rPr lang="en-US" sz="1320" dirty="0">
                 <a:solidFill>
                   <a:srgbClr val="17364A"/>
                 </a:solidFill>
@@ -13066,7 +13263,7 @@
               </a:rPr>
               <a:t>ONC USCDI, health IT, interoperability, and information blocking resources.:.</a:t>
             </a:r>
-            <a:endParaRPr lang="en-US" sz="1550" dirty="0"/>
+            <a:endParaRPr lang="en-US" sz="1320" dirty="0"/>
           </a:p>
         </p:txBody>
       </p:sp>
@@ -13154,13 +13351,16 @@
           <a:ln/>
         </p:spPr>
         <p:txBody>
-          <a:bodyPr wrap="square" lIns="254" tIns="254" rIns="254" bIns="254" rtlCol="0" anchor="t">
+          <a:bodyPr wrap="square" lIns="508" tIns="508" rIns="508" bIns="508" rtlCol="0" anchor="t">
             <a:normAutofit/>
           </a:bodyPr>
           <a:lstStyle/>
           <a:p>
-            <a:r>
-              <a:rPr lang="en-US" sz="1380" dirty="0">
+            <a:pPr indent="0" marL="0">
+              <a:buNone/>
+            </a:pPr>
+            <a:r>
+              <a:rPr lang="en-US" sz="1220" dirty="0">
                 <a:solidFill>
                   <a:srgbClr val="17364A"/>
                 </a:solidFill>
@@ -13168,13 +13368,16 @@
                 <a:ea typeface="Aptos" pitchFamily="34" charset="-122"/>
                 <a:cs typeface="Aptos" pitchFamily="34" charset="-120"/>
               </a:rPr>
-              <a:t>NIST Artificial Intelligence Risk Management Framework, NIST Generative AI Profile, NIST.</a:t>
-            </a:r>
-            <a:endParaRPr lang="en-US" sz="1380" dirty="0"/>
-          </a:p>
-          <a:p>
-            <a:r>
-              <a:rPr lang="en-US" sz="1380" dirty="0">
+              <a:t>NIST Artificial Intelligence Risk Management Framework, NIST.</a:t>
+            </a:r>
+            <a:endParaRPr lang="en-US" sz="1220" dirty="0"/>
+          </a:p>
+          <a:p>
+            <a:pPr indent="0" marL="0">
+              <a:buNone/>
+            </a:pPr>
+            <a:r>
+              <a:rPr lang="en-US" sz="1220" dirty="0">
                 <a:solidFill>
                   <a:srgbClr val="17364A"/>
                 </a:solidFill>
@@ -13182,13 +13385,16 @@
                 <a:ea typeface="Aptos" pitchFamily="34" charset="-122"/>
                 <a:cs typeface="Aptos" pitchFamily="34" charset="-120"/>
               </a:rPr>
-              <a:t>WHO ethics and governance guidance for artificial intelligence in health.</a:t>
-            </a:r>
-            <a:endParaRPr lang="en-US" sz="1380" dirty="0"/>
-          </a:p>
-          <a:p>
-            <a:r>
-              <a:rPr lang="en-US" sz="1380" dirty="0">
+              <a:t>WHO ethics and governance guidance for artificial intelligence in.</a:t>
+            </a:r>
+            <a:endParaRPr lang="en-US" sz="1220" dirty="0"/>
+          </a:p>
+          <a:p>
+            <a:pPr indent="0" marL="0">
+              <a:buNone/>
+            </a:pPr>
+            <a:r>
+              <a:rPr lang="en-US" sz="1220" dirty="0">
                 <a:solidFill>
                   <a:srgbClr val="17364A"/>
                 </a:solidFill>
@@ -13196,9 +13402,9 @@
                 <a:ea typeface="Aptos" pitchFamily="34" charset="-122"/>
                 <a:cs typeface="Aptos" pitchFamily="34" charset="-120"/>
               </a:rPr>
-              <a:t>Agency policies and procedures for privacy, public records, cybersecurity, procurement,.</a:t>
-            </a:r>
-            <a:endParaRPr lang="en-US" sz="1380" dirty="0"/>
+              <a:t>Agency policies and procedures for privacy, public records,.</a:t>
+            </a:r>
+            <a:endParaRPr lang="en-US" sz="1220" dirty="0"/>
           </a:p>
         </p:txBody>
       </p:sp>
@@ -13276,17 +13482,17 @@
         </p:nvSpPr>
         <p:spPr>
           <a:xfrm>
-            <a:off x="7799832" y="5001768"/>
-            <a:ext cx="3145536" cy="502920"/>
-          </a:xfrm>
-          <a:prstGeom prst="rect">
-            <a:avLst/>
-          </a:prstGeom>
-          <a:noFill/>
-          <a:ln/>
-        </p:spPr>
-        <p:txBody>
-          <a:bodyPr wrap="square" lIns="0" tIns="0" rIns="0" bIns="0" rtlCol="0" anchor="t">
+            <a:off x="7799832" y="4974336"/>
+            <a:ext cx="3145536" cy="576072"/>
+          </a:xfrm>
+          <a:prstGeom prst="rect">
+            <a:avLst/>
+          </a:prstGeom>
+          <a:noFill/>
+          <a:ln/>
+        </p:spPr>
+        <p:txBody>
+          <a:bodyPr wrap="square" lIns="254" tIns="254" rIns="254" bIns="254" rtlCol="0" anchor="t">
             <a:normAutofit/>
           </a:bodyPr>
           <a:lstStyle/>
@@ -13295,7 +13501,7 @@
               <a:buNone/>
             </a:pPr>
             <a:r>
-              <a:rPr lang="en-US" sz="1550" dirty="0">
+              <a:rPr lang="en-US" sz="1320" dirty="0">
                 <a:solidFill>
                   <a:srgbClr val="17364A"/>
                 </a:solidFill>
@@ -13303,9 +13509,9 @@
                 <a:ea typeface="Aptos" pitchFamily="34" charset="-122"/>
                 <a:cs typeface="Aptos" pitchFamily="34" charset="-120"/>
               </a:rPr>
-              <a:t>Use the concept to clarify workflow changes, dependencies, staffing, procurement requirements, training needs, and implementation checkpoints.</a:t>
-            </a:r>
-            <a:endParaRPr lang="en-US" sz="1550" dirty="0"/>
+              <a:t>Use the concept to clarify workflow changes, dependencies, staffing, procurement requirements, training needs, and.</a:t>
+            </a:r>
+            <a:endParaRPr lang="en-US" sz="1320" dirty="0"/>
           </a:p>
         </p:txBody>
       </p:sp>
@@ -13606,63 +13812,75 @@
           <a:ln/>
         </p:spPr>
         <p:txBody>
-          <a:bodyPr wrap="square" lIns="635" tIns="635" rIns="635" bIns="635" rtlCol="0" anchor="t">
+          <a:bodyPr wrap="square" lIns="1016" tIns="1016" rIns="1016" bIns="1016" rtlCol="0" anchor="t">
             <a:normAutofit/>
           </a:bodyPr>
           <a:lstStyle/>
           <a:p>
+            <a:pPr indent="0" marL="0">
+              <a:buNone/>
+            </a:pPr>
             <a:r>
               <a:rPr lang="en-US" sz="1900" dirty="0">
                 <a:solidFill>
-                  <a:srgbClr val="17364A"/>
-                </a:solidFill>
-                <a:latin typeface="Aptos" pitchFamily="34" charset="0"/>
-                <a:ea typeface="Aptos" pitchFamily="34" charset="-122"/>
-                <a:cs typeface="Aptos" pitchFamily="34" charset="-120"/>
-              </a:rPr>
-              <a:t>Play 11: Build and Deploy AI Solutions - This lesson informs Play 11 by helping learners connect the lesson.</a:t>
+                  <a:srgbClr val="003A63"/>
+                </a:solidFill>
+                <a:latin typeface="Aptos" pitchFamily="34" charset="0"/>
+                <a:ea typeface="Aptos" pitchFamily="34" charset="-122"/>
+                <a:cs typeface="Aptos" pitchFamily="34" charset="-120"/>
+              </a:rPr>
+              <a:t>• Play 11: Build and Deploy AI Solutions - This lesson informs Play 11 by helping learners.</a:t>
             </a:r>
             <a:endParaRPr lang="en-US" sz="1900" dirty="0"/>
           </a:p>
           <a:p>
+            <a:pPr indent="0" marL="0">
+              <a:buNone/>
+            </a:pPr>
             <a:r>
               <a:rPr lang="en-US" sz="1900" dirty="0">
                 <a:solidFill>
-                  <a:srgbClr val="17364A"/>
-                </a:solidFill>
-                <a:latin typeface="Aptos" pitchFamily="34" charset="0"/>
-                <a:ea typeface="Aptos" pitchFamily="34" charset="-122"/>
-                <a:cs typeface="Aptos" pitchFamily="34" charset="-120"/>
-              </a:rPr>
-              <a:t>Play 2: Readiness Assessment - This lesson informs Play 2 by helping learners connect the lesson topic to.</a:t>
+                  <a:srgbClr val="003A63"/>
+                </a:solidFill>
+                <a:latin typeface="Aptos" pitchFamily="34" charset="0"/>
+                <a:ea typeface="Aptos" pitchFamily="34" charset="-122"/>
+                <a:cs typeface="Aptos" pitchFamily="34" charset="-120"/>
+              </a:rPr>
+              <a:t>• Play 2: Readiness Assessment - This lesson informs Play 2 by helping learners connect the.</a:t>
             </a:r>
             <a:endParaRPr lang="en-US" sz="1900" dirty="0"/>
           </a:p>
           <a:p>
+            <a:pPr indent="0" marL="0">
+              <a:buNone/>
+            </a:pPr>
             <a:r>
               <a:rPr lang="en-US" sz="1900" dirty="0">
                 <a:solidFill>
-                  <a:srgbClr val="17364A"/>
-                </a:solidFill>
-                <a:latin typeface="Aptos" pitchFamily="34" charset="0"/>
-                <a:ea typeface="Aptos" pitchFamily="34" charset="-122"/>
-                <a:cs typeface="Aptos" pitchFamily="34" charset="-120"/>
-              </a:rPr>
-              <a:t>Play 3: Establish AI Governance - This lesson informs Play 3 by helping learners connect the lesson topic to.</a:t>
+                  <a:srgbClr val="003A63"/>
+                </a:solidFill>
+                <a:latin typeface="Aptos" pitchFamily="34" charset="0"/>
+                <a:ea typeface="Aptos" pitchFamily="34" charset="-122"/>
+                <a:cs typeface="Aptos" pitchFamily="34" charset="-120"/>
+              </a:rPr>
+              <a:t>• Play 3: Establish AI Governance - This lesson informs Play 3 by helping learners connect the.</a:t>
             </a:r>
             <a:endParaRPr lang="en-US" sz="1900" dirty="0"/>
           </a:p>
           <a:p>
+            <a:pPr indent="0" marL="0">
+              <a:buNone/>
+            </a:pPr>
             <a:r>
               <a:rPr lang="en-US" sz="1900" dirty="0">
                 <a:solidFill>
-                  <a:srgbClr val="17364A"/>
-                </a:solidFill>
-                <a:latin typeface="Aptos" pitchFamily="34" charset="0"/>
-                <a:ea typeface="Aptos" pitchFamily="34" charset="-122"/>
-                <a:cs typeface="Aptos" pitchFamily="34" charset="-120"/>
-              </a:rPr>
-              <a:t>Play 1: Vision &amp; Guardrails - This lesson informs Play 1 by helping learners connect the lesson topic to.</a:t>
+                  <a:srgbClr val="003A63"/>
+                </a:solidFill>
+                <a:latin typeface="Aptos" pitchFamily="34" charset="0"/>
+                <a:ea typeface="Aptos" pitchFamily="34" charset="-122"/>
+                <a:cs typeface="Aptos" pitchFamily="34" charset="-120"/>
+              </a:rPr>
+              <a:t>• Play 1: Vision &amp; Guardrails - This lesson informs Play 1 by helping learners connect the.</a:t>
             </a:r>
             <a:endParaRPr lang="en-US" sz="1900" dirty="0"/>
           </a:p>
@@ -13742,17 +13960,17 @@
         </p:nvSpPr>
         <p:spPr>
           <a:xfrm>
-            <a:off x="8211312" y="1920240"/>
-            <a:ext cx="2734056" cy="1463040"/>
-          </a:xfrm>
-          <a:prstGeom prst="rect">
-            <a:avLst/>
-          </a:prstGeom>
-          <a:noFill/>
-          <a:ln/>
-        </p:spPr>
-        <p:txBody>
-          <a:bodyPr wrap="square" lIns="0" tIns="0" rIns="0" bIns="0" rtlCol="0" anchor="t">
+            <a:off x="8211312" y="1892808"/>
+            <a:ext cx="2734056" cy="1536192"/>
+          </a:xfrm>
+          <a:prstGeom prst="rect">
+            <a:avLst/>
+          </a:prstGeom>
+          <a:noFill/>
+          <a:ln/>
+        </p:spPr>
+        <p:txBody>
+          <a:bodyPr wrap="square" lIns="254" tIns="254" rIns="254" bIns="254" rtlCol="0" anchor="t">
             <a:normAutofit/>
           </a:bodyPr>
           <a:lstStyle/>
@@ -13761,7 +13979,7 @@
               <a:buNone/>
             </a:pPr>
             <a:r>
-              <a:rPr lang="en-US" sz="1550" dirty="0">
+              <a:rPr lang="en-US" sz="1320" dirty="0">
                 <a:solidFill>
                   <a:srgbClr val="17364A"/>
                 </a:solidFill>
@@ -13769,9 +13987,9 @@
                 <a:ea typeface="Aptos" pitchFamily="34" charset="-122"/>
                 <a:cs typeface="Aptos" pitchFamily="34" charset="-120"/>
               </a:rPr>
-              <a:t>Use the related plays to identify decisions, participants, timing, approvals, and documentation needed for responsible implementation.</a:t>
-            </a:r>
-            <a:endParaRPr lang="en-US" sz="1550" dirty="0"/>
+              <a:t>Use the related plays to identify decisions, participants, timing, approvals, and documentation needed for responsible.</a:t>
+            </a:r>
+            <a:endParaRPr lang="en-US" sz="1320" dirty="0"/>
           </a:p>
         </p:txBody>
       </p:sp>
@@ -13859,13 +14077,16 @@
           <a:ln/>
         </p:spPr>
         <p:txBody>
-          <a:bodyPr wrap="square" lIns="254" tIns="254" rIns="254" bIns="254" rtlCol="0" anchor="t">
+          <a:bodyPr wrap="square" lIns="508" tIns="508" rIns="508" bIns="508" rtlCol="0" anchor="t">
             <a:normAutofit/>
           </a:bodyPr>
           <a:lstStyle/>
           <a:p>
-            <a:r>
-              <a:rPr lang="en-US" sz="1380" dirty="0">
+            <a:pPr indent="0" marL="0">
+              <a:buNone/>
+            </a:pPr>
+            <a:r>
+              <a:rPr lang="en-US" sz="1220" dirty="0">
                 <a:solidFill>
                   <a:srgbClr val="17364A"/>
                 </a:solidFill>
@@ -13875,11 +14096,14 @@
               </a:rPr>
               <a:t>Locate the decision point in the playbook sequence.</a:t>
             </a:r>
-            <a:endParaRPr lang="en-US" sz="1380" dirty="0"/>
-          </a:p>
-          <a:p>
-            <a:r>
-              <a:rPr lang="en-US" sz="1380" dirty="0">
+            <a:endParaRPr lang="en-US" sz="1220" dirty="0"/>
+          </a:p>
+          <a:p>
+            <a:pPr indent="0" marL="0">
+              <a:buNone/>
+            </a:pPr>
+            <a:r>
+              <a:rPr lang="en-US" sz="1220" dirty="0">
                 <a:solidFill>
                   <a:srgbClr val="17364A"/>
                 </a:solidFill>
@@ -13889,11 +14113,14 @@
               </a:rPr>
               <a:t>Identify who should participate in the work.</a:t>
             </a:r>
-            <a:endParaRPr lang="en-US" sz="1380" dirty="0"/>
-          </a:p>
-          <a:p>
-            <a:r>
-              <a:rPr lang="en-US" sz="1380" dirty="0">
+            <a:endParaRPr lang="en-US" sz="1220" dirty="0"/>
+          </a:p>
+          <a:p>
+            <a:pPr indent="0" marL="0">
+              <a:buNone/>
+            </a:pPr>
+            <a:r>
+              <a:rPr lang="en-US" sz="1220" dirty="0">
                 <a:solidFill>
                   <a:srgbClr val="17364A"/>
                 </a:solidFill>
@@ -13903,7 +14130,7 @@
               </a:rPr>
               <a:t>Document the review, approval, or implementation step.</a:t>
             </a:r>
-            <a:endParaRPr lang="en-US" sz="1380" dirty="0"/>
+            <a:endParaRPr lang="en-US" sz="1220" dirty="0"/>
           </a:p>
         </p:txBody>
       </p:sp>
@@ -14204,63 +14431,75 @@
           <a:ln/>
         </p:spPr>
         <p:txBody>
-          <a:bodyPr wrap="square" lIns="635" tIns="635" rIns="635" bIns="635" rtlCol="0" anchor="t">
+          <a:bodyPr wrap="square" lIns="1016" tIns="1016" rIns="1016" bIns="1016" rtlCol="0" anchor="t">
             <a:normAutofit/>
           </a:bodyPr>
           <a:lstStyle/>
           <a:p>
+            <a:pPr indent="0" marL="0">
+              <a:buNone/>
+            </a:pPr>
             <a:r>
               <a:rPr lang="en-US" sz="1850" dirty="0">
                 <a:solidFill>
-                  <a:srgbClr val="17364A"/>
-                </a:solidFill>
-                <a:latin typeface="Aptos" pitchFamily="34" charset="0"/>
-                <a:ea typeface="Aptos" pitchFamily="34" charset="-122"/>
-                <a:cs typeface="Aptos" pitchFamily="34" charset="-120"/>
-              </a:rPr>
-              <a:t>Tool 4: AI Policy Landscape Scan (Worksheet) - Use AI Policy Landscape Scan to translate this lesson into a.</a:t>
+                  <a:srgbClr val="003A63"/>
+                </a:solidFill>
+                <a:latin typeface="Aptos" pitchFamily="34" charset="0"/>
+                <a:ea typeface="Aptos" pitchFamily="34" charset="-122"/>
+                <a:cs typeface="Aptos" pitchFamily="34" charset="-120"/>
+              </a:rPr>
+              <a:t>• Tool 4: AI Policy Landscape Scan (Worksheet) - Use AI Policy Landscape Scan to translate this.</a:t>
             </a:r>
             <a:endParaRPr lang="en-US" sz="1850" dirty="0"/>
           </a:p>
           <a:p>
+            <a:pPr indent="0" marL="0">
+              <a:buNone/>
+            </a:pPr>
             <a:r>
               <a:rPr lang="en-US" sz="1850" dirty="0">
                 <a:solidFill>
-                  <a:srgbClr val="17364A"/>
-                </a:solidFill>
-                <a:latin typeface="Aptos" pitchFamily="34" charset="0"/>
-                <a:ea typeface="Aptos" pitchFamily="34" charset="-122"/>
-                <a:cs typeface="Aptos" pitchFamily="34" charset="-120"/>
-              </a:rPr>
-              <a:t>Tool 5: AI Environmental and Resource Impact Review (Checklist) - Use this tool to complete or strengthen.</a:t>
+                  <a:srgbClr val="003A63"/>
+                </a:solidFill>
+                <a:latin typeface="Aptos" pitchFamily="34" charset="0"/>
+                <a:ea typeface="Aptos" pitchFamily="34" charset="-122"/>
+                <a:cs typeface="Aptos" pitchFamily="34" charset="-120"/>
+              </a:rPr>
+              <a:t>• Tool 5: AI Environmental and Resource Impact Review (Checklist) - Use this tool to complete or.</a:t>
             </a:r>
             <a:endParaRPr lang="en-US" sz="1850" dirty="0"/>
           </a:p>
           <a:p>
+            <a:pPr indent="0" marL="0">
+              <a:buNone/>
+            </a:pPr>
             <a:r>
               <a:rPr lang="en-US" sz="1850" dirty="0">
                 <a:solidFill>
-                  <a:srgbClr val="17364A"/>
-                </a:solidFill>
-                <a:latin typeface="Aptos" pitchFamily="34" charset="0"/>
-                <a:ea typeface="Aptos" pitchFamily="34" charset="-122"/>
-                <a:cs typeface="Aptos" pitchFamily="34" charset="-120"/>
-              </a:rPr>
-              <a:t>Tool 6: Human-Centered AI Decision Rule Checklist (Checklist) - Use Human-Centered AI Decision Rule.</a:t>
+                  <a:srgbClr val="003A63"/>
+                </a:solidFill>
+                <a:latin typeface="Aptos" pitchFamily="34" charset="0"/>
+                <a:ea typeface="Aptos" pitchFamily="34" charset="-122"/>
+                <a:cs typeface="Aptos" pitchFamily="34" charset="-120"/>
+              </a:rPr>
+              <a:t>• Tool 6: Human-Centered AI Decision Rule Checklist (Checklist) - Use Human-Centered AI Decision.</a:t>
             </a:r>
             <a:endParaRPr lang="en-US" sz="1850" dirty="0"/>
           </a:p>
           <a:p>
+            <a:pPr indent="0" marL="0">
+              <a:buNone/>
+            </a:pPr>
             <a:r>
               <a:rPr lang="en-US" sz="1850" dirty="0">
                 <a:solidFill>
-                  <a:srgbClr val="17364A"/>
-                </a:solidFill>
-                <a:latin typeface="Aptos" pitchFamily="34" charset="0"/>
-                <a:ea typeface="Aptos" pitchFamily="34" charset="-122"/>
-                <a:cs typeface="Aptos" pitchFamily="34" charset="-120"/>
-              </a:rPr>
-              <a:t>Tool 8: AI Project Charter (Planning) - Use AI Project Charter to translate this lesson into a documented.</a:t>
+                  <a:srgbClr val="003A63"/>
+                </a:solidFill>
+                <a:latin typeface="Aptos" pitchFamily="34" charset="0"/>
+                <a:ea typeface="Aptos" pitchFamily="34" charset="-122"/>
+                <a:cs typeface="Aptos" pitchFamily="34" charset="-120"/>
+              </a:rPr>
+              <a:t>• Tool 8: AI Project Charter (Planning) - Use AI Project Charter to translate this lesson into a.</a:t>
             </a:r>
             <a:endParaRPr lang="en-US" sz="1850" dirty="0"/>
           </a:p>
@@ -14340,17 +14579,17 @@
         </p:nvSpPr>
         <p:spPr>
           <a:xfrm>
-            <a:off x="8211312" y="1920240"/>
-            <a:ext cx="2734056" cy="1463040"/>
-          </a:xfrm>
-          <a:prstGeom prst="rect">
-            <a:avLst/>
-          </a:prstGeom>
-          <a:noFill/>
-          <a:ln/>
-        </p:spPr>
-        <p:txBody>
-          <a:bodyPr wrap="square" lIns="0" tIns="0" rIns="0" bIns="0" rtlCol="0" anchor="t">
+            <a:off x="8211312" y="1892808"/>
+            <a:ext cx="2734056" cy="1536192"/>
+          </a:xfrm>
+          <a:prstGeom prst="rect">
+            <a:avLst/>
+          </a:prstGeom>
+          <a:noFill/>
+          <a:ln/>
+        </p:spPr>
+        <p:txBody>
+          <a:bodyPr wrap="square" lIns="254" tIns="254" rIns="254" bIns="254" rtlCol="0" anchor="t">
             <a:normAutofit/>
           </a:bodyPr>
           <a:lstStyle/>
@@ -14359,7 +14598,7 @@
               <a:buNone/>
             </a:pPr>
             <a:r>
-              <a:rPr lang="en-US" sz="1550" dirty="0">
+              <a:rPr lang="en-US" sz="1320" dirty="0">
                 <a:solidFill>
                   <a:srgbClr val="17364A"/>
                 </a:solidFill>
@@ -14367,9 +14606,9 @@
                 <a:ea typeface="Aptos" pitchFamily="34" charset="-122"/>
                 <a:cs typeface="Aptos" pitchFamily="34" charset="-120"/>
               </a:rPr>
-              <a:t>Use linked tools when your department needs a structured worksheet, template, checklist, review process, or documentation artifact.</a:t>
-            </a:r>
-            <a:endParaRPr lang="en-US" sz="1550" dirty="0"/>
+              <a:t>Use linked tools when your department needs a structured worksheet, template, checklist, review process, or.</a:t>
+            </a:r>
+            <a:endParaRPr lang="en-US" sz="1320" dirty="0"/>
           </a:p>
         </p:txBody>
       </p:sp>
@@ -14457,13 +14696,16 @@
           <a:ln/>
         </p:spPr>
         <p:txBody>
-          <a:bodyPr wrap="square" lIns="254" tIns="254" rIns="254" bIns="254" rtlCol="0" anchor="t">
+          <a:bodyPr wrap="square" lIns="508" tIns="508" rIns="508" bIns="508" rtlCol="0" anchor="t">
             <a:normAutofit/>
           </a:bodyPr>
           <a:lstStyle/>
           <a:p>
-            <a:r>
-              <a:rPr lang="en-US" sz="1380" dirty="0">
+            <a:pPr indent="0" marL="0">
+              <a:buNone/>
+            </a:pPr>
+            <a:r>
+              <a:rPr lang="en-US" sz="1220" dirty="0">
                 <a:solidFill>
                   <a:srgbClr val="17364A"/>
                 </a:solidFill>
@@ -14473,11 +14715,14 @@
               </a:rPr>
               <a:t>Use a tool when no comparable local process exists.</a:t>
             </a:r>
-            <a:endParaRPr lang="en-US" sz="1380" dirty="0"/>
-          </a:p>
-          <a:p>
-            <a:r>
-              <a:rPr lang="en-US" sz="1380" dirty="0">
+            <a:endParaRPr lang="en-US" sz="1220" dirty="0"/>
+          </a:p>
+          <a:p>
+            <a:pPr indent="0" marL="0">
+              <a:buNone/>
+            </a:pPr>
+            <a:r>
+              <a:rPr lang="en-US" sz="1220" dirty="0">
                 <a:solidFill>
                   <a:srgbClr val="17364A"/>
                 </a:solidFill>
@@ -14485,13 +14730,16 @@
                 <a:ea typeface="Aptos" pitchFamily="34" charset="-122"/>
                 <a:cs typeface="Aptos" pitchFamily="34" charset="-120"/>
               </a:rPr>
-              <a:t>Adapt existing department templates when they already fit the purpose.</a:t>
-            </a:r>
-            <a:endParaRPr lang="en-US" sz="1380" dirty="0"/>
-          </a:p>
-          <a:p>
-            <a:r>
-              <a:rPr lang="en-US" sz="1380" dirty="0">
+              <a:t>Adapt existing department templates when they already fit the.</a:t>
+            </a:r>
+            <a:endParaRPr lang="en-US" sz="1220" dirty="0"/>
+          </a:p>
+          <a:p>
+            <a:pPr indent="0" marL="0">
+              <a:buNone/>
+            </a:pPr>
+            <a:r>
+              <a:rPr lang="en-US" sz="1220" dirty="0">
                 <a:solidFill>
                   <a:srgbClr val="17364A"/>
                 </a:solidFill>
@@ -14501,7 +14749,7 @@
               </a:rPr>
               <a:t>Save the completed artifact as evidence of the decision.</a:t>
             </a:r>
-            <a:endParaRPr lang="en-US" sz="1380" dirty="0"/>
+            <a:endParaRPr lang="en-US" sz="1220" dirty="0"/>
           </a:p>
         </p:txBody>
       </p:sp>
@@ -14802,49 +15050,58 @@
           <a:ln/>
         </p:spPr>
         <p:txBody>
-          <a:bodyPr wrap="square" lIns="635" tIns="635" rIns="635" bIns="635" rtlCol="0" anchor="t">
+          <a:bodyPr wrap="square" lIns="1016" tIns="1016" rIns="1016" bIns="1016" rtlCol="0" anchor="t">
             <a:normAutofit/>
           </a:bodyPr>
           <a:lstStyle/>
           <a:p>
+            <a:pPr indent="0" marL="0">
+              <a:buNone/>
+            </a:pPr>
             <a:r>
               <a:rPr lang="en-US" sz="2100" dirty="0">
                 <a:solidFill>
-                  <a:srgbClr val="17364A"/>
-                </a:solidFill>
-                <a:latin typeface="Aptos" pitchFamily="34" charset="0"/>
-                <a:ea typeface="Aptos" pitchFamily="34" charset="-122"/>
-                <a:cs typeface="Aptos" pitchFamily="34" charset="-120"/>
-              </a:rPr>
-              <a:t>Explain the purpose of grant and funding management for ai projects in public health AI.</a:t>
+                  <a:srgbClr val="003A63"/>
+                </a:solidFill>
+                <a:latin typeface="Aptos" pitchFamily="34" charset="0"/>
+                <a:ea typeface="Aptos" pitchFamily="34" charset="-122"/>
+                <a:cs typeface="Aptos" pitchFamily="34" charset="-120"/>
+              </a:rPr>
+              <a:t>• Explain the purpose of grant and funding management for ai projects in public health AI.</a:t>
             </a:r>
             <a:endParaRPr lang="en-US" sz="2100" dirty="0"/>
           </a:p>
           <a:p>
+            <a:pPr indent="0" marL="0">
+              <a:buNone/>
+            </a:pPr>
             <a:r>
               <a:rPr lang="en-US" sz="2100" dirty="0">
                 <a:solidFill>
-                  <a:srgbClr val="17364A"/>
-                </a:solidFill>
-                <a:latin typeface="Aptos" pitchFamily="34" charset="0"/>
-                <a:ea typeface="Aptos" pitchFamily="34" charset="-122"/>
-                <a:cs typeface="Aptos" pitchFamily="34" charset="-120"/>
-              </a:rPr>
-              <a:t>Identify the roles, decisions, risks, and documentation needed for the topic.</a:t>
+                  <a:srgbClr val="003A63"/>
+                </a:solidFill>
+                <a:latin typeface="Aptos" pitchFamily="34" charset="0"/>
+                <a:ea typeface="Aptos" pitchFamily="34" charset="-122"/>
+                <a:cs typeface="Aptos" pitchFamily="34" charset="-120"/>
+              </a:rPr>
+              <a:t>• Identify the roles, decisions, risks, and documentation needed for the topic.</a:t>
             </a:r>
             <a:endParaRPr lang="en-US" sz="2100" dirty="0"/>
           </a:p>
           <a:p>
+            <a:pPr indent="0" marL="0">
+              <a:buNone/>
+            </a:pPr>
             <a:r>
               <a:rPr lang="en-US" sz="2100" dirty="0">
                 <a:solidFill>
-                  <a:srgbClr val="17364A"/>
-                </a:solidFill>
-                <a:latin typeface="Aptos" pitchFamily="34" charset="0"/>
-                <a:ea typeface="Aptos" pitchFamily="34" charset="-122"/>
-                <a:cs typeface="Aptos" pitchFamily="34" charset="-120"/>
-              </a:rPr>
-              <a:t>Apply the topic to a real or realistic public health workflow or decision.</a:t>
+                  <a:srgbClr val="003A63"/>
+                </a:solidFill>
+                <a:latin typeface="Aptos" pitchFamily="34" charset="0"/>
+                <a:ea typeface="Aptos" pitchFamily="34" charset="-122"/>
+                <a:cs typeface="Aptos" pitchFamily="34" charset="-120"/>
+              </a:rPr>
+              <a:t>• Apply the topic to a real or realistic public health workflow or decision.</a:t>
             </a:r>
             <a:endParaRPr lang="en-US" sz="2100" dirty="0"/>
           </a:p>
@@ -14924,17 +15181,17 @@
         </p:nvSpPr>
         <p:spPr>
           <a:xfrm>
-            <a:off x="7799832" y="1828800"/>
-            <a:ext cx="3145536" cy="685800"/>
-          </a:xfrm>
-          <a:prstGeom prst="rect">
-            <a:avLst/>
-          </a:prstGeom>
-          <a:noFill/>
-          <a:ln/>
-        </p:spPr>
-        <p:txBody>
-          <a:bodyPr wrap="square" lIns="0" tIns="0" rIns="0" bIns="0" rtlCol="0" anchor="t">
+            <a:off x="7799832" y="1801368"/>
+            <a:ext cx="3145536" cy="758952"/>
+          </a:xfrm>
+          <a:prstGeom prst="rect">
+            <a:avLst/>
+          </a:prstGeom>
+          <a:noFill/>
+          <a:ln/>
+        </p:spPr>
+        <p:txBody>
+          <a:bodyPr wrap="square" lIns="254" tIns="254" rIns="254" bIns="254" rtlCol="0" anchor="t">
             <a:normAutofit/>
           </a:bodyPr>
           <a:lstStyle/>
@@ -14943,7 +15200,7 @@
               <a:buNone/>
             </a:pPr>
             <a:r>
-              <a:rPr lang="en-US" sz="1550" dirty="0">
+              <a:rPr lang="en-US" sz="1320" dirty="0">
                 <a:solidFill>
                   <a:srgbClr val="17364A"/>
                 </a:solidFill>
@@ -14953,7 +15210,7 @@
               </a:rPr>
               <a:t>Explain the purpose of grant and funding management for ai projects in public health AI.</a:t>
             </a:r>
-            <a:endParaRPr lang="en-US" sz="1550" dirty="0"/>
+            <a:endParaRPr lang="en-US" sz="1320" dirty="0"/>
           </a:p>
         </p:txBody>
       </p:sp>
@@ -15041,13 +15298,16 @@
           <a:ln/>
         </p:spPr>
         <p:txBody>
-          <a:bodyPr wrap="square" lIns="254" tIns="254" rIns="254" bIns="254" rtlCol="0" anchor="t">
+          <a:bodyPr wrap="square" lIns="508" tIns="508" rIns="508" bIns="508" rtlCol="0" anchor="t">
             <a:normAutofit/>
           </a:bodyPr>
           <a:lstStyle/>
           <a:p>
-            <a:r>
-              <a:rPr lang="en-US" sz="1380" dirty="0">
+            <a:pPr indent="0" marL="0">
+              <a:buNone/>
+            </a:pPr>
+            <a:r>
+              <a:rPr lang="en-US" sz="1220" dirty="0">
                 <a:solidFill>
                   <a:srgbClr val="17364A"/>
                 </a:solidFill>
@@ -15055,13 +15315,16 @@
                 <a:ea typeface="Aptos" pitchFamily="34" charset="-122"/>
                 <a:cs typeface="Aptos" pitchFamily="34" charset="-120"/>
               </a:rPr>
-              <a:t>Recognize equity, privacy, security, legal, operational, and public trust implications.</a:t>
-            </a:r>
-            <a:endParaRPr lang="en-US" sz="1380" dirty="0"/>
-          </a:p>
-          <a:p>
-            <a:r>
-              <a:rPr lang="en-US" sz="1380" dirty="0">
+              <a:t>Recognize equity, privacy, security, legal, operational, and.</a:t>
+            </a:r>
+            <a:endParaRPr lang="en-US" sz="1220" dirty="0"/>
+          </a:p>
+          <a:p>
+            <a:pPr indent="0" marL="0">
+              <a:buNone/>
+            </a:pPr>
+            <a:r>
+              <a:rPr lang="en-US" sz="1220" dirty="0">
                 <a:solidFill>
                   <a:srgbClr val="17364A"/>
                 </a:solidFill>
@@ -15069,9 +15332,9 @@
                 <a:ea typeface="Aptos" pitchFamily="34" charset="-122"/>
                 <a:cs typeface="Aptos" pitchFamily="34" charset="-120"/>
               </a:rPr>
-              <a:t>Produce a practical artifact that supports readiness, governance, implementation,.</a:t>
-            </a:r>
-            <a:endParaRPr lang="en-US" sz="1380" dirty="0"/>
+              <a:t>Produce a practical artifact that supports readiness, governance,.</a:t>
+            </a:r>
+            <a:endParaRPr lang="en-US" sz="1220" dirty="0"/>
           </a:p>
         </p:txBody>
       </p:sp>
@@ -15149,17 +15412,17 @@
         </p:nvSpPr>
         <p:spPr>
           <a:xfrm>
-            <a:off x="7799832" y="5001768"/>
-            <a:ext cx="3145536" cy="502920"/>
-          </a:xfrm>
-          <a:prstGeom prst="rect">
-            <a:avLst/>
-          </a:prstGeom>
-          <a:noFill/>
-          <a:ln/>
-        </p:spPr>
-        <p:txBody>
-          <a:bodyPr wrap="square" lIns="0" tIns="0" rIns="0" bIns="0" rtlCol="0" anchor="t">
+            <a:off x="7799832" y="4974336"/>
+            <a:ext cx="3145536" cy="576072"/>
+          </a:xfrm>
+          <a:prstGeom prst="rect">
+            <a:avLst/>
+          </a:prstGeom>
+          <a:noFill/>
+          <a:ln/>
+        </p:spPr>
+        <p:txBody>
+          <a:bodyPr wrap="square" lIns="254" tIns="254" rIns="254" bIns="254" rtlCol="0" anchor="t">
             <a:normAutofit/>
           </a:bodyPr>
           <a:lstStyle/>
@@ -15168,7 +15431,7 @@
               <a:buNone/>
             </a:pPr>
             <a:r>
-              <a:rPr lang="en-US" sz="1550" dirty="0">
+              <a:rPr lang="en-US" sz="1320" dirty="0">
                 <a:solidFill>
                   <a:srgbClr val="17364A"/>
                 </a:solidFill>
@@ -15176,9 +15439,9 @@
                 <a:ea typeface="Aptos" pitchFamily="34" charset="-122"/>
                 <a:cs typeface="Aptos" pitchFamily="34" charset="-120"/>
               </a:rPr>
-              <a:t>Use the assignment to test whether you can explain the concept, apply it to a realistic public health situation, and identify what would need review before the work moves forward.</a:t>
-            </a:r>
-            <a:endParaRPr lang="en-US" sz="1550" dirty="0"/>
+              <a:t>Use the assignment to test whether you can explain the concept, apply it to a realistic public health situation, and.</a:t>
+            </a:r>
+            <a:endParaRPr lang="en-US" sz="1320" dirty="0"/>
           </a:p>
         </p:txBody>
       </p:sp>
@@ -15479,49 +15742,58 @@
           <a:ln/>
         </p:spPr>
         <p:txBody>
-          <a:bodyPr wrap="square" lIns="635" tIns="635" rIns="635" bIns="635" rtlCol="0" anchor="t">
+          <a:bodyPr wrap="square" lIns="1016" tIns="1016" rIns="1016" bIns="1016" rtlCol="0" anchor="t">
             <a:normAutofit/>
           </a:bodyPr>
           <a:lstStyle/>
           <a:p>
+            <a:pPr indent="0" marL="0">
+              <a:buNone/>
+            </a:pPr>
             <a:r>
               <a:rPr lang="en-US" sz="2100" dirty="0">
                 <a:solidFill>
-                  <a:srgbClr val="17364A"/>
-                </a:solidFill>
-                <a:latin typeface="Aptos" pitchFamily="34" charset="0"/>
-                <a:ea typeface="Aptos" pitchFamily="34" charset="-122"/>
-                <a:cs typeface="Aptos" pitchFamily="34" charset="-120"/>
-              </a:rPr>
-              <a:t>This module focuses on connecting AI projects to allowable costs, deliverables, reporting, performance.</a:t>
+                  <a:srgbClr val="003A63"/>
+                </a:solidFill>
+                <a:latin typeface="Aptos" pitchFamily="34" charset="0"/>
+                <a:ea typeface="Aptos" pitchFamily="34" charset="-122"/>
+                <a:cs typeface="Aptos" pitchFamily="34" charset="-120"/>
+              </a:rPr>
+              <a:t>• This module focuses on connecting AI projects to allowable costs, deliverables, reporting,.</a:t>
             </a:r>
             <a:endParaRPr lang="en-US" sz="2100" dirty="0"/>
           </a:p>
           <a:p>
+            <a:pPr indent="0" marL="0">
+              <a:buNone/>
+            </a:pPr>
             <a:r>
               <a:rPr lang="en-US" sz="2100" dirty="0">
                 <a:solidFill>
-                  <a:srgbClr val="17364A"/>
-                </a:solidFill>
-                <a:latin typeface="Aptos" pitchFamily="34" charset="0"/>
-                <a:ea typeface="Aptos" pitchFamily="34" charset="-122"/>
-                <a:cs typeface="Aptos" pitchFamily="34" charset="-120"/>
-              </a:rPr>
-              <a:t>It is designed for public health staff who must translate responsible AI principles into repeatable.</a:t>
+                  <a:srgbClr val="003A63"/>
+                </a:solidFill>
+                <a:latin typeface="Aptos" pitchFamily="34" charset="0"/>
+                <a:ea typeface="Aptos" pitchFamily="34" charset="-122"/>
+                <a:cs typeface="Aptos" pitchFamily="34" charset="-120"/>
+              </a:rPr>
+              <a:t>• It is designed for public health staff who must translate responsible AI principles into.</a:t>
             </a:r>
             <a:endParaRPr lang="en-US" sz="2100" dirty="0"/>
           </a:p>
           <a:p>
+            <a:pPr indent="0" marL="0">
+              <a:buNone/>
+            </a:pPr>
             <a:r>
               <a:rPr lang="en-US" sz="2100" dirty="0">
                 <a:solidFill>
-                  <a:srgbClr val="17364A"/>
-                </a:solidFill>
-                <a:latin typeface="Aptos" pitchFamily="34" charset="0"/>
-                <a:ea typeface="Aptos" pitchFamily="34" charset="-122"/>
-                <a:cs typeface="Aptos" pitchFamily="34" charset="-120"/>
-              </a:rPr>
-              <a:t>The module helps learners move beyond general awareness by producing a practical artifact that can be.</a:t>
+                  <a:srgbClr val="003A63"/>
+                </a:solidFill>
+                <a:latin typeface="Aptos" pitchFamily="34" charset="0"/>
+                <a:ea typeface="Aptos" pitchFamily="34" charset="-122"/>
+                <a:cs typeface="Aptos" pitchFamily="34" charset="-120"/>
+              </a:rPr>
+              <a:t>• The module helps learners move beyond general awareness by producing a practical artifact that.</a:t>
             </a:r>
             <a:endParaRPr lang="en-US" sz="2100" dirty="0"/>
           </a:p>
@@ -15601,17 +15873,17 @@
         </p:nvSpPr>
         <p:spPr>
           <a:xfrm>
-            <a:off x="7799832" y="1828800"/>
-            <a:ext cx="3145536" cy="685800"/>
-          </a:xfrm>
-          <a:prstGeom prst="rect">
-            <a:avLst/>
-          </a:prstGeom>
-          <a:noFill/>
-          <a:ln/>
-        </p:spPr>
-        <p:txBody>
-          <a:bodyPr wrap="square" lIns="0" tIns="0" rIns="0" bIns="0" rtlCol="0" anchor="t">
+            <a:off x="7799832" y="1801368"/>
+            <a:ext cx="3145536" cy="758952"/>
+          </a:xfrm>
+          <a:prstGeom prst="rect">
+            <a:avLst/>
+          </a:prstGeom>
+          <a:noFill/>
+          <a:ln/>
+        </p:spPr>
+        <p:txBody>
+          <a:bodyPr wrap="square" lIns="254" tIns="254" rIns="254" bIns="254" rtlCol="0" anchor="t">
             <a:normAutofit/>
           </a:bodyPr>
           <a:lstStyle/>
@@ -15620,7 +15892,7 @@
               <a:buNone/>
             </a:pPr>
             <a:r>
-              <a:rPr lang="en-US" sz="1550" dirty="0">
+              <a:rPr lang="en-US" sz="1320" dirty="0">
                 <a:solidFill>
                   <a:srgbClr val="17364A"/>
                 </a:solidFill>
@@ -15630,7 +15902,7 @@
               </a:rPr>
               <a:t>This module focuses on connecting AI projects to allowable costs, deliverables, reporting, performance.</a:t>
             </a:r>
-            <a:endParaRPr lang="en-US" sz="1550" dirty="0"/>
+            <a:endParaRPr lang="en-US" sz="1320" dirty="0"/>
           </a:p>
         </p:txBody>
       </p:sp>
@@ -15718,13 +15990,16 @@
           <a:ln/>
         </p:spPr>
         <p:txBody>
-          <a:bodyPr wrap="square" lIns="254" tIns="254" rIns="254" bIns="254" rtlCol="0" anchor="t">
+          <a:bodyPr wrap="square" lIns="508" tIns="508" rIns="508" bIns="508" rtlCol="0" anchor="t">
             <a:normAutofit/>
           </a:bodyPr>
           <a:lstStyle/>
           <a:p>
-            <a:r>
-              <a:rPr lang="en-US" sz="1380" dirty="0">
+            <a:pPr indent="0" marL="0">
+              <a:buNone/>
+            </a:pPr>
+            <a:r>
+              <a:rPr lang="en-US" sz="1220" dirty="0">
                 <a:solidFill>
                   <a:srgbClr val="17364A"/>
                 </a:solidFill>
@@ -15732,13 +16007,16 @@
                 <a:ea typeface="Aptos" pitchFamily="34" charset="-122"/>
                 <a:cs typeface="Aptos" pitchFamily="34" charset="-120"/>
               </a:rPr>
-              <a:t>This module focuses on connecting AI projects to allowable costs, deliverables, reporting,.</a:t>
-            </a:r>
-            <a:endParaRPr lang="en-US" sz="1380" dirty="0"/>
-          </a:p>
-          <a:p>
-            <a:r>
-              <a:rPr lang="en-US" sz="1380" dirty="0">
+              <a:t>This module focuses on connecting AI projects to allowable costs,.</a:t>
+            </a:r>
+            <a:endParaRPr lang="en-US" sz="1220" dirty="0"/>
+          </a:p>
+          <a:p>
+            <a:pPr indent="0" marL="0">
+              <a:buNone/>
+            </a:pPr>
+            <a:r>
+              <a:rPr lang="en-US" sz="1220" dirty="0">
                 <a:solidFill>
                   <a:srgbClr val="17364A"/>
                 </a:solidFill>
@@ -15746,13 +16024,16 @@
                 <a:ea typeface="Aptos" pitchFamily="34" charset="-122"/>
                 <a:cs typeface="Aptos" pitchFamily="34" charset="-120"/>
               </a:rPr>
-              <a:t>It is designed for public health staff who must translate responsible AI principles into.</a:t>
-            </a:r>
-            <a:endParaRPr lang="en-US" sz="1380" dirty="0"/>
-          </a:p>
-          <a:p>
-            <a:r>
-              <a:rPr lang="en-US" sz="1380" dirty="0">
+              <a:t>It is designed for public health staff who must translate.</a:t>
+            </a:r>
+            <a:endParaRPr lang="en-US" sz="1220" dirty="0"/>
+          </a:p>
+          <a:p>
+            <a:pPr indent="0" marL="0">
+              <a:buNone/>
+            </a:pPr>
+            <a:r>
+              <a:rPr lang="en-US" sz="1220" dirty="0">
                 <a:solidFill>
                   <a:srgbClr val="17364A"/>
                 </a:solidFill>
@@ -15760,9 +16041,9 @@
                 <a:ea typeface="Aptos" pitchFamily="34" charset="-122"/>
                 <a:cs typeface="Aptos" pitchFamily="34" charset="-120"/>
               </a:rPr>
-              <a:t>The module helps learners move beyond general awareness by producing a practical artifact.</a:t>
-            </a:r>
-            <a:endParaRPr lang="en-US" sz="1380" dirty="0"/>
+              <a:t>The module helps learners move beyond general awareness by.</a:t>
+            </a:r>
+            <a:endParaRPr lang="en-US" sz="1220" dirty="0"/>
           </a:p>
         </p:txBody>
       </p:sp>
@@ -15840,17 +16121,17 @@
         </p:nvSpPr>
         <p:spPr>
           <a:xfrm>
-            <a:off x="7799832" y="5001768"/>
-            <a:ext cx="3145536" cy="502920"/>
-          </a:xfrm>
-          <a:prstGeom prst="rect">
-            <a:avLst/>
-          </a:prstGeom>
-          <a:noFill/>
-          <a:ln/>
-        </p:spPr>
-        <p:txBody>
-          <a:bodyPr wrap="square" lIns="0" tIns="0" rIns="0" bIns="0" rtlCol="0" anchor="t">
+            <a:off x="7799832" y="4974336"/>
+            <a:ext cx="3145536" cy="576072"/>
+          </a:xfrm>
+          <a:prstGeom prst="rect">
+            <a:avLst/>
+          </a:prstGeom>
+          <a:noFill/>
+          <a:ln/>
+        </p:spPr>
+        <p:txBody>
+          <a:bodyPr wrap="square" lIns="254" tIns="254" rIns="254" bIns="254" rtlCol="0" anchor="t">
             <a:normAutofit/>
           </a:bodyPr>
           <a:lstStyle/>
@@ -15859,7 +16140,7 @@
               <a:buNone/>
             </a:pPr>
             <a:r>
-              <a:rPr lang="en-US" sz="1550" dirty="0">
+              <a:rPr lang="en-US" sz="1320" dirty="0">
                 <a:solidFill>
                   <a:srgbClr val="17364A"/>
                 </a:solidFill>
@@ -15867,9 +16148,9 @@
                 <a:ea typeface="Aptos" pitchFamily="34" charset="-122"/>
                 <a:cs typeface="Aptos" pitchFamily="34" charset="-120"/>
               </a:rPr>
-              <a:t>Use the concept to clarify workflow changes, dependencies, staffing, procurement requirements, training needs, and implementation checkpoints.</a:t>
-            </a:r>
-            <a:endParaRPr lang="en-US" sz="1550" dirty="0"/>
+              <a:t>Use the concept to clarify workflow changes, dependencies, staffing, procurement requirements, training needs, and.</a:t>
+            </a:r>
+            <a:endParaRPr lang="en-US" sz="1320" dirty="0"/>
           </a:p>
         </p:txBody>
       </p:sp>
@@ -16170,49 +16451,58 @@
           <a:ln/>
         </p:spPr>
         <p:txBody>
-          <a:bodyPr wrap="square" lIns="635" tIns="635" rIns="635" bIns="635" rtlCol="0" anchor="t">
+          <a:bodyPr wrap="square" lIns="1016" tIns="1016" rIns="1016" bIns="1016" rtlCol="0" anchor="t">
             <a:normAutofit/>
           </a:bodyPr>
           <a:lstStyle/>
           <a:p>
+            <a:pPr indent="0" marL="0">
+              <a:buNone/>
+            </a:pPr>
             <a:r>
               <a:rPr lang="en-US" sz="2100" dirty="0">
                 <a:solidFill>
-                  <a:srgbClr val="17364A"/>
-                </a:solidFill>
-                <a:latin typeface="Aptos" pitchFamily="34" charset="0"/>
-                <a:ea typeface="Aptos" pitchFamily="34" charset="-122"/>
-                <a:cs typeface="Aptos" pitchFamily="34" charset="-120"/>
-              </a:rPr>
-              <a:t>Decision right: The authority to approve, deny, modify, pause, or escalate an AI use case or.</a:t>
+                  <a:srgbClr val="003A63"/>
+                </a:solidFill>
+                <a:latin typeface="Aptos" pitchFamily="34" charset="0"/>
+                <a:ea typeface="Aptos" pitchFamily="34" charset="-122"/>
+                <a:cs typeface="Aptos" pitchFamily="34" charset="-120"/>
+              </a:rPr>
+              <a:t>• Decision right: The authority to approve, deny, modify, pause, or escalate an AI use case or.</a:t>
             </a:r>
             <a:endParaRPr lang="en-US" sz="2100" dirty="0"/>
           </a:p>
           <a:p>
+            <a:pPr indent="0" marL="0">
+              <a:buNone/>
+            </a:pPr>
             <a:r>
               <a:rPr lang="en-US" sz="2100" dirty="0">
                 <a:solidFill>
-                  <a:srgbClr val="17364A"/>
-                </a:solidFill>
-                <a:latin typeface="Aptos" pitchFamily="34" charset="0"/>
-                <a:ea typeface="Aptos" pitchFamily="34" charset="-122"/>
-                <a:cs typeface="Aptos" pitchFamily="34" charset="-120"/>
-              </a:rPr>
-              <a:t>Evidence artifact: A document, log, checklist, test result, approval record, or review note that.</a:t>
+                  <a:srgbClr val="003A63"/>
+                </a:solidFill>
+                <a:latin typeface="Aptos" pitchFamily="34" charset="0"/>
+                <a:ea typeface="Aptos" pitchFamily="34" charset="-122"/>
+                <a:cs typeface="Aptos" pitchFamily="34" charset="-120"/>
+              </a:rPr>
+              <a:t>• Evidence artifact: A document, log, checklist, test result, approval record, or review note.</a:t>
             </a:r>
             <a:endParaRPr lang="en-US" sz="2100" dirty="0"/>
           </a:p>
           <a:p>
+            <a:pPr indent="0" marL="0">
+              <a:buNone/>
+            </a:pPr>
             <a:r>
               <a:rPr lang="en-US" sz="2100" dirty="0">
                 <a:solidFill>
-                  <a:srgbClr val="17364A"/>
-                </a:solidFill>
-                <a:latin typeface="Aptos" pitchFamily="34" charset="0"/>
-                <a:ea typeface="Aptos" pitchFamily="34" charset="-122"/>
-                <a:cs typeface="Aptos" pitchFamily="34" charset="-120"/>
-              </a:rPr>
-              <a:t>Escalation pathway: A defined route for raising concerns to the appropriate reviewer or decision-maker.</a:t>
+                  <a:srgbClr val="003A63"/>
+                </a:solidFill>
+                <a:latin typeface="Aptos" pitchFamily="34" charset="0"/>
+                <a:ea typeface="Aptos" pitchFamily="34" charset="-122"/>
+                <a:cs typeface="Aptos" pitchFamily="34" charset="-120"/>
+              </a:rPr>
+              <a:t>• Escalation pathway: A defined route for raising concerns to the appropriate reviewer or.</a:t>
             </a:r>
             <a:endParaRPr lang="en-US" sz="2100" dirty="0"/>
           </a:p>
@@ -16292,17 +16582,17 @@
         </p:nvSpPr>
         <p:spPr>
           <a:xfrm>
-            <a:off x="7799832" y="1828800"/>
-            <a:ext cx="3145536" cy="685800"/>
-          </a:xfrm>
-          <a:prstGeom prst="rect">
-            <a:avLst/>
-          </a:prstGeom>
-          <a:noFill/>
-          <a:ln/>
-        </p:spPr>
-        <p:txBody>
-          <a:bodyPr wrap="square" lIns="0" tIns="0" rIns="0" bIns="0" rtlCol="0" anchor="t">
+            <a:off x="7799832" y="1801368"/>
+            <a:ext cx="3145536" cy="758952"/>
+          </a:xfrm>
+          <a:prstGeom prst="rect">
+            <a:avLst/>
+          </a:prstGeom>
+          <a:noFill/>
+          <a:ln/>
+        </p:spPr>
+        <p:txBody>
+          <a:bodyPr wrap="square" lIns="254" tIns="254" rIns="254" bIns="254" rtlCol="0" anchor="t">
             <a:normAutofit/>
           </a:bodyPr>
           <a:lstStyle/>
@@ -16311,7 +16601,7 @@
               <a:buNone/>
             </a:pPr>
             <a:r>
-              <a:rPr lang="en-US" sz="1550" dirty="0">
+              <a:rPr lang="en-US" sz="1320" dirty="0">
                 <a:solidFill>
                   <a:srgbClr val="17364A"/>
                 </a:solidFill>
@@ -16321,7 +16611,7 @@
               </a:rPr>
               <a:t>Decision right: The authority to approve, deny, modify, pause, or escalate an AI use case or.</a:t>
             </a:r>
-            <a:endParaRPr lang="en-US" sz="1550" dirty="0"/>
+            <a:endParaRPr lang="en-US" sz="1320" dirty="0"/>
           </a:p>
         </p:txBody>
       </p:sp>
@@ -16409,13 +16699,16 @@
           <a:ln/>
         </p:spPr>
         <p:txBody>
-          <a:bodyPr wrap="square" lIns="254" tIns="254" rIns="254" bIns="254" rtlCol="0" anchor="t">
+          <a:bodyPr wrap="square" lIns="508" tIns="508" rIns="508" bIns="508" rtlCol="0" anchor="t">
             <a:normAutofit/>
           </a:bodyPr>
           <a:lstStyle/>
           <a:p>
-            <a:r>
-              <a:rPr lang="en-US" sz="1380" dirty="0">
+            <a:pPr indent="0" marL="0">
+              <a:buNone/>
+            </a:pPr>
+            <a:r>
+              <a:rPr lang="en-US" sz="1220" dirty="0">
                 <a:solidFill>
                   <a:srgbClr val="17364A"/>
                 </a:solidFill>
@@ -16423,13 +16716,16 @@
                 <a:ea typeface="Aptos" pitchFamily="34" charset="-122"/>
                 <a:cs typeface="Aptos" pitchFamily="34" charset="-120"/>
               </a:rPr>
-              <a:t>Decision right: The authority to approve, deny, modify, pause, or escalate an AI use case.</a:t>
-            </a:r>
-            <a:endParaRPr lang="en-US" sz="1380" dirty="0"/>
-          </a:p>
-          <a:p>
-            <a:r>
-              <a:rPr lang="en-US" sz="1380" dirty="0">
+              <a:t>Decision right: The authority to approve, deny, modify, pause, or.</a:t>
+            </a:r>
+            <a:endParaRPr lang="en-US" sz="1220" dirty="0"/>
+          </a:p>
+          <a:p>
+            <a:pPr indent="0" marL="0">
+              <a:buNone/>
+            </a:pPr>
+            <a:r>
+              <a:rPr lang="en-US" sz="1220" dirty="0">
                 <a:solidFill>
                   <a:srgbClr val="17364A"/>
                 </a:solidFill>
@@ -16437,13 +16733,16 @@
                 <a:ea typeface="Aptos" pitchFamily="34" charset="-122"/>
                 <a:cs typeface="Aptos" pitchFamily="34" charset="-120"/>
               </a:rPr>
-              <a:t>Evidence artifact: A document, log, checklist, test result, approval record, or review.</a:t>
-            </a:r>
-            <a:endParaRPr lang="en-US" sz="1380" dirty="0"/>
-          </a:p>
-          <a:p>
-            <a:r>
-              <a:rPr lang="en-US" sz="1380" dirty="0">
+              <a:t>Evidence artifact: A document, log, checklist, test result,.</a:t>
+            </a:r>
+            <a:endParaRPr lang="en-US" sz="1220" dirty="0"/>
+          </a:p>
+          <a:p>
+            <a:pPr indent="0" marL="0">
+              <a:buNone/>
+            </a:pPr>
+            <a:r>
+              <a:rPr lang="en-US" sz="1220" dirty="0">
                 <a:solidFill>
                   <a:srgbClr val="17364A"/>
                 </a:solidFill>
@@ -16451,9 +16750,9 @@
                 <a:ea typeface="Aptos" pitchFamily="34" charset="-122"/>
                 <a:cs typeface="Aptos" pitchFamily="34" charset="-120"/>
               </a:rPr>
-              <a:t>Accountability owner: The person or role responsible for ensuring that an AI use case is.</a:t>
-            </a:r>
-            <a:endParaRPr lang="en-US" sz="1380" dirty="0"/>
+              <a:t>Accountability owner: The person or role responsible for ensuring.</a:t>
+            </a:r>
+            <a:endParaRPr lang="en-US" sz="1220" dirty="0"/>
           </a:p>
         </p:txBody>
       </p:sp>
@@ -16531,17 +16830,17 @@
         </p:nvSpPr>
         <p:spPr>
           <a:xfrm>
-            <a:off x="7799832" y="5001768"/>
-            <a:ext cx="3145536" cy="502920"/>
-          </a:xfrm>
-          <a:prstGeom prst="rect">
-            <a:avLst/>
-          </a:prstGeom>
-          <a:noFill/>
-          <a:ln/>
-        </p:spPr>
-        <p:txBody>
-          <a:bodyPr wrap="square" lIns="0" tIns="0" rIns="0" bIns="0" rtlCol="0" anchor="t">
+            <a:off x="7799832" y="4974336"/>
+            <a:ext cx="3145536" cy="576072"/>
+          </a:xfrm>
+          <a:prstGeom prst="rect">
+            <a:avLst/>
+          </a:prstGeom>
+          <a:noFill/>
+          <a:ln/>
+        </p:spPr>
+        <p:txBody>
+          <a:bodyPr wrap="square" lIns="254" tIns="254" rIns="254" bIns="254" rtlCol="0" anchor="t">
             <a:normAutofit/>
           </a:bodyPr>
           <a:lstStyle/>
@@ -16550,7 +16849,7 @@
               <a:buNone/>
             </a:pPr>
             <a:r>
-              <a:rPr lang="en-US" sz="1550" dirty="0">
+              <a:rPr lang="en-US" sz="1320" dirty="0">
                 <a:solidFill>
                   <a:srgbClr val="17364A"/>
                 </a:solidFill>
@@ -16558,9 +16857,9 @@
                 <a:ea typeface="Aptos" pitchFamily="34" charset="-122"/>
                 <a:cs typeface="Aptos" pitchFamily="34" charset="-120"/>
               </a:rPr>
-              <a:t>Use the concept to clarify workflow changes, dependencies, staffing, procurement requirements, training needs, and implementation checkpoints.</a:t>
-            </a:r>
-            <a:endParaRPr lang="en-US" sz="1550" dirty="0"/>
+              <a:t>Use the concept to clarify workflow changes, dependencies, staffing, procurement requirements, training needs, and.</a:t>
+            </a:r>
+            <a:endParaRPr lang="en-US" sz="1320" dirty="0"/>
           </a:p>
         </p:txBody>
       </p:sp>
@@ -16861,49 +17160,58 @@
           <a:ln/>
         </p:spPr>
         <p:txBody>
-          <a:bodyPr wrap="square" lIns="635" tIns="635" rIns="635" bIns="635" rtlCol="0" anchor="t">
+          <a:bodyPr wrap="square" lIns="1016" tIns="1016" rIns="1016" bIns="1016" rtlCol="0" anchor="t">
             <a:normAutofit/>
           </a:bodyPr>
           <a:lstStyle/>
           <a:p>
+            <a:pPr indent="0" marL="0">
+              <a:buNone/>
+            </a:pPr>
             <a:r>
               <a:rPr lang="en-US" sz="2100" dirty="0">
                 <a:solidFill>
-                  <a:srgbClr val="17364A"/>
-                </a:solidFill>
-                <a:latin typeface="Aptos" pitchFamily="34" charset="0"/>
-                <a:ea typeface="Aptos" pitchFamily="34" charset="-122"/>
-                <a:cs typeface="Aptos" pitchFamily="34" charset="-120"/>
-              </a:rPr>
-              <a:t>This module provides national-level training guidance for public health agencies and partners.</a:t>
+                  <a:srgbClr val="003A63"/>
+                </a:solidFill>
+                <a:latin typeface="Aptos" pitchFamily="34" charset="0"/>
+                <a:ea typeface="Aptos" pitchFamily="34" charset="-122"/>
+                <a:cs typeface="Aptos" pitchFamily="34" charset="-120"/>
+              </a:rPr>
+              <a:t>• This module provides national-level training guidance for public health agencies and partners.</a:t>
             </a:r>
             <a:endParaRPr lang="en-US" sz="2100" dirty="0"/>
           </a:p>
           <a:p>
+            <a:pPr indent="0" marL="0">
+              <a:buNone/>
+            </a:pPr>
             <a:r>
               <a:rPr lang="en-US" sz="2100" dirty="0">
                 <a:solidFill>
-                  <a:srgbClr val="17364A"/>
-                </a:solidFill>
-                <a:latin typeface="Aptos" pitchFamily="34" charset="0"/>
-                <a:ea typeface="Aptos" pitchFamily="34" charset="-122"/>
-                <a:cs typeface="Aptos" pitchFamily="34" charset="-120"/>
-              </a:rPr>
-              <a:t>It is not legal advice and does not replace review by agency legal counsel, privacy officers,.</a:t>
+                  <a:srgbClr val="003A63"/>
+                </a:solidFill>
+                <a:latin typeface="Aptos" pitchFamily="34" charset="0"/>
+                <a:ea typeface="Aptos" pitchFamily="34" charset="-122"/>
+                <a:cs typeface="Aptos" pitchFamily="34" charset="-120"/>
+              </a:rPr>
+              <a:t>• It is not legal advice and does not replace review by agency legal counsel, privacy officers,.</a:t>
             </a:r>
             <a:endParaRPr lang="en-US" sz="2100" dirty="0"/>
           </a:p>
           <a:p>
+            <a:pPr indent="0" marL="0">
+              <a:buNone/>
+            </a:pPr>
             <a:r>
               <a:rPr lang="en-US" sz="2100" dirty="0">
                 <a:solidFill>
-                  <a:srgbClr val="17364A"/>
-                </a:solidFill>
-                <a:latin typeface="Aptos" pitchFamily="34" charset="0"/>
-                <a:ea typeface="Aptos" pitchFamily="34" charset="-122"/>
-                <a:cs typeface="Aptos" pitchFamily="34" charset="-120"/>
-              </a:rPr>
-              <a:t>Requirements may vary by state, locality, territory, Tribe, agency, funding source, data-sharing.</a:t>
+                  <a:srgbClr val="003A63"/>
+                </a:solidFill>
+                <a:latin typeface="Aptos" pitchFamily="34" charset="0"/>
+                <a:ea typeface="Aptos" pitchFamily="34" charset="-122"/>
+                <a:cs typeface="Aptos" pitchFamily="34" charset="-120"/>
+              </a:rPr>
+              <a:t>• Requirements may vary by state, locality, territory, Tribe, agency, funding source,.</a:t>
             </a:r>
             <a:endParaRPr lang="en-US" sz="2100" dirty="0"/>
           </a:p>
@@ -16983,17 +17291,17 @@
         </p:nvSpPr>
         <p:spPr>
           <a:xfrm>
-            <a:off x="7799832" y="1828800"/>
-            <a:ext cx="3145536" cy="685800"/>
-          </a:xfrm>
-          <a:prstGeom prst="rect">
-            <a:avLst/>
-          </a:prstGeom>
-          <a:noFill/>
-          <a:ln/>
-        </p:spPr>
-        <p:txBody>
-          <a:bodyPr wrap="square" lIns="0" tIns="0" rIns="0" bIns="0" rtlCol="0" anchor="t">
+            <a:off x="7799832" y="1801368"/>
+            <a:ext cx="3145536" cy="758952"/>
+          </a:xfrm>
+          <a:prstGeom prst="rect">
+            <a:avLst/>
+          </a:prstGeom>
+          <a:noFill/>
+          <a:ln/>
+        </p:spPr>
+        <p:txBody>
+          <a:bodyPr wrap="square" lIns="254" tIns="254" rIns="254" bIns="254" rtlCol="0" anchor="t">
             <a:normAutofit/>
           </a:bodyPr>
           <a:lstStyle/>
@@ -17002,7 +17310,7 @@
               <a:buNone/>
             </a:pPr>
             <a:r>
-              <a:rPr lang="en-US" sz="1550" dirty="0">
+              <a:rPr lang="en-US" sz="1320" dirty="0">
                 <a:solidFill>
                   <a:srgbClr val="17364A"/>
                 </a:solidFill>
@@ -17012,7 +17320,7 @@
               </a:rPr>
               <a:t>This module provides national-level training guidance for public health agencies and partners.</a:t>
             </a:r>
-            <a:endParaRPr lang="en-US" sz="1550" dirty="0"/>
+            <a:endParaRPr lang="en-US" sz="1320" dirty="0"/>
           </a:p>
         </p:txBody>
       </p:sp>
@@ -17100,13 +17408,16 @@
           <a:ln/>
         </p:spPr>
         <p:txBody>
-          <a:bodyPr wrap="square" lIns="254" tIns="254" rIns="254" bIns="254" rtlCol="0" anchor="t">
+          <a:bodyPr wrap="square" lIns="508" tIns="508" rIns="508" bIns="508" rtlCol="0" anchor="t">
             <a:normAutofit/>
           </a:bodyPr>
           <a:lstStyle/>
           <a:p>
-            <a:r>
-              <a:rPr lang="en-US" sz="1380" dirty="0">
+            <a:pPr indent="0" marL="0">
+              <a:buNone/>
+            </a:pPr>
+            <a:r>
+              <a:rPr lang="en-US" sz="1220" dirty="0">
                 <a:solidFill>
                   <a:srgbClr val="17364A"/>
                 </a:solidFill>
@@ -17114,13 +17425,16 @@
                 <a:ea typeface="Aptos" pitchFamily="34" charset="-122"/>
                 <a:cs typeface="Aptos" pitchFamily="34" charset="-120"/>
               </a:rPr>
-              <a:t>It is not legal advice and does not replace review by agency legal counsel, privacy.</a:t>
-            </a:r>
-            <a:endParaRPr lang="en-US" sz="1380" dirty="0"/>
-          </a:p>
-          <a:p>
-            <a:r>
-              <a:rPr lang="en-US" sz="1380" dirty="0">
+              <a:t>It is not legal advice and does not replace review by agency legal.</a:t>
+            </a:r>
+            <a:endParaRPr lang="en-US" sz="1220" dirty="0"/>
+          </a:p>
+          <a:p>
+            <a:pPr indent="0" marL="0">
+              <a:buNone/>
+            </a:pPr>
+            <a:r>
+              <a:rPr lang="en-US" sz="1220" dirty="0">
                 <a:solidFill>
                   <a:srgbClr val="17364A"/>
                 </a:solidFill>
@@ -17128,13 +17442,16 @@
                 <a:ea typeface="Aptos" pitchFamily="34" charset="-122"/>
                 <a:cs typeface="Aptos" pitchFamily="34" charset="-120"/>
               </a:rPr>
-              <a:t>Requirements may vary by state, locality, territory, Tribe, agency, funding source,.</a:t>
-            </a:r>
-            <a:endParaRPr lang="en-US" sz="1380" dirty="0"/>
-          </a:p>
-          <a:p>
-            <a:r>
-              <a:rPr lang="en-US" sz="1380" dirty="0">
+              <a:t>Requirements may vary by state, locality, territory, Tribe,.</a:t>
+            </a:r>
+            <a:endParaRPr lang="en-US" sz="1220" dirty="0"/>
+          </a:p>
+          <a:p>
+            <a:pPr indent="0" marL="0">
+              <a:buNone/>
+            </a:pPr>
+            <a:r>
+              <a:rPr lang="en-US" sz="1220" dirty="0">
                 <a:solidFill>
                   <a:srgbClr val="17364A"/>
                 </a:solidFill>
@@ -17142,9 +17459,9 @@
                 <a:ea typeface="Aptos" pitchFamily="34" charset="-122"/>
                 <a:cs typeface="Aptos" pitchFamily="34" charset="-120"/>
               </a:rPr>
-              <a:t>Learners should use this module to identify the issues that require review and should.</a:t>
-            </a:r>
-            <a:endParaRPr lang="en-US" sz="1380" dirty="0"/>
+              <a:t>Learners should use this module to identify the issues that.</a:t>
+            </a:r>
+            <a:endParaRPr lang="en-US" sz="1220" dirty="0"/>
           </a:p>
         </p:txBody>
       </p:sp>
@@ -17222,17 +17539,17 @@
         </p:nvSpPr>
         <p:spPr>
           <a:xfrm>
-            <a:off x="7799832" y="5001768"/>
-            <a:ext cx="3145536" cy="502920"/>
-          </a:xfrm>
-          <a:prstGeom prst="rect">
-            <a:avLst/>
-          </a:prstGeom>
-          <a:noFill/>
-          <a:ln/>
-        </p:spPr>
-        <p:txBody>
-          <a:bodyPr wrap="square" lIns="0" tIns="0" rIns="0" bIns="0" rtlCol="0" anchor="t">
+            <a:off x="7799832" y="4974336"/>
+            <a:ext cx="3145536" cy="576072"/>
+          </a:xfrm>
+          <a:prstGeom prst="rect">
+            <a:avLst/>
+          </a:prstGeom>
+          <a:noFill/>
+          <a:ln/>
+        </p:spPr>
+        <p:txBody>
+          <a:bodyPr wrap="square" lIns="254" tIns="254" rIns="254" bIns="254" rtlCol="0" anchor="t">
             <a:normAutofit/>
           </a:bodyPr>
           <a:lstStyle/>
@@ -17241,7 +17558,7 @@
               <a:buNone/>
             </a:pPr>
             <a:r>
-              <a:rPr lang="en-US" sz="1550" dirty="0">
+              <a:rPr lang="en-US" sz="1320" dirty="0">
                 <a:solidFill>
                   <a:srgbClr val="17364A"/>
                 </a:solidFill>
@@ -17249,9 +17566,9 @@
                 <a:ea typeface="Aptos" pitchFamily="34" charset="-122"/>
                 <a:cs typeface="Aptos" pitchFamily="34" charset="-120"/>
               </a:rPr>
-              <a:t>Translate this concept into clear decision rights, review steps, documentation expectations, and escalation paths before an AI-supported workflow is approved.</a:t>
-            </a:r>
-            <a:endParaRPr lang="en-US" sz="1550" dirty="0"/>
+              <a:t>Translate this concept into clear decision rights, review steps, documentation expectations, and escalation paths before.</a:t>
+            </a:r>
+            <a:endParaRPr lang="en-US" sz="1320" dirty="0"/>
           </a:p>
         </p:txBody>
       </p:sp>
@@ -17552,49 +17869,58 @@
           <a:ln/>
         </p:spPr>
         <p:txBody>
-          <a:bodyPr wrap="square" lIns="635" tIns="635" rIns="635" bIns="635" rtlCol="0" anchor="t">
+          <a:bodyPr wrap="square" lIns="1016" tIns="1016" rIns="1016" bIns="1016" rtlCol="0" anchor="t">
             <a:normAutofit/>
           </a:bodyPr>
           <a:lstStyle/>
           <a:p>
+            <a:pPr indent="0" marL="0">
+              <a:buNone/>
+            </a:pPr>
             <a:r>
               <a:rPr lang="en-US" sz="2100" dirty="0">
                 <a:solidFill>
-                  <a:srgbClr val="17364A"/>
-                </a:solidFill>
-                <a:latin typeface="Aptos" pitchFamily="34" charset="0"/>
-                <a:ea typeface="Aptos" pitchFamily="34" charset="-122"/>
-                <a:cs typeface="Aptos" pitchFamily="34" charset="-120"/>
-              </a:rPr>
-              <a:t>Grant and Funding Management for AI Projects matters because AI adoption changes how public health.</a:t>
+                  <a:srgbClr val="003A63"/>
+                </a:solidFill>
+                <a:latin typeface="Aptos" pitchFamily="34" charset="0"/>
+                <a:ea typeface="Aptos" pitchFamily="34" charset="-122"/>
+                <a:cs typeface="Aptos" pitchFamily="34" charset="-120"/>
+              </a:rPr>
+              <a:t>• Grant and Funding Management for AI Projects matters because AI adoption changes how public.</a:t>
             </a:r>
             <a:endParaRPr lang="en-US" sz="2100" dirty="0"/>
           </a:p>
           <a:p>
+            <a:pPr indent="0" marL="0">
+              <a:buNone/>
+            </a:pPr>
             <a:r>
               <a:rPr lang="en-US" sz="2100" dirty="0">
                 <a:solidFill>
-                  <a:srgbClr val="17364A"/>
-                </a:solidFill>
-                <a:latin typeface="Aptos" pitchFamily="34" charset="0"/>
-                <a:ea typeface="Aptos" pitchFamily="34" charset="-122"/>
-                <a:cs typeface="Aptos" pitchFamily="34" charset="-120"/>
-              </a:rPr>
-              <a:t>Without a structured approach, staff may rely on informal practices, vendor assurances, or one-time.</a:t>
+                  <a:srgbClr val="003A63"/>
+                </a:solidFill>
+                <a:latin typeface="Aptos" pitchFamily="34" charset="0"/>
+                <a:ea typeface="Aptos" pitchFamily="34" charset="-122"/>
+                <a:cs typeface="Aptos" pitchFamily="34" charset="-120"/>
+              </a:rPr>
+              <a:t>• Without a structured approach, staff may rely on informal practices, vendor assurances, or.</a:t>
             </a:r>
             <a:endParaRPr lang="en-US" sz="2100" dirty="0"/>
           </a:p>
           <a:p>
+            <a:pPr indent="0" marL="0">
+              <a:buNone/>
+            </a:pPr>
             <a:r>
               <a:rPr lang="en-US" sz="2100" dirty="0">
                 <a:solidFill>
-                  <a:srgbClr val="17364A"/>
-                </a:solidFill>
-                <a:latin typeface="Aptos" pitchFamily="34" charset="0"/>
-                <a:ea typeface="Aptos" pitchFamily="34" charset="-122"/>
-                <a:cs typeface="Aptos" pitchFamily="34" charset="-120"/>
-              </a:rPr>
-              <a:t>Public health agencies operate under legal authorities, public accountability, resource constraints,.</a:t>
+                  <a:srgbClr val="003A63"/>
+                </a:solidFill>
+                <a:latin typeface="Aptos" pitchFamily="34" charset="0"/>
+                <a:ea typeface="Aptos" pitchFamily="34" charset="-122"/>
+                <a:cs typeface="Aptos" pitchFamily="34" charset="-120"/>
+              </a:rPr>
+              <a:t>• Public health agencies operate under legal authorities, public accountability, resource.</a:t>
             </a:r>
             <a:endParaRPr lang="en-US" sz="2100" dirty="0"/>
           </a:p>
@@ -17674,17 +18000,17 @@
         </p:nvSpPr>
         <p:spPr>
           <a:xfrm>
-            <a:off x="7799832" y="1828800"/>
-            <a:ext cx="3145536" cy="685800"/>
-          </a:xfrm>
-          <a:prstGeom prst="rect">
-            <a:avLst/>
-          </a:prstGeom>
-          <a:noFill/>
-          <a:ln/>
-        </p:spPr>
-        <p:txBody>
-          <a:bodyPr wrap="square" lIns="0" tIns="0" rIns="0" bIns="0" rtlCol="0" anchor="t">
+            <a:off x="7799832" y="1801368"/>
+            <a:ext cx="3145536" cy="758952"/>
+          </a:xfrm>
+          <a:prstGeom prst="rect">
+            <a:avLst/>
+          </a:prstGeom>
+          <a:noFill/>
+          <a:ln/>
+        </p:spPr>
+        <p:txBody>
+          <a:bodyPr wrap="square" lIns="254" tIns="254" rIns="254" bIns="254" rtlCol="0" anchor="t">
             <a:normAutofit/>
           </a:bodyPr>
           <a:lstStyle/>
@@ -17693,7 +18019,7 @@
               <a:buNone/>
             </a:pPr>
             <a:r>
-              <a:rPr lang="en-US" sz="1550" dirty="0">
+              <a:rPr lang="en-US" sz="1320" dirty="0">
                 <a:solidFill>
                   <a:srgbClr val="17364A"/>
                 </a:solidFill>
@@ -17703,7 +18029,7 @@
               </a:rPr>
               <a:t>Grant and Funding Management for AI Projects matters because AI adoption changes how public health.</a:t>
             </a:r>
-            <a:endParaRPr lang="en-US" sz="1550" dirty="0"/>
+            <a:endParaRPr lang="en-US" sz="1320" dirty="0"/>
           </a:p>
         </p:txBody>
       </p:sp>
@@ -17791,13 +18117,16 @@
           <a:ln/>
         </p:spPr>
         <p:txBody>
-          <a:bodyPr wrap="square" lIns="254" tIns="254" rIns="254" bIns="254" rtlCol="0" anchor="t">
+          <a:bodyPr wrap="square" lIns="508" tIns="508" rIns="508" bIns="508" rtlCol="0" anchor="t">
             <a:normAutofit/>
           </a:bodyPr>
           <a:lstStyle/>
           <a:p>
-            <a:r>
-              <a:rPr lang="en-US" sz="1380" dirty="0">
+            <a:pPr indent="0" marL="0">
+              <a:buNone/>
+            </a:pPr>
+            <a:r>
+              <a:rPr lang="en-US" sz="1220" dirty="0">
                 <a:solidFill>
                   <a:srgbClr val="17364A"/>
                 </a:solidFill>
@@ -17805,13 +18134,16 @@
                 <a:ea typeface="Aptos" pitchFamily="34" charset="-122"/>
                 <a:cs typeface="Aptos" pitchFamily="34" charset="-120"/>
               </a:rPr>
-              <a:t>Grant and Funding Management for AI Projects matters because AI adoption changes how.</a:t>
-            </a:r>
-            <a:endParaRPr lang="en-US" sz="1380" dirty="0"/>
-          </a:p>
-          <a:p>
-            <a:r>
-              <a:rPr lang="en-US" sz="1380" dirty="0">
+              <a:t>Grant and Funding Management for AI Projects matters because AI.</a:t>
+            </a:r>
+            <a:endParaRPr lang="en-US" sz="1220" dirty="0"/>
+          </a:p>
+          <a:p>
+            <a:pPr indent="0" marL="0">
+              <a:buNone/>
+            </a:pPr>
+            <a:r>
+              <a:rPr lang="en-US" sz="1220" dirty="0">
                 <a:solidFill>
                   <a:srgbClr val="17364A"/>
                 </a:solidFill>
@@ -17819,13 +18151,16 @@
                 <a:ea typeface="Aptos" pitchFamily="34" charset="-122"/>
                 <a:cs typeface="Aptos" pitchFamily="34" charset="-120"/>
               </a:rPr>
-              <a:t>Without a structured approach, staff may rely on informal practices, vendor assurances, or.</a:t>
-            </a:r>
-            <a:endParaRPr lang="en-US" sz="1380" dirty="0"/>
-          </a:p>
-          <a:p>
-            <a:r>
-              <a:rPr lang="en-US" sz="1380" dirty="0">
+              <a:t>Without a structured approach, staff may rely on informal.</a:t>
+            </a:r>
+            <a:endParaRPr lang="en-US" sz="1220" dirty="0"/>
+          </a:p>
+          <a:p>
+            <a:pPr indent="0" marL="0">
+              <a:buNone/>
+            </a:pPr>
+            <a:r>
+              <a:rPr lang="en-US" sz="1220" dirty="0">
                 <a:solidFill>
                   <a:srgbClr val="17364A"/>
                 </a:solidFill>
@@ -17833,9 +18168,9 @@
                 <a:ea typeface="Aptos" pitchFamily="34" charset="-122"/>
                 <a:cs typeface="Aptos" pitchFamily="34" charset="-120"/>
               </a:rPr>
-              <a:t>Public health agencies operate under legal authorities, public accountability, resource.</a:t>
-            </a:r>
-            <a:endParaRPr lang="en-US" sz="1380" dirty="0"/>
+              <a:t>Public health agencies operate under legal authorities, public.</a:t>
+            </a:r>
+            <a:endParaRPr lang="en-US" sz="1220" dirty="0"/>
           </a:p>
         </p:txBody>
       </p:sp>
@@ -17913,17 +18248,17 @@
         </p:nvSpPr>
         <p:spPr>
           <a:xfrm>
-            <a:off x="7799832" y="5001768"/>
-            <a:ext cx="3145536" cy="502920"/>
-          </a:xfrm>
-          <a:prstGeom prst="rect">
-            <a:avLst/>
-          </a:prstGeom>
-          <a:noFill/>
-          <a:ln/>
-        </p:spPr>
-        <p:txBody>
-          <a:bodyPr wrap="square" lIns="0" tIns="0" rIns="0" bIns="0" rtlCol="0" anchor="t">
+            <a:off x="7799832" y="4974336"/>
+            <a:ext cx="3145536" cy="576072"/>
+          </a:xfrm>
+          <a:prstGeom prst="rect">
+            <a:avLst/>
+          </a:prstGeom>
+          <a:noFill/>
+          <a:ln/>
+        </p:spPr>
+        <p:txBody>
+          <a:bodyPr wrap="square" lIns="254" tIns="254" rIns="254" bIns="254" rtlCol="0" anchor="t">
             <a:normAutofit/>
           </a:bodyPr>
           <a:lstStyle/>
@@ -17932,7 +18267,7 @@
               <a:buNone/>
             </a:pPr>
             <a:r>
-              <a:rPr lang="en-US" sz="1550" dirty="0">
+              <a:rPr lang="en-US" sz="1320" dirty="0">
                 <a:solidFill>
                   <a:srgbClr val="17364A"/>
                 </a:solidFill>
@@ -17940,9 +18275,9 @@
                 <a:ea typeface="Aptos" pitchFamily="34" charset="-122"/>
                 <a:cs typeface="Aptos" pitchFamily="34" charset="-120"/>
               </a:rPr>
-              <a:t>Use the concept to clarify workflow changes, dependencies, staffing, procurement requirements, training needs, and implementation checkpoints.</a:t>
-            </a:r>
-            <a:endParaRPr lang="en-US" sz="1550" dirty="0"/>
+              <a:t>Use the concept to clarify workflow changes, dependencies, staffing, procurement requirements, training needs, and.</a:t>
+            </a:r>
+            <a:endParaRPr lang="en-US" sz="1320" dirty="0"/>
           </a:p>
         </p:txBody>
       </p:sp>

--- a/downloads/presentations/modules/pmg-310.pptx
+++ b/downloads/presentations/modules/pmg-310.pptx
@@ -3520,11 +3520,11 @@
         <p:spPr>
           <a:xfrm>
             <a:off x="7635240" y="1325880"/>
-            <a:ext cx="3474720" cy="1325880"/>
+            <a:ext cx="3474720" cy="1255471"/>
           </a:xfrm>
           <a:prstGeom prst="roundRect">
             <a:avLst>
-              <a:gd name="adj" fmla="val 8276"/>
+              <a:gd name="adj" fmla="val 8740"/>
             </a:avLst>
           </a:prstGeom>
           <a:solidFill>
@@ -3586,7 +3586,7 @@
         <p:spPr>
           <a:xfrm>
             <a:off x="7799832" y="1801368"/>
-            <a:ext cx="3145536" cy="758952"/>
+            <a:ext cx="3145536" cy="688543"/>
           </a:xfrm>
           <a:prstGeom prst="rect">
             <a:avLst/>
@@ -3626,12 +3626,12 @@
         </p:nvSpPr>
         <p:spPr>
           <a:xfrm>
-            <a:off x="7635240" y="2788920"/>
-            <a:ext cx="3474720" cy="1536192"/>
+            <a:off x="7635240" y="2718511"/>
+            <a:ext cx="3474720" cy="1328623"/>
           </a:xfrm>
           <a:prstGeom prst="roundRect">
             <a:avLst>
-              <a:gd name="adj" fmla="val 7143"/>
+              <a:gd name="adj" fmla="val 8259"/>
             </a:avLst>
           </a:prstGeom>
           <a:solidFill>
@@ -3653,7 +3653,7 @@
         </p:nvSpPr>
         <p:spPr>
           <a:xfrm>
-            <a:off x="7799832" y="2935224"/>
+            <a:off x="7799832" y="2864815"/>
             <a:ext cx="3145536" cy="256032"/>
           </a:xfrm>
           <a:prstGeom prst="rect">
@@ -3692,8 +3692,8 @@
         </p:nvSpPr>
         <p:spPr>
           <a:xfrm>
-            <a:off x="7818120" y="3300984"/>
-            <a:ext cx="3090672" cy="877824"/>
+            <a:off x="7818120" y="3230575"/>
+            <a:ext cx="3090672" cy="670255"/>
           </a:xfrm>
           <a:prstGeom prst="rect">
             <a:avLst/>
@@ -3767,12 +3767,12 @@
         </p:nvSpPr>
         <p:spPr>
           <a:xfrm>
-            <a:off x="7635240" y="4498848"/>
-            <a:ext cx="3474720" cy="1143000"/>
+            <a:off x="7635240" y="4184294"/>
+            <a:ext cx="3474720" cy="1466698"/>
           </a:xfrm>
           <a:prstGeom prst="roundRect">
             <a:avLst>
-              <a:gd name="adj" fmla="val 9600"/>
+              <a:gd name="adj" fmla="val 7481"/>
             </a:avLst>
           </a:prstGeom>
           <a:solidFill>
@@ -3794,7 +3794,7 @@
         </p:nvSpPr>
         <p:spPr>
           <a:xfrm>
-            <a:off x="7799832" y="4645152"/>
+            <a:off x="7799832" y="4330598"/>
             <a:ext cx="3145536" cy="256032"/>
           </a:xfrm>
           <a:prstGeom prst="rect">
@@ -3833,8 +3833,8 @@
         </p:nvSpPr>
         <p:spPr>
           <a:xfrm>
-            <a:off x="7799832" y="4974336"/>
-            <a:ext cx="3145536" cy="576072"/>
+            <a:off x="7799832" y="4659782"/>
+            <a:ext cx="3145536" cy="899770"/>
           </a:xfrm>
           <a:prstGeom prst="rect">
             <a:avLst/>
@@ -3860,7 +3860,7 @@
                 <a:ea typeface="Aptos" pitchFamily="34" charset="-122"/>
                 <a:cs typeface="Aptos" pitchFamily="34" charset="-120"/>
               </a:rPr>
-              <a:t>Use the concept to clarify workflow changes, dependencies, staffing, procurement requirements, training needs, and.</a:t>
+              <a:t>Use the concept to clarify workflow changes, dependencies, staffing, procurement requirements, training needs, and implementation checkpoints.</a:t>
             </a:r>
             <a:endParaRPr lang="en-US" sz="1320" dirty="0"/>
           </a:p>
@@ -4229,11 +4229,11 @@
         <p:spPr>
           <a:xfrm>
             <a:off x="7635240" y="1325880"/>
-            <a:ext cx="3474720" cy="1325880"/>
+            <a:ext cx="3474720" cy="1207008"/>
           </a:xfrm>
           <a:prstGeom prst="roundRect">
             <a:avLst>
-              <a:gd name="adj" fmla="val 8276"/>
+              <a:gd name="adj" fmla="val 9091"/>
             </a:avLst>
           </a:prstGeom>
           <a:solidFill>
@@ -4295,7 +4295,7 @@
         <p:spPr>
           <a:xfrm>
             <a:off x="7799832" y="1801368"/>
-            <a:ext cx="3145536" cy="758952"/>
+            <a:ext cx="3145536" cy="640080"/>
           </a:xfrm>
           <a:prstGeom prst="rect">
             <a:avLst/>
@@ -4335,12 +4335,12 @@
         </p:nvSpPr>
         <p:spPr>
           <a:xfrm>
-            <a:off x="7635240" y="2788920"/>
-            <a:ext cx="3474720" cy="1536192"/>
+            <a:off x="7635240" y="2670048"/>
+            <a:ext cx="3474720" cy="1377086"/>
           </a:xfrm>
           <a:prstGeom prst="roundRect">
             <a:avLst>
-              <a:gd name="adj" fmla="val 7143"/>
+              <a:gd name="adj" fmla="val 7968"/>
             </a:avLst>
           </a:prstGeom>
           <a:solidFill>
@@ -4362,7 +4362,7 @@
         </p:nvSpPr>
         <p:spPr>
           <a:xfrm>
-            <a:off x="7799832" y="2935224"/>
+            <a:off x="7799832" y="2816352"/>
             <a:ext cx="3145536" cy="256032"/>
           </a:xfrm>
           <a:prstGeom prst="rect">
@@ -4401,8 +4401,8 @@
         </p:nvSpPr>
         <p:spPr>
           <a:xfrm>
-            <a:off x="7818120" y="3300984"/>
-            <a:ext cx="3090672" cy="877824"/>
+            <a:off x="7818120" y="3182112"/>
+            <a:ext cx="3090672" cy="718718"/>
           </a:xfrm>
           <a:prstGeom prst="rect">
             <a:avLst/>
@@ -4476,12 +4476,12 @@
         </p:nvSpPr>
         <p:spPr>
           <a:xfrm>
-            <a:off x="7635240" y="4498848"/>
-            <a:ext cx="3474720" cy="1143000"/>
+            <a:off x="7635240" y="4184294"/>
+            <a:ext cx="3474720" cy="1466698"/>
           </a:xfrm>
           <a:prstGeom prst="roundRect">
             <a:avLst>
-              <a:gd name="adj" fmla="val 9600"/>
+              <a:gd name="adj" fmla="val 7481"/>
             </a:avLst>
           </a:prstGeom>
           <a:solidFill>
@@ -4503,7 +4503,7 @@
         </p:nvSpPr>
         <p:spPr>
           <a:xfrm>
-            <a:off x="7799832" y="4645152"/>
+            <a:off x="7799832" y="4330598"/>
             <a:ext cx="3145536" cy="256032"/>
           </a:xfrm>
           <a:prstGeom prst="rect">
@@ -4542,8 +4542,8 @@
         </p:nvSpPr>
         <p:spPr>
           <a:xfrm>
-            <a:off x="7799832" y="4974336"/>
-            <a:ext cx="3145536" cy="576072"/>
+            <a:off x="7799832" y="4659782"/>
+            <a:ext cx="3145536" cy="899770"/>
           </a:xfrm>
           <a:prstGeom prst="rect">
             <a:avLst/>
@@ -4569,7 +4569,7 @@
                 <a:ea typeface="Aptos" pitchFamily="34" charset="-122"/>
                 <a:cs typeface="Aptos" pitchFamily="34" charset="-120"/>
               </a:rPr>
-              <a:t>Use the concept to clarify workflow changes, dependencies, staffing, procurement requirements, training needs, and.</a:t>
+              <a:t>Use the concept to clarify workflow changes, dependencies, staffing, procurement requirements, training needs, and implementation checkpoints.</a:t>
             </a:r>
             <a:endParaRPr lang="en-US" sz="1320" dirty="0"/>
           </a:p>
@@ -4938,11 +4938,11 @@
         <p:spPr>
           <a:xfrm>
             <a:off x="7635240" y="1325880"/>
-            <a:ext cx="3474720" cy="1325880"/>
+            <a:ext cx="3474720" cy="1207008"/>
           </a:xfrm>
           <a:prstGeom prst="roundRect">
             <a:avLst>
-              <a:gd name="adj" fmla="val 8276"/>
+              <a:gd name="adj" fmla="val 9091"/>
             </a:avLst>
           </a:prstGeom>
           <a:solidFill>
@@ -5004,7 +5004,7 @@
         <p:spPr>
           <a:xfrm>
             <a:off x="7799832" y="1801368"/>
-            <a:ext cx="3145536" cy="758952"/>
+            <a:ext cx="3145536" cy="640080"/>
           </a:xfrm>
           <a:prstGeom prst="rect">
             <a:avLst/>
@@ -5044,7 +5044,7 @@
         </p:nvSpPr>
         <p:spPr>
           <a:xfrm>
-            <a:off x="7635240" y="2788920"/>
+            <a:off x="7635240" y="2670048"/>
             <a:ext cx="3474720" cy="1536192"/>
           </a:xfrm>
           <a:prstGeom prst="roundRect">
@@ -5071,7 +5071,7 @@
         </p:nvSpPr>
         <p:spPr>
           <a:xfrm>
-            <a:off x="7799832" y="2935224"/>
+            <a:off x="7799832" y="2816352"/>
             <a:ext cx="3145536" cy="256032"/>
           </a:xfrm>
           <a:prstGeom prst="rect">
@@ -5110,7 +5110,7 @@
         </p:nvSpPr>
         <p:spPr>
           <a:xfrm>
-            <a:off x="7818120" y="3300984"/>
+            <a:off x="7818120" y="3182112"/>
             <a:ext cx="3090672" cy="877824"/>
           </a:xfrm>
           <a:prstGeom prst="rect">
@@ -5185,12 +5185,12 @@
         </p:nvSpPr>
         <p:spPr>
           <a:xfrm>
-            <a:off x="7635240" y="4498848"/>
-            <a:ext cx="3474720" cy="1143000"/>
+            <a:off x="7635240" y="4343400"/>
+            <a:ext cx="3474720" cy="1255471"/>
           </a:xfrm>
           <a:prstGeom prst="roundRect">
             <a:avLst>
-              <a:gd name="adj" fmla="val 9600"/>
+              <a:gd name="adj" fmla="val 8740"/>
             </a:avLst>
           </a:prstGeom>
           <a:solidFill>
@@ -5212,7 +5212,7 @@
         </p:nvSpPr>
         <p:spPr>
           <a:xfrm>
-            <a:off x="7799832" y="4645152"/>
+            <a:off x="7799832" y="4489704"/>
             <a:ext cx="3145536" cy="256032"/>
           </a:xfrm>
           <a:prstGeom prst="rect">
@@ -5251,8 +5251,8 @@
         </p:nvSpPr>
         <p:spPr>
           <a:xfrm>
-            <a:off x="7799832" y="4974336"/>
-            <a:ext cx="3145536" cy="576072"/>
+            <a:off x="7799832" y="4818888"/>
+            <a:ext cx="3145536" cy="688543"/>
           </a:xfrm>
           <a:prstGeom prst="rect">
             <a:avLst/>
@@ -5278,7 +5278,7 @@
                 <a:ea typeface="Aptos" pitchFamily="34" charset="-122"/>
                 <a:cs typeface="Aptos" pitchFamily="34" charset="-120"/>
               </a:rPr>
-              <a:t>Identify what could go wrong, who could be affected, what safeguards are needed, and what evidence should be reviewed.</a:t>
+              <a:t>Identify what could go wrong, who could be affected, what safeguards are needed, and what evidence should be reviewed before use.</a:t>
             </a:r>
             <a:endParaRPr lang="en-US" sz="1320" dirty="0"/>
           </a:p>
@@ -5630,11 +5630,11 @@
         <p:spPr>
           <a:xfrm>
             <a:off x="7635240" y="1325880"/>
-            <a:ext cx="3474720" cy="1325880"/>
+            <a:ext cx="3474720" cy="1255471"/>
           </a:xfrm>
           <a:prstGeom prst="roundRect">
             <a:avLst>
-              <a:gd name="adj" fmla="val 8276"/>
+              <a:gd name="adj" fmla="val 8740"/>
             </a:avLst>
           </a:prstGeom>
           <a:solidFill>
@@ -5696,7 +5696,7 @@
         <p:spPr>
           <a:xfrm>
             <a:off x="7799832" y="1801368"/>
-            <a:ext cx="3145536" cy="758952"/>
+            <a:ext cx="3145536" cy="688543"/>
           </a:xfrm>
           <a:prstGeom prst="rect">
             <a:avLst/>
@@ -5736,12 +5736,12 @@
         </p:nvSpPr>
         <p:spPr>
           <a:xfrm>
-            <a:off x="7635240" y="2788920"/>
-            <a:ext cx="3474720" cy="1536192"/>
+            <a:off x="7635240" y="2718511"/>
+            <a:ext cx="3474720" cy="1328623"/>
           </a:xfrm>
           <a:prstGeom prst="roundRect">
             <a:avLst>
-              <a:gd name="adj" fmla="val 7143"/>
+              <a:gd name="adj" fmla="val 8259"/>
             </a:avLst>
           </a:prstGeom>
           <a:solidFill>
@@ -5763,7 +5763,7 @@
         </p:nvSpPr>
         <p:spPr>
           <a:xfrm>
-            <a:off x="7799832" y="2935224"/>
+            <a:off x="7799832" y="2864815"/>
             <a:ext cx="3145536" cy="256032"/>
           </a:xfrm>
           <a:prstGeom prst="rect">
@@ -5802,8 +5802,8 @@
         </p:nvSpPr>
         <p:spPr>
           <a:xfrm>
-            <a:off x="7818120" y="3300984"/>
-            <a:ext cx="3090672" cy="877824"/>
+            <a:off x="7818120" y="3230575"/>
+            <a:ext cx="3090672" cy="670255"/>
           </a:xfrm>
           <a:prstGeom prst="rect">
             <a:avLst/>
@@ -5860,12 +5860,12 @@
         </p:nvSpPr>
         <p:spPr>
           <a:xfrm>
-            <a:off x="7635240" y="4498848"/>
-            <a:ext cx="3474720" cy="1143000"/>
+            <a:off x="7635240" y="4184294"/>
+            <a:ext cx="3474720" cy="1466698"/>
           </a:xfrm>
           <a:prstGeom prst="roundRect">
             <a:avLst>
-              <a:gd name="adj" fmla="val 9600"/>
+              <a:gd name="adj" fmla="val 7481"/>
             </a:avLst>
           </a:prstGeom>
           <a:solidFill>
@@ -5887,7 +5887,7 @@
         </p:nvSpPr>
         <p:spPr>
           <a:xfrm>
-            <a:off x="7799832" y="4645152"/>
+            <a:off x="7799832" y="4330598"/>
             <a:ext cx="3145536" cy="256032"/>
           </a:xfrm>
           <a:prstGeom prst="rect">
@@ -5926,8 +5926,8 @@
         </p:nvSpPr>
         <p:spPr>
           <a:xfrm>
-            <a:off x="7799832" y="4974336"/>
-            <a:ext cx="3145536" cy="576072"/>
+            <a:off x="7799832" y="4659782"/>
+            <a:ext cx="3145536" cy="899770"/>
           </a:xfrm>
           <a:prstGeom prst="rect">
             <a:avLst/>
@@ -5953,7 +5953,7 @@
                 <a:ea typeface="Aptos" pitchFamily="34" charset="-122"/>
                 <a:cs typeface="Aptos" pitchFamily="34" charset="-120"/>
               </a:rPr>
-              <a:t>Use the concept to clarify workflow changes, dependencies, staffing, procurement requirements, training needs, and.</a:t>
+              <a:t>Use the concept to clarify workflow changes, dependencies, staffing, procurement requirements, training needs, and implementation checkpoints.</a:t>
             </a:r>
             <a:endParaRPr lang="en-US" sz="1320" dirty="0"/>
           </a:p>
@@ -6322,11 +6322,11 @@
         <p:spPr>
           <a:xfrm>
             <a:off x="7635240" y="1325880"/>
-            <a:ext cx="3474720" cy="1325880"/>
+            <a:ext cx="3474720" cy="1207008"/>
           </a:xfrm>
           <a:prstGeom prst="roundRect">
             <a:avLst>
-              <a:gd name="adj" fmla="val 8276"/>
+              <a:gd name="adj" fmla="val 9091"/>
             </a:avLst>
           </a:prstGeom>
           <a:solidFill>
@@ -6388,7 +6388,7 @@
         <p:spPr>
           <a:xfrm>
             <a:off x="7799832" y="1801368"/>
-            <a:ext cx="3145536" cy="758952"/>
+            <a:ext cx="3145536" cy="640080"/>
           </a:xfrm>
           <a:prstGeom prst="rect">
             <a:avLst/>
@@ -6428,12 +6428,12 @@
         </p:nvSpPr>
         <p:spPr>
           <a:xfrm>
-            <a:off x="7635240" y="2788920"/>
-            <a:ext cx="3474720" cy="1536192"/>
+            <a:off x="7635240" y="2670048"/>
+            <a:ext cx="3474720" cy="1377086"/>
           </a:xfrm>
           <a:prstGeom prst="roundRect">
             <a:avLst>
-              <a:gd name="adj" fmla="val 7143"/>
+              <a:gd name="adj" fmla="val 7968"/>
             </a:avLst>
           </a:prstGeom>
           <a:solidFill>
@@ -6455,7 +6455,7 @@
         </p:nvSpPr>
         <p:spPr>
           <a:xfrm>
-            <a:off x="7799832" y="2935224"/>
+            <a:off x="7799832" y="2816352"/>
             <a:ext cx="3145536" cy="256032"/>
           </a:xfrm>
           <a:prstGeom prst="rect">
@@ -6494,8 +6494,8 @@
         </p:nvSpPr>
         <p:spPr>
           <a:xfrm>
-            <a:off x="7818120" y="3300984"/>
-            <a:ext cx="3090672" cy="877824"/>
+            <a:off x="7818120" y="3182112"/>
+            <a:ext cx="3090672" cy="718718"/>
           </a:xfrm>
           <a:prstGeom prst="rect">
             <a:avLst/>
@@ -6569,12 +6569,12 @@
         </p:nvSpPr>
         <p:spPr>
           <a:xfrm>
-            <a:off x="7635240" y="4498848"/>
-            <a:ext cx="3474720" cy="1143000"/>
+            <a:off x="7635240" y="4184294"/>
+            <a:ext cx="3474720" cy="1466698"/>
           </a:xfrm>
           <a:prstGeom prst="roundRect">
             <a:avLst>
-              <a:gd name="adj" fmla="val 9600"/>
+              <a:gd name="adj" fmla="val 7481"/>
             </a:avLst>
           </a:prstGeom>
           <a:solidFill>
@@ -6596,7 +6596,7 @@
         </p:nvSpPr>
         <p:spPr>
           <a:xfrm>
-            <a:off x="7799832" y="4645152"/>
+            <a:off x="7799832" y="4330598"/>
             <a:ext cx="3145536" cy="256032"/>
           </a:xfrm>
           <a:prstGeom prst="rect">
@@ -6635,8 +6635,8 @@
         </p:nvSpPr>
         <p:spPr>
           <a:xfrm>
-            <a:off x="7799832" y="4974336"/>
-            <a:ext cx="3145536" cy="576072"/>
+            <a:off x="7799832" y="4659782"/>
+            <a:ext cx="3145536" cy="899770"/>
           </a:xfrm>
           <a:prstGeom prst="rect">
             <a:avLst/>
@@ -6662,7 +6662,7 @@
                 <a:ea typeface="Aptos" pitchFamily="34" charset="-122"/>
                 <a:cs typeface="Aptos" pitchFamily="34" charset="-120"/>
               </a:rPr>
-              <a:t>Use the concept to clarify workflow changes, dependencies, staffing, procurement requirements, training needs, and.</a:t>
+              <a:t>Use the concept to clarify workflow changes, dependencies, staffing, procurement requirements, training needs, and implementation checkpoints.</a:t>
             </a:r>
             <a:endParaRPr lang="en-US" sz="1320" dirty="0"/>
           </a:p>
@@ -7014,11 +7014,11 @@
         <p:spPr>
           <a:xfrm>
             <a:off x="7635240" y="1325880"/>
-            <a:ext cx="3474720" cy="1325880"/>
+            <a:ext cx="3474720" cy="1207008"/>
           </a:xfrm>
           <a:prstGeom prst="roundRect">
             <a:avLst>
-              <a:gd name="adj" fmla="val 8276"/>
+              <a:gd name="adj" fmla="val 9091"/>
             </a:avLst>
           </a:prstGeom>
           <a:solidFill>
@@ -7080,7 +7080,7 @@
         <p:spPr>
           <a:xfrm>
             <a:off x="7799832" y="1801368"/>
-            <a:ext cx="3145536" cy="758952"/>
+            <a:ext cx="3145536" cy="640080"/>
           </a:xfrm>
           <a:prstGeom prst="rect">
             <a:avLst/>
@@ -7120,12 +7120,12 @@
         </p:nvSpPr>
         <p:spPr>
           <a:xfrm>
-            <a:off x="7635240" y="2788920"/>
-            <a:ext cx="3474720" cy="1536192"/>
+            <a:off x="7635240" y="2670048"/>
+            <a:ext cx="3474720" cy="1377086"/>
           </a:xfrm>
           <a:prstGeom prst="roundRect">
             <a:avLst>
-              <a:gd name="adj" fmla="val 7143"/>
+              <a:gd name="adj" fmla="val 7968"/>
             </a:avLst>
           </a:prstGeom>
           <a:solidFill>
@@ -7147,7 +7147,7 @@
         </p:nvSpPr>
         <p:spPr>
           <a:xfrm>
-            <a:off x="7799832" y="2935224"/>
+            <a:off x="7799832" y="2816352"/>
             <a:ext cx="3145536" cy="256032"/>
           </a:xfrm>
           <a:prstGeom prst="rect">
@@ -7186,8 +7186,8 @@
         </p:nvSpPr>
         <p:spPr>
           <a:xfrm>
-            <a:off x="7818120" y="3300984"/>
-            <a:ext cx="3090672" cy="877824"/>
+            <a:off x="7818120" y="3182112"/>
+            <a:ext cx="3090672" cy="718718"/>
           </a:xfrm>
           <a:prstGeom prst="rect">
             <a:avLst/>
@@ -7244,12 +7244,12 @@
         </p:nvSpPr>
         <p:spPr>
           <a:xfrm>
-            <a:off x="7635240" y="4498848"/>
-            <a:ext cx="3474720" cy="1143000"/>
+            <a:off x="7635240" y="4184294"/>
+            <a:ext cx="3474720" cy="1466698"/>
           </a:xfrm>
           <a:prstGeom prst="roundRect">
             <a:avLst>
-              <a:gd name="adj" fmla="val 9600"/>
+              <a:gd name="adj" fmla="val 7481"/>
             </a:avLst>
           </a:prstGeom>
           <a:solidFill>
@@ -7271,7 +7271,7 @@
         </p:nvSpPr>
         <p:spPr>
           <a:xfrm>
-            <a:off x="7799832" y="4645152"/>
+            <a:off x="7799832" y="4330598"/>
             <a:ext cx="3145536" cy="256032"/>
           </a:xfrm>
           <a:prstGeom prst="rect">
@@ -7310,8 +7310,8 @@
         </p:nvSpPr>
         <p:spPr>
           <a:xfrm>
-            <a:off x="7799832" y="4974336"/>
-            <a:ext cx="3145536" cy="576072"/>
+            <a:off x="7799832" y="4659782"/>
+            <a:ext cx="3145536" cy="899770"/>
           </a:xfrm>
           <a:prstGeom prst="rect">
             <a:avLst/>
@@ -7337,7 +7337,7 @@
                 <a:ea typeface="Aptos" pitchFamily="34" charset="-122"/>
                 <a:cs typeface="Aptos" pitchFamily="34" charset="-120"/>
               </a:rPr>
-              <a:t>Use the concept to clarify workflow changes, dependencies, staffing, procurement requirements, training needs, and.</a:t>
+              <a:t>Use the concept to clarify workflow changes, dependencies, staffing, procurement requirements, training needs, and implementation checkpoints.</a:t>
             </a:r>
             <a:endParaRPr lang="en-US" sz="1320" dirty="0"/>
           </a:p>
@@ -7689,11 +7689,11 @@
         <p:spPr>
           <a:xfrm>
             <a:off x="7635240" y="1325880"/>
-            <a:ext cx="3474720" cy="1325880"/>
+            <a:ext cx="3474720" cy="1255471"/>
           </a:xfrm>
           <a:prstGeom prst="roundRect">
             <a:avLst>
-              <a:gd name="adj" fmla="val 8276"/>
+              <a:gd name="adj" fmla="val 8740"/>
             </a:avLst>
           </a:prstGeom>
           <a:solidFill>
@@ -7755,7 +7755,7 @@
         <p:spPr>
           <a:xfrm>
             <a:off x="7799832" y="1801368"/>
-            <a:ext cx="3145536" cy="758952"/>
+            <a:ext cx="3145536" cy="688543"/>
           </a:xfrm>
           <a:prstGeom prst="rect">
             <a:avLst/>
@@ -7795,12 +7795,12 @@
         </p:nvSpPr>
         <p:spPr>
           <a:xfrm>
-            <a:off x="7635240" y="2788920"/>
-            <a:ext cx="3474720" cy="1536192"/>
+            <a:off x="7635240" y="2718511"/>
+            <a:ext cx="3474720" cy="1328623"/>
           </a:xfrm>
           <a:prstGeom prst="roundRect">
             <a:avLst>
-              <a:gd name="adj" fmla="val 7143"/>
+              <a:gd name="adj" fmla="val 8259"/>
             </a:avLst>
           </a:prstGeom>
           <a:solidFill>
@@ -7822,7 +7822,7 @@
         </p:nvSpPr>
         <p:spPr>
           <a:xfrm>
-            <a:off x="7799832" y="2935224"/>
+            <a:off x="7799832" y="2864815"/>
             <a:ext cx="3145536" cy="256032"/>
           </a:xfrm>
           <a:prstGeom prst="rect">
@@ -7861,8 +7861,8 @@
         </p:nvSpPr>
         <p:spPr>
           <a:xfrm>
-            <a:off x="7818120" y="3300984"/>
-            <a:ext cx="3090672" cy="877824"/>
+            <a:off x="7818120" y="3230575"/>
+            <a:ext cx="3090672" cy="670255"/>
           </a:xfrm>
           <a:prstGeom prst="rect">
             <a:avLst/>
@@ -7919,12 +7919,12 @@
         </p:nvSpPr>
         <p:spPr>
           <a:xfrm>
-            <a:off x="7635240" y="4498848"/>
-            <a:ext cx="3474720" cy="1143000"/>
+            <a:off x="7635240" y="4184294"/>
+            <a:ext cx="3474720" cy="1466698"/>
           </a:xfrm>
           <a:prstGeom prst="roundRect">
             <a:avLst>
-              <a:gd name="adj" fmla="val 9600"/>
+              <a:gd name="adj" fmla="val 7481"/>
             </a:avLst>
           </a:prstGeom>
           <a:solidFill>
@@ -7946,7 +7946,7 @@
         </p:nvSpPr>
         <p:spPr>
           <a:xfrm>
-            <a:off x="7799832" y="4645152"/>
+            <a:off x="7799832" y="4330598"/>
             <a:ext cx="3145536" cy="256032"/>
           </a:xfrm>
           <a:prstGeom prst="rect">
@@ -7985,8 +7985,8 @@
         </p:nvSpPr>
         <p:spPr>
           <a:xfrm>
-            <a:off x="7799832" y="4974336"/>
-            <a:ext cx="3145536" cy="576072"/>
+            <a:off x="7799832" y="4659782"/>
+            <a:ext cx="3145536" cy="899770"/>
           </a:xfrm>
           <a:prstGeom prst="rect">
             <a:avLst/>
@@ -8012,7 +8012,7 @@
                 <a:ea typeface="Aptos" pitchFamily="34" charset="-122"/>
                 <a:cs typeface="Aptos" pitchFamily="34" charset="-120"/>
               </a:rPr>
-              <a:t>Use the assignment to test whether you can explain the concept, apply it to a realistic public health situation, and.</a:t>
+              <a:t>Use the assignment to test whether you can explain the concept, apply it to a realistic public health situation, and identify what would need review before the work moves forward.</a:t>
             </a:r>
             <a:endParaRPr lang="en-US" sz="1320" dirty="0"/>
           </a:p>
@@ -8381,11 +8381,11 @@
         <p:spPr>
           <a:xfrm>
             <a:off x="7635240" y="1325880"/>
-            <a:ext cx="3474720" cy="1325880"/>
+            <a:ext cx="3474720" cy="1207008"/>
           </a:xfrm>
           <a:prstGeom prst="roundRect">
             <a:avLst>
-              <a:gd name="adj" fmla="val 8276"/>
+              <a:gd name="adj" fmla="val 9091"/>
             </a:avLst>
           </a:prstGeom>
           <a:solidFill>
@@ -8447,7 +8447,7 @@
         <p:spPr>
           <a:xfrm>
             <a:off x="7799832" y="1801368"/>
-            <a:ext cx="3145536" cy="758952"/>
+            <a:ext cx="3145536" cy="640080"/>
           </a:xfrm>
           <a:prstGeom prst="rect">
             <a:avLst/>
@@ -8487,12 +8487,12 @@
         </p:nvSpPr>
         <p:spPr>
           <a:xfrm>
-            <a:off x="7635240" y="2788920"/>
-            <a:ext cx="3474720" cy="1536192"/>
+            <a:off x="7635240" y="2670048"/>
+            <a:ext cx="3474720" cy="1377086"/>
           </a:xfrm>
           <a:prstGeom prst="roundRect">
             <a:avLst>
-              <a:gd name="adj" fmla="val 7143"/>
+              <a:gd name="adj" fmla="val 7968"/>
             </a:avLst>
           </a:prstGeom>
           <a:solidFill>
@@ -8514,7 +8514,7 @@
         </p:nvSpPr>
         <p:spPr>
           <a:xfrm>
-            <a:off x="7799832" y="2935224"/>
+            <a:off x="7799832" y="2816352"/>
             <a:ext cx="3145536" cy="256032"/>
           </a:xfrm>
           <a:prstGeom prst="rect">
@@ -8553,8 +8553,8 @@
         </p:nvSpPr>
         <p:spPr>
           <a:xfrm>
-            <a:off x="7818120" y="3300984"/>
-            <a:ext cx="3090672" cy="877824"/>
+            <a:off x="7818120" y="3182112"/>
+            <a:ext cx="3090672" cy="718718"/>
           </a:xfrm>
           <a:prstGeom prst="rect">
             <a:avLst/>
@@ -8628,12 +8628,12 @@
         </p:nvSpPr>
         <p:spPr>
           <a:xfrm>
-            <a:off x="7635240" y="4498848"/>
-            <a:ext cx="3474720" cy="1143000"/>
+            <a:off x="7635240" y="4184294"/>
+            <a:ext cx="3474720" cy="1466698"/>
           </a:xfrm>
           <a:prstGeom prst="roundRect">
             <a:avLst>
-              <a:gd name="adj" fmla="val 9600"/>
+              <a:gd name="adj" fmla="val 7481"/>
             </a:avLst>
           </a:prstGeom>
           <a:solidFill>
@@ -8655,7 +8655,7 @@
         </p:nvSpPr>
         <p:spPr>
           <a:xfrm>
-            <a:off x="7799832" y="4645152"/>
+            <a:off x="7799832" y="4330598"/>
             <a:ext cx="3145536" cy="256032"/>
           </a:xfrm>
           <a:prstGeom prst="rect">
@@ -8694,8 +8694,8 @@
         </p:nvSpPr>
         <p:spPr>
           <a:xfrm>
-            <a:off x="7799832" y="4974336"/>
-            <a:ext cx="3145536" cy="576072"/>
+            <a:off x="7799832" y="4659782"/>
+            <a:ext cx="3145536" cy="899770"/>
           </a:xfrm>
           <a:prstGeom prst="rect">
             <a:avLst/>
@@ -8721,7 +8721,7 @@
                 <a:ea typeface="Aptos" pitchFamily="34" charset="-122"/>
                 <a:cs typeface="Aptos" pitchFamily="34" charset="-120"/>
               </a:rPr>
-              <a:t>Use the concept to clarify workflow changes, dependencies, staffing, procurement requirements, training needs, and.</a:t>
+              <a:t>Use the concept to clarify workflow changes, dependencies, staffing, procurement requirements, training needs, and implementation checkpoints.</a:t>
             </a:r>
             <a:endParaRPr lang="en-US" sz="1320" dirty="0"/>
           </a:p>
@@ -9073,11 +9073,11 @@
         <p:spPr>
           <a:xfrm>
             <a:off x="7635240" y="1325880"/>
-            <a:ext cx="3474720" cy="1325880"/>
+            <a:ext cx="3474720" cy="1207008"/>
           </a:xfrm>
           <a:prstGeom prst="roundRect">
             <a:avLst>
-              <a:gd name="adj" fmla="val 8276"/>
+              <a:gd name="adj" fmla="val 9091"/>
             </a:avLst>
           </a:prstGeom>
           <a:solidFill>
@@ -9139,7 +9139,7 @@
         <p:spPr>
           <a:xfrm>
             <a:off x="7799832" y="1801368"/>
-            <a:ext cx="3145536" cy="758952"/>
+            <a:ext cx="3145536" cy="640080"/>
           </a:xfrm>
           <a:prstGeom prst="rect">
             <a:avLst/>
@@ -9179,12 +9179,12 @@
         </p:nvSpPr>
         <p:spPr>
           <a:xfrm>
-            <a:off x="7635240" y="2788920"/>
-            <a:ext cx="3474720" cy="1536192"/>
+            <a:off x="7635240" y="2670048"/>
+            <a:ext cx="3474720" cy="1377086"/>
           </a:xfrm>
           <a:prstGeom prst="roundRect">
             <a:avLst>
-              <a:gd name="adj" fmla="val 7143"/>
+              <a:gd name="adj" fmla="val 7968"/>
             </a:avLst>
           </a:prstGeom>
           <a:solidFill>
@@ -9206,7 +9206,7 @@
         </p:nvSpPr>
         <p:spPr>
           <a:xfrm>
-            <a:off x="7799832" y="2935224"/>
+            <a:off x="7799832" y="2816352"/>
             <a:ext cx="3145536" cy="256032"/>
           </a:xfrm>
           <a:prstGeom prst="rect">
@@ -9245,8 +9245,8 @@
         </p:nvSpPr>
         <p:spPr>
           <a:xfrm>
-            <a:off x="7818120" y="3300984"/>
-            <a:ext cx="3090672" cy="877824"/>
+            <a:off x="7818120" y="3182112"/>
+            <a:ext cx="3090672" cy="718718"/>
           </a:xfrm>
           <a:prstGeom prst="rect">
             <a:avLst/>
@@ -9303,12 +9303,12 @@
         </p:nvSpPr>
         <p:spPr>
           <a:xfrm>
-            <a:off x="7635240" y="4498848"/>
-            <a:ext cx="3474720" cy="1143000"/>
+            <a:off x="7635240" y="4184294"/>
+            <a:ext cx="3474720" cy="1466698"/>
           </a:xfrm>
           <a:prstGeom prst="roundRect">
             <a:avLst>
-              <a:gd name="adj" fmla="val 9600"/>
+              <a:gd name="adj" fmla="val 7481"/>
             </a:avLst>
           </a:prstGeom>
           <a:solidFill>
@@ -9330,7 +9330,7 @@
         </p:nvSpPr>
         <p:spPr>
           <a:xfrm>
-            <a:off x="7799832" y="4645152"/>
+            <a:off x="7799832" y="4330598"/>
             <a:ext cx="3145536" cy="256032"/>
           </a:xfrm>
           <a:prstGeom prst="rect">
@@ -9369,8 +9369,8 @@
         </p:nvSpPr>
         <p:spPr>
           <a:xfrm>
-            <a:off x="7799832" y="4974336"/>
-            <a:ext cx="3145536" cy="576072"/>
+            <a:off x="7799832" y="4659782"/>
+            <a:ext cx="3145536" cy="899770"/>
           </a:xfrm>
           <a:prstGeom prst="rect">
             <a:avLst/>
@@ -9396,7 +9396,7 @@
                 <a:ea typeface="Aptos" pitchFamily="34" charset="-122"/>
                 <a:cs typeface="Aptos" pitchFamily="34" charset="-120"/>
               </a:rPr>
-              <a:t>Use the concept to clarify workflow changes, dependencies, staffing, procurement requirements, training needs, and.</a:t>
+              <a:t>Use the concept to clarify workflow changes, dependencies, staffing, procurement requirements, training needs, and implementation checkpoints.</a:t>
             </a:r>
             <a:endParaRPr lang="en-US" sz="1320" dirty="0"/>
           </a:p>
@@ -9765,11 +9765,11 @@
         <p:spPr>
           <a:xfrm>
             <a:off x="7635240" y="1325880"/>
-            <a:ext cx="3474720" cy="1325880"/>
+            <a:ext cx="3474720" cy="1207008"/>
           </a:xfrm>
           <a:prstGeom prst="roundRect">
             <a:avLst>
-              <a:gd name="adj" fmla="val 8276"/>
+              <a:gd name="adj" fmla="val 9091"/>
             </a:avLst>
           </a:prstGeom>
           <a:solidFill>
@@ -9831,7 +9831,7 @@
         <p:spPr>
           <a:xfrm>
             <a:off x="7799832" y="1801368"/>
-            <a:ext cx="3145536" cy="758952"/>
+            <a:ext cx="3145536" cy="640080"/>
           </a:xfrm>
           <a:prstGeom prst="rect">
             <a:avLst/>
@@ -9871,12 +9871,12 @@
         </p:nvSpPr>
         <p:spPr>
           <a:xfrm>
-            <a:off x="7635240" y="2788920"/>
-            <a:ext cx="3474720" cy="1536192"/>
+            <a:off x="7635240" y="2670048"/>
+            <a:ext cx="3474720" cy="1377086"/>
           </a:xfrm>
           <a:prstGeom prst="roundRect">
             <a:avLst>
-              <a:gd name="adj" fmla="val 7143"/>
+              <a:gd name="adj" fmla="val 7968"/>
             </a:avLst>
           </a:prstGeom>
           <a:solidFill>
@@ -9898,7 +9898,7 @@
         </p:nvSpPr>
         <p:spPr>
           <a:xfrm>
-            <a:off x="7799832" y="2935224"/>
+            <a:off x="7799832" y="2816352"/>
             <a:ext cx="3145536" cy="256032"/>
           </a:xfrm>
           <a:prstGeom prst="rect">
@@ -9937,8 +9937,8 @@
         </p:nvSpPr>
         <p:spPr>
           <a:xfrm>
-            <a:off x="7818120" y="3300984"/>
-            <a:ext cx="3090672" cy="877824"/>
+            <a:off x="7818120" y="3182112"/>
+            <a:ext cx="3090672" cy="718718"/>
           </a:xfrm>
           <a:prstGeom prst="rect">
             <a:avLst/>
@@ -9995,12 +9995,12 @@
         </p:nvSpPr>
         <p:spPr>
           <a:xfrm>
-            <a:off x="7635240" y="4498848"/>
-            <a:ext cx="3474720" cy="1143000"/>
+            <a:off x="7635240" y="4184294"/>
+            <a:ext cx="3474720" cy="1466698"/>
           </a:xfrm>
           <a:prstGeom prst="roundRect">
             <a:avLst>
-              <a:gd name="adj" fmla="val 9600"/>
+              <a:gd name="adj" fmla="val 7481"/>
             </a:avLst>
           </a:prstGeom>
           <a:solidFill>
@@ -10022,7 +10022,7 @@
         </p:nvSpPr>
         <p:spPr>
           <a:xfrm>
-            <a:off x="7799832" y="4645152"/>
+            <a:off x="7799832" y="4330598"/>
             <a:ext cx="3145536" cy="256032"/>
           </a:xfrm>
           <a:prstGeom prst="rect">
@@ -10061,8 +10061,8 @@
         </p:nvSpPr>
         <p:spPr>
           <a:xfrm>
-            <a:off x="7799832" y="4974336"/>
-            <a:ext cx="3145536" cy="576072"/>
+            <a:off x="7799832" y="4659782"/>
+            <a:ext cx="3145536" cy="899770"/>
           </a:xfrm>
           <a:prstGeom prst="rect">
             <a:avLst/>
@@ -10088,7 +10088,7 @@
                 <a:ea typeface="Aptos" pitchFamily="34" charset="-122"/>
                 <a:cs typeface="Aptos" pitchFamily="34" charset="-120"/>
               </a:rPr>
-              <a:t>Use the assignment to test whether you can explain the concept, apply it to a realistic public health situation, and.</a:t>
+              <a:t>Use the assignment to test whether you can explain the concept, apply it to a realistic public health situation, and identify what would need review before the work moves forward.</a:t>
             </a:r>
             <a:endParaRPr lang="en-US" sz="1320" dirty="0"/>
           </a:p>
@@ -10549,7 +10549,7 @@
                 <a:ea typeface="Aptos" pitchFamily="34" charset="-122"/>
                 <a:cs typeface="Aptos" pitchFamily="34" charset="-120"/>
               </a:rPr>
-              <a:t>Level: intermediate/practitioner Primary track: Program Management Role-Based Track Appears in tracks:.</a:t>
+              <a:t>Level: intermediate/practitioner Primary track: Program Management Role-Based Track Appears in tracks: program-management, public-health-executive-leadership, policy, governance-security</a:t>
             </a:r>
             <a:endParaRPr lang="en-US" sz="1320" dirty="0"/>
           </a:p>
@@ -11059,11 +11059,11 @@
         <p:spPr>
           <a:xfrm>
             <a:off x="7635240" y="1325880"/>
-            <a:ext cx="3474720" cy="1325880"/>
+            <a:ext cx="3474720" cy="1255471"/>
           </a:xfrm>
           <a:prstGeom prst="roundRect">
             <a:avLst>
-              <a:gd name="adj" fmla="val 8276"/>
+              <a:gd name="adj" fmla="val 8740"/>
             </a:avLst>
           </a:prstGeom>
           <a:solidFill>
@@ -11125,7 +11125,7 @@
         <p:spPr>
           <a:xfrm>
             <a:off x="7799832" y="1801368"/>
-            <a:ext cx="3145536" cy="758952"/>
+            <a:ext cx="3145536" cy="688543"/>
           </a:xfrm>
           <a:prstGeom prst="rect">
             <a:avLst/>
@@ -11165,12 +11165,12 @@
         </p:nvSpPr>
         <p:spPr>
           <a:xfrm>
-            <a:off x="7635240" y="2788920"/>
-            <a:ext cx="3474720" cy="1536192"/>
+            <a:off x="7635240" y="2718511"/>
+            <a:ext cx="3474720" cy="1328623"/>
           </a:xfrm>
           <a:prstGeom prst="roundRect">
             <a:avLst>
-              <a:gd name="adj" fmla="val 7143"/>
+              <a:gd name="adj" fmla="val 8259"/>
             </a:avLst>
           </a:prstGeom>
           <a:solidFill>
@@ -11192,7 +11192,7 @@
         </p:nvSpPr>
         <p:spPr>
           <a:xfrm>
-            <a:off x="7799832" y="2935224"/>
+            <a:off x="7799832" y="2864815"/>
             <a:ext cx="3145536" cy="256032"/>
           </a:xfrm>
           <a:prstGeom prst="rect">
@@ -11231,8 +11231,8 @@
         </p:nvSpPr>
         <p:spPr>
           <a:xfrm>
-            <a:off x="7818120" y="3300984"/>
-            <a:ext cx="3090672" cy="877824"/>
+            <a:off x="7818120" y="3230575"/>
+            <a:ext cx="3090672" cy="670255"/>
           </a:xfrm>
           <a:prstGeom prst="rect">
             <a:avLst/>
@@ -11306,12 +11306,12 @@
         </p:nvSpPr>
         <p:spPr>
           <a:xfrm>
-            <a:off x="7635240" y="4498848"/>
-            <a:ext cx="3474720" cy="1143000"/>
+            <a:off x="7635240" y="4184294"/>
+            <a:ext cx="3474720" cy="1466698"/>
           </a:xfrm>
           <a:prstGeom prst="roundRect">
             <a:avLst>
-              <a:gd name="adj" fmla="val 9600"/>
+              <a:gd name="adj" fmla="val 7481"/>
             </a:avLst>
           </a:prstGeom>
           <a:solidFill>
@@ -11333,7 +11333,7 @@
         </p:nvSpPr>
         <p:spPr>
           <a:xfrm>
-            <a:off x="7799832" y="4645152"/>
+            <a:off x="7799832" y="4330598"/>
             <a:ext cx="3145536" cy="256032"/>
           </a:xfrm>
           <a:prstGeom prst="rect">
@@ -11372,8 +11372,8 @@
         </p:nvSpPr>
         <p:spPr>
           <a:xfrm>
-            <a:off x="7799832" y="4974336"/>
-            <a:ext cx="3145536" cy="576072"/>
+            <a:off x="7799832" y="4659782"/>
+            <a:ext cx="3145536" cy="899770"/>
           </a:xfrm>
           <a:prstGeom prst="rect">
             <a:avLst/>
@@ -11399,7 +11399,7 @@
                 <a:ea typeface="Aptos" pitchFamily="34" charset="-122"/>
                 <a:cs typeface="Aptos" pitchFamily="34" charset="-120"/>
               </a:rPr>
-              <a:t>Use the assignment to test whether you can explain the concept, apply it to a realistic public health situation, and.</a:t>
+              <a:t>Use the assignment to test whether you can explain the concept, apply it to a realistic public health situation, and identify what would need review before the work moves forward.</a:t>
             </a:r>
             <a:endParaRPr lang="en-US" sz="1320" dirty="0"/>
           </a:p>
@@ -11768,11 +11768,11 @@
         <p:spPr>
           <a:xfrm>
             <a:off x="7635240" y="1325880"/>
-            <a:ext cx="3474720" cy="1325880"/>
+            <a:ext cx="3474720" cy="1207008"/>
           </a:xfrm>
           <a:prstGeom prst="roundRect">
             <a:avLst>
-              <a:gd name="adj" fmla="val 8276"/>
+              <a:gd name="adj" fmla="val 9091"/>
             </a:avLst>
           </a:prstGeom>
           <a:solidFill>
@@ -11834,7 +11834,7 @@
         <p:spPr>
           <a:xfrm>
             <a:off x="7799832" y="1801368"/>
-            <a:ext cx="3145536" cy="758952"/>
+            <a:ext cx="3145536" cy="640080"/>
           </a:xfrm>
           <a:prstGeom prst="rect">
             <a:avLst/>
@@ -11874,12 +11874,12 @@
         </p:nvSpPr>
         <p:spPr>
           <a:xfrm>
-            <a:off x="7635240" y="2788920"/>
-            <a:ext cx="3474720" cy="1536192"/>
+            <a:off x="7635240" y="2670048"/>
+            <a:ext cx="3474720" cy="1377086"/>
           </a:xfrm>
           <a:prstGeom prst="roundRect">
             <a:avLst>
-              <a:gd name="adj" fmla="val 7143"/>
+              <a:gd name="adj" fmla="val 7968"/>
             </a:avLst>
           </a:prstGeom>
           <a:solidFill>
@@ -11901,7 +11901,7 @@
         </p:nvSpPr>
         <p:spPr>
           <a:xfrm>
-            <a:off x="7799832" y="2935224"/>
+            <a:off x="7799832" y="2816352"/>
             <a:ext cx="3145536" cy="256032"/>
           </a:xfrm>
           <a:prstGeom prst="rect">
@@ -11940,8 +11940,8 @@
         </p:nvSpPr>
         <p:spPr>
           <a:xfrm>
-            <a:off x="7818120" y="3300984"/>
-            <a:ext cx="3090672" cy="877824"/>
+            <a:off x="7818120" y="3182112"/>
+            <a:ext cx="3090672" cy="718718"/>
           </a:xfrm>
           <a:prstGeom prst="rect">
             <a:avLst/>
@@ -11998,12 +11998,12 @@
         </p:nvSpPr>
         <p:spPr>
           <a:xfrm>
-            <a:off x="7635240" y="4498848"/>
-            <a:ext cx="3474720" cy="1143000"/>
+            <a:off x="7635240" y="4184294"/>
+            <a:ext cx="3474720" cy="1466698"/>
           </a:xfrm>
           <a:prstGeom prst="roundRect">
             <a:avLst>
-              <a:gd name="adj" fmla="val 9600"/>
+              <a:gd name="adj" fmla="val 7481"/>
             </a:avLst>
           </a:prstGeom>
           <a:solidFill>
@@ -12025,7 +12025,7 @@
         </p:nvSpPr>
         <p:spPr>
           <a:xfrm>
-            <a:off x="7799832" y="4645152"/>
+            <a:off x="7799832" y="4330598"/>
             <a:ext cx="3145536" cy="256032"/>
           </a:xfrm>
           <a:prstGeom prst="rect">
@@ -12064,8 +12064,8 @@
         </p:nvSpPr>
         <p:spPr>
           <a:xfrm>
-            <a:off x="7799832" y="4974336"/>
-            <a:ext cx="3145536" cy="576072"/>
+            <a:off x="7799832" y="4659782"/>
+            <a:ext cx="3145536" cy="899770"/>
           </a:xfrm>
           <a:prstGeom prst="rect">
             <a:avLst/>
@@ -12091,7 +12091,7 @@
                 <a:ea typeface="Aptos" pitchFamily="34" charset="-122"/>
                 <a:cs typeface="Aptos" pitchFamily="34" charset="-120"/>
               </a:rPr>
-              <a:t>Use the concept to clarify workflow changes, dependencies, staffing, procurement requirements, training needs, and.</a:t>
+              <a:t>Use the concept to clarify workflow changes, dependencies, staffing, procurement requirements, training needs, and implementation checkpoints.</a:t>
             </a:r>
             <a:endParaRPr lang="en-US" sz="1320" dirty="0"/>
           </a:p>
@@ -12460,11 +12460,11 @@
         <p:spPr>
           <a:xfrm>
             <a:off x="7635240" y="1325880"/>
-            <a:ext cx="3474720" cy="1325880"/>
+            <a:ext cx="3474720" cy="1255471"/>
           </a:xfrm>
           <a:prstGeom prst="roundRect">
             <a:avLst>
-              <a:gd name="adj" fmla="val 8276"/>
+              <a:gd name="adj" fmla="val 8740"/>
             </a:avLst>
           </a:prstGeom>
           <a:solidFill>
@@ -12526,7 +12526,7 @@
         <p:spPr>
           <a:xfrm>
             <a:off x="7799832" y="1801368"/>
-            <a:ext cx="3145536" cy="758952"/>
+            <a:ext cx="3145536" cy="688543"/>
           </a:xfrm>
           <a:prstGeom prst="rect">
             <a:avLst/>
@@ -12566,12 +12566,12 @@
         </p:nvSpPr>
         <p:spPr>
           <a:xfrm>
-            <a:off x="7635240" y="2788920"/>
-            <a:ext cx="3474720" cy="1536192"/>
+            <a:off x="7635240" y="2718511"/>
+            <a:ext cx="3474720" cy="1328623"/>
           </a:xfrm>
           <a:prstGeom prst="roundRect">
             <a:avLst>
-              <a:gd name="adj" fmla="val 7143"/>
+              <a:gd name="adj" fmla="val 8259"/>
             </a:avLst>
           </a:prstGeom>
           <a:solidFill>
@@ -12593,7 +12593,7 @@
         </p:nvSpPr>
         <p:spPr>
           <a:xfrm>
-            <a:off x="7799832" y="2935224"/>
+            <a:off x="7799832" y="2864815"/>
             <a:ext cx="3145536" cy="256032"/>
           </a:xfrm>
           <a:prstGeom prst="rect">
@@ -12632,8 +12632,8 @@
         </p:nvSpPr>
         <p:spPr>
           <a:xfrm>
-            <a:off x="7818120" y="3300984"/>
-            <a:ext cx="3090672" cy="877824"/>
+            <a:off x="7818120" y="3230575"/>
+            <a:ext cx="3090672" cy="670255"/>
           </a:xfrm>
           <a:prstGeom prst="rect">
             <a:avLst/>
@@ -12707,12 +12707,12 @@
         </p:nvSpPr>
         <p:spPr>
           <a:xfrm>
-            <a:off x="7635240" y="4498848"/>
-            <a:ext cx="3474720" cy="1143000"/>
+            <a:off x="7635240" y="4184294"/>
+            <a:ext cx="3474720" cy="1466698"/>
           </a:xfrm>
           <a:prstGeom prst="roundRect">
             <a:avLst>
-              <a:gd name="adj" fmla="val 9600"/>
+              <a:gd name="adj" fmla="val 7481"/>
             </a:avLst>
           </a:prstGeom>
           <a:solidFill>
@@ -12734,7 +12734,7 @@
         </p:nvSpPr>
         <p:spPr>
           <a:xfrm>
-            <a:off x="7799832" y="4645152"/>
+            <a:off x="7799832" y="4330598"/>
             <a:ext cx="3145536" cy="256032"/>
           </a:xfrm>
           <a:prstGeom prst="rect">
@@ -12773,8 +12773,8 @@
         </p:nvSpPr>
         <p:spPr>
           <a:xfrm>
-            <a:off x="7799832" y="4974336"/>
-            <a:ext cx="3145536" cy="576072"/>
+            <a:off x="7799832" y="4659782"/>
+            <a:ext cx="3145536" cy="899770"/>
           </a:xfrm>
           <a:prstGeom prst="rect">
             <a:avLst/>
@@ -12800,7 +12800,7 @@
                 <a:ea typeface="Aptos" pitchFamily="34" charset="-122"/>
                 <a:cs typeface="Aptos" pitchFamily="34" charset="-120"/>
               </a:rPr>
-              <a:t>Use the concept to clarify workflow changes, dependencies, staffing, procurement requirements, training needs, and.</a:t>
+              <a:t>Use the concept to clarify workflow changes, dependencies, staffing, procurement requirements, training needs, and implementation checkpoints.</a:t>
             </a:r>
             <a:endParaRPr lang="en-US" sz="1320" dirty="0"/>
           </a:p>
@@ -13169,11 +13169,11 @@
         <p:spPr>
           <a:xfrm>
             <a:off x="7635240" y="1325880"/>
-            <a:ext cx="3474720" cy="1325880"/>
+            <a:ext cx="3474720" cy="1207008"/>
           </a:xfrm>
           <a:prstGeom prst="roundRect">
             <a:avLst>
-              <a:gd name="adj" fmla="val 8276"/>
+              <a:gd name="adj" fmla="val 9091"/>
             </a:avLst>
           </a:prstGeom>
           <a:solidFill>
@@ -13235,7 +13235,7 @@
         <p:spPr>
           <a:xfrm>
             <a:off x="7799832" y="1801368"/>
-            <a:ext cx="3145536" cy="758952"/>
+            <a:ext cx="3145536" cy="640080"/>
           </a:xfrm>
           <a:prstGeom prst="rect">
             <a:avLst/>
@@ -13275,12 +13275,12 @@
         </p:nvSpPr>
         <p:spPr>
           <a:xfrm>
-            <a:off x="7635240" y="2788920"/>
-            <a:ext cx="3474720" cy="1536192"/>
+            <a:off x="7635240" y="2670048"/>
+            <a:ext cx="3474720" cy="1377086"/>
           </a:xfrm>
           <a:prstGeom prst="roundRect">
             <a:avLst>
-              <a:gd name="adj" fmla="val 7143"/>
+              <a:gd name="adj" fmla="val 7968"/>
             </a:avLst>
           </a:prstGeom>
           <a:solidFill>
@@ -13302,7 +13302,7 @@
         </p:nvSpPr>
         <p:spPr>
           <a:xfrm>
-            <a:off x="7799832" y="2935224"/>
+            <a:off x="7799832" y="2816352"/>
             <a:ext cx="3145536" cy="256032"/>
           </a:xfrm>
           <a:prstGeom prst="rect">
@@ -13341,8 +13341,8 @@
         </p:nvSpPr>
         <p:spPr>
           <a:xfrm>
-            <a:off x="7818120" y="3300984"/>
-            <a:ext cx="3090672" cy="877824"/>
+            <a:off x="7818120" y="3182112"/>
+            <a:ext cx="3090672" cy="718718"/>
           </a:xfrm>
           <a:prstGeom prst="rect">
             <a:avLst/>
@@ -13416,12 +13416,12 @@
         </p:nvSpPr>
         <p:spPr>
           <a:xfrm>
-            <a:off x="7635240" y="4498848"/>
-            <a:ext cx="3474720" cy="1143000"/>
+            <a:off x="7635240" y="4184294"/>
+            <a:ext cx="3474720" cy="1466698"/>
           </a:xfrm>
           <a:prstGeom prst="roundRect">
             <a:avLst>
-              <a:gd name="adj" fmla="val 9600"/>
+              <a:gd name="adj" fmla="val 7481"/>
             </a:avLst>
           </a:prstGeom>
           <a:solidFill>
@@ -13443,7 +13443,7 @@
         </p:nvSpPr>
         <p:spPr>
           <a:xfrm>
-            <a:off x="7799832" y="4645152"/>
+            <a:off x="7799832" y="4330598"/>
             <a:ext cx="3145536" cy="256032"/>
           </a:xfrm>
           <a:prstGeom prst="rect">
@@ -13482,8 +13482,8 @@
         </p:nvSpPr>
         <p:spPr>
           <a:xfrm>
-            <a:off x="7799832" y="4974336"/>
-            <a:ext cx="3145536" cy="576072"/>
+            <a:off x="7799832" y="4659782"/>
+            <a:ext cx="3145536" cy="899770"/>
           </a:xfrm>
           <a:prstGeom prst="rect">
             <a:avLst/>
@@ -13509,7 +13509,7 @@
                 <a:ea typeface="Aptos" pitchFamily="34" charset="-122"/>
                 <a:cs typeface="Aptos" pitchFamily="34" charset="-120"/>
               </a:rPr>
-              <a:t>Use the concept to clarify workflow changes, dependencies, staffing, procurement requirements, training needs, and.</a:t>
+              <a:t>Use the concept to clarify workflow changes, dependencies, staffing, procurement requirements, training needs, and implementation checkpoints.</a:t>
             </a:r>
             <a:endParaRPr lang="en-US" sz="1320" dirty="0"/>
           </a:p>
@@ -13987,7 +13987,7 @@
                 <a:ea typeface="Aptos" pitchFamily="34" charset="-122"/>
                 <a:cs typeface="Aptos" pitchFamily="34" charset="-120"/>
               </a:rPr>
-              <a:t>Use the related plays to identify decisions, participants, timing, approvals, and documentation needed for responsible.</a:t>
+              <a:t>Use the related plays to identify decisions, participants, timing, approvals, and documentation needed for responsible implementation.</a:t>
             </a:r>
             <a:endParaRPr lang="en-US" sz="1320" dirty="0"/>
           </a:p>
@@ -14606,7 +14606,7 @@
                 <a:ea typeface="Aptos" pitchFamily="34" charset="-122"/>
                 <a:cs typeface="Aptos" pitchFamily="34" charset="-120"/>
               </a:rPr>
-              <a:t>Use linked tools when your department needs a structured worksheet, template, checklist, review process, or.</a:t>
+              <a:t>Use linked tools when your department needs a structured worksheet, template, checklist, review process, or documentation artifact.</a:t>
             </a:r>
             <a:endParaRPr lang="en-US" sz="1320" dirty="0"/>
           </a:p>
@@ -15116,11 +15116,11 @@
         <p:spPr>
           <a:xfrm>
             <a:off x="7635240" y="1325880"/>
-            <a:ext cx="3474720" cy="1325880"/>
+            <a:ext cx="3474720" cy="1207008"/>
           </a:xfrm>
           <a:prstGeom prst="roundRect">
             <a:avLst>
-              <a:gd name="adj" fmla="val 8276"/>
+              <a:gd name="adj" fmla="val 9091"/>
             </a:avLst>
           </a:prstGeom>
           <a:solidFill>
@@ -15182,7 +15182,7 @@
         <p:spPr>
           <a:xfrm>
             <a:off x="7799832" y="1801368"/>
-            <a:ext cx="3145536" cy="758952"/>
+            <a:ext cx="3145536" cy="640080"/>
           </a:xfrm>
           <a:prstGeom prst="rect">
             <a:avLst/>
@@ -15222,12 +15222,12 @@
         </p:nvSpPr>
         <p:spPr>
           <a:xfrm>
-            <a:off x="7635240" y="2788920"/>
-            <a:ext cx="3474720" cy="1536192"/>
+            <a:off x="7635240" y="2670048"/>
+            <a:ext cx="3474720" cy="1377086"/>
           </a:xfrm>
           <a:prstGeom prst="roundRect">
             <a:avLst>
-              <a:gd name="adj" fmla="val 7143"/>
+              <a:gd name="adj" fmla="val 7968"/>
             </a:avLst>
           </a:prstGeom>
           <a:solidFill>
@@ -15249,7 +15249,7 @@
         </p:nvSpPr>
         <p:spPr>
           <a:xfrm>
-            <a:off x="7799832" y="2935224"/>
+            <a:off x="7799832" y="2816352"/>
             <a:ext cx="3145536" cy="256032"/>
           </a:xfrm>
           <a:prstGeom prst="rect">
@@ -15288,8 +15288,8 @@
         </p:nvSpPr>
         <p:spPr>
           <a:xfrm>
-            <a:off x="7818120" y="3300984"/>
-            <a:ext cx="3090672" cy="877824"/>
+            <a:off x="7818120" y="3182112"/>
+            <a:ext cx="3090672" cy="718718"/>
           </a:xfrm>
           <a:prstGeom prst="rect">
             <a:avLst/>
@@ -15346,12 +15346,12 @@
         </p:nvSpPr>
         <p:spPr>
           <a:xfrm>
-            <a:off x="7635240" y="4498848"/>
-            <a:ext cx="3474720" cy="1143000"/>
+            <a:off x="7635240" y="4184294"/>
+            <a:ext cx="3474720" cy="1466698"/>
           </a:xfrm>
           <a:prstGeom prst="roundRect">
             <a:avLst>
-              <a:gd name="adj" fmla="val 9600"/>
+              <a:gd name="adj" fmla="val 7481"/>
             </a:avLst>
           </a:prstGeom>
           <a:solidFill>
@@ -15373,7 +15373,7 @@
         </p:nvSpPr>
         <p:spPr>
           <a:xfrm>
-            <a:off x="7799832" y="4645152"/>
+            <a:off x="7799832" y="4330598"/>
             <a:ext cx="3145536" cy="256032"/>
           </a:xfrm>
           <a:prstGeom prst="rect">
@@ -15412,8 +15412,8 @@
         </p:nvSpPr>
         <p:spPr>
           <a:xfrm>
-            <a:off x="7799832" y="4974336"/>
-            <a:ext cx="3145536" cy="576072"/>
+            <a:off x="7799832" y="4659782"/>
+            <a:ext cx="3145536" cy="899770"/>
           </a:xfrm>
           <a:prstGeom prst="rect">
             <a:avLst/>
@@ -15439,7 +15439,7 @@
                 <a:ea typeface="Aptos" pitchFamily="34" charset="-122"/>
                 <a:cs typeface="Aptos" pitchFamily="34" charset="-120"/>
               </a:rPr>
-              <a:t>Use the assignment to test whether you can explain the concept, apply it to a realistic public health situation, and.</a:t>
+              <a:t>Use the assignment to test whether you can explain the concept, apply it to a realistic public health situation, and identify what would need review before the work moves forward.</a:t>
             </a:r>
             <a:endParaRPr lang="en-US" sz="1320" dirty="0"/>
           </a:p>
@@ -15808,11 +15808,11 @@
         <p:spPr>
           <a:xfrm>
             <a:off x="7635240" y="1325880"/>
-            <a:ext cx="3474720" cy="1325880"/>
+            <a:ext cx="3474720" cy="1255471"/>
           </a:xfrm>
           <a:prstGeom prst="roundRect">
             <a:avLst>
-              <a:gd name="adj" fmla="val 8276"/>
+              <a:gd name="adj" fmla="val 8740"/>
             </a:avLst>
           </a:prstGeom>
           <a:solidFill>
@@ -15874,7 +15874,7 @@
         <p:spPr>
           <a:xfrm>
             <a:off x="7799832" y="1801368"/>
-            <a:ext cx="3145536" cy="758952"/>
+            <a:ext cx="3145536" cy="688543"/>
           </a:xfrm>
           <a:prstGeom prst="rect">
             <a:avLst/>
@@ -15914,12 +15914,12 @@
         </p:nvSpPr>
         <p:spPr>
           <a:xfrm>
-            <a:off x="7635240" y="2788920"/>
-            <a:ext cx="3474720" cy="1536192"/>
+            <a:off x="7635240" y="2718511"/>
+            <a:ext cx="3474720" cy="1328623"/>
           </a:xfrm>
           <a:prstGeom prst="roundRect">
             <a:avLst>
-              <a:gd name="adj" fmla="val 7143"/>
+              <a:gd name="adj" fmla="val 8259"/>
             </a:avLst>
           </a:prstGeom>
           <a:solidFill>
@@ -15941,8 +15941,8 @@
         </p:nvSpPr>
         <p:spPr>
           <a:xfrm>
-            <a:off x="7799832" y="2935224"/>
-            <a:ext cx="3145536" cy="256032"/>
+            <a:off x="7799832" y="2846527"/>
+            <a:ext cx="3145536" cy="237744"/>
           </a:xfrm>
           <a:prstGeom prst="rect">
             <a:avLst/>
@@ -15958,7 +15958,7 @@
               <a:buNone/>
             </a:pPr>
             <a:r>
-              <a:rPr lang="en-US" sz="1300" b="1" dirty="0">
+              <a:rPr lang="en-US" sz="1250" b="1" dirty="0">
                 <a:solidFill>
                   <a:srgbClr val="0068B7"/>
                 </a:solidFill>
@@ -15966,101 +15966,317 @@
                 <a:ea typeface="Aptos" pitchFamily="34" charset="-122"/>
                 <a:cs typeface="Aptos" pitchFamily="34" charset="-120"/>
               </a:rPr>
-              <a:t>Concept checkpoints</a:t>
-            </a:r>
-            <a:endParaRPr lang="en-US" sz="1300" dirty="0"/>
-          </a:p>
-        </p:txBody>
-      </p:sp>
-      <p:sp>
-        <p:nvSpPr>
-          <p:cNvPr id="15" name="Text 13"/>
-          <p:cNvSpPr/>
-          <p:nvPr/>
-        </p:nvSpPr>
-        <p:spPr>
-          <a:xfrm>
-            <a:off x="7818120" y="3300984"/>
-            <a:ext cx="3090672" cy="877824"/>
-          </a:xfrm>
-          <a:prstGeom prst="rect">
-            <a:avLst/>
-          </a:prstGeom>
-          <a:noFill/>
-          <a:ln/>
-        </p:spPr>
-        <p:txBody>
-          <a:bodyPr wrap="square" lIns="508" tIns="508" rIns="508" bIns="508" rtlCol="0" anchor="t">
+              <a:t>Implementation path</a:t>
+            </a:r>
+            <a:endParaRPr lang="en-US" sz="1250" dirty="0"/>
+          </a:p>
+        </p:txBody>
+      </p:sp>
+      <p:sp>
+        <p:nvSpPr>
+          <p:cNvPr id="15" name="Shape 13"/>
+          <p:cNvSpPr/>
+          <p:nvPr/>
+        </p:nvSpPr>
+        <p:spPr>
+          <a:xfrm>
+            <a:off x="8763000" y="3399739"/>
+            <a:ext cx="164592" cy="0"/>
+          </a:xfrm>
+          <a:prstGeom prst="line">
+            <a:avLst/>
+          </a:prstGeom>
+          <a:noFill/>
+          <a:ln w="15240">
+            <a:solidFill>
+              <a:srgbClr val="8ABBD8"/>
+            </a:solidFill>
+            <a:prstDash val="solid"/>
+          </a:ln>
+        </p:spPr>
+      </p:sp>
+      <p:sp>
+        <p:nvSpPr>
+          <p:cNvPr id="16" name="Shape 14"/>
+          <p:cNvSpPr/>
+          <p:nvPr/>
+        </p:nvSpPr>
+        <p:spPr>
+          <a:xfrm>
+            <a:off x="7872984" y="3248863"/>
+            <a:ext cx="890016" cy="301752"/>
+          </a:xfrm>
+          <a:prstGeom prst="roundRect">
+            <a:avLst>
+              <a:gd name="adj" fmla="val 24242"/>
+            </a:avLst>
+          </a:prstGeom>
+          <a:solidFill>
+            <a:srgbClr val="0068B7"/>
+          </a:solidFill>
+          <a:ln w="12700">
+            <a:solidFill>
+              <a:srgbClr val="0068B7"/>
+            </a:solidFill>
+            <a:prstDash val="solid"/>
+          </a:ln>
+        </p:spPr>
+      </p:sp>
+      <p:sp>
+        <p:nvSpPr>
+          <p:cNvPr id="17" name="Text 15"/>
+          <p:cNvSpPr/>
+          <p:nvPr/>
+        </p:nvSpPr>
+        <p:spPr>
+          <a:xfrm>
+            <a:off x="7909560" y="3322015"/>
+            <a:ext cx="816864" cy="146304"/>
+          </a:xfrm>
+          <a:prstGeom prst="rect">
+            <a:avLst/>
+          </a:prstGeom>
+          <a:noFill/>
+          <a:ln/>
+        </p:spPr>
+        <p:txBody>
+          <a:bodyPr wrap="square" lIns="0" tIns="0" rIns="0" bIns="0" rtlCol="0" anchor="ctr">
             <a:normAutofit/>
           </a:bodyPr>
           <a:lstStyle/>
           <a:p>
-            <a:pPr indent="0" marL="0">
-              <a:buNone/>
-            </a:pPr>
-            <a:r>
-              <a:rPr lang="en-US" sz="1220" dirty="0">
-                <a:solidFill>
-                  <a:srgbClr val="17364A"/>
-                </a:solidFill>
-                <a:latin typeface="Aptos" pitchFamily="34" charset="0"/>
-                <a:ea typeface="Aptos" pitchFamily="34" charset="-122"/>
-                <a:cs typeface="Aptos" pitchFamily="34" charset="-120"/>
-              </a:rPr>
-              <a:t>This module focuses on connecting AI projects to allowable costs,.</a:t>
-            </a:r>
-            <a:endParaRPr lang="en-US" sz="1220" dirty="0"/>
-          </a:p>
-          <a:p>
-            <a:pPr indent="0" marL="0">
-              <a:buNone/>
-            </a:pPr>
-            <a:r>
-              <a:rPr lang="en-US" sz="1220" dirty="0">
-                <a:solidFill>
-                  <a:srgbClr val="17364A"/>
-                </a:solidFill>
-                <a:latin typeface="Aptos" pitchFamily="34" charset="0"/>
-                <a:ea typeface="Aptos" pitchFamily="34" charset="-122"/>
-                <a:cs typeface="Aptos" pitchFamily="34" charset="-120"/>
-              </a:rPr>
-              <a:t>It is designed for public health staff who must translate.</a:t>
-            </a:r>
-            <a:endParaRPr lang="en-US" sz="1220" dirty="0"/>
-          </a:p>
-          <a:p>
-            <a:pPr indent="0" marL="0">
-              <a:buNone/>
-            </a:pPr>
-            <a:r>
-              <a:rPr lang="en-US" sz="1220" dirty="0">
-                <a:solidFill>
-                  <a:srgbClr val="17364A"/>
-                </a:solidFill>
-                <a:latin typeface="Aptos" pitchFamily="34" charset="0"/>
-                <a:ea typeface="Aptos" pitchFamily="34" charset="-122"/>
-                <a:cs typeface="Aptos" pitchFamily="34" charset="-120"/>
-              </a:rPr>
-              <a:t>The module helps learners move beyond general awareness by.</a:t>
-            </a:r>
-            <a:endParaRPr lang="en-US" sz="1220" dirty="0"/>
-          </a:p>
-        </p:txBody>
-      </p:sp>
-      <p:sp>
-        <p:nvSpPr>
-          <p:cNvPr id="16" name="Shape 14"/>
-          <p:cNvSpPr/>
-          <p:nvPr/>
-        </p:nvSpPr>
-        <p:spPr>
-          <a:xfrm>
-            <a:off x="7635240" y="4498848"/>
-            <a:ext cx="3474720" cy="1143000"/>
+            <a:pPr algn="ctr" indent="0" marL="0">
+              <a:buNone/>
+            </a:pPr>
+            <a:r>
+              <a:rPr lang="en-US" sz="880" b="1" dirty="0">
+                <a:solidFill>
+                  <a:srgbClr val="FFFFFF"/>
+                </a:solidFill>
+                <a:latin typeface="Aptos" pitchFamily="34" charset="0"/>
+                <a:ea typeface="Aptos" pitchFamily="34" charset="-122"/>
+                <a:cs typeface="Aptos" pitchFamily="34" charset="-120"/>
+              </a:rPr>
+              <a:t>Need</a:t>
+            </a:r>
+            <a:endParaRPr lang="en-US" sz="880" dirty="0"/>
+          </a:p>
+        </p:txBody>
+      </p:sp>
+      <p:sp>
+        <p:nvSpPr>
+          <p:cNvPr id="18" name="Shape 16"/>
+          <p:cNvSpPr/>
+          <p:nvPr/>
+        </p:nvSpPr>
+        <p:spPr>
+          <a:xfrm>
+            <a:off x="9817608" y="3399739"/>
+            <a:ext cx="164592" cy="0"/>
+          </a:xfrm>
+          <a:prstGeom prst="line">
+            <a:avLst/>
+          </a:prstGeom>
+          <a:noFill/>
+          <a:ln w="15240">
+            <a:solidFill>
+              <a:srgbClr val="8ABBD8"/>
+            </a:solidFill>
+            <a:prstDash val="solid"/>
+          </a:ln>
+        </p:spPr>
+      </p:sp>
+      <p:sp>
+        <p:nvSpPr>
+          <p:cNvPr id="19" name="Shape 17"/>
+          <p:cNvSpPr/>
+          <p:nvPr/>
+        </p:nvSpPr>
+        <p:spPr>
+          <a:xfrm>
+            <a:off x="8927592" y="3248863"/>
+            <a:ext cx="890016" cy="301752"/>
           </a:xfrm>
           <a:prstGeom prst="roundRect">
             <a:avLst>
-              <a:gd name="adj" fmla="val 9600"/>
+              <a:gd name="adj" fmla="val 24242"/>
+            </a:avLst>
+          </a:prstGeom>
+          <a:solidFill>
+            <a:srgbClr val="2F8A28"/>
+          </a:solidFill>
+          <a:ln w="12700">
+            <a:solidFill>
+              <a:srgbClr val="2F8A28"/>
+            </a:solidFill>
+            <a:prstDash val="solid"/>
+          </a:ln>
+        </p:spPr>
+      </p:sp>
+      <p:sp>
+        <p:nvSpPr>
+          <p:cNvPr id="20" name="Text 18"/>
+          <p:cNvSpPr/>
+          <p:nvPr/>
+        </p:nvSpPr>
+        <p:spPr>
+          <a:xfrm>
+            <a:off x="8964168" y="3322015"/>
+            <a:ext cx="816864" cy="146304"/>
+          </a:xfrm>
+          <a:prstGeom prst="rect">
+            <a:avLst/>
+          </a:prstGeom>
+          <a:noFill/>
+          <a:ln/>
+        </p:spPr>
+        <p:txBody>
+          <a:bodyPr wrap="square" lIns="0" tIns="0" rIns="0" bIns="0" rtlCol="0" anchor="ctr">
+            <a:normAutofit/>
+          </a:bodyPr>
+          <a:lstStyle/>
+          <a:p>
+            <a:pPr algn="ctr" indent="0" marL="0">
+              <a:buNone/>
+            </a:pPr>
+            <a:r>
+              <a:rPr lang="en-US" sz="880" b="1" dirty="0">
+                <a:solidFill>
+                  <a:srgbClr val="FFFFFF"/>
+                </a:solidFill>
+                <a:latin typeface="Aptos" pitchFamily="34" charset="0"/>
+                <a:ea typeface="Aptos" pitchFamily="34" charset="-122"/>
+                <a:cs typeface="Aptos" pitchFamily="34" charset="-120"/>
+              </a:rPr>
+              <a:t>Build</a:t>
+            </a:r>
+            <a:endParaRPr lang="en-US" sz="880" dirty="0"/>
+          </a:p>
+        </p:txBody>
+      </p:sp>
+      <p:sp>
+        <p:nvSpPr>
+          <p:cNvPr id="21" name="Shape 19"/>
+          <p:cNvSpPr/>
+          <p:nvPr/>
+        </p:nvSpPr>
+        <p:spPr>
+          <a:xfrm>
+            <a:off x="9982200" y="3248863"/>
+            <a:ext cx="890016" cy="301752"/>
+          </a:xfrm>
+          <a:prstGeom prst="roundRect">
+            <a:avLst>
+              <a:gd name="adj" fmla="val 24242"/>
+            </a:avLst>
+          </a:prstGeom>
+          <a:solidFill>
+            <a:srgbClr val="6A4CA3"/>
+          </a:solidFill>
+          <a:ln w="12700">
+            <a:solidFill>
+              <a:srgbClr val="6A4CA3"/>
+            </a:solidFill>
+            <a:prstDash val="solid"/>
+          </a:ln>
+        </p:spPr>
+      </p:sp>
+      <p:sp>
+        <p:nvSpPr>
+          <p:cNvPr id="22" name="Text 20"/>
+          <p:cNvSpPr/>
+          <p:nvPr/>
+        </p:nvSpPr>
+        <p:spPr>
+          <a:xfrm>
+            <a:off x="10018776" y="3322015"/>
+            <a:ext cx="816864" cy="146304"/>
+          </a:xfrm>
+          <a:prstGeom prst="rect">
+            <a:avLst/>
+          </a:prstGeom>
+          <a:noFill/>
+          <a:ln/>
+        </p:spPr>
+        <p:txBody>
+          <a:bodyPr wrap="square" lIns="0" tIns="0" rIns="0" bIns="0" rtlCol="0" anchor="ctr">
+            <a:normAutofit/>
+          </a:bodyPr>
+          <a:lstStyle/>
+          <a:p>
+            <a:pPr algn="ctr" indent="0" marL="0">
+              <a:buNone/>
+            </a:pPr>
+            <a:r>
+              <a:rPr lang="en-US" sz="880" b="1" dirty="0">
+                <a:solidFill>
+                  <a:srgbClr val="FFFFFF"/>
+                </a:solidFill>
+                <a:latin typeface="Aptos" pitchFamily="34" charset="0"/>
+                <a:ea typeface="Aptos" pitchFamily="34" charset="-122"/>
+                <a:cs typeface="Aptos" pitchFamily="34" charset="-120"/>
+              </a:rPr>
+              <a:t>Adopt</a:t>
+            </a:r>
+            <a:endParaRPr lang="en-US" sz="880" dirty="0"/>
+          </a:p>
+        </p:txBody>
+      </p:sp>
+      <p:sp>
+        <p:nvSpPr>
+          <p:cNvPr id="23" name="Text 21"/>
+          <p:cNvSpPr/>
+          <p:nvPr/>
+        </p:nvSpPr>
+        <p:spPr>
+          <a:xfrm>
+            <a:off x="7854696" y="3742639"/>
+            <a:ext cx="3035808" cy="158191"/>
+          </a:xfrm>
+          <a:prstGeom prst="rect">
+            <a:avLst/>
+          </a:prstGeom>
+          <a:noFill/>
+          <a:ln/>
+        </p:spPr>
+        <p:txBody>
+          <a:bodyPr wrap="square" lIns="254" tIns="254" rIns="254" bIns="254" rtlCol="0" anchor="t">
+            <a:normAutofit/>
+          </a:bodyPr>
+          <a:lstStyle/>
+          <a:p>
+            <a:pPr indent="0" marL="0">
+              <a:buNone/>
+            </a:pPr>
+            <a:r>
+              <a:rPr lang="en-US" sz="1120" dirty="0">
+                <a:solidFill>
+                  <a:srgbClr val="17364A"/>
+                </a:solidFill>
+                <a:latin typeface="Aptos" pitchFamily="34" charset="0"/>
+                <a:ea typeface="Aptos" pitchFamily="34" charset="-122"/>
+                <a:cs typeface="Aptos" pitchFamily="34" charset="-120"/>
+              </a:rPr>
+              <a:t>Implementation work should make dependencies, approvals, training, and sustainment visible before launch.</a:t>
+            </a:r>
+            <a:endParaRPr lang="en-US" sz="1120" dirty="0"/>
+          </a:p>
+        </p:txBody>
+      </p:sp>
+      <p:sp>
+        <p:nvSpPr>
+          <p:cNvPr id="24" name="Shape 22"/>
+          <p:cNvSpPr/>
+          <p:nvPr/>
+        </p:nvSpPr>
+        <p:spPr>
+          <a:xfrm>
+            <a:off x="7635240" y="4184294"/>
+            <a:ext cx="3474720" cy="1466698"/>
+          </a:xfrm>
+          <a:prstGeom prst="roundRect">
+            <a:avLst>
+              <a:gd name="adj" fmla="val 7481"/>
             </a:avLst>
           </a:prstGeom>
           <a:solidFill>
@@ -16076,13 +16292,13 @@
       </p:sp>
       <p:sp>
         <p:nvSpPr>
-          <p:cNvPr id="17" name="Text 15"/>
-          <p:cNvSpPr/>
-          <p:nvPr/>
-        </p:nvSpPr>
-        <p:spPr>
-          <a:xfrm>
-            <a:off x="7799832" y="4645152"/>
+          <p:cNvPr id="25" name="Text 23"/>
+          <p:cNvSpPr/>
+          <p:nvPr/>
+        </p:nvSpPr>
+        <p:spPr>
+          <a:xfrm>
+            <a:off x="7799832" y="4330598"/>
             <a:ext cx="3145536" cy="256032"/>
           </a:xfrm>
           <a:prstGeom prst="rect">
@@ -16115,14 +16331,14 @@
       </p:sp>
       <p:sp>
         <p:nvSpPr>
-          <p:cNvPr id="18" name="Text 16"/>
-          <p:cNvSpPr/>
-          <p:nvPr/>
-        </p:nvSpPr>
-        <p:spPr>
-          <a:xfrm>
-            <a:off x="7799832" y="4974336"/>
-            <a:ext cx="3145536" cy="576072"/>
+          <p:cNvPr id="26" name="Text 24"/>
+          <p:cNvSpPr/>
+          <p:nvPr/>
+        </p:nvSpPr>
+        <p:spPr>
+          <a:xfrm>
+            <a:off x="7799832" y="4659782"/>
+            <a:ext cx="3145536" cy="899770"/>
           </a:xfrm>
           <a:prstGeom prst="rect">
             <a:avLst/>
@@ -16148,7 +16364,7 @@
                 <a:ea typeface="Aptos" pitchFamily="34" charset="-122"/>
                 <a:cs typeface="Aptos" pitchFamily="34" charset="-120"/>
               </a:rPr>
-              <a:t>Use the concept to clarify workflow changes, dependencies, staffing, procurement requirements, training needs, and.</a:t>
+              <a:t>Use the concept to clarify workflow changes, dependencies, staffing, procurement requirements, training needs, and implementation checkpoints.</a:t>
             </a:r>
             <a:endParaRPr lang="en-US" sz="1320" dirty="0"/>
           </a:p>
@@ -16517,11 +16733,11 @@
         <p:spPr>
           <a:xfrm>
             <a:off x="7635240" y="1325880"/>
-            <a:ext cx="3474720" cy="1325880"/>
+            <a:ext cx="3474720" cy="1207008"/>
           </a:xfrm>
           <a:prstGeom prst="roundRect">
             <a:avLst>
-              <a:gd name="adj" fmla="val 8276"/>
+              <a:gd name="adj" fmla="val 9091"/>
             </a:avLst>
           </a:prstGeom>
           <a:solidFill>
@@ -16583,7 +16799,7 @@
         <p:spPr>
           <a:xfrm>
             <a:off x="7799832" y="1801368"/>
-            <a:ext cx="3145536" cy="758952"/>
+            <a:ext cx="3145536" cy="640080"/>
           </a:xfrm>
           <a:prstGeom prst="rect">
             <a:avLst/>
@@ -16609,7 +16825,7 @@
                 <a:ea typeface="Aptos" pitchFamily="34" charset="-122"/>
                 <a:cs typeface="Aptos" pitchFamily="34" charset="-120"/>
               </a:rPr>
-              <a:t>Decision right: The authority to approve, deny, modify, pause, or escalate an AI use case or.</a:t>
+              <a:t>Decision right: The authority to approve, deny, modify, pause, or escalate an AI use.</a:t>
             </a:r>
             <a:endParaRPr lang="en-US" sz="1320" dirty="0"/>
           </a:p>
@@ -16623,12 +16839,12 @@
         </p:nvSpPr>
         <p:spPr>
           <a:xfrm>
-            <a:off x="7635240" y="2788920"/>
-            <a:ext cx="3474720" cy="1536192"/>
+            <a:off x="7635240" y="2670048"/>
+            <a:ext cx="3474720" cy="1377086"/>
           </a:xfrm>
           <a:prstGeom prst="roundRect">
             <a:avLst>
-              <a:gd name="adj" fmla="val 7143"/>
+              <a:gd name="adj" fmla="val 7968"/>
             </a:avLst>
           </a:prstGeom>
           <a:solidFill>
@@ -16650,7 +16866,7 @@
         </p:nvSpPr>
         <p:spPr>
           <a:xfrm>
-            <a:off x="7799832" y="2935224"/>
+            <a:off x="7799832" y="2816352"/>
             <a:ext cx="3145536" cy="256032"/>
           </a:xfrm>
           <a:prstGeom prst="rect">
@@ -16689,8 +16905,8 @@
         </p:nvSpPr>
         <p:spPr>
           <a:xfrm>
-            <a:off x="7818120" y="3300984"/>
-            <a:ext cx="3090672" cy="877824"/>
+            <a:off x="7818120" y="3182112"/>
+            <a:ext cx="3090672" cy="718718"/>
           </a:xfrm>
           <a:prstGeom prst="rect">
             <a:avLst/>
@@ -16764,12 +16980,12 @@
         </p:nvSpPr>
         <p:spPr>
           <a:xfrm>
-            <a:off x="7635240" y="4498848"/>
-            <a:ext cx="3474720" cy="1143000"/>
+            <a:off x="7635240" y="4184294"/>
+            <a:ext cx="3474720" cy="1466698"/>
           </a:xfrm>
           <a:prstGeom prst="roundRect">
             <a:avLst>
-              <a:gd name="adj" fmla="val 9600"/>
+              <a:gd name="adj" fmla="val 7481"/>
             </a:avLst>
           </a:prstGeom>
           <a:solidFill>
@@ -16791,7 +17007,7 @@
         </p:nvSpPr>
         <p:spPr>
           <a:xfrm>
-            <a:off x="7799832" y="4645152"/>
+            <a:off x="7799832" y="4330598"/>
             <a:ext cx="3145536" cy="256032"/>
           </a:xfrm>
           <a:prstGeom prst="rect">
@@ -16830,8 +17046,8 @@
         </p:nvSpPr>
         <p:spPr>
           <a:xfrm>
-            <a:off x="7799832" y="4974336"/>
-            <a:ext cx="3145536" cy="576072"/>
+            <a:off x="7799832" y="4659782"/>
+            <a:ext cx="3145536" cy="899770"/>
           </a:xfrm>
           <a:prstGeom prst="rect">
             <a:avLst/>
@@ -16857,7 +17073,7 @@
                 <a:ea typeface="Aptos" pitchFamily="34" charset="-122"/>
                 <a:cs typeface="Aptos" pitchFamily="34" charset="-120"/>
               </a:rPr>
-              <a:t>Use the concept to clarify workflow changes, dependencies, staffing, procurement requirements, training needs, and.</a:t>
+              <a:t>Use the concept to clarify workflow changes, dependencies, staffing, procurement requirements, training needs, and implementation checkpoints.</a:t>
             </a:r>
             <a:endParaRPr lang="en-US" sz="1320" dirty="0"/>
           </a:p>
@@ -17226,11 +17442,11 @@
         <p:spPr>
           <a:xfrm>
             <a:off x="7635240" y="1325880"/>
-            <a:ext cx="3474720" cy="1325880"/>
+            <a:ext cx="3474720" cy="1207008"/>
           </a:xfrm>
           <a:prstGeom prst="roundRect">
             <a:avLst>
-              <a:gd name="adj" fmla="val 8276"/>
+              <a:gd name="adj" fmla="val 9091"/>
             </a:avLst>
           </a:prstGeom>
           <a:solidFill>
@@ -17292,7 +17508,7 @@
         <p:spPr>
           <a:xfrm>
             <a:off x="7799832" y="1801368"/>
-            <a:ext cx="3145536" cy="758952"/>
+            <a:ext cx="3145536" cy="640080"/>
           </a:xfrm>
           <a:prstGeom prst="rect">
             <a:avLst/>
@@ -17318,7 +17534,7 @@
                 <a:ea typeface="Aptos" pitchFamily="34" charset="-122"/>
                 <a:cs typeface="Aptos" pitchFamily="34" charset="-120"/>
               </a:rPr>
-              <a:t>This module provides national-level training guidance for public health agencies and partners.</a:t>
+              <a:t>This module provides national-level training guidance for public health agencies and.</a:t>
             </a:r>
             <a:endParaRPr lang="en-US" sz="1320" dirty="0"/>
           </a:p>
@@ -17332,12 +17548,12 @@
         </p:nvSpPr>
         <p:spPr>
           <a:xfrm>
-            <a:off x="7635240" y="2788920"/>
-            <a:ext cx="3474720" cy="1536192"/>
+            <a:off x="7635240" y="2670048"/>
+            <a:ext cx="3474720" cy="1377086"/>
           </a:xfrm>
           <a:prstGeom prst="roundRect">
             <a:avLst>
-              <a:gd name="adj" fmla="val 7143"/>
+              <a:gd name="adj" fmla="val 7968"/>
             </a:avLst>
           </a:prstGeom>
           <a:solidFill>
@@ -17359,8 +17575,8 @@
         </p:nvSpPr>
         <p:spPr>
           <a:xfrm>
-            <a:off x="7799832" y="2935224"/>
-            <a:ext cx="3145536" cy="256032"/>
+            <a:off x="7799832" y="2798064"/>
+            <a:ext cx="3145536" cy="237744"/>
           </a:xfrm>
           <a:prstGeom prst="rect">
             <a:avLst/>
@@ -17376,7 +17592,7 @@
               <a:buNone/>
             </a:pPr>
             <a:r>
-              <a:rPr lang="en-US" sz="1300" b="1" dirty="0">
+              <a:rPr lang="en-US" sz="1250" b="1" dirty="0">
                 <a:solidFill>
                   <a:srgbClr val="0068B7"/>
                 </a:solidFill>
@@ -17384,101 +17600,317 @@
                 <a:ea typeface="Aptos" pitchFamily="34" charset="-122"/>
                 <a:cs typeface="Aptos" pitchFamily="34" charset="-120"/>
               </a:rPr>
-              <a:t>Concept checkpoints</a:t>
-            </a:r>
-            <a:endParaRPr lang="en-US" sz="1300" dirty="0"/>
-          </a:p>
-        </p:txBody>
-      </p:sp>
-      <p:sp>
-        <p:nvSpPr>
-          <p:cNvPr id="15" name="Text 13"/>
-          <p:cNvSpPr/>
-          <p:nvPr/>
-        </p:nvSpPr>
-        <p:spPr>
-          <a:xfrm>
-            <a:off x="7818120" y="3300984"/>
-            <a:ext cx="3090672" cy="877824"/>
-          </a:xfrm>
-          <a:prstGeom prst="rect">
-            <a:avLst/>
-          </a:prstGeom>
-          <a:noFill/>
-          <a:ln/>
-        </p:spPr>
-        <p:txBody>
-          <a:bodyPr wrap="square" lIns="508" tIns="508" rIns="508" bIns="508" rtlCol="0" anchor="t">
+              <a:t>Governance pathway</a:t>
+            </a:r>
+            <a:endParaRPr lang="en-US" sz="1250" dirty="0"/>
+          </a:p>
+        </p:txBody>
+      </p:sp>
+      <p:sp>
+        <p:nvSpPr>
+          <p:cNvPr id="15" name="Shape 13"/>
+          <p:cNvSpPr/>
+          <p:nvPr/>
+        </p:nvSpPr>
+        <p:spPr>
+          <a:xfrm>
+            <a:off x="8763000" y="3351276"/>
+            <a:ext cx="164592" cy="0"/>
+          </a:xfrm>
+          <a:prstGeom prst="line">
+            <a:avLst/>
+          </a:prstGeom>
+          <a:noFill/>
+          <a:ln w="15240">
+            <a:solidFill>
+              <a:srgbClr val="8ABBD8"/>
+            </a:solidFill>
+            <a:prstDash val="solid"/>
+          </a:ln>
+        </p:spPr>
+      </p:sp>
+      <p:sp>
+        <p:nvSpPr>
+          <p:cNvPr id="16" name="Shape 14"/>
+          <p:cNvSpPr/>
+          <p:nvPr/>
+        </p:nvSpPr>
+        <p:spPr>
+          <a:xfrm>
+            <a:off x="7872984" y="3200400"/>
+            <a:ext cx="890016" cy="301752"/>
+          </a:xfrm>
+          <a:prstGeom prst="roundRect">
+            <a:avLst>
+              <a:gd name="adj" fmla="val 24242"/>
+            </a:avLst>
+          </a:prstGeom>
+          <a:solidFill>
+            <a:srgbClr val="0068B7"/>
+          </a:solidFill>
+          <a:ln w="12700">
+            <a:solidFill>
+              <a:srgbClr val="0068B7"/>
+            </a:solidFill>
+            <a:prstDash val="solid"/>
+          </a:ln>
+        </p:spPr>
+      </p:sp>
+      <p:sp>
+        <p:nvSpPr>
+          <p:cNvPr id="17" name="Text 15"/>
+          <p:cNvSpPr/>
+          <p:nvPr/>
+        </p:nvSpPr>
+        <p:spPr>
+          <a:xfrm>
+            <a:off x="7909560" y="3273552"/>
+            <a:ext cx="816864" cy="146304"/>
+          </a:xfrm>
+          <a:prstGeom prst="rect">
+            <a:avLst/>
+          </a:prstGeom>
+          <a:noFill/>
+          <a:ln/>
+        </p:spPr>
+        <p:txBody>
+          <a:bodyPr wrap="square" lIns="0" tIns="0" rIns="0" bIns="0" rtlCol="0" anchor="ctr">
             <a:normAutofit/>
           </a:bodyPr>
           <a:lstStyle/>
           <a:p>
-            <a:pPr indent="0" marL="0">
-              <a:buNone/>
-            </a:pPr>
-            <a:r>
-              <a:rPr lang="en-US" sz="1220" dirty="0">
-                <a:solidFill>
-                  <a:srgbClr val="17364A"/>
-                </a:solidFill>
-                <a:latin typeface="Aptos" pitchFamily="34" charset="0"/>
-                <a:ea typeface="Aptos" pitchFamily="34" charset="-122"/>
-                <a:cs typeface="Aptos" pitchFamily="34" charset="-120"/>
-              </a:rPr>
-              <a:t>It is not legal advice and does not replace review by agency legal.</a:t>
-            </a:r>
-            <a:endParaRPr lang="en-US" sz="1220" dirty="0"/>
-          </a:p>
-          <a:p>
-            <a:pPr indent="0" marL="0">
-              <a:buNone/>
-            </a:pPr>
-            <a:r>
-              <a:rPr lang="en-US" sz="1220" dirty="0">
-                <a:solidFill>
-                  <a:srgbClr val="17364A"/>
-                </a:solidFill>
-                <a:latin typeface="Aptos" pitchFamily="34" charset="0"/>
-                <a:ea typeface="Aptos" pitchFamily="34" charset="-122"/>
-                <a:cs typeface="Aptos" pitchFamily="34" charset="-120"/>
-              </a:rPr>
-              <a:t>Requirements may vary by state, locality, territory, Tribe,.</a:t>
-            </a:r>
-            <a:endParaRPr lang="en-US" sz="1220" dirty="0"/>
-          </a:p>
-          <a:p>
-            <a:pPr indent="0" marL="0">
-              <a:buNone/>
-            </a:pPr>
-            <a:r>
-              <a:rPr lang="en-US" sz="1220" dirty="0">
-                <a:solidFill>
-                  <a:srgbClr val="17364A"/>
-                </a:solidFill>
-                <a:latin typeface="Aptos" pitchFamily="34" charset="0"/>
-                <a:ea typeface="Aptos" pitchFamily="34" charset="-122"/>
-                <a:cs typeface="Aptos" pitchFamily="34" charset="-120"/>
-              </a:rPr>
-              <a:t>Learners should use this module to identify the issues that.</a:t>
-            </a:r>
-            <a:endParaRPr lang="en-US" sz="1220" dirty="0"/>
-          </a:p>
-        </p:txBody>
-      </p:sp>
-      <p:sp>
-        <p:nvSpPr>
-          <p:cNvPr id="16" name="Shape 14"/>
-          <p:cNvSpPr/>
-          <p:nvPr/>
-        </p:nvSpPr>
-        <p:spPr>
-          <a:xfrm>
-            <a:off x="7635240" y="4498848"/>
-            <a:ext cx="3474720" cy="1143000"/>
+            <a:pPr algn="ctr" indent="0" marL="0">
+              <a:buNone/>
+            </a:pPr>
+            <a:r>
+              <a:rPr lang="en-US" sz="880" b="1" dirty="0">
+                <a:solidFill>
+                  <a:srgbClr val="FFFFFF"/>
+                </a:solidFill>
+                <a:latin typeface="Aptos" pitchFamily="34" charset="0"/>
+                <a:ea typeface="Aptos" pitchFamily="34" charset="-122"/>
+                <a:cs typeface="Aptos" pitchFamily="34" charset="-120"/>
+              </a:rPr>
+              <a:t>Submit</a:t>
+            </a:r>
+            <a:endParaRPr lang="en-US" sz="880" dirty="0"/>
+          </a:p>
+        </p:txBody>
+      </p:sp>
+      <p:sp>
+        <p:nvSpPr>
+          <p:cNvPr id="18" name="Shape 16"/>
+          <p:cNvSpPr/>
+          <p:nvPr/>
+        </p:nvSpPr>
+        <p:spPr>
+          <a:xfrm>
+            <a:off x="9817608" y="3351276"/>
+            <a:ext cx="164592" cy="0"/>
+          </a:xfrm>
+          <a:prstGeom prst="line">
+            <a:avLst/>
+          </a:prstGeom>
+          <a:noFill/>
+          <a:ln w="15240">
+            <a:solidFill>
+              <a:srgbClr val="8ABBD8"/>
+            </a:solidFill>
+            <a:prstDash val="solid"/>
+          </a:ln>
+        </p:spPr>
+      </p:sp>
+      <p:sp>
+        <p:nvSpPr>
+          <p:cNvPr id="19" name="Shape 17"/>
+          <p:cNvSpPr/>
+          <p:nvPr/>
+        </p:nvSpPr>
+        <p:spPr>
+          <a:xfrm>
+            <a:off x="8927592" y="3200400"/>
+            <a:ext cx="890016" cy="301752"/>
           </a:xfrm>
           <a:prstGeom prst="roundRect">
             <a:avLst>
-              <a:gd name="adj" fmla="val 9600"/>
+              <a:gd name="adj" fmla="val 24242"/>
+            </a:avLst>
+          </a:prstGeom>
+          <a:solidFill>
+            <a:srgbClr val="2F8A28"/>
+          </a:solidFill>
+          <a:ln w="12700">
+            <a:solidFill>
+              <a:srgbClr val="2F8A28"/>
+            </a:solidFill>
+            <a:prstDash val="solid"/>
+          </a:ln>
+        </p:spPr>
+      </p:sp>
+      <p:sp>
+        <p:nvSpPr>
+          <p:cNvPr id="20" name="Text 18"/>
+          <p:cNvSpPr/>
+          <p:nvPr/>
+        </p:nvSpPr>
+        <p:spPr>
+          <a:xfrm>
+            <a:off x="8964168" y="3273552"/>
+            <a:ext cx="816864" cy="146304"/>
+          </a:xfrm>
+          <a:prstGeom prst="rect">
+            <a:avLst/>
+          </a:prstGeom>
+          <a:noFill/>
+          <a:ln/>
+        </p:spPr>
+        <p:txBody>
+          <a:bodyPr wrap="square" lIns="0" tIns="0" rIns="0" bIns="0" rtlCol="0" anchor="ctr">
+            <a:normAutofit/>
+          </a:bodyPr>
+          <a:lstStyle/>
+          <a:p>
+            <a:pPr algn="ctr" indent="0" marL="0">
+              <a:buNone/>
+            </a:pPr>
+            <a:r>
+              <a:rPr lang="en-US" sz="880" b="1" dirty="0">
+                <a:solidFill>
+                  <a:srgbClr val="FFFFFF"/>
+                </a:solidFill>
+                <a:latin typeface="Aptos" pitchFamily="34" charset="0"/>
+                <a:ea typeface="Aptos" pitchFamily="34" charset="-122"/>
+                <a:cs typeface="Aptos" pitchFamily="34" charset="-120"/>
+              </a:rPr>
+              <a:t>Review</a:t>
+            </a:r>
+            <a:endParaRPr lang="en-US" sz="880" dirty="0"/>
+          </a:p>
+        </p:txBody>
+      </p:sp>
+      <p:sp>
+        <p:nvSpPr>
+          <p:cNvPr id="21" name="Shape 19"/>
+          <p:cNvSpPr/>
+          <p:nvPr/>
+        </p:nvSpPr>
+        <p:spPr>
+          <a:xfrm>
+            <a:off x="9982200" y="3200400"/>
+            <a:ext cx="890016" cy="301752"/>
+          </a:xfrm>
+          <a:prstGeom prst="roundRect">
+            <a:avLst>
+              <a:gd name="adj" fmla="val 24242"/>
+            </a:avLst>
+          </a:prstGeom>
+          <a:solidFill>
+            <a:srgbClr val="6A4CA3"/>
+          </a:solidFill>
+          <a:ln w="12700">
+            <a:solidFill>
+              <a:srgbClr val="6A4CA3"/>
+            </a:solidFill>
+            <a:prstDash val="solid"/>
+          </a:ln>
+        </p:spPr>
+      </p:sp>
+      <p:sp>
+        <p:nvSpPr>
+          <p:cNvPr id="22" name="Text 20"/>
+          <p:cNvSpPr/>
+          <p:nvPr/>
+        </p:nvSpPr>
+        <p:spPr>
+          <a:xfrm>
+            <a:off x="10018776" y="3273552"/>
+            <a:ext cx="816864" cy="146304"/>
+          </a:xfrm>
+          <a:prstGeom prst="rect">
+            <a:avLst/>
+          </a:prstGeom>
+          <a:noFill/>
+          <a:ln/>
+        </p:spPr>
+        <p:txBody>
+          <a:bodyPr wrap="square" lIns="0" tIns="0" rIns="0" bIns="0" rtlCol="0" anchor="ctr">
+            <a:normAutofit/>
+          </a:bodyPr>
+          <a:lstStyle/>
+          <a:p>
+            <a:pPr algn="ctr" indent="0" marL="0">
+              <a:buNone/>
+            </a:pPr>
+            <a:r>
+              <a:rPr lang="en-US" sz="880" b="1" dirty="0">
+                <a:solidFill>
+                  <a:srgbClr val="FFFFFF"/>
+                </a:solidFill>
+                <a:latin typeface="Aptos" pitchFamily="34" charset="0"/>
+                <a:ea typeface="Aptos" pitchFamily="34" charset="-122"/>
+                <a:cs typeface="Aptos" pitchFamily="34" charset="-120"/>
+              </a:rPr>
+              <a:t>Oversee</a:t>
+            </a:r>
+            <a:endParaRPr lang="en-US" sz="880" dirty="0"/>
+          </a:p>
+        </p:txBody>
+      </p:sp>
+      <p:sp>
+        <p:nvSpPr>
+          <p:cNvPr id="23" name="Text 21"/>
+          <p:cNvSpPr/>
+          <p:nvPr/>
+        </p:nvSpPr>
+        <p:spPr>
+          <a:xfrm>
+            <a:off x="7854696" y="3694176"/>
+            <a:ext cx="3035808" cy="206654"/>
+          </a:xfrm>
+          <a:prstGeom prst="rect">
+            <a:avLst/>
+          </a:prstGeom>
+          <a:noFill/>
+          <a:ln/>
+        </p:spPr>
+        <p:txBody>
+          <a:bodyPr wrap="square" lIns="254" tIns="254" rIns="254" bIns="254" rtlCol="0" anchor="t">
+            <a:normAutofit/>
+          </a:bodyPr>
+          <a:lstStyle/>
+          <a:p>
+            <a:pPr indent="0" marL="0">
+              <a:buNone/>
+            </a:pPr>
+            <a:r>
+              <a:rPr lang="en-US" sz="1120" dirty="0">
+                <a:solidFill>
+                  <a:srgbClr val="17364A"/>
+                </a:solidFill>
+                <a:latin typeface="Aptos" pitchFamily="34" charset="0"/>
+                <a:ea typeface="Aptos" pitchFamily="34" charset="-122"/>
+                <a:cs typeface="Aptos" pitchFamily="34" charset="-120"/>
+              </a:rPr>
+              <a:t>A proposed AI use should move through documented review before it becomes an operational workflow.</a:t>
+            </a:r>
+            <a:endParaRPr lang="en-US" sz="1120" dirty="0"/>
+          </a:p>
+        </p:txBody>
+      </p:sp>
+      <p:sp>
+        <p:nvSpPr>
+          <p:cNvPr id="24" name="Shape 22"/>
+          <p:cNvSpPr/>
+          <p:nvPr/>
+        </p:nvSpPr>
+        <p:spPr>
+          <a:xfrm>
+            <a:off x="7635240" y="4184294"/>
+            <a:ext cx="3474720" cy="1466698"/>
+          </a:xfrm>
+          <a:prstGeom prst="roundRect">
+            <a:avLst>
+              <a:gd name="adj" fmla="val 7481"/>
             </a:avLst>
           </a:prstGeom>
           <a:solidFill>
@@ -17494,13 +17926,13 @@
       </p:sp>
       <p:sp>
         <p:nvSpPr>
-          <p:cNvPr id="17" name="Text 15"/>
-          <p:cNvSpPr/>
-          <p:nvPr/>
-        </p:nvSpPr>
-        <p:spPr>
-          <a:xfrm>
-            <a:off x="7799832" y="4645152"/>
+          <p:cNvPr id="25" name="Text 23"/>
+          <p:cNvSpPr/>
+          <p:nvPr/>
+        </p:nvSpPr>
+        <p:spPr>
+          <a:xfrm>
+            <a:off x="7799832" y="4330598"/>
             <a:ext cx="3145536" cy="256032"/>
           </a:xfrm>
           <a:prstGeom prst="rect">
@@ -17533,14 +17965,14 @@
       </p:sp>
       <p:sp>
         <p:nvSpPr>
-          <p:cNvPr id="18" name="Text 16"/>
-          <p:cNvSpPr/>
-          <p:nvPr/>
-        </p:nvSpPr>
-        <p:spPr>
-          <a:xfrm>
-            <a:off x="7799832" y="4974336"/>
-            <a:ext cx="3145536" cy="576072"/>
+          <p:cNvPr id="26" name="Text 24"/>
+          <p:cNvSpPr/>
+          <p:nvPr/>
+        </p:nvSpPr>
+        <p:spPr>
+          <a:xfrm>
+            <a:off x="7799832" y="4659782"/>
+            <a:ext cx="3145536" cy="899770"/>
           </a:xfrm>
           <a:prstGeom prst="rect">
             <a:avLst/>
@@ -17566,7 +17998,7 @@
                 <a:ea typeface="Aptos" pitchFamily="34" charset="-122"/>
                 <a:cs typeface="Aptos" pitchFamily="34" charset="-120"/>
               </a:rPr>
-              <a:t>Translate this concept into clear decision rights, review steps, documentation expectations, and escalation paths before.</a:t>
+              <a:t>Translate this concept into clear decision rights, review steps, documentation expectations, and escalation paths before an AI-supported workflow is approved.</a:t>
             </a:r>
             <a:endParaRPr lang="en-US" sz="1320" dirty="0"/>
           </a:p>
@@ -17935,11 +18367,11 @@
         <p:spPr>
           <a:xfrm>
             <a:off x="7635240" y="1325880"/>
-            <a:ext cx="3474720" cy="1325880"/>
+            <a:ext cx="3474720" cy="1255471"/>
           </a:xfrm>
           <a:prstGeom prst="roundRect">
             <a:avLst>
-              <a:gd name="adj" fmla="val 8276"/>
+              <a:gd name="adj" fmla="val 8740"/>
             </a:avLst>
           </a:prstGeom>
           <a:solidFill>
@@ -18001,7 +18433,7 @@
         <p:spPr>
           <a:xfrm>
             <a:off x="7799832" y="1801368"/>
-            <a:ext cx="3145536" cy="758952"/>
+            <a:ext cx="3145536" cy="688543"/>
           </a:xfrm>
           <a:prstGeom prst="rect">
             <a:avLst/>
@@ -18041,12 +18473,12 @@
         </p:nvSpPr>
         <p:spPr>
           <a:xfrm>
-            <a:off x="7635240" y="2788920"/>
-            <a:ext cx="3474720" cy="1536192"/>
+            <a:off x="7635240" y="2718511"/>
+            <a:ext cx="3474720" cy="1328623"/>
           </a:xfrm>
           <a:prstGeom prst="roundRect">
             <a:avLst>
-              <a:gd name="adj" fmla="val 7143"/>
+              <a:gd name="adj" fmla="val 8259"/>
             </a:avLst>
           </a:prstGeom>
           <a:solidFill>
@@ -18068,8 +18500,8 @@
         </p:nvSpPr>
         <p:spPr>
           <a:xfrm>
-            <a:off x="7799832" y="2935224"/>
-            <a:ext cx="3145536" cy="256032"/>
+            <a:off x="7799832" y="2846527"/>
+            <a:ext cx="3145536" cy="237744"/>
           </a:xfrm>
           <a:prstGeom prst="rect">
             <a:avLst/>
@@ -18085,7 +18517,7 @@
               <a:buNone/>
             </a:pPr>
             <a:r>
-              <a:rPr lang="en-US" sz="1300" b="1" dirty="0">
+              <a:rPr lang="en-US" sz="1250" b="1" dirty="0">
                 <a:solidFill>
                   <a:srgbClr val="0068B7"/>
                 </a:solidFill>
@@ -18093,101 +18525,317 @@
                 <a:ea typeface="Aptos" pitchFamily="34" charset="-122"/>
                 <a:cs typeface="Aptos" pitchFamily="34" charset="-120"/>
               </a:rPr>
-              <a:t>Concept checkpoints</a:t>
-            </a:r>
-            <a:endParaRPr lang="en-US" sz="1300" dirty="0"/>
-          </a:p>
-        </p:txBody>
-      </p:sp>
-      <p:sp>
-        <p:nvSpPr>
-          <p:cNvPr id="15" name="Text 13"/>
-          <p:cNvSpPr/>
-          <p:nvPr/>
-        </p:nvSpPr>
-        <p:spPr>
-          <a:xfrm>
-            <a:off x="7818120" y="3300984"/>
-            <a:ext cx="3090672" cy="877824"/>
-          </a:xfrm>
-          <a:prstGeom prst="rect">
-            <a:avLst/>
-          </a:prstGeom>
-          <a:noFill/>
-          <a:ln/>
-        </p:spPr>
-        <p:txBody>
-          <a:bodyPr wrap="square" lIns="508" tIns="508" rIns="508" bIns="508" rtlCol="0" anchor="t">
+              <a:t>Implementation path</a:t>
+            </a:r>
+            <a:endParaRPr lang="en-US" sz="1250" dirty="0"/>
+          </a:p>
+        </p:txBody>
+      </p:sp>
+      <p:sp>
+        <p:nvSpPr>
+          <p:cNvPr id="15" name="Shape 13"/>
+          <p:cNvSpPr/>
+          <p:nvPr/>
+        </p:nvSpPr>
+        <p:spPr>
+          <a:xfrm>
+            <a:off x="8763000" y="3399739"/>
+            <a:ext cx="164592" cy="0"/>
+          </a:xfrm>
+          <a:prstGeom prst="line">
+            <a:avLst/>
+          </a:prstGeom>
+          <a:noFill/>
+          <a:ln w="15240">
+            <a:solidFill>
+              <a:srgbClr val="8ABBD8"/>
+            </a:solidFill>
+            <a:prstDash val="solid"/>
+          </a:ln>
+        </p:spPr>
+      </p:sp>
+      <p:sp>
+        <p:nvSpPr>
+          <p:cNvPr id="16" name="Shape 14"/>
+          <p:cNvSpPr/>
+          <p:nvPr/>
+        </p:nvSpPr>
+        <p:spPr>
+          <a:xfrm>
+            <a:off x="7872984" y="3248863"/>
+            <a:ext cx="890016" cy="301752"/>
+          </a:xfrm>
+          <a:prstGeom prst="roundRect">
+            <a:avLst>
+              <a:gd name="adj" fmla="val 24242"/>
+            </a:avLst>
+          </a:prstGeom>
+          <a:solidFill>
+            <a:srgbClr val="0068B7"/>
+          </a:solidFill>
+          <a:ln w="12700">
+            <a:solidFill>
+              <a:srgbClr val="0068B7"/>
+            </a:solidFill>
+            <a:prstDash val="solid"/>
+          </a:ln>
+        </p:spPr>
+      </p:sp>
+      <p:sp>
+        <p:nvSpPr>
+          <p:cNvPr id="17" name="Text 15"/>
+          <p:cNvSpPr/>
+          <p:nvPr/>
+        </p:nvSpPr>
+        <p:spPr>
+          <a:xfrm>
+            <a:off x="7909560" y="3322015"/>
+            <a:ext cx="816864" cy="146304"/>
+          </a:xfrm>
+          <a:prstGeom prst="rect">
+            <a:avLst/>
+          </a:prstGeom>
+          <a:noFill/>
+          <a:ln/>
+        </p:spPr>
+        <p:txBody>
+          <a:bodyPr wrap="square" lIns="0" tIns="0" rIns="0" bIns="0" rtlCol="0" anchor="ctr">
             <a:normAutofit/>
           </a:bodyPr>
           <a:lstStyle/>
           <a:p>
-            <a:pPr indent="0" marL="0">
-              <a:buNone/>
-            </a:pPr>
-            <a:r>
-              <a:rPr lang="en-US" sz="1220" dirty="0">
-                <a:solidFill>
-                  <a:srgbClr val="17364A"/>
-                </a:solidFill>
-                <a:latin typeface="Aptos" pitchFamily="34" charset="0"/>
-                <a:ea typeface="Aptos" pitchFamily="34" charset="-122"/>
-                <a:cs typeface="Aptos" pitchFamily="34" charset="-120"/>
-              </a:rPr>
-              <a:t>Grant and Funding Management for AI Projects matters because AI.</a:t>
-            </a:r>
-            <a:endParaRPr lang="en-US" sz="1220" dirty="0"/>
-          </a:p>
-          <a:p>
-            <a:pPr indent="0" marL="0">
-              <a:buNone/>
-            </a:pPr>
-            <a:r>
-              <a:rPr lang="en-US" sz="1220" dirty="0">
-                <a:solidFill>
-                  <a:srgbClr val="17364A"/>
-                </a:solidFill>
-                <a:latin typeface="Aptos" pitchFamily="34" charset="0"/>
-                <a:ea typeface="Aptos" pitchFamily="34" charset="-122"/>
-                <a:cs typeface="Aptos" pitchFamily="34" charset="-120"/>
-              </a:rPr>
-              <a:t>Without a structured approach, staff may rely on informal.</a:t>
-            </a:r>
-            <a:endParaRPr lang="en-US" sz="1220" dirty="0"/>
-          </a:p>
-          <a:p>
-            <a:pPr indent="0" marL="0">
-              <a:buNone/>
-            </a:pPr>
-            <a:r>
-              <a:rPr lang="en-US" sz="1220" dirty="0">
-                <a:solidFill>
-                  <a:srgbClr val="17364A"/>
-                </a:solidFill>
-                <a:latin typeface="Aptos" pitchFamily="34" charset="0"/>
-                <a:ea typeface="Aptos" pitchFamily="34" charset="-122"/>
-                <a:cs typeface="Aptos" pitchFamily="34" charset="-120"/>
-              </a:rPr>
-              <a:t>Public health agencies operate under legal authorities, public.</a:t>
-            </a:r>
-            <a:endParaRPr lang="en-US" sz="1220" dirty="0"/>
-          </a:p>
-        </p:txBody>
-      </p:sp>
-      <p:sp>
-        <p:nvSpPr>
-          <p:cNvPr id="16" name="Shape 14"/>
-          <p:cNvSpPr/>
-          <p:nvPr/>
-        </p:nvSpPr>
-        <p:spPr>
-          <a:xfrm>
-            <a:off x="7635240" y="4498848"/>
-            <a:ext cx="3474720" cy="1143000"/>
+            <a:pPr algn="ctr" indent="0" marL="0">
+              <a:buNone/>
+            </a:pPr>
+            <a:r>
+              <a:rPr lang="en-US" sz="880" b="1" dirty="0">
+                <a:solidFill>
+                  <a:srgbClr val="FFFFFF"/>
+                </a:solidFill>
+                <a:latin typeface="Aptos" pitchFamily="34" charset="0"/>
+                <a:ea typeface="Aptos" pitchFamily="34" charset="-122"/>
+                <a:cs typeface="Aptos" pitchFamily="34" charset="-120"/>
+              </a:rPr>
+              <a:t>Need</a:t>
+            </a:r>
+            <a:endParaRPr lang="en-US" sz="880" dirty="0"/>
+          </a:p>
+        </p:txBody>
+      </p:sp>
+      <p:sp>
+        <p:nvSpPr>
+          <p:cNvPr id="18" name="Shape 16"/>
+          <p:cNvSpPr/>
+          <p:nvPr/>
+        </p:nvSpPr>
+        <p:spPr>
+          <a:xfrm>
+            <a:off x="9817608" y="3399739"/>
+            <a:ext cx="164592" cy="0"/>
+          </a:xfrm>
+          <a:prstGeom prst="line">
+            <a:avLst/>
+          </a:prstGeom>
+          <a:noFill/>
+          <a:ln w="15240">
+            <a:solidFill>
+              <a:srgbClr val="8ABBD8"/>
+            </a:solidFill>
+            <a:prstDash val="solid"/>
+          </a:ln>
+        </p:spPr>
+      </p:sp>
+      <p:sp>
+        <p:nvSpPr>
+          <p:cNvPr id="19" name="Shape 17"/>
+          <p:cNvSpPr/>
+          <p:nvPr/>
+        </p:nvSpPr>
+        <p:spPr>
+          <a:xfrm>
+            <a:off x="8927592" y="3248863"/>
+            <a:ext cx="890016" cy="301752"/>
           </a:xfrm>
           <a:prstGeom prst="roundRect">
             <a:avLst>
-              <a:gd name="adj" fmla="val 9600"/>
+              <a:gd name="adj" fmla="val 24242"/>
+            </a:avLst>
+          </a:prstGeom>
+          <a:solidFill>
+            <a:srgbClr val="2F8A28"/>
+          </a:solidFill>
+          <a:ln w="12700">
+            <a:solidFill>
+              <a:srgbClr val="2F8A28"/>
+            </a:solidFill>
+            <a:prstDash val="solid"/>
+          </a:ln>
+        </p:spPr>
+      </p:sp>
+      <p:sp>
+        <p:nvSpPr>
+          <p:cNvPr id="20" name="Text 18"/>
+          <p:cNvSpPr/>
+          <p:nvPr/>
+        </p:nvSpPr>
+        <p:spPr>
+          <a:xfrm>
+            <a:off x="8964168" y="3322015"/>
+            <a:ext cx="816864" cy="146304"/>
+          </a:xfrm>
+          <a:prstGeom prst="rect">
+            <a:avLst/>
+          </a:prstGeom>
+          <a:noFill/>
+          <a:ln/>
+        </p:spPr>
+        <p:txBody>
+          <a:bodyPr wrap="square" lIns="0" tIns="0" rIns="0" bIns="0" rtlCol="0" anchor="ctr">
+            <a:normAutofit/>
+          </a:bodyPr>
+          <a:lstStyle/>
+          <a:p>
+            <a:pPr algn="ctr" indent="0" marL="0">
+              <a:buNone/>
+            </a:pPr>
+            <a:r>
+              <a:rPr lang="en-US" sz="880" b="1" dirty="0">
+                <a:solidFill>
+                  <a:srgbClr val="FFFFFF"/>
+                </a:solidFill>
+                <a:latin typeface="Aptos" pitchFamily="34" charset="0"/>
+                <a:ea typeface="Aptos" pitchFamily="34" charset="-122"/>
+                <a:cs typeface="Aptos" pitchFamily="34" charset="-120"/>
+              </a:rPr>
+              <a:t>Build</a:t>
+            </a:r>
+            <a:endParaRPr lang="en-US" sz="880" dirty="0"/>
+          </a:p>
+        </p:txBody>
+      </p:sp>
+      <p:sp>
+        <p:nvSpPr>
+          <p:cNvPr id="21" name="Shape 19"/>
+          <p:cNvSpPr/>
+          <p:nvPr/>
+        </p:nvSpPr>
+        <p:spPr>
+          <a:xfrm>
+            <a:off x="9982200" y="3248863"/>
+            <a:ext cx="890016" cy="301752"/>
+          </a:xfrm>
+          <a:prstGeom prst="roundRect">
+            <a:avLst>
+              <a:gd name="adj" fmla="val 24242"/>
+            </a:avLst>
+          </a:prstGeom>
+          <a:solidFill>
+            <a:srgbClr val="6A4CA3"/>
+          </a:solidFill>
+          <a:ln w="12700">
+            <a:solidFill>
+              <a:srgbClr val="6A4CA3"/>
+            </a:solidFill>
+            <a:prstDash val="solid"/>
+          </a:ln>
+        </p:spPr>
+      </p:sp>
+      <p:sp>
+        <p:nvSpPr>
+          <p:cNvPr id="22" name="Text 20"/>
+          <p:cNvSpPr/>
+          <p:nvPr/>
+        </p:nvSpPr>
+        <p:spPr>
+          <a:xfrm>
+            <a:off x="10018776" y="3322015"/>
+            <a:ext cx="816864" cy="146304"/>
+          </a:xfrm>
+          <a:prstGeom prst="rect">
+            <a:avLst/>
+          </a:prstGeom>
+          <a:noFill/>
+          <a:ln/>
+        </p:spPr>
+        <p:txBody>
+          <a:bodyPr wrap="square" lIns="0" tIns="0" rIns="0" bIns="0" rtlCol="0" anchor="ctr">
+            <a:normAutofit/>
+          </a:bodyPr>
+          <a:lstStyle/>
+          <a:p>
+            <a:pPr algn="ctr" indent="0" marL="0">
+              <a:buNone/>
+            </a:pPr>
+            <a:r>
+              <a:rPr lang="en-US" sz="880" b="1" dirty="0">
+                <a:solidFill>
+                  <a:srgbClr val="FFFFFF"/>
+                </a:solidFill>
+                <a:latin typeface="Aptos" pitchFamily="34" charset="0"/>
+                <a:ea typeface="Aptos" pitchFamily="34" charset="-122"/>
+                <a:cs typeface="Aptos" pitchFamily="34" charset="-120"/>
+              </a:rPr>
+              <a:t>Adopt</a:t>
+            </a:r>
+            <a:endParaRPr lang="en-US" sz="880" dirty="0"/>
+          </a:p>
+        </p:txBody>
+      </p:sp>
+      <p:sp>
+        <p:nvSpPr>
+          <p:cNvPr id="23" name="Text 21"/>
+          <p:cNvSpPr/>
+          <p:nvPr/>
+        </p:nvSpPr>
+        <p:spPr>
+          <a:xfrm>
+            <a:off x="7854696" y="3742639"/>
+            <a:ext cx="3035808" cy="158191"/>
+          </a:xfrm>
+          <a:prstGeom prst="rect">
+            <a:avLst/>
+          </a:prstGeom>
+          <a:noFill/>
+          <a:ln/>
+        </p:spPr>
+        <p:txBody>
+          <a:bodyPr wrap="square" lIns="254" tIns="254" rIns="254" bIns="254" rtlCol="0" anchor="t">
+            <a:normAutofit/>
+          </a:bodyPr>
+          <a:lstStyle/>
+          <a:p>
+            <a:pPr indent="0" marL="0">
+              <a:buNone/>
+            </a:pPr>
+            <a:r>
+              <a:rPr lang="en-US" sz="1120" dirty="0">
+                <a:solidFill>
+                  <a:srgbClr val="17364A"/>
+                </a:solidFill>
+                <a:latin typeface="Aptos" pitchFamily="34" charset="0"/>
+                <a:ea typeface="Aptos" pitchFamily="34" charset="-122"/>
+                <a:cs typeface="Aptos" pitchFamily="34" charset="-120"/>
+              </a:rPr>
+              <a:t>Implementation work should make dependencies, approvals, training, and sustainment visible before launch.</a:t>
+            </a:r>
+            <a:endParaRPr lang="en-US" sz="1120" dirty="0"/>
+          </a:p>
+        </p:txBody>
+      </p:sp>
+      <p:sp>
+        <p:nvSpPr>
+          <p:cNvPr id="24" name="Shape 22"/>
+          <p:cNvSpPr/>
+          <p:nvPr/>
+        </p:nvSpPr>
+        <p:spPr>
+          <a:xfrm>
+            <a:off x="7635240" y="4184294"/>
+            <a:ext cx="3474720" cy="1466698"/>
+          </a:xfrm>
+          <a:prstGeom prst="roundRect">
+            <a:avLst>
+              <a:gd name="adj" fmla="val 7481"/>
             </a:avLst>
           </a:prstGeom>
           <a:solidFill>
@@ -18203,13 +18851,13 @@
       </p:sp>
       <p:sp>
         <p:nvSpPr>
-          <p:cNvPr id="17" name="Text 15"/>
-          <p:cNvSpPr/>
-          <p:nvPr/>
-        </p:nvSpPr>
-        <p:spPr>
-          <a:xfrm>
-            <a:off x="7799832" y="4645152"/>
+          <p:cNvPr id="25" name="Text 23"/>
+          <p:cNvSpPr/>
+          <p:nvPr/>
+        </p:nvSpPr>
+        <p:spPr>
+          <a:xfrm>
+            <a:off x="7799832" y="4330598"/>
             <a:ext cx="3145536" cy="256032"/>
           </a:xfrm>
           <a:prstGeom prst="rect">
@@ -18242,14 +18890,14 @@
       </p:sp>
       <p:sp>
         <p:nvSpPr>
-          <p:cNvPr id="18" name="Text 16"/>
-          <p:cNvSpPr/>
-          <p:nvPr/>
-        </p:nvSpPr>
-        <p:spPr>
-          <a:xfrm>
-            <a:off x="7799832" y="4974336"/>
-            <a:ext cx="3145536" cy="576072"/>
+          <p:cNvPr id="26" name="Text 24"/>
+          <p:cNvSpPr/>
+          <p:nvPr/>
+        </p:nvSpPr>
+        <p:spPr>
+          <a:xfrm>
+            <a:off x="7799832" y="4659782"/>
+            <a:ext cx="3145536" cy="899770"/>
           </a:xfrm>
           <a:prstGeom prst="rect">
             <a:avLst/>
@@ -18275,7 +18923,7 @@
                 <a:ea typeface="Aptos" pitchFamily="34" charset="-122"/>
                 <a:cs typeface="Aptos" pitchFamily="34" charset="-120"/>
               </a:rPr>
-              <a:t>Use the concept to clarify workflow changes, dependencies, staffing, procurement requirements, training needs, and.</a:t>
+              <a:t>Use the concept to clarify workflow changes, dependencies, staffing, procurement requirements, training needs, and implementation checkpoints.</a:t>
             </a:r>
             <a:endParaRPr lang="en-US" sz="1320" dirty="0"/>
           </a:p>

--- a/downloads/presentations/modules/pmg-310.pptx
+++ b/downloads/presentations/modules/pmg-310.pptx
@@ -3444,8 +3444,8 @@
         </p:nvSpPr>
         <p:spPr>
           <a:xfrm>
-            <a:off x="868680" y="1508760"/>
-            <a:ext cx="6309360" cy="4160520"/>
+            <a:off x="822960" y="1463040"/>
+            <a:ext cx="6565392" cy="4343400"/>
           </a:xfrm>
           <a:prstGeom prst="rect">
             <a:avLst/>
@@ -3463,7 +3463,7 @@
               <a:buNone/>
             </a:pPr>
             <a:r>
-              <a:rPr lang="en-US" sz="2100" dirty="0">
+              <a:rPr lang="en-US" sz="1920" dirty="0">
                 <a:solidFill>
                   <a:srgbClr val="003A63"/>
                 </a:solidFill>
@@ -3471,16 +3471,16 @@
                 <a:ea typeface="Aptos" pitchFamily="34" charset="-122"/>
                 <a:cs typeface="Aptos" pitchFamily="34" charset="-120"/>
               </a:rPr>
-              <a:t>• A public health agency is preparing to use AI in a workflow related to connecting AI projects.</a:t>
-            </a:r>
-            <a:endParaRPr lang="en-US" sz="2100" dirty="0"/>
-          </a:p>
-          <a:p>
-            <a:pPr indent="0" marL="0">
-              <a:buNone/>
-            </a:pPr>
-            <a:r>
-              <a:rPr lang="en-US" sz="2100" dirty="0">
+              <a:t>• A public health agency is preparing to use AI in a workflow related to.</a:t>
+            </a:r>
+            <a:endParaRPr lang="en-US" sz="1920" dirty="0"/>
+          </a:p>
+          <a:p>
+            <a:pPr indent="0" marL="0">
+              <a:buNone/>
+            </a:pPr>
+            <a:r>
+              <a:rPr lang="en-US" sz="1920" dirty="0">
                 <a:solidFill>
                   <a:srgbClr val="003A63"/>
                 </a:solidFill>
@@ -3488,16 +3488,16 @@
                 <a:ea typeface="Aptos" pitchFamily="34" charset="-122"/>
                 <a:cs typeface="Aptos" pitchFamily="34" charset="-120"/>
               </a:rPr>
-              <a:t>• The project team initially treats the tool as a helpful efficiency aid, but governance.</a:t>
-            </a:r>
-            <a:endParaRPr lang="en-US" sz="2100" dirty="0"/>
-          </a:p>
-          <a:p>
-            <a:pPr indent="0" marL="0">
-              <a:buNone/>
-            </a:pPr>
-            <a:r>
-              <a:rPr lang="en-US" sz="2100" dirty="0">
+              <a:t>• The project team initially treats the tool as a helpful efficiency aid, but.</a:t>
+            </a:r>
+            <a:endParaRPr lang="en-US" sz="1920" dirty="0"/>
+          </a:p>
+          <a:p>
+            <a:pPr indent="0" marL="0">
+              <a:buNone/>
+            </a:pPr>
+            <a:r>
+              <a:rPr lang="en-US" sz="1920" dirty="0">
                 <a:solidFill>
                   <a:srgbClr val="003A63"/>
                 </a:solidFill>
@@ -3505,9 +3505,9 @@
                 <a:ea typeface="Aptos" pitchFamily="34" charset="-122"/>
                 <a:cs typeface="Aptos" pitchFamily="34" charset="-120"/>
               </a:rPr>
-              <a:t>• The agency responds by creating a clear artifact that defines intended use, prohibited use,.</a:t>
-            </a:r>
-            <a:endParaRPr lang="en-US" sz="2100" dirty="0"/>
+              <a:t>• The agency responds by creating a clear artifact that defines intended use,.</a:t>
+            </a:r>
+            <a:endParaRPr lang="en-US" sz="1920" dirty="0"/>
           </a:p>
         </p:txBody>
       </p:sp>
@@ -3519,12 +3519,12 @@
         </p:nvSpPr>
         <p:spPr>
           <a:xfrm>
-            <a:off x="7635240" y="1325880"/>
-            <a:ext cx="3474720" cy="1255471"/>
+            <a:off x="7543800" y="1325880"/>
+            <a:ext cx="3611880" cy="1261872"/>
           </a:xfrm>
           <a:prstGeom prst="roundRect">
             <a:avLst>
-              <a:gd name="adj" fmla="val 8740"/>
+              <a:gd name="adj" fmla="val 8696"/>
             </a:avLst>
           </a:prstGeom>
           <a:solidFill>
@@ -3546,8 +3546,8 @@
         </p:nvSpPr>
         <p:spPr>
           <a:xfrm>
-            <a:off x="7799832" y="1472184"/>
-            <a:ext cx="3145536" cy="256032"/>
+            <a:off x="7708392" y="1453896"/>
+            <a:ext cx="3282696" cy="228600"/>
           </a:xfrm>
           <a:prstGeom prst="rect">
             <a:avLst/>
@@ -3563,7 +3563,7 @@
               <a:buNone/>
             </a:pPr>
             <a:r>
-              <a:rPr lang="en-US" sz="1300" b="1" dirty="0">
+              <a:rPr lang="en-US" sz="1220" b="1" dirty="0">
                 <a:solidFill>
                   <a:srgbClr val="0068B7"/>
                 </a:solidFill>
@@ -3573,7 +3573,7 @@
               </a:rPr>
               <a:t>Implementation cue</a:t>
             </a:r>
-            <a:endParaRPr lang="en-US" sz="1300" dirty="0"/>
+            <a:endParaRPr lang="en-US" sz="1220" dirty="0"/>
           </a:p>
         </p:txBody>
       </p:sp>
@@ -3585,8 +3585,8 @@
         </p:nvSpPr>
         <p:spPr>
           <a:xfrm>
-            <a:off x="7799832" y="1801368"/>
-            <a:ext cx="3145536" cy="688543"/>
+            <a:off x="7708392" y="1764792"/>
+            <a:ext cx="3282696" cy="749808"/>
           </a:xfrm>
           <a:prstGeom prst="rect">
             <a:avLst/>
@@ -3604,7 +3604,7 @@
               <a:buNone/>
             </a:pPr>
             <a:r>
-              <a:rPr lang="en-US" sz="1320" dirty="0">
+              <a:rPr lang="en-US" sz="1220" dirty="0">
                 <a:solidFill>
                   <a:srgbClr val="17364A"/>
                 </a:solidFill>
@@ -3612,9 +3612,9 @@
                 <a:ea typeface="Aptos" pitchFamily="34" charset="-122"/>
                 <a:cs typeface="Aptos" pitchFamily="34" charset="-120"/>
               </a:rPr>
-              <a:t>A public health agency is preparing to use AI in a workflow related to connecting AI projects to.</a:t>
-            </a:r>
-            <a:endParaRPr lang="en-US" sz="1320" dirty="0"/>
+              <a:t>A public health agency is preparing to use AI in a workflow related to.</a:t>
+            </a:r>
+            <a:endParaRPr lang="en-US" sz="1220" dirty="0"/>
           </a:p>
         </p:txBody>
       </p:sp>
@@ -3626,12 +3626,12 @@
         </p:nvSpPr>
         <p:spPr>
           <a:xfrm>
-            <a:off x="7635240" y="2718511"/>
-            <a:ext cx="3474720" cy="1328623"/>
+            <a:off x="7543800" y="2724912"/>
+            <a:ext cx="3611880" cy="1527048"/>
           </a:xfrm>
           <a:prstGeom prst="roundRect">
             <a:avLst>
-              <a:gd name="adj" fmla="val 8259"/>
+              <a:gd name="adj" fmla="val 7186"/>
             </a:avLst>
           </a:prstGeom>
           <a:solidFill>
@@ -3653,8 +3653,8 @@
         </p:nvSpPr>
         <p:spPr>
           <a:xfrm>
-            <a:off x="7799832" y="2864815"/>
-            <a:ext cx="3145536" cy="256032"/>
+            <a:off x="7708392" y="2852928"/>
+            <a:ext cx="3282696" cy="228600"/>
           </a:xfrm>
           <a:prstGeom prst="rect">
             <a:avLst/>
@@ -3670,7 +3670,7 @@
               <a:buNone/>
             </a:pPr>
             <a:r>
-              <a:rPr lang="en-US" sz="1300" b="1" dirty="0">
+              <a:rPr lang="en-US" sz="1220" b="1" dirty="0">
                 <a:solidFill>
                   <a:srgbClr val="0068B7"/>
                 </a:solidFill>
@@ -3680,7 +3680,7 @@
               </a:rPr>
               <a:t>Concept checkpoints</a:t>
             </a:r>
-            <a:endParaRPr lang="en-US" sz="1300" dirty="0"/>
+            <a:endParaRPr lang="en-US" sz="1220" dirty="0"/>
           </a:p>
         </p:txBody>
       </p:sp>
@@ -3692,8 +3692,8 @@
         </p:nvSpPr>
         <p:spPr>
           <a:xfrm>
-            <a:off x="7818120" y="3230575"/>
-            <a:ext cx="3090672" cy="670255"/>
+            <a:off x="7726680" y="3182112"/>
+            <a:ext cx="3227832" cy="960120"/>
           </a:xfrm>
           <a:prstGeom prst="rect">
             <a:avLst/>
@@ -3711,7 +3711,7 @@
               <a:buNone/>
             </a:pPr>
             <a:r>
-              <a:rPr lang="en-US" sz="1220" dirty="0">
+              <a:rPr lang="en-US" sz="1140" dirty="0">
                 <a:solidFill>
                   <a:srgbClr val="17364A"/>
                 </a:solidFill>
@@ -3719,16 +3719,16 @@
                 <a:ea typeface="Aptos" pitchFamily="34" charset="-122"/>
                 <a:cs typeface="Aptos" pitchFamily="34" charset="-120"/>
               </a:rPr>
-              <a:t>A public health agency is preparing to use AI in a workflow.</a:t>
-            </a:r>
-            <a:endParaRPr lang="en-US" sz="1220" dirty="0"/>
-          </a:p>
-          <a:p>
-            <a:pPr indent="0" marL="0">
-              <a:buNone/>
-            </a:pPr>
-            <a:r>
-              <a:rPr lang="en-US" sz="1220" dirty="0">
+              <a:t>A public health agency is preparing to use AI in a.</a:t>
+            </a:r>
+            <a:endParaRPr lang="en-US" sz="1140" dirty="0"/>
+          </a:p>
+          <a:p>
+            <a:pPr indent="0" marL="0">
+              <a:buNone/>
+            </a:pPr>
+            <a:r>
+              <a:rPr lang="en-US" sz="1140" dirty="0">
                 <a:solidFill>
                   <a:srgbClr val="17364A"/>
                 </a:solidFill>
@@ -3736,16 +3736,16 @@
                 <a:ea typeface="Aptos" pitchFamily="34" charset="-122"/>
                 <a:cs typeface="Aptos" pitchFamily="34" charset="-120"/>
               </a:rPr>
-              <a:t>The project team initially treats the tool as a helpful efficiency.</a:t>
-            </a:r>
-            <a:endParaRPr lang="en-US" sz="1220" dirty="0"/>
-          </a:p>
-          <a:p>
-            <a:pPr indent="0" marL="0">
-              <a:buNone/>
-            </a:pPr>
-            <a:r>
-              <a:rPr lang="en-US" sz="1220" dirty="0">
+              <a:t>The project team initially treats the tool as a.</a:t>
+            </a:r>
+            <a:endParaRPr lang="en-US" sz="1140" dirty="0"/>
+          </a:p>
+          <a:p>
+            <a:pPr indent="0" marL="0">
+              <a:buNone/>
+            </a:pPr>
+            <a:r>
+              <a:rPr lang="en-US" sz="1140" dirty="0">
                 <a:solidFill>
                   <a:srgbClr val="17364A"/>
                 </a:solidFill>
@@ -3753,9 +3753,9 @@
                 <a:ea typeface="Aptos" pitchFamily="34" charset="-122"/>
                 <a:cs typeface="Aptos" pitchFamily="34" charset="-120"/>
               </a:rPr>
-              <a:t>The agency responds by creating a clear artifact that defines.</a:t>
-            </a:r>
-            <a:endParaRPr lang="en-US" sz="1220" dirty="0"/>
+              <a:t>The agency responds by creating a clear artifact.</a:t>
+            </a:r>
+            <a:endParaRPr lang="en-US" sz="1140" dirty="0"/>
           </a:p>
         </p:txBody>
       </p:sp>
@@ -3767,12 +3767,12 @@
         </p:nvSpPr>
         <p:spPr>
           <a:xfrm>
-            <a:off x="7635240" y="4184294"/>
-            <a:ext cx="3474720" cy="1466698"/>
+            <a:off x="7543800" y="4389120"/>
+            <a:ext cx="3611880" cy="1261872"/>
           </a:xfrm>
           <a:prstGeom prst="roundRect">
             <a:avLst>
-              <a:gd name="adj" fmla="val 7481"/>
+              <a:gd name="adj" fmla="val 8696"/>
             </a:avLst>
           </a:prstGeom>
           <a:solidFill>
@@ -3794,8 +3794,8 @@
         </p:nvSpPr>
         <p:spPr>
           <a:xfrm>
-            <a:off x="7799832" y="4330598"/>
-            <a:ext cx="3145536" cy="256032"/>
+            <a:off x="7708392" y="4517136"/>
+            <a:ext cx="3282696" cy="228600"/>
           </a:xfrm>
           <a:prstGeom prst="rect">
             <a:avLst/>
@@ -3811,7 +3811,7 @@
               <a:buNone/>
             </a:pPr>
             <a:r>
-              <a:rPr lang="en-US" sz="1300" b="1" dirty="0">
+              <a:rPr lang="en-US" sz="1220" b="1" dirty="0">
                 <a:solidFill>
                   <a:srgbClr val="0068B7"/>
                 </a:solidFill>
@@ -3821,7 +3821,7 @@
               </a:rPr>
               <a:t>Next action</a:t>
             </a:r>
-            <a:endParaRPr lang="en-US" sz="1300" dirty="0"/>
+            <a:endParaRPr lang="en-US" sz="1220" dirty="0"/>
           </a:p>
         </p:txBody>
       </p:sp>
@@ -3833,8 +3833,8 @@
         </p:nvSpPr>
         <p:spPr>
           <a:xfrm>
-            <a:off x="7799832" y="4659782"/>
-            <a:ext cx="3145536" cy="899770"/>
+            <a:off x="7708392" y="4828032"/>
+            <a:ext cx="3282696" cy="749808"/>
           </a:xfrm>
           <a:prstGeom prst="rect">
             <a:avLst/>
@@ -3852,7 +3852,7 @@
               <a:buNone/>
             </a:pPr>
             <a:r>
-              <a:rPr lang="en-US" sz="1320" dirty="0">
+              <a:rPr lang="en-US" sz="1220" dirty="0">
                 <a:solidFill>
                   <a:srgbClr val="17364A"/>
                 </a:solidFill>
@@ -3860,9 +3860,9 @@
                 <a:ea typeface="Aptos" pitchFamily="34" charset="-122"/>
                 <a:cs typeface="Aptos" pitchFamily="34" charset="-120"/>
               </a:rPr>
-              <a:t>Use the concept to clarify workflow changes, dependencies, staffing, procurement requirements, training needs, and implementation checkpoints.</a:t>
-            </a:r>
-            <a:endParaRPr lang="en-US" sz="1320" dirty="0"/>
+              <a:t>Use the concept to clarify workflow changes, dependencies, staffing, procurement.</a:t>
+            </a:r>
+            <a:endParaRPr lang="en-US" sz="1220" dirty="0"/>
           </a:p>
         </p:txBody>
       </p:sp>
@@ -4153,8 +4153,8 @@
         </p:nvSpPr>
         <p:spPr>
           <a:xfrm>
-            <a:off x="868680" y="1508760"/>
-            <a:ext cx="6309360" cy="4160520"/>
+            <a:off x="822960" y="1463040"/>
+            <a:ext cx="6565392" cy="4343400"/>
           </a:xfrm>
           <a:prstGeom prst="rect">
             <a:avLst/>
@@ -4172,7 +4172,7 @@
               <a:buNone/>
             </a:pPr>
             <a:r>
-              <a:rPr lang="en-US" sz="2100" dirty="0">
+              <a:rPr lang="en-US" sz="1920" dirty="0">
                 <a:solidFill>
                   <a:srgbClr val="003A63"/>
                 </a:solidFill>
@@ -4182,14 +4182,14 @@
               </a:rPr>
               <a:t>• The first step in this topic is to define the decision or workflow clearly.</a:t>
             </a:r>
-            <a:endParaRPr lang="en-US" sz="2100" dirty="0"/>
-          </a:p>
-          <a:p>
-            <a:pPr indent="0" marL="0">
-              <a:buNone/>
-            </a:pPr>
-            <a:r>
-              <a:rPr lang="en-US" sz="2100" dirty="0">
+            <a:endParaRPr lang="en-US" sz="1920" dirty="0"/>
+          </a:p>
+          <a:p>
+            <a:pPr indent="0" marL="0">
+              <a:buNone/>
+            </a:pPr>
+            <a:r>
+              <a:rPr lang="en-US" sz="1920" dirty="0">
                 <a:solidFill>
                   <a:srgbClr val="003A63"/>
                 </a:solidFill>
@@ -4197,16 +4197,16 @@
                 <a:ea typeface="Aptos" pitchFamily="34" charset="-122"/>
                 <a:cs typeface="Aptos" pitchFamily="34" charset="-120"/>
               </a:rPr>
-              <a:t>• Staff should identify who is affected, what data are used, what AI output is produced, who.</a:t>
-            </a:r>
-            <a:endParaRPr lang="en-US" sz="2100" dirty="0"/>
-          </a:p>
-          <a:p>
-            <a:pPr indent="0" marL="0">
-              <a:buNone/>
-            </a:pPr>
-            <a:r>
-              <a:rPr lang="en-US" sz="2100" dirty="0">
+              <a:t>• Staff should identify who is affected, what data are used, what AI output is.</a:t>
+            </a:r>
+            <a:endParaRPr lang="en-US" sz="1920" dirty="0"/>
+          </a:p>
+          <a:p>
+            <a:pPr indent="0" marL="0">
+              <a:buNone/>
+            </a:pPr>
+            <a:r>
+              <a:rPr lang="en-US" sz="1920" dirty="0">
                 <a:solidFill>
                   <a:srgbClr val="003A63"/>
                 </a:solidFill>
@@ -4214,9 +4214,9 @@
                 <a:ea typeface="Aptos" pitchFamily="34" charset="-122"/>
                 <a:cs typeface="Aptos" pitchFamily="34" charset="-120"/>
               </a:rPr>
-              <a:t>• This prevents the module from becoming abstract and anchors the work in public health practice.</a:t>
-            </a:r>
-            <a:endParaRPr lang="en-US" sz="2100" dirty="0"/>
+              <a:t>• This prevents the module from becoming abstract and anchors the work in.</a:t>
+            </a:r>
+            <a:endParaRPr lang="en-US" sz="1920" dirty="0"/>
           </a:p>
         </p:txBody>
       </p:sp>
@@ -4228,12 +4228,12 @@
         </p:nvSpPr>
         <p:spPr>
           <a:xfrm>
-            <a:off x="7635240" y="1325880"/>
-            <a:ext cx="3474720" cy="1207008"/>
+            <a:off x="7543800" y="1325880"/>
+            <a:ext cx="3611880" cy="1261872"/>
           </a:xfrm>
           <a:prstGeom prst="roundRect">
             <a:avLst>
-              <a:gd name="adj" fmla="val 9091"/>
+              <a:gd name="adj" fmla="val 8696"/>
             </a:avLst>
           </a:prstGeom>
           <a:solidFill>
@@ -4255,8 +4255,8 @@
         </p:nvSpPr>
         <p:spPr>
           <a:xfrm>
-            <a:off x="7799832" y="1472184"/>
-            <a:ext cx="3145536" cy="256032"/>
+            <a:off x="7708392" y="1453896"/>
+            <a:ext cx="3282696" cy="228600"/>
           </a:xfrm>
           <a:prstGeom prst="rect">
             <a:avLst/>
@@ -4272,7 +4272,7 @@
               <a:buNone/>
             </a:pPr>
             <a:r>
-              <a:rPr lang="en-US" sz="1300" b="1" dirty="0">
+              <a:rPr lang="en-US" sz="1220" b="1" dirty="0">
                 <a:solidFill>
                   <a:srgbClr val="0068B7"/>
                 </a:solidFill>
@@ -4282,7 +4282,7 @@
               </a:rPr>
               <a:t>Implementation cue</a:t>
             </a:r>
-            <a:endParaRPr lang="en-US" sz="1300" dirty="0"/>
+            <a:endParaRPr lang="en-US" sz="1220" dirty="0"/>
           </a:p>
         </p:txBody>
       </p:sp>
@@ -4294,8 +4294,8 @@
         </p:nvSpPr>
         <p:spPr>
           <a:xfrm>
-            <a:off x="7799832" y="1801368"/>
-            <a:ext cx="3145536" cy="640080"/>
+            <a:off x="7708392" y="1764792"/>
+            <a:ext cx="3282696" cy="749808"/>
           </a:xfrm>
           <a:prstGeom prst="rect">
             <a:avLst/>
@@ -4313,7 +4313,7 @@
               <a:buNone/>
             </a:pPr>
             <a:r>
-              <a:rPr lang="en-US" sz="1320" dirty="0">
+              <a:rPr lang="en-US" sz="1220" dirty="0">
                 <a:solidFill>
                   <a:srgbClr val="17364A"/>
                 </a:solidFill>
@@ -4323,7 +4323,7 @@
               </a:rPr>
               <a:t>The first step in this topic is to define the decision or workflow clearly.</a:t>
             </a:r>
-            <a:endParaRPr lang="en-US" sz="1320" dirty="0"/>
+            <a:endParaRPr lang="en-US" sz="1220" dirty="0"/>
           </a:p>
         </p:txBody>
       </p:sp>
@@ -4335,12 +4335,12 @@
         </p:nvSpPr>
         <p:spPr>
           <a:xfrm>
-            <a:off x="7635240" y="2670048"/>
-            <a:ext cx="3474720" cy="1377086"/>
+            <a:off x="7543800" y="2724912"/>
+            <a:ext cx="3611880" cy="1527048"/>
           </a:xfrm>
           <a:prstGeom prst="roundRect">
             <a:avLst>
-              <a:gd name="adj" fmla="val 7968"/>
+              <a:gd name="adj" fmla="val 7186"/>
             </a:avLst>
           </a:prstGeom>
           <a:solidFill>
@@ -4362,8 +4362,8 @@
         </p:nvSpPr>
         <p:spPr>
           <a:xfrm>
-            <a:off x="7799832" y="2816352"/>
-            <a:ext cx="3145536" cy="256032"/>
+            <a:off x="7708392" y="2852928"/>
+            <a:ext cx="3282696" cy="228600"/>
           </a:xfrm>
           <a:prstGeom prst="rect">
             <a:avLst/>
@@ -4379,7 +4379,7 @@
               <a:buNone/>
             </a:pPr>
             <a:r>
-              <a:rPr lang="en-US" sz="1300" b="1" dirty="0">
+              <a:rPr lang="en-US" sz="1220" b="1" dirty="0">
                 <a:solidFill>
                   <a:srgbClr val="0068B7"/>
                 </a:solidFill>
@@ -4389,7 +4389,7 @@
               </a:rPr>
               <a:t>Concept checkpoints</a:t>
             </a:r>
-            <a:endParaRPr lang="en-US" sz="1300" dirty="0"/>
+            <a:endParaRPr lang="en-US" sz="1220" dirty="0"/>
           </a:p>
         </p:txBody>
       </p:sp>
@@ -4401,8 +4401,8 @@
         </p:nvSpPr>
         <p:spPr>
           <a:xfrm>
-            <a:off x="7818120" y="3182112"/>
-            <a:ext cx="3090672" cy="718718"/>
+            <a:off x="7726680" y="3182112"/>
+            <a:ext cx="3227832" cy="960120"/>
           </a:xfrm>
           <a:prstGeom prst="rect">
             <a:avLst/>
@@ -4420,7 +4420,7 @@
               <a:buNone/>
             </a:pPr>
             <a:r>
-              <a:rPr lang="en-US" sz="1220" dirty="0">
+              <a:rPr lang="en-US" sz="1140" dirty="0">
                 <a:solidFill>
                   <a:srgbClr val="17364A"/>
                 </a:solidFill>
@@ -4428,16 +4428,16 @@
                 <a:ea typeface="Aptos" pitchFamily="34" charset="-122"/>
                 <a:cs typeface="Aptos" pitchFamily="34" charset="-120"/>
               </a:rPr>
-              <a:t>Staff should identify who is affected, what data are used, what AI.</a:t>
-            </a:r>
-            <a:endParaRPr lang="en-US" sz="1220" dirty="0"/>
-          </a:p>
-          <a:p>
-            <a:pPr indent="0" marL="0">
-              <a:buNone/>
-            </a:pPr>
-            <a:r>
-              <a:rPr lang="en-US" sz="1220" dirty="0">
+              <a:t>Staff should identify who is affected, what data.</a:t>
+            </a:r>
+            <a:endParaRPr lang="en-US" sz="1140" dirty="0"/>
+          </a:p>
+          <a:p>
+            <a:pPr indent="0" marL="0">
+              <a:buNone/>
+            </a:pPr>
+            <a:r>
+              <a:rPr lang="en-US" sz="1140" dirty="0">
                 <a:solidFill>
                   <a:srgbClr val="17364A"/>
                 </a:solidFill>
@@ -4447,14 +4447,14 @@
               </a:rPr>
               <a:t>The second step is to assign responsibilities.</a:t>
             </a:r>
-            <a:endParaRPr lang="en-US" sz="1220" dirty="0"/>
-          </a:p>
-          <a:p>
-            <a:pPr indent="0" marL="0">
-              <a:buNone/>
-            </a:pPr>
-            <a:r>
-              <a:rPr lang="en-US" sz="1220" dirty="0">
+            <a:endParaRPr lang="en-US" sz="1140" dirty="0"/>
+          </a:p>
+          <a:p>
+            <a:pPr indent="0" marL="0">
+              <a:buNone/>
+            </a:pPr>
+            <a:r>
+              <a:rPr lang="en-US" sz="1140" dirty="0">
                 <a:solidFill>
                   <a:srgbClr val="17364A"/>
                 </a:solidFill>
@@ -4462,9 +4462,9 @@
                 <a:ea typeface="Aptos" pitchFamily="34" charset="-122"/>
                 <a:cs typeface="Aptos" pitchFamily="34" charset="-120"/>
               </a:rPr>
-              <a:t>AI-supported workflows often cross program, IT, legal, privacy,.</a:t>
-            </a:r>
-            <a:endParaRPr lang="en-US" sz="1220" dirty="0"/>
+              <a:t>AI-supported workflows often cross program, IT,.</a:t>
+            </a:r>
+            <a:endParaRPr lang="en-US" sz="1140" dirty="0"/>
           </a:p>
         </p:txBody>
       </p:sp>
@@ -4476,12 +4476,12 @@
         </p:nvSpPr>
         <p:spPr>
           <a:xfrm>
-            <a:off x="7635240" y="4184294"/>
-            <a:ext cx="3474720" cy="1466698"/>
+            <a:off x="7543800" y="4389120"/>
+            <a:ext cx="3611880" cy="1261872"/>
           </a:xfrm>
           <a:prstGeom prst="roundRect">
             <a:avLst>
-              <a:gd name="adj" fmla="val 7481"/>
+              <a:gd name="adj" fmla="val 8696"/>
             </a:avLst>
           </a:prstGeom>
           <a:solidFill>
@@ -4503,8 +4503,8 @@
         </p:nvSpPr>
         <p:spPr>
           <a:xfrm>
-            <a:off x="7799832" y="4330598"/>
-            <a:ext cx="3145536" cy="256032"/>
+            <a:off x="7708392" y="4517136"/>
+            <a:ext cx="3282696" cy="228600"/>
           </a:xfrm>
           <a:prstGeom prst="rect">
             <a:avLst/>
@@ -4520,7 +4520,7 @@
               <a:buNone/>
             </a:pPr>
             <a:r>
-              <a:rPr lang="en-US" sz="1300" b="1" dirty="0">
+              <a:rPr lang="en-US" sz="1220" b="1" dirty="0">
                 <a:solidFill>
                   <a:srgbClr val="0068B7"/>
                 </a:solidFill>
@@ -4530,7 +4530,7 @@
               </a:rPr>
               <a:t>Next action</a:t>
             </a:r>
-            <a:endParaRPr lang="en-US" sz="1300" dirty="0"/>
+            <a:endParaRPr lang="en-US" sz="1220" dirty="0"/>
           </a:p>
         </p:txBody>
       </p:sp>
@@ -4542,8 +4542,8 @@
         </p:nvSpPr>
         <p:spPr>
           <a:xfrm>
-            <a:off x="7799832" y="4659782"/>
-            <a:ext cx="3145536" cy="899770"/>
+            <a:off x="7708392" y="4828032"/>
+            <a:ext cx="3282696" cy="749808"/>
           </a:xfrm>
           <a:prstGeom prst="rect">
             <a:avLst/>
@@ -4561,7 +4561,7 @@
               <a:buNone/>
             </a:pPr>
             <a:r>
-              <a:rPr lang="en-US" sz="1320" dirty="0">
+              <a:rPr lang="en-US" sz="1220" dirty="0">
                 <a:solidFill>
                   <a:srgbClr val="17364A"/>
                 </a:solidFill>
@@ -4569,9 +4569,9 @@
                 <a:ea typeface="Aptos" pitchFamily="34" charset="-122"/>
                 <a:cs typeface="Aptos" pitchFamily="34" charset="-120"/>
               </a:rPr>
-              <a:t>Use the concept to clarify workflow changes, dependencies, staffing, procurement requirements, training needs, and implementation checkpoints.</a:t>
-            </a:r>
-            <a:endParaRPr lang="en-US" sz="1320" dirty="0"/>
+              <a:t>Use the concept to clarify workflow changes, dependencies, staffing, procurement.</a:t>
+            </a:r>
+            <a:endParaRPr lang="en-US" sz="1220" dirty="0"/>
           </a:p>
         </p:txBody>
       </p:sp>
@@ -4862,8 +4862,8 @@
         </p:nvSpPr>
         <p:spPr>
           <a:xfrm>
-            <a:off x="868680" y="1508760"/>
-            <a:ext cx="6309360" cy="4160520"/>
+            <a:off x="822960" y="1463040"/>
+            <a:ext cx="6565392" cy="4343400"/>
           </a:xfrm>
           <a:prstGeom prst="rect">
             <a:avLst/>
@@ -4881,7 +4881,7 @@
               <a:buNone/>
             </a:pPr>
             <a:r>
-              <a:rPr lang="en-US" sz="2100" dirty="0">
+              <a:rPr lang="en-US" sz="1920" dirty="0">
                 <a:solidFill>
                   <a:srgbClr val="003A63"/>
                 </a:solidFill>
@@ -4891,14 +4891,14 @@
               </a:rPr>
               <a:t>• A common failure mode is treating the topic as a one-time checklist.</a:t>
             </a:r>
-            <a:endParaRPr lang="en-US" sz="2100" dirty="0"/>
-          </a:p>
-          <a:p>
-            <a:pPr indent="0" marL="0">
-              <a:buNone/>
-            </a:pPr>
-            <a:r>
-              <a:rPr lang="en-US" sz="2100" dirty="0">
+            <a:endParaRPr lang="en-US" sz="1920" dirty="0"/>
+          </a:p>
+          <a:p>
+            <a:pPr indent="0" marL="0">
+              <a:buNone/>
+            </a:pPr>
+            <a:r>
+              <a:rPr lang="en-US" sz="1920" dirty="0">
                 <a:solidFill>
                   <a:srgbClr val="003A63"/>
                 </a:solidFill>
@@ -4906,16 +4906,16 @@
                 <a:ea typeface="Aptos" pitchFamily="34" charset="-122"/>
                 <a:cs typeface="Aptos" pitchFamily="34" charset="-120"/>
               </a:rPr>
-              <a:t>• AI risks can change when data sources, models, vendors, policies, users, or public.</a:t>
-            </a:r>
-            <a:endParaRPr lang="en-US" sz="2100" dirty="0"/>
-          </a:p>
-          <a:p>
-            <a:pPr indent="0" marL="0">
-              <a:buNone/>
-            </a:pPr>
-            <a:r>
-              <a:rPr lang="en-US" sz="2100" dirty="0">
+              <a:t>• AI risks can change when data sources, models, vendors, policies, users, or.</a:t>
+            </a:r>
+            <a:endParaRPr lang="en-US" sz="1920" dirty="0"/>
+          </a:p>
+          <a:p>
+            <a:pPr indent="0" marL="0">
+              <a:buNone/>
+            </a:pPr>
+            <a:r>
+              <a:rPr lang="en-US" sz="1920" dirty="0">
                 <a:solidFill>
                   <a:srgbClr val="003A63"/>
                 </a:solidFill>
@@ -4925,7 +4925,7 @@
               </a:rPr>
               <a:t>• A guardrail is to define review intervals and change triggers.</a:t>
             </a:r>
-            <a:endParaRPr lang="en-US" sz="2100" dirty="0"/>
+            <a:endParaRPr lang="en-US" sz="1920" dirty="0"/>
           </a:p>
         </p:txBody>
       </p:sp>
@@ -4937,12 +4937,12 @@
         </p:nvSpPr>
         <p:spPr>
           <a:xfrm>
-            <a:off x="7635240" y="1325880"/>
-            <a:ext cx="3474720" cy="1207008"/>
+            <a:off x="7543800" y="1325880"/>
+            <a:ext cx="3611880" cy="1261872"/>
           </a:xfrm>
           <a:prstGeom prst="roundRect">
             <a:avLst>
-              <a:gd name="adj" fmla="val 9091"/>
+              <a:gd name="adj" fmla="val 8696"/>
             </a:avLst>
           </a:prstGeom>
           <a:solidFill>
@@ -4964,8 +4964,8 @@
         </p:nvSpPr>
         <p:spPr>
           <a:xfrm>
-            <a:off x="7799832" y="1472184"/>
-            <a:ext cx="3145536" cy="256032"/>
+            <a:off x="7708392" y="1453896"/>
+            <a:ext cx="3282696" cy="228600"/>
           </a:xfrm>
           <a:prstGeom prst="rect">
             <a:avLst/>
@@ -4981,7 +4981,7 @@
               <a:buNone/>
             </a:pPr>
             <a:r>
-              <a:rPr lang="en-US" sz="1300" b="1" dirty="0">
+              <a:rPr lang="en-US" sz="1220" b="1" dirty="0">
                 <a:solidFill>
                   <a:srgbClr val="0068B7"/>
                 </a:solidFill>
@@ -4991,7 +4991,7 @@
               </a:rPr>
               <a:t>Risk check</a:t>
             </a:r>
-            <a:endParaRPr lang="en-US" sz="1300" dirty="0"/>
+            <a:endParaRPr lang="en-US" sz="1220" dirty="0"/>
           </a:p>
         </p:txBody>
       </p:sp>
@@ -5003,8 +5003,8 @@
         </p:nvSpPr>
         <p:spPr>
           <a:xfrm>
-            <a:off x="7799832" y="1801368"/>
-            <a:ext cx="3145536" cy="640080"/>
+            <a:off x="7708392" y="1764792"/>
+            <a:ext cx="3282696" cy="749808"/>
           </a:xfrm>
           <a:prstGeom prst="rect">
             <a:avLst/>
@@ -5022,7 +5022,7 @@
               <a:buNone/>
             </a:pPr>
             <a:r>
-              <a:rPr lang="en-US" sz="1320" dirty="0">
+              <a:rPr lang="en-US" sz="1220" dirty="0">
                 <a:solidFill>
                   <a:srgbClr val="17364A"/>
                 </a:solidFill>
@@ -5032,7 +5032,7 @@
               </a:rPr>
               <a:t>A common failure mode is treating the topic as a one-time checklist.</a:t>
             </a:r>
-            <a:endParaRPr lang="en-US" sz="1320" dirty="0"/>
+            <a:endParaRPr lang="en-US" sz="1220" dirty="0"/>
           </a:p>
         </p:txBody>
       </p:sp>
@@ -5044,12 +5044,12 @@
         </p:nvSpPr>
         <p:spPr>
           <a:xfrm>
-            <a:off x="7635240" y="2670048"/>
-            <a:ext cx="3474720" cy="1536192"/>
+            <a:off x="7543800" y="2724912"/>
+            <a:ext cx="3611880" cy="1527048"/>
           </a:xfrm>
           <a:prstGeom prst="roundRect">
             <a:avLst>
-              <a:gd name="adj" fmla="val 7143"/>
+              <a:gd name="adj" fmla="val 7186"/>
             </a:avLst>
           </a:prstGeom>
           <a:solidFill>
@@ -5071,8 +5071,8 @@
         </p:nvSpPr>
         <p:spPr>
           <a:xfrm>
-            <a:off x="7799832" y="2816352"/>
-            <a:ext cx="3145536" cy="256032"/>
+            <a:off x="7708392" y="2852928"/>
+            <a:ext cx="3282696" cy="228600"/>
           </a:xfrm>
           <a:prstGeom prst="rect">
             <a:avLst/>
@@ -5088,7 +5088,7 @@
               <a:buNone/>
             </a:pPr>
             <a:r>
-              <a:rPr lang="en-US" sz="1300" b="1" dirty="0">
+              <a:rPr lang="en-US" sz="1220" b="1" dirty="0">
                 <a:solidFill>
                   <a:srgbClr val="0068B7"/>
                 </a:solidFill>
@@ -5098,7 +5098,7 @@
               </a:rPr>
               <a:t>Concept checkpoints</a:t>
             </a:r>
-            <a:endParaRPr lang="en-US" sz="1300" dirty="0"/>
+            <a:endParaRPr lang="en-US" sz="1220" dirty="0"/>
           </a:p>
         </p:txBody>
       </p:sp>
@@ -5110,8 +5110,8 @@
         </p:nvSpPr>
         <p:spPr>
           <a:xfrm>
-            <a:off x="7818120" y="3182112"/>
-            <a:ext cx="3090672" cy="877824"/>
+            <a:off x="7726680" y="3182112"/>
+            <a:ext cx="3227832" cy="960120"/>
           </a:xfrm>
           <a:prstGeom prst="rect">
             <a:avLst/>
@@ -5129,7 +5129,7 @@
               <a:buNone/>
             </a:pPr>
             <a:r>
-              <a:rPr lang="en-US" sz="1220" dirty="0">
+              <a:rPr lang="en-US" sz="1140" dirty="0">
                 <a:solidFill>
                   <a:srgbClr val="17364A"/>
                 </a:solidFill>
@@ -5139,14 +5139,14 @@
               </a:rPr>
               <a:t>Another failure mode is unclear ownership.</a:t>
             </a:r>
-            <a:endParaRPr lang="en-US" sz="1220" dirty="0"/>
-          </a:p>
-          <a:p>
-            <a:pPr indent="0" marL="0">
-              <a:buNone/>
-            </a:pPr>
-            <a:r>
-              <a:rPr lang="en-US" sz="1220" dirty="0">
+            <a:endParaRPr lang="en-US" sz="1140" dirty="0"/>
+          </a:p>
+          <a:p>
+            <a:pPr indent="0" marL="0">
+              <a:buNone/>
+            </a:pPr>
+            <a:r>
+              <a:rPr lang="en-US" sz="1140" dirty="0">
                 <a:solidFill>
                   <a:srgbClr val="17364A"/>
                 </a:solidFill>
@@ -5154,16 +5154,16 @@
                 <a:ea typeface="Aptos" pitchFamily="34" charset="-122"/>
                 <a:cs typeface="Aptos" pitchFamily="34" charset="-120"/>
               </a:rPr>
-              <a:t>When everyone is responsible in general, no one may be responsible.</a:t>
-            </a:r>
-            <a:endParaRPr lang="en-US" sz="1220" dirty="0"/>
-          </a:p>
-          <a:p>
-            <a:pPr indent="0" marL="0">
-              <a:buNone/>
-            </a:pPr>
-            <a:r>
-              <a:rPr lang="en-US" sz="1220" dirty="0">
+              <a:t>When everyone is responsible in general, no one.</a:t>
+            </a:r>
+            <a:endParaRPr lang="en-US" sz="1140" dirty="0"/>
+          </a:p>
+          <a:p>
+            <a:pPr indent="0" marL="0">
+              <a:buNone/>
+            </a:pPr>
+            <a:r>
+              <a:rPr lang="en-US" sz="1140" dirty="0">
                 <a:solidFill>
                   <a:srgbClr val="17364A"/>
                 </a:solidFill>
@@ -5171,9 +5171,9 @@
                 <a:ea typeface="Aptos" pitchFamily="34" charset="-122"/>
                 <a:cs typeface="Aptos" pitchFamily="34" charset="-120"/>
               </a:rPr>
-              <a:t>A guardrail is to assign an accountability owner and name.</a:t>
-            </a:r>
-            <a:endParaRPr lang="en-US" sz="1220" dirty="0"/>
+              <a:t>A guardrail is to assign an accountability owner.</a:t>
+            </a:r>
+            <a:endParaRPr lang="en-US" sz="1140" dirty="0"/>
           </a:p>
         </p:txBody>
       </p:sp>
@@ -5185,12 +5185,12 @@
         </p:nvSpPr>
         <p:spPr>
           <a:xfrm>
-            <a:off x="7635240" y="4343400"/>
-            <a:ext cx="3474720" cy="1255471"/>
+            <a:off x="7543800" y="4389120"/>
+            <a:ext cx="3611880" cy="1261872"/>
           </a:xfrm>
           <a:prstGeom prst="roundRect">
             <a:avLst>
-              <a:gd name="adj" fmla="val 8740"/>
+              <a:gd name="adj" fmla="val 8696"/>
             </a:avLst>
           </a:prstGeom>
           <a:solidFill>
@@ -5212,8 +5212,8 @@
         </p:nvSpPr>
         <p:spPr>
           <a:xfrm>
-            <a:off x="7799832" y="4489704"/>
-            <a:ext cx="3145536" cy="256032"/>
+            <a:off x="7708392" y="4517136"/>
+            <a:ext cx="3282696" cy="228600"/>
           </a:xfrm>
           <a:prstGeom prst="rect">
             <a:avLst/>
@@ -5229,7 +5229,7 @@
               <a:buNone/>
             </a:pPr>
             <a:r>
-              <a:rPr lang="en-US" sz="1300" b="1" dirty="0">
+              <a:rPr lang="en-US" sz="1220" b="1" dirty="0">
                 <a:solidFill>
                   <a:srgbClr val="0068B7"/>
                 </a:solidFill>
@@ -5239,7 +5239,7 @@
               </a:rPr>
               <a:t>Safeguard to plan</a:t>
             </a:r>
-            <a:endParaRPr lang="en-US" sz="1300" dirty="0"/>
+            <a:endParaRPr lang="en-US" sz="1220" dirty="0"/>
           </a:p>
         </p:txBody>
       </p:sp>
@@ -5251,8 +5251,8 @@
         </p:nvSpPr>
         <p:spPr>
           <a:xfrm>
-            <a:off x="7799832" y="4818888"/>
-            <a:ext cx="3145536" cy="688543"/>
+            <a:off x="7708392" y="4828032"/>
+            <a:ext cx="3282696" cy="749808"/>
           </a:xfrm>
           <a:prstGeom prst="rect">
             <a:avLst/>
@@ -5270,7 +5270,7 @@
               <a:buNone/>
             </a:pPr>
             <a:r>
-              <a:rPr lang="en-US" sz="1320" dirty="0">
+              <a:rPr lang="en-US" sz="1220" dirty="0">
                 <a:solidFill>
                   <a:srgbClr val="17364A"/>
                 </a:solidFill>
@@ -5278,9 +5278,9 @@
                 <a:ea typeface="Aptos" pitchFamily="34" charset="-122"/>
                 <a:cs typeface="Aptos" pitchFamily="34" charset="-120"/>
               </a:rPr>
-              <a:t>Identify what could go wrong, who could be affected, what safeguards are needed, and what evidence should be reviewed before use.</a:t>
-            </a:r>
-            <a:endParaRPr lang="en-US" sz="1320" dirty="0"/>
+              <a:t>Identify what could go wrong, who could be affected, what safeguards are needed,.</a:t>
+            </a:r>
+            <a:endParaRPr lang="en-US" sz="1220" dirty="0"/>
           </a:p>
         </p:txBody>
       </p:sp>
@@ -5571,8 +5571,8 @@
         </p:nvSpPr>
         <p:spPr>
           <a:xfrm>
-            <a:off x="868680" y="1508760"/>
-            <a:ext cx="6309360" cy="4160520"/>
+            <a:off x="822960" y="1463040"/>
+            <a:ext cx="6565392" cy="4343400"/>
           </a:xfrm>
           <a:prstGeom prst="rect">
             <a:avLst/>
@@ -5590,7 +5590,7 @@
               <a:buNone/>
             </a:pPr>
             <a:r>
-              <a:rPr lang="en-US" sz="2100" dirty="0">
+              <a:rPr lang="en-US" sz="1920" dirty="0">
                 <a:solidFill>
                   <a:srgbClr val="003A63"/>
                 </a:solidFill>
@@ -5598,16 +5598,16 @@
                 <a:ea typeface="Aptos" pitchFamily="34" charset="-122"/>
                 <a:cs typeface="Aptos" pitchFamily="34" charset="-120"/>
               </a:rPr>
-              <a:t>• This topic applies across generative AI, predictive analytics, NLP, RAG, automation, and.</a:t>
-            </a:r>
-            <a:endParaRPr lang="en-US" sz="2100" dirty="0"/>
-          </a:p>
-          <a:p>
-            <a:pPr indent="0" marL="0">
-              <a:buNone/>
-            </a:pPr>
-            <a:r>
-              <a:rPr lang="en-US" sz="2100" dirty="0">
+              <a:t>• This topic applies across generative AI, predictive analytics, NLP, RAG,.</a:t>
+            </a:r>
+            <a:endParaRPr lang="en-US" sz="1920" dirty="0"/>
+          </a:p>
+          <a:p>
+            <a:pPr indent="0" marL="0">
+              <a:buNone/>
+            </a:pPr>
+            <a:r>
+              <a:rPr lang="en-US" sz="1920" dirty="0">
                 <a:solidFill>
                   <a:srgbClr val="003A63"/>
                 </a:solidFill>
@@ -5615,9 +5615,9 @@
                 <a:ea typeface="Aptos" pitchFamily="34" charset="-122"/>
                 <a:cs typeface="Aptos" pitchFamily="34" charset="-120"/>
               </a:rPr>
-              <a:t>• The more sensitive the data, the more consequential the output, or the more automated the.</a:t>
-            </a:r>
-            <a:endParaRPr lang="en-US" sz="2100" dirty="0"/>
+              <a:t>• The more sensitive the data, the more consequential the output, or the more.</a:t>
+            </a:r>
+            <a:endParaRPr lang="en-US" sz="1920" dirty="0"/>
           </a:p>
         </p:txBody>
       </p:sp>
@@ -5629,12 +5629,12 @@
         </p:nvSpPr>
         <p:spPr>
           <a:xfrm>
-            <a:off x="7635240" y="1325880"/>
-            <a:ext cx="3474720" cy="1255471"/>
+            <a:off x="7543800" y="1325880"/>
+            <a:ext cx="3611880" cy="1261872"/>
           </a:xfrm>
           <a:prstGeom prst="roundRect">
             <a:avLst>
-              <a:gd name="adj" fmla="val 8740"/>
+              <a:gd name="adj" fmla="val 8696"/>
             </a:avLst>
           </a:prstGeom>
           <a:solidFill>
@@ -5656,8 +5656,8 @@
         </p:nvSpPr>
         <p:spPr>
           <a:xfrm>
-            <a:off x="7799832" y="1472184"/>
-            <a:ext cx="3145536" cy="256032"/>
+            <a:off x="7708392" y="1453896"/>
+            <a:ext cx="3282696" cy="228600"/>
           </a:xfrm>
           <a:prstGeom prst="rect">
             <a:avLst/>
@@ -5673,7 +5673,7 @@
               <a:buNone/>
             </a:pPr>
             <a:r>
-              <a:rPr lang="en-US" sz="1300" b="1" dirty="0">
+              <a:rPr lang="en-US" sz="1220" b="1" dirty="0">
                 <a:solidFill>
                   <a:srgbClr val="0068B7"/>
                 </a:solidFill>
@@ -5683,7 +5683,7 @@
               </a:rPr>
               <a:t>Implementation cue</a:t>
             </a:r>
-            <a:endParaRPr lang="en-US" sz="1300" dirty="0"/>
+            <a:endParaRPr lang="en-US" sz="1220" dirty="0"/>
           </a:p>
         </p:txBody>
       </p:sp>
@@ -5695,8 +5695,8 @@
         </p:nvSpPr>
         <p:spPr>
           <a:xfrm>
-            <a:off x="7799832" y="1801368"/>
-            <a:ext cx="3145536" cy="688543"/>
+            <a:off x="7708392" y="1764792"/>
+            <a:ext cx="3282696" cy="749808"/>
           </a:xfrm>
           <a:prstGeom prst="rect">
             <a:avLst/>
@@ -5714,7 +5714,7 @@
               <a:buNone/>
             </a:pPr>
             <a:r>
-              <a:rPr lang="en-US" sz="1320" dirty="0">
+              <a:rPr lang="en-US" sz="1220" dirty="0">
                 <a:solidFill>
                   <a:srgbClr val="17364A"/>
                 </a:solidFill>
@@ -5722,9 +5722,9 @@
                 <a:ea typeface="Aptos" pitchFamily="34" charset="-122"/>
                 <a:cs typeface="Aptos" pitchFamily="34" charset="-120"/>
               </a:rPr>
-              <a:t>This topic applies across generative AI, predictive analytics, NLP, RAG, automation, and agentic.</a:t>
-            </a:r>
-            <a:endParaRPr lang="en-US" sz="1320" dirty="0"/>
+              <a:t>This topic applies across generative AI, predictive analytics, NLP, RAG,.</a:t>
+            </a:r>
+            <a:endParaRPr lang="en-US" sz="1220" dirty="0"/>
           </a:p>
         </p:txBody>
       </p:sp>
@@ -5736,12 +5736,12 @@
         </p:nvSpPr>
         <p:spPr>
           <a:xfrm>
-            <a:off x="7635240" y="2718511"/>
-            <a:ext cx="3474720" cy="1328623"/>
+            <a:off x="7543800" y="2724912"/>
+            <a:ext cx="3611880" cy="1527048"/>
           </a:xfrm>
           <a:prstGeom prst="roundRect">
             <a:avLst>
-              <a:gd name="adj" fmla="val 8259"/>
+              <a:gd name="adj" fmla="val 7186"/>
             </a:avLst>
           </a:prstGeom>
           <a:solidFill>
@@ -5763,8 +5763,8 @@
         </p:nvSpPr>
         <p:spPr>
           <a:xfrm>
-            <a:off x="7799832" y="2864815"/>
-            <a:ext cx="3145536" cy="256032"/>
+            <a:off x="7708392" y="2852928"/>
+            <a:ext cx="3282696" cy="228600"/>
           </a:xfrm>
           <a:prstGeom prst="rect">
             <a:avLst/>
@@ -5780,7 +5780,7 @@
               <a:buNone/>
             </a:pPr>
             <a:r>
-              <a:rPr lang="en-US" sz="1300" b="1" dirty="0">
+              <a:rPr lang="en-US" sz="1220" b="1" dirty="0">
                 <a:solidFill>
                   <a:srgbClr val="0068B7"/>
                 </a:solidFill>
@@ -5790,7 +5790,7 @@
               </a:rPr>
               <a:t>Concept checkpoints</a:t>
             </a:r>
-            <a:endParaRPr lang="en-US" sz="1300" dirty="0"/>
+            <a:endParaRPr lang="en-US" sz="1220" dirty="0"/>
           </a:p>
         </p:txBody>
       </p:sp>
@@ -5802,8 +5802,8 @@
         </p:nvSpPr>
         <p:spPr>
           <a:xfrm>
-            <a:off x="7818120" y="3230575"/>
-            <a:ext cx="3090672" cy="670255"/>
+            <a:off x="7726680" y="3182112"/>
+            <a:ext cx="3227832" cy="960120"/>
           </a:xfrm>
           <a:prstGeom prst="rect">
             <a:avLst/>
@@ -5821,7 +5821,7 @@
               <a:buNone/>
             </a:pPr>
             <a:r>
-              <a:rPr lang="en-US" sz="1220" dirty="0">
+              <a:rPr lang="en-US" sz="1140" dirty="0">
                 <a:solidFill>
                   <a:srgbClr val="17364A"/>
                 </a:solidFill>
@@ -5829,16 +5829,16 @@
                 <a:ea typeface="Aptos" pitchFamily="34" charset="-122"/>
                 <a:cs typeface="Aptos" pitchFamily="34" charset="-120"/>
               </a:rPr>
-              <a:t>This topic applies across generative AI, predictive analytics,.</a:t>
-            </a:r>
-            <a:endParaRPr lang="en-US" sz="1220" dirty="0"/>
-          </a:p>
-          <a:p>
-            <a:pPr indent="0" marL="0">
-              <a:buNone/>
-            </a:pPr>
-            <a:r>
-              <a:rPr lang="en-US" sz="1220" dirty="0">
+              <a:t>This topic applies across generative AI,.</a:t>
+            </a:r>
+            <a:endParaRPr lang="en-US" sz="1140" dirty="0"/>
+          </a:p>
+          <a:p>
+            <a:pPr indent="0" marL="0">
+              <a:buNone/>
+            </a:pPr>
+            <a:r>
+              <a:rPr lang="en-US" sz="1140" dirty="0">
                 <a:solidFill>
                   <a:srgbClr val="17364A"/>
                 </a:solidFill>
@@ -5846,9 +5846,9 @@
                 <a:ea typeface="Aptos" pitchFamily="34" charset="-122"/>
                 <a:cs typeface="Aptos" pitchFamily="34" charset="-120"/>
               </a:rPr>
-              <a:t>The more sensitive the data, the more consequential the output, or.</a:t>
-            </a:r>
-            <a:endParaRPr lang="en-US" sz="1220" dirty="0"/>
+              <a:t>The more sensitive the data, the more.</a:t>
+            </a:r>
+            <a:endParaRPr lang="en-US" sz="1140" dirty="0"/>
           </a:p>
         </p:txBody>
       </p:sp>
@@ -5860,12 +5860,12 @@
         </p:nvSpPr>
         <p:spPr>
           <a:xfrm>
-            <a:off x="7635240" y="4184294"/>
-            <a:ext cx="3474720" cy="1466698"/>
+            <a:off x="7543800" y="4389120"/>
+            <a:ext cx="3611880" cy="1261872"/>
           </a:xfrm>
           <a:prstGeom prst="roundRect">
             <a:avLst>
-              <a:gd name="adj" fmla="val 7481"/>
+              <a:gd name="adj" fmla="val 8696"/>
             </a:avLst>
           </a:prstGeom>
           <a:solidFill>
@@ -5887,8 +5887,8 @@
         </p:nvSpPr>
         <p:spPr>
           <a:xfrm>
-            <a:off x="7799832" y="4330598"/>
-            <a:ext cx="3145536" cy="256032"/>
+            <a:off x="7708392" y="4517136"/>
+            <a:ext cx="3282696" cy="228600"/>
           </a:xfrm>
           <a:prstGeom prst="rect">
             <a:avLst/>
@@ -5904,7 +5904,7 @@
               <a:buNone/>
             </a:pPr>
             <a:r>
-              <a:rPr lang="en-US" sz="1300" b="1" dirty="0">
+              <a:rPr lang="en-US" sz="1220" b="1" dirty="0">
                 <a:solidFill>
                   <a:srgbClr val="0068B7"/>
                 </a:solidFill>
@@ -5914,7 +5914,7 @@
               </a:rPr>
               <a:t>Next action</a:t>
             </a:r>
-            <a:endParaRPr lang="en-US" sz="1300" dirty="0"/>
+            <a:endParaRPr lang="en-US" sz="1220" dirty="0"/>
           </a:p>
         </p:txBody>
       </p:sp>
@@ -5926,8 +5926,8 @@
         </p:nvSpPr>
         <p:spPr>
           <a:xfrm>
-            <a:off x="7799832" y="4659782"/>
-            <a:ext cx="3145536" cy="899770"/>
+            <a:off x="7708392" y="4828032"/>
+            <a:ext cx="3282696" cy="749808"/>
           </a:xfrm>
           <a:prstGeom prst="rect">
             <a:avLst/>
@@ -5945,7 +5945,7 @@
               <a:buNone/>
             </a:pPr>
             <a:r>
-              <a:rPr lang="en-US" sz="1320" dirty="0">
+              <a:rPr lang="en-US" sz="1220" dirty="0">
                 <a:solidFill>
                   <a:srgbClr val="17364A"/>
                 </a:solidFill>
@@ -5953,9 +5953,9 @@
                 <a:ea typeface="Aptos" pitchFamily="34" charset="-122"/>
                 <a:cs typeface="Aptos" pitchFamily="34" charset="-120"/>
               </a:rPr>
-              <a:t>Use the concept to clarify workflow changes, dependencies, staffing, procurement requirements, training needs, and implementation checkpoints.</a:t>
-            </a:r>
-            <a:endParaRPr lang="en-US" sz="1320" dirty="0"/>
+              <a:t>Use the concept to clarify workflow changes, dependencies, staffing, procurement.</a:t>
+            </a:r>
+            <a:endParaRPr lang="en-US" sz="1220" dirty="0"/>
           </a:p>
         </p:txBody>
       </p:sp>
@@ -6246,8 +6246,8 @@
         </p:nvSpPr>
         <p:spPr>
           <a:xfrm>
-            <a:off x="868680" y="1508760"/>
-            <a:ext cx="6309360" cy="4160520"/>
+            <a:off x="822960" y="1463040"/>
+            <a:ext cx="6565392" cy="4343400"/>
           </a:xfrm>
           <a:prstGeom prst="rect">
             <a:avLst/>
@@ -6265,7 +6265,7 @@
               <a:buNone/>
             </a:pPr>
             <a:r>
-              <a:rPr lang="en-US" sz="2100" dirty="0">
+              <a:rPr lang="en-US" sz="1920" dirty="0">
                 <a:solidFill>
                   <a:srgbClr val="003A63"/>
                 </a:solidFill>
@@ -6275,14 +6275,14 @@
               </a:rPr>
               <a:t>• What public health decision or workflow does this topic affect?</a:t>
             </a:r>
-            <a:endParaRPr lang="en-US" sz="2100" dirty="0"/>
-          </a:p>
-          <a:p>
-            <a:pPr indent="0" marL="0">
-              <a:buNone/>
-            </a:pPr>
-            <a:r>
-              <a:rPr lang="en-US" sz="2100" dirty="0">
+            <a:endParaRPr lang="en-US" sz="1920" dirty="0"/>
+          </a:p>
+          <a:p>
+            <a:pPr indent="0" marL="0">
+              <a:buNone/>
+            </a:pPr>
+            <a:r>
+              <a:rPr lang="en-US" sz="1920" dirty="0">
                 <a:solidFill>
                   <a:srgbClr val="003A63"/>
                 </a:solidFill>
@@ -6292,14 +6292,14 @@
               </a:rPr>
               <a:t>• Who has authority to approve or pause the work?</a:t>
             </a:r>
-            <a:endParaRPr lang="en-US" sz="2100" dirty="0"/>
-          </a:p>
-          <a:p>
-            <a:pPr indent="0" marL="0">
-              <a:buNone/>
-            </a:pPr>
-            <a:r>
-              <a:rPr lang="en-US" sz="2100" dirty="0">
+            <a:endParaRPr lang="en-US" sz="1920" dirty="0"/>
+          </a:p>
+          <a:p>
+            <a:pPr indent="0" marL="0">
+              <a:buNone/>
+            </a:pPr>
+            <a:r>
+              <a:rPr lang="en-US" sz="1920" dirty="0">
                 <a:solidFill>
                   <a:srgbClr val="003A63"/>
                 </a:solidFill>
@@ -6309,7 +6309,7 @@
               </a:rPr>
               <a:t>• What evidence would show that the workflow is responsible and effective?</a:t>
             </a:r>
-            <a:endParaRPr lang="en-US" sz="2100" dirty="0"/>
+            <a:endParaRPr lang="en-US" sz="1920" dirty="0"/>
           </a:p>
         </p:txBody>
       </p:sp>
@@ -6321,12 +6321,12 @@
         </p:nvSpPr>
         <p:spPr>
           <a:xfrm>
-            <a:off x="7635240" y="1325880"/>
-            <a:ext cx="3474720" cy="1207008"/>
+            <a:off x="7543800" y="1325880"/>
+            <a:ext cx="3611880" cy="1261872"/>
           </a:xfrm>
           <a:prstGeom prst="roundRect">
             <a:avLst>
-              <a:gd name="adj" fmla="val 9091"/>
+              <a:gd name="adj" fmla="val 8696"/>
             </a:avLst>
           </a:prstGeom>
           <a:solidFill>
@@ -6348,8 +6348,8 @@
         </p:nvSpPr>
         <p:spPr>
           <a:xfrm>
-            <a:off x="7799832" y="1472184"/>
-            <a:ext cx="3145536" cy="256032"/>
+            <a:off x="7708392" y="1453896"/>
+            <a:ext cx="3282696" cy="228600"/>
           </a:xfrm>
           <a:prstGeom prst="rect">
             <a:avLst/>
@@ -6365,7 +6365,7 @@
               <a:buNone/>
             </a:pPr>
             <a:r>
-              <a:rPr lang="en-US" sz="1300" b="1" dirty="0">
+              <a:rPr lang="en-US" sz="1220" b="1" dirty="0">
                 <a:solidFill>
                   <a:srgbClr val="0068B7"/>
                 </a:solidFill>
@@ -6375,7 +6375,7 @@
               </a:rPr>
               <a:t>Implementation cue</a:t>
             </a:r>
-            <a:endParaRPr lang="en-US" sz="1300" dirty="0"/>
+            <a:endParaRPr lang="en-US" sz="1220" dirty="0"/>
           </a:p>
         </p:txBody>
       </p:sp>
@@ -6387,8 +6387,8 @@
         </p:nvSpPr>
         <p:spPr>
           <a:xfrm>
-            <a:off x="7799832" y="1801368"/>
-            <a:ext cx="3145536" cy="640080"/>
+            <a:off x="7708392" y="1764792"/>
+            <a:ext cx="3282696" cy="749808"/>
           </a:xfrm>
           <a:prstGeom prst="rect">
             <a:avLst/>
@@ -6406,7 +6406,7 @@
               <a:buNone/>
             </a:pPr>
             <a:r>
-              <a:rPr lang="en-US" sz="1320" dirty="0">
+              <a:rPr lang="en-US" sz="1220" dirty="0">
                 <a:solidFill>
                   <a:srgbClr val="17364A"/>
                 </a:solidFill>
@@ -6416,7 +6416,7 @@
               </a:rPr>
               <a:t>What public health decision or workflow does this topic affect?</a:t>
             </a:r>
-            <a:endParaRPr lang="en-US" sz="1320" dirty="0"/>
+            <a:endParaRPr lang="en-US" sz="1220" dirty="0"/>
           </a:p>
         </p:txBody>
       </p:sp>
@@ -6428,12 +6428,12 @@
         </p:nvSpPr>
         <p:spPr>
           <a:xfrm>
-            <a:off x="7635240" y="2670048"/>
-            <a:ext cx="3474720" cy="1377086"/>
+            <a:off x="7543800" y="2724912"/>
+            <a:ext cx="3611880" cy="1527048"/>
           </a:xfrm>
           <a:prstGeom prst="roundRect">
             <a:avLst>
-              <a:gd name="adj" fmla="val 7968"/>
+              <a:gd name="adj" fmla="val 7186"/>
             </a:avLst>
           </a:prstGeom>
           <a:solidFill>
@@ -6455,8 +6455,8 @@
         </p:nvSpPr>
         <p:spPr>
           <a:xfrm>
-            <a:off x="7799832" y="2816352"/>
-            <a:ext cx="3145536" cy="256032"/>
+            <a:off x="7708392" y="2852928"/>
+            <a:ext cx="3282696" cy="228600"/>
           </a:xfrm>
           <a:prstGeom prst="rect">
             <a:avLst/>
@@ -6472,7 +6472,7 @@
               <a:buNone/>
             </a:pPr>
             <a:r>
-              <a:rPr lang="en-US" sz="1300" b="1" dirty="0">
+              <a:rPr lang="en-US" sz="1220" b="1" dirty="0">
                 <a:solidFill>
                   <a:srgbClr val="0068B7"/>
                 </a:solidFill>
@@ -6482,7 +6482,7 @@
               </a:rPr>
               <a:t>Concept checkpoints</a:t>
             </a:r>
-            <a:endParaRPr lang="en-US" sz="1300" dirty="0"/>
+            <a:endParaRPr lang="en-US" sz="1220" dirty="0"/>
           </a:p>
         </p:txBody>
       </p:sp>
@@ -6494,8 +6494,8 @@
         </p:nvSpPr>
         <p:spPr>
           <a:xfrm>
-            <a:off x="7818120" y="3182112"/>
-            <a:ext cx="3090672" cy="718718"/>
+            <a:off x="7726680" y="3182112"/>
+            <a:ext cx="3227832" cy="960120"/>
           </a:xfrm>
           <a:prstGeom prst="rect">
             <a:avLst/>
@@ -6513,7 +6513,7 @@
               <a:buNone/>
             </a:pPr>
             <a:r>
-              <a:rPr lang="en-US" sz="1220" dirty="0">
+              <a:rPr lang="en-US" sz="1140" dirty="0">
                 <a:solidFill>
                   <a:srgbClr val="17364A"/>
                 </a:solidFill>
@@ -6521,16 +6521,16 @@
                 <a:ea typeface="Aptos" pitchFamily="34" charset="-122"/>
                 <a:cs typeface="Aptos" pitchFamily="34" charset="-120"/>
               </a:rPr>
-              <a:t>What public health decision or workflow does this topic affect?</a:t>
-            </a:r>
-            <a:endParaRPr lang="en-US" sz="1220" dirty="0"/>
-          </a:p>
-          <a:p>
-            <a:pPr indent="0" marL="0">
-              <a:buNone/>
-            </a:pPr>
-            <a:r>
-              <a:rPr lang="en-US" sz="1220" dirty="0">
+              <a:t>What public health decision or workflow does this.</a:t>
+            </a:r>
+            <a:endParaRPr lang="en-US" sz="1140" dirty="0"/>
+          </a:p>
+          <a:p>
+            <a:pPr indent="0" marL="0">
+              <a:buNone/>
+            </a:pPr>
+            <a:r>
+              <a:rPr lang="en-US" sz="1140" dirty="0">
                 <a:solidFill>
                   <a:srgbClr val="17364A"/>
                 </a:solidFill>
@@ -6540,14 +6540,14 @@
               </a:rPr>
               <a:t>Who has authority to approve or pause the work?</a:t>
             </a:r>
-            <a:endParaRPr lang="en-US" sz="1220" dirty="0"/>
-          </a:p>
-          <a:p>
-            <a:pPr indent="0" marL="0">
-              <a:buNone/>
-            </a:pPr>
-            <a:r>
-              <a:rPr lang="en-US" sz="1220" dirty="0">
+            <a:endParaRPr lang="en-US" sz="1140" dirty="0"/>
+          </a:p>
+          <a:p>
+            <a:pPr indent="0" marL="0">
+              <a:buNone/>
+            </a:pPr>
+            <a:r>
+              <a:rPr lang="en-US" sz="1140" dirty="0">
                 <a:solidFill>
                   <a:srgbClr val="17364A"/>
                 </a:solidFill>
@@ -6555,9 +6555,9 @@
                 <a:ea typeface="Aptos" pitchFamily="34" charset="-122"/>
                 <a:cs typeface="Aptos" pitchFamily="34" charset="-120"/>
               </a:rPr>
-              <a:t>What evidence would show that the workflow is responsible and.</a:t>
-            </a:r>
-            <a:endParaRPr lang="en-US" sz="1220" dirty="0"/>
+              <a:t>What evidence would show that the workflow is.</a:t>
+            </a:r>
+            <a:endParaRPr lang="en-US" sz="1140" dirty="0"/>
           </a:p>
         </p:txBody>
       </p:sp>
@@ -6569,12 +6569,12 @@
         </p:nvSpPr>
         <p:spPr>
           <a:xfrm>
-            <a:off x="7635240" y="4184294"/>
-            <a:ext cx="3474720" cy="1466698"/>
+            <a:off x="7543800" y="4389120"/>
+            <a:ext cx="3611880" cy="1261872"/>
           </a:xfrm>
           <a:prstGeom prst="roundRect">
             <a:avLst>
-              <a:gd name="adj" fmla="val 7481"/>
+              <a:gd name="adj" fmla="val 8696"/>
             </a:avLst>
           </a:prstGeom>
           <a:solidFill>
@@ -6596,8 +6596,8 @@
         </p:nvSpPr>
         <p:spPr>
           <a:xfrm>
-            <a:off x="7799832" y="4330598"/>
-            <a:ext cx="3145536" cy="256032"/>
+            <a:off x="7708392" y="4517136"/>
+            <a:ext cx="3282696" cy="228600"/>
           </a:xfrm>
           <a:prstGeom prst="rect">
             <a:avLst/>
@@ -6613,7 +6613,7 @@
               <a:buNone/>
             </a:pPr>
             <a:r>
-              <a:rPr lang="en-US" sz="1300" b="1" dirty="0">
+              <a:rPr lang="en-US" sz="1220" b="1" dirty="0">
                 <a:solidFill>
                   <a:srgbClr val="0068B7"/>
                 </a:solidFill>
@@ -6623,7 +6623,7 @@
               </a:rPr>
               <a:t>Next action</a:t>
             </a:r>
-            <a:endParaRPr lang="en-US" sz="1300" dirty="0"/>
+            <a:endParaRPr lang="en-US" sz="1220" dirty="0"/>
           </a:p>
         </p:txBody>
       </p:sp>
@@ -6635,8 +6635,8 @@
         </p:nvSpPr>
         <p:spPr>
           <a:xfrm>
-            <a:off x="7799832" y="4659782"/>
-            <a:ext cx="3145536" cy="899770"/>
+            <a:off x="7708392" y="4828032"/>
+            <a:ext cx="3282696" cy="749808"/>
           </a:xfrm>
           <a:prstGeom prst="rect">
             <a:avLst/>
@@ -6654,7 +6654,7 @@
               <a:buNone/>
             </a:pPr>
             <a:r>
-              <a:rPr lang="en-US" sz="1320" dirty="0">
+              <a:rPr lang="en-US" sz="1220" dirty="0">
                 <a:solidFill>
                   <a:srgbClr val="17364A"/>
                 </a:solidFill>
@@ -6662,9 +6662,9 @@
                 <a:ea typeface="Aptos" pitchFamily="34" charset="-122"/>
                 <a:cs typeface="Aptos" pitchFamily="34" charset="-120"/>
               </a:rPr>
-              <a:t>Use the concept to clarify workflow changes, dependencies, staffing, procurement requirements, training needs, and implementation checkpoints.</a:t>
-            </a:r>
-            <a:endParaRPr lang="en-US" sz="1320" dirty="0"/>
+              <a:t>Use the concept to clarify workflow changes, dependencies, staffing, procurement.</a:t>
+            </a:r>
+            <a:endParaRPr lang="en-US" sz="1220" dirty="0"/>
           </a:p>
         </p:txBody>
       </p:sp>
@@ -6955,8 +6955,8 @@
         </p:nvSpPr>
         <p:spPr>
           <a:xfrm>
-            <a:off x="868680" y="1508760"/>
-            <a:ext cx="6309360" cy="4160520"/>
+            <a:off x="822960" y="1463040"/>
+            <a:ext cx="6565392" cy="4343400"/>
           </a:xfrm>
           <a:prstGeom prst="rect">
             <a:avLst/>
@@ -6974,7 +6974,7 @@
               <a:buNone/>
             </a:pPr>
             <a:r>
-              <a:rPr lang="en-US" sz="2100" dirty="0">
+              <a:rPr lang="en-US" sz="1920" dirty="0">
                 <a:solidFill>
                   <a:srgbClr val="003A63"/>
                 </a:solidFill>
@@ -6984,14 +6984,14 @@
               </a:rPr>
               <a:t>• What equity, privacy, legal, security, or public trust risks require review?</a:t>
             </a:r>
-            <a:endParaRPr lang="en-US" sz="2100" dirty="0"/>
-          </a:p>
-          <a:p>
-            <a:pPr indent="0" marL="0">
-              <a:buNone/>
-            </a:pPr>
-            <a:r>
-              <a:rPr lang="en-US" sz="2100" dirty="0">
+            <a:endParaRPr lang="en-US" sz="1920" dirty="0"/>
+          </a:p>
+          <a:p>
+            <a:pPr indent="0" marL="0">
+              <a:buNone/>
+            </a:pPr>
+            <a:r>
+              <a:rPr lang="en-US" sz="1920" dirty="0">
                 <a:solidFill>
                   <a:srgbClr val="003A63"/>
                 </a:solidFill>
@@ -7001,7 +7001,7 @@
               </a:rPr>
               <a:t>• How will the agency know when the workflow needs to be revised?</a:t>
             </a:r>
-            <a:endParaRPr lang="en-US" sz="2100" dirty="0"/>
+            <a:endParaRPr lang="en-US" sz="1920" dirty="0"/>
           </a:p>
         </p:txBody>
       </p:sp>
@@ -7013,12 +7013,12 @@
         </p:nvSpPr>
         <p:spPr>
           <a:xfrm>
-            <a:off x="7635240" y="1325880"/>
-            <a:ext cx="3474720" cy="1207008"/>
+            <a:off x="7543800" y="1325880"/>
+            <a:ext cx="3611880" cy="1261872"/>
           </a:xfrm>
           <a:prstGeom prst="roundRect">
             <a:avLst>
-              <a:gd name="adj" fmla="val 9091"/>
+              <a:gd name="adj" fmla="val 8696"/>
             </a:avLst>
           </a:prstGeom>
           <a:solidFill>
@@ -7040,8 +7040,8 @@
         </p:nvSpPr>
         <p:spPr>
           <a:xfrm>
-            <a:off x="7799832" y="1472184"/>
-            <a:ext cx="3145536" cy="256032"/>
+            <a:off x="7708392" y="1453896"/>
+            <a:ext cx="3282696" cy="228600"/>
           </a:xfrm>
           <a:prstGeom prst="rect">
             <a:avLst/>
@@ -7057,7 +7057,7 @@
               <a:buNone/>
             </a:pPr>
             <a:r>
-              <a:rPr lang="en-US" sz="1300" b="1" dirty="0">
+              <a:rPr lang="en-US" sz="1220" b="1" dirty="0">
                 <a:solidFill>
                   <a:srgbClr val="0068B7"/>
                 </a:solidFill>
@@ -7067,7 +7067,7 @@
               </a:rPr>
               <a:t>Implementation cue</a:t>
             </a:r>
-            <a:endParaRPr lang="en-US" sz="1300" dirty="0"/>
+            <a:endParaRPr lang="en-US" sz="1220" dirty="0"/>
           </a:p>
         </p:txBody>
       </p:sp>
@@ -7079,8 +7079,8 @@
         </p:nvSpPr>
         <p:spPr>
           <a:xfrm>
-            <a:off x="7799832" y="1801368"/>
-            <a:ext cx="3145536" cy="640080"/>
+            <a:off x="7708392" y="1764792"/>
+            <a:ext cx="3282696" cy="749808"/>
           </a:xfrm>
           <a:prstGeom prst="rect">
             <a:avLst/>
@@ -7098,7 +7098,7 @@
               <a:buNone/>
             </a:pPr>
             <a:r>
-              <a:rPr lang="en-US" sz="1320" dirty="0">
+              <a:rPr lang="en-US" sz="1220" dirty="0">
                 <a:solidFill>
                   <a:srgbClr val="17364A"/>
                 </a:solidFill>
@@ -7108,7 +7108,7 @@
               </a:rPr>
               <a:t>What equity, privacy, legal, security, or public trust risks require review?</a:t>
             </a:r>
-            <a:endParaRPr lang="en-US" sz="1320" dirty="0"/>
+            <a:endParaRPr lang="en-US" sz="1220" dirty="0"/>
           </a:p>
         </p:txBody>
       </p:sp>
@@ -7120,12 +7120,12 @@
         </p:nvSpPr>
         <p:spPr>
           <a:xfrm>
-            <a:off x="7635240" y="2670048"/>
-            <a:ext cx="3474720" cy="1377086"/>
+            <a:off x="7543800" y="2724912"/>
+            <a:ext cx="3611880" cy="1527048"/>
           </a:xfrm>
           <a:prstGeom prst="roundRect">
             <a:avLst>
-              <a:gd name="adj" fmla="val 7968"/>
+              <a:gd name="adj" fmla="val 7186"/>
             </a:avLst>
           </a:prstGeom>
           <a:solidFill>
@@ -7147,8 +7147,8 @@
         </p:nvSpPr>
         <p:spPr>
           <a:xfrm>
-            <a:off x="7799832" y="2816352"/>
-            <a:ext cx="3145536" cy="256032"/>
+            <a:off x="7708392" y="2852928"/>
+            <a:ext cx="3282696" cy="228600"/>
           </a:xfrm>
           <a:prstGeom prst="rect">
             <a:avLst/>
@@ -7164,7 +7164,7 @@
               <a:buNone/>
             </a:pPr>
             <a:r>
-              <a:rPr lang="en-US" sz="1300" b="1" dirty="0">
+              <a:rPr lang="en-US" sz="1220" b="1" dirty="0">
                 <a:solidFill>
                   <a:srgbClr val="0068B7"/>
                 </a:solidFill>
@@ -7174,7 +7174,7 @@
               </a:rPr>
               <a:t>Concept checkpoints</a:t>
             </a:r>
-            <a:endParaRPr lang="en-US" sz="1300" dirty="0"/>
+            <a:endParaRPr lang="en-US" sz="1220" dirty="0"/>
           </a:p>
         </p:txBody>
       </p:sp>
@@ -7186,8 +7186,8 @@
         </p:nvSpPr>
         <p:spPr>
           <a:xfrm>
-            <a:off x="7818120" y="3182112"/>
-            <a:ext cx="3090672" cy="718718"/>
+            <a:off x="7726680" y="3182112"/>
+            <a:ext cx="3227832" cy="960120"/>
           </a:xfrm>
           <a:prstGeom prst="rect">
             <a:avLst/>
@@ -7205,7 +7205,7 @@
               <a:buNone/>
             </a:pPr>
             <a:r>
-              <a:rPr lang="en-US" sz="1220" dirty="0">
+              <a:rPr lang="en-US" sz="1140" dirty="0">
                 <a:solidFill>
                   <a:srgbClr val="17364A"/>
                 </a:solidFill>
@@ -7213,16 +7213,16 @@
                 <a:ea typeface="Aptos" pitchFamily="34" charset="-122"/>
                 <a:cs typeface="Aptos" pitchFamily="34" charset="-120"/>
               </a:rPr>
-              <a:t>What equity, privacy, legal, security, or public trust risks.</a:t>
-            </a:r>
-            <a:endParaRPr lang="en-US" sz="1220" dirty="0"/>
-          </a:p>
-          <a:p>
-            <a:pPr indent="0" marL="0">
-              <a:buNone/>
-            </a:pPr>
-            <a:r>
-              <a:rPr lang="en-US" sz="1220" dirty="0">
+              <a:t>What equity, privacy, legal, security, or public.</a:t>
+            </a:r>
+            <a:endParaRPr lang="en-US" sz="1140" dirty="0"/>
+          </a:p>
+          <a:p>
+            <a:pPr indent="0" marL="0">
+              <a:buNone/>
+            </a:pPr>
+            <a:r>
+              <a:rPr lang="en-US" sz="1140" dirty="0">
                 <a:solidFill>
                   <a:srgbClr val="17364A"/>
                 </a:solidFill>
@@ -7230,9 +7230,9 @@
                 <a:ea typeface="Aptos" pitchFamily="34" charset="-122"/>
                 <a:cs typeface="Aptos" pitchFamily="34" charset="-120"/>
               </a:rPr>
-              <a:t>How will the agency know when the workflow needs to be revised?</a:t>
-            </a:r>
-            <a:endParaRPr lang="en-US" sz="1220" dirty="0"/>
+              <a:t>How will the agency know when the workflow needs.</a:t>
+            </a:r>
+            <a:endParaRPr lang="en-US" sz="1140" dirty="0"/>
           </a:p>
         </p:txBody>
       </p:sp>
@@ -7244,12 +7244,12 @@
         </p:nvSpPr>
         <p:spPr>
           <a:xfrm>
-            <a:off x="7635240" y="4184294"/>
-            <a:ext cx="3474720" cy="1466698"/>
+            <a:off x="7543800" y="4389120"/>
+            <a:ext cx="3611880" cy="1261872"/>
           </a:xfrm>
           <a:prstGeom prst="roundRect">
             <a:avLst>
-              <a:gd name="adj" fmla="val 7481"/>
+              <a:gd name="adj" fmla="val 8696"/>
             </a:avLst>
           </a:prstGeom>
           <a:solidFill>
@@ -7271,8 +7271,8 @@
         </p:nvSpPr>
         <p:spPr>
           <a:xfrm>
-            <a:off x="7799832" y="4330598"/>
-            <a:ext cx="3145536" cy="256032"/>
+            <a:off x="7708392" y="4517136"/>
+            <a:ext cx="3282696" cy="228600"/>
           </a:xfrm>
           <a:prstGeom prst="rect">
             <a:avLst/>
@@ -7288,7 +7288,7 @@
               <a:buNone/>
             </a:pPr>
             <a:r>
-              <a:rPr lang="en-US" sz="1300" b="1" dirty="0">
+              <a:rPr lang="en-US" sz="1220" b="1" dirty="0">
                 <a:solidFill>
                   <a:srgbClr val="0068B7"/>
                 </a:solidFill>
@@ -7298,7 +7298,7 @@
               </a:rPr>
               <a:t>Next action</a:t>
             </a:r>
-            <a:endParaRPr lang="en-US" sz="1300" dirty="0"/>
+            <a:endParaRPr lang="en-US" sz="1220" dirty="0"/>
           </a:p>
         </p:txBody>
       </p:sp>
@@ -7310,8 +7310,8 @@
         </p:nvSpPr>
         <p:spPr>
           <a:xfrm>
-            <a:off x="7799832" y="4659782"/>
-            <a:ext cx="3145536" cy="899770"/>
+            <a:off x="7708392" y="4828032"/>
+            <a:ext cx="3282696" cy="749808"/>
           </a:xfrm>
           <a:prstGeom prst="rect">
             <a:avLst/>
@@ -7329,7 +7329,7 @@
               <a:buNone/>
             </a:pPr>
             <a:r>
-              <a:rPr lang="en-US" sz="1320" dirty="0">
+              <a:rPr lang="en-US" sz="1220" dirty="0">
                 <a:solidFill>
                   <a:srgbClr val="17364A"/>
                 </a:solidFill>
@@ -7337,9 +7337,9 @@
                 <a:ea typeface="Aptos" pitchFamily="34" charset="-122"/>
                 <a:cs typeface="Aptos" pitchFamily="34" charset="-120"/>
               </a:rPr>
-              <a:t>Use the concept to clarify workflow changes, dependencies, staffing, procurement requirements, training needs, and implementation checkpoints.</a:t>
-            </a:r>
-            <a:endParaRPr lang="en-US" sz="1320" dirty="0"/>
+              <a:t>Use the concept to clarify workflow changes, dependencies, staffing, procurement.</a:t>
+            </a:r>
+            <a:endParaRPr lang="en-US" sz="1220" dirty="0"/>
           </a:p>
         </p:txBody>
       </p:sp>
@@ -7630,8 +7630,8 @@
         </p:nvSpPr>
         <p:spPr>
           <a:xfrm>
-            <a:off x="868680" y="1508760"/>
-            <a:ext cx="6309360" cy="4160520"/>
+            <a:off x="822960" y="1463040"/>
+            <a:ext cx="6565392" cy="4343400"/>
           </a:xfrm>
           <a:prstGeom prst="rect">
             <a:avLst/>
@@ -7649,7 +7649,7 @@
               <a:buNone/>
             </a:pPr>
             <a:r>
-              <a:rPr lang="en-US" sz="2100" dirty="0">
+              <a:rPr lang="en-US" sz="1920" dirty="0">
                 <a:solidFill>
                   <a:srgbClr val="003A63"/>
                 </a:solidFill>
@@ -7657,16 +7657,16 @@
                 <a:ea typeface="Aptos" pitchFamily="34" charset="-122"/>
                 <a:cs typeface="Aptos" pitchFamily="34" charset="-120"/>
               </a:rPr>
-              <a:t>• Create a practical grant and funding management for ai projects artifact for one AI-supported.</a:t>
-            </a:r>
-            <a:endParaRPr lang="en-US" sz="2100" dirty="0"/>
-          </a:p>
-          <a:p>
-            <a:pPr indent="0" marL="0">
-              <a:buNone/>
-            </a:pPr>
-            <a:r>
-              <a:rPr lang="en-US" sz="2100" dirty="0">
+              <a:t>• Create a practical grant and funding management for ai projects artifact for.</a:t>
+            </a:r>
+            <a:endParaRPr lang="en-US" sz="1920" dirty="0"/>
+          </a:p>
+          <a:p>
+            <a:pPr indent="0" marL="0">
+              <a:buNone/>
+            </a:pPr>
+            <a:r>
+              <a:rPr lang="en-US" sz="1920" dirty="0">
                 <a:solidFill>
                   <a:srgbClr val="003A63"/>
                 </a:solidFill>
@@ -7674,9 +7674,9 @@
                 <a:ea typeface="Aptos" pitchFamily="34" charset="-122"/>
                 <a:cs typeface="Aptos" pitchFamily="34" charset="-120"/>
               </a:rPr>
-              <a:t>• The artifact should define the use case, affected roles, review criteria, safeguards,.</a:t>
-            </a:r>
-            <a:endParaRPr lang="en-US" sz="2100" dirty="0"/>
+              <a:t>• The artifact should define the use case, affected roles, review criteria,.</a:t>
+            </a:r>
+            <a:endParaRPr lang="en-US" sz="1920" dirty="0"/>
           </a:p>
         </p:txBody>
       </p:sp>
@@ -7688,12 +7688,12 @@
         </p:nvSpPr>
         <p:spPr>
           <a:xfrm>
-            <a:off x="7635240" y="1325880"/>
-            <a:ext cx="3474720" cy="1255471"/>
+            <a:off x="7543800" y="1325880"/>
+            <a:ext cx="3611880" cy="1261872"/>
           </a:xfrm>
           <a:prstGeom prst="roundRect">
             <a:avLst>
-              <a:gd name="adj" fmla="val 8740"/>
+              <a:gd name="adj" fmla="val 8696"/>
             </a:avLst>
           </a:prstGeom>
           <a:solidFill>
@@ -7715,8 +7715,8 @@
         </p:nvSpPr>
         <p:spPr>
           <a:xfrm>
-            <a:off x="7799832" y="1472184"/>
-            <a:ext cx="3145536" cy="256032"/>
+            <a:off x="7708392" y="1453896"/>
+            <a:ext cx="3282696" cy="228600"/>
           </a:xfrm>
           <a:prstGeom prst="rect">
             <a:avLst/>
@@ -7732,7 +7732,7 @@
               <a:buNone/>
             </a:pPr>
             <a:r>
-              <a:rPr lang="en-US" sz="1300" b="1" dirty="0">
+              <a:rPr lang="en-US" sz="1220" b="1" dirty="0">
                 <a:solidFill>
                   <a:srgbClr val="0068B7"/>
                 </a:solidFill>
@@ -7742,7 +7742,7 @@
               </a:rPr>
               <a:t>Implementation cue</a:t>
             </a:r>
-            <a:endParaRPr lang="en-US" sz="1300" dirty="0"/>
+            <a:endParaRPr lang="en-US" sz="1220" dirty="0"/>
           </a:p>
         </p:txBody>
       </p:sp>
@@ -7754,8 +7754,8 @@
         </p:nvSpPr>
         <p:spPr>
           <a:xfrm>
-            <a:off x="7799832" y="1801368"/>
-            <a:ext cx="3145536" cy="688543"/>
+            <a:off x="7708392" y="1764792"/>
+            <a:ext cx="3282696" cy="749808"/>
           </a:xfrm>
           <a:prstGeom prst="rect">
             <a:avLst/>
@@ -7773,7 +7773,7 @@
               <a:buNone/>
             </a:pPr>
             <a:r>
-              <a:rPr lang="en-US" sz="1320" dirty="0">
+              <a:rPr lang="en-US" sz="1220" dirty="0">
                 <a:solidFill>
                   <a:srgbClr val="17364A"/>
                 </a:solidFill>
@@ -7781,9 +7781,9 @@
                 <a:ea typeface="Aptos" pitchFamily="34" charset="-122"/>
                 <a:cs typeface="Aptos" pitchFamily="34" charset="-120"/>
               </a:rPr>
-              <a:t>Create a practical grant and funding management for ai projects artifact for one AI-supported public.</a:t>
-            </a:r>
-            <a:endParaRPr lang="en-US" sz="1320" dirty="0"/>
+              <a:t>Create a practical grant and funding management for ai projects artifact for one.</a:t>
+            </a:r>
+            <a:endParaRPr lang="en-US" sz="1220" dirty="0"/>
           </a:p>
         </p:txBody>
       </p:sp>
@@ -7795,12 +7795,12 @@
         </p:nvSpPr>
         <p:spPr>
           <a:xfrm>
-            <a:off x="7635240" y="2718511"/>
-            <a:ext cx="3474720" cy="1328623"/>
+            <a:off x="7543800" y="2724912"/>
+            <a:ext cx="3611880" cy="1527048"/>
           </a:xfrm>
           <a:prstGeom prst="roundRect">
             <a:avLst>
-              <a:gd name="adj" fmla="val 8259"/>
+              <a:gd name="adj" fmla="val 7186"/>
             </a:avLst>
           </a:prstGeom>
           <a:solidFill>
@@ -7822,8 +7822,8 @@
         </p:nvSpPr>
         <p:spPr>
           <a:xfrm>
-            <a:off x="7799832" y="2864815"/>
-            <a:ext cx="3145536" cy="256032"/>
+            <a:off x="7708392" y="2852928"/>
+            <a:ext cx="3282696" cy="228600"/>
           </a:xfrm>
           <a:prstGeom prst="rect">
             <a:avLst/>
@@ -7839,7 +7839,7 @@
               <a:buNone/>
             </a:pPr>
             <a:r>
-              <a:rPr lang="en-US" sz="1300" b="1" dirty="0">
+              <a:rPr lang="en-US" sz="1220" b="1" dirty="0">
                 <a:solidFill>
                   <a:srgbClr val="0068B7"/>
                 </a:solidFill>
@@ -7849,7 +7849,7 @@
               </a:rPr>
               <a:t>Concept checkpoints</a:t>
             </a:r>
-            <a:endParaRPr lang="en-US" sz="1300" dirty="0"/>
+            <a:endParaRPr lang="en-US" sz="1220" dirty="0"/>
           </a:p>
         </p:txBody>
       </p:sp>
@@ -7861,8 +7861,8 @@
         </p:nvSpPr>
         <p:spPr>
           <a:xfrm>
-            <a:off x="7818120" y="3230575"/>
-            <a:ext cx="3090672" cy="670255"/>
+            <a:off x="7726680" y="3182112"/>
+            <a:ext cx="3227832" cy="960120"/>
           </a:xfrm>
           <a:prstGeom prst="rect">
             <a:avLst/>
@@ -7880,7 +7880,7 @@
               <a:buNone/>
             </a:pPr>
             <a:r>
-              <a:rPr lang="en-US" sz="1220" dirty="0">
+              <a:rPr lang="en-US" sz="1140" dirty="0">
                 <a:solidFill>
                   <a:srgbClr val="17364A"/>
                 </a:solidFill>
@@ -7888,16 +7888,16 @@
                 <a:ea typeface="Aptos" pitchFamily="34" charset="-122"/>
                 <a:cs typeface="Aptos" pitchFamily="34" charset="-120"/>
               </a:rPr>
-              <a:t>Create a practical grant and funding management for ai projects.</a:t>
-            </a:r>
-            <a:endParaRPr lang="en-US" sz="1220" dirty="0"/>
-          </a:p>
-          <a:p>
-            <a:pPr indent="0" marL="0">
-              <a:buNone/>
-            </a:pPr>
-            <a:r>
-              <a:rPr lang="en-US" sz="1220" dirty="0">
+              <a:t>Create a practical grant and funding management.</a:t>
+            </a:r>
+            <a:endParaRPr lang="en-US" sz="1140" dirty="0"/>
+          </a:p>
+          <a:p>
+            <a:pPr indent="0" marL="0">
+              <a:buNone/>
+            </a:pPr>
+            <a:r>
+              <a:rPr lang="en-US" sz="1140" dirty="0">
                 <a:solidFill>
                   <a:srgbClr val="17364A"/>
                 </a:solidFill>
@@ -7905,9 +7905,9 @@
                 <a:ea typeface="Aptos" pitchFamily="34" charset="-122"/>
                 <a:cs typeface="Aptos" pitchFamily="34" charset="-120"/>
               </a:rPr>
-              <a:t>The artifact should define the use case, affected roles, review.</a:t>
-            </a:r>
-            <a:endParaRPr lang="en-US" sz="1220" dirty="0"/>
+              <a:t>The artifact should define the use case, affected.</a:t>
+            </a:r>
+            <a:endParaRPr lang="en-US" sz="1140" dirty="0"/>
           </a:p>
         </p:txBody>
       </p:sp>
@@ -7919,12 +7919,12 @@
         </p:nvSpPr>
         <p:spPr>
           <a:xfrm>
-            <a:off x="7635240" y="4184294"/>
-            <a:ext cx="3474720" cy="1466698"/>
+            <a:off x="7543800" y="4389120"/>
+            <a:ext cx="3611880" cy="1261872"/>
           </a:xfrm>
           <a:prstGeom prst="roundRect">
             <a:avLst>
-              <a:gd name="adj" fmla="val 7481"/>
+              <a:gd name="adj" fmla="val 8696"/>
             </a:avLst>
           </a:prstGeom>
           <a:solidFill>
@@ -7946,8 +7946,8 @@
         </p:nvSpPr>
         <p:spPr>
           <a:xfrm>
-            <a:off x="7799832" y="4330598"/>
-            <a:ext cx="3145536" cy="256032"/>
+            <a:off x="7708392" y="4517136"/>
+            <a:ext cx="3282696" cy="228600"/>
           </a:xfrm>
           <a:prstGeom prst="rect">
             <a:avLst/>
@@ -7963,7 +7963,7 @@
               <a:buNone/>
             </a:pPr>
             <a:r>
-              <a:rPr lang="en-US" sz="1300" b="1" dirty="0">
+              <a:rPr lang="en-US" sz="1220" b="1" dirty="0">
                 <a:solidFill>
                   <a:srgbClr val="0068B7"/>
                 </a:solidFill>
@@ -7973,7 +7973,7 @@
               </a:rPr>
               <a:t>Next action</a:t>
             </a:r>
-            <a:endParaRPr lang="en-US" sz="1300" dirty="0"/>
+            <a:endParaRPr lang="en-US" sz="1220" dirty="0"/>
           </a:p>
         </p:txBody>
       </p:sp>
@@ -7985,8 +7985,8 @@
         </p:nvSpPr>
         <p:spPr>
           <a:xfrm>
-            <a:off x="7799832" y="4659782"/>
-            <a:ext cx="3145536" cy="899770"/>
+            <a:off x="7708392" y="4828032"/>
+            <a:ext cx="3282696" cy="749808"/>
           </a:xfrm>
           <a:prstGeom prst="rect">
             <a:avLst/>
@@ -8004,7 +8004,7 @@
               <a:buNone/>
             </a:pPr>
             <a:r>
-              <a:rPr lang="en-US" sz="1320" dirty="0">
+              <a:rPr lang="en-US" sz="1220" dirty="0">
                 <a:solidFill>
                   <a:srgbClr val="17364A"/>
                 </a:solidFill>
@@ -8012,9 +8012,9 @@
                 <a:ea typeface="Aptos" pitchFamily="34" charset="-122"/>
                 <a:cs typeface="Aptos" pitchFamily="34" charset="-120"/>
               </a:rPr>
-              <a:t>Use the assignment to test whether you can explain the concept, apply it to a realistic public health situation, and identify what would need review before the work moves forward.</a:t>
-            </a:r>
-            <a:endParaRPr lang="en-US" sz="1320" dirty="0"/>
+              <a:t>Use the assignment to test whether you can explain the concept, apply it to a.</a:t>
+            </a:r>
+            <a:endParaRPr lang="en-US" sz="1220" dirty="0"/>
           </a:p>
         </p:txBody>
       </p:sp>
@@ -8305,8 +8305,8 @@
         </p:nvSpPr>
         <p:spPr>
           <a:xfrm>
-            <a:off x="868680" y="1508760"/>
-            <a:ext cx="6309360" cy="4160520"/>
+            <a:off x="822960" y="1463040"/>
+            <a:ext cx="6565392" cy="4343400"/>
           </a:xfrm>
           <a:prstGeom prst="rect">
             <a:avLst/>
@@ -8324,7 +8324,7 @@
               <a:buNone/>
             </a:pPr>
             <a:r>
-              <a:rPr lang="en-US" sz="2100" dirty="0">
+              <a:rPr lang="en-US" sz="1920" dirty="0">
                 <a:solidFill>
                   <a:srgbClr val="003A63"/>
                 </a:solidFill>
@@ -8334,14 +8334,14 @@
               </a:rPr>
               <a:t>• Grant and Funding Management for AI Projects artifact</a:t>
             </a:r>
-            <a:endParaRPr lang="en-US" sz="2100" dirty="0"/>
-          </a:p>
-          <a:p>
-            <a:pPr indent="0" marL="0">
-              <a:buNone/>
-            </a:pPr>
-            <a:r>
-              <a:rPr lang="en-US" sz="2100" dirty="0">
+            <a:endParaRPr lang="en-US" sz="1920" dirty="0"/>
+          </a:p>
+          <a:p>
+            <a:pPr indent="0" marL="0">
+              <a:buNone/>
+            </a:pPr>
+            <a:r>
+              <a:rPr lang="en-US" sz="1920" dirty="0">
                 <a:solidFill>
                   <a:srgbClr val="003A63"/>
                 </a:solidFill>
@@ -8351,14 +8351,14 @@
               </a:rPr>
               <a:t>• Role and responsibility table</a:t>
             </a:r>
-            <a:endParaRPr lang="en-US" sz="2100" dirty="0"/>
-          </a:p>
-          <a:p>
-            <a:pPr indent="0" marL="0">
-              <a:buNone/>
-            </a:pPr>
-            <a:r>
-              <a:rPr lang="en-US" sz="2100" dirty="0">
+            <a:endParaRPr lang="en-US" sz="1920" dirty="0"/>
+          </a:p>
+          <a:p>
+            <a:pPr indent="0" marL="0">
+              <a:buNone/>
+            </a:pPr>
+            <a:r>
+              <a:rPr lang="en-US" sz="1920" dirty="0">
                 <a:solidFill>
                   <a:srgbClr val="003A63"/>
                 </a:solidFill>
@@ -8368,7 +8368,7 @@
               </a:rPr>
               <a:t>• Risk and safeguard summary</a:t>
             </a:r>
-            <a:endParaRPr lang="en-US" sz="2100" dirty="0"/>
+            <a:endParaRPr lang="en-US" sz="1920" dirty="0"/>
           </a:p>
         </p:txBody>
       </p:sp>
@@ -8380,12 +8380,12 @@
         </p:nvSpPr>
         <p:spPr>
           <a:xfrm>
-            <a:off x="7635240" y="1325880"/>
-            <a:ext cx="3474720" cy="1207008"/>
+            <a:off x="7543800" y="1325880"/>
+            <a:ext cx="3611880" cy="1261872"/>
           </a:xfrm>
           <a:prstGeom prst="roundRect">
             <a:avLst>
-              <a:gd name="adj" fmla="val 9091"/>
+              <a:gd name="adj" fmla="val 8696"/>
             </a:avLst>
           </a:prstGeom>
           <a:solidFill>
@@ -8407,8 +8407,8 @@
         </p:nvSpPr>
         <p:spPr>
           <a:xfrm>
-            <a:off x="7799832" y="1472184"/>
-            <a:ext cx="3145536" cy="256032"/>
+            <a:off x="7708392" y="1453896"/>
+            <a:ext cx="3282696" cy="228600"/>
           </a:xfrm>
           <a:prstGeom prst="rect">
             <a:avLst/>
@@ -8424,7 +8424,7 @@
               <a:buNone/>
             </a:pPr>
             <a:r>
-              <a:rPr lang="en-US" sz="1300" b="1" dirty="0">
+              <a:rPr lang="en-US" sz="1220" b="1" dirty="0">
                 <a:solidFill>
                   <a:srgbClr val="0068B7"/>
                 </a:solidFill>
@@ -8434,7 +8434,7 @@
               </a:rPr>
               <a:t>Implementation cue</a:t>
             </a:r>
-            <a:endParaRPr lang="en-US" sz="1300" dirty="0"/>
+            <a:endParaRPr lang="en-US" sz="1220" dirty="0"/>
           </a:p>
         </p:txBody>
       </p:sp>
@@ -8446,8 +8446,8 @@
         </p:nvSpPr>
         <p:spPr>
           <a:xfrm>
-            <a:off x="7799832" y="1801368"/>
-            <a:ext cx="3145536" cy="640080"/>
+            <a:off x="7708392" y="1764792"/>
+            <a:ext cx="3282696" cy="749808"/>
           </a:xfrm>
           <a:prstGeom prst="rect">
             <a:avLst/>
@@ -8465,7 +8465,7 @@
               <a:buNone/>
             </a:pPr>
             <a:r>
-              <a:rPr lang="en-US" sz="1320" dirty="0">
+              <a:rPr lang="en-US" sz="1220" dirty="0">
                 <a:solidFill>
                   <a:srgbClr val="17364A"/>
                 </a:solidFill>
@@ -8475,7 +8475,7 @@
               </a:rPr>
               <a:t>Grant and Funding Management for AI Projects artifact</a:t>
             </a:r>
-            <a:endParaRPr lang="en-US" sz="1320" dirty="0"/>
+            <a:endParaRPr lang="en-US" sz="1220" dirty="0"/>
           </a:p>
         </p:txBody>
       </p:sp>
@@ -8487,12 +8487,12 @@
         </p:nvSpPr>
         <p:spPr>
           <a:xfrm>
-            <a:off x="7635240" y="2670048"/>
-            <a:ext cx="3474720" cy="1377086"/>
+            <a:off x="7543800" y="2724912"/>
+            <a:ext cx="3611880" cy="1527048"/>
           </a:xfrm>
           <a:prstGeom prst="roundRect">
             <a:avLst>
-              <a:gd name="adj" fmla="val 7968"/>
+              <a:gd name="adj" fmla="val 7186"/>
             </a:avLst>
           </a:prstGeom>
           <a:solidFill>
@@ -8514,8 +8514,8 @@
         </p:nvSpPr>
         <p:spPr>
           <a:xfrm>
-            <a:off x="7799832" y="2816352"/>
-            <a:ext cx="3145536" cy="256032"/>
+            <a:off x="7708392" y="2852928"/>
+            <a:ext cx="3282696" cy="228600"/>
           </a:xfrm>
           <a:prstGeom prst="rect">
             <a:avLst/>
@@ -8531,7 +8531,7 @@
               <a:buNone/>
             </a:pPr>
             <a:r>
-              <a:rPr lang="en-US" sz="1300" b="1" dirty="0">
+              <a:rPr lang="en-US" sz="1220" b="1" dirty="0">
                 <a:solidFill>
                   <a:srgbClr val="0068B7"/>
                 </a:solidFill>
@@ -8541,7 +8541,7 @@
               </a:rPr>
               <a:t>Concept checkpoints</a:t>
             </a:r>
-            <a:endParaRPr lang="en-US" sz="1300" dirty="0"/>
+            <a:endParaRPr lang="en-US" sz="1220" dirty="0"/>
           </a:p>
         </p:txBody>
       </p:sp>
@@ -8553,8 +8553,8 @@
         </p:nvSpPr>
         <p:spPr>
           <a:xfrm>
-            <a:off x="7818120" y="3182112"/>
-            <a:ext cx="3090672" cy="718718"/>
+            <a:off x="7726680" y="3182112"/>
+            <a:ext cx="3227832" cy="960120"/>
           </a:xfrm>
           <a:prstGeom prst="rect">
             <a:avLst/>
@@ -8572,7 +8572,7 @@
               <a:buNone/>
             </a:pPr>
             <a:r>
-              <a:rPr lang="en-US" sz="1220" dirty="0">
+              <a:rPr lang="en-US" sz="1140" dirty="0">
                 <a:solidFill>
                   <a:srgbClr val="17364A"/>
                 </a:solidFill>
@@ -8580,16 +8580,16 @@
                 <a:ea typeface="Aptos" pitchFamily="34" charset="-122"/>
                 <a:cs typeface="Aptos" pitchFamily="34" charset="-120"/>
               </a:rPr>
-              <a:t>Grant and Funding Management for AI Projects artifact</a:t>
-            </a:r>
-            <a:endParaRPr lang="en-US" sz="1220" dirty="0"/>
-          </a:p>
-          <a:p>
-            <a:pPr indent="0" marL="0">
-              <a:buNone/>
-            </a:pPr>
-            <a:r>
-              <a:rPr lang="en-US" sz="1220" dirty="0">
+              <a:t>Grant and Funding Management for AI Projects.</a:t>
+            </a:r>
+            <a:endParaRPr lang="en-US" sz="1140" dirty="0"/>
+          </a:p>
+          <a:p>
+            <a:pPr indent="0" marL="0">
+              <a:buNone/>
+            </a:pPr>
+            <a:r>
+              <a:rPr lang="en-US" sz="1140" dirty="0">
                 <a:solidFill>
                   <a:srgbClr val="17364A"/>
                 </a:solidFill>
@@ -8599,14 +8599,14 @@
               </a:rPr>
               <a:t>Role and responsibility table</a:t>
             </a:r>
-            <a:endParaRPr lang="en-US" sz="1220" dirty="0"/>
-          </a:p>
-          <a:p>
-            <a:pPr indent="0" marL="0">
-              <a:buNone/>
-            </a:pPr>
-            <a:r>
-              <a:rPr lang="en-US" sz="1220" dirty="0">
+            <a:endParaRPr lang="en-US" sz="1140" dirty="0"/>
+          </a:p>
+          <a:p>
+            <a:pPr indent="0" marL="0">
+              <a:buNone/>
+            </a:pPr>
+            <a:r>
+              <a:rPr lang="en-US" sz="1140" dirty="0">
                 <a:solidFill>
                   <a:srgbClr val="17364A"/>
                 </a:solidFill>
@@ -8616,7 +8616,7 @@
               </a:rPr>
               <a:t>Risk and safeguard summary</a:t>
             </a:r>
-            <a:endParaRPr lang="en-US" sz="1220" dirty="0"/>
+            <a:endParaRPr lang="en-US" sz="1140" dirty="0"/>
           </a:p>
         </p:txBody>
       </p:sp>
@@ -8628,12 +8628,12 @@
         </p:nvSpPr>
         <p:spPr>
           <a:xfrm>
-            <a:off x="7635240" y="4184294"/>
-            <a:ext cx="3474720" cy="1466698"/>
+            <a:off x="7543800" y="4389120"/>
+            <a:ext cx="3611880" cy="1261872"/>
           </a:xfrm>
           <a:prstGeom prst="roundRect">
             <a:avLst>
-              <a:gd name="adj" fmla="val 7481"/>
+              <a:gd name="adj" fmla="val 8696"/>
             </a:avLst>
           </a:prstGeom>
           <a:solidFill>
@@ -8655,8 +8655,8 @@
         </p:nvSpPr>
         <p:spPr>
           <a:xfrm>
-            <a:off x="7799832" y="4330598"/>
-            <a:ext cx="3145536" cy="256032"/>
+            <a:off x="7708392" y="4517136"/>
+            <a:ext cx="3282696" cy="228600"/>
           </a:xfrm>
           <a:prstGeom prst="rect">
             <a:avLst/>
@@ -8672,7 +8672,7 @@
               <a:buNone/>
             </a:pPr>
             <a:r>
-              <a:rPr lang="en-US" sz="1300" b="1" dirty="0">
+              <a:rPr lang="en-US" sz="1220" b="1" dirty="0">
                 <a:solidFill>
                   <a:srgbClr val="0068B7"/>
                 </a:solidFill>
@@ -8682,7 +8682,7 @@
               </a:rPr>
               <a:t>Next action</a:t>
             </a:r>
-            <a:endParaRPr lang="en-US" sz="1300" dirty="0"/>
+            <a:endParaRPr lang="en-US" sz="1220" dirty="0"/>
           </a:p>
         </p:txBody>
       </p:sp>
@@ -8694,8 +8694,8 @@
         </p:nvSpPr>
         <p:spPr>
           <a:xfrm>
-            <a:off x="7799832" y="4659782"/>
-            <a:ext cx="3145536" cy="899770"/>
+            <a:off x="7708392" y="4828032"/>
+            <a:ext cx="3282696" cy="749808"/>
           </a:xfrm>
           <a:prstGeom prst="rect">
             <a:avLst/>
@@ -8713,7 +8713,7 @@
               <a:buNone/>
             </a:pPr>
             <a:r>
-              <a:rPr lang="en-US" sz="1320" dirty="0">
+              <a:rPr lang="en-US" sz="1220" dirty="0">
                 <a:solidFill>
                   <a:srgbClr val="17364A"/>
                 </a:solidFill>
@@ -8721,9 +8721,9 @@
                 <a:ea typeface="Aptos" pitchFamily="34" charset="-122"/>
                 <a:cs typeface="Aptos" pitchFamily="34" charset="-120"/>
               </a:rPr>
-              <a:t>Use the concept to clarify workflow changes, dependencies, staffing, procurement requirements, training needs, and implementation checkpoints.</a:t>
-            </a:r>
-            <a:endParaRPr lang="en-US" sz="1320" dirty="0"/>
+              <a:t>Use the concept to clarify workflow changes, dependencies, staffing, procurement.</a:t>
+            </a:r>
+            <a:endParaRPr lang="en-US" sz="1220" dirty="0"/>
           </a:p>
         </p:txBody>
       </p:sp>
@@ -9014,8 +9014,8 @@
         </p:nvSpPr>
         <p:spPr>
           <a:xfrm>
-            <a:off x="868680" y="1508760"/>
-            <a:ext cx="6309360" cy="4160520"/>
+            <a:off x="822960" y="1463040"/>
+            <a:ext cx="6565392" cy="4343400"/>
           </a:xfrm>
           <a:prstGeom prst="rect">
             <a:avLst/>
@@ -9033,7 +9033,7 @@
               <a:buNone/>
             </a:pPr>
             <a:r>
-              <a:rPr lang="en-US" sz="2100" dirty="0">
+              <a:rPr lang="en-US" sz="1920" dirty="0">
                 <a:solidFill>
                   <a:srgbClr val="003A63"/>
                 </a:solidFill>
@@ -9043,14 +9043,14 @@
               </a:rPr>
               <a:t>• Escalation and monitoring plan</a:t>
             </a:r>
-            <a:endParaRPr lang="en-US" sz="2100" dirty="0"/>
-          </a:p>
-          <a:p>
-            <a:pPr indent="0" marL="0">
-              <a:buNone/>
-            </a:pPr>
-            <a:r>
-              <a:rPr lang="en-US" sz="2100" dirty="0">
+            <a:endParaRPr lang="en-US" sz="1920" dirty="0"/>
+          </a:p>
+          <a:p>
+            <a:pPr indent="0" marL="0">
+              <a:buNone/>
+            </a:pPr>
+            <a:r>
+              <a:rPr lang="en-US" sz="1920" dirty="0">
                 <a:solidFill>
                   <a:srgbClr val="003A63"/>
                 </a:solidFill>
@@ -9060,7 +9060,7 @@
               </a:rPr>
               <a:t>• Approval or review note</a:t>
             </a:r>
-            <a:endParaRPr lang="en-US" sz="2100" dirty="0"/>
+            <a:endParaRPr lang="en-US" sz="1920" dirty="0"/>
           </a:p>
         </p:txBody>
       </p:sp>
@@ -9072,12 +9072,12 @@
         </p:nvSpPr>
         <p:spPr>
           <a:xfrm>
-            <a:off x="7635240" y="1325880"/>
-            <a:ext cx="3474720" cy="1207008"/>
+            <a:off x="7543800" y="1325880"/>
+            <a:ext cx="3611880" cy="1261872"/>
           </a:xfrm>
           <a:prstGeom prst="roundRect">
             <a:avLst>
-              <a:gd name="adj" fmla="val 9091"/>
+              <a:gd name="adj" fmla="val 8696"/>
             </a:avLst>
           </a:prstGeom>
           <a:solidFill>
@@ -9099,8 +9099,8 @@
         </p:nvSpPr>
         <p:spPr>
           <a:xfrm>
-            <a:off x="7799832" y="1472184"/>
-            <a:ext cx="3145536" cy="256032"/>
+            <a:off x="7708392" y="1453896"/>
+            <a:ext cx="3282696" cy="228600"/>
           </a:xfrm>
           <a:prstGeom prst="rect">
             <a:avLst/>
@@ -9116,7 +9116,7 @@
               <a:buNone/>
             </a:pPr>
             <a:r>
-              <a:rPr lang="en-US" sz="1300" b="1" dirty="0">
+              <a:rPr lang="en-US" sz="1220" b="1" dirty="0">
                 <a:solidFill>
                   <a:srgbClr val="0068B7"/>
                 </a:solidFill>
@@ -9126,7 +9126,7 @@
               </a:rPr>
               <a:t>Implementation cue</a:t>
             </a:r>
-            <a:endParaRPr lang="en-US" sz="1300" dirty="0"/>
+            <a:endParaRPr lang="en-US" sz="1220" dirty="0"/>
           </a:p>
         </p:txBody>
       </p:sp>
@@ -9138,8 +9138,8 @@
         </p:nvSpPr>
         <p:spPr>
           <a:xfrm>
-            <a:off x="7799832" y="1801368"/>
-            <a:ext cx="3145536" cy="640080"/>
+            <a:off x="7708392" y="1764792"/>
+            <a:ext cx="3282696" cy="749808"/>
           </a:xfrm>
           <a:prstGeom prst="rect">
             <a:avLst/>
@@ -9157,7 +9157,7 @@
               <a:buNone/>
             </a:pPr>
             <a:r>
-              <a:rPr lang="en-US" sz="1320" dirty="0">
+              <a:rPr lang="en-US" sz="1220" dirty="0">
                 <a:solidFill>
                   <a:srgbClr val="17364A"/>
                 </a:solidFill>
@@ -9167,7 +9167,7 @@
               </a:rPr>
               <a:t>Escalation and monitoring plan</a:t>
             </a:r>
-            <a:endParaRPr lang="en-US" sz="1320" dirty="0"/>
+            <a:endParaRPr lang="en-US" sz="1220" dirty="0"/>
           </a:p>
         </p:txBody>
       </p:sp>
@@ -9179,12 +9179,12 @@
         </p:nvSpPr>
         <p:spPr>
           <a:xfrm>
-            <a:off x="7635240" y="2670048"/>
-            <a:ext cx="3474720" cy="1377086"/>
+            <a:off x="7543800" y="2724912"/>
+            <a:ext cx="3611880" cy="1527048"/>
           </a:xfrm>
           <a:prstGeom prst="roundRect">
             <a:avLst>
-              <a:gd name="adj" fmla="val 7968"/>
+              <a:gd name="adj" fmla="val 7186"/>
             </a:avLst>
           </a:prstGeom>
           <a:solidFill>
@@ -9206,8 +9206,8 @@
         </p:nvSpPr>
         <p:spPr>
           <a:xfrm>
-            <a:off x="7799832" y="2816352"/>
-            <a:ext cx="3145536" cy="256032"/>
+            <a:off x="7708392" y="2852928"/>
+            <a:ext cx="3282696" cy="228600"/>
           </a:xfrm>
           <a:prstGeom prst="rect">
             <a:avLst/>
@@ -9223,7 +9223,7 @@
               <a:buNone/>
             </a:pPr>
             <a:r>
-              <a:rPr lang="en-US" sz="1300" b="1" dirty="0">
+              <a:rPr lang="en-US" sz="1220" b="1" dirty="0">
                 <a:solidFill>
                   <a:srgbClr val="0068B7"/>
                 </a:solidFill>
@@ -9233,7 +9233,7 @@
               </a:rPr>
               <a:t>Concept checkpoints</a:t>
             </a:r>
-            <a:endParaRPr lang="en-US" sz="1300" dirty="0"/>
+            <a:endParaRPr lang="en-US" sz="1220" dirty="0"/>
           </a:p>
         </p:txBody>
       </p:sp>
@@ -9245,8 +9245,8 @@
         </p:nvSpPr>
         <p:spPr>
           <a:xfrm>
-            <a:off x="7818120" y="3182112"/>
-            <a:ext cx="3090672" cy="718718"/>
+            <a:off x="7726680" y="3182112"/>
+            <a:ext cx="3227832" cy="960120"/>
           </a:xfrm>
           <a:prstGeom prst="rect">
             <a:avLst/>
@@ -9264,7 +9264,7 @@
               <a:buNone/>
             </a:pPr>
             <a:r>
-              <a:rPr lang="en-US" sz="1220" dirty="0">
+              <a:rPr lang="en-US" sz="1140" dirty="0">
                 <a:solidFill>
                   <a:srgbClr val="17364A"/>
                 </a:solidFill>
@@ -9274,14 +9274,14 @@
               </a:rPr>
               <a:t>Escalation and monitoring plan</a:t>
             </a:r>
-            <a:endParaRPr lang="en-US" sz="1220" dirty="0"/>
-          </a:p>
-          <a:p>
-            <a:pPr indent="0" marL="0">
-              <a:buNone/>
-            </a:pPr>
-            <a:r>
-              <a:rPr lang="en-US" sz="1220" dirty="0">
+            <a:endParaRPr lang="en-US" sz="1140" dirty="0"/>
+          </a:p>
+          <a:p>
+            <a:pPr indent="0" marL="0">
+              <a:buNone/>
+            </a:pPr>
+            <a:r>
+              <a:rPr lang="en-US" sz="1140" dirty="0">
                 <a:solidFill>
                   <a:srgbClr val="17364A"/>
                 </a:solidFill>
@@ -9291,7 +9291,7 @@
               </a:rPr>
               <a:t>Approval or review note</a:t>
             </a:r>
-            <a:endParaRPr lang="en-US" sz="1220" dirty="0"/>
+            <a:endParaRPr lang="en-US" sz="1140" dirty="0"/>
           </a:p>
         </p:txBody>
       </p:sp>
@@ -9303,12 +9303,12 @@
         </p:nvSpPr>
         <p:spPr>
           <a:xfrm>
-            <a:off x="7635240" y="4184294"/>
-            <a:ext cx="3474720" cy="1466698"/>
+            <a:off x="7543800" y="4389120"/>
+            <a:ext cx="3611880" cy="1261872"/>
           </a:xfrm>
           <a:prstGeom prst="roundRect">
             <a:avLst>
-              <a:gd name="adj" fmla="val 7481"/>
+              <a:gd name="adj" fmla="val 8696"/>
             </a:avLst>
           </a:prstGeom>
           <a:solidFill>
@@ -9330,8 +9330,8 @@
         </p:nvSpPr>
         <p:spPr>
           <a:xfrm>
-            <a:off x="7799832" y="4330598"/>
-            <a:ext cx="3145536" cy="256032"/>
+            <a:off x="7708392" y="4517136"/>
+            <a:ext cx="3282696" cy="228600"/>
           </a:xfrm>
           <a:prstGeom prst="rect">
             <a:avLst/>
@@ -9347,7 +9347,7 @@
               <a:buNone/>
             </a:pPr>
             <a:r>
-              <a:rPr lang="en-US" sz="1300" b="1" dirty="0">
+              <a:rPr lang="en-US" sz="1220" b="1" dirty="0">
                 <a:solidFill>
                   <a:srgbClr val="0068B7"/>
                 </a:solidFill>
@@ -9357,7 +9357,7 @@
               </a:rPr>
               <a:t>Next action</a:t>
             </a:r>
-            <a:endParaRPr lang="en-US" sz="1300" dirty="0"/>
+            <a:endParaRPr lang="en-US" sz="1220" dirty="0"/>
           </a:p>
         </p:txBody>
       </p:sp>
@@ -9369,8 +9369,8 @@
         </p:nvSpPr>
         <p:spPr>
           <a:xfrm>
-            <a:off x="7799832" y="4659782"/>
-            <a:ext cx="3145536" cy="899770"/>
+            <a:off x="7708392" y="4828032"/>
+            <a:ext cx="3282696" cy="749808"/>
           </a:xfrm>
           <a:prstGeom prst="rect">
             <a:avLst/>
@@ -9388,7 +9388,7 @@
               <a:buNone/>
             </a:pPr>
             <a:r>
-              <a:rPr lang="en-US" sz="1320" dirty="0">
+              <a:rPr lang="en-US" sz="1220" dirty="0">
                 <a:solidFill>
                   <a:srgbClr val="17364A"/>
                 </a:solidFill>
@@ -9396,9 +9396,9 @@
                 <a:ea typeface="Aptos" pitchFamily="34" charset="-122"/>
                 <a:cs typeface="Aptos" pitchFamily="34" charset="-120"/>
               </a:rPr>
-              <a:t>Use the concept to clarify workflow changes, dependencies, staffing, procurement requirements, training needs, and implementation checkpoints.</a:t>
-            </a:r>
-            <a:endParaRPr lang="en-US" sz="1320" dirty="0"/>
+              <a:t>Use the concept to clarify workflow changes, dependencies, staffing, procurement.</a:t>
+            </a:r>
+            <a:endParaRPr lang="en-US" sz="1220" dirty="0"/>
           </a:p>
         </p:txBody>
       </p:sp>
@@ -9689,8 +9689,8 @@
         </p:nvSpPr>
         <p:spPr>
           <a:xfrm>
-            <a:off x="868680" y="1508760"/>
-            <a:ext cx="6309360" cy="4160520"/>
+            <a:off x="822960" y="1463040"/>
+            <a:ext cx="6565392" cy="4343400"/>
           </a:xfrm>
           <a:prstGeom prst="rect">
             <a:avLst/>
@@ -9708,7 +9708,7 @@
               <a:buNone/>
             </a:pPr>
             <a:r>
-              <a:rPr lang="en-US" sz="2100" dirty="0">
+              <a:rPr lang="en-US" sz="1920" dirty="0">
                 <a:solidFill>
                   <a:srgbClr val="003A63"/>
                 </a:solidFill>
@@ -9718,14 +9718,14 @@
               </a:rPr>
               <a:t>• Grant and Funding Management for AI Projects artifact</a:t>
             </a:r>
-            <a:endParaRPr lang="en-US" sz="2100" dirty="0"/>
-          </a:p>
-          <a:p>
-            <a:pPr indent="0" marL="0">
-              <a:buNone/>
-            </a:pPr>
-            <a:r>
-              <a:rPr lang="en-US" sz="2100" dirty="0">
+            <a:endParaRPr lang="en-US" sz="1920" dirty="0"/>
+          </a:p>
+          <a:p>
+            <a:pPr indent="0" marL="0">
+              <a:buNone/>
+            </a:pPr>
+            <a:r>
+              <a:rPr lang="en-US" sz="1920" dirty="0">
                 <a:solidFill>
                   <a:srgbClr val="003A63"/>
                 </a:solidFill>
@@ -9735,14 +9735,14 @@
               </a:rPr>
               <a:t>• Role and responsibility table</a:t>
             </a:r>
-            <a:endParaRPr lang="en-US" sz="2100" dirty="0"/>
-          </a:p>
-          <a:p>
-            <a:pPr indent="0" marL="0">
-              <a:buNone/>
-            </a:pPr>
-            <a:r>
-              <a:rPr lang="en-US" sz="2100" dirty="0">
+            <a:endParaRPr lang="en-US" sz="1920" dirty="0"/>
+          </a:p>
+          <a:p>
+            <a:pPr indent="0" marL="0">
+              <a:buNone/>
+            </a:pPr>
+            <a:r>
+              <a:rPr lang="en-US" sz="1920" dirty="0">
                 <a:solidFill>
                   <a:srgbClr val="003A63"/>
                 </a:solidFill>
@@ -9752,7 +9752,7 @@
               </a:rPr>
               <a:t>• Risk and safeguard summary</a:t>
             </a:r>
-            <a:endParaRPr lang="en-US" sz="2100" dirty="0"/>
+            <a:endParaRPr lang="en-US" sz="1920" dirty="0"/>
           </a:p>
         </p:txBody>
       </p:sp>
@@ -9764,12 +9764,12 @@
         </p:nvSpPr>
         <p:spPr>
           <a:xfrm>
-            <a:off x="7635240" y="1325880"/>
-            <a:ext cx="3474720" cy="1207008"/>
+            <a:off x="7543800" y="1325880"/>
+            <a:ext cx="3611880" cy="1261872"/>
           </a:xfrm>
           <a:prstGeom prst="roundRect">
             <a:avLst>
-              <a:gd name="adj" fmla="val 9091"/>
+              <a:gd name="adj" fmla="val 8696"/>
             </a:avLst>
           </a:prstGeom>
           <a:solidFill>
@@ -9791,8 +9791,8 @@
         </p:nvSpPr>
         <p:spPr>
           <a:xfrm>
-            <a:off x="7799832" y="1472184"/>
-            <a:ext cx="3145536" cy="256032"/>
+            <a:off x="7708392" y="1453896"/>
+            <a:ext cx="3282696" cy="228600"/>
           </a:xfrm>
           <a:prstGeom prst="rect">
             <a:avLst/>
@@ -9808,7 +9808,7 @@
               <a:buNone/>
             </a:pPr>
             <a:r>
-              <a:rPr lang="en-US" sz="1300" b="1" dirty="0">
+              <a:rPr lang="en-US" sz="1220" b="1" dirty="0">
                 <a:solidFill>
                   <a:srgbClr val="0068B7"/>
                 </a:solidFill>
@@ -9818,7 +9818,7 @@
               </a:rPr>
               <a:t>Implementation cue</a:t>
             </a:r>
-            <a:endParaRPr lang="en-US" sz="1300" dirty="0"/>
+            <a:endParaRPr lang="en-US" sz="1220" dirty="0"/>
           </a:p>
         </p:txBody>
       </p:sp>
@@ -9830,8 +9830,8 @@
         </p:nvSpPr>
         <p:spPr>
           <a:xfrm>
-            <a:off x="7799832" y="1801368"/>
-            <a:ext cx="3145536" cy="640080"/>
+            <a:off x="7708392" y="1764792"/>
+            <a:ext cx="3282696" cy="749808"/>
           </a:xfrm>
           <a:prstGeom prst="rect">
             <a:avLst/>
@@ -9849,7 +9849,7 @@
               <a:buNone/>
             </a:pPr>
             <a:r>
-              <a:rPr lang="en-US" sz="1320" dirty="0">
+              <a:rPr lang="en-US" sz="1220" dirty="0">
                 <a:solidFill>
                   <a:srgbClr val="17364A"/>
                 </a:solidFill>
@@ -9859,7 +9859,7 @@
               </a:rPr>
               <a:t>Grant and Funding Management for AI Projects artifact</a:t>
             </a:r>
-            <a:endParaRPr lang="en-US" sz="1320" dirty="0"/>
+            <a:endParaRPr lang="en-US" sz="1220" dirty="0"/>
           </a:p>
         </p:txBody>
       </p:sp>
@@ -9871,12 +9871,12 @@
         </p:nvSpPr>
         <p:spPr>
           <a:xfrm>
-            <a:off x="7635240" y="2670048"/>
-            <a:ext cx="3474720" cy="1377086"/>
+            <a:off x="7543800" y="2724912"/>
+            <a:ext cx="3611880" cy="1527048"/>
           </a:xfrm>
           <a:prstGeom prst="roundRect">
             <a:avLst>
-              <a:gd name="adj" fmla="val 7968"/>
+              <a:gd name="adj" fmla="val 7186"/>
             </a:avLst>
           </a:prstGeom>
           <a:solidFill>
@@ -9898,8 +9898,8 @@
         </p:nvSpPr>
         <p:spPr>
           <a:xfrm>
-            <a:off x="7799832" y="2816352"/>
-            <a:ext cx="3145536" cy="256032"/>
+            <a:off x="7708392" y="2852928"/>
+            <a:ext cx="3282696" cy="228600"/>
           </a:xfrm>
           <a:prstGeom prst="rect">
             <a:avLst/>
@@ -9915,7 +9915,7 @@
               <a:buNone/>
             </a:pPr>
             <a:r>
-              <a:rPr lang="en-US" sz="1300" b="1" dirty="0">
+              <a:rPr lang="en-US" sz="1220" b="1" dirty="0">
                 <a:solidFill>
                   <a:srgbClr val="0068B7"/>
                 </a:solidFill>
@@ -9925,7 +9925,7 @@
               </a:rPr>
               <a:t>Concept checkpoints</a:t>
             </a:r>
-            <a:endParaRPr lang="en-US" sz="1300" dirty="0"/>
+            <a:endParaRPr lang="en-US" sz="1220" dirty="0"/>
           </a:p>
         </p:txBody>
       </p:sp>
@@ -9937,8 +9937,8 @@
         </p:nvSpPr>
         <p:spPr>
           <a:xfrm>
-            <a:off x="7818120" y="3182112"/>
-            <a:ext cx="3090672" cy="718718"/>
+            <a:off x="7726680" y="3182112"/>
+            <a:ext cx="3227832" cy="960120"/>
           </a:xfrm>
           <a:prstGeom prst="rect">
             <a:avLst/>
@@ -9956,7 +9956,7 @@
               <a:buNone/>
             </a:pPr>
             <a:r>
-              <a:rPr lang="en-US" sz="1220" dirty="0">
+              <a:rPr lang="en-US" sz="1140" dirty="0">
                 <a:solidFill>
                   <a:srgbClr val="17364A"/>
                 </a:solidFill>
@@ -9966,14 +9966,14 @@
               </a:rPr>
               <a:t>Escalation and monitoring plan</a:t>
             </a:r>
-            <a:endParaRPr lang="en-US" sz="1220" dirty="0"/>
-          </a:p>
-          <a:p>
-            <a:pPr indent="0" marL="0">
-              <a:buNone/>
-            </a:pPr>
-            <a:r>
-              <a:rPr lang="en-US" sz="1220" dirty="0">
+            <a:endParaRPr lang="en-US" sz="1140" dirty="0"/>
+          </a:p>
+          <a:p>
+            <a:pPr indent="0" marL="0">
+              <a:buNone/>
+            </a:pPr>
+            <a:r>
+              <a:rPr lang="en-US" sz="1140" dirty="0">
                 <a:solidFill>
                   <a:srgbClr val="17364A"/>
                 </a:solidFill>
@@ -9983,7 +9983,7 @@
               </a:rPr>
               <a:t>Approval or review note</a:t>
             </a:r>
-            <a:endParaRPr lang="en-US" sz="1220" dirty="0"/>
+            <a:endParaRPr lang="en-US" sz="1140" dirty="0"/>
           </a:p>
         </p:txBody>
       </p:sp>
@@ -9995,12 +9995,12 @@
         </p:nvSpPr>
         <p:spPr>
           <a:xfrm>
-            <a:off x="7635240" y="4184294"/>
-            <a:ext cx="3474720" cy="1466698"/>
+            <a:off x="7543800" y="4389120"/>
+            <a:ext cx="3611880" cy="1261872"/>
           </a:xfrm>
           <a:prstGeom prst="roundRect">
             <a:avLst>
-              <a:gd name="adj" fmla="val 7481"/>
+              <a:gd name="adj" fmla="val 8696"/>
             </a:avLst>
           </a:prstGeom>
           <a:solidFill>
@@ -10022,8 +10022,8 @@
         </p:nvSpPr>
         <p:spPr>
           <a:xfrm>
-            <a:off x="7799832" y="4330598"/>
-            <a:ext cx="3145536" cy="256032"/>
+            <a:off x="7708392" y="4517136"/>
+            <a:ext cx="3282696" cy="228600"/>
           </a:xfrm>
           <a:prstGeom prst="rect">
             <a:avLst/>
@@ -10039,7 +10039,7 @@
               <a:buNone/>
             </a:pPr>
             <a:r>
-              <a:rPr lang="en-US" sz="1300" b="1" dirty="0">
+              <a:rPr lang="en-US" sz="1220" b="1" dirty="0">
                 <a:solidFill>
                   <a:srgbClr val="0068B7"/>
                 </a:solidFill>
@@ -10049,7 +10049,7 @@
               </a:rPr>
               <a:t>Next action</a:t>
             </a:r>
-            <a:endParaRPr lang="en-US" sz="1300" dirty="0"/>
+            <a:endParaRPr lang="en-US" sz="1220" dirty="0"/>
           </a:p>
         </p:txBody>
       </p:sp>
@@ -10061,8 +10061,8 @@
         </p:nvSpPr>
         <p:spPr>
           <a:xfrm>
-            <a:off x="7799832" y="4659782"/>
-            <a:ext cx="3145536" cy="899770"/>
+            <a:off x="7708392" y="4828032"/>
+            <a:ext cx="3282696" cy="749808"/>
           </a:xfrm>
           <a:prstGeom prst="rect">
             <a:avLst/>
@@ -10080,7 +10080,7 @@
               <a:buNone/>
             </a:pPr>
             <a:r>
-              <a:rPr lang="en-US" sz="1320" dirty="0">
+              <a:rPr lang="en-US" sz="1220" dirty="0">
                 <a:solidFill>
                   <a:srgbClr val="17364A"/>
                 </a:solidFill>
@@ -10088,9 +10088,9 @@
                 <a:ea typeface="Aptos" pitchFamily="34" charset="-122"/>
                 <a:cs typeface="Aptos" pitchFamily="34" charset="-120"/>
               </a:rPr>
-              <a:t>Use the assignment to test whether you can explain the concept, apply it to a realistic public health situation, and identify what would need review before the work moves forward.</a:t>
-            </a:r>
-            <a:endParaRPr lang="en-US" sz="1320" dirty="0"/>
+              <a:t>Use the assignment to test whether you can explain the concept, apply it to a.</a:t>
+            </a:r>
+            <a:endParaRPr lang="en-US" sz="1220" dirty="0"/>
           </a:p>
         </p:txBody>
       </p:sp>
@@ -10408,7 +10408,7 @@
                 <a:ea typeface="Aptos" pitchFamily="34" charset="-122"/>
                 <a:cs typeface="Aptos" pitchFamily="34" charset="-120"/>
               </a:rPr>
-              <a:t>• This module focuses on connecting AI projects to allowable costs, deliverables, reporting,.</a:t>
+              <a:t>• This module focuses on connecting AI projects to allowable costs,.</a:t>
             </a:r>
             <a:endParaRPr lang="en-US" sz="2100" dirty="0"/>
           </a:p>
@@ -10425,7 +10425,7 @@
                 <a:ea typeface="Aptos" pitchFamily="34" charset="-122"/>
                 <a:cs typeface="Aptos" pitchFamily="34" charset="-120"/>
               </a:rPr>
-              <a:t>• It is designed for public health staff who must translate responsible AI principles into.</a:t>
+              <a:t>• It is designed for public health staff who must translate responsible AI.</a:t>
             </a:r>
             <a:endParaRPr lang="en-US" sz="2100" dirty="0"/>
           </a:p>
@@ -10442,7 +10442,7 @@
                 <a:ea typeface="Aptos" pitchFamily="34" charset="-122"/>
                 <a:cs typeface="Aptos" pitchFamily="34" charset="-120"/>
               </a:rPr>
-              <a:t>• The module helps learners move beyond general awareness by producing a practical artifact that.</a:t>
+              <a:t>• The module helps learners move beyond general awareness by producing a.</a:t>
             </a:r>
             <a:endParaRPr lang="en-US" sz="2100" dirty="0"/>
           </a:p>
@@ -10483,8 +10483,8 @@
         </p:nvSpPr>
         <p:spPr>
           <a:xfrm>
-            <a:off x="8074152" y="1563624"/>
-            <a:ext cx="2825496" cy="256032"/>
+            <a:off x="8074152" y="1545336"/>
+            <a:ext cx="2825496" cy="228600"/>
           </a:xfrm>
           <a:prstGeom prst="rect">
             <a:avLst/>
@@ -10500,7 +10500,7 @@
               <a:buNone/>
             </a:pPr>
             <a:r>
-              <a:rPr lang="en-US" sz="1300" b="1" dirty="0">
+              <a:rPr lang="en-US" sz="1220" b="1" dirty="0">
                 <a:solidFill>
                   <a:srgbClr val="0068B7"/>
                 </a:solidFill>
@@ -10510,7 +10510,7 @@
               </a:rPr>
               <a:t>Module details</a:t>
             </a:r>
-            <a:endParaRPr lang="en-US" sz="1300" dirty="0"/>
+            <a:endParaRPr lang="en-US" sz="1220" dirty="0"/>
           </a:p>
         </p:txBody>
       </p:sp>
@@ -10522,8 +10522,8 @@
         </p:nvSpPr>
         <p:spPr>
           <a:xfrm>
-            <a:off x="8074152" y="1892808"/>
-            <a:ext cx="2825496" cy="1353312"/>
+            <a:off x="8074152" y="1856232"/>
+            <a:ext cx="2825496" cy="1408176"/>
           </a:xfrm>
           <a:prstGeom prst="rect">
             <a:avLst/>
@@ -10541,7 +10541,7 @@
               <a:buNone/>
             </a:pPr>
             <a:r>
-              <a:rPr lang="en-US" sz="1320" dirty="0">
+              <a:rPr lang="en-US" sz="1220" dirty="0">
                 <a:solidFill>
                   <a:srgbClr val="17364A"/>
                 </a:solidFill>
@@ -10549,9 +10549,9 @@
                 <a:ea typeface="Aptos" pitchFamily="34" charset="-122"/>
                 <a:cs typeface="Aptos" pitchFamily="34" charset="-120"/>
               </a:rPr>
-              <a:t>Level: intermediate/practitioner Primary track: Program Management Role-Based Track Appears in tracks: program-management, public-health-executive-leadership, policy, governance-security</a:t>
-            </a:r>
-            <a:endParaRPr lang="en-US" sz="1320" dirty="0"/>
+              <a:t>Level: intermediate/practitioner Primary track: Program Management Role-Based.</a:t>
+            </a:r>
+            <a:endParaRPr lang="en-US" sz="1220" dirty="0"/>
           </a:p>
         </p:txBody>
       </p:sp>
@@ -10590,8 +10590,8 @@
         </p:nvSpPr>
         <p:spPr>
           <a:xfrm>
-            <a:off x="8074152" y="3822192"/>
-            <a:ext cx="2825496" cy="256032"/>
+            <a:off x="8074152" y="3803904"/>
+            <a:ext cx="2825496" cy="228600"/>
           </a:xfrm>
           <a:prstGeom prst="rect">
             <a:avLst/>
@@ -10607,7 +10607,7 @@
               <a:buNone/>
             </a:pPr>
             <a:r>
-              <a:rPr lang="en-US" sz="1300" b="1" dirty="0">
+              <a:rPr lang="en-US" sz="1220" b="1" dirty="0">
                 <a:solidFill>
                   <a:srgbClr val="0068B7"/>
                 </a:solidFill>
@@ -10617,7 +10617,7 @@
               </a:rPr>
               <a:t>Learning sequence</a:t>
             </a:r>
-            <a:endParaRPr lang="en-US" sz="1300" dirty="0"/>
+            <a:endParaRPr lang="en-US" sz="1220" dirty="0"/>
           </a:p>
         </p:txBody>
       </p:sp>
@@ -10629,8 +10629,8 @@
         </p:nvSpPr>
         <p:spPr>
           <a:xfrm>
-            <a:off x="8092440" y="4187952"/>
-            <a:ext cx="2770632" cy="1033272"/>
+            <a:off x="8092440" y="4133088"/>
+            <a:ext cx="2770632" cy="1124712"/>
           </a:xfrm>
           <a:prstGeom prst="rect">
             <a:avLst/>
@@ -10648,7 +10648,7 @@
               <a:buNone/>
             </a:pPr>
             <a:r>
-              <a:rPr lang="en-US" sz="1220" dirty="0">
+              <a:rPr lang="en-US" sz="1140" dirty="0">
                 <a:solidFill>
                   <a:srgbClr val="17364A"/>
                 </a:solidFill>
@@ -10658,14 +10658,14 @@
               </a:rPr>
               <a:t>Read the module for shared vocabulary and context.</a:t>
             </a:r>
-            <a:endParaRPr lang="en-US" sz="1220" dirty="0"/>
-          </a:p>
-          <a:p>
-            <a:pPr indent="0" marL="0">
-              <a:buNone/>
-            </a:pPr>
-            <a:r>
-              <a:rPr lang="en-US" sz="1220" dirty="0">
+            <a:endParaRPr lang="en-US" sz="1140" dirty="0"/>
+          </a:p>
+          <a:p>
+            <a:pPr indent="0" marL="0">
+              <a:buNone/>
+            </a:pPr>
+            <a:r>
+              <a:rPr lang="en-US" sz="1140" dirty="0">
                 <a:solidFill>
                   <a:srgbClr val="17364A"/>
                 </a:solidFill>
@@ -10673,16 +10673,16 @@
                 <a:ea typeface="Aptos" pitchFamily="34" charset="-122"/>
                 <a:cs typeface="Aptos" pitchFamily="34" charset="-120"/>
               </a:rPr>
-              <a:t>Complete the practical exercise to apply the concept.</a:t>
-            </a:r>
-            <a:endParaRPr lang="en-US" sz="1220" dirty="0"/>
-          </a:p>
-          <a:p>
-            <a:pPr indent="0" marL="0">
-              <a:buNone/>
-            </a:pPr>
-            <a:r>
-              <a:rPr lang="en-US" sz="1220" dirty="0">
+              <a:t>Complete the practical exercise to apply the.</a:t>
+            </a:r>
+            <a:endParaRPr lang="en-US" sz="1140" dirty="0"/>
+          </a:p>
+          <a:p>
+            <a:pPr indent="0" marL="0">
+              <a:buNone/>
+            </a:pPr>
+            <a:r>
+              <a:rPr lang="en-US" sz="1140" dirty="0">
                 <a:solidFill>
                   <a:srgbClr val="17364A"/>
                 </a:solidFill>
@@ -10692,7 +10692,7 @@
               </a:rPr>
               <a:t>Use the notes and references for deeper review.</a:t>
             </a:r>
-            <a:endParaRPr lang="en-US" sz="1220" dirty="0"/>
+            <a:endParaRPr lang="en-US" sz="1140" dirty="0"/>
           </a:p>
         </p:txBody>
       </p:sp>
@@ -10983,8 +10983,8 @@
         </p:nvSpPr>
         <p:spPr>
           <a:xfrm>
-            <a:off x="868680" y="1508760"/>
-            <a:ext cx="6309360" cy="4160520"/>
+            <a:off x="822960" y="1463040"/>
+            <a:ext cx="6565392" cy="4343400"/>
           </a:xfrm>
           <a:prstGeom prst="rect">
             <a:avLst/>
@@ -11002,7 +11002,7 @@
               <a:buNone/>
             </a:pPr>
             <a:r>
-              <a:rPr lang="en-US" sz="2100" dirty="0">
+              <a:rPr lang="en-US" sz="1920" dirty="0">
                 <a:solidFill>
                   <a:srgbClr val="003A63"/>
                 </a:solidFill>
@@ -11010,16 +11010,16 @@
                 <a:ea typeface="Aptos" pitchFamily="34" charset="-122"/>
                 <a:cs typeface="Aptos" pitchFamily="34" charset="-120"/>
               </a:rPr>
-              <a:t>• 1. What is the strongest evidence that grant and funding management for ai projects has been.</a:t>
-            </a:r>
-            <a:endParaRPr lang="en-US" sz="2100" dirty="0"/>
-          </a:p>
-          <a:p>
-            <a:pPr indent="0" marL="0">
-              <a:buNone/>
-            </a:pPr>
-            <a:r>
-              <a:rPr lang="en-US" sz="2100" dirty="0">
+              <a:t>• 1. What is the strongest evidence that grant and funding management for ai.</a:t>
+            </a:r>
+            <a:endParaRPr lang="en-US" sz="1920" dirty="0"/>
+          </a:p>
+          <a:p>
+            <a:pPr indent="0" marL="0">
+              <a:buNone/>
+            </a:pPr>
+            <a:r>
+              <a:rPr lang="en-US" sz="1920" dirty="0">
                 <a:solidFill>
                   <a:srgbClr val="003A63"/>
                 </a:solidFill>
@@ -11029,14 +11029,14 @@
               </a:rPr>
               <a:t>• 2. What is the best reason to assign an accountability owner?</a:t>
             </a:r>
-            <a:endParaRPr lang="en-US" sz="2100" dirty="0"/>
-          </a:p>
-          <a:p>
-            <a:pPr indent="0" marL="0">
-              <a:buNone/>
-            </a:pPr>
-            <a:r>
-              <a:rPr lang="en-US" sz="2100" dirty="0">
+            <a:endParaRPr lang="en-US" sz="1920" dirty="0"/>
+          </a:p>
+          <a:p>
+            <a:pPr indent="0" marL="0">
+              <a:buNone/>
+            </a:pPr>
+            <a:r>
+              <a:rPr lang="en-US" sz="1920" dirty="0">
                 <a:solidFill>
                   <a:srgbClr val="003A63"/>
                 </a:solidFill>
@@ -11046,7 +11046,7 @@
               </a:rPr>
               <a:t>• 3. When should an AI-supported workflow be escalated for review?</a:t>
             </a:r>
-            <a:endParaRPr lang="en-US" sz="2100" dirty="0"/>
+            <a:endParaRPr lang="en-US" sz="1920" dirty="0"/>
           </a:p>
         </p:txBody>
       </p:sp>
@@ -11058,12 +11058,12 @@
         </p:nvSpPr>
         <p:spPr>
           <a:xfrm>
-            <a:off x="7635240" y="1325880"/>
-            <a:ext cx="3474720" cy="1255471"/>
+            <a:off x="7543800" y="1325880"/>
+            <a:ext cx="3611880" cy="1261872"/>
           </a:xfrm>
           <a:prstGeom prst="roundRect">
             <a:avLst>
-              <a:gd name="adj" fmla="val 8740"/>
+              <a:gd name="adj" fmla="val 8696"/>
             </a:avLst>
           </a:prstGeom>
           <a:solidFill>
@@ -11085,8 +11085,8 @@
         </p:nvSpPr>
         <p:spPr>
           <a:xfrm>
-            <a:off x="7799832" y="1472184"/>
-            <a:ext cx="3145536" cy="256032"/>
+            <a:off x="7708392" y="1453896"/>
+            <a:ext cx="3282696" cy="228600"/>
           </a:xfrm>
           <a:prstGeom prst="rect">
             <a:avLst/>
@@ -11102,7 +11102,7 @@
               <a:buNone/>
             </a:pPr>
             <a:r>
-              <a:rPr lang="en-US" sz="1300" b="1" dirty="0">
+              <a:rPr lang="en-US" sz="1220" b="1" dirty="0">
                 <a:solidFill>
                   <a:srgbClr val="0068B7"/>
                 </a:solidFill>
@@ -11112,7 +11112,7 @@
               </a:rPr>
               <a:t>Implementation cue</a:t>
             </a:r>
-            <a:endParaRPr lang="en-US" sz="1300" dirty="0"/>
+            <a:endParaRPr lang="en-US" sz="1220" dirty="0"/>
           </a:p>
         </p:txBody>
       </p:sp>
@@ -11124,8 +11124,8 @@
         </p:nvSpPr>
         <p:spPr>
           <a:xfrm>
-            <a:off x="7799832" y="1801368"/>
-            <a:ext cx="3145536" cy="688543"/>
+            <a:off x="7708392" y="1764792"/>
+            <a:ext cx="3282696" cy="749808"/>
           </a:xfrm>
           <a:prstGeom prst="rect">
             <a:avLst/>
@@ -11143,7 +11143,7 @@
               <a:buNone/>
             </a:pPr>
             <a:r>
-              <a:rPr lang="en-US" sz="1320" dirty="0">
+              <a:rPr lang="en-US" sz="1220" dirty="0">
                 <a:solidFill>
                   <a:srgbClr val="17364A"/>
                 </a:solidFill>
@@ -11151,9 +11151,9 @@
                 <a:ea typeface="Aptos" pitchFamily="34" charset="-122"/>
                 <a:cs typeface="Aptos" pitchFamily="34" charset="-120"/>
               </a:rPr>
-              <a:t>1. What is the strongest evidence that grant and funding management for ai projects has been applied.</a:t>
-            </a:r>
-            <a:endParaRPr lang="en-US" sz="1320" dirty="0"/>
+              <a:t>1. What is the strongest evidence that grant and funding management for ai.</a:t>
+            </a:r>
+            <a:endParaRPr lang="en-US" sz="1220" dirty="0"/>
           </a:p>
         </p:txBody>
       </p:sp>
@@ -11165,12 +11165,12 @@
         </p:nvSpPr>
         <p:spPr>
           <a:xfrm>
-            <a:off x="7635240" y="2718511"/>
-            <a:ext cx="3474720" cy="1328623"/>
+            <a:off x="7543800" y="2724912"/>
+            <a:ext cx="3611880" cy="1527048"/>
           </a:xfrm>
           <a:prstGeom prst="roundRect">
             <a:avLst>
-              <a:gd name="adj" fmla="val 8259"/>
+              <a:gd name="adj" fmla="val 7186"/>
             </a:avLst>
           </a:prstGeom>
           <a:solidFill>
@@ -11192,8 +11192,8 @@
         </p:nvSpPr>
         <p:spPr>
           <a:xfrm>
-            <a:off x="7799832" y="2864815"/>
-            <a:ext cx="3145536" cy="256032"/>
+            <a:off x="7708392" y="2852928"/>
+            <a:ext cx="3282696" cy="228600"/>
           </a:xfrm>
           <a:prstGeom prst="rect">
             <a:avLst/>
@@ -11209,7 +11209,7 @@
               <a:buNone/>
             </a:pPr>
             <a:r>
-              <a:rPr lang="en-US" sz="1300" b="1" dirty="0">
+              <a:rPr lang="en-US" sz="1220" b="1" dirty="0">
                 <a:solidFill>
                   <a:srgbClr val="0068B7"/>
                 </a:solidFill>
@@ -11219,7 +11219,7 @@
               </a:rPr>
               <a:t>Concept checkpoints</a:t>
             </a:r>
-            <a:endParaRPr lang="en-US" sz="1300" dirty="0"/>
+            <a:endParaRPr lang="en-US" sz="1220" dirty="0"/>
           </a:p>
         </p:txBody>
       </p:sp>
@@ -11231,8 +11231,8 @@
         </p:nvSpPr>
         <p:spPr>
           <a:xfrm>
-            <a:off x="7818120" y="3230575"/>
-            <a:ext cx="3090672" cy="670255"/>
+            <a:off x="7726680" y="3182112"/>
+            <a:ext cx="3227832" cy="960120"/>
           </a:xfrm>
           <a:prstGeom prst="rect">
             <a:avLst/>
@@ -11250,7 +11250,7 @@
               <a:buNone/>
             </a:pPr>
             <a:r>
-              <a:rPr lang="en-US" sz="1220" dirty="0">
+              <a:rPr lang="en-US" sz="1140" dirty="0">
                 <a:solidFill>
                   <a:srgbClr val="17364A"/>
                 </a:solidFill>
@@ -11260,14 +11260,14 @@
               </a:rPr>
               <a:t>1.</a:t>
             </a:r>
-            <a:endParaRPr lang="en-US" sz="1220" dirty="0"/>
-          </a:p>
-          <a:p>
-            <a:pPr indent="0" marL="0">
-              <a:buNone/>
-            </a:pPr>
-            <a:r>
-              <a:rPr lang="en-US" sz="1220" dirty="0">
+            <a:endParaRPr lang="en-US" sz="1140" dirty="0"/>
+          </a:p>
+          <a:p>
+            <a:pPr indent="0" marL="0">
+              <a:buNone/>
+            </a:pPr>
+            <a:r>
+              <a:rPr lang="en-US" sz="1140" dirty="0">
                 <a:solidFill>
                   <a:srgbClr val="17364A"/>
                 </a:solidFill>
@@ -11275,16 +11275,16 @@
                 <a:ea typeface="Aptos" pitchFamily="34" charset="-122"/>
                 <a:cs typeface="Aptos" pitchFamily="34" charset="-120"/>
               </a:rPr>
-              <a:t>What is the strongest evidence that grant and funding management.</a:t>
-            </a:r>
-            <a:endParaRPr lang="en-US" sz="1220" dirty="0"/>
-          </a:p>
-          <a:p>
-            <a:pPr indent="0" marL="0">
-              <a:buNone/>
-            </a:pPr>
-            <a:r>
-              <a:rPr lang="en-US" sz="1220" dirty="0">
+              <a:t>What is the strongest evidence that grant and.</a:t>
+            </a:r>
+            <a:endParaRPr lang="en-US" sz="1140" dirty="0"/>
+          </a:p>
+          <a:p>
+            <a:pPr indent="0" marL="0">
+              <a:buNone/>
+            </a:pPr>
+            <a:r>
+              <a:rPr lang="en-US" sz="1140" dirty="0">
                 <a:solidFill>
                   <a:srgbClr val="17364A"/>
                 </a:solidFill>
@@ -11294,7 +11294,7 @@
               </a:rPr>
               <a:t>2.</a:t>
             </a:r>
-            <a:endParaRPr lang="en-US" sz="1220" dirty="0"/>
+            <a:endParaRPr lang="en-US" sz="1140" dirty="0"/>
           </a:p>
         </p:txBody>
       </p:sp>
@@ -11306,12 +11306,12 @@
         </p:nvSpPr>
         <p:spPr>
           <a:xfrm>
-            <a:off x="7635240" y="4184294"/>
-            <a:ext cx="3474720" cy="1466698"/>
+            <a:off x="7543800" y="4389120"/>
+            <a:ext cx="3611880" cy="1261872"/>
           </a:xfrm>
           <a:prstGeom prst="roundRect">
             <a:avLst>
-              <a:gd name="adj" fmla="val 7481"/>
+              <a:gd name="adj" fmla="val 8696"/>
             </a:avLst>
           </a:prstGeom>
           <a:solidFill>
@@ -11333,8 +11333,8 @@
         </p:nvSpPr>
         <p:spPr>
           <a:xfrm>
-            <a:off x="7799832" y="4330598"/>
-            <a:ext cx="3145536" cy="256032"/>
+            <a:off x="7708392" y="4517136"/>
+            <a:ext cx="3282696" cy="228600"/>
           </a:xfrm>
           <a:prstGeom prst="rect">
             <a:avLst/>
@@ -11350,7 +11350,7 @@
               <a:buNone/>
             </a:pPr>
             <a:r>
-              <a:rPr lang="en-US" sz="1300" b="1" dirty="0">
+              <a:rPr lang="en-US" sz="1220" b="1" dirty="0">
                 <a:solidFill>
                   <a:srgbClr val="0068B7"/>
                 </a:solidFill>
@@ -11360,7 +11360,7 @@
               </a:rPr>
               <a:t>Next action</a:t>
             </a:r>
-            <a:endParaRPr lang="en-US" sz="1300" dirty="0"/>
+            <a:endParaRPr lang="en-US" sz="1220" dirty="0"/>
           </a:p>
         </p:txBody>
       </p:sp>
@@ -11372,8 +11372,8 @@
         </p:nvSpPr>
         <p:spPr>
           <a:xfrm>
-            <a:off x="7799832" y="4659782"/>
-            <a:ext cx="3145536" cy="899770"/>
+            <a:off x="7708392" y="4828032"/>
+            <a:ext cx="3282696" cy="749808"/>
           </a:xfrm>
           <a:prstGeom prst="rect">
             <a:avLst/>
@@ -11391,7 +11391,7 @@
               <a:buNone/>
             </a:pPr>
             <a:r>
-              <a:rPr lang="en-US" sz="1320" dirty="0">
+              <a:rPr lang="en-US" sz="1220" dirty="0">
                 <a:solidFill>
                   <a:srgbClr val="17364A"/>
                 </a:solidFill>
@@ -11399,9 +11399,9 @@
                 <a:ea typeface="Aptos" pitchFamily="34" charset="-122"/>
                 <a:cs typeface="Aptos" pitchFamily="34" charset="-120"/>
               </a:rPr>
-              <a:t>Use the assignment to test whether you can explain the concept, apply it to a realistic public health situation, and identify what would need review before the work moves forward.</a:t>
-            </a:r>
-            <a:endParaRPr lang="en-US" sz="1320" dirty="0"/>
+              <a:t>Use the assignment to test whether you can explain the concept, apply it to a.</a:t>
+            </a:r>
+            <a:endParaRPr lang="en-US" sz="1220" dirty="0"/>
           </a:p>
         </p:txBody>
       </p:sp>
@@ -11692,8 +11692,8 @@
         </p:nvSpPr>
         <p:spPr>
           <a:xfrm>
-            <a:off x="868680" y="1508760"/>
-            <a:ext cx="6309360" cy="4160520"/>
+            <a:off x="822960" y="1463040"/>
+            <a:ext cx="6565392" cy="4343400"/>
           </a:xfrm>
           <a:prstGeom prst="rect">
             <a:avLst/>
@@ -11711,7 +11711,7 @@
               <a:buNone/>
             </a:pPr>
             <a:r>
-              <a:rPr lang="en-US" sz="2100" dirty="0">
+              <a:rPr lang="en-US" sz="1920" dirty="0">
                 <a:solidFill>
                   <a:srgbClr val="003A63"/>
                 </a:solidFill>
@@ -11721,14 +11721,14 @@
               </a:rPr>
               <a:t>• CDC Public Health Data Strategy and Data Modernization resources:.</a:t>
             </a:r>
-            <a:endParaRPr lang="en-US" sz="2100" dirty="0"/>
-          </a:p>
-          <a:p>
-            <a:pPr indent="0" marL="0">
-              <a:buNone/>
-            </a:pPr>
-            <a:r>
-              <a:rPr lang="en-US" sz="2100" dirty="0">
+            <a:endParaRPr lang="en-US" sz="1920" dirty="0"/>
+          </a:p>
+          <a:p>
+            <a:pPr indent="0" marL="0">
+              <a:buNone/>
+            </a:pPr>
+            <a:r>
+              <a:rPr lang="en-US" sz="1920" dirty="0">
                 <a:solidFill>
                   <a:srgbClr val="003A63"/>
                 </a:solidFill>
@@ -11736,16 +11736,16 @@
                 <a:ea typeface="Aptos" pitchFamily="34" charset="-122"/>
                 <a:cs typeface="Aptos" pitchFamily="34" charset="-120"/>
               </a:rPr>
-              <a:t>• NIST Artificial Intelligence Risk Management Framework and NIST Generative AI Profile:.</a:t>
-            </a:r>
-            <a:endParaRPr lang="en-US" sz="2100" dirty="0"/>
-          </a:p>
-          <a:p>
-            <a:pPr indent="0" marL="0">
-              <a:buNone/>
-            </a:pPr>
-            <a:r>
-              <a:rPr lang="en-US" sz="2100" dirty="0">
+              <a:t>• NIST Artificial Intelligence Risk Management Framework and NIST Generative.</a:t>
+            </a:r>
+            <a:endParaRPr lang="en-US" sz="1920" dirty="0"/>
+          </a:p>
+          <a:p>
+            <a:pPr indent="0" marL="0">
+              <a:buNone/>
+            </a:pPr>
+            <a:r>
+              <a:rPr lang="en-US" sz="1920" dirty="0">
                 <a:solidFill>
                   <a:srgbClr val="003A63"/>
                 </a:solidFill>
@@ -11755,7 +11755,7 @@
               </a:rPr>
               <a:t>• WHO Ethics and Governance of Artificial Intelligence for Health guidance:.</a:t>
             </a:r>
-            <a:endParaRPr lang="en-US" sz="2100" dirty="0"/>
+            <a:endParaRPr lang="en-US" sz="1920" dirty="0"/>
           </a:p>
         </p:txBody>
       </p:sp>
@@ -11767,12 +11767,12 @@
         </p:nvSpPr>
         <p:spPr>
           <a:xfrm>
-            <a:off x="7635240" y="1325880"/>
-            <a:ext cx="3474720" cy="1207008"/>
+            <a:off x="7543800" y="1325880"/>
+            <a:ext cx="3611880" cy="1261872"/>
           </a:xfrm>
           <a:prstGeom prst="roundRect">
             <a:avLst>
-              <a:gd name="adj" fmla="val 9091"/>
+              <a:gd name="adj" fmla="val 8696"/>
             </a:avLst>
           </a:prstGeom>
           <a:solidFill>
@@ -11794,8 +11794,8 @@
         </p:nvSpPr>
         <p:spPr>
           <a:xfrm>
-            <a:off x="7799832" y="1472184"/>
-            <a:ext cx="3145536" cy="256032"/>
+            <a:off x="7708392" y="1453896"/>
+            <a:ext cx="3282696" cy="228600"/>
           </a:xfrm>
           <a:prstGeom prst="rect">
             <a:avLst/>
@@ -11811,7 +11811,7 @@
               <a:buNone/>
             </a:pPr>
             <a:r>
-              <a:rPr lang="en-US" sz="1300" b="1" dirty="0">
+              <a:rPr lang="en-US" sz="1220" b="1" dirty="0">
                 <a:solidFill>
                   <a:srgbClr val="0068B7"/>
                 </a:solidFill>
@@ -11821,7 +11821,7 @@
               </a:rPr>
               <a:t>Implementation cue</a:t>
             </a:r>
-            <a:endParaRPr lang="en-US" sz="1300" dirty="0"/>
+            <a:endParaRPr lang="en-US" sz="1220" dirty="0"/>
           </a:p>
         </p:txBody>
       </p:sp>
@@ -11833,8 +11833,8 @@
         </p:nvSpPr>
         <p:spPr>
           <a:xfrm>
-            <a:off x="7799832" y="1801368"/>
-            <a:ext cx="3145536" cy="640080"/>
+            <a:off x="7708392" y="1764792"/>
+            <a:ext cx="3282696" cy="749808"/>
           </a:xfrm>
           <a:prstGeom prst="rect">
             <a:avLst/>
@@ -11852,7 +11852,7 @@
               <a:buNone/>
             </a:pPr>
             <a:r>
-              <a:rPr lang="en-US" sz="1320" dirty="0">
+              <a:rPr lang="en-US" sz="1220" dirty="0">
                 <a:solidFill>
                   <a:srgbClr val="17364A"/>
                 </a:solidFill>
@@ -11862,7 +11862,7 @@
               </a:rPr>
               <a:t>CDC Public Health Data Strategy and Data Modernization resources:.</a:t>
             </a:r>
-            <a:endParaRPr lang="en-US" sz="1320" dirty="0"/>
+            <a:endParaRPr lang="en-US" sz="1220" dirty="0"/>
           </a:p>
         </p:txBody>
       </p:sp>
@@ -11874,12 +11874,12 @@
         </p:nvSpPr>
         <p:spPr>
           <a:xfrm>
-            <a:off x="7635240" y="2670048"/>
-            <a:ext cx="3474720" cy="1377086"/>
+            <a:off x="7543800" y="2724912"/>
+            <a:ext cx="3611880" cy="1527048"/>
           </a:xfrm>
           <a:prstGeom prst="roundRect">
             <a:avLst>
-              <a:gd name="adj" fmla="val 7968"/>
+              <a:gd name="adj" fmla="val 7186"/>
             </a:avLst>
           </a:prstGeom>
           <a:solidFill>
@@ -11901,8 +11901,8 @@
         </p:nvSpPr>
         <p:spPr>
           <a:xfrm>
-            <a:off x="7799832" y="2816352"/>
-            <a:ext cx="3145536" cy="256032"/>
+            <a:off x="7708392" y="2852928"/>
+            <a:ext cx="3282696" cy="228600"/>
           </a:xfrm>
           <a:prstGeom prst="rect">
             <a:avLst/>
@@ -11918,7 +11918,7 @@
               <a:buNone/>
             </a:pPr>
             <a:r>
-              <a:rPr lang="en-US" sz="1300" b="1" dirty="0">
+              <a:rPr lang="en-US" sz="1220" b="1" dirty="0">
                 <a:solidFill>
                   <a:srgbClr val="0068B7"/>
                 </a:solidFill>
@@ -11928,7 +11928,7 @@
               </a:rPr>
               <a:t>Concept checkpoints</a:t>
             </a:r>
-            <a:endParaRPr lang="en-US" sz="1300" dirty="0"/>
+            <a:endParaRPr lang="en-US" sz="1220" dirty="0"/>
           </a:p>
         </p:txBody>
       </p:sp>
@@ -11940,8 +11940,8 @@
         </p:nvSpPr>
         <p:spPr>
           <a:xfrm>
-            <a:off x="7818120" y="3182112"/>
-            <a:ext cx="3090672" cy="718718"/>
+            <a:off x="7726680" y="3182112"/>
+            <a:ext cx="3227832" cy="960120"/>
           </a:xfrm>
           <a:prstGeom prst="rect">
             <a:avLst/>
@@ -11959,7 +11959,7 @@
               <a:buNone/>
             </a:pPr>
             <a:r>
-              <a:rPr lang="en-US" sz="1220" dirty="0">
+              <a:rPr lang="en-US" sz="1140" dirty="0">
                 <a:solidFill>
                   <a:srgbClr val="17364A"/>
                 </a:solidFill>
@@ -11969,14 +11969,14 @@
               </a:rPr>
               <a:t>OWASP Top 10 for Large Language Model Applications:.</a:t>
             </a:r>
-            <a:endParaRPr lang="en-US" sz="1220" dirty="0"/>
-          </a:p>
-          <a:p>
-            <a:pPr indent="0" marL="0">
-              <a:buNone/>
-            </a:pPr>
-            <a:r>
-              <a:rPr lang="en-US" sz="1220" dirty="0">
+            <a:endParaRPr lang="en-US" sz="1140" dirty="0"/>
+          </a:p>
+          <a:p>
+            <a:pPr indent="0" marL="0">
+              <a:buNone/>
+            </a:pPr>
+            <a:r>
+              <a:rPr lang="en-US" sz="1140" dirty="0">
                 <a:solidFill>
                   <a:srgbClr val="17364A"/>
                 </a:solidFill>
@@ -11984,9 +11984,9 @@
                 <a:ea typeface="Aptos" pitchFamily="34" charset="-122"/>
                 <a:cs typeface="Aptos" pitchFamily="34" charset="-120"/>
               </a:rPr>
-              <a:t>ONC health IT, interoperability, and information blocking.</a:t>
-            </a:r>
-            <a:endParaRPr lang="en-US" sz="1220" dirty="0"/>
+              <a:t>ONC health IT, interoperability, and information.</a:t>
+            </a:r>
+            <a:endParaRPr lang="en-US" sz="1140" dirty="0"/>
           </a:p>
         </p:txBody>
       </p:sp>
@@ -11998,12 +11998,12 @@
         </p:nvSpPr>
         <p:spPr>
           <a:xfrm>
-            <a:off x="7635240" y="4184294"/>
-            <a:ext cx="3474720" cy="1466698"/>
+            <a:off x="7543800" y="4389120"/>
+            <a:ext cx="3611880" cy="1261872"/>
           </a:xfrm>
           <a:prstGeom prst="roundRect">
             <a:avLst>
-              <a:gd name="adj" fmla="val 7481"/>
+              <a:gd name="adj" fmla="val 8696"/>
             </a:avLst>
           </a:prstGeom>
           <a:solidFill>
@@ -12025,8 +12025,8 @@
         </p:nvSpPr>
         <p:spPr>
           <a:xfrm>
-            <a:off x="7799832" y="4330598"/>
-            <a:ext cx="3145536" cy="256032"/>
+            <a:off x="7708392" y="4517136"/>
+            <a:ext cx="3282696" cy="228600"/>
           </a:xfrm>
           <a:prstGeom prst="rect">
             <a:avLst/>
@@ -12042,7 +12042,7 @@
               <a:buNone/>
             </a:pPr>
             <a:r>
-              <a:rPr lang="en-US" sz="1300" b="1" dirty="0">
+              <a:rPr lang="en-US" sz="1220" b="1" dirty="0">
                 <a:solidFill>
                   <a:srgbClr val="0068B7"/>
                 </a:solidFill>
@@ -12052,7 +12052,7 @@
               </a:rPr>
               <a:t>Next action</a:t>
             </a:r>
-            <a:endParaRPr lang="en-US" sz="1300" dirty="0"/>
+            <a:endParaRPr lang="en-US" sz="1220" dirty="0"/>
           </a:p>
         </p:txBody>
       </p:sp>
@@ -12064,8 +12064,8 @@
         </p:nvSpPr>
         <p:spPr>
           <a:xfrm>
-            <a:off x="7799832" y="4659782"/>
-            <a:ext cx="3145536" cy="899770"/>
+            <a:off x="7708392" y="4828032"/>
+            <a:ext cx="3282696" cy="749808"/>
           </a:xfrm>
           <a:prstGeom prst="rect">
             <a:avLst/>
@@ -12083,7 +12083,7 @@
               <a:buNone/>
             </a:pPr>
             <a:r>
-              <a:rPr lang="en-US" sz="1320" dirty="0">
+              <a:rPr lang="en-US" sz="1220" dirty="0">
                 <a:solidFill>
                   <a:srgbClr val="17364A"/>
                 </a:solidFill>
@@ -12091,9 +12091,9 @@
                 <a:ea typeface="Aptos" pitchFamily="34" charset="-122"/>
                 <a:cs typeface="Aptos" pitchFamily="34" charset="-120"/>
               </a:rPr>
-              <a:t>Use the concept to clarify workflow changes, dependencies, staffing, procurement requirements, training needs, and implementation checkpoints.</a:t>
-            </a:r>
-            <a:endParaRPr lang="en-US" sz="1320" dirty="0"/>
+              <a:t>Use the concept to clarify workflow changes, dependencies, staffing, procurement.</a:t>
+            </a:r>
+            <a:endParaRPr lang="en-US" sz="1220" dirty="0"/>
           </a:p>
         </p:txBody>
       </p:sp>
@@ -12384,8 +12384,8 @@
         </p:nvSpPr>
         <p:spPr>
           <a:xfrm>
-            <a:off x="868680" y="1508760"/>
-            <a:ext cx="6309360" cy="4160520"/>
+            <a:off x="822960" y="1463040"/>
+            <a:ext cx="6565392" cy="4343400"/>
           </a:xfrm>
           <a:prstGeom prst="rect">
             <a:avLst/>
@@ -12403,7 +12403,7 @@
               <a:buNone/>
             </a:pPr>
             <a:r>
-              <a:rPr lang="en-US" sz="2100" dirty="0">
+              <a:rPr lang="en-US" sz="1920" dirty="0">
                 <a:solidFill>
                   <a:srgbClr val="003A63"/>
                 </a:solidFill>
@@ -12411,16 +12411,16 @@
                 <a:ea typeface="Aptos" pitchFamily="34" charset="-122"/>
                 <a:cs typeface="Aptos" pitchFamily="34" charset="-120"/>
               </a:rPr>
-              <a:t>• Agency policies for privacy, public records, cybersecurity, procurement, civil rights,.</a:t>
-            </a:r>
-            <a:endParaRPr lang="en-US" sz="2100" dirty="0"/>
-          </a:p>
-          <a:p>
-            <a:pPr indent="0" marL="0">
-              <a:buNone/>
-            </a:pPr>
-            <a:r>
-              <a:rPr lang="en-US" sz="2100" dirty="0">
+              <a:t>• Agency policies for privacy, public records, cybersecurity, procurement,.</a:t>
+            </a:r>
+            <a:endParaRPr lang="en-US" sz="1920" dirty="0"/>
+          </a:p>
+          <a:p>
+            <a:pPr indent="0" marL="0">
+              <a:buNone/>
+            </a:pPr>
+            <a:r>
+              <a:rPr lang="en-US" sz="1920" dirty="0">
                 <a:solidFill>
                   <a:srgbClr val="003A63"/>
                 </a:solidFill>
@@ -12430,14 +12430,14 @@
               </a:rPr>
               <a:t>• Appendix. Common Source Base Used Across Modules</a:t>
             </a:r>
-            <a:endParaRPr lang="en-US" sz="2100" dirty="0"/>
-          </a:p>
-          <a:p>
-            <a:pPr indent="0" marL="0">
-              <a:buNone/>
-            </a:pPr>
-            <a:r>
-              <a:rPr lang="en-US" sz="2100" dirty="0">
+            <a:endParaRPr lang="en-US" sz="1920" dirty="0"/>
+          </a:p>
+          <a:p>
+            <a:pPr indent="0" marL="0">
+              <a:buNone/>
+            </a:pPr>
+            <a:r>
+              <a:rPr lang="en-US" sz="1920" dirty="0">
                 <a:solidFill>
                   <a:srgbClr val="003A63"/>
                 </a:solidFill>
@@ -12447,7 +12447,7 @@
               </a:rPr>
               <a:t>• CDC Public Health Data Strategy and CDC Data Modernization resources.:.</a:t>
             </a:r>
-            <a:endParaRPr lang="en-US" sz="2100" dirty="0"/>
+            <a:endParaRPr lang="en-US" sz="1920" dirty="0"/>
           </a:p>
         </p:txBody>
       </p:sp>
@@ -12459,12 +12459,12 @@
         </p:nvSpPr>
         <p:spPr>
           <a:xfrm>
-            <a:off x="7635240" y="1325880"/>
-            <a:ext cx="3474720" cy="1255471"/>
+            <a:off x="7543800" y="1325880"/>
+            <a:ext cx="3611880" cy="1261872"/>
           </a:xfrm>
           <a:prstGeom prst="roundRect">
             <a:avLst>
-              <a:gd name="adj" fmla="val 8740"/>
+              <a:gd name="adj" fmla="val 8696"/>
             </a:avLst>
           </a:prstGeom>
           <a:solidFill>
@@ -12486,8 +12486,8 @@
         </p:nvSpPr>
         <p:spPr>
           <a:xfrm>
-            <a:off x="7799832" y="1472184"/>
-            <a:ext cx="3145536" cy="256032"/>
+            <a:off x="7708392" y="1453896"/>
+            <a:ext cx="3282696" cy="228600"/>
           </a:xfrm>
           <a:prstGeom prst="rect">
             <a:avLst/>
@@ -12503,7 +12503,7 @@
               <a:buNone/>
             </a:pPr>
             <a:r>
-              <a:rPr lang="en-US" sz="1300" b="1" dirty="0">
+              <a:rPr lang="en-US" sz="1220" b="1" dirty="0">
                 <a:solidFill>
                   <a:srgbClr val="0068B7"/>
                 </a:solidFill>
@@ -12513,7 +12513,7 @@
               </a:rPr>
               <a:t>Implementation cue</a:t>
             </a:r>
-            <a:endParaRPr lang="en-US" sz="1300" dirty="0"/>
+            <a:endParaRPr lang="en-US" sz="1220" dirty="0"/>
           </a:p>
         </p:txBody>
       </p:sp>
@@ -12525,8 +12525,8 @@
         </p:nvSpPr>
         <p:spPr>
           <a:xfrm>
-            <a:off x="7799832" y="1801368"/>
-            <a:ext cx="3145536" cy="688543"/>
+            <a:off x="7708392" y="1764792"/>
+            <a:ext cx="3282696" cy="749808"/>
           </a:xfrm>
           <a:prstGeom prst="rect">
             <a:avLst/>
@@ -12544,7 +12544,7 @@
               <a:buNone/>
             </a:pPr>
             <a:r>
-              <a:rPr lang="en-US" sz="1320" dirty="0">
+              <a:rPr lang="en-US" sz="1220" dirty="0">
                 <a:solidFill>
                   <a:srgbClr val="17364A"/>
                 </a:solidFill>
@@ -12552,9 +12552,9 @@
                 <a:ea typeface="Aptos" pitchFamily="34" charset="-122"/>
                 <a:cs typeface="Aptos" pitchFamily="34" charset="-120"/>
               </a:rPr>
-              <a:t>Agency policies for privacy, public records, cybersecurity, procurement, civil rights, accessibility,.</a:t>
-            </a:r>
-            <a:endParaRPr lang="en-US" sz="1320" dirty="0"/>
+              <a:t>Agency policies for privacy, public records, cybersecurity, procurement, civil.</a:t>
+            </a:r>
+            <a:endParaRPr lang="en-US" sz="1220" dirty="0"/>
           </a:p>
         </p:txBody>
       </p:sp>
@@ -12566,12 +12566,12 @@
         </p:nvSpPr>
         <p:spPr>
           <a:xfrm>
-            <a:off x="7635240" y="2718511"/>
-            <a:ext cx="3474720" cy="1328623"/>
+            <a:off x="7543800" y="2724912"/>
+            <a:ext cx="3611880" cy="1527048"/>
           </a:xfrm>
           <a:prstGeom prst="roundRect">
             <a:avLst>
-              <a:gd name="adj" fmla="val 8259"/>
+              <a:gd name="adj" fmla="val 7186"/>
             </a:avLst>
           </a:prstGeom>
           <a:solidFill>
@@ -12593,8 +12593,8 @@
         </p:nvSpPr>
         <p:spPr>
           <a:xfrm>
-            <a:off x="7799832" y="2864815"/>
-            <a:ext cx="3145536" cy="256032"/>
+            <a:off x="7708392" y="2852928"/>
+            <a:ext cx="3282696" cy="228600"/>
           </a:xfrm>
           <a:prstGeom prst="rect">
             <a:avLst/>
@@ -12610,7 +12610,7 @@
               <a:buNone/>
             </a:pPr>
             <a:r>
-              <a:rPr lang="en-US" sz="1300" b="1" dirty="0">
+              <a:rPr lang="en-US" sz="1220" b="1" dirty="0">
                 <a:solidFill>
                   <a:srgbClr val="0068B7"/>
                 </a:solidFill>
@@ -12620,7 +12620,7 @@
               </a:rPr>
               <a:t>Concept checkpoints</a:t>
             </a:r>
-            <a:endParaRPr lang="en-US" sz="1300" dirty="0"/>
+            <a:endParaRPr lang="en-US" sz="1220" dirty="0"/>
           </a:p>
         </p:txBody>
       </p:sp>
@@ -12632,8 +12632,8 @@
         </p:nvSpPr>
         <p:spPr>
           <a:xfrm>
-            <a:off x="7818120" y="3230575"/>
-            <a:ext cx="3090672" cy="670255"/>
+            <a:off x="7726680" y="3182112"/>
+            <a:ext cx="3227832" cy="960120"/>
           </a:xfrm>
           <a:prstGeom prst="rect">
             <a:avLst/>
@@ -12651,7 +12651,7 @@
               <a:buNone/>
             </a:pPr>
             <a:r>
-              <a:rPr lang="en-US" sz="1220" dirty="0">
+              <a:rPr lang="en-US" sz="1140" dirty="0">
                 <a:solidFill>
                   <a:srgbClr val="17364A"/>
                 </a:solidFill>
@@ -12659,16 +12659,16 @@
                 <a:ea typeface="Aptos" pitchFamily="34" charset="-122"/>
                 <a:cs typeface="Aptos" pitchFamily="34" charset="-120"/>
               </a:rPr>
-              <a:t>Agency policies for privacy, public records, cybersecurity,.</a:t>
-            </a:r>
-            <a:endParaRPr lang="en-US" sz="1220" dirty="0"/>
-          </a:p>
-          <a:p>
-            <a:pPr indent="0" marL="0">
-              <a:buNone/>
-            </a:pPr>
-            <a:r>
-              <a:rPr lang="en-US" sz="1220" dirty="0">
+              <a:t>Agency policies for privacy, public records,.</a:t>
+            </a:r>
+            <a:endParaRPr lang="en-US" sz="1140" dirty="0"/>
+          </a:p>
+          <a:p>
+            <a:pPr indent="0" marL="0">
+              <a:buNone/>
+            </a:pPr>
+            <a:r>
+              <a:rPr lang="en-US" sz="1140" dirty="0">
                 <a:solidFill>
                   <a:srgbClr val="17364A"/>
                 </a:solidFill>
@@ -12678,14 +12678,14 @@
               </a:rPr>
               <a:t>Appendix.</a:t>
             </a:r>
-            <a:endParaRPr lang="en-US" sz="1220" dirty="0"/>
-          </a:p>
-          <a:p>
-            <a:pPr indent="0" marL="0">
-              <a:buNone/>
-            </a:pPr>
-            <a:r>
-              <a:rPr lang="en-US" sz="1220" dirty="0">
+            <a:endParaRPr lang="en-US" sz="1140" dirty="0"/>
+          </a:p>
+          <a:p>
+            <a:pPr indent="0" marL="0">
+              <a:buNone/>
+            </a:pPr>
+            <a:r>
+              <a:rPr lang="en-US" sz="1140" dirty="0">
                 <a:solidFill>
                   <a:srgbClr val="17364A"/>
                 </a:solidFill>
@@ -12695,7 +12695,7 @@
               </a:rPr>
               <a:t>Common Source Base Used Across Modules</a:t>
             </a:r>
-            <a:endParaRPr lang="en-US" sz="1220" dirty="0"/>
+            <a:endParaRPr lang="en-US" sz="1140" dirty="0"/>
           </a:p>
         </p:txBody>
       </p:sp>
@@ -12707,12 +12707,12 @@
         </p:nvSpPr>
         <p:spPr>
           <a:xfrm>
-            <a:off x="7635240" y="4184294"/>
-            <a:ext cx="3474720" cy="1466698"/>
+            <a:off x="7543800" y="4389120"/>
+            <a:ext cx="3611880" cy="1261872"/>
           </a:xfrm>
           <a:prstGeom prst="roundRect">
             <a:avLst>
-              <a:gd name="adj" fmla="val 7481"/>
+              <a:gd name="adj" fmla="val 8696"/>
             </a:avLst>
           </a:prstGeom>
           <a:solidFill>
@@ -12734,8 +12734,8 @@
         </p:nvSpPr>
         <p:spPr>
           <a:xfrm>
-            <a:off x="7799832" y="4330598"/>
-            <a:ext cx="3145536" cy="256032"/>
+            <a:off x="7708392" y="4517136"/>
+            <a:ext cx="3282696" cy="228600"/>
           </a:xfrm>
           <a:prstGeom prst="rect">
             <a:avLst/>
@@ -12751,7 +12751,7 @@
               <a:buNone/>
             </a:pPr>
             <a:r>
-              <a:rPr lang="en-US" sz="1300" b="1" dirty="0">
+              <a:rPr lang="en-US" sz="1220" b="1" dirty="0">
                 <a:solidFill>
                   <a:srgbClr val="0068B7"/>
                 </a:solidFill>
@@ -12761,7 +12761,7 @@
               </a:rPr>
               <a:t>Next action</a:t>
             </a:r>
-            <a:endParaRPr lang="en-US" sz="1300" dirty="0"/>
+            <a:endParaRPr lang="en-US" sz="1220" dirty="0"/>
           </a:p>
         </p:txBody>
       </p:sp>
@@ -12773,8 +12773,8 @@
         </p:nvSpPr>
         <p:spPr>
           <a:xfrm>
-            <a:off x="7799832" y="4659782"/>
-            <a:ext cx="3145536" cy="899770"/>
+            <a:off x="7708392" y="4828032"/>
+            <a:ext cx="3282696" cy="749808"/>
           </a:xfrm>
           <a:prstGeom prst="rect">
             <a:avLst/>
@@ -12792,7 +12792,7 @@
               <a:buNone/>
             </a:pPr>
             <a:r>
-              <a:rPr lang="en-US" sz="1320" dirty="0">
+              <a:rPr lang="en-US" sz="1220" dirty="0">
                 <a:solidFill>
                   <a:srgbClr val="17364A"/>
                 </a:solidFill>
@@ -12800,9 +12800,9 @@
                 <a:ea typeface="Aptos" pitchFamily="34" charset="-122"/>
                 <a:cs typeface="Aptos" pitchFamily="34" charset="-120"/>
               </a:rPr>
-              <a:t>Use the concept to clarify workflow changes, dependencies, staffing, procurement requirements, training needs, and implementation checkpoints.</a:t>
-            </a:r>
-            <a:endParaRPr lang="en-US" sz="1320" dirty="0"/>
+              <a:t>Use the concept to clarify workflow changes, dependencies, staffing, procurement.</a:t>
+            </a:r>
+            <a:endParaRPr lang="en-US" sz="1220" dirty="0"/>
           </a:p>
         </p:txBody>
       </p:sp>
@@ -13093,8 +13093,8 @@
         </p:nvSpPr>
         <p:spPr>
           <a:xfrm>
-            <a:off x="868680" y="1508760"/>
-            <a:ext cx="6309360" cy="4160520"/>
+            <a:off x="822960" y="1463040"/>
+            <a:ext cx="6565392" cy="4343400"/>
           </a:xfrm>
           <a:prstGeom prst="rect">
             <a:avLst/>
@@ -13112,7 +13112,7 @@
               <a:buNone/>
             </a:pPr>
             <a:r>
-              <a:rPr lang="en-US" sz="2100" dirty="0">
+              <a:rPr lang="en-US" sz="1920" dirty="0">
                 <a:solidFill>
                   <a:srgbClr val="003A63"/>
                 </a:solidFill>
@@ -13122,14 +13122,14 @@
               </a:rPr>
               <a:t>• ONC USCDI, health IT, interoperability, and information blocking resources.:.</a:t>
             </a:r>
-            <a:endParaRPr lang="en-US" sz="2100" dirty="0"/>
-          </a:p>
-          <a:p>
-            <a:pPr indent="0" marL="0">
-              <a:buNone/>
-            </a:pPr>
-            <a:r>
-              <a:rPr lang="en-US" sz="2100" dirty="0">
+            <a:endParaRPr lang="en-US" sz="1920" dirty="0"/>
+          </a:p>
+          <a:p>
+            <a:pPr indent="0" marL="0">
+              <a:buNone/>
+            </a:pPr>
+            <a:r>
+              <a:rPr lang="en-US" sz="1920" dirty="0">
                 <a:solidFill>
                   <a:srgbClr val="003A63"/>
                 </a:solidFill>
@@ -13137,16 +13137,16 @@
                 <a:ea typeface="Aptos" pitchFamily="34" charset="-122"/>
                 <a:cs typeface="Aptos" pitchFamily="34" charset="-120"/>
               </a:rPr>
-              <a:t>• NIST Artificial Intelligence Risk Management Framework, NIST Generative AI Profile, NIST.</a:t>
-            </a:r>
-            <a:endParaRPr lang="en-US" sz="2100" dirty="0"/>
-          </a:p>
-          <a:p>
-            <a:pPr indent="0" marL="0">
-              <a:buNone/>
-            </a:pPr>
-            <a:r>
-              <a:rPr lang="en-US" sz="2100" dirty="0">
+              <a:t>• NIST Artificial Intelligence Risk Management Framework, NIST Generative AI.</a:t>
+            </a:r>
+            <a:endParaRPr lang="en-US" sz="1920" dirty="0"/>
+          </a:p>
+          <a:p>
+            <a:pPr indent="0" marL="0">
+              <a:buNone/>
+            </a:pPr>
+            <a:r>
+              <a:rPr lang="en-US" sz="1920" dirty="0">
                 <a:solidFill>
                   <a:srgbClr val="003A63"/>
                 </a:solidFill>
@@ -13154,9 +13154,9 @@
                 <a:ea typeface="Aptos" pitchFamily="34" charset="-122"/>
                 <a:cs typeface="Aptos" pitchFamily="34" charset="-120"/>
               </a:rPr>
-              <a:t>• OWASP Top 10 for Large Language Model Applications and related secure AI application guidance.:.</a:t>
-            </a:r>
-            <a:endParaRPr lang="en-US" sz="2100" dirty="0"/>
+              <a:t>• OWASP Top 10 for Large Language Model Applications and related secure AI.</a:t>
+            </a:r>
+            <a:endParaRPr lang="en-US" sz="1920" dirty="0"/>
           </a:p>
         </p:txBody>
       </p:sp>
@@ -13168,12 +13168,12 @@
         </p:nvSpPr>
         <p:spPr>
           <a:xfrm>
-            <a:off x="7635240" y="1325880"/>
-            <a:ext cx="3474720" cy="1207008"/>
+            <a:off x="7543800" y="1325880"/>
+            <a:ext cx="3611880" cy="1261872"/>
           </a:xfrm>
           <a:prstGeom prst="roundRect">
             <a:avLst>
-              <a:gd name="adj" fmla="val 9091"/>
+              <a:gd name="adj" fmla="val 8696"/>
             </a:avLst>
           </a:prstGeom>
           <a:solidFill>
@@ -13195,8 +13195,8 @@
         </p:nvSpPr>
         <p:spPr>
           <a:xfrm>
-            <a:off x="7799832" y="1472184"/>
-            <a:ext cx="3145536" cy="256032"/>
+            <a:off x="7708392" y="1453896"/>
+            <a:ext cx="3282696" cy="228600"/>
           </a:xfrm>
           <a:prstGeom prst="rect">
             <a:avLst/>
@@ -13212,7 +13212,7 @@
               <a:buNone/>
             </a:pPr>
             <a:r>
-              <a:rPr lang="en-US" sz="1300" b="1" dirty="0">
+              <a:rPr lang="en-US" sz="1220" b="1" dirty="0">
                 <a:solidFill>
                   <a:srgbClr val="0068B7"/>
                 </a:solidFill>
@@ -13222,7 +13222,7 @@
               </a:rPr>
               <a:t>Implementation cue</a:t>
             </a:r>
-            <a:endParaRPr lang="en-US" sz="1300" dirty="0"/>
+            <a:endParaRPr lang="en-US" sz="1220" dirty="0"/>
           </a:p>
         </p:txBody>
       </p:sp>
@@ -13234,8 +13234,8 @@
         </p:nvSpPr>
         <p:spPr>
           <a:xfrm>
-            <a:off x="7799832" y="1801368"/>
-            <a:ext cx="3145536" cy="640080"/>
+            <a:off x="7708392" y="1764792"/>
+            <a:ext cx="3282696" cy="749808"/>
           </a:xfrm>
           <a:prstGeom prst="rect">
             <a:avLst/>
@@ -13253,7 +13253,7 @@
               <a:buNone/>
             </a:pPr>
             <a:r>
-              <a:rPr lang="en-US" sz="1320" dirty="0">
+              <a:rPr lang="en-US" sz="1220" dirty="0">
                 <a:solidFill>
                   <a:srgbClr val="17364A"/>
                 </a:solidFill>
@@ -13263,7 +13263,7 @@
               </a:rPr>
               <a:t>ONC USCDI, health IT, interoperability, and information blocking resources.:.</a:t>
             </a:r>
-            <a:endParaRPr lang="en-US" sz="1320" dirty="0"/>
+            <a:endParaRPr lang="en-US" sz="1220" dirty="0"/>
           </a:p>
         </p:txBody>
       </p:sp>
@@ -13275,12 +13275,12 @@
         </p:nvSpPr>
         <p:spPr>
           <a:xfrm>
-            <a:off x="7635240" y="2670048"/>
-            <a:ext cx="3474720" cy="1377086"/>
+            <a:off x="7543800" y="2724912"/>
+            <a:ext cx="3611880" cy="1527048"/>
           </a:xfrm>
           <a:prstGeom prst="roundRect">
             <a:avLst>
-              <a:gd name="adj" fmla="val 7968"/>
+              <a:gd name="adj" fmla="val 7186"/>
             </a:avLst>
           </a:prstGeom>
           <a:solidFill>
@@ -13302,8 +13302,8 @@
         </p:nvSpPr>
         <p:spPr>
           <a:xfrm>
-            <a:off x="7799832" y="2816352"/>
-            <a:ext cx="3145536" cy="256032"/>
+            <a:off x="7708392" y="2852928"/>
+            <a:ext cx="3282696" cy="228600"/>
           </a:xfrm>
           <a:prstGeom prst="rect">
             <a:avLst/>
@@ -13319,7 +13319,7 @@
               <a:buNone/>
             </a:pPr>
             <a:r>
-              <a:rPr lang="en-US" sz="1300" b="1" dirty="0">
+              <a:rPr lang="en-US" sz="1220" b="1" dirty="0">
                 <a:solidFill>
                   <a:srgbClr val="0068B7"/>
                 </a:solidFill>
@@ -13329,7 +13329,7 @@
               </a:rPr>
               <a:t>Concept checkpoints</a:t>
             </a:r>
-            <a:endParaRPr lang="en-US" sz="1300" dirty="0"/>
+            <a:endParaRPr lang="en-US" sz="1220" dirty="0"/>
           </a:p>
         </p:txBody>
       </p:sp>
@@ -13341,8 +13341,8 @@
         </p:nvSpPr>
         <p:spPr>
           <a:xfrm>
-            <a:off x="7818120" y="3182112"/>
-            <a:ext cx="3090672" cy="718718"/>
+            <a:off x="7726680" y="3182112"/>
+            <a:ext cx="3227832" cy="960120"/>
           </a:xfrm>
           <a:prstGeom prst="rect">
             <a:avLst/>
@@ -13360,7 +13360,7 @@
               <a:buNone/>
             </a:pPr>
             <a:r>
-              <a:rPr lang="en-US" sz="1220" dirty="0">
+              <a:rPr lang="en-US" sz="1140" dirty="0">
                 <a:solidFill>
                   <a:srgbClr val="17364A"/>
                 </a:solidFill>
@@ -13368,16 +13368,16 @@
                 <a:ea typeface="Aptos" pitchFamily="34" charset="-122"/>
                 <a:cs typeface="Aptos" pitchFamily="34" charset="-120"/>
               </a:rPr>
-              <a:t>NIST Artificial Intelligence Risk Management Framework, NIST.</a:t>
-            </a:r>
-            <a:endParaRPr lang="en-US" sz="1220" dirty="0"/>
-          </a:p>
-          <a:p>
-            <a:pPr indent="0" marL="0">
-              <a:buNone/>
-            </a:pPr>
-            <a:r>
-              <a:rPr lang="en-US" sz="1220" dirty="0">
+              <a:t>NIST Artificial Intelligence Risk Management.</a:t>
+            </a:r>
+            <a:endParaRPr lang="en-US" sz="1140" dirty="0"/>
+          </a:p>
+          <a:p>
+            <a:pPr indent="0" marL="0">
+              <a:buNone/>
+            </a:pPr>
+            <a:r>
+              <a:rPr lang="en-US" sz="1140" dirty="0">
                 <a:solidFill>
                   <a:srgbClr val="17364A"/>
                 </a:solidFill>
@@ -13385,16 +13385,16 @@
                 <a:ea typeface="Aptos" pitchFamily="34" charset="-122"/>
                 <a:cs typeface="Aptos" pitchFamily="34" charset="-120"/>
               </a:rPr>
-              <a:t>WHO ethics and governance guidance for artificial intelligence in.</a:t>
-            </a:r>
-            <a:endParaRPr lang="en-US" sz="1220" dirty="0"/>
-          </a:p>
-          <a:p>
-            <a:pPr indent="0" marL="0">
-              <a:buNone/>
-            </a:pPr>
-            <a:r>
-              <a:rPr lang="en-US" sz="1220" dirty="0">
+              <a:t>WHO ethics and governance guidance for artificial.</a:t>
+            </a:r>
+            <a:endParaRPr lang="en-US" sz="1140" dirty="0"/>
+          </a:p>
+          <a:p>
+            <a:pPr indent="0" marL="0">
+              <a:buNone/>
+            </a:pPr>
+            <a:r>
+              <a:rPr lang="en-US" sz="1140" dirty="0">
                 <a:solidFill>
                   <a:srgbClr val="17364A"/>
                 </a:solidFill>
@@ -13402,9 +13402,9 @@
                 <a:ea typeface="Aptos" pitchFamily="34" charset="-122"/>
                 <a:cs typeface="Aptos" pitchFamily="34" charset="-120"/>
               </a:rPr>
-              <a:t>Agency policies and procedures for privacy, public records,.</a:t>
-            </a:r>
-            <a:endParaRPr lang="en-US" sz="1220" dirty="0"/>
+              <a:t>Agency policies and procedures for privacy, public.</a:t>
+            </a:r>
+            <a:endParaRPr lang="en-US" sz="1140" dirty="0"/>
           </a:p>
         </p:txBody>
       </p:sp>
@@ -13416,12 +13416,12 @@
         </p:nvSpPr>
         <p:spPr>
           <a:xfrm>
-            <a:off x="7635240" y="4184294"/>
-            <a:ext cx="3474720" cy="1466698"/>
+            <a:off x="7543800" y="4389120"/>
+            <a:ext cx="3611880" cy="1261872"/>
           </a:xfrm>
           <a:prstGeom prst="roundRect">
             <a:avLst>
-              <a:gd name="adj" fmla="val 7481"/>
+              <a:gd name="adj" fmla="val 8696"/>
             </a:avLst>
           </a:prstGeom>
           <a:solidFill>
@@ -13443,8 +13443,8 @@
         </p:nvSpPr>
         <p:spPr>
           <a:xfrm>
-            <a:off x="7799832" y="4330598"/>
-            <a:ext cx="3145536" cy="256032"/>
+            <a:off x="7708392" y="4517136"/>
+            <a:ext cx="3282696" cy="228600"/>
           </a:xfrm>
           <a:prstGeom prst="rect">
             <a:avLst/>
@@ -13460,7 +13460,7 @@
               <a:buNone/>
             </a:pPr>
             <a:r>
-              <a:rPr lang="en-US" sz="1300" b="1" dirty="0">
+              <a:rPr lang="en-US" sz="1220" b="1" dirty="0">
                 <a:solidFill>
                   <a:srgbClr val="0068B7"/>
                 </a:solidFill>
@@ -13470,7 +13470,7 @@
               </a:rPr>
               <a:t>Next action</a:t>
             </a:r>
-            <a:endParaRPr lang="en-US" sz="1300" dirty="0"/>
+            <a:endParaRPr lang="en-US" sz="1220" dirty="0"/>
           </a:p>
         </p:txBody>
       </p:sp>
@@ -13482,8 +13482,8 @@
         </p:nvSpPr>
         <p:spPr>
           <a:xfrm>
-            <a:off x="7799832" y="4659782"/>
-            <a:ext cx="3145536" cy="899770"/>
+            <a:off x="7708392" y="4828032"/>
+            <a:ext cx="3282696" cy="749808"/>
           </a:xfrm>
           <a:prstGeom prst="rect">
             <a:avLst/>
@@ -13501,7 +13501,7 @@
               <a:buNone/>
             </a:pPr>
             <a:r>
-              <a:rPr lang="en-US" sz="1320" dirty="0">
+              <a:rPr lang="en-US" sz="1220" dirty="0">
                 <a:solidFill>
                   <a:srgbClr val="17364A"/>
                 </a:solidFill>
@@ -13509,9 +13509,9 @@
                 <a:ea typeface="Aptos" pitchFamily="34" charset="-122"/>
                 <a:cs typeface="Aptos" pitchFamily="34" charset="-120"/>
               </a:rPr>
-              <a:t>Use the concept to clarify workflow changes, dependencies, staffing, procurement requirements, training needs, and implementation checkpoints.</a:t>
-            </a:r>
-            <a:endParaRPr lang="en-US" sz="1320" dirty="0"/>
+              <a:t>Use the concept to clarify workflow changes, dependencies, staffing, procurement.</a:t>
+            </a:r>
+            <a:endParaRPr lang="en-US" sz="1220" dirty="0"/>
           </a:p>
         </p:txBody>
       </p:sp>
@@ -13829,7 +13829,7 @@
                 <a:ea typeface="Aptos" pitchFamily="34" charset="-122"/>
                 <a:cs typeface="Aptos" pitchFamily="34" charset="-120"/>
               </a:rPr>
-              <a:t>• Play 11: Build and Deploy AI Solutions - This lesson informs Play 11 by helping learners.</a:t>
+              <a:t>• Play 11: Build and Deploy AI Solutions - This lesson informs Play 11 by.</a:t>
             </a:r>
             <a:endParaRPr lang="en-US" sz="1900" dirty="0"/>
           </a:p>
@@ -13846,7 +13846,7 @@
                 <a:ea typeface="Aptos" pitchFamily="34" charset="-122"/>
                 <a:cs typeface="Aptos" pitchFamily="34" charset="-120"/>
               </a:rPr>
-              <a:t>• Play 2: Readiness Assessment - This lesson informs Play 2 by helping learners connect the.</a:t>
+              <a:t>• Play 2: Readiness Assessment - This lesson informs Play 2 by helping.</a:t>
             </a:r>
             <a:endParaRPr lang="en-US" sz="1900" dirty="0"/>
           </a:p>
@@ -13863,7 +13863,7 @@
                 <a:ea typeface="Aptos" pitchFamily="34" charset="-122"/>
                 <a:cs typeface="Aptos" pitchFamily="34" charset="-120"/>
               </a:rPr>
-              <a:t>• Play 3: Establish AI Governance - This lesson informs Play 3 by helping learners connect the.</a:t>
+              <a:t>• Play 3: Establish AI Governance - This lesson informs Play 3 by helping.</a:t>
             </a:r>
             <a:endParaRPr lang="en-US" sz="1900" dirty="0"/>
           </a:p>
@@ -13880,7 +13880,7 @@
                 <a:ea typeface="Aptos" pitchFamily="34" charset="-122"/>
                 <a:cs typeface="Aptos" pitchFamily="34" charset="-120"/>
               </a:rPr>
-              <a:t>• Play 1: Vision &amp; Guardrails - This lesson informs Play 1 by helping learners connect the.</a:t>
+              <a:t>• Play 1: Vision &amp; Guardrails - This lesson informs Play 1 by helping learners.</a:t>
             </a:r>
             <a:endParaRPr lang="en-US" sz="1900" dirty="0"/>
           </a:p>
@@ -13921,8 +13921,8 @@
         </p:nvSpPr>
         <p:spPr>
           <a:xfrm>
-            <a:off x="8211312" y="1563624"/>
-            <a:ext cx="2734056" cy="256032"/>
+            <a:off x="8211312" y="1545336"/>
+            <a:ext cx="2734056" cy="228600"/>
           </a:xfrm>
           <a:prstGeom prst="rect">
             <a:avLst/>
@@ -13938,7 +13938,7 @@
               <a:buNone/>
             </a:pPr>
             <a:r>
-              <a:rPr lang="en-US" sz="1300" b="1" dirty="0">
+              <a:rPr lang="en-US" sz="1220" b="1" dirty="0">
                 <a:solidFill>
                   <a:srgbClr val="0068B7"/>
                 </a:solidFill>
@@ -13948,7 +13948,7 @@
               </a:rPr>
               <a:t>Apply the lesson</a:t>
             </a:r>
-            <a:endParaRPr lang="en-US" sz="1300" dirty="0"/>
+            <a:endParaRPr lang="en-US" sz="1220" dirty="0"/>
           </a:p>
         </p:txBody>
       </p:sp>
@@ -13960,8 +13960,8 @@
         </p:nvSpPr>
         <p:spPr>
           <a:xfrm>
-            <a:off x="8211312" y="1892808"/>
-            <a:ext cx="2734056" cy="1536192"/>
+            <a:off x="8211312" y="1856232"/>
+            <a:ext cx="2734056" cy="1591056"/>
           </a:xfrm>
           <a:prstGeom prst="rect">
             <a:avLst/>
@@ -13979,7 +13979,7 @@
               <a:buNone/>
             </a:pPr>
             <a:r>
-              <a:rPr lang="en-US" sz="1320" dirty="0">
+              <a:rPr lang="en-US" sz="1220" dirty="0">
                 <a:solidFill>
                   <a:srgbClr val="17364A"/>
                 </a:solidFill>
@@ -13987,9 +13987,9 @@
                 <a:ea typeface="Aptos" pitchFamily="34" charset="-122"/>
                 <a:cs typeface="Aptos" pitchFamily="34" charset="-120"/>
               </a:rPr>
-              <a:t>Use the related plays to identify decisions, participants, timing, approvals, and documentation needed for responsible implementation.</a:t>
-            </a:r>
-            <a:endParaRPr lang="en-US" sz="1320" dirty="0"/>
+              <a:t>Use the related plays to identify decisions, participants, timing, approvals,.</a:t>
+            </a:r>
+            <a:endParaRPr lang="en-US" sz="1220" dirty="0"/>
           </a:p>
         </p:txBody>
       </p:sp>
@@ -14028,8 +14028,8 @@
         </p:nvSpPr>
         <p:spPr>
           <a:xfrm>
-            <a:off x="8211312" y="3941064"/>
-            <a:ext cx="2734056" cy="256032"/>
+            <a:off x="8211312" y="3922776"/>
+            <a:ext cx="2734056" cy="228600"/>
           </a:xfrm>
           <a:prstGeom prst="rect">
             <a:avLst/>
@@ -14045,7 +14045,7 @@
               <a:buNone/>
             </a:pPr>
             <a:r>
-              <a:rPr lang="en-US" sz="1300" b="1" dirty="0">
+              <a:rPr lang="en-US" sz="1220" b="1" dirty="0">
                 <a:solidFill>
                   <a:srgbClr val="0068B7"/>
                 </a:solidFill>
@@ -14055,7 +14055,7 @@
               </a:rPr>
               <a:t>Use the play links to</a:t>
             </a:r>
-            <a:endParaRPr lang="en-US" sz="1300" dirty="0"/>
+            <a:endParaRPr lang="en-US" sz="1220" dirty="0"/>
           </a:p>
         </p:txBody>
       </p:sp>
@@ -14067,8 +14067,8 @@
         </p:nvSpPr>
         <p:spPr>
           <a:xfrm>
-            <a:off x="8229600" y="4306824"/>
-            <a:ext cx="2679192" cy="941832"/>
+            <a:off x="8229600" y="4251960"/>
+            <a:ext cx="2679192" cy="1033272"/>
           </a:xfrm>
           <a:prstGeom prst="rect">
             <a:avLst/>
@@ -14086,7 +14086,7 @@
               <a:buNone/>
             </a:pPr>
             <a:r>
-              <a:rPr lang="en-US" sz="1220" dirty="0">
+              <a:rPr lang="en-US" sz="1140" dirty="0">
                 <a:solidFill>
                   <a:srgbClr val="17364A"/>
                 </a:solidFill>
@@ -14096,14 +14096,14 @@
               </a:rPr>
               <a:t>Locate the decision point in the playbook sequence.</a:t>
             </a:r>
-            <a:endParaRPr lang="en-US" sz="1220" dirty="0"/>
-          </a:p>
-          <a:p>
-            <a:pPr indent="0" marL="0">
-              <a:buNone/>
-            </a:pPr>
-            <a:r>
-              <a:rPr lang="en-US" sz="1220" dirty="0">
+            <a:endParaRPr lang="en-US" sz="1140" dirty="0"/>
+          </a:p>
+          <a:p>
+            <a:pPr indent="0" marL="0">
+              <a:buNone/>
+            </a:pPr>
+            <a:r>
+              <a:rPr lang="en-US" sz="1140" dirty="0">
                 <a:solidFill>
                   <a:srgbClr val="17364A"/>
                 </a:solidFill>
@@ -14113,14 +14113,14 @@
               </a:rPr>
               <a:t>Identify who should participate in the work.</a:t>
             </a:r>
-            <a:endParaRPr lang="en-US" sz="1220" dirty="0"/>
-          </a:p>
-          <a:p>
-            <a:pPr indent="0" marL="0">
-              <a:buNone/>
-            </a:pPr>
-            <a:r>
-              <a:rPr lang="en-US" sz="1220" dirty="0">
+            <a:endParaRPr lang="en-US" sz="1140" dirty="0"/>
+          </a:p>
+          <a:p>
+            <a:pPr indent="0" marL="0">
+              <a:buNone/>
+            </a:pPr>
+            <a:r>
+              <a:rPr lang="en-US" sz="1140" dirty="0">
                 <a:solidFill>
                   <a:srgbClr val="17364A"/>
                 </a:solidFill>
@@ -14128,9 +14128,9 @@
                 <a:ea typeface="Aptos" pitchFamily="34" charset="-122"/>
                 <a:cs typeface="Aptos" pitchFamily="34" charset="-120"/>
               </a:rPr>
-              <a:t>Document the review, approval, or implementation step.</a:t>
-            </a:r>
-            <a:endParaRPr lang="en-US" sz="1220" dirty="0"/>
+              <a:t>Document the review, approval, or implementation.</a:t>
+            </a:r>
+            <a:endParaRPr lang="en-US" sz="1140" dirty="0"/>
           </a:p>
         </p:txBody>
       </p:sp>
@@ -14448,7 +14448,7 @@
                 <a:ea typeface="Aptos" pitchFamily="34" charset="-122"/>
                 <a:cs typeface="Aptos" pitchFamily="34" charset="-120"/>
               </a:rPr>
-              <a:t>• Tool 4: AI Policy Landscape Scan (Worksheet) - Use AI Policy Landscape Scan to translate this.</a:t>
+              <a:t>• Tool 4: AI Policy Landscape Scan (Worksheet) - Use AI Policy Landscape Scan.</a:t>
             </a:r>
             <a:endParaRPr lang="en-US" sz="1850" dirty="0"/>
           </a:p>
@@ -14465,7 +14465,7 @@
                 <a:ea typeface="Aptos" pitchFamily="34" charset="-122"/>
                 <a:cs typeface="Aptos" pitchFamily="34" charset="-120"/>
               </a:rPr>
-              <a:t>• Tool 5: AI Environmental and Resource Impact Review (Checklist) - Use this tool to complete or.</a:t>
+              <a:t>• Tool 5: AI Environmental and Resource Impact Review (Checklist) - Use this.</a:t>
             </a:r>
             <a:endParaRPr lang="en-US" sz="1850" dirty="0"/>
           </a:p>
@@ -14482,7 +14482,7 @@
                 <a:ea typeface="Aptos" pitchFamily="34" charset="-122"/>
                 <a:cs typeface="Aptos" pitchFamily="34" charset="-120"/>
               </a:rPr>
-              <a:t>• Tool 6: Human-Centered AI Decision Rule Checklist (Checklist) - Use Human-Centered AI Decision.</a:t>
+              <a:t>• Tool 6: Human-Centered AI Decision Rule Checklist (Checklist) - Use.</a:t>
             </a:r>
             <a:endParaRPr lang="en-US" sz="1850" dirty="0"/>
           </a:p>
@@ -14499,7 +14499,7 @@
                 <a:ea typeface="Aptos" pitchFamily="34" charset="-122"/>
                 <a:cs typeface="Aptos" pitchFamily="34" charset="-120"/>
               </a:rPr>
-              <a:t>• Tool 8: AI Project Charter (Planning) - Use AI Project Charter to translate this lesson into a.</a:t>
+              <a:t>• Tool 8: AI Project Charter (Planning) - Use AI Project Charter to translate.</a:t>
             </a:r>
             <a:endParaRPr lang="en-US" sz="1850" dirty="0"/>
           </a:p>
@@ -14540,8 +14540,8 @@
         </p:nvSpPr>
         <p:spPr>
           <a:xfrm>
-            <a:off x="8211312" y="1563624"/>
-            <a:ext cx="2734056" cy="256032"/>
+            <a:off x="8211312" y="1545336"/>
+            <a:ext cx="2734056" cy="228600"/>
           </a:xfrm>
           <a:prstGeom prst="rect">
             <a:avLst/>
@@ -14557,7 +14557,7 @@
               <a:buNone/>
             </a:pPr>
             <a:r>
-              <a:rPr lang="en-US" sz="1300" b="1" dirty="0">
+              <a:rPr lang="en-US" sz="1220" b="1" dirty="0">
                 <a:solidFill>
                   <a:srgbClr val="0068B7"/>
                 </a:solidFill>
@@ -14567,7 +14567,7 @@
               </a:rPr>
               <a:t>Use the tools</a:t>
             </a:r>
-            <a:endParaRPr lang="en-US" sz="1300" dirty="0"/>
+            <a:endParaRPr lang="en-US" sz="1220" dirty="0"/>
           </a:p>
         </p:txBody>
       </p:sp>
@@ -14579,8 +14579,8 @@
         </p:nvSpPr>
         <p:spPr>
           <a:xfrm>
-            <a:off x="8211312" y="1892808"/>
-            <a:ext cx="2734056" cy="1536192"/>
+            <a:off x="8211312" y="1856232"/>
+            <a:ext cx="2734056" cy="1591056"/>
           </a:xfrm>
           <a:prstGeom prst="rect">
             <a:avLst/>
@@ -14598,7 +14598,7 @@
               <a:buNone/>
             </a:pPr>
             <a:r>
-              <a:rPr lang="en-US" sz="1320" dirty="0">
+              <a:rPr lang="en-US" sz="1220" dirty="0">
                 <a:solidFill>
                   <a:srgbClr val="17364A"/>
                 </a:solidFill>
@@ -14606,9 +14606,9 @@
                 <a:ea typeface="Aptos" pitchFamily="34" charset="-122"/>
                 <a:cs typeface="Aptos" pitchFamily="34" charset="-120"/>
               </a:rPr>
-              <a:t>Use linked tools when your department needs a structured worksheet, template, checklist, review process, or documentation artifact.</a:t>
-            </a:r>
-            <a:endParaRPr lang="en-US" sz="1320" dirty="0"/>
+              <a:t>Use linked tools when your department needs a structured worksheet, template,.</a:t>
+            </a:r>
+            <a:endParaRPr lang="en-US" sz="1220" dirty="0"/>
           </a:p>
         </p:txBody>
       </p:sp>
@@ -14647,8 +14647,8 @@
         </p:nvSpPr>
         <p:spPr>
           <a:xfrm>
-            <a:off x="8211312" y="3941064"/>
-            <a:ext cx="2734056" cy="256032"/>
+            <a:off x="8211312" y="3922776"/>
+            <a:ext cx="2734056" cy="228600"/>
           </a:xfrm>
           <a:prstGeom prst="rect">
             <a:avLst/>
@@ -14664,7 +14664,7 @@
               <a:buNone/>
             </a:pPr>
             <a:r>
-              <a:rPr lang="en-US" sz="1300" b="1" dirty="0">
+              <a:rPr lang="en-US" sz="1220" b="1" dirty="0">
                 <a:solidFill>
                   <a:srgbClr val="0068B7"/>
                 </a:solidFill>
@@ -14674,7 +14674,7 @@
               </a:rPr>
               <a:t>Tool selection cues</a:t>
             </a:r>
-            <a:endParaRPr lang="en-US" sz="1300" dirty="0"/>
+            <a:endParaRPr lang="en-US" sz="1220" dirty="0"/>
           </a:p>
         </p:txBody>
       </p:sp>
@@ -14686,8 +14686,8 @@
         </p:nvSpPr>
         <p:spPr>
           <a:xfrm>
-            <a:off x="8229600" y="4306824"/>
-            <a:ext cx="2679192" cy="941832"/>
+            <a:off x="8229600" y="4251960"/>
+            <a:ext cx="2679192" cy="1033272"/>
           </a:xfrm>
           <a:prstGeom prst="rect">
             <a:avLst/>
@@ -14705,7 +14705,7 @@
               <a:buNone/>
             </a:pPr>
             <a:r>
-              <a:rPr lang="en-US" sz="1220" dirty="0">
+              <a:rPr lang="en-US" sz="1140" dirty="0">
                 <a:solidFill>
                   <a:srgbClr val="17364A"/>
                 </a:solidFill>
@@ -14715,14 +14715,14 @@
               </a:rPr>
               <a:t>Use a tool when no comparable local process exists.</a:t>
             </a:r>
-            <a:endParaRPr lang="en-US" sz="1220" dirty="0"/>
-          </a:p>
-          <a:p>
-            <a:pPr indent="0" marL="0">
-              <a:buNone/>
-            </a:pPr>
-            <a:r>
-              <a:rPr lang="en-US" sz="1220" dirty="0">
+            <a:endParaRPr lang="en-US" sz="1140" dirty="0"/>
+          </a:p>
+          <a:p>
+            <a:pPr indent="0" marL="0">
+              <a:buNone/>
+            </a:pPr>
+            <a:r>
+              <a:rPr lang="en-US" sz="1140" dirty="0">
                 <a:solidFill>
                   <a:srgbClr val="17364A"/>
                 </a:solidFill>
@@ -14730,16 +14730,16 @@
                 <a:ea typeface="Aptos" pitchFamily="34" charset="-122"/>
                 <a:cs typeface="Aptos" pitchFamily="34" charset="-120"/>
               </a:rPr>
-              <a:t>Adapt existing department templates when they already fit the.</a:t>
-            </a:r>
-            <a:endParaRPr lang="en-US" sz="1220" dirty="0"/>
-          </a:p>
-          <a:p>
-            <a:pPr indent="0" marL="0">
-              <a:buNone/>
-            </a:pPr>
-            <a:r>
-              <a:rPr lang="en-US" sz="1220" dirty="0">
+              <a:t>Adapt existing department templates when they.</a:t>
+            </a:r>
+            <a:endParaRPr lang="en-US" sz="1140" dirty="0"/>
+          </a:p>
+          <a:p>
+            <a:pPr indent="0" marL="0">
+              <a:buNone/>
+            </a:pPr>
+            <a:r>
+              <a:rPr lang="en-US" sz="1140" dirty="0">
                 <a:solidFill>
                   <a:srgbClr val="17364A"/>
                 </a:solidFill>
@@ -14747,9 +14747,9 @@
                 <a:ea typeface="Aptos" pitchFamily="34" charset="-122"/>
                 <a:cs typeface="Aptos" pitchFamily="34" charset="-120"/>
               </a:rPr>
-              <a:t>Save the completed artifact as evidence of the decision.</a:t>
-            </a:r>
-            <a:endParaRPr lang="en-US" sz="1220" dirty="0"/>
+              <a:t>Save the completed artifact as evidence of the.</a:t>
+            </a:r>
+            <a:endParaRPr lang="en-US" sz="1140" dirty="0"/>
           </a:p>
         </p:txBody>
       </p:sp>
@@ -15040,8 +15040,8 @@
         </p:nvSpPr>
         <p:spPr>
           <a:xfrm>
-            <a:off x="868680" y="1508760"/>
-            <a:ext cx="6309360" cy="4160520"/>
+            <a:off x="822960" y="1463040"/>
+            <a:ext cx="6565392" cy="4343400"/>
           </a:xfrm>
           <a:prstGeom prst="rect">
             <a:avLst/>
@@ -15059,7 +15059,7 @@
               <a:buNone/>
             </a:pPr>
             <a:r>
-              <a:rPr lang="en-US" sz="2100" dirty="0">
+              <a:rPr lang="en-US" sz="1920" dirty="0">
                 <a:solidFill>
                   <a:srgbClr val="003A63"/>
                 </a:solidFill>
@@ -15067,16 +15067,16 @@
                 <a:ea typeface="Aptos" pitchFamily="34" charset="-122"/>
                 <a:cs typeface="Aptos" pitchFamily="34" charset="-120"/>
               </a:rPr>
-              <a:t>• Explain the purpose of grant and funding management for ai projects in public health AI.</a:t>
-            </a:r>
-            <a:endParaRPr lang="en-US" sz="2100" dirty="0"/>
-          </a:p>
-          <a:p>
-            <a:pPr indent="0" marL="0">
-              <a:buNone/>
-            </a:pPr>
-            <a:r>
-              <a:rPr lang="en-US" sz="2100" dirty="0">
+              <a:t>• Explain the purpose of grant and funding management for ai projects in.</a:t>
+            </a:r>
+            <a:endParaRPr lang="en-US" sz="1920" dirty="0"/>
+          </a:p>
+          <a:p>
+            <a:pPr indent="0" marL="0">
+              <a:buNone/>
+            </a:pPr>
+            <a:r>
+              <a:rPr lang="en-US" sz="1920" dirty="0">
                 <a:solidFill>
                   <a:srgbClr val="003A63"/>
                 </a:solidFill>
@@ -15086,14 +15086,14 @@
               </a:rPr>
               <a:t>• Identify the roles, decisions, risks, and documentation needed for the topic.</a:t>
             </a:r>
-            <a:endParaRPr lang="en-US" sz="2100" dirty="0"/>
-          </a:p>
-          <a:p>
-            <a:pPr indent="0" marL="0">
-              <a:buNone/>
-            </a:pPr>
-            <a:r>
-              <a:rPr lang="en-US" sz="2100" dirty="0">
+            <a:endParaRPr lang="en-US" sz="1920" dirty="0"/>
+          </a:p>
+          <a:p>
+            <a:pPr indent="0" marL="0">
+              <a:buNone/>
+            </a:pPr>
+            <a:r>
+              <a:rPr lang="en-US" sz="1920" dirty="0">
                 <a:solidFill>
                   <a:srgbClr val="003A63"/>
                 </a:solidFill>
@@ -15103,7 +15103,7 @@
               </a:rPr>
               <a:t>• Apply the topic to a real or realistic public health workflow or decision.</a:t>
             </a:r>
-            <a:endParaRPr lang="en-US" sz="2100" dirty="0"/>
+            <a:endParaRPr lang="en-US" sz="1920" dirty="0"/>
           </a:p>
         </p:txBody>
       </p:sp>
@@ -15115,12 +15115,12 @@
         </p:nvSpPr>
         <p:spPr>
           <a:xfrm>
-            <a:off x="7635240" y="1325880"/>
-            <a:ext cx="3474720" cy="1207008"/>
+            <a:off x="7543800" y="1325880"/>
+            <a:ext cx="3611880" cy="1261872"/>
           </a:xfrm>
           <a:prstGeom prst="roundRect">
             <a:avLst>
-              <a:gd name="adj" fmla="val 9091"/>
+              <a:gd name="adj" fmla="val 8696"/>
             </a:avLst>
           </a:prstGeom>
           <a:solidFill>
@@ -15142,8 +15142,8 @@
         </p:nvSpPr>
         <p:spPr>
           <a:xfrm>
-            <a:off x="7799832" y="1472184"/>
-            <a:ext cx="3145536" cy="256032"/>
+            <a:off x="7708392" y="1453896"/>
+            <a:ext cx="3282696" cy="228600"/>
           </a:xfrm>
           <a:prstGeom prst="rect">
             <a:avLst/>
@@ -15159,7 +15159,7 @@
               <a:buNone/>
             </a:pPr>
             <a:r>
-              <a:rPr lang="en-US" sz="1300" b="1" dirty="0">
+              <a:rPr lang="en-US" sz="1220" b="1" dirty="0">
                 <a:solidFill>
                   <a:srgbClr val="0068B7"/>
                 </a:solidFill>
@@ -15169,7 +15169,7 @@
               </a:rPr>
               <a:t>Implementation cue</a:t>
             </a:r>
-            <a:endParaRPr lang="en-US" sz="1300" dirty="0"/>
+            <a:endParaRPr lang="en-US" sz="1220" dirty="0"/>
           </a:p>
         </p:txBody>
       </p:sp>
@@ -15181,8 +15181,8 @@
         </p:nvSpPr>
         <p:spPr>
           <a:xfrm>
-            <a:off x="7799832" y="1801368"/>
-            <a:ext cx="3145536" cy="640080"/>
+            <a:off x="7708392" y="1764792"/>
+            <a:ext cx="3282696" cy="749808"/>
           </a:xfrm>
           <a:prstGeom prst="rect">
             <a:avLst/>
@@ -15200,7 +15200,7 @@
               <a:buNone/>
             </a:pPr>
             <a:r>
-              <a:rPr lang="en-US" sz="1320" dirty="0">
+              <a:rPr lang="en-US" sz="1220" dirty="0">
                 <a:solidFill>
                   <a:srgbClr val="17364A"/>
                 </a:solidFill>
@@ -15208,9 +15208,9 @@
                 <a:ea typeface="Aptos" pitchFamily="34" charset="-122"/>
                 <a:cs typeface="Aptos" pitchFamily="34" charset="-120"/>
               </a:rPr>
-              <a:t>Explain the purpose of grant and funding management for ai projects in public health AI.</a:t>
-            </a:r>
-            <a:endParaRPr lang="en-US" sz="1320" dirty="0"/>
+              <a:t>Explain the purpose of grant and funding management for ai projects in public.</a:t>
+            </a:r>
+            <a:endParaRPr lang="en-US" sz="1220" dirty="0"/>
           </a:p>
         </p:txBody>
       </p:sp>
@@ -15222,12 +15222,12 @@
         </p:nvSpPr>
         <p:spPr>
           <a:xfrm>
-            <a:off x="7635240" y="2670048"/>
-            <a:ext cx="3474720" cy="1377086"/>
+            <a:off x="7543800" y="2724912"/>
+            <a:ext cx="3611880" cy="1527048"/>
           </a:xfrm>
           <a:prstGeom prst="roundRect">
             <a:avLst>
-              <a:gd name="adj" fmla="val 7968"/>
+              <a:gd name="adj" fmla="val 7186"/>
             </a:avLst>
           </a:prstGeom>
           <a:solidFill>
@@ -15249,8 +15249,8 @@
         </p:nvSpPr>
         <p:spPr>
           <a:xfrm>
-            <a:off x="7799832" y="2816352"/>
-            <a:ext cx="3145536" cy="256032"/>
+            <a:off x="7708392" y="2852928"/>
+            <a:ext cx="3282696" cy="228600"/>
           </a:xfrm>
           <a:prstGeom prst="rect">
             <a:avLst/>
@@ -15266,7 +15266,7 @@
               <a:buNone/>
             </a:pPr>
             <a:r>
-              <a:rPr lang="en-US" sz="1300" b="1" dirty="0">
+              <a:rPr lang="en-US" sz="1220" b="1" dirty="0">
                 <a:solidFill>
                   <a:srgbClr val="0068B7"/>
                 </a:solidFill>
@@ -15276,7 +15276,7 @@
               </a:rPr>
               <a:t>Concept checkpoints</a:t>
             </a:r>
-            <a:endParaRPr lang="en-US" sz="1300" dirty="0"/>
+            <a:endParaRPr lang="en-US" sz="1220" dirty="0"/>
           </a:p>
         </p:txBody>
       </p:sp>
@@ -15288,8 +15288,8 @@
         </p:nvSpPr>
         <p:spPr>
           <a:xfrm>
-            <a:off x="7818120" y="3182112"/>
-            <a:ext cx="3090672" cy="718718"/>
+            <a:off x="7726680" y="3182112"/>
+            <a:ext cx="3227832" cy="960120"/>
           </a:xfrm>
           <a:prstGeom prst="rect">
             <a:avLst/>
@@ -15307,7 +15307,7 @@
               <a:buNone/>
             </a:pPr>
             <a:r>
-              <a:rPr lang="en-US" sz="1220" dirty="0">
+              <a:rPr lang="en-US" sz="1140" dirty="0">
                 <a:solidFill>
                   <a:srgbClr val="17364A"/>
                 </a:solidFill>
@@ -15315,16 +15315,16 @@
                 <a:ea typeface="Aptos" pitchFamily="34" charset="-122"/>
                 <a:cs typeface="Aptos" pitchFamily="34" charset="-120"/>
               </a:rPr>
-              <a:t>Recognize equity, privacy, security, legal, operational, and.</a:t>
-            </a:r>
-            <a:endParaRPr lang="en-US" sz="1220" dirty="0"/>
-          </a:p>
-          <a:p>
-            <a:pPr indent="0" marL="0">
-              <a:buNone/>
-            </a:pPr>
-            <a:r>
-              <a:rPr lang="en-US" sz="1220" dirty="0">
+              <a:t>Recognize equity, privacy, security, legal,.</a:t>
+            </a:r>
+            <a:endParaRPr lang="en-US" sz="1140" dirty="0"/>
+          </a:p>
+          <a:p>
+            <a:pPr indent="0" marL="0">
+              <a:buNone/>
+            </a:pPr>
+            <a:r>
+              <a:rPr lang="en-US" sz="1140" dirty="0">
                 <a:solidFill>
                   <a:srgbClr val="17364A"/>
                 </a:solidFill>
@@ -15332,9 +15332,9 @@
                 <a:ea typeface="Aptos" pitchFamily="34" charset="-122"/>
                 <a:cs typeface="Aptos" pitchFamily="34" charset="-120"/>
               </a:rPr>
-              <a:t>Produce a practical artifact that supports readiness, governance,.</a:t>
-            </a:r>
-            <a:endParaRPr lang="en-US" sz="1220" dirty="0"/>
+              <a:t>Produce a practical artifact that supports.</a:t>
+            </a:r>
+            <a:endParaRPr lang="en-US" sz="1140" dirty="0"/>
           </a:p>
         </p:txBody>
       </p:sp>
@@ -15346,12 +15346,12 @@
         </p:nvSpPr>
         <p:spPr>
           <a:xfrm>
-            <a:off x="7635240" y="4184294"/>
-            <a:ext cx="3474720" cy="1466698"/>
+            <a:off x="7543800" y="4389120"/>
+            <a:ext cx="3611880" cy="1261872"/>
           </a:xfrm>
           <a:prstGeom prst="roundRect">
             <a:avLst>
-              <a:gd name="adj" fmla="val 7481"/>
+              <a:gd name="adj" fmla="val 8696"/>
             </a:avLst>
           </a:prstGeom>
           <a:solidFill>
@@ -15373,8 +15373,8 @@
         </p:nvSpPr>
         <p:spPr>
           <a:xfrm>
-            <a:off x="7799832" y="4330598"/>
-            <a:ext cx="3145536" cy="256032"/>
+            <a:off x="7708392" y="4517136"/>
+            <a:ext cx="3282696" cy="228600"/>
           </a:xfrm>
           <a:prstGeom prst="rect">
             <a:avLst/>
@@ -15390,7 +15390,7 @@
               <a:buNone/>
             </a:pPr>
             <a:r>
-              <a:rPr lang="en-US" sz="1300" b="1" dirty="0">
+              <a:rPr lang="en-US" sz="1220" b="1" dirty="0">
                 <a:solidFill>
                   <a:srgbClr val="0068B7"/>
                 </a:solidFill>
@@ -15400,7 +15400,7 @@
               </a:rPr>
               <a:t>Next action</a:t>
             </a:r>
-            <a:endParaRPr lang="en-US" sz="1300" dirty="0"/>
+            <a:endParaRPr lang="en-US" sz="1220" dirty="0"/>
           </a:p>
         </p:txBody>
       </p:sp>
@@ -15412,8 +15412,8 @@
         </p:nvSpPr>
         <p:spPr>
           <a:xfrm>
-            <a:off x="7799832" y="4659782"/>
-            <a:ext cx="3145536" cy="899770"/>
+            <a:off x="7708392" y="4828032"/>
+            <a:ext cx="3282696" cy="749808"/>
           </a:xfrm>
           <a:prstGeom prst="rect">
             <a:avLst/>
@@ -15431,7 +15431,7 @@
               <a:buNone/>
             </a:pPr>
             <a:r>
-              <a:rPr lang="en-US" sz="1320" dirty="0">
+              <a:rPr lang="en-US" sz="1220" dirty="0">
                 <a:solidFill>
                   <a:srgbClr val="17364A"/>
                 </a:solidFill>
@@ -15439,9 +15439,9 @@
                 <a:ea typeface="Aptos" pitchFamily="34" charset="-122"/>
                 <a:cs typeface="Aptos" pitchFamily="34" charset="-120"/>
               </a:rPr>
-              <a:t>Use the assignment to test whether you can explain the concept, apply it to a realistic public health situation, and identify what would need review before the work moves forward.</a:t>
-            </a:r>
-            <a:endParaRPr lang="en-US" sz="1320" dirty="0"/>
+              <a:t>Use the assignment to test whether you can explain the concept, apply it to a.</a:t>
+            </a:r>
+            <a:endParaRPr lang="en-US" sz="1220" dirty="0"/>
           </a:p>
         </p:txBody>
       </p:sp>
@@ -15732,8 +15732,8 @@
         </p:nvSpPr>
         <p:spPr>
           <a:xfrm>
-            <a:off x="868680" y="1508760"/>
-            <a:ext cx="6309360" cy="4160520"/>
+            <a:off x="822960" y="1463040"/>
+            <a:ext cx="6565392" cy="4343400"/>
           </a:xfrm>
           <a:prstGeom prst="rect">
             <a:avLst/>
@@ -15751,7 +15751,7 @@
               <a:buNone/>
             </a:pPr>
             <a:r>
-              <a:rPr lang="en-US" sz="2100" dirty="0">
+              <a:rPr lang="en-US" sz="1920" dirty="0">
                 <a:solidFill>
                   <a:srgbClr val="003A63"/>
                 </a:solidFill>
@@ -15759,16 +15759,16 @@
                 <a:ea typeface="Aptos" pitchFamily="34" charset="-122"/>
                 <a:cs typeface="Aptos" pitchFamily="34" charset="-120"/>
               </a:rPr>
-              <a:t>• This module focuses on connecting AI projects to allowable costs, deliverables, reporting,.</a:t>
-            </a:r>
-            <a:endParaRPr lang="en-US" sz="2100" dirty="0"/>
-          </a:p>
-          <a:p>
-            <a:pPr indent="0" marL="0">
-              <a:buNone/>
-            </a:pPr>
-            <a:r>
-              <a:rPr lang="en-US" sz="2100" dirty="0">
+              <a:t>• This module focuses on connecting AI projects to allowable costs,.</a:t>
+            </a:r>
+            <a:endParaRPr lang="en-US" sz="1920" dirty="0"/>
+          </a:p>
+          <a:p>
+            <a:pPr indent="0" marL="0">
+              <a:buNone/>
+            </a:pPr>
+            <a:r>
+              <a:rPr lang="en-US" sz="1920" dirty="0">
                 <a:solidFill>
                   <a:srgbClr val="003A63"/>
                 </a:solidFill>
@@ -15776,16 +15776,16 @@
                 <a:ea typeface="Aptos" pitchFamily="34" charset="-122"/>
                 <a:cs typeface="Aptos" pitchFamily="34" charset="-120"/>
               </a:rPr>
-              <a:t>• It is designed for public health staff who must translate responsible AI principles into.</a:t>
-            </a:r>
-            <a:endParaRPr lang="en-US" sz="2100" dirty="0"/>
-          </a:p>
-          <a:p>
-            <a:pPr indent="0" marL="0">
-              <a:buNone/>
-            </a:pPr>
-            <a:r>
-              <a:rPr lang="en-US" sz="2100" dirty="0">
+              <a:t>• It is designed for public health staff who must translate responsible AI.</a:t>
+            </a:r>
+            <a:endParaRPr lang="en-US" sz="1920" dirty="0"/>
+          </a:p>
+          <a:p>
+            <a:pPr indent="0" marL="0">
+              <a:buNone/>
+            </a:pPr>
+            <a:r>
+              <a:rPr lang="en-US" sz="1920" dirty="0">
                 <a:solidFill>
                   <a:srgbClr val="003A63"/>
                 </a:solidFill>
@@ -15793,9 +15793,9 @@
                 <a:ea typeface="Aptos" pitchFamily="34" charset="-122"/>
                 <a:cs typeface="Aptos" pitchFamily="34" charset="-120"/>
               </a:rPr>
-              <a:t>• The module helps learners move beyond general awareness by producing a practical artifact that.</a:t>
-            </a:r>
-            <a:endParaRPr lang="en-US" sz="2100" dirty="0"/>
+              <a:t>• The module helps learners move beyond general awareness by producing a.</a:t>
+            </a:r>
+            <a:endParaRPr lang="en-US" sz="1920" dirty="0"/>
           </a:p>
         </p:txBody>
       </p:sp>
@@ -15807,12 +15807,12 @@
         </p:nvSpPr>
         <p:spPr>
           <a:xfrm>
-            <a:off x="7635240" y="1325880"/>
-            <a:ext cx="3474720" cy="1255471"/>
+            <a:off x="7543800" y="1325880"/>
+            <a:ext cx="3611880" cy="1261872"/>
           </a:xfrm>
           <a:prstGeom prst="roundRect">
             <a:avLst>
-              <a:gd name="adj" fmla="val 8740"/>
+              <a:gd name="adj" fmla="val 8696"/>
             </a:avLst>
           </a:prstGeom>
           <a:solidFill>
@@ -15834,8 +15834,8 @@
         </p:nvSpPr>
         <p:spPr>
           <a:xfrm>
-            <a:off x="7799832" y="1472184"/>
-            <a:ext cx="3145536" cy="256032"/>
+            <a:off x="7708392" y="1453896"/>
+            <a:ext cx="3282696" cy="228600"/>
           </a:xfrm>
           <a:prstGeom prst="rect">
             <a:avLst/>
@@ -15851,7 +15851,7 @@
               <a:buNone/>
             </a:pPr>
             <a:r>
-              <a:rPr lang="en-US" sz="1300" b="1" dirty="0">
+              <a:rPr lang="en-US" sz="1220" b="1" dirty="0">
                 <a:solidFill>
                   <a:srgbClr val="0068B7"/>
                 </a:solidFill>
@@ -15861,7 +15861,7 @@
               </a:rPr>
               <a:t>Implementation cue</a:t>
             </a:r>
-            <a:endParaRPr lang="en-US" sz="1300" dirty="0"/>
+            <a:endParaRPr lang="en-US" sz="1220" dirty="0"/>
           </a:p>
         </p:txBody>
       </p:sp>
@@ -15873,8 +15873,8 @@
         </p:nvSpPr>
         <p:spPr>
           <a:xfrm>
-            <a:off x="7799832" y="1801368"/>
-            <a:ext cx="3145536" cy="688543"/>
+            <a:off x="7708392" y="1764792"/>
+            <a:ext cx="3282696" cy="749808"/>
           </a:xfrm>
           <a:prstGeom prst="rect">
             <a:avLst/>
@@ -15892,7 +15892,7 @@
               <a:buNone/>
             </a:pPr>
             <a:r>
-              <a:rPr lang="en-US" sz="1320" dirty="0">
+              <a:rPr lang="en-US" sz="1220" dirty="0">
                 <a:solidFill>
                   <a:srgbClr val="17364A"/>
                 </a:solidFill>
@@ -15900,9 +15900,9 @@
                 <a:ea typeface="Aptos" pitchFamily="34" charset="-122"/>
                 <a:cs typeface="Aptos" pitchFamily="34" charset="-120"/>
               </a:rPr>
-              <a:t>This module focuses on connecting AI projects to allowable costs, deliverables, reporting, performance.</a:t>
-            </a:r>
-            <a:endParaRPr lang="en-US" sz="1320" dirty="0"/>
+              <a:t>This module focuses on connecting AI projects to allowable costs, deliverables,.</a:t>
+            </a:r>
+            <a:endParaRPr lang="en-US" sz="1220" dirty="0"/>
           </a:p>
         </p:txBody>
       </p:sp>
@@ -15914,12 +15914,12 @@
         </p:nvSpPr>
         <p:spPr>
           <a:xfrm>
-            <a:off x="7635240" y="2718511"/>
-            <a:ext cx="3474720" cy="1328623"/>
+            <a:off x="7543800" y="2724912"/>
+            <a:ext cx="3611880" cy="1527048"/>
           </a:xfrm>
           <a:prstGeom prst="roundRect">
             <a:avLst>
-              <a:gd name="adj" fmla="val 8259"/>
+              <a:gd name="adj" fmla="val 7186"/>
             </a:avLst>
           </a:prstGeom>
           <a:solidFill>
@@ -15941,24 +15941,26 @@
         </p:nvSpPr>
         <p:spPr>
           <a:xfrm>
-            <a:off x="7799832" y="2846527"/>
-            <a:ext cx="3145536" cy="237744"/>
-          </a:xfrm>
-          <a:prstGeom prst="rect">
-            <a:avLst/>
-          </a:prstGeom>
-          <a:noFill/>
-          <a:ln/>
-        </p:spPr>
-        <p:txBody>
-          <a:bodyPr wrap="square" lIns="0" tIns="0" rIns="0" bIns="0" rtlCol="0" anchor="ctr"/>
-          <a:lstStyle/>
-          <a:p>
-            <a:pPr indent="0" marL="0">
-              <a:buNone/>
-            </a:pPr>
-            <a:r>
-              <a:rPr lang="en-US" sz="1250" b="1" dirty="0">
+            <a:off x="7708392" y="2852928"/>
+            <a:ext cx="3282696" cy="219456"/>
+          </a:xfrm>
+          <a:prstGeom prst="rect">
+            <a:avLst/>
+          </a:prstGeom>
+          <a:noFill/>
+          <a:ln/>
+        </p:spPr>
+        <p:txBody>
+          <a:bodyPr wrap="square" lIns="0" tIns="0" rIns="0" bIns="0" rtlCol="0" anchor="ctr">
+            <a:normAutofit/>
+          </a:bodyPr>
+          <a:lstStyle/>
+          <a:p>
+            <a:pPr indent="0" marL="0">
+              <a:buNone/>
+            </a:pPr>
+            <a:r>
+              <a:rPr lang="en-US" sz="1160" b="1" dirty="0">
                 <a:solidFill>
                   <a:srgbClr val="0068B7"/>
                 </a:solidFill>
@@ -15968,7 +15970,7 @@
               </a:rPr>
               <a:t>Implementation path</a:t>
             </a:r>
-            <a:endParaRPr lang="en-US" sz="1250" dirty="0"/>
+            <a:endParaRPr lang="en-US" sz="1160" dirty="0"/>
           </a:p>
         </p:txBody>
       </p:sp>
@@ -15980,7 +15982,7 @@
         </p:nvSpPr>
         <p:spPr>
           <a:xfrm>
-            <a:off x="8763000" y="3399739"/>
+            <a:off x="8717280" y="3406140"/>
             <a:ext cx="164592" cy="0"/>
           </a:xfrm>
           <a:prstGeom prst="line">
@@ -16003,8 +16005,8 @@
         </p:nvSpPr>
         <p:spPr>
           <a:xfrm>
-            <a:off x="7872984" y="3248863"/>
-            <a:ext cx="890016" cy="301752"/>
+            <a:off x="7781544" y="3255264"/>
+            <a:ext cx="935736" cy="301752"/>
           </a:xfrm>
           <a:prstGeom prst="roundRect">
             <a:avLst>
@@ -16030,8 +16032,8 @@
         </p:nvSpPr>
         <p:spPr>
           <a:xfrm>
-            <a:off x="7909560" y="3322015"/>
-            <a:ext cx="816864" cy="146304"/>
+            <a:off x="7818120" y="3328416"/>
+            <a:ext cx="862584" cy="146304"/>
           </a:xfrm>
           <a:prstGeom prst="rect">
             <a:avLst/>
@@ -16071,7 +16073,7 @@
         </p:nvSpPr>
         <p:spPr>
           <a:xfrm>
-            <a:off x="9817608" y="3399739"/>
+            <a:off x="9817608" y="3406140"/>
             <a:ext cx="164592" cy="0"/>
           </a:xfrm>
           <a:prstGeom prst="line">
@@ -16094,8 +16096,8 @@
         </p:nvSpPr>
         <p:spPr>
           <a:xfrm>
-            <a:off x="8927592" y="3248863"/>
-            <a:ext cx="890016" cy="301752"/>
+            <a:off x="8881872" y="3255264"/>
+            <a:ext cx="935736" cy="301752"/>
           </a:xfrm>
           <a:prstGeom prst="roundRect">
             <a:avLst>
@@ -16121,8 +16123,8 @@
         </p:nvSpPr>
         <p:spPr>
           <a:xfrm>
-            <a:off x="8964168" y="3322015"/>
-            <a:ext cx="816864" cy="146304"/>
+            <a:off x="8918448" y="3328416"/>
+            <a:ext cx="862584" cy="146304"/>
           </a:xfrm>
           <a:prstGeom prst="rect">
             <a:avLst/>
@@ -16162,8 +16164,8 @@
         </p:nvSpPr>
         <p:spPr>
           <a:xfrm>
-            <a:off x="9982200" y="3248863"/>
-            <a:ext cx="890016" cy="301752"/>
+            <a:off x="9982200" y="3255264"/>
+            <a:ext cx="935736" cy="301752"/>
           </a:xfrm>
           <a:prstGeom prst="roundRect">
             <a:avLst>
@@ -16189,8 +16191,8 @@
         </p:nvSpPr>
         <p:spPr>
           <a:xfrm>
-            <a:off x="10018776" y="3322015"/>
-            <a:ext cx="816864" cy="146304"/>
+            <a:off x="10018776" y="3328416"/>
+            <a:ext cx="862584" cy="146304"/>
           </a:xfrm>
           <a:prstGeom prst="rect">
             <a:avLst/>
@@ -16230,8 +16232,8 @@
         </p:nvSpPr>
         <p:spPr>
           <a:xfrm>
-            <a:off x="7854696" y="3742639"/>
-            <a:ext cx="3035808" cy="158191"/>
+            <a:off x="7763256" y="3749040"/>
+            <a:ext cx="3172968" cy="356616"/>
           </a:xfrm>
           <a:prstGeom prst="rect">
             <a:avLst/>
@@ -16249,7 +16251,7 @@
               <a:buNone/>
             </a:pPr>
             <a:r>
-              <a:rPr lang="en-US" sz="1120" dirty="0">
+              <a:rPr lang="en-US" sz="1040" dirty="0">
                 <a:solidFill>
                   <a:srgbClr val="17364A"/>
                 </a:solidFill>
@@ -16257,9 +16259,9 @@
                 <a:ea typeface="Aptos" pitchFamily="34" charset="-122"/>
                 <a:cs typeface="Aptos" pitchFamily="34" charset="-120"/>
               </a:rPr>
-              <a:t>Implementation work should make dependencies, approvals, training, and sustainment visible before launch.</a:t>
-            </a:r>
-            <a:endParaRPr lang="en-US" sz="1120" dirty="0"/>
+              <a:t>Implementation work should make dependencies, approvals, training, and.</a:t>
+            </a:r>
+            <a:endParaRPr lang="en-US" sz="1040" dirty="0"/>
           </a:p>
         </p:txBody>
       </p:sp>
@@ -16271,12 +16273,12 @@
         </p:nvSpPr>
         <p:spPr>
           <a:xfrm>
-            <a:off x="7635240" y="4184294"/>
-            <a:ext cx="3474720" cy="1466698"/>
+            <a:off x="7543800" y="4389120"/>
+            <a:ext cx="3611880" cy="1261872"/>
           </a:xfrm>
           <a:prstGeom prst="roundRect">
             <a:avLst>
-              <a:gd name="adj" fmla="val 7481"/>
+              <a:gd name="adj" fmla="val 8696"/>
             </a:avLst>
           </a:prstGeom>
           <a:solidFill>
@@ -16298,8 +16300,8 @@
         </p:nvSpPr>
         <p:spPr>
           <a:xfrm>
-            <a:off x="7799832" y="4330598"/>
-            <a:ext cx="3145536" cy="256032"/>
+            <a:off x="7708392" y="4517136"/>
+            <a:ext cx="3282696" cy="228600"/>
           </a:xfrm>
           <a:prstGeom prst="rect">
             <a:avLst/>
@@ -16315,7 +16317,7 @@
               <a:buNone/>
             </a:pPr>
             <a:r>
-              <a:rPr lang="en-US" sz="1300" b="1" dirty="0">
+              <a:rPr lang="en-US" sz="1220" b="1" dirty="0">
                 <a:solidFill>
                   <a:srgbClr val="0068B7"/>
                 </a:solidFill>
@@ -16325,7 +16327,7 @@
               </a:rPr>
               <a:t>Next action</a:t>
             </a:r>
-            <a:endParaRPr lang="en-US" sz="1300" dirty="0"/>
+            <a:endParaRPr lang="en-US" sz="1220" dirty="0"/>
           </a:p>
         </p:txBody>
       </p:sp>
@@ -16337,8 +16339,8 @@
         </p:nvSpPr>
         <p:spPr>
           <a:xfrm>
-            <a:off x="7799832" y="4659782"/>
-            <a:ext cx="3145536" cy="899770"/>
+            <a:off x="7708392" y="4828032"/>
+            <a:ext cx="3282696" cy="749808"/>
           </a:xfrm>
           <a:prstGeom prst="rect">
             <a:avLst/>
@@ -16356,7 +16358,7 @@
               <a:buNone/>
             </a:pPr>
             <a:r>
-              <a:rPr lang="en-US" sz="1320" dirty="0">
+              <a:rPr lang="en-US" sz="1220" dirty="0">
                 <a:solidFill>
                   <a:srgbClr val="17364A"/>
                 </a:solidFill>
@@ -16364,9 +16366,9 @@
                 <a:ea typeface="Aptos" pitchFamily="34" charset="-122"/>
                 <a:cs typeface="Aptos" pitchFamily="34" charset="-120"/>
               </a:rPr>
-              <a:t>Use the concept to clarify workflow changes, dependencies, staffing, procurement requirements, training needs, and implementation checkpoints.</a:t>
-            </a:r>
-            <a:endParaRPr lang="en-US" sz="1320" dirty="0"/>
+              <a:t>Use the concept to clarify workflow changes, dependencies, staffing, procurement.</a:t>
+            </a:r>
+            <a:endParaRPr lang="en-US" sz="1220" dirty="0"/>
           </a:p>
         </p:txBody>
       </p:sp>
@@ -16657,8 +16659,8 @@
         </p:nvSpPr>
         <p:spPr>
           <a:xfrm>
-            <a:off x="868680" y="1508760"/>
-            <a:ext cx="6309360" cy="4160520"/>
+            <a:off x="822960" y="1463040"/>
+            <a:ext cx="6565392" cy="4343400"/>
           </a:xfrm>
           <a:prstGeom prst="rect">
             <a:avLst/>
@@ -16676,7 +16678,7 @@
               <a:buNone/>
             </a:pPr>
             <a:r>
-              <a:rPr lang="en-US" sz="2100" dirty="0">
+              <a:rPr lang="en-US" sz="1920" dirty="0">
                 <a:solidFill>
                   <a:srgbClr val="003A63"/>
                 </a:solidFill>
@@ -16684,16 +16686,16 @@
                 <a:ea typeface="Aptos" pitchFamily="34" charset="-122"/>
                 <a:cs typeface="Aptos" pitchFamily="34" charset="-120"/>
               </a:rPr>
-              <a:t>• Decision right: The authority to approve, deny, modify, pause, or escalate an AI use case or.</a:t>
-            </a:r>
-            <a:endParaRPr lang="en-US" sz="2100" dirty="0"/>
-          </a:p>
-          <a:p>
-            <a:pPr indent="0" marL="0">
-              <a:buNone/>
-            </a:pPr>
-            <a:r>
-              <a:rPr lang="en-US" sz="2100" dirty="0">
+              <a:t>• Decision right: The authority to approve, deny, modify, pause, or escalate.</a:t>
+            </a:r>
+            <a:endParaRPr lang="en-US" sz="1920" dirty="0"/>
+          </a:p>
+          <a:p>
+            <a:pPr indent="0" marL="0">
+              <a:buNone/>
+            </a:pPr>
+            <a:r>
+              <a:rPr lang="en-US" sz="1920" dirty="0">
                 <a:solidFill>
                   <a:srgbClr val="003A63"/>
                 </a:solidFill>
@@ -16701,16 +16703,16 @@
                 <a:ea typeface="Aptos" pitchFamily="34" charset="-122"/>
                 <a:cs typeface="Aptos" pitchFamily="34" charset="-120"/>
               </a:rPr>
-              <a:t>• Evidence artifact: A document, log, checklist, test result, approval record, or review note.</a:t>
-            </a:r>
-            <a:endParaRPr lang="en-US" sz="2100" dirty="0"/>
-          </a:p>
-          <a:p>
-            <a:pPr indent="0" marL="0">
-              <a:buNone/>
-            </a:pPr>
-            <a:r>
-              <a:rPr lang="en-US" sz="2100" dirty="0">
+              <a:t>• Evidence artifact: A document, log, checklist, test result, approval record,.</a:t>
+            </a:r>
+            <a:endParaRPr lang="en-US" sz="1920" dirty="0"/>
+          </a:p>
+          <a:p>
+            <a:pPr indent="0" marL="0">
+              <a:buNone/>
+            </a:pPr>
+            <a:r>
+              <a:rPr lang="en-US" sz="1920" dirty="0">
                 <a:solidFill>
                   <a:srgbClr val="003A63"/>
                 </a:solidFill>
@@ -16718,9 +16720,9 @@
                 <a:ea typeface="Aptos" pitchFamily="34" charset="-122"/>
                 <a:cs typeface="Aptos" pitchFamily="34" charset="-120"/>
               </a:rPr>
-              <a:t>• Escalation pathway: A defined route for raising concerns to the appropriate reviewer or.</a:t>
-            </a:r>
-            <a:endParaRPr lang="en-US" sz="2100" dirty="0"/>
+              <a:t>• Escalation pathway: A defined route for raising concerns to the appropriate.</a:t>
+            </a:r>
+            <a:endParaRPr lang="en-US" sz="1920" dirty="0"/>
           </a:p>
         </p:txBody>
       </p:sp>
@@ -16732,12 +16734,12 @@
         </p:nvSpPr>
         <p:spPr>
           <a:xfrm>
-            <a:off x="7635240" y="1325880"/>
-            <a:ext cx="3474720" cy="1207008"/>
+            <a:off x="7543800" y="1325880"/>
+            <a:ext cx="3611880" cy="1261872"/>
           </a:xfrm>
           <a:prstGeom prst="roundRect">
             <a:avLst>
-              <a:gd name="adj" fmla="val 9091"/>
+              <a:gd name="adj" fmla="val 8696"/>
             </a:avLst>
           </a:prstGeom>
           <a:solidFill>
@@ -16759,8 +16761,8 @@
         </p:nvSpPr>
         <p:spPr>
           <a:xfrm>
-            <a:off x="7799832" y="1472184"/>
-            <a:ext cx="3145536" cy="256032"/>
+            <a:off x="7708392" y="1453896"/>
+            <a:ext cx="3282696" cy="228600"/>
           </a:xfrm>
           <a:prstGeom prst="rect">
             <a:avLst/>
@@ -16776,7 +16778,7 @@
               <a:buNone/>
             </a:pPr>
             <a:r>
-              <a:rPr lang="en-US" sz="1300" b="1" dirty="0">
+              <a:rPr lang="en-US" sz="1220" b="1" dirty="0">
                 <a:solidFill>
                   <a:srgbClr val="0068B7"/>
                 </a:solidFill>
@@ -16786,7 +16788,7 @@
               </a:rPr>
               <a:t>Implementation cue</a:t>
             </a:r>
-            <a:endParaRPr lang="en-US" sz="1300" dirty="0"/>
+            <a:endParaRPr lang="en-US" sz="1220" dirty="0"/>
           </a:p>
         </p:txBody>
       </p:sp>
@@ -16798,8 +16800,8 @@
         </p:nvSpPr>
         <p:spPr>
           <a:xfrm>
-            <a:off x="7799832" y="1801368"/>
-            <a:ext cx="3145536" cy="640080"/>
+            <a:off x="7708392" y="1764792"/>
+            <a:ext cx="3282696" cy="749808"/>
           </a:xfrm>
           <a:prstGeom prst="rect">
             <a:avLst/>
@@ -16817,7 +16819,7 @@
               <a:buNone/>
             </a:pPr>
             <a:r>
-              <a:rPr lang="en-US" sz="1320" dirty="0">
+              <a:rPr lang="en-US" sz="1220" dirty="0">
                 <a:solidFill>
                   <a:srgbClr val="17364A"/>
                 </a:solidFill>
@@ -16825,9 +16827,9 @@
                 <a:ea typeface="Aptos" pitchFamily="34" charset="-122"/>
                 <a:cs typeface="Aptos" pitchFamily="34" charset="-120"/>
               </a:rPr>
-              <a:t>Decision right: The authority to approve, deny, modify, pause, or escalate an AI use.</a:t>
-            </a:r>
-            <a:endParaRPr lang="en-US" sz="1320" dirty="0"/>
+              <a:t>Decision right: The authority to approve, deny, modify, pause, or escalate an AI.</a:t>
+            </a:r>
+            <a:endParaRPr lang="en-US" sz="1220" dirty="0"/>
           </a:p>
         </p:txBody>
       </p:sp>
@@ -16839,12 +16841,12 @@
         </p:nvSpPr>
         <p:spPr>
           <a:xfrm>
-            <a:off x="7635240" y="2670048"/>
-            <a:ext cx="3474720" cy="1377086"/>
+            <a:off x="7543800" y="2724912"/>
+            <a:ext cx="3611880" cy="1527048"/>
           </a:xfrm>
           <a:prstGeom prst="roundRect">
             <a:avLst>
-              <a:gd name="adj" fmla="val 7968"/>
+              <a:gd name="adj" fmla="val 7186"/>
             </a:avLst>
           </a:prstGeom>
           <a:solidFill>
@@ -16866,8 +16868,8 @@
         </p:nvSpPr>
         <p:spPr>
           <a:xfrm>
-            <a:off x="7799832" y="2816352"/>
-            <a:ext cx="3145536" cy="256032"/>
+            <a:off x="7708392" y="2852928"/>
+            <a:ext cx="3282696" cy="228600"/>
           </a:xfrm>
           <a:prstGeom prst="rect">
             <a:avLst/>
@@ -16883,7 +16885,7 @@
               <a:buNone/>
             </a:pPr>
             <a:r>
-              <a:rPr lang="en-US" sz="1300" b="1" dirty="0">
+              <a:rPr lang="en-US" sz="1220" b="1" dirty="0">
                 <a:solidFill>
                   <a:srgbClr val="0068B7"/>
                 </a:solidFill>
@@ -16893,7 +16895,7 @@
               </a:rPr>
               <a:t>Concept checkpoints</a:t>
             </a:r>
-            <a:endParaRPr lang="en-US" sz="1300" dirty="0"/>
+            <a:endParaRPr lang="en-US" sz="1220" dirty="0"/>
           </a:p>
         </p:txBody>
       </p:sp>
@@ -16905,8 +16907,8 @@
         </p:nvSpPr>
         <p:spPr>
           <a:xfrm>
-            <a:off x="7818120" y="3182112"/>
-            <a:ext cx="3090672" cy="718718"/>
+            <a:off x="7726680" y="3182112"/>
+            <a:ext cx="3227832" cy="960120"/>
           </a:xfrm>
           <a:prstGeom prst="rect">
             <a:avLst/>
@@ -16924,7 +16926,7 @@
               <a:buNone/>
             </a:pPr>
             <a:r>
-              <a:rPr lang="en-US" sz="1220" dirty="0">
+              <a:rPr lang="en-US" sz="1140" dirty="0">
                 <a:solidFill>
                   <a:srgbClr val="17364A"/>
                 </a:solidFill>
@@ -16932,16 +16934,16 @@
                 <a:ea typeface="Aptos" pitchFamily="34" charset="-122"/>
                 <a:cs typeface="Aptos" pitchFamily="34" charset="-120"/>
               </a:rPr>
-              <a:t>Decision right: The authority to approve, deny, modify, pause, or.</a:t>
-            </a:r>
-            <a:endParaRPr lang="en-US" sz="1220" dirty="0"/>
-          </a:p>
-          <a:p>
-            <a:pPr indent="0" marL="0">
-              <a:buNone/>
-            </a:pPr>
-            <a:r>
-              <a:rPr lang="en-US" sz="1220" dirty="0">
+              <a:t>Decision right: The authority to approve, deny,.</a:t>
+            </a:r>
+            <a:endParaRPr lang="en-US" sz="1140" dirty="0"/>
+          </a:p>
+          <a:p>
+            <a:pPr indent="0" marL="0">
+              <a:buNone/>
+            </a:pPr>
+            <a:r>
+              <a:rPr lang="en-US" sz="1140" dirty="0">
                 <a:solidFill>
                   <a:srgbClr val="17364A"/>
                 </a:solidFill>
@@ -16949,16 +16951,16 @@
                 <a:ea typeface="Aptos" pitchFamily="34" charset="-122"/>
                 <a:cs typeface="Aptos" pitchFamily="34" charset="-120"/>
               </a:rPr>
-              <a:t>Evidence artifact: A document, log, checklist, test result,.</a:t>
-            </a:r>
-            <a:endParaRPr lang="en-US" sz="1220" dirty="0"/>
-          </a:p>
-          <a:p>
-            <a:pPr indent="0" marL="0">
-              <a:buNone/>
-            </a:pPr>
-            <a:r>
-              <a:rPr lang="en-US" sz="1220" dirty="0">
+              <a:t>Evidence artifact: A document, log, checklist,.</a:t>
+            </a:r>
+            <a:endParaRPr lang="en-US" sz="1140" dirty="0"/>
+          </a:p>
+          <a:p>
+            <a:pPr indent="0" marL="0">
+              <a:buNone/>
+            </a:pPr>
+            <a:r>
+              <a:rPr lang="en-US" sz="1140" dirty="0">
                 <a:solidFill>
                   <a:srgbClr val="17364A"/>
                 </a:solidFill>
@@ -16966,9 +16968,9 @@
                 <a:ea typeface="Aptos" pitchFamily="34" charset="-122"/>
                 <a:cs typeface="Aptos" pitchFamily="34" charset="-120"/>
               </a:rPr>
-              <a:t>Accountability owner: The person or role responsible for ensuring.</a:t>
-            </a:r>
-            <a:endParaRPr lang="en-US" sz="1220" dirty="0"/>
+              <a:t>Accountability owner: The person or role.</a:t>
+            </a:r>
+            <a:endParaRPr lang="en-US" sz="1140" dirty="0"/>
           </a:p>
         </p:txBody>
       </p:sp>
@@ -16980,12 +16982,12 @@
         </p:nvSpPr>
         <p:spPr>
           <a:xfrm>
-            <a:off x="7635240" y="4184294"/>
-            <a:ext cx="3474720" cy="1466698"/>
+            <a:off x="7543800" y="4389120"/>
+            <a:ext cx="3611880" cy="1261872"/>
           </a:xfrm>
           <a:prstGeom prst="roundRect">
             <a:avLst>
-              <a:gd name="adj" fmla="val 7481"/>
+              <a:gd name="adj" fmla="val 8696"/>
             </a:avLst>
           </a:prstGeom>
           <a:solidFill>
@@ -17007,8 +17009,8 @@
         </p:nvSpPr>
         <p:spPr>
           <a:xfrm>
-            <a:off x="7799832" y="4330598"/>
-            <a:ext cx="3145536" cy="256032"/>
+            <a:off x="7708392" y="4517136"/>
+            <a:ext cx="3282696" cy="228600"/>
           </a:xfrm>
           <a:prstGeom prst="rect">
             <a:avLst/>
@@ -17024,7 +17026,7 @@
               <a:buNone/>
             </a:pPr>
             <a:r>
-              <a:rPr lang="en-US" sz="1300" b="1" dirty="0">
+              <a:rPr lang="en-US" sz="1220" b="1" dirty="0">
                 <a:solidFill>
                   <a:srgbClr val="0068B7"/>
                 </a:solidFill>
@@ -17034,7 +17036,7 @@
               </a:rPr>
               <a:t>Next action</a:t>
             </a:r>
-            <a:endParaRPr lang="en-US" sz="1300" dirty="0"/>
+            <a:endParaRPr lang="en-US" sz="1220" dirty="0"/>
           </a:p>
         </p:txBody>
       </p:sp>
@@ -17046,8 +17048,8 @@
         </p:nvSpPr>
         <p:spPr>
           <a:xfrm>
-            <a:off x="7799832" y="4659782"/>
-            <a:ext cx="3145536" cy="899770"/>
+            <a:off x="7708392" y="4828032"/>
+            <a:ext cx="3282696" cy="749808"/>
           </a:xfrm>
           <a:prstGeom prst="rect">
             <a:avLst/>
@@ -17065,7 +17067,7 @@
               <a:buNone/>
             </a:pPr>
             <a:r>
-              <a:rPr lang="en-US" sz="1320" dirty="0">
+              <a:rPr lang="en-US" sz="1220" dirty="0">
                 <a:solidFill>
                   <a:srgbClr val="17364A"/>
                 </a:solidFill>
@@ -17073,9 +17075,9 @@
                 <a:ea typeface="Aptos" pitchFamily="34" charset="-122"/>
                 <a:cs typeface="Aptos" pitchFamily="34" charset="-120"/>
               </a:rPr>
-              <a:t>Use the concept to clarify workflow changes, dependencies, staffing, procurement requirements, training needs, and implementation checkpoints.</a:t>
-            </a:r>
-            <a:endParaRPr lang="en-US" sz="1320" dirty="0"/>
+              <a:t>Use the concept to clarify workflow changes, dependencies, staffing, procurement.</a:t>
+            </a:r>
+            <a:endParaRPr lang="en-US" sz="1220" dirty="0"/>
           </a:p>
         </p:txBody>
       </p:sp>
@@ -17366,8 +17368,8 @@
         </p:nvSpPr>
         <p:spPr>
           <a:xfrm>
-            <a:off x="868680" y="1508760"/>
-            <a:ext cx="6309360" cy="4160520"/>
+            <a:off x="822960" y="1463040"/>
+            <a:ext cx="6565392" cy="4343400"/>
           </a:xfrm>
           <a:prstGeom prst="rect">
             <a:avLst/>
@@ -17385,7 +17387,7 @@
               <a:buNone/>
             </a:pPr>
             <a:r>
-              <a:rPr lang="en-US" sz="2100" dirty="0">
+              <a:rPr lang="en-US" sz="1920" dirty="0">
                 <a:solidFill>
                   <a:srgbClr val="003A63"/>
                 </a:solidFill>
@@ -17393,16 +17395,16 @@
                 <a:ea typeface="Aptos" pitchFamily="34" charset="-122"/>
                 <a:cs typeface="Aptos" pitchFamily="34" charset="-120"/>
               </a:rPr>
-              <a:t>• This module provides national-level training guidance for public health agencies and partners.</a:t>
-            </a:r>
-            <a:endParaRPr lang="en-US" sz="2100" dirty="0"/>
-          </a:p>
-          <a:p>
-            <a:pPr indent="0" marL="0">
-              <a:buNone/>
-            </a:pPr>
-            <a:r>
-              <a:rPr lang="en-US" sz="2100" dirty="0">
+              <a:t>• This module provides national-level training guidance for public health.</a:t>
+            </a:r>
+            <a:endParaRPr lang="en-US" sz="1920" dirty="0"/>
+          </a:p>
+          <a:p>
+            <a:pPr indent="0" marL="0">
+              <a:buNone/>
+            </a:pPr>
+            <a:r>
+              <a:rPr lang="en-US" sz="1920" dirty="0">
                 <a:solidFill>
                   <a:srgbClr val="003A63"/>
                 </a:solidFill>
@@ -17410,16 +17412,16 @@
                 <a:ea typeface="Aptos" pitchFamily="34" charset="-122"/>
                 <a:cs typeface="Aptos" pitchFamily="34" charset="-120"/>
               </a:rPr>
-              <a:t>• It is not legal advice and does not replace review by agency legal counsel, privacy officers,.</a:t>
-            </a:r>
-            <a:endParaRPr lang="en-US" sz="2100" dirty="0"/>
-          </a:p>
-          <a:p>
-            <a:pPr indent="0" marL="0">
-              <a:buNone/>
-            </a:pPr>
-            <a:r>
-              <a:rPr lang="en-US" sz="2100" dirty="0">
+              <a:t>• It is not legal advice and does not replace review by agency legal counsel,.</a:t>
+            </a:r>
+            <a:endParaRPr lang="en-US" sz="1920" dirty="0"/>
+          </a:p>
+          <a:p>
+            <a:pPr indent="0" marL="0">
+              <a:buNone/>
+            </a:pPr>
+            <a:r>
+              <a:rPr lang="en-US" sz="1920" dirty="0">
                 <a:solidFill>
                   <a:srgbClr val="003A63"/>
                 </a:solidFill>
@@ -17427,9 +17429,9 @@
                 <a:ea typeface="Aptos" pitchFamily="34" charset="-122"/>
                 <a:cs typeface="Aptos" pitchFamily="34" charset="-120"/>
               </a:rPr>
-              <a:t>• Requirements may vary by state, locality, territory, Tribe, agency, funding source,.</a:t>
-            </a:r>
-            <a:endParaRPr lang="en-US" sz="2100" dirty="0"/>
+              <a:t>• Requirements may vary by state, locality, territory, Tribe, agency, funding.</a:t>
+            </a:r>
+            <a:endParaRPr lang="en-US" sz="1920" dirty="0"/>
           </a:p>
         </p:txBody>
       </p:sp>
@@ -17441,12 +17443,12 @@
         </p:nvSpPr>
         <p:spPr>
           <a:xfrm>
-            <a:off x="7635240" y="1325880"/>
-            <a:ext cx="3474720" cy="1207008"/>
+            <a:off x="7543800" y="1325880"/>
+            <a:ext cx="3611880" cy="1261872"/>
           </a:xfrm>
           <a:prstGeom prst="roundRect">
             <a:avLst>
-              <a:gd name="adj" fmla="val 9091"/>
+              <a:gd name="adj" fmla="val 8696"/>
             </a:avLst>
           </a:prstGeom>
           <a:solidFill>
@@ -17468,8 +17470,8 @@
         </p:nvSpPr>
         <p:spPr>
           <a:xfrm>
-            <a:off x="7799832" y="1472184"/>
-            <a:ext cx="3145536" cy="256032"/>
+            <a:off x="7708392" y="1453896"/>
+            <a:ext cx="3282696" cy="228600"/>
           </a:xfrm>
           <a:prstGeom prst="rect">
             <a:avLst/>
@@ -17485,7 +17487,7 @@
               <a:buNone/>
             </a:pPr>
             <a:r>
-              <a:rPr lang="en-US" sz="1300" b="1" dirty="0">
+              <a:rPr lang="en-US" sz="1220" b="1" dirty="0">
                 <a:solidFill>
                   <a:srgbClr val="0068B7"/>
                 </a:solidFill>
@@ -17495,7 +17497,7 @@
               </a:rPr>
               <a:t>Governance lens</a:t>
             </a:r>
-            <a:endParaRPr lang="en-US" sz="1300" dirty="0"/>
+            <a:endParaRPr lang="en-US" sz="1220" dirty="0"/>
           </a:p>
         </p:txBody>
       </p:sp>
@@ -17507,8 +17509,8 @@
         </p:nvSpPr>
         <p:spPr>
           <a:xfrm>
-            <a:off x="7799832" y="1801368"/>
-            <a:ext cx="3145536" cy="640080"/>
+            <a:off x="7708392" y="1764792"/>
+            <a:ext cx="3282696" cy="749808"/>
           </a:xfrm>
           <a:prstGeom prst="rect">
             <a:avLst/>
@@ -17526,7 +17528,7 @@
               <a:buNone/>
             </a:pPr>
             <a:r>
-              <a:rPr lang="en-US" sz="1320" dirty="0">
+              <a:rPr lang="en-US" sz="1220" dirty="0">
                 <a:solidFill>
                   <a:srgbClr val="17364A"/>
                 </a:solidFill>
@@ -17534,9 +17536,9 @@
                 <a:ea typeface="Aptos" pitchFamily="34" charset="-122"/>
                 <a:cs typeface="Aptos" pitchFamily="34" charset="-120"/>
               </a:rPr>
-              <a:t>This module provides national-level training guidance for public health agencies and.</a:t>
-            </a:r>
-            <a:endParaRPr lang="en-US" sz="1320" dirty="0"/>
+              <a:t>This module provides national-level training guidance for public health agencies.</a:t>
+            </a:r>
+            <a:endParaRPr lang="en-US" sz="1220" dirty="0"/>
           </a:p>
         </p:txBody>
       </p:sp>
@@ -17548,12 +17550,12 @@
         </p:nvSpPr>
         <p:spPr>
           <a:xfrm>
-            <a:off x="7635240" y="2670048"/>
-            <a:ext cx="3474720" cy="1377086"/>
+            <a:off x="7543800" y="2724912"/>
+            <a:ext cx="3611880" cy="1527048"/>
           </a:xfrm>
           <a:prstGeom prst="roundRect">
             <a:avLst>
-              <a:gd name="adj" fmla="val 7968"/>
+              <a:gd name="adj" fmla="val 7186"/>
             </a:avLst>
           </a:prstGeom>
           <a:solidFill>
@@ -17575,24 +17577,26 @@
         </p:nvSpPr>
         <p:spPr>
           <a:xfrm>
-            <a:off x="7799832" y="2798064"/>
-            <a:ext cx="3145536" cy="237744"/>
-          </a:xfrm>
-          <a:prstGeom prst="rect">
-            <a:avLst/>
-          </a:prstGeom>
-          <a:noFill/>
-          <a:ln/>
-        </p:spPr>
-        <p:txBody>
-          <a:bodyPr wrap="square" lIns="0" tIns="0" rIns="0" bIns="0" rtlCol="0" anchor="ctr"/>
-          <a:lstStyle/>
-          <a:p>
-            <a:pPr indent="0" marL="0">
-              <a:buNone/>
-            </a:pPr>
-            <a:r>
-              <a:rPr lang="en-US" sz="1250" b="1" dirty="0">
+            <a:off x="7708392" y="2852928"/>
+            <a:ext cx="3282696" cy="219456"/>
+          </a:xfrm>
+          <a:prstGeom prst="rect">
+            <a:avLst/>
+          </a:prstGeom>
+          <a:noFill/>
+          <a:ln/>
+        </p:spPr>
+        <p:txBody>
+          <a:bodyPr wrap="square" lIns="0" tIns="0" rIns="0" bIns="0" rtlCol="0" anchor="ctr">
+            <a:normAutofit/>
+          </a:bodyPr>
+          <a:lstStyle/>
+          <a:p>
+            <a:pPr indent="0" marL="0">
+              <a:buNone/>
+            </a:pPr>
+            <a:r>
+              <a:rPr lang="en-US" sz="1160" b="1" dirty="0">
                 <a:solidFill>
                   <a:srgbClr val="0068B7"/>
                 </a:solidFill>
@@ -17602,7 +17606,7 @@
               </a:rPr>
               <a:t>Governance pathway</a:t>
             </a:r>
-            <a:endParaRPr lang="en-US" sz="1250" dirty="0"/>
+            <a:endParaRPr lang="en-US" sz="1160" dirty="0"/>
           </a:p>
         </p:txBody>
       </p:sp>
@@ -17614,7 +17618,7 @@
         </p:nvSpPr>
         <p:spPr>
           <a:xfrm>
-            <a:off x="8763000" y="3351276"/>
+            <a:off x="8717280" y="3406140"/>
             <a:ext cx="164592" cy="0"/>
           </a:xfrm>
           <a:prstGeom prst="line">
@@ -17637,8 +17641,8 @@
         </p:nvSpPr>
         <p:spPr>
           <a:xfrm>
-            <a:off x="7872984" y="3200400"/>
-            <a:ext cx="890016" cy="301752"/>
+            <a:off x="7781544" y="3255264"/>
+            <a:ext cx="935736" cy="301752"/>
           </a:xfrm>
           <a:prstGeom prst="roundRect">
             <a:avLst>
@@ -17664,8 +17668,8 @@
         </p:nvSpPr>
         <p:spPr>
           <a:xfrm>
-            <a:off x="7909560" y="3273552"/>
-            <a:ext cx="816864" cy="146304"/>
+            <a:off x="7818120" y="3328416"/>
+            <a:ext cx="862584" cy="146304"/>
           </a:xfrm>
           <a:prstGeom prst="rect">
             <a:avLst/>
@@ -17705,7 +17709,7 @@
         </p:nvSpPr>
         <p:spPr>
           <a:xfrm>
-            <a:off x="9817608" y="3351276"/>
+            <a:off x="9817608" y="3406140"/>
             <a:ext cx="164592" cy="0"/>
           </a:xfrm>
           <a:prstGeom prst="line">
@@ -17728,8 +17732,8 @@
         </p:nvSpPr>
         <p:spPr>
           <a:xfrm>
-            <a:off x="8927592" y="3200400"/>
-            <a:ext cx="890016" cy="301752"/>
+            <a:off x="8881872" y="3255264"/>
+            <a:ext cx="935736" cy="301752"/>
           </a:xfrm>
           <a:prstGeom prst="roundRect">
             <a:avLst>
@@ -17755,8 +17759,8 @@
         </p:nvSpPr>
         <p:spPr>
           <a:xfrm>
-            <a:off x="8964168" y="3273552"/>
-            <a:ext cx="816864" cy="146304"/>
+            <a:off x="8918448" y="3328416"/>
+            <a:ext cx="862584" cy="146304"/>
           </a:xfrm>
           <a:prstGeom prst="rect">
             <a:avLst/>
@@ -17796,8 +17800,8 @@
         </p:nvSpPr>
         <p:spPr>
           <a:xfrm>
-            <a:off x="9982200" y="3200400"/>
-            <a:ext cx="890016" cy="301752"/>
+            <a:off x="9982200" y="3255264"/>
+            <a:ext cx="935736" cy="301752"/>
           </a:xfrm>
           <a:prstGeom prst="roundRect">
             <a:avLst>
@@ -17823,8 +17827,8 @@
         </p:nvSpPr>
         <p:spPr>
           <a:xfrm>
-            <a:off x="10018776" y="3273552"/>
-            <a:ext cx="816864" cy="146304"/>
+            <a:off x="10018776" y="3328416"/>
+            <a:ext cx="862584" cy="146304"/>
           </a:xfrm>
           <a:prstGeom prst="rect">
             <a:avLst/>
@@ -17864,8 +17868,8 @@
         </p:nvSpPr>
         <p:spPr>
           <a:xfrm>
-            <a:off x="7854696" y="3694176"/>
-            <a:ext cx="3035808" cy="206654"/>
+            <a:off x="7763256" y="3749040"/>
+            <a:ext cx="3172968" cy="356616"/>
           </a:xfrm>
           <a:prstGeom prst="rect">
             <a:avLst/>
@@ -17883,7 +17887,7 @@
               <a:buNone/>
             </a:pPr>
             <a:r>
-              <a:rPr lang="en-US" sz="1120" dirty="0">
+              <a:rPr lang="en-US" sz="1040" dirty="0">
                 <a:solidFill>
                   <a:srgbClr val="17364A"/>
                 </a:solidFill>
@@ -17891,9 +17895,9 @@
                 <a:ea typeface="Aptos" pitchFamily="34" charset="-122"/>
                 <a:cs typeface="Aptos" pitchFamily="34" charset="-120"/>
               </a:rPr>
-              <a:t>A proposed AI use should move through documented review before it becomes an operational workflow.</a:t>
-            </a:r>
-            <a:endParaRPr lang="en-US" sz="1120" dirty="0"/>
+              <a:t>A proposed AI use should move through documented review before it.</a:t>
+            </a:r>
+            <a:endParaRPr lang="en-US" sz="1040" dirty="0"/>
           </a:p>
         </p:txBody>
       </p:sp>
@@ -17905,12 +17909,12 @@
         </p:nvSpPr>
         <p:spPr>
           <a:xfrm>
-            <a:off x="7635240" y="4184294"/>
-            <a:ext cx="3474720" cy="1466698"/>
+            <a:off x="7543800" y="4389120"/>
+            <a:ext cx="3611880" cy="1261872"/>
           </a:xfrm>
           <a:prstGeom prst="roundRect">
             <a:avLst>
-              <a:gd name="adj" fmla="val 7481"/>
+              <a:gd name="adj" fmla="val 8696"/>
             </a:avLst>
           </a:prstGeom>
           <a:solidFill>
@@ -17932,8 +17936,8 @@
         </p:nvSpPr>
         <p:spPr>
           <a:xfrm>
-            <a:off x="7799832" y="4330598"/>
-            <a:ext cx="3145536" cy="256032"/>
+            <a:off x="7708392" y="4517136"/>
+            <a:ext cx="3282696" cy="228600"/>
           </a:xfrm>
           <a:prstGeom prst="rect">
             <a:avLst/>
@@ -17949,7 +17953,7 @@
               <a:buNone/>
             </a:pPr>
             <a:r>
-              <a:rPr lang="en-US" sz="1300" b="1" dirty="0">
+              <a:rPr lang="en-US" sz="1220" b="1" dirty="0">
                 <a:solidFill>
                   <a:srgbClr val="0068B7"/>
                 </a:solidFill>
@@ -17959,7 +17963,7 @@
               </a:rPr>
               <a:t>What to document</a:t>
             </a:r>
-            <a:endParaRPr lang="en-US" sz="1300" dirty="0"/>
+            <a:endParaRPr lang="en-US" sz="1220" dirty="0"/>
           </a:p>
         </p:txBody>
       </p:sp>
@@ -17971,8 +17975,8 @@
         </p:nvSpPr>
         <p:spPr>
           <a:xfrm>
-            <a:off x="7799832" y="4659782"/>
-            <a:ext cx="3145536" cy="899770"/>
+            <a:off x="7708392" y="4828032"/>
+            <a:ext cx="3282696" cy="749808"/>
           </a:xfrm>
           <a:prstGeom prst="rect">
             <a:avLst/>
@@ -17990,7 +17994,7 @@
               <a:buNone/>
             </a:pPr>
             <a:r>
-              <a:rPr lang="en-US" sz="1320" dirty="0">
+              <a:rPr lang="en-US" sz="1220" dirty="0">
                 <a:solidFill>
                   <a:srgbClr val="17364A"/>
                 </a:solidFill>
@@ -17998,9 +18002,9 @@
                 <a:ea typeface="Aptos" pitchFamily="34" charset="-122"/>
                 <a:cs typeface="Aptos" pitchFamily="34" charset="-120"/>
               </a:rPr>
-              <a:t>Translate this concept into clear decision rights, review steps, documentation expectations, and escalation paths before an AI-supported workflow is approved.</a:t>
-            </a:r>
-            <a:endParaRPr lang="en-US" sz="1320" dirty="0"/>
+              <a:t>Translate this concept into clear decision rights, review steps, documentation.</a:t>
+            </a:r>
+            <a:endParaRPr lang="en-US" sz="1220" dirty="0"/>
           </a:p>
         </p:txBody>
       </p:sp>
@@ -18291,8 +18295,8 @@
         </p:nvSpPr>
         <p:spPr>
           <a:xfrm>
-            <a:off x="868680" y="1508760"/>
-            <a:ext cx="6309360" cy="4160520"/>
+            <a:off x="822960" y="1463040"/>
+            <a:ext cx="6565392" cy="4343400"/>
           </a:xfrm>
           <a:prstGeom prst="rect">
             <a:avLst/>
@@ -18310,7 +18314,7 @@
               <a:buNone/>
             </a:pPr>
             <a:r>
-              <a:rPr lang="en-US" sz="2100" dirty="0">
+              <a:rPr lang="en-US" sz="1920" dirty="0">
                 <a:solidFill>
                   <a:srgbClr val="003A63"/>
                 </a:solidFill>
@@ -18318,16 +18322,16 @@
                 <a:ea typeface="Aptos" pitchFamily="34" charset="-122"/>
                 <a:cs typeface="Aptos" pitchFamily="34" charset="-120"/>
               </a:rPr>
-              <a:t>• Grant and Funding Management for AI Projects matters because AI adoption changes how public.</a:t>
-            </a:r>
-            <a:endParaRPr lang="en-US" sz="2100" dirty="0"/>
-          </a:p>
-          <a:p>
-            <a:pPr indent="0" marL="0">
-              <a:buNone/>
-            </a:pPr>
-            <a:r>
-              <a:rPr lang="en-US" sz="2100" dirty="0">
+              <a:t>• Grant and Funding Management for AI Projects matters because AI adoption.</a:t>
+            </a:r>
+            <a:endParaRPr lang="en-US" sz="1920" dirty="0"/>
+          </a:p>
+          <a:p>
+            <a:pPr indent="0" marL="0">
+              <a:buNone/>
+            </a:pPr>
+            <a:r>
+              <a:rPr lang="en-US" sz="1920" dirty="0">
                 <a:solidFill>
                   <a:srgbClr val="003A63"/>
                 </a:solidFill>
@@ -18335,16 +18339,16 @@
                 <a:ea typeface="Aptos" pitchFamily="34" charset="-122"/>
                 <a:cs typeface="Aptos" pitchFamily="34" charset="-120"/>
               </a:rPr>
-              <a:t>• Without a structured approach, staff may rely on informal practices, vendor assurances, or.</a:t>
-            </a:r>
-            <a:endParaRPr lang="en-US" sz="2100" dirty="0"/>
-          </a:p>
-          <a:p>
-            <a:pPr indent="0" marL="0">
-              <a:buNone/>
-            </a:pPr>
-            <a:r>
-              <a:rPr lang="en-US" sz="2100" dirty="0">
+              <a:t>• Without a structured approach, staff may rely on informal practices, vendor.</a:t>
+            </a:r>
+            <a:endParaRPr lang="en-US" sz="1920" dirty="0"/>
+          </a:p>
+          <a:p>
+            <a:pPr indent="0" marL="0">
+              <a:buNone/>
+            </a:pPr>
+            <a:r>
+              <a:rPr lang="en-US" sz="1920" dirty="0">
                 <a:solidFill>
                   <a:srgbClr val="003A63"/>
                 </a:solidFill>
@@ -18352,9 +18356,9 @@
                 <a:ea typeface="Aptos" pitchFamily="34" charset="-122"/>
                 <a:cs typeface="Aptos" pitchFamily="34" charset="-120"/>
               </a:rPr>
-              <a:t>• Public health agencies operate under legal authorities, public accountability, resource.</a:t>
-            </a:r>
-            <a:endParaRPr lang="en-US" sz="2100" dirty="0"/>
+              <a:t>• Public health agencies operate under legal authorities, public.</a:t>
+            </a:r>
+            <a:endParaRPr lang="en-US" sz="1920" dirty="0"/>
           </a:p>
         </p:txBody>
       </p:sp>
@@ -18366,12 +18370,12 @@
         </p:nvSpPr>
         <p:spPr>
           <a:xfrm>
-            <a:off x="7635240" y="1325880"/>
-            <a:ext cx="3474720" cy="1255471"/>
+            <a:off x="7543800" y="1325880"/>
+            <a:ext cx="3611880" cy="1261872"/>
           </a:xfrm>
           <a:prstGeom prst="roundRect">
             <a:avLst>
-              <a:gd name="adj" fmla="val 8740"/>
+              <a:gd name="adj" fmla="val 8696"/>
             </a:avLst>
           </a:prstGeom>
           <a:solidFill>
@@ -18393,8 +18397,8 @@
         </p:nvSpPr>
         <p:spPr>
           <a:xfrm>
-            <a:off x="7799832" y="1472184"/>
-            <a:ext cx="3145536" cy="256032"/>
+            <a:off x="7708392" y="1453896"/>
+            <a:ext cx="3282696" cy="228600"/>
           </a:xfrm>
           <a:prstGeom prst="rect">
             <a:avLst/>
@@ -18410,7 +18414,7 @@
               <a:buNone/>
             </a:pPr>
             <a:r>
-              <a:rPr lang="en-US" sz="1300" b="1" dirty="0">
+              <a:rPr lang="en-US" sz="1220" b="1" dirty="0">
                 <a:solidFill>
                   <a:srgbClr val="0068B7"/>
                 </a:solidFill>
@@ -18420,7 +18424,7 @@
               </a:rPr>
               <a:t>Implementation cue</a:t>
             </a:r>
-            <a:endParaRPr lang="en-US" sz="1300" dirty="0"/>
+            <a:endParaRPr lang="en-US" sz="1220" dirty="0"/>
           </a:p>
         </p:txBody>
       </p:sp>
@@ -18432,8 +18436,8 @@
         </p:nvSpPr>
         <p:spPr>
           <a:xfrm>
-            <a:off x="7799832" y="1801368"/>
-            <a:ext cx="3145536" cy="688543"/>
+            <a:off x="7708392" y="1764792"/>
+            <a:ext cx="3282696" cy="749808"/>
           </a:xfrm>
           <a:prstGeom prst="rect">
             <a:avLst/>
@@ -18451,7 +18455,7 @@
               <a:buNone/>
             </a:pPr>
             <a:r>
-              <a:rPr lang="en-US" sz="1320" dirty="0">
+              <a:rPr lang="en-US" sz="1220" dirty="0">
                 <a:solidFill>
                   <a:srgbClr val="17364A"/>
                 </a:solidFill>
@@ -18459,9 +18463,9 @@
                 <a:ea typeface="Aptos" pitchFamily="34" charset="-122"/>
                 <a:cs typeface="Aptos" pitchFamily="34" charset="-120"/>
               </a:rPr>
-              <a:t>Grant and Funding Management for AI Projects matters because AI adoption changes how public health.</a:t>
-            </a:r>
-            <a:endParaRPr lang="en-US" sz="1320" dirty="0"/>
+              <a:t>Grant and Funding Management for AI Projects matters because AI adoption changes.</a:t>
+            </a:r>
+            <a:endParaRPr lang="en-US" sz="1220" dirty="0"/>
           </a:p>
         </p:txBody>
       </p:sp>
@@ -18473,12 +18477,12 @@
         </p:nvSpPr>
         <p:spPr>
           <a:xfrm>
-            <a:off x="7635240" y="2718511"/>
-            <a:ext cx="3474720" cy="1328623"/>
+            <a:off x="7543800" y="2724912"/>
+            <a:ext cx="3611880" cy="1527048"/>
           </a:xfrm>
           <a:prstGeom prst="roundRect">
             <a:avLst>
-              <a:gd name="adj" fmla="val 8259"/>
+              <a:gd name="adj" fmla="val 7186"/>
             </a:avLst>
           </a:prstGeom>
           <a:solidFill>
@@ -18500,24 +18504,26 @@
         </p:nvSpPr>
         <p:spPr>
           <a:xfrm>
-            <a:off x="7799832" y="2846527"/>
-            <a:ext cx="3145536" cy="237744"/>
-          </a:xfrm>
-          <a:prstGeom prst="rect">
-            <a:avLst/>
-          </a:prstGeom>
-          <a:noFill/>
-          <a:ln/>
-        </p:spPr>
-        <p:txBody>
-          <a:bodyPr wrap="square" lIns="0" tIns="0" rIns="0" bIns="0" rtlCol="0" anchor="ctr"/>
-          <a:lstStyle/>
-          <a:p>
-            <a:pPr indent="0" marL="0">
-              <a:buNone/>
-            </a:pPr>
-            <a:r>
-              <a:rPr lang="en-US" sz="1250" b="1" dirty="0">
+            <a:off x="7708392" y="2852928"/>
+            <a:ext cx="3282696" cy="219456"/>
+          </a:xfrm>
+          <a:prstGeom prst="rect">
+            <a:avLst/>
+          </a:prstGeom>
+          <a:noFill/>
+          <a:ln/>
+        </p:spPr>
+        <p:txBody>
+          <a:bodyPr wrap="square" lIns="0" tIns="0" rIns="0" bIns="0" rtlCol="0" anchor="ctr">
+            <a:normAutofit/>
+          </a:bodyPr>
+          <a:lstStyle/>
+          <a:p>
+            <a:pPr indent="0" marL="0">
+              <a:buNone/>
+            </a:pPr>
+            <a:r>
+              <a:rPr lang="en-US" sz="1160" b="1" dirty="0">
                 <a:solidFill>
                   <a:srgbClr val="0068B7"/>
                 </a:solidFill>
@@ -18527,7 +18533,7 @@
               </a:rPr>
               <a:t>Implementation path</a:t>
             </a:r>
-            <a:endParaRPr lang="en-US" sz="1250" dirty="0"/>
+            <a:endParaRPr lang="en-US" sz="1160" dirty="0"/>
           </a:p>
         </p:txBody>
       </p:sp>
@@ -18539,7 +18545,7 @@
         </p:nvSpPr>
         <p:spPr>
           <a:xfrm>
-            <a:off x="8763000" y="3399739"/>
+            <a:off x="8717280" y="3406140"/>
             <a:ext cx="164592" cy="0"/>
           </a:xfrm>
           <a:prstGeom prst="line">
@@ -18562,8 +18568,8 @@
         </p:nvSpPr>
         <p:spPr>
           <a:xfrm>
-            <a:off x="7872984" y="3248863"/>
-            <a:ext cx="890016" cy="301752"/>
+            <a:off x="7781544" y="3255264"/>
+            <a:ext cx="935736" cy="301752"/>
           </a:xfrm>
           <a:prstGeom prst="roundRect">
             <a:avLst>
@@ -18589,8 +18595,8 @@
         </p:nvSpPr>
         <p:spPr>
           <a:xfrm>
-            <a:off x="7909560" y="3322015"/>
-            <a:ext cx="816864" cy="146304"/>
+            <a:off x="7818120" y="3328416"/>
+            <a:ext cx="862584" cy="146304"/>
           </a:xfrm>
           <a:prstGeom prst="rect">
             <a:avLst/>
@@ -18630,7 +18636,7 @@
         </p:nvSpPr>
         <p:spPr>
           <a:xfrm>
-            <a:off x="9817608" y="3399739"/>
+            <a:off x="9817608" y="3406140"/>
             <a:ext cx="164592" cy="0"/>
           </a:xfrm>
           <a:prstGeom prst="line">
@@ -18653,8 +18659,8 @@
         </p:nvSpPr>
         <p:spPr>
           <a:xfrm>
-            <a:off x="8927592" y="3248863"/>
-            <a:ext cx="890016" cy="301752"/>
+            <a:off x="8881872" y="3255264"/>
+            <a:ext cx="935736" cy="301752"/>
           </a:xfrm>
           <a:prstGeom prst="roundRect">
             <a:avLst>
@@ -18680,8 +18686,8 @@
         </p:nvSpPr>
         <p:spPr>
           <a:xfrm>
-            <a:off x="8964168" y="3322015"/>
-            <a:ext cx="816864" cy="146304"/>
+            <a:off x="8918448" y="3328416"/>
+            <a:ext cx="862584" cy="146304"/>
           </a:xfrm>
           <a:prstGeom prst="rect">
             <a:avLst/>
@@ -18721,8 +18727,8 @@
         </p:nvSpPr>
         <p:spPr>
           <a:xfrm>
-            <a:off x="9982200" y="3248863"/>
-            <a:ext cx="890016" cy="301752"/>
+            <a:off x="9982200" y="3255264"/>
+            <a:ext cx="935736" cy="301752"/>
           </a:xfrm>
           <a:prstGeom prst="roundRect">
             <a:avLst>
@@ -18748,8 +18754,8 @@
         </p:nvSpPr>
         <p:spPr>
           <a:xfrm>
-            <a:off x="10018776" y="3322015"/>
-            <a:ext cx="816864" cy="146304"/>
+            <a:off x="10018776" y="3328416"/>
+            <a:ext cx="862584" cy="146304"/>
           </a:xfrm>
           <a:prstGeom prst="rect">
             <a:avLst/>
@@ -18789,8 +18795,8 @@
         </p:nvSpPr>
         <p:spPr>
           <a:xfrm>
-            <a:off x="7854696" y="3742639"/>
-            <a:ext cx="3035808" cy="158191"/>
+            <a:off x="7763256" y="3749040"/>
+            <a:ext cx="3172968" cy="356616"/>
           </a:xfrm>
           <a:prstGeom prst="rect">
             <a:avLst/>
@@ -18808,7 +18814,7 @@
               <a:buNone/>
             </a:pPr>
             <a:r>
-              <a:rPr lang="en-US" sz="1120" dirty="0">
+              <a:rPr lang="en-US" sz="1040" dirty="0">
                 <a:solidFill>
                   <a:srgbClr val="17364A"/>
                 </a:solidFill>
@@ -18816,9 +18822,9 @@
                 <a:ea typeface="Aptos" pitchFamily="34" charset="-122"/>
                 <a:cs typeface="Aptos" pitchFamily="34" charset="-120"/>
               </a:rPr>
-              <a:t>Implementation work should make dependencies, approvals, training, and sustainment visible before launch.</a:t>
-            </a:r>
-            <a:endParaRPr lang="en-US" sz="1120" dirty="0"/>
+              <a:t>Implementation work should make dependencies, approvals, training, and.</a:t>
+            </a:r>
+            <a:endParaRPr lang="en-US" sz="1040" dirty="0"/>
           </a:p>
         </p:txBody>
       </p:sp>
@@ -18830,12 +18836,12 @@
         </p:nvSpPr>
         <p:spPr>
           <a:xfrm>
-            <a:off x="7635240" y="4184294"/>
-            <a:ext cx="3474720" cy="1466698"/>
+            <a:off x="7543800" y="4389120"/>
+            <a:ext cx="3611880" cy="1261872"/>
           </a:xfrm>
           <a:prstGeom prst="roundRect">
             <a:avLst>
-              <a:gd name="adj" fmla="val 7481"/>
+              <a:gd name="adj" fmla="val 8696"/>
             </a:avLst>
           </a:prstGeom>
           <a:solidFill>
@@ -18857,8 +18863,8 @@
         </p:nvSpPr>
         <p:spPr>
           <a:xfrm>
-            <a:off x="7799832" y="4330598"/>
-            <a:ext cx="3145536" cy="256032"/>
+            <a:off x="7708392" y="4517136"/>
+            <a:ext cx="3282696" cy="228600"/>
           </a:xfrm>
           <a:prstGeom prst="rect">
             <a:avLst/>
@@ -18874,7 +18880,7 @@
               <a:buNone/>
             </a:pPr>
             <a:r>
-              <a:rPr lang="en-US" sz="1300" b="1" dirty="0">
+              <a:rPr lang="en-US" sz="1220" b="1" dirty="0">
                 <a:solidFill>
                   <a:srgbClr val="0068B7"/>
                 </a:solidFill>
@@ -18884,7 +18890,7 @@
               </a:rPr>
               <a:t>Next action</a:t>
             </a:r>
-            <a:endParaRPr lang="en-US" sz="1300" dirty="0"/>
+            <a:endParaRPr lang="en-US" sz="1220" dirty="0"/>
           </a:p>
         </p:txBody>
       </p:sp>
@@ -18896,8 +18902,8 @@
         </p:nvSpPr>
         <p:spPr>
           <a:xfrm>
-            <a:off x="7799832" y="4659782"/>
-            <a:ext cx="3145536" cy="899770"/>
+            <a:off x="7708392" y="4828032"/>
+            <a:ext cx="3282696" cy="749808"/>
           </a:xfrm>
           <a:prstGeom prst="rect">
             <a:avLst/>
@@ -18915,7 +18921,7 @@
               <a:buNone/>
             </a:pPr>
             <a:r>
-              <a:rPr lang="en-US" sz="1320" dirty="0">
+              <a:rPr lang="en-US" sz="1220" dirty="0">
                 <a:solidFill>
                   <a:srgbClr val="17364A"/>
                 </a:solidFill>
@@ -18923,9 +18929,9 @@
                 <a:ea typeface="Aptos" pitchFamily="34" charset="-122"/>
                 <a:cs typeface="Aptos" pitchFamily="34" charset="-120"/>
               </a:rPr>
-              <a:t>Use the concept to clarify workflow changes, dependencies, staffing, procurement requirements, training needs, and implementation checkpoints.</a:t>
-            </a:r>
-            <a:endParaRPr lang="en-US" sz="1320" dirty="0"/>
+              <a:t>Use the concept to clarify workflow changes, dependencies, staffing, procurement.</a:t>
+            </a:r>
+            <a:endParaRPr lang="en-US" sz="1220" dirty="0"/>
           </a:p>
         </p:txBody>
       </p:sp>

--- a/downloads/presentations/modules/pmg-310.pptx
+++ b/downloads/presentations/modules/pmg-310.pptx
@@ -11010,7 +11010,7 @@
                 <a:ea typeface="Aptos" pitchFamily="34" charset="-122"/>
                 <a:cs typeface="Aptos" pitchFamily="34" charset="-120"/>
               </a:rPr>
-              <a:t>• 1. What is the strongest evidence that grant and funding management for ai.</a:t>
+              <a:t>1. What is the strongest evidence that grant and funding management for ai.</a:t>
             </a:r>
             <a:endParaRPr lang="en-US" sz="1920" dirty="0"/>
           </a:p>
@@ -11027,7 +11027,7 @@
                 <a:ea typeface="Aptos" pitchFamily="34" charset="-122"/>
                 <a:cs typeface="Aptos" pitchFamily="34" charset="-120"/>
               </a:rPr>
-              <a:t>• 2. What is the best reason to assign an accountability owner?</a:t>
+              <a:t>2. What is the best reason to assign an accountability owner?</a:t>
             </a:r>
             <a:endParaRPr lang="en-US" sz="1920" dirty="0"/>
           </a:p>
@@ -11044,7 +11044,7 @@
                 <a:ea typeface="Aptos" pitchFamily="34" charset="-122"/>
                 <a:cs typeface="Aptos" pitchFamily="34" charset="-120"/>
               </a:rPr>
-              <a:t>• 3. When should an AI-supported workflow be escalated for review?</a:t>
+              <a:t>3. When should an AI-supported workflow be escalated for review?</a:t>
             </a:r>
             <a:endParaRPr lang="en-US" sz="1920" dirty="0"/>
           </a:p>
@@ -11151,7 +11151,7 @@
                 <a:ea typeface="Aptos" pitchFamily="34" charset="-122"/>
                 <a:cs typeface="Aptos" pitchFamily="34" charset="-120"/>
               </a:rPr>
-              <a:t>1. What is the strongest evidence that grant and funding management for ai.</a:t>
+              <a:t>What is the strongest evidence that grant and funding management for ai projects.</a:t>
             </a:r>
             <a:endParaRPr lang="en-US" sz="1220" dirty="0"/>
           </a:p>
@@ -11258,41 +11258,7 @@
                 <a:ea typeface="Aptos" pitchFamily="34" charset="-122"/>
                 <a:cs typeface="Aptos" pitchFamily="34" charset="-120"/>
               </a:rPr>
-              <a:t>1.</a:t>
-            </a:r>
-            <a:endParaRPr lang="en-US" sz="1140" dirty="0"/>
-          </a:p>
-          <a:p>
-            <a:pPr indent="0" marL="0">
-              <a:buNone/>
-            </a:pPr>
-            <a:r>
-              <a:rPr lang="en-US" sz="1140" dirty="0">
-                <a:solidFill>
-                  <a:srgbClr val="17364A"/>
-                </a:solidFill>
-                <a:latin typeface="Aptos" pitchFamily="34" charset="0"/>
-                <a:ea typeface="Aptos" pitchFamily="34" charset="-122"/>
-                <a:cs typeface="Aptos" pitchFamily="34" charset="-120"/>
-              </a:rPr>
               <a:t>What is the strongest evidence that grant and.</a:t>
-            </a:r>
-            <a:endParaRPr lang="en-US" sz="1140" dirty="0"/>
-          </a:p>
-          <a:p>
-            <a:pPr indent="0" marL="0">
-              <a:buNone/>
-            </a:pPr>
-            <a:r>
-              <a:rPr lang="en-US" sz="1140" dirty="0">
-                <a:solidFill>
-                  <a:srgbClr val="17364A"/>
-                </a:solidFill>
-                <a:latin typeface="Aptos" pitchFamily="34" charset="0"/>
-                <a:ea typeface="Aptos" pitchFamily="34" charset="-122"/>
-                <a:cs typeface="Aptos" pitchFamily="34" charset="-120"/>
-              </a:rPr>
-              <a:t>2.</a:t>
             </a:r>
             <a:endParaRPr lang="en-US" sz="1140" dirty="0"/>
           </a:p>
